--- a/答辩PPT.pptx
+++ b/答辩PPT.pptx
@@ -19,7 +19,6 @@
     <p:sldId id="357" r:id="rId22"/>
     <p:sldId id="358" r:id="rId23"/>
     <p:sldId id="359" r:id="rId24"/>
-    <p:sldId id="360" r:id="rId25"/>
     <p:sldId id="334" r:id="rId9"/>
   </p:sldIdLst>
   <p:sldSz cx="12192000" cy="6858000"/>
@@ -808,7 +807,7 @@
           <a:lstStyle/>
           <a:p>
             <a:r>
-              <a:t>【本页逐字稿未覆盖，可一句话带过】我在火车票团队，先参与 AI 主线的火车票 Agent，8 月起转到抢票业务。（团队名称与协作方请核对）</a:t>
+              <a:t>【过渡页，可一句话带过】先看两条主线的核心结果，接下来分别展开。</a:t>
             </a:r>
           </a:p>
         </p:txBody>
@@ -878,7 +877,19 @@
           <a:lstStyle/>
           <a:p>
             <a:r>
-              <a:t>【过渡页，可一句话带过】先看两条主线的核心结果，接下来分别展开。</a:t>
+              <a:t>我的第一条主线是火车票 Agent，它主要负责承接问道分发过来的火车相关问题，我在这个项目里做的是偏基础的工作。Agent 能不能答好，前提是它能准确判断一个问题该不该由火车来回答、具体属于哪一类。所以我主要负责优化意图识别框架，解决“什么属于火车、什么不属于火车”的问题。</a:t>
+            </a:r>
+          </a:p>
+          <a:p/>
+          <a:p>
+            <a:r>
+              <a:t>一期上线前，我把 Agent 基于意图识别框架的分类结果，和算法按业务标签给出的分类结果逐条比对，核对两边不一致的场景，重点看从业务视角判断、算法对而 Agent 错的情况。这说明 Agent 的提示词有漏洞，才会把不属于这一类的 query 纳进来。我针对这些情况，逐条修改对应类别的关键词和分类标准，一期上线前，意图分类准确率从 94.6% 提升到了 98%。上线后，和问道兜底相比，正文完播率提升了 7.7%，说明回答内容更符合用户的需求。</a:t>
+            </a:r>
+          </a:p>
+          <a:p/>
+          <a:p>
+            <a:r>
+              <a:t>二期主要做拒答治理。降低拒答有两个方向：一是提升模型能力，让它能回答目前还答不了的问题；二是治理分发错误。我们是一个垂直于火车的 Agent，有一部分问题根本不属于火车，是被错误分发过来的，这类问题只要调整问道的分发策略就能解决，见效更快。所以我们在持续推进火车能力覆盖的同时，优先治理分发错误。我人工核查了 1,000 多条拒答 query，整理出火车问题的边界，问道据此调整了对火车 Agent 的分发策略，这类拒答的占比从 10.7% 降到了 4.9%。</a:t>
             </a:r>
           </a:p>
         </p:txBody>
@@ -948,19 +959,13 @@
           <a:lstStyle/>
           <a:p>
             <a:r>
-              <a:t>我的第一条主线是火车票 Agent，它主要负责承接问道分发过来的火车相关问题，我在这个项目里做的是偏基础的工作。Agent 能不能答好，前提是它能准确判断一个问题该不该由火车来回答、具体属于哪一类。所以我主要负责优化意图识别框架，解决“什么属于火车、什么不属于火车”的问题。</a:t>
+              <a:t>我的第二条主线是抢票业务，聚焦的是票量。这里分享两个需求，它们有一个共同点：都是我们主动给了用户“可以出票”的承诺，用户也做出了行动，最后却没能出票。</a:t>
             </a:r>
           </a:p>
           <a:p/>
           <a:p>
             <a:r>
-              <a:t>一期上线前，我把 Agent 基于意图识别框架的分类结果，和算法按业务标签给出的分类结果逐条比对，核对两边不一致的场景，重点看从业务视角判断、算法对而 Agent 错的情况。这说明 Agent 的提示词有漏洞，才会把不属于这一类的 query 纳进来。我针对这些情况，逐条修改对应类别的关键词和分类标准，一期上线前，意图分类准确率从 94.6% 提升到了 98%。上线后，和问道兜底相比，正文完播率提升了 7.7%，说明回答内容更符合用户的需求。</a:t>
-            </a:r>
-          </a:p>
-          <a:p/>
-          <a:p>
-            <a:r>
-              <a:t>二期主要做拒答治理。降低拒答有两个方向：一是提升模型能力，让它能回答目前还答不了的问题；二是治理分发错误。我们是一个垂直于火车的 Agent，有一部分问题根本不属于火车，是被错误分发过来的，这类问题只要调整问道的分发策略就能解决，见效更快。所以我们在持续推进火车能力覆盖的同时，优先治理分发错误。我人工核查了 1,000 多条拒答 query，整理出火车问题的边界，问道据此调整了对火车 Agent 的分发策略，这类拒答的占比从 10.7% 降到了 4.9%。</a:t>
+              <a:t>第一个是智能第二程。用户只抢到第一程时，系统会自动帮他生成第二程的捡漏单并完成扣位，再通过外呼或消息通知他确认出票。按 KANO 模型看，这是一个兴奋型需求，做到了是惊喜，做不到用户也不会抱怨；但一旦我们通知了用户、用户也付了款，他就会默认一定能出票。而受风控限制，付款环节容易失败，这个场景的出票率只有 72.8%。我们把这一步的付款统一改为直付，付款成功就能出票，出票率提升到 94%，预估年化票量增加 7 万张。</a:t>
             </a:r>
           </a:p>
         </p:txBody>
@@ -1030,13 +1035,7 @@
           <a:lstStyle/>
           <a:p>
             <a:r>
-              <a:t>我的第二条主线是抢票业务，聚焦的是票量。这里分享两个需求，它们有一个共同点：都是我们主动给了用户“可以出票”的承诺，用户也做出了行动，最后却没能出票。</a:t>
-            </a:r>
-          </a:p>
-          <a:p/>
-          <a:p>
-            <a:r>
-              <a:t>第一个是智能第二程。用户只抢到第一程时，系统会自动帮他生成第二程的捡漏单并完成扣位，再通过外呼或消息通知他确认出票。按 KANO 模型看，这是一个兴奋型需求，做到了是惊喜，做不到用户也不会抱怨；但一旦我们通知了用户、用户也付了款，他就会默认一定能出票。而受风控限制，付款环节容易失败，这个场景的出票率只有 72.8%。我们把这一步的付款统一改为直付，付款成功就能出票，出票率提升到 94%，预估年化票量增加 7 万张。</a:t>
+              <a:t>第二个是放开抢转买。在抢必走和 YOYO 有票方案的页面，我们会向用户推荐可以立即出票的替代方案。但用户妥协接受之后，之前走的仍然是抢票的捡漏扣位，出票概率【待补充】，用户的预期没能被满足，体验较差。所以我们为支付宝（非黑名单）订单放开了抢转买，用户接受方案后直接走买票接口出票。【上线后的增量，待补】</a:t>
             </a:r>
           </a:p>
         </p:txBody>
@@ -1106,7 +1105,7 @@
           <a:lstStyle/>
           <a:p>
             <a:r>
-              <a:t>第二个是放开抢转买。在抢必走和 YOYO 有票方案的页面，我们会向用户推荐可以立即出票的替代方案。但用户妥协接受之后，之前走的仍然是抢票的捡漏扣位，出票概率【待补充】，用户的预期没能被满足，体验较差。所以我们为支付宝（非黑名单）订单放开了抢转买，用户接受方案后直接走买票接口出票。【上线后的增量，待补】</a:t>
+              <a:t>这两个需求让我意识到两件事。第一，这些订单的用户都已经付了款或做出了妥协，是出票意愿最强的一批人，在这里流失对票量最可惜，修复的回报也最直接。第二，两个问题的根源是一样的：用户的状态已经从“等待”变成了“确认”，后台却还沿用抢票订单原来的链路。所以在每一个让用户做决定的节点，都要检查后面的链路能不能兑现这个决定。</a:t>
             </a:r>
           </a:p>
         </p:txBody>
@@ -1176,7 +1175,7 @@
           <a:lstStyle/>
           <a:p>
             <a:r>
-              <a:t>这两个需求让我意识到两件事。第一，这些订单的用户都已经付了款或做出了妥协，是出票意愿最强的一批人，在这里流失对票量最可惜，修复的回报也最直接。第二，两个问题的根源是一样的：用户的状态已经从“等待”变成了“确认”，后台却还沿用抢票订单原来的链路。所以在每一个让用户做决定的节点，都要检查后面的链路能不能兑现这个决定。</a:t>
+              <a:t>在回收智能第二程的数据时，我发现 BI 取出来的订单几乎都是代付出票。这个需求本身就是把这些订单改成直付，数据却显示代付，说明口径可能有问题。我拿订单后台的直付标记找开发核实，再和 BI、数仓一起排查，原因是数仓判断直付依赖“候补直付”这个业务标记，而捡漏、智能这些后来接入的直付场景没有这个标记，全部被判成了代付。最后改为统一用订单上的直付出票标记来判断，数仓新增了“是否直付出票”字段。口径修正后，智能第二程的效果才能被正确评估，财务的结算报表也随之修正，团队之后可以直接复用。这件事让我意识到，数据口径会随着业务演进而过期：直付场景是陆续接入的，判断逻辑却停在了最早的候补直付。之后业务新增场景时，我会先确认相关的数据标记有没有跟着更新。</a:t>
             </a:r>
           </a:p>
         </p:txBody>
@@ -1246,7 +1245,13 @@
           <a:lstStyle/>
           <a:p>
             <a:r>
-              <a:t>在回收智能第二程的数据时，我发现 BI 取出来的订单几乎都是代付出票。这个需求本身就是把这些订单改成直付，数据却显示代付，说明口径可能有问题。我拿订单后台的直付标记找开发核实，再和 BI、数仓一起排查，原因是数仓判断直付依赖“候补直付”这个业务标记，而捡漏、智能这些后来接入的直付场景没有这个标记，全部被判成了代付。最后改为统一用订单上的直付出票标记来判断，数仓新增了“是否直付出票”字段。口径修正后，智能第二程的效果才能被正确评估，财务的结算报表也随之修正，团队之后可以直接复用。这件事让我意识到，数据口径会随着业务演进而过期：直付场景是陆续接入的，判断逻辑却停在了最早的候补直付。之后业务新增场景时，我会先确认相关的数据标记有没有跟着更新。</a:t>
+              <a:t>回看这几个月，两条主线给我的收获不太一样。在火车票 Agent 上，我做的更多是模型侧的质量工作，离业务结果比较远；到了抢票业务，我开始直接对票量负责，也逐渐学会从业务指标倒推要做什么。</a:t>
+            </a:r>
+          </a:p>
+          <a:p/>
+          <a:p>
+            <a:r>
+              <a:t>这也让我对 AI 产品有了更具体的理解。在小红书时，模型本身就是产品，我的工作是拓展它的能力边界、限制它的行为边界，衡量的是模型表现得好不好。到了携程，AI 是服务业务的手段：边界由业务来定，比如什么问题属于火车、什么不属于；形态要贴合用户的习惯，二期把对话改成直接操作列表页后，票量明显提升；最终衡量的是票量这样的业务结果。</a:t>
             </a:r>
           </a:p>
         </p:txBody>
@@ -1272,82 +1277,6 @@
 </file>
 
 <file path=ppt/notesSlides/notesSlide17.xml><?xml version="1.0" encoding="utf-8"?>
-<p:notes xmlns:a="http://schemas.openxmlformats.org/drawingml/2006/main" xmlns:p="http://schemas.openxmlformats.org/presentationml/2006/main" xmlns:r="http://schemas.openxmlformats.org/officeDocument/2006/relationships">
-  <p:cSld>
-    <p:spTree>
-      <p:nvGrpSpPr>
-        <p:cNvPr id="1" name=""/>
-        <p:cNvGrpSpPr/>
-        <p:nvPr/>
-      </p:nvGrpSpPr>
-      <p:grpSpPr>
-        <a:xfrm>
-          <a:off x="0" y="0"/>
-          <a:ext cx="0" cy="0"/>
-          <a:chOff x="0" y="0"/>
-          <a:chExt cx="0" cy="0"/>
-        </a:xfrm>
-      </p:grpSpPr>
-      <p:sp>
-        <p:nvSpPr>
-          <p:cNvPr id="2" name="Slide Image Placeholder 1"/>
-          <p:cNvSpPr>
-            <a:spLocks noGrp="1"/>
-          </p:cNvSpPr>
-          <p:nvPr>
-            <p:ph type="sldImg" idx="2"/>
-          </p:nvPr>
-        </p:nvSpPr>
-        <p:spPr/>
-      </p:sp>
-      <p:sp>
-        <p:nvSpPr>
-          <p:cNvPr id="3" name="Notes Placeholder 2"/>
-          <p:cNvSpPr>
-            <a:spLocks noGrp="1"/>
-          </p:cNvSpPr>
-          <p:nvPr>
-            <p:ph type="body" idx="3" sz="quarter"/>
-          </p:nvPr>
-        </p:nvSpPr>
-        <p:spPr/>
-        <p:txBody>
-          <a:bodyPr/>
-          <a:lstStyle/>
-          <a:p>
-            <a:r>
-              <a:t>回看这几个月，两条主线给我的收获不太一样。在火车票 Agent 上，我做的更多是模型侧的质量工作，离业务结果比较远；到了抢票业务，我开始直接对票量负责，也逐渐学会从业务指标倒推要做什么。</a:t>
-            </a:r>
-          </a:p>
-          <a:p/>
-          <a:p>
-            <a:r>
-              <a:t>这也让我对 AI 产品有了更具体的理解。在小红书时，模型本身就是产品，我的工作是拓展它的能力边界、限制它的行为边界，衡量的是模型表现得好不好。到了携程，AI 是服务业务的手段：边界由业务来定，比如什么问题属于火车、什么不属于；形态要贴合用户的习惯，二期把对话改成直接操作列表页后，票量明显提升；最终衡量的是票量这样的业务结果。</a:t>
-            </a:r>
-          </a:p>
-        </p:txBody>
-      </p:sp>
-      <p:sp>
-        <p:nvSpPr>
-          <p:cNvPr id="4" name="Slide Number Placeholder 3"/>
-          <p:cNvSpPr>
-            <a:spLocks noGrp="1"/>
-          </p:cNvSpPr>
-          <p:nvPr>
-            <p:ph type="sldNum" idx="5" sz="quarter"/>
-          </p:nvPr>
-        </p:nvSpPr>
-        <p:spPr/>
-      </p:sp>
-    </p:spTree>
-  </p:cSld>
-  <p:clrMapOvr>
-    <a:masterClrMapping/>
-  </p:clrMapOvr>
-</p:notes>
-</file>
-
-<file path=ppt/notesSlides/notesSlide18.xml><?xml version="1.0" encoding="utf-8"?>
 <p:notes xmlns:a="http://schemas.openxmlformats.org/drawingml/2006/main" xmlns:p="http://schemas.openxmlformats.org/presentationml/2006/main" xmlns:r="http://schemas.openxmlformats.org/officeDocument/2006/relationships">
   <p:cSld>
     <p:spTree>
@@ -6994,7 +6923,7 @@
                 <a:latin typeface="微软雅黑" panose="020B0503020204020204" pitchFamily="34" charset="-122"/>
                 <a:ea typeface="微软雅黑" panose="020B0503020204020204" pitchFamily="34" charset="-122"/>
               </a:rPr>
-              <a:t>2、组织架构 / 在组织中的位置</a:t>
+              <a:t>2、主要项目</a:t>
             </a:r>
             <a:endParaRPr lang="zh-CN" altLang="en-US" sz="2400" b="1" dirty="0">
               <a:solidFill>
@@ -7038,7 +6967,7 @@
                 <a:ea typeface="微软雅黑"/>
                 <a:cs typeface="微软雅黑"/>
               </a:rPr>
-              <a:t>在火车票团队中，先后参与 AI 与抢票两条主线</a:t>
+              <a:t>两条主线：AI 线让 Agent“判断对”，抢票线让用户“出得了票”</a:t>
             </a:r>
           </a:p>
         </p:txBody>
@@ -7051,253 +6980,8 @@
         </p:nvSpPr>
         <p:spPr>
           <a:xfrm>
-            <a:off x="3995928" y="1554480"/>
-            <a:ext cx="4206240" cy="685800"/>
-          </a:xfrm>
-          <a:prstGeom prst="roundRect">
-            <a:avLst>
-              <a:gd name="adj" fmla="val 6000"/>
-            </a:avLst>
-          </a:prstGeom>
-          <a:solidFill>
-            <a:srgbClr val="287DFA"/>
-          </a:solidFill>
-          <a:ln>
-            <a:noFill/>
-          </a:ln>
-          <a:effectLst/>
-        </p:spPr>
-        <p:style>
-          <a:lnRef idx="1">
-            <a:schemeClr val="accent1"/>
-          </a:lnRef>
-          <a:fillRef idx="3">
-            <a:schemeClr val="accent1"/>
-          </a:fillRef>
-          <a:effectRef idx="2">
-            <a:schemeClr val="accent1"/>
-          </a:effectRef>
-          <a:fontRef idx="minor">
-            <a:schemeClr val="lt1"/>
-          </a:fontRef>
-        </p:style>
-        <p:txBody>
-          <a:bodyPr rtlCol="0" anchor="ctr"/>
-          <a:lstStyle/>
-          <a:p/>
-        </p:txBody>
-      </p:sp>
-      <p:pic>
-        <p:nvPicPr>
-          <p:cNvPr id="5" name="Picture 4" descr="FaBuilding_w.png"/>
-          <p:cNvPicPr>
-            <a:picLocks noChangeAspect="1"/>
-          </p:cNvPicPr>
-          <p:nvPr/>
-        </p:nvPicPr>
-        <p:blipFill>
-          <a:blip r:embed="rId3"/>
-          <a:stretch>
-            <a:fillRect/>
-          </a:stretch>
-        </p:blipFill>
-        <p:spPr>
-          <a:xfrm>
-            <a:off x="4206240" y="1709928"/>
-            <a:ext cx="384048" cy="384048"/>
-          </a:xfrm>
-          <a:prstGeom prst="rect">
-            <a:avLst/>
-          </a:prstGeom>
-        </p:spPr>
-      </p:pic>
-      <p:sp>
-        <p:nvSpPr>
-          <p:cNvPr id="6" name="TextBox 5"/>
-          <p:cNvSpPr txBox="1"/>
-          <p:nvPr/>
-        </p:nvSpPr>
-        <p:spPr>
-          <a:xfrm>
-            <a:off x="4709160" y="1554480"/>
-            <a:ext cx="3383280" cy="685800"/>
-          </a:xfrm>
-          <a:prstGeom prst="rect">
-            <a:avLst/>
-          </a:prstGeom>
-          <a:noFill/>
-        </p:spPr>
-        <p:txBody>
-          <a:bodyPr wrap="square" lIns="0" rIns="0" tIns="0" bIns="0" anchor="ctr">
-            <a:spAutoFit/>
-          </a:bodyPr>
-          <a:lstStyle/>
-          <a:p>
-            <a:pPr algn="l"/>
-            <a:r>
-              <a:rPr sz="1800" b="1">
-                <a:solidFill>
-                  <a:srgbClr val="FFFFFF"/>
-                </a:solidFill>
-                <a:latin typeface="微软雅黑"/>
-                <a:ea typeface="微软雅黑"/>
-                <a:cs typeface="微软雅黑"/>
-              </a:rPr>
-              <a:t>携程 · 火车票团队</a:t>
-            </a:r>
-          </a:p>
-        </p:txBody>
-      </p:sp>
-      <p:cxnSp>
-        <p:nvCxnSpPr>
-          <p:cNvPr id="7" name="Connector 6"/>
-          <p:cNvCxnSpPr/>
-          <p:nvPr/>
-        </p:nvCxnSpPr>
-        <p:spPr>
-          <a:xfrm>
-            <a:off x="6099048" y="2240280"/>
-            <a:ext cx="0" cy="365760"/>
-          </a:xfrm>
-          <a:prstGeom prst="line">
-            <a:avLst/>
-          </a:prstGeom>
-          <a:ln w="25400">
-            <a:solidFill>
-              <a:srgbClr val="287DFA"/>
-            </a:solidFill>
-          </a:ln>
-        </p:spPr>
-        <p:style>
-          <a:lnRef idx="2">
-            <a:schemeClr val="accent1"/>
-          </a:lnRef>
-          <a:fillRef idx="0">
-            <a:schemeClr val="accent1"/>
-          </a:fillRef>
-          <a:effectRef idx="1">
-            <a:schemeClr val="accent1"/>
-          </a:effectRef>
-          <a:fontRef idx="minor">
-            <a:schemeClr val="tx1"/>
-          </a:fontRef>
-        </p:style>
-      </p:cxnSp>
-      <p:cxnSp>
-        <p:nvCxnSpPr>
-          <p:cNvPr id="8" name="Connector 7"/>
-          <p:cNvCxnSpPr/>
-          <p:nvPr/>
-        </p:nvCxnSpPr>
-        <p:spPr>
-          <a:xfrm>
-            <a:off x="3108960" y="2606040"/>
-            <a:ext cx="5971032" cy="0"/>
-          </a:xfrm>
-          <a:prstGeom prst="line">
-            <a:avLst/>
-          </a:prstGeom>
-          <a:ln w="25400">
-            <a:solidFill>
-              <a:srgbClr val="287DFA"/>
-            </a:solidFill>
-          </a:ln>
-        </p:spPr>
-        <p:style>
-          <a:lnRef idx="2">
-            <a:schemeClr val="accent1"/>
-          </a:lnRef>
-          <a:fillRef idx="0">
-            <a:schemeClr val="accent1"/>
-          </a:fillRef>
-          <a:effectRef idx="1">
-            <a:schemeClr val="accent1"/>
-          </a:effectRef>
-          <a:fontRef idx="minor">
-            <a:schemeClr val="tx1"/>
-          </a:fontRef>
-        </p:style>
-      </p:cxnSp>
-      <p:cxnSp>
-        <p:nvCxnSpPr>
-          <p:cNvPr id="9" name="Connector 8"/>
-          <p:cNvCxnSpPr/>
-          <p:nvPr/>
-        </p:nvCxnSpPr>
-        <p:spPr>
-          <a:xfrm>
-            <a:off x="3108960" y="2606040"/>
-            <a:ext cx="0" cy="320040"/>
-          </a:xfrm>
-          <a:prstGeom prst="line">
-            <a:avLst/>
-          </a:prstGeom>
-          <a:ln w="25400">
-            <a:solidFill>
-              <a:srgbClr val="287DFA"/>
-            </a:solidFill>
-          </a:ln>
-        </p:spPr>
-        <p:style>
-          <a:lnRef idx="2">
-            <a:schemeClr val="accent1"/>
-          </a:lnRef>
-          <a:fillRef idx="0">
-            <a:schemeClr val="accent1"/>
-          </a:fillRef>
-          <a:effectRef idx="1">
-            <a:schemeClr val="accent1"/>
-          </a:effectRef>
-          <a:fontRef idx="minor">
-            <a:schemeClr val="tx1"/>
-          </a:fontRef>
-        </p:style>
-      </p:cxnSp>
-      <p:cxnSp>
-        <p:nvCxnSpPr>
-          <p:cNvPr id="10" name="Connector 9"/>
-          <p:cNvCxnSpPr/>
-          <p:nvPr/>
-        </p:nvCxnSpPr>
-        <p:spPr>
-          <a:xfrm>
-            <a:off x="9079992" y="2606040"/>
-            <a:ext cx="0" cy="320040"/>
-          </a:xfrm>
-          <a:prstGeom prst="line">
-            <a:avLst/>
-          </a:prstGeom>
-          <a:ln w="25400">
-            <a:solidFill>
-              <a:srgbClr val="287DFA"/>
-            </a:solidFill>
-          </a:ln>
-        </p:spPr>
-        <p:style>
-          <a:lnRef idx="2">
-            <a:schemeClr val="accent1"/>
-          </a:lnRef>
-          <a:fillRef idx="0">
-            <a:schemeClr val="accent1"/>
-          </a:fillRef>
-          <a:effectRef idx="1">
-            <a:schemeClr val="accent1"/>
-          </a:effectRef>
-          <a:fontRef idx="minor">
-            <a:schemeClr val="tx1"/>
-          </a:fontRef>
-        </p:style>
-      </p:cxnSp>
-      <p:sp>
-        <p:nvSpPr>
-          <p:cNvPr id="11" name="Rounded Rectangle 10"/>
-          <p:cNvSpPr/>
-          <p:nvPr/>
-        </p:nvSpPr>
-        <p:spPr>
-          <a:xfrm>
-            <a:off x="548640" y="2926080"/>
-            <a:ext cx="5120640" cy="3154680"/>
+            <a:off x="457200" y="1554480"/>
+            <a:ext cx="5486400" cy="4526280"/>
           </a:xfrm>
           <a:prstGeom prst="roundRect">
             <a:avLst>
@@ -7336,13 +7020,13 @@
       </p:sp>
       <p:sp>
         <p:nvSpPr>
-          <p:cNvPr id="12" name="icon-circle"/>
+          <p:cNvPr id="5" name="icon-circle"/>
           <p:cNvSpPr/>
           <p:nvPr/>
         </p:nvSpPr>
         <p:spPr>
           <a:xfrm>
-            <a:off x="822959" y="3154680"/>
+            <a:off x="777240" y="1783080"/>
             <a:ext cx="685800" cy="685800"/>
           </a:xfrm>
           <a:prstGeom prst="ellipse">
@@ -7378,21 +7062,21 @@
       </p:sp>
       <p:pic>
         <p:nvPicPr>
-          <p:cNvPr id="13" name="Picture 12" descr="FaRobot_w.png"/>
+          <p:cNvPr id="6" name="Picture 5" descr="FaRobot_w.png"/>
           <p:cNvPicPr>
             <a:picLocks noChangeAspect="1"/>
           </p:cNvPicPr>
           <p:nvPr/>
         </p:nvPicPr>
         <p:blipFill>
-          <a:blip r:embed="rId4"/>
+          <a:blip r:embed="rId3"/>
           <a:stretch>
             <a:fillRect/>
           </a:stretch>
         </p:blipFill>
         <p:spPr>
           <a:xfrm>
-            <a:off x="994409" y="3326130"/>
+            <a:off x="948690" y="1954530"/>
             <a:ext cx="342900" cy="342900"/>
           </a:xfrm>
           <a:prstGeom prst="rect">
@@ -7402,14 +7086,14 @@
       </p:pic>
       <p:sp>
         <p:nvSpPr>
-          <p:cNvPr id="14" name="TextBox 13"/>
+          <p:cNvPr id="7" name="TextBox 6"/>
           <p:cNvSpPr txBox="1"/>
           <p:nvPr/>
         </p:nvSpPr>
         <p:spPr>
           <a:xfrm>
-            <a:off x="1691640" y="3154680"/>
-            <a:ext cx="3840480" cy="411480"/>
+            <a:off x="1645920" y="1783080"/>
+            <a:ext cx="4114800" cy="685800"/>
           </a:xfrm>
           <a:prstGeom prst="rect">
             <a:avLst/>
@@ -7417,14 +7101,14 @@
           <a:noFill/>
         </p:spPr>
         <p:txBody>
-          <a:bodyPr wrap="square" lIns="0" rIns="0" tIns="0" bIns="0" anchor="t">
+          <a:bodyPr wrap="square" lIns="0" rIns="0" tIns="0" bIns="0" anchor="ctr">
             <a:spAutoFit/>
           </a:bodyPr>
           <a:lstStyle/>
           <a:p>
             <a:pPr algn="l"/>
             <a:r>
-              <a:rPr sz="1800" b="1">
+              <a:rPr sz="2000" b="1">
                 <a:solidFill>
                   <a:srgbClr val="15315E"/>
                 </a:solidFill>
@@ -7432,21 +7116,67 @@
                 <a:ea typeface="微软雅黑"/>
                 <a:cs typeface="微软雅黑"/>
               </a:rPr>
-              <a:t>AI 主线 · 火车票 Agent</a:t>
+              <a:t>火车票 Agent · 意图识别</a:t>
             </a:r>
           </a:p>
         </p:txBody>
       </p:sp>
       <p:sp>
         <p:nvSpPr>
-          <p:cNvPr id="15" name="TextBox 14"/>
+          <p:cNvPr id="8" name="Rounded Rectangle 7"/>
+          <p:cNvSpPr/>
+          <p:nvPr/>
+        </p:nvSpPr>
+        <p:spPr>
+          <a:xfrm>
+            <a:off x="777240" y="2788920"/>
+            <a:ext cx="4846320" cy="1371600"/>
+          </a:xfrm>
+          <a:prstGeom prst="roundRect">
+            <a:avLst>
+              <a:gd name="adj" fmla="val 6000"/>
+            </a:avLst>
+          </a:prstGeom>
+          <a:solidFill>
+            <a:srgbClr val="FFFFFF"/>
+          </a:solidFill>
+          <a:ln w="12700">
+            <a:solidFill>
+              <a:srgbClr val="D3E2FB"/>
+            </a:solidFill>
+          </a:ln>
+          <a:effectLst/>
+        </p:spPr>
+        <p:style>
+          <a:lnRef idx="1">
+            <a:schemeClr val="accent1"/>
+          </a:lnRef>
+          <a:fillRef idx="3">
+            <a:schemeClr val="accent1"/>
+          </a:fillRef>
+          <a:effectRef idx="2">
+            <a:schemeClr val="accent1"/>
+          </a:effectRef>
+          <a:fontRef idx="minor">
+            <a:schemeClr val="lt1"/>
+          </a:fontRef>
+        </p:style>
+        <p:txBody>
+          <a:bodyPr rtlCol="0" anchor="ctr"/>
+          <a:lstStyle/>
+          <a:p/>
+        </p:txBody>
+      </p:sp>
+      <p:sp>
+        <p:nvSpPr>
+          <p:cNvPr id="9" name="TextBox 8"/>
           <p:cNvSpPr txBox="1"/>
           <p:nvPr/>
         </p:nvSpPr>
         <p:spPr>
           <a:xfrm>
-            <a:off x="1691640" y="3566160"/>
-            <a:ext cx="3840480" cy="320040"/>
+            <a:off x="1005840" y="2898648"/>
+            <a:ext cx="4480560" cy="640080"/>
           </a:xfrm>
           <a:prstGeom prst="rect">
             <a:avLst/>
@@ -7460,6 +7190,54 @@
           <a:lstStyle/>
           <a:p>
             <a:pPr algn="l"/>
+            <a:r>
+              <a:rPr sz="3400" b="1">
+                <a:solidFill>
+                  <a:srgbClr val="287DFA"/>
+                </a:solidFill>
+                <a:latin typeface="微软雅黑"/>
+                <a:ea typeface="微软雅黑"/>
+                <a:cs typeface="微软雅黑"/>
+              </a:rPr>
+              <a:t>94.6% → 98%</a:t>
+            </a:r>
+          </a:p>
+        </p:txBody>
+      </p:sp>
+      <p:sp>
+        <p:nvSpPr>
+          <p:cNvPr id="10" name="TextBox 9"/>
+          <p:cNvSpPr txBox="1"/>
+          <p:nvPr/>
+        </p:nvSpPr>
+        <p:spPr>
+          <a:xfrm>
+            <a:off x="1005840" y="3566160"/>
+            <a:ext cx="4480560" cy="320040"/>
+          </a:xfrm>
+          <a:prstGeom prst="rect">
+            <a:avLst/>
+          </a:prstGeom>
+          <a:noFill/>
+        </p:spPr>
+        <p:txBody>
+          <a:bodyPr wrap="square" lIns="0" rIns="0" tIns="0" bIns="0" anchor="t">
+            <a:spAutoFit/>
+          </a:bodyPr>
+          <a:lstStyle/>
+          <a:p>
+            <a:pPr algn="l"/>
+            <a:r>
+              <a:rPr sz="1400" b="1">
+                <a:solidFill>
+                  <a:srgbClr val="3D4757"/>
+                </a:solidFill>
+                <a:latin typeface="微软雅黑"/>
+                <a:ea typeface="微软雅黑"/>
+                <a:cs typeface="微软雅黑"/>
+              </a:rPr>
+              <a:t>意图分类准确率</a:t>
+            </a:r>
             <a:r>
               <a:rPr sz="1200" b="0">
                 <a:solidFill>
@@ -7469,110 +7247,25 @@
                 <a:ea typeface="微软雅黑"/>
                 <a:cs typeface="微软雅黑"/>
               </a:rPr>
-              <a:t>2026.4 – 2026.8</a:t>
+              <a:t>　一期上线前</a:t>
             </a:r>
           </a:p>
         </p:txBody>
       </p:sp>
       <p:sp>
         <p:nvSpPr>
-          <p:cNvPr id="16" name="TextBox 15"/>
-          <p:cNvSpPr txBox="1"/>
-          <p:nvPr/>
-        </p:nvSpPr>
-        <p:spPr>
-          <a:xfrm>
-            <a:off x="822959" y="4160520"/>
-            <a:ext cx="4572000" cy="320040"/>
-          </a:xfrm>
-          <a:prstGeom prst="rect">
-            <a:avLst/>
-          </a:prstGeom>
-          <a:noFill/>
-        </p:spPr>
-        <p:txBody>
-          <a:bodyPr wrap="square" lIns="0" rIns="0" tIns="0" bIns="0" anchor="t">
-            <a:spAutoFit/>
-          </a:bodyPr>
-          <a:lstStyle/>
-          <a:p>
-            <a:pPr algn="l"/>
-            <a:r>
-              <a:rPr sz="1400" b="1">
-                <a:solidFill>
-                  <a:srgbClr val="287DFA"/>
-                </a:solidFill>
-                <a:latin typeface="微软雅黑"/>
-                <a:ea typeface="微软雅黑"/>
-                <a:cs typeface="微软雅黑"/>
-              </a:rPr>
-              <a:t>我的角色　</a:t>
-            </a:r>
-            <a:r>
-              <a:rPr sz="1400" b="0">
-                <a:solidFill>
-                  <a:srgbClr val="3D4757"/>
-                </a:solidFill>
-                <a:latin typeface="微软雅黑"/>
-                <a:ea typeface="微软雅黑"/>
-                <a:cs typeface="微软雅黑"/>
-              </a:rPr>
-              <a:t>意图识别框架优化、拒答治理</a:t>
-            </a:r>
-          </a:p>
-        </p:txBody>
-      </p:sp>
-      <p:sp>
-        <p:nvSpPr>
-          <p:cNvPr id="17" name="TextBox 16"/>
-          <p:cNvSpPr txBox="1"/>
-          <p:nvPr/>
-        </p:nvSpPr>
-        <p:spPr>
-          <a:xfrm>
-            <a:off x="822959" y="4709160"/>
-            <a:ext cx="4572000" cy="320040"/>
-          </a:xfrm>
-          <a:prstGeom prst="rect">
-            <a:avLst/>
-          </a:prstGeom>
-          <a:noFill/>
-        </p:spPr>
-        <p:txBody>
-          <a:bodyPr wrap="square" lIns="0" rIns="0" tIns="0" bIns="0" anchor="t">
-            <a:spAutoFit/>
-          </a:bodyPr>
-          <a:lstStyle/>
-          <a:p>
-            <a:pPr algn="l"/>
-            <a:r>
-              <a:rPr sz="1400" b="1">
-                <a:solidFill>
-                  <a:srgbClr val="287DFA"/>
-                </a:solidFill>
-                <a:latin typeface="微软雅黑"/>
-                <a:ea typeface="微软雅黑"/>
-                <a:cs typeface="微软雅黑"/>
-              </a:rPr>
-              <a:t>主要协作方</a:t>
-            </a:r>
-          </a:p>
-        </p:txBody>
-      </p:sp>
-      <p:sp>
-        <p:nvSpPr>
-          <p:cNvPr id="18" name="Rounded Rectangle 17"/>
+          <p:cNvPr id="11" name="Rounded Rectangle 10"/>
           <p:cNvSpPr/>
           <p:nvPr/>
         </p:nvSpPr>
         <p:spPr>
           <a:xfrm>
-            <a:off x="822959" y="5120640"/>
-            <a:ext cx="1417320" cy="548640"/>
+            <a:off x="777240" y="4389120"/>
+            <a:ext cx="4846320" cy="1371600"/>
           </a:xfrm>
           <a:prstGeom prst="roundRect">
             <a:avLst>
-              <a:gd name="adj" fmla="val 30000"/>
+              <a:gd name="adj" fmla="val 6000"/>
             </a:avLst>
           </a:prstGeom>
           <a:solidFill>
@@ -7607,14 +7300,14 @@
       </p:sp>
       <p:sp>
         <p:nvSpPr>
-          <p:cNvPr id="19" name="TextBox 18"/>
+          <p:cNvPr id="12" name="TextBox 11"/>
           <p:cNvSpPr txBox="1"/>
           <p:nvPr/>
         </p:nvSpPr>
         <p:spPr>
           <a:xfrm>
-            <a:off x="822959" y="5120640"/>
-            <a:ext cx="1417320" cy="548640"/>
+            <a:off x="1005840" y="4498848"/>
+            <a:ext cx="4480560" cy="640080"/>
           </a:xfrm>
           <a:prstGeom prst="rect">
             <a:avLst/>
@@ -7622,14 +7315,51 @@
           <a:noFill/>
         </p:spPr>
         <p:txBody>
-          <a:bodyPr wrap="square" lIns="0" rIns="0" tIns="0" bIns="0" anchor="ctr">
+          <a:bodyPr wrap="square" lIns="0" rIns="0" tIns="0" bIns="0" anchor="t">
             <a:spAutoFit/>
           </a:bodyPr>
           <a:lstStyle/>
           <a:p>
-            <a:pPr algn="ctr"/>
+            <a:pPr algn="l"/>
             <a:r>
-              <a:rPr sz="1200" b="0">
+              <a:rPr sz="3400" b="1">
+                <a:solidFill>
+                  <a:srgbClr val="287DFA"/>
+                </a:solidFill>
+                <a:latin typeface="微软雅黑"/>
+                <a:ea typeface="微软雅黑"/>
+                <a:cs typeface="微软雅黑"/>
+              </a:rPr>
+              <a:t>10.7% → 4.9%</a:t>
+            </a:r>
+          </a:p>
+        </p:txBody>
+      </p:sp>
+      <p:sp>
+        <p:nvSpPr>
+          <p:cNvPr id="13" name="TextBox 12"/>
+          <p:cNvSpPr txBox="1"/>
+          <p:nvPr/>
+        </p:nvSpPr>
+        <p:spPr>
+          <a:xfrm>
+            <a:off x="1005840" y="5166359"/>
+            <a:ext cx="4480560" cy="320040"/>
+          </a:xfrm>
+          <a:prstGeom prst="rect">
+            <a:avLst/>
+          </a:prstGeom>
+          <a:noFill/>
+        </p:spPr>
+        <p:txBody>
+          <a:bodyPr wrap="square" lIns="0" rIns="0" tIns="0" bIns="0" anchor="t">
+            <a:spAutoFit/>
+          </a:bodyPr>
+          <a:lstStyle/>
+          <a:p>
+            <a:pPr algn="l"/>
+            <a:r>
+              <a:rPr sz="1400" b="1">
                 <a:solidFill>
                   <a:srgbClr val="3D4757"/>
                 </a:solidFill>
@@ -7637,25 +7367,185 @@
                 <a:ea typeface="微软雅黑"/>
                 <a:cs typeface="微软雅黑"/>
               </a:rPr>
-              <a:t>问道分发侧</a:t>
+              <a:t>错误分发导致的拒答占比</a:t>
+            </a:r>
+            <a:r>
+              <a:rPr sz="1200" b="0">
+                <a:solidFill>
+                  <a:srgbClr val="7A8599"/>
+                </a:solidFill>
+                <a:latin typeface="微软雅黑"/>
+                <a:ea typeface="微软雅黑"/>
+                <a:cs typeface="微软雅黑"/>
+              </a:rPr>
+              <a:t>　二期分发策略调整后</a:t>
             </a:r>
           </a:p>
         </p:txBody>
       </p:sp>
       <p:sp>
         <p:nvSpPr>
-          <p:cNvPr id="20" name="Rounded Rectangle 19"/>
+          <p:cNvPr id="14" name="Rounded Rectangle 13"/>
           <p:cNvSpPr/>
           <p:nvPr/>
         </p:nvSpPr>
         <p:spPr>
           <a:xfrm>
-            <a:off x="2377439" y="5120640"/>
-            <a:ext cx="1417320" cy="548640"/>
+            <a:off x="6245352" y="1554480"/>
+            <a:ext cx="5486400" cy="4526280"/>
           </a:xfrm>
           <a:prstGeom prst="roundRect">
             <a:avLst>
-              <a:gd name="adj" fmla="val 30000"/>
+              <a:gd name="adj" fmla="val 6000"/>
+            </a:avLst>
+          </a:prstGeom>
+          <a:solidFill>
+            <a:srgbClr val="F5F9FF"/>
+          </a:solidFill>
+          <a:ln w="12700">
+            <a:solidFill>
+              <a:srgbClr val="D3E2FB"/>
+            </a:solidFill>
+          </a:ln>
+          <a:effectLst/>
+        </p:spPr>
+        <p:style>
+          <a:lnRef idx="1">
+            <a:schemeClr val="accent1"/>
+          </a:lnRef>
+          <a:fillRef idx="3">
+            <a:schemeClr val="accent1"/>
+          </a:fillRef>
+          <a:effectRef idx="2">
+            <a:schemeClr val="accent1"/>
+          </a:effectRef>
+          <a:fontRef idx="minor">
+            <a:schemeClr val="lt1"/>
+          </a:fontRef>
+        </p:style>
+        <p:txBody>
+          <a:bodyPr rtlCol="0" anchor="ctr"/>
+          <a:lstStyle/>
+          <a:p/>
+        </p:txBody>
+      </p:sp>
+      <p:sp>
+        <p:nvSpPr>
+          <p:cNvPr id="15" name="icon-circle"/>
+          <p:cNvSpPr/>
+          <p:nvPr/>
+        </p:nvSpPr>
+        <p:spPr>
+          <a:xfrm>
+            <a:off x="6565392" y="1783080"/>
+            <a:ext cx="685800" cy="685800"/>
+          </a:xfrm>
+          <a:prstGeom prst="ellipse">
+            <a:avLst/>
+          </a:prstGeom>
+          <a:solidFill>
+            <a:srgbClr val="287DFA"/>
+          </a:solidFill>
+          <a:ln>
+            <a:noFill/>
+          </a:ln>
+          <a:effectLst/>
+        </p:spPr>
+        <p:style>
+          <a:lnRef idx="1">
+            <a:schemeClr val="accent1"/>
+          </a:lnRef>
+          <a:fillRef idx="3">
+            <a:schemeClr val="accent1"/>
+          </a:fillRef>
+          <a:effectRef idx="2">
+            <a:schemeClr val="accent1"/>
+          </a:effectRef>
+          <a:fontRef idx="minor">
+            <a:schemeClr val="lt1"/>
+          </a:fontRef>
+        </p:style>
+        <p:txBody>
+          <a:bodyPr rtlCol="0" anchor="ctr"/>
+          <a:lstStyle/>
+          <a:p/>
+        </p:txBody>
+      </p:sp>
+      <p:pic>
+        <p:nvPicPr>
+          <p:cNvPr id="16" name="Picture 15" descr="FaTicket_w.png"/>
+          <p:cNvPicPr>
+            <a:picLocks noChangeAspect="1"/>
+          </p:cNvPicPr>
+          <p:nvPr/>
+        </p:nvPicPr>
+        <p:blipFill>
+          <a:blip r:embed="rId4"/>
+          <a:stretch>
+            <a:fillRect/>
+          </a:stretch>
+        </p:blipFill>
+        <p:spPr>
+          <a:xfrm>
+            <a:off x="6736842" y="1954530"/>
+            <a:ext cx="342900" cy="342900"/>
+          </a:xfrm>
+          <a:prstGeom prst="rect">
+            <a:avLst/>
+          </a:prstGeom>
+        </p:spPr>
+      </p:pic>
+      <p:sp>
+        <p:nvSpPr>
+          <p:cNvPr id="17" name="TextBox 16"/>
+          <p:cNvSpPr txBox="1"/>
+          <p:nvPr/>
+        </p:nvSpPr>
+        <p:spPr>
+          <a:xfrm>
+            <a:off x="7434072" y="1783080"/>
+            <a:ext cx="4114800" cy="685800"/>
+          </a:xfrm>
+          <a:prstGeom prst="rect">
+            <a:avLst/>
+          </a:prstGeom>
+          <a:noFill/>
+        </p:spPr>
+        <p:txBody>
+          <a:bodyPr wrap="square" lIns="0" rIns="0" tIns="0" bIns="0" anchor="ctr">
+            <a:spAutoFit/>
+          </a:bodyPr>
+          <a:lstStyle/>
+          <a:p>
+            <a:pPr algn="l"/>
+            <a:r>
+              <a:rPr sz="2000" b="1">
+                <a:solidFill>
+                  <a:srgbClr val="15315E"/>
+                </a:solidFill>
+                <a:latin typeface="微软雅黑"/>
+                <a:ea typeface="微软雅黑"/>
+                <a:cs typeface="微软雅黑"/>
+              </a:rPr>
+              <a:t>抢票 · 支付链路</a:t>
+            </a:r>
+          </a:p>
+        </p:txBody>
+      </p:sp>
+      <p:sp>
+        <p:nvSpPr>
+          <p:cNvPr id="18" name="Rounded Rectangle 17"/>
+          <p:cNvSpPr/>
+          <p:nvPr/>
+        </p:nvSpPr>
+        <p:spPr>
+          <a:xfrm>
+            <a:off x="6565392" y="2788920"/>
+            <a:ext cx="4846320" cy="1371600"/>
+          </a:xfrm>
+          <a:prstGeom prst="roundRect">
+            <a:avLst>
+              <a:gd name="adj" fmla="val 6000"/>
             </a:avLst>
           </a:prstGeom>
           <a:solidFill>
@@ -7690,14 +7580,14 @@
       </p:sp>
       <p:sp>
         <p:nvSpPr>
-          <p:cNvPr id="21" name="TextBox 20"/>
+          <p:cNvPr id="19" name="TextBox 18"/>
           <p:cNvSpPr txBox="1"/>
           <p:nvPr/>
         </p:nvSpPr>
         <p:spPr>
           <a:xfrm>
-            <a:off x="2377439" y="5120640"/>
-            <a:ext cx="1417320" cy="548640"/>
+            <a:off x="6793992" y="2898648"/>
+            <a:ext cx="4480560" cy="640080"/>
           </a:xfrm>
           <a:prstGeom prst="rect">
             <a:avLst/>
@@ -7705,14 +7595,51 @@
           <a:noFill/>
         </p:spPr>
         <p:txBody>
-          <a:bodyPr wrap="square" lIns="0" rIns="0" tIns="0" bIns="0" anchor="ctr">
+          <a:bodyPr wrap="square" lIns="0" rIns="0" tIns="0" bIns="0" anchor="t">
             <a:spAutoFit/>
           </a:bodyPr>
           <a:lstStyle/>
           <a:p>
-            <a:pPr algn="ctr"/>
+            <a:pPr algn="l"/>
             <a:r>
-              <a:rPr sz="1200" b="0">
+              <a:rPr sz="3400" b="1">
+                <a:solidFill>
+                  <a:srgbClr val="287DFA"/>
+                </a:solidFill>
+                <a:latin typeface="微软雅黑"/>
+                <a:ea typeface="微软雅黑"/>
+                <a:cs typeface="微软雅黑"/>
+              </a:rPr>
+              <a:t>72.8% → 94%</a:t>
+            </a:r>
+          </a:p>
+        </p:txBody>
+      </p:sp>
+      <p:sp>
+        <p:nvSpPr>
+          <p:cNvPr id="20" name="TextBox 19"/>
+          <p:cNvSpPr txBox="1"/>
+          <p:nvPr/>
+        </p:nvSpPr>
+        <p:spPr>
+          <a:xfrm>
+            <a:off x="6793992" y="3566160"/>
+            <a:ext cx="4480560" cy="320040"/>
+          </a:xfrm>
+          <a:prstGeom prst="rect">
+            <a:avLst/>
+          </a:prstGeom>
+          <a:noFill/>
+        </p:spPr>
+        <p:txBody>
+          <a:bodyPr wrap="square" lIns="0" rIns="0" tIns="0" bIns="0" anchor="t">
+            <a:spAutoFit/>
+          </a:bodyPr>
+          <a:lstStyle/>
+          <a:p>
+            <a:pPr algn="l"/>
+            <a:r>
+              <a:rPr sz="1400" b="1">
                 <a:solidFill>
                   <a:srgbClr val="3D4757"/>
                 </a:solidFill>
@@ -7720,25 +7647,36 @@
                 <a:ea typeface="微软雅黑"/>
                 <a:cs typeface="微软雅黑"/>
               </a:rPr>
-              <a:t>国际火车 · 汽船产品</a:t>
+              <a:t>智能第二程出票率</a:t>
+            </a:r>
+            <a:r>
+              <a:rPr sz="1200" b="0">
+                <a:solidFill>
+                  <a:srgbClr val="7A8599"/>
+                </a:solidFill>
+                <a:latin typeface="微软雅黑"/>
+                <a:ea typeface="微软雅黑"/>
+                <a:cs typeface="微软雅黑"/>
+              </a:rPr>
+              <a:t>　确认出票改为直付</a:t>
             </a:r>
           </a:p>
         </p:txBody>
       </p:sp>
       <p:sp>
         <p:nvSpPr>
-          <p:cNvPr id="22" name="Rounded Rectangle 21"/>
+          <p:cNvPr id="21" name="Rounded Rectangle 20"/>
           <p:cNvSpPr/>
           <p:nvPr/>
         </p:nvSpPr>
         <p:spPr>
           <a:xfrm>
-            <a:off x="3931920" y="5120640"/>
-            <a:ext cx="1417320" cy="548640"/>
+            <a:off x="6565392" y="4389120"/>
+            <a:ext cx="4846320" cy="1371600"/>
           </a:xfrm>
           <a:prstGeom prst="roundRect">
             <a:avLst>
-              <a:gd name="adj" fmla="val 30000"/>
+              <a:gd name="adj" fmla="val 6000"/>
             </a:avLst>
           </a:prstGeom>
           <a:solidFill>
@@ -7773,14 +7711,51 @@
       </p:sp>
       <p:sp>
         <p:nvSpPr>
+          <p:cNvPr id="22" name="TextBox 21"/>
+          <p:cNvSpPr txBox="1"/>
+          <p:nvPr/>
+        </p:nvSpPr>
+        <p:spPr>
+          <a:xfrm>
+            <a:off x="6793992" y="4498848"/>
+            <a:ext cx="4480560" cy="640080"/>
+          </a:xfrm>
+          <a:prstGeom prst="rect">
+            <a:avLst/>
+          </a:prstGeom>
+          <a:noFill/>
+        </p:spPr>
+        <p:txBody>
+          <a:bodyPr wrap="square" lIns="0" rIns="0" tIns="0" bIns="0" anchor="t">
+            <a:spAutoFit/>
+          </a:bodyPr>
+          <a:lstStyle/>
+          <a:p>
+            <a:pPr algn="l"/>
+            <a:r>
+              <a:rPr sz="3400" b="1">
+                <a:solidFill>
+                  <a:srgbClr val="287DFA"/>
+                </a:solidFill>
+                <a:latin typeface="微软雅黑"/>
+                <a:ea typeface="微软雅黑"/>
+                <a:cs typeface="微软雅黑"/>
+              </a:rPr>
+              <a:t>+7 万张</a:t>
+            </a:r>
+          </a:p>
+        </p:txBody>
+      </p:sp>
+      <p:sp>
+        <p:nvSpPr>
           <p:cNvPr id="23" name="TextBox 22"/>
           <p:cNvSpPr txBox="1"/>
           <p:nvPr/>
         </p:nvSpPr>
         <p:spPr>
           <a:xfrm>
-            <a:off x="3931920" y="5120640"/>
-            <a:ext cx="1417320" cy="548640"/>
+            <a:off x="6793992" y="5166359"/>
+            <a:ext cx="4480560" cy="320040"/>
           </a:xfrm>
           <a:prstGeom prst="rect">
             <a:avLst/>
@@ -7788,14 +7763,14 @@
           <a:noFill/>
         </p:spPr>
         <p:txBody>
-          <a:bodyPr wrap="square" lIns="0" rIns="0" tIns="0" bIns="0" anchor="ctr">
+          <a:bodyPr wrap="square" lIns="0" rIns="0" tIns="0" bIns="0" anchor="t">
             <a:spAutoFit/>
           </a:bodyPr>
           <a:lstStyle/>
           <a:p>
-            <a:pPr algn="ctr"/>
+            <a:pPr algn="l"/>
             <a:r>
-              <a:rPr sz="1200" b="0">
+              <a:rPr sz="1400" b="1">
                 <a:solidFill>
                   <a:srgbClr val="3D4757"/>
                 </a:solidFill>
@@ -7803,183 +7778,8 @@
                 <a:ea typeface="微软雅黑"/>
                 <a:cs typeface="微软雅黑"/>
               </a:rPr>
-              <a:t>研发 · 测试</a:t>
+              <a:t>预估年化票量</a:t>
             </a:r>
-          </a:p>
-        </p:txBody>
-      </p:sp>
-      <p:sp>
-        <p:nvSpPr>
-          <p:cNvPr id="24" name="Rounded Rectangle 23"/>
-          <p:cNvSpPr/>
-          <p:nvPr/>
-        </p:nvSpPr>
-        <p:spPr>
-          <a:xfrm>
-            <a:off x="6519672" y="2926080"/>
-            <a:ext cx="5120640" cy="3154680"/>
-          </a:xfrm>
-          <a:prstGeom prst="roundRect">
-            <a:avLst>
-              <a:gd name="adj" fmla="val 6000"/>
-            </a:avLst>
-          </a:prstGeom>
-          <a:solidFill>
-            <a:srgbClr val="F5F9FF"/>
-          </a:solidFill>
-          <a:ln w="12700">
-            <a:solidFill>
-              <a:srgbClr val="D3E2FB"/>
-            </a:solidFill>
-          </a:ln>
-          <a:effectLst/>
-        </p:spPr>
-        <p:style>
-          <a:lnRef idx="1">
-            <a:schemeClr val="accent1"/>
-          </a:lnRef>
-          <a:fillRef idx="3">
-            <a:schemeClr val="accent1"/>
-          </a:fillRef>
-          <a:effectRef idx="2">
-            <a:schemeClr val="accent1"/>
-          </a:effectRef>
-          <a:fontRef idx="minor">
-            <a:schemeClr val="lt1"/>
-          </a:fontRef>
-        </p:style>
-        <p:txBody>
-          <a:bodyPr rtlCol="0" anchor="ctr"/>
-          <a:lstStyle/>
-          <a:p/>
-        </p:txBody>
-      </p:sp>
-      <p:sp>
-        <p:nvSpPr>
-          <p:cNvPr id="25" name="icon-circle"/>
-          <p:cNvSpPr/>
-          <p:nvPr/>
-        </p:nvSpPr>
-        <p:spPr>
-          <a:xfrm>
-            <a:off x="6793992" y="3154680"/>
-            <a:ext cx="685800" cy="685800"/>
-          </a:xfrm>
-          <a:prstGeom prst="ellipse">
-            <a:avLst/>
-          </a:prstGeom>
-          <a:solidFill>
-            <a:srgbClr val="287DFA"/>
-          </a:solidFill>
-          <a:ln>
-            <a:noFill/>
-          </a:ln>
-          <a:effectLst/>
-        </p:spPr>
-        <p:style>
-          <a:lnRef idx="1">
-            <a:schemeClr val="accent1"/>
-          </a:lnRef>
-          <a:fillRef idx="3">
-            <a:schemeClr val="accent1"/>
-          </a:fillRef>
-          <a:effectRef idx="2">
-            <a:schemeClr val="accent1"/>
-          </a:effectRef>
-          <a:fontRef idx="minor">
-            <a:schemeClr val="lt1"/>
-          </a:fontRef>
-        </p:style>
-        <p:txBody>
-          <a:bodyPr rtlCol="0" anchor="ctr"/>
-          <a:lstStyle/>
-          <a:p/>
-        </p:txBody>
-      </p:sp>
-      <p:pic>
-        <p:nvPicPr>
-          <p:cNvPr id="26" name="Picture 25" descr="FaTicket_w.png"/>
-          <p:cNvPicPr>
-            <a:picLocks noChangeAspect="1"/>
-          </p:cNvPicPr>
-          <p:nvPr/>
-        </p:nvPicPr>
-        <p:blipFill>
-          <a:blip r:embed="rId5"/>
-          <a:stretch>
-            <a:fillRect/>
-          </a:stretch>
-        </p:blipFill>
-        <p:spPr>
-          <a:xfrm>
-            <a:off x="6965442" y="3326130"/>
-            <a:ext cx="342900" cy="342900"/>
-          </a:xfrm>
-          <a:prstGeom prst="rect">
-            <a:avLst/>
-          </a:prstGeom>
-        </p:spPr>
-      </p:pic>
-      <p:sp>
-        <p:nvSpPr>
-          <p:cNvPr id="27" name="TextBox 26"/>
-          <p:cNvSpPr txBox="1"/>
-          <p:nvPr/>
-        </p:nvSpPr>
-        <p:spPr>
-          <a:xfrm>
-            <a:off x="7662671" y="3154680"/>
-            <a:ext cx="3840480" cy="411480"/>
-          </a:xfrm>
-          <a:prstGeom prst="rect">
-            <a:avLst/>
-          </a:prstGeom>
-          <a:noFill/>
-        </p:spPr>
-        <p:txBody>
-          <a:bodyPr wrap="square" lIns="0" rIns="0" tIns="0" bIns="0" anchor="t">
-            <a:spAutoFit/>
-          </a:bodyPr>
-          <a:lstStyle/>
-          <a:p>
-            <a:pPr algn="l"/>
-            <a:r>
-              <a:rPr sz="1800" b="1">
-                <a:solidFill>
-                  <a:srgbClr val="15315E"/>
-                </a:solidFill>
-                <a:latin typeface="微软雅黑"/>
-                <a:ea typeface="微软雅黑"/>
-                <a:cs typeface="微软雅黑"/>
-              </a:rPr>
-              <a:t>抢票主线 · 抢票 &amp; 收益</a:t>
-            </a:r>
-          </a:p>
-        </p:txBody>
-      </p:sp>
-      <p:sp>
-        <p:nvSpPr>
-          <p:cNvPr id="28" name="TextBox 27"/>
-          <p:cNvSpPr txBox="1"/>
-          <p:nvPr/>
-        </p:nvSpPr>
-        <p:spPr>
-          <a:xfrm>
-            <a:off x="7662671" y="3566160"/>
-            <a:ext cx="3840480" cy="320040"/>
-          </a:xfrm>
-          <a:prstGeom prst="rect">
-            <a:avLst/>
-          </a:prstGeom>
-          <a:noFill/>
-        </p:spPr>
-        <p:txBody>
-          <a:bodyPr wrap="square" lIns="0" rIns="0" tIns="0" bIns="0" anchor="t">
-            <a:spAutoFit/>
-          </a:bodyPr>
-          <a:lstStyle/>
-          <a:p>
-            <a:pPr algn="l"/>
             <a:r>
               <a:rPr sz="1200" b="0">
                 <a:solidFill>
@@ -7989,341 +7789,7 @@
                 <a:ea typeface="微软雅黑"/>
                 <a:cs typeface="微软雅黑"/>
               </a:rPr>
-              <a:t>2026.8 – 至今</a:t>
-            </a:r>
-          </a:p>
-        </p:txBody>
-      </p:sp>
-      <p:sp>
-        <p:nvSpPr>
-          <p:cNvPr id="29" name="TextBox 28"/>
-          <p:cNvSpPr txBox="1"/>
-          <p:nvPr/>
-        </p:nvSpPr>
-        <p:spPr>
-          <a:xfrm>
-            <a:off x="6793992" y="4160520"/>
-            <a:ext cx="4572000" cy="320040"/>
-          </a:xfrm>
-          <a:prstGeom prst="rect">
-            <a:avLst/>
-          </a:prstGeom>
-          <a:noFill/>
-        </p:spPr>
-        <p:txBody>
-          <a:bodyPr wrap="square" lIns="0" rIns="0" tIns="0" bIns="0" anchor="t">
-            <a:spAutoFit/>
-          </a:bodyPr>
-          <a:lstStyle/>
-          <a:p>
-            <a:pPr algn="l"/>
-            <a:r>
-              <a:rPr sz="1400" b="1">
-                <a:solidFill>
-                  <a:srgbClr val="287DFA"/>
-                </a:solidFill>
-                <a:latin typeface="微软雅黑"/>
-                <a:ea typeface="微软雅黑"/>
-                <a:cs typeface="微软雅黑"/>
-              </a:rPr>
-              <a:t>我的角色　</a:t>
-            </a:r>
-            <a:r>
-              <a:rPr sz="1400" b="0">
-                <a:solidFill>
-                  <a:srgbClr val="3D4757"/>
-                </a:solidFill>
-                <a:latin typeface="微软雅黑"/>
-                <a:ea typeface="微软雅黑"/>
-                <a:cs typeface="微软雅黑"/>
-              </a:rPr>
-              <a:t>需求推进、验收与数据回收</a:t>
-            </a:r>
-          </a:p>
-        </p:txBody>
-      </p:sp>
-      <p:sp>
-        <p:nvSpPr>
-          <p:cNvPr id="30" name="TextBox 29"/>
-          <p:cNvSpPr txBox="1"/>
-          <p:nvPr/>
-        </p:nvSpPr>
-        <p:spPr>
-          <a:xfrm>
-            <a:off x="6793992" y="4709160"/>
-            <a:ext cx="4572000" cy="320040"/>
-          </a:xfrm>
-          <a:prstGeom prst="rect">
-            <a:avLst/>
-          </a:prstGeom>
-          <a:noFill/>
-        </p:spPr>
-        <p:txBody>
-          <a:bodyPr wrap="square" lIns="0" rIns="0" tIns="0" bIns="0" anchor="t">
-            <a:spAutoFit/>
-          </a:bodyPr>
-          <a:lstStyle/>
-          <a:p>
-            <a:pPr algn="l"/>
-            <a:r>
-              <a:rPr sz="1400" b="1">
-                <a:solidFill>
-                  <a:srgbClr val="287DFA"/>
-                </a:solidFill>
-                <a:latin typeface="微软雅黑"/>
-                <a:ea typeface="微软雅黑"/>
-                <a:cs typeface="微软雅黑"/>
-              </a:rPr>
-              <a:t>主要协作方</a:t>
-            </a:r>
-          </a:p>
-        </p:txBody>
-      </p:sp>
-      <p:sp>
-        <p:nvSpPr>
-          <p:cNvPr id="31" name="Rounded Rectangle 30"/>
-          <p:cNvSpPr/>
-          <p:nvPr/>
-        </p:nvSpPr>
-        <p:spPr>
-          <a:xfrm>
-            <a:off x="6793992" y="5120640"/>
-            <a:ext cx="1417320" cy="548640"/>
-          </a:xfrm>
-          <a:prstGeom prst="roundRect">
-            <a:avLst>
-              <a:gd name="adj" fmla="val 30000"/>
-            </a:avLst>
-          </a:prstGeom>
-          <a:solidFill>
-            <a:srgbClr val="FFFFFF"/>
-          </a:solidFill>
-          <a:ln w="12700">
-            <a:solidFill>
-              <a:srgbClr val="D3E2FB"/>
-            </a:solidFill>
-          </a:ln>
-          <a:effectLst/>
-        </p:spPr>
-        <p:style>
-          <a:lnRef idx="1">
-            <a:schemeClr val="accent1"/>
-          </a:lnRef>
-          <a:fillRef idx="3">
-            <a:schemeClr val="accent1"/>
-          </a:fillRef>
-          <a:effectRef idx="2">
-            <a:schemeClr val="accent1"/>
-          </a:effectRef>
-          <a:fontRef idx="minor">
-            <a:schemeClr val="lt1"/>
-          </a:fontRef>
-        </p:style>
-        <p:txBody>
-          <a:bodyPr rtlCol="0" anchor="ctr"/>
-          <a:lstStyle/>
-          <a:p/>
-        </p:txBody>
-      </p:sp>
-      <p:sp>
-        <p:nvSpPr>
-          <p:cNvPr id="32" name="TextBox 31"/>
-          <p:cNvSpPr txBox="1"/>
-          <p:nvPr/>
-        </p:nvSpPr>
-        <p:spPr>
-          <a:xfrm>
-            <a:off x="6793992" y="5120640"/>
-            <a:ext cx="1417320" cy="548640"/>
-          </a:xfrm>
-          <a:prstGeom prst="rect">
-            <a:avLst/>
-          </a:prstGeom>
-          <a:noFill/>
-        </p:spPr>
-        <p:txBody>
-          <a:bodyPr wrap="square" lIns="0" rIns="0" tIns="0" bIns="0" anchor="ctr">
-            <a:spAutoFit/>
-          </a:bodyPr>
-          <a:lstStyle/>
-          <a:p>
-            <a:pPr algn="ctr"/>
-            <a:r>
-              <a:rPr sz="1200" b="0">
-                <a:solidFill>
-                  <a:srgbClr val="3D4757"/>
-                </a:solidFill>
-                <a:latin typeface="微软雅黑"/>
-                <a:ea typeface="微软雅黑"/>
-                <a:cs typeface="微软雅黑"/>
-              </a:rPr>
-              <a:t>开发 · 测试</a:t>
-            </a:r>
-          </a:p>
-        </p:txBody>
-      </p:sp>
-      <p:sp>
-        <p:nvSpPr>
-          <p:cNvPr id="33" name="Rounded Rectangle 32"/>
-          <p:cNvSpPr/>
-          <p:nvPr/>
-        </p:nvSpPr>
-        <p:spPr>
-          <a:xfrm>
-            <a:off x="8348471" y="5120640"/>
-            <a:ext cx="1417320" cy="548640"/>
-          </a:xfrm>
-          <a:prstGeom prst="roundRect">
-            <a:avLst>
-              <a:gd name="adj" fmla="val 30000"/>
-            </a:avLst>
-          </a:prstGeom>
-          <a:solidFill>
-            <a:srgbClr val="FFFFFF"/>
-          </a:solidFill>
-          <a:ln w="12700">
-            <a:solidFill>
-              <a:srgbClr val="D3E2FB"/>
-            </a:solidFill>
-          </a:ln>
-          <a:effectLst/>
-        </p:spPr>
-        <p:style>
-          <a:lnRef idx="1">
-            <a:schemeClr val="accent1"/>
-          </a:lnRef>
-          <a:fillRef idx="3">
-            <a:schemeClr val="accent1"/>
-          </a:fillRef>
-          <a:effectRef idx="2">
-            <a:schemeClr val="accent1"/>
-          </a:effectRef>
-          <a:fontRef idx="minor">
-            <a:schemeClr val="lt1"/>
-          </a:fontRef>
-        </p:style>
-        <p:txBody>
-          <a:bodyPr rtlCol="0" anchor="ctr"/>
-          <a:lstStyle/>
-          <a:p/>
-        </p:txBody>
-      </p:sp>
-      <p:sp>
-        <p:nvSpPr>
-          <p:cNvPr id="34" name="TextBox 33"/>
-          <p:cNvSpPr txBox="1"/>
-          <p:nvPr/>
-        </p:nvSpPr>
-        <p:spPr>
-          <a:xfrm>
-            <a:off x="8348471" y="5120640"/>
-            <a:ext cx="1417320" cy="548640"/>
-          </a:xfrm>
-          <a:prstGeom prst="rect">
-            <a:avLst/>
-          </a:prstGeom>
-          <a:noFill/>
-        </p:spPr>
-        <p:txBody>
-          <a:bodyPr wrap="square" lIns="0" rIns="0" tIns="0" bIns="0" anchor="ctr">
-            <a:spAutoFit/>
-          </a:bodyPr>
-          <a:lstStyle/>
-          <a:p>
-            <a:pPr algn="ctr"/>
-            <a:r>
-              <a:rPr sz="1200" b="0">
-                <a:solidFill>
-                  <a:srgbClr val="3D4757"/>
-                </a:solidFill>
-                <a:latin typeface="微软雅黑"/>
-                <a:ea typeface="微软雅黑"/>
-                <a:cs typeface="微软雅黑"/>
-              </a:rPr>
-              <a:t>BI · 数仓</a:t>
-            </a:r>
-          </a:p>
-        </p:txBody>
-      </p:sp>
-      <p:sp>
-        <p:nvSpPr>
-          <p:cNvPr id="35" name="Rounded Rectangle 34"/>
-          <p:cNvSpPr/>
-          <p:nvPr/>
-        </p:nvSpPr>
-        <p:spPr>
-          <a:xfrm>
-            <a:off x="9902952" y="5120640"/>
-            <a:ext cx="1417320" cy="548640"/>
-          </a:xfrm>
-          <a:prstGeom prst="roundRect">
-            <a:avLst>
-              <a:gd name="adj" fmla="val 30000"/>
-            </a:avLst>
-          </a:prstGeom>
-          <a:solidFill>
-            <a:srgbClr val="FFFFFF"/>
-          </a:solidFill>
-          <a:ln w="12700">
-            <a:solidFill>
-              <a:srgbClr val="D3E2FB"/>
-            </a:solidFill>
-          </a:ln>
-          <a:effectLst/>
-        </p:spPr>
-        <p:style>
-          <a:lnRef idx="1">
-            <a:schemeClr val="accent1"/>
-          </a:lnRef>
-          <a:fillRef idx="3">
-            <a:schemeClr val="accent1"/>
-          </a:fillRef>
-          <a:effectRef idx="2">
-            <a:schemeClr val="accent1"/>
-          </a:effectRef>
-          <a:fontRef idx="minor">
-            <a:schemeClr val="lt1"/>
-          </a:fontRef>
-        </p:style>
-        <p:txBody>
-          <a:bodyPr rtlCol="0" anchor="ctr"/>
-          <a:lstStyle/>
-          <a:p/>
-        </p:txBody>
-      </p:sp>
-      <p:sp>
-        <p:nvSpPr>
-          <p:cNvPr id="36" name="TextBox 35"/>
-          <p:cNvSpPr txBox="1"/>
-          <p:nvPr/>
-        </p:nvSpPr>
-        <p:spPr>
-          <a:xfrm>
-            <a:off x="9902952" y="5120640"/>
-            <a:ext cx="1417320" cy="548640"/>
-          </a:xfrm>
-          <a:prstGeom prst="rect">
-            <a:avLst/>
-          </a:prstGeom>
-          <a:noFill/>
-        </p:spPr>
-        <p:txBody>
-          <a:bodyPr wrap="square" lIns="0" rIns="0" tIns="0" bIns="0" anchor="ctr">
-            <a:spAutoFit/>
-          </a:bodyPr>
-          <a:lstStyle/>
-          <a:p>
-            <a:pPr algn="ctr"/>
-            <a:r>
-              <a:rPr sz="1200" b="0">
-                <a:solidFill>
-                  <a:srgbClr val="3D4757"/>
-                </a:solidFill>
-                <a:latin typeface="微软雅黑"/>
-                <a:ea typeface="微软雅黑"/>
-                <a:cs typeface="微软雅黑"/>
-              </a:rPr>
-              <a:t>中台 · 消息平台</a:t>
+              <a:t>　智能第二程接直付</a:t>
             </a:r>
           </a:p>
         </p:txBody>
@@ -8395,7 +7861,7 @@
                 <a:latin typeface="微软雅黑" panose="020B0503020204020204" pitchFamily="34" charset="-122"/>
                 <a:ea typeface="微软雅黑" panose="020B0503020204020204" pitchFamily="34" charset="-122"/>
               </a:rPr>
-              <a:t>3、主要业绩</a:t>
+              <a:t>2、主要项目 · 火车票 Agent</a:t>
             </a:r>
             <a:endParaRPr lang="zh-CN" altLang="en-US" sz="2400" b="1" dirty="0">
               <a:solidFill>
@@ -8439,7 +7905,7 @@
                 <a:ea typeface="微软雅黑"/>
                 <a:cs typeface="微软雅黑"/>
               </a:rPr>
-              <a:t>两条主线：AI 线让 Agent“判断对”，抢票线让用户“出得了票”</a:t>
+              <a:t>Agent 能不能答好，前提是先判断对：该不该由火车来答、属于哪一类</a:t>
             </a:r>
           </a:p>
         </p:txBody>
@@ -8452,57 +7918,13 @@
         </p:nvSpPr>
         <p:spPr>
           <a:xfrm>
-            <a:off x="457200" y="1554480"/>
-            <a:ext cx="5486400" cy="4526280"/>
+            <a:off x="457200" y="1508760"/>
+            <a:ext cx="5486400" cy="548640"/>
           </a:xfrm>
           <a:prstGeom prst="roundRect">
             <a:avLst>
               <a:gd name="adj" fmla="val 6000"/>
             </a:avLst>
-          </a:prstGeom>
-          <a:solidFill>
-            <a:srgbClr val="F5F9FF"/>
-          </a:solidFill>
-          <a:ln w="12700">
-            <a:solidFill>
-              <a:srgbClr val="D3E2FB"/>
-            </a:solidFill>
-          </a:ln>
-          <a:effectLst/>
-        </p:spPr>
-        <p:style>
-          <a:lnRef idx="1">
-            <a:schemeClr val="accent1"/>
-          </a:lnRef>
-          <a:fillRef idx="3">
-            <a:schemeClr val="accent1"/>
-          </a:fillRef>
-          <a:effectRef idx="2">
-            <a:schemeClr val="accent1"/>
-          </a:effectRef>
-          <a:fontRef idx="minor">
-            <a:schemeClr val="lt1"/>
-          </a:fontRef>
-        </p:style>
-        <p:txBody>
-          <a:bodyPr rtlCol="0" anchor="ctr"/>
-          <a:lstStyle/>
-          <a:p/>
-        </p:txBody>
-      </p:sp>
-      <p:sp>
-        <p:nvSpPr>
-          <p:cNvPr id="5" name="icon-circle"/>
-          <p:cNvSpPr/>
-          <p:nvPr/>
-        </p:nvSpPr>
-        <p:spPr>
-          <a:xfrm>
-            <a:off x="777240" y="1783080"/>
-            <a:ext cx="685800" cy="685800"/>
-          </a:xfrm>
-          <a:prstGeom prst="ellipse">
-            <a:avLst/>
           </a:prstGeom>
           <a:solidFill>
             <a:srgbClr val="287DFA"/>
@@ -8532,9 +7954,88 @@
           <a:p/>
         </p:txBody>
       </p:sp>
+      <p:sp>
+        <p:nvSpPr>
+          <p:cNvPr id="5" name="TextBox 4"/>
+          <p:cNvSpPr txBox="1"/>
+          <p:nvPr/>
+        </p:nvSpPr>
+        <p:spPr>
+          <a:xfrm>
+            <a:off x="457200" y="1508760"/>
+            <a:ext cx="5486400" cy="548640"/>
+          </a:xfrm>
+          <a:prstGeom prst="rect">
+            <a:avLst/>
+          </a:prstGeom>
+          <a:noFill/>
+        </p:spPr>
+        <p:txBody>
+          <a:bodyPr wrap="square" lIns="0" rIns="0" tIns="0" bIns="0" anchor="ctr">
+            <a:spAutoFit/>
+          </a:bodyPr>
+          <a:lstStyle/>
+          <a:p>
+            <a:pPr algn="ctr"/>
+            <a:r>
+              <a:rPr sz="1800" b="1">
+                <a:solidFill>
+                  <a:srgbClr val="FFFFFF"/>
+                </a:solidFill>
+                <a:latin typeface="微软雅黑"/>
+                <a:ea typeface="微软雅黑"/>
+                <a:cs typeface="微软雅黑"/>
+              </a:rPr>
+              <a:t>一期 · 界定什么属于火车</a:t>
+            </a:r>
+          </a:p>
+        </p:txBody>
+      </p:sp>
+      <p:sp>
+        <p:nvSpPr>
+          <p:cNvPr id="6" name="icon-circle"/>
+          <p:cNvSpPr/>
+          <p:nvPr/>
+        </p:nvSpPr>
+        <p:spPr>
+          <a:xfrm>
+            <a:off x="548640" y="2331720"/>
+            <a:ext cx="502920" cy="502920"/>
+          </a:xfrm>
+          <a:prstGeom prst="ellipse">
+            <a:avLst/>
+          </a:prstGeom>
+          <a:solidFill>
+            <a:srgbClr val="FF7A1A"/>
+          </a:solidFill>
+          <a:ln>
+            <a:noFill/>
+          </a:ln>
+          <a:effectLst/>
+        </p:spPr>
+        <p:style>
+          <a:lnRef idx="1">
+            <a:schemeClr val="accent1"/>
+          </a:lnRef>
+          <a:fillRef idx="3">
+            <a:schemeClr val="accent1"/>
+          </a:fillRef>
+          <a:effectRef idx="2">
+            <a:schemeClr val="accent1"/>
+          </a:effectRef>
+          <a:fontRef idx="minor">
+            <a:schemeClr val="lt1"/>
+          </a:fontRef>
+        </p:style>
+        <p:txBody>
+          <a:bodyPr rtlCol="0" anchor="ctr"/>
+          <a:lstStyle/>
+          <a:p/>
+        </p:txBody>
+      </p:sp>
       <p:pic>
         <p:nvPicPr>
-          <p:cNvPr id="6" name="Picture 5" descr="FaRobot_w.png"/>
+          <p:cNvPr id="7" name="Picture 6" descr="FaTriangleExclamation_w.png"/>
           <p:cNvPicPr>
             <a:picLocks noChangeAspect="1"/>
           </p:cNvPicPr>
@@ -8548,8 +8049,8 @@
         </p:blipFill>
         <p:spPr>
           <a:xfrm>
-            <a:off x="948690" y="1954530"/>
-            <a:ext cx="342900" cy="342900"/>
+            <a:off x="674370" y="2457450"/>
+            <a:ext cx="251460" cy="251460"/>
           </a:xfrm>
           <a:prstGeom prst="rect">
             <a:avLst/>
@@ -8558,14 +8059,14 @@
       </p:pic>
       <p:sp>
         <p:nvSpPr>
-          <p:cNvPr id="7" name="TextBox 6"/>
+          <p:cNvPr id="8" name="TextBox 7"/>
           <p:cNvSpPr txBox="1"/>
           <p:nvPr/>
         </p:nvSpPr>
         <p:spPr>
           <a:xfrm>
-            <a:off x="1645920" y="1783080"/>
-            <a:ext cx="4114800" cy="685800"/>
+            <a:off x="1234440" y="2286000"/>
+            <a:ext cx="4663440" cy="320040"/>
           </a:xfrm>
           <a:prstGeom prst="rect">
             <a:avLst/>
@@ -8573,49 +8074,82 @@
           <a:noFill/>
         </p:spPr>
         <p:txBody>
-          <a:bodyPr wrap="square" lIns="0" rIns="0" tIns="0" bIns="0" anchor="ctr">
+          <a:bodyPr wrap="square" lIns="0" rIns="0" tIns="0" bIns="0" anchor="t">
             <a:spAutoFit/>
           </a:bodyPr>
           <a:lstStyle/>
           <a:p>
             <a:pPr algn="l"/>
             <a:r>
-              <a:rPr sz="2000" b="1">
+              <a:rPr sz="1400" b="1">
                 <a:solidFill>
-                  <a:srgbClr val="15315E"/>
+                  <a:srgbClr val="FF7A1A"/>
                 </a:solidFill>
                 <a:latin typeface="微软雅黑"/>
                 <a:ea typeface="微软雅黑"/>
                 <a:cs typeface="微软雅黑"/>
               </a:rPr>
-              <a:t>火车票 Agent · 意图识别</a:t>
+              <a:t>问题</a:t>
             </a:r>
           </a:p>
         </p:txBody>
       </p:sp>
       <p:sp>
         <p:nvSpPr>
-          <p:cNvPr id="8" name="Rounded Rectangle 7"/>
+          <p:cNvPr id="9" name="TextBox 8"/>
+          <p:cNvSpPr txBox="1"/>
+          <p:nvPr/>
+        </p:nvSpPr>
+        <p:spPr>
+          <a:xfrm>
+            <a:off x="1234440" y="2587752"/>
+            <a:ext cx="4663440" cy="731520"/>
+          </a:xfrm>
+          <a:prstGeom prst="rect">
+            <a:avLst/>
+          </a:prstGeom>
+          <a:noFill/>
+        </p:spPr>
+        <p:txBody>
+          <a:bodyPr wrap="square" lIns="0" rIns="0" tIns="0" bIns="0" anchor="t">
+            <a:spAutoFit/>
+          </a:bodyPr>
+          <a:lstStyle/>
+          <a:p>
+            <a:pPr algn="l"/>
+            <a:r>
+              <a:rPr sz="1400" b="0">
+                <a:solidFill>
+                  <a:srgbClr val="3D4757"/>
+                </a:solidFill>
+                <a:latin typeface="微软雅黑"/>
+                <a:ea typeface="微软雅黑"/>
+                <a:cs typeface="微软雅黑"/>
+              </a:rPr>
+              <a:t>提示词有漏洞，把不属于这一类的 query 纳了进来</a:t>
+            </a:r>
+          </a:p>
+        </p:txBody>
+      </p:sp>
+      <p:sp>
+        <p:nvSpPr>
+          <p:cNvPr id="10" name="icon-circle"/>
           <p:cNvSpPr/>
           <p:nvPr/>
         </p:nvSpPr>
         <p:spPr>
           <a:xfrm>
-            <a:off x="777240" y="2788920"/>
-            <a:ext cx="4846320" cy="1371600"/>
-          </a:xfrm>
-          <a:prstGeom prst="roundRect">
-            <a:avLst>
-              <a:gd name="adj" fmla="val 6000"/>
-            </a:avLst>
+            <a:off x="548640" y="3429000"/>
+            <a:ext cx="502920" cy="502920"/>
+          </a:xfrm>
+          <a:prstGeom prst="ellipse">
+            <a:avLst/>
           </a:prstGeom>
           <a:solidFill>
-            <a:srgbClr val="FFFFFF"/>
+            <a:srgbClr val="287DFA"/>
           </a:solidFill>
-          <a:ln w="12700">
-            <a:solidFill>
-              <a:srgbClr val="D3E2FB"/>
-            </a:solidFill>
+          <a:ln>
+            <a:noFill/>
           </a:ln>
           <a:effectLst/>
         </p:spPr>
@@ -8639,16 +8173,40 @@
           <a:p/>
         </p:txBody>
       </p:sp>
-      <p:sp>
-        <p:nvSpPr>
-          <p:cNvPr id="9" name="TextBox 8"/>
+      <p:pic>
+        <p:nvPicPr>
+          <p:cNvPr id="11" name="Picture 10" descr="FaMagnifyingGlass_w.png"/>
+          <p:cNvPicPr>
+            <a:picLocks noChangeAspect="1"/>
+          </p:cNvPicPr>
+          <p:nvPr/>
+        </p:nvPicPr>
+        <p:blipFill>
+          <a:blip r:embed="rId4"/>
+          <a:stretch>
+            <a:fillRect/>
+          </a:stretch>
+        </p:blipFill>
+        <p:spPr>
+          <a:xfrm>
+            <a:off x="674370" y="3554730"/>
+            <a:ext cx="251460" cy="251460"/>
+          </a:xfrm>
+          <a:prstGeom prst="rect">
+            <a:avLst/>
+          </a:prstGeom>
+        </p:spPr>
+      </p:pic>
+      <p:sp>
+        <p:nvSpPr>
+          <p:cNvPr id="12" name="TextBox 11"/>
           <p:cNvSpPr txBox="1"/>
           <p:nvPr/>
         </p:nvSpPr>
         <p:spPr>
           <a:xfrm>
-            <a:off x="1005840" y="2898648"/>
-            <a:ext cx="4480560" cy="640080"/>
+            <a:off x="1234440" y="3383280"/>
+            <a:ext cx="4663440" cy="320040"/>
           </a:xfrm>
           <a:prstGeom prst="rect">
             <a:avLst/>
@@ -8663,7 +8221,162 @@
           <a:p>
             <a:pPr algn="l"/>
             <a:r>
-              <a:rPr sz="3400" b="1">
+              <a:rPr sz="1400" b="1">
+                <a:solidFill>
+                  <a:srgbClr val="287DFA"/>
+                </a:solidFill>
+                <a:latin typeface="微软雅黑"/>
+                <a:ea typeface="微软雅黑"/>
+                <a:cs typeface="微软雅黑"/>
+              </a:rPr>
+              <a:t>方案</a:t>
+            </a:r>
+          </a:p>
+        </p:txBody>
+      </p:sp>
+      <p:sp>
+        <p:nvSpPr>
+          <p:cNvPr id="13" name="TextBox 12"/>
+          <p:cNvSpPr txBox="1"/>
+          <p:nvPr/>
+        </p:nvSpPr>
+        <p:spPr>
+          <a:xfrm>
+            <a:off x="1234440" y="3685032"/>
+            <a:ext cx="4663440" cy="731520"/>
+          </a:xfrm>
+          <a:prstGeom prst="rect">
+            <a:avLst/>
+          </a:prstGeom>
+          <a:noFill/>
+        </p:spPr>
+        <p:txBody>
+          <a:bodyPr wrap="square" lIns="0" rIns="0" tIns="0" bIns="0" anchor="t">
+            <a:spAutoFit/>
+          </a:bodyPr>
+          <a:lstStyle/>
+          <a:p>
+            <a:pPr algn="l"/>
+            <a:r>
+              <a:rPr sz="1400" b="0">
+                <a:solidFill>
+                  <a:srgbClr val="3D4757"/>
+                </a:solidFill>
+                <a:latin typeface="微软雅黑"/>
+                <a:ea typeface="微软雅黑"/>
+                <a:cs typeface="微软雅黑"/>
+              </a:rPr>
+              <a:t>与算法业务标签逐条比对，盯“算法对、Agent 错”的样本，逐类修改关键词和分类标准</a:t>
+            </a:r>
+          </a:p>
+        </p:txBody>
+      </p:sp>
+      <p:sp>
+        <p:nvSpPr>
+          <p:cNvPr id="14" name="Rounded Rectangle 13"/>
+          <p:cNvSpPr/>
+          <p:nvPr/>
+        </p:nvSpPr>
+        <p:spPr>
+          <a:xfrm>
+            <a:off x="457200" y="4526280"/>
+            <a:ext cx="5486400" cy="1554480"/>
+          </a:xfrm>
+          <a:prstGeom prst="roundRect">
+            <a:avLst>
+              <a:gd name="adj" fmla="val 6000"/>
+            </a:avLst>
+          </a:prstGeom>
+          <a:solidFill>
+            <a:srgbClr val="EAF2FF"/>
+          </a:solidFill>
+          <a:ln>
+            <a:noFill/>
+          </a:ln>
+          <a:effectLst/>
+        </p:spPr>
+        <p:style>
+          <a:lnRef idx="1">
+            <a:schemeClr val="accent1"/>
+          </a:lnRef>
+          <a:fillRef idx="3">
+            <a:schemeClr val="accent1"/>
+          </a:fillRef>
+          <a:effectRef idx="2">
+            <a:schemeClr val="accent1"/>
+          </a:effectRef>
+          <a:fontRef idx="minor">
+            <a:schemeClr val="lt1"/>
+          </a:fontRef>
+        </p:style>
+        <p:txBody>
+          <a:bodyPr rtlCol="0" anchor="ctr"/>
+          <a:lstStyle/>
+          <a:p/>
+        </p:txBody>
+      </p:sp>
+      <p:sp>
+        <p:nvSpPr>
+          <p:cNvPr id="15" name="TextBox 14"/>
+          <p:cNvSpPr txBox="1"/>
+          <p:nvPr/>
+        </p:nvSpPr>
+        <p:spPr>
+          <a:xfrm>
+            <a:off x="731520" y="4617720"/>
+            <a:ext cx="1828800" cy="320040"/>
+          </a:xfrm>
+          <a:prstGeom prst="rect">
+            <a:avLst/>
+          </a:prstGeom>
+          <a:noFill/>
+        </p:spPr>
+        <p:txBody>
+          <a:bodyPr wrap="square" lIns="0" rIns="0" tIns="0" bIns="0" anchor="t">
+            <a:spAutoFit/>
+          </a:bodyPr>
+          <a:lstStyle/>
+          <a:p>
+            <a:pPr algn="l"/>
+            <a:r>
+              <a:rPr sz="1400" b="1">
+                <a:solidFill>
+                  <a:srgbClr val="287DFA"/>
+                </a:solidFill>
+                <a:latin typeface="微软雅黑"/>
+                <a:ea typeface="微软雅黑"/>
+                <a:cs typeface="微软雅黑"/>
+              </a:rPr>
+              <a:t>结果</a:t>
+            </a:r>
+          </a:p>
+        </p:txBody>
+      </p:sp>
+      <p:sp>
+        <p:nvSpPr>
+          <p:cNvPr id="16" name="TextBox 15"/>
+          <p:cNvSpPr txBox="1"/>
+          <p:nvPr/>
+        </p:nvSpPr>
+        <p:spPr>
+          <a:xfrm>
+            <a:off x="731520" y="4919472"/>
+            <a:ext cx="2926079" cy="594360"/>
+          </a:xfrm>
+          <a:prstGeom prst="rect">
+            <a:avLst/>
+          </a:prstGeom>
+          <a:noFill/>
+        </p:spPr>
+        <p:txBody>
+          <a:bodyPr wrap="square" lIns="0" rIns="0" tIns="0" bIns="0" anchor="t">
+            <a:spAutoFit/>
+          </a:bodyPr>
+          <a:lstStyle/>
+          <a:p>
+            <a:pPr algn="l"/>
+            <a:r>
+              <a:rPr sz="2800" b="1">
                 <a:solidFill>
                   <a:srgbClr val="287DFA"/>
                 </a:solidFill>
@@ -8678,14 +8391,14 @@
       </p:sp>
       <p:sp>
         <p:nvSpPr>
-          <p:cNvPr id="10" name="TextBox 9"/>
+          <p:cNvPr id="17" name="TextBox 16"/>
           <p:cNvSpPr txBox="1"/>
           <p:nvPr/>
         </p:nvSpPr>
         <p:spPr>
           <a:xfrm>
-            <a:off x="1005840" y="3566160"/>
-            <a:ext cx="4480560" cy="320040"/>
+            <a:off x="731520" y="5532120"/>
+            <a:ext cx="2926079" cy="365760"/>
           </a:xfrm>
           <a:prstGeom prst="rect">
             <a:avLst/>
@@ -8700,7 +8413,7 @@
           <a:p>
             <a:pPr algn="l"/>
             <a:r>
-              <a:rPr sz="1400" b="1">
+              <a:rPr sz="1300" b="0">
                 <a:solidFill>
                   <a:srgbClr val="3D4757"/>
                 </a:solidFill>
@@ -8710,30 +8423,93 @@
               </a:rPr>
               <a:t>意图分类准确率</a:t>
             </a:r>
+          </a:p>
+        </p:txBody>
+      </p:sp>
+      <p:sp>
+        <p:nvSpPr>
+          <p:cNvPr id="18" name="TextBox 17"/>
+          <p:cNvSpPr txBox="1"/>
+          <p:nvPr/>
+        </p:nvSpPr>
+        <p:spPr>
+          <a:xfrm>
+            <a:off x="3749039" y="4919472"/>
+            <a:ext cx="1828800" cy="594360"/>
+          </a:xfrm>
+          <a:prstGeom prst="rect">
+            <a:avLst/>
+          </a:prstGeom>
+          <a:noFill/>
+        </p:spPr>
+        <p:txBody>
+          <a:bodyPr wrap="square" lIns="0" rIns="0" tIns="0" bIns="0" anchor="t">
+            <a:spAutoFit/>
+          </a:bodyPr>
+          <a:lstStyle/>
+          <a:p>
+            <a:pPr algn="l"/>
             <a:r>
-              <a:rPr sz="1200" b="0">
+              <a:rPr sz="2800" b="1">
                 <a:solidFill>
-                  <a:srgbClr val="7A8599"/>
+                  <a:srgbClr val="287DFA"/>
                 </a:solidFill>
                 <a:latin typeface="微软雅黑"/>
                 <a:ea typeface="微软雅黑"/>
                 <a:cs typeface="微软雅黑"/>
               </a:rPr>
-              <a:t>　一期上线前</a:t>
+              <a:t>+7.7%</a:t>
             </a:r>
           </a:p>
         </p:txBody>
       </p:sp>
       <p:sp>
         <p:nvSpPr>
-          <p:cNvPr id="11" name="Rounded Rectangle 10"/>
+          <p:cNvPr id="19" name="TextBox 18"/>
+          <p:cNvSpPr txBox="1"/>
+          <p:nvPr/>
+        </p:nvSpPr>
+        <p:spPr>
+          <a:xfrm>
+            <a:off x="3749039" y="5532120"/>
+            <a:ext cx="1828800" cy="365760"/>
+          </a:xfrm>
+          <a:prstGeom prst="rect">
+            <a:avLst/>
+          </a:prstGeom>
+          <a:noFill/>
+        </p:spPr>
+        <p:txBody>
+          <a:bodyPr wrap="square" lIns="0" rIns="0" tIns="0" bIns="0" anchor="t">
+            <a:spAutoFit/>
+          </a:bodyPr>
+          <a:lstStyle/>
+          <a:p>
+            <a:pPr algn="l"/>
+            <a:r>
+              <a:rPr sz="1300" b="0">
+                <a:solidFill>
+                  <a:srgbClr val="3D4757"/>
+                </a:solidFill>
+                <a:latin typeface="微软雅黑"/>
+                <a:ea typeface="微软雅黑"/>
+                <a:cs typeface="微软雅黑"/>
+              </a:rPr>
+              <a:t>正文完播率（对比问道兜底）</a:t>
+            </a:r>
+          </a:p>
+        </p:txBody>
+      </p:sp>
+      <p:sp>
+        <p:nvSpPr>
+          <p:cNvPr id="20" name="Rounded Rectangle 19"/>
           <p:cNvSpPr/>
           <p:nvPr/>
         </p:nvSpPr>
         <p:spPr>
           <a:xfrm>
-            <a:off x="777240" y="4389120"/>
-            <a:ext cx="4846320" cy="1371600"/>
+            <a:off x="6245352" y="1508760"/>
+            <a:ext cx="5486400" cy="548640"/>
           </a:xfrm>
           <a:prstGeom prst="roundRect">
             <a:avLst>
@@ -8741,12 +8517,10 @@
             </a:avLst>
           </a:prstGeom>
           <a:solidFill>
-            <a:srgbClr val="FFFFFF"/>
+            <a:srgbClr val="287DFA"/>
           </a:solidFill>
-          <a:ln w="12700">
-            <a:solidFill>
-              <a:srgbClr val="D3E2FB"/>
-            </a:solidFill>
+          <a:ln>
+            <a:noFill/>
           </a:ln>
           <a:effectLst/>
         </p:spPr>
@@ -8772,14 +8546,117 @@
       </p:sp>
       <p:sp>
         <p:nvSpPr>
-          <p:cNvPr id="12" name="TextBox 11"/>
+          <p:cNvPr id="21" name="TextBox 20"/>
           <p:cNvSpPr txBox="1"/>
           <p:nvPr/>
         </p:nvSpPr>
         <p:spPr>
           <a:xfrm>
-            <a:off x="1005840" y="4498848"/>
-            <a:ext cx="4480560" cy="640080"/>
+            <a:off x="6245352" y="1508760"/>
+            <a:ext cx="5486400" cy="548640"/>
+          </a:xfrm>
+          <a:prstGeom prst="rect">
+            <a:avLst/>
+          </a:prstGeom>
+          <a:noFill/>
+        </p:spPr>
+        <p:txBody>
+          <a:bodyPr wrap="square" lIns="0" rIns="0" tIns="0" bIns="0" anchor="ctr">
+            <a:spAutoFit/>
+          </a:bodyPr>
+          <a:lstStyle/>
+          <a:p>
+            <a:pPr algn="ctr"/>
+            <a:r>
+              <a:rPr sz="1800" b="1">
+                <a:solidFill>
+                  <a:srgbClr val="FFFFFF"/>
+                </a:solidFill>
+                <a:latin typeface="微软雅黑"/>
+                <a:ea typeface="微软雅黑"/>
+                <a:cs typeface="微软雅黑"/>
+              </a:rPr>
+              <a:t>二期 · 界定什么不属于火车</a:t>
+            </a:r>
+          </a:p>
+        </p:txBody>
+      </p:sp>
+      <p:sp>
+        <p:nvSpPr>
+          <p:cNvPr id="22" name="icon-circle"/>
+          <p:cNvSpPr/>
+          <p:nvPr/>
+        </p:nvSpPr>
+        <p:spPr>
+          <a:xfrm>
+            <a:off x="6336792" y="2331720"/>
+            <a:ext cx="502920" cy="502920"/>
+          </a:xfrm>
+          <a:prstGeom prst="ellipse">
+            <a:avLst/>
+          </a:prstGeom>
+          <a:solidFill>
+            <a:srgbClr val="FF7A1A"/>
+          </a:solidFill>
+          <a:ln>
+            <a:noFill/>
+          </a:ln>
+          <a:effectLst/>
+        </p:spPr>
+        <p:style>
+          <a:lnRef idx="1">
+            <a:schemeClr val="accent1"/>
+          </a:lnRef>
+          <a:fillRef idx="3">
+            <a:schemeClr val="accent1"/>
+          </a:fillRef>
+          <a:effectRef idx="2">
+            <a:schemeClr val="accent1"/>
+          </a:effectRef>
+          <a:fontRef idx="minor">
+            <a:schemeClr val="lt1"/>
+          </a:fontRef>
+        </p:style>
+        <p:txBody>
+          <a:bodyPr rtlCol="0" anchor="ctr"/>
+          <a:lstStyle/>
+          <a:p/>
+        </p:txBody>
+      </p:sp>
+      <p:pic>
+        <p:nvPicPr>
+          <p:cNvPr id="23" name="Picture 22" descr="FaTriangleExclamation_w.png"/>
+          <p:cNvPicPr>
+            <a:picLocks noChangeAspect="1"/>
+          </p:cNvPicPr>
+          <p:nvPr/>
+        </p:nvPicPr>
+        <p:blipFill>
+          <a:blip r:embed="rId3"/>
+          <a:stretch>
+            <a:fillRect/>
+          </a:stretch>
+        </p:blipFill>
+        <p:spPr>
+          <a:xfrm>
+            <a:off x="6462522" y="2457450"/>
+            <a:ext cx="251460" cy="251460"/>
+          </a:xfrm>
+          <a:prstGeom prst="rect">
+            <a:avLst/>
+          </a:prstGeom>
+        </p:spPr>
+      </p:pic>
+      <p:sp>
+        <p:nvSpPr>
+          <p:cNvPr id="24" name="TextBox 23"/>
+          <p:cNvSpPr txBox="1"/>
+          <p:nvPr/>
+        </p:nvSpPr>
+        <p:spPr>
+          <a:xfrm>
+            <a:off x="7022592" y="2286000"/>
+            <a:ext cx="4663440" cy="320040"/>
           </a:xfrm>
           <a:prstGeom prst="rect">
             <a:avLst/>
@@ -8794,7 +8671,302 @@
           <a:p>
             <a:pPr algn="l"/>
             <a:r>
-              <a:rPr sz="3400" b="1">
+              <a:rPr sz="1400" b="1">
+                <a:solidFill>
+                  <a:srgbClr val="FF7A1A"/>
+                </a:solidFill>
+                <a:latin typeface="微软雅黑"/>
+                <a:ea typeface="微软雅黑"/>
+                <a:cs typeface="微软雅黑"/>
+              </a:rPr>
+              <a:t>问题</a:t>
+            </a:r>
+          </a:p>
+        </p:txBody>
+      </p:sp>
+      <p:sp>
+        <p:nvSpPr>
+          <p:cNvPr id="25" name="TextBox 24"/>
+          <p:cNvSpPr txBox="1"/>
+          <p:nvPr/>
+        </p:nvSpPr>
+        <p:spPr>
+          <a:xfrm>
+            <a:off x="7022592" y="2587752"/>
+            <a:ext cx="4663440" cy="731520"/>
+          </a:xfrm>
+          <a:prstGeom prst="rect">
+            <a:avLst/>
+          </a:prstGeom>
+          <a:noFill/>
+        </p:spPr>
+        <p:txBody>
+          <a:bodyPr wrap="square" lIns="0" rIns="0" tIns="0" bIns="0" anchor="t">
+            <a:spAutoFit/>
+          </a:bodyPr>
+          <a:lstStyle/>
+          <a:p>
+            <a:pPr algn="l"/>
+            <a:r>
+              <a:rPr sz="1400" b="0">
+                <a:solidFill>
+                  <a:srgbClr val="3D4757"/>
+                </a:solidFill>
+                <a:latin typeface="微软雅黑"/>
+                <a:ea typeface="微软雅黑"/>
+                <a:cs typeface="微软雅黑"/>
+              </a:rPr>
+              <a:t>约一半问题被拒答，其中一部分根本不属于火车，是被错误分发过来的</a:t>
+            </a:r>
+          </a:p>
+        </p:txBody>
+      </p:sp>
+      <p:sp>
+        <p:nvSpPr>
+          <p:cNvPr id="26" name="icon-circle"/>
+          <p:cNvSpPr/>
+          <p:nvPr/>
+        </p:nvSpPr>
+        <p:spPr>
+          <a:xfrm>
+            <a:off x="6336792" y="3429000"/>
+            <a:ext cx="502920" cy="502920"/>
+          </a:xfrm>
+          <a:prstGeom prst="ellipse">
+            <a:avLst/>
+          </a:prstGeom>
+          <a:solidFill>
+            <a:srgbClr val="287DFA"/>
+          </a:solidFill>
+          <a:ln>
+            <a:noFill/>
+          </a:ln>
+          <a:effectLst/>
+        </p:spPr>
+        <p:style>
+          <a:lnRef idx="1">
+            <a:schemeClr val="accent1"/>
+          </a:lnRef>
+          <a:fillRef idx="3">
+            <a:schemeClr val="accent1"/>
+          </a:fillRef>
+          <a:effectRef idx="2">
+            <a:schemeClr val="accent1"/>
+          </a:effectRef>
+          <a:fontRef idx="minor">
+            <a:schemeClr val="lt1"/>
+          </a:fontRef>
+        </p:style>
+        <p:txBody>
+          <a:bodyPr rtlCol="0" anchor="ctr"/>
+          <a:lstStyle/>
+          <a:p/>
+        </p:txBody>
+      </p:sp>
+      <p:pic>
+        <p:nvPicPr>
+          <p:cNvPr id="27" name="Picture 26" descr="FaFilter_w.png"/>
+          <p:cNvPicPr>
+            <a:picLocks noChangeAspect="1"/>
+          </p:cNvPicPr>
+          <p:nvPr/>
+        </p:nvPicPr>
+        <p:blipFill>
+          <a:blip r:embed="rId5"/>
+          <a:stretch>
+            <a:fillRect/>
+          </a:stretch>
+        </p:blipFill>
+        <p:spPr>
+          <a:xfrm>
+            <a:off x="6462522" y="3554730"/>
+            <a:ext cx="251460" cy="251460"/>
+          </a:xfrm>
+          <a:prstGeom prst="rect">
+            <a:avLst/>
+          </a:prstGeom>
+        </p:spPr>
+      </p:pic>
+      <p:sp>
+        <p:nvSpPr>
+          <p:cNvPr id="28" name="TextBox 27"/>
+          <p:cNvSpPr txBox="1"/>
+          <p:nvPr/>
+        </p:nvSpPr>
+        <p:spPr>
+          <a:xfrm>
+            <a:off x="7022592" y="3383280"/>
+            <a:ext cx="4663440" cy="320040"/>
+          </a:xfrm>
+          <a:prstGeom prst="rect">
+            <a:avLst/>
+          </a:prstGeom>
+          <a:noFill/>
+        </p:spPr>
+        <p:txBody>
+          <a:bodyPr wrap="square" lIns="0" rIns="0" tIns="0" bIns="0" anchor="t">
+            <a:spAutoFit/>
+          </a:bodyPr>
+          <a:lstStyle/>
+          <a:p>
+            <a:pPr algn="l"/>
+            <a:r>
+              <a:rPr sz="1400" b="1">
+                <a:solidFill>
+                  <a:srgbClr val="287DFA"/>
+                </a:solidFill>
+                <a:latin typeface="微软雅黑"/>
+                <a:ea typeface="微软雅黑"/>
+                <a:cs typeface="微软雅黑"/>
+              </a:rPr>
+              <a:t>方案</a:t>
+            </a:r>
+          </a:p>
+        </p:txBody>
+      </p:sp>
+      <p:sp>
+        <p:nvSpPr>
+          <p:cNvPr id="29" name="TextBox 28"/>
+          <p:cNvSpPr txBox="1"/>
+          <p:nvPr/>
+        </p:nvSpPr>
+        <p:spPr>
+          <a:xfrm>
+            <a:off x="7022592" y="3685032"/>
+            <a:ext cx="4663440" cy="731520"/>
+          </a:xfrm>
+          <a:prstGeom prst="rect">
+            <a:avLst/>
+          </a:prstGeom>
+          <a:noFill/>
+        </p:spPr>
+        <p:txBody>
+          <a:bodyPr wrap="square" lIns="0" rIns="0" tIns="0" bIns="0" anchor="t">
+            <a:spAutoFit/>
+          </a:bodyPr>
+          <a:lstStyle/>
+          <a:p>
+            <a:pPr algn="l"/>
+            <a:r>
+              <a:rPr sz="1400" b="0">
+                <a:solidFill>
+                  <a:srgbClr val="3D4757"/>
+                </a:solidFill>
+                <a:latin typeface="微软雅黑"/>
+                <a:ea typeface="微软雅黑"/>
+                <a:cs typeface="微软雅黑"/>
+              </a:rPr>
+              <a:t>持续推进能力覆盖的同时，优先治理错误分发：人工核查 1,000 多条拒答 query，整理火车问题边界，交给问道调整分发策略</a:t>
+            </a:r>
+          </a:p>
+        </p:txBody>
+      </p:sp>
+      <p:sp>
+        <p:nvSpPr>
+          <p:cNvPr id="30" name="Rounded Rectangle 29"/>
+          <p:cNvSpPr/>
+          <p:nvPr/>
+        </p:nvSpPr>
+        <p:spPr>
+          <a:xfrm>
+            <a:off x="6245352" y="4526280"/>
+            <a:ext cx="5486400" cy="1554480"/>
+          </a:xfrm>
+          <a:prstGeom prst="roundRect">
+            <a:avLst>
+              <a:gd name="adj" fmla="val 6000"/>
+            </a:avLst>
+          </a:prstGeom>
+          <a:solidFill>
+            <a:srgbClr val="EAF2FF"/>
+          </a:solidFill>
+          <a:ln>
+            <a:noFill/>
+          </a:ln>
+          <a:effectLst/>
+        </p:spPr>
+        <p:style>
+          <a:lnRef idx="1">
+            <a:schemeClr val="accent1"/>
+          </a:lnRef>
+          <a:fillRef idx="3">
+            <a:schemeClr val="accent1"/>
+          </a:fillRef>
+          <a:effectRef idx="2">
+            <a:schemeClr val="accent1"/>
+          </a:effectRef>
+          <a:fontRef idx="minor">
+            <a:schemeClr val="lt1"/>
+          </a:fontRef>
+        </p:style>
+        <p:txBody>
+          <a:bodyPr rtlCol="0" anchor="ctr"/>
+          <a:lstStyle/>
+          <a:p/>
+        </p:txBody>
+      </p:sp>
+      <p:sp>
+        <p:nvSpPr>
+          <p:cNvPr id="31" name="TextBox 30"/>
+          <p:cNvSpPr txBox="1"/>
+          <p:nvPr/>
+        </p:nvSpPr>
+        <p:spPr>
+          <a:xfrm>
+            <a:off x="6519672" y="4617720"/>
+            <a:ext cx="1828800" cy="320040"/>
+          </a:xfrm>
+          <a:prstGeom prst="rect">
+            <a:avLst/>
+          </a:prstGeom>
+          <a:noFill/>
+        </p:spPr>
+        <p:txBody>
+          <a:bodyPr wrap="square" lIns="0" rIns="0" tIns="0" bIns="0" anchor="t">
+            <a:spAutoFit/>
+          </a:bodyPr>
+          <a:lstStyle/>
+          <a:p>
+            <a:pPr algn="l"/>
+            <a:r>
+              <a:rPr sz="1400" b="1">
+                <a:solidFill>
+                  <a:srgbClr val="287DFA"/>
+                </a:solidFill>
+                <a:latin typeface="微软雅黑"/>
+                <a:ea typeface="微软雅黑"/>
+                <a:cs typeface="微软雅黑"/>
+              </a:rPr>
+              <a:t>结果</a:t>
+            </a:r>
+          </a:p>
+        </p:txBody>
+      </p:sp>
+      <p:sp>
+        <p:nvSpPr>
+          <p:cNvPr id="32" name="TextBox 31"/>
+          <p:cNvSpPr txBox="1"/>
+          <p:nvPr/>
+        </p:nvSpPr>
+        <p:spPr>
+          <a:xfrm>
+            <a:off x="6519672" y="4919472"/>
+            <a:ext cx="4846320" cy="594360"/>
+          </a:xfrm>
+          <a:prstGeom prst="rect">
+            <a:avLst/>
+          </a:prstGeom>
+          <a:noFill/>
+        </p:spPr>
+        <p:txBody>
+          <a:bodyPr wrap="square" lIns="0" rIns="0" tIns="0" bIns="0" anchor="t">
+            <a:spAutoFit/>
+          </a:bodyPr>
+          <a:lstStyle/>
+          <a:p>
+            <a:pPr algn="l"/>
+            <a:r>
+              <a:rPr sz="2800" b="1">
                 <a:solidFill>
                   <a:srgbClr val="287DFA"/>
                 </a:solidFill>
@@ -8809,14 +8981,14 @@
       </p:sp>
       <p:sp>
         <p:nvSpPr>
-          <p:cNvPr id="13" name="TextBox 12"/>
+          <p:cNvPr id="33" name="TextBox 32"/>
           <p:cNvSpPr txBox="1"/>
           <p:nvPr/>
         </p:nvSpPr>
         <p:spPr>
           <a:xfrm>
-            <a:off x="1005840" y="5166359"/>
-            <a:ext cx="4480560" cy="320040"/>
+            <a:off x="6519672" y="5532120"/>
+            <a:ext cx="4846320" cy="365760"/>
           </a:xfrm>
           <a:prstGeom prst="rect">
             <a:avLst/>
@@ -8831,7 +9003,7 @@
           <a:p>
             <a:pPr algn="l"/>
             <a:r>
-              <a:rPr sz="1400" b="1">
+              <a:rPr sz="1300" b="0">
                 <a:solidFill>
                   <a:srgbClr val="3D4757"/>
                 </a:solidFill>
@@ -8840,428 +9012,6 @@
                 <a:cs typeface="微软雅黑"/>
               </a:rPr>
               <a:t>错误分发导致的拒答占比</a:t>
-            </a:r>
-            <a:r>
-              <a:rPr sz="1200" b="0">
-                <a:solidFill>
-                  <a:srgbClr val="7A8599"/>
-                </a:solidFill>
-                <a:latin typeface="微软雅黑"/>
-                <a:ea typeface="微软雅黑"/>
-                <a:cs typeface="微软雅黑"/>
-              </a:rPr>
-              <a:t>　二期分发策略调整后</a:t>
-            </a:r>
-          </a:p>
-        </p:txBody>
-      </p:sp>
-      <p:sp>
-        <p:nvSpPr>
-          <p:cNvPr id="14" name="Rounded Rectangle 13"/>
-          <p:cNvSpPr/>
-          <p:nvPr/>
-        </p:nvSpPr>
-        <p:spPr>
-          <a:xfrm>
-            <a:off x="6245352" y="1554480"/>
-            <a:ext cx="5486400" cy="4526280"/>
-          </a:xfrm>
-          <a:prstGeom prst="roundRect">
-            <a:avLst>
-              <a:gd name="adj" fmla="val 6000"/>
-            </a:avLst>
-          </a:prstGeom>
-          <a:solidFill>
-            <a:srgbClr val="F5F9FF"/>
-          </a:solidFill>
-          <a:ln w="12700">
-            <a:solidFill>
-              <a:srgbClr val="D3E2FB"/>
-            </a:solidFill>
-          </a:ln>
-          <a:effectLst/>
-        </p:spPr>
-        <p:style>
-          <a:lnRef idx="1">
-            <a:schemeClr val="accent1"/>
-          </a:lnRef>
-          <a:fillRef idx="3">
-            <a:schemeClr val="accent1"/>
-          </a:fillRef>
-          <a:effectRef idx="2">
-            <a:schemeClr val="accent1"/>
-          </a:effectRef>
-          <a:fontRef idx="minor">
-            <a:schemeClr val="lt1"/>
-          </a:fontRef>
-        </p:style>
-        <p:txBody>
-          <a:bodyPr rtlCol="0" anchor="ctr"/>
-          <a:lstStyle/>
-          <a:p/>
-        </p:txBody>
-      </p:sp>
-      <p:sp>
-        <p:nvSpPr>
-          <p:cNvPr id="15" name="icon-circle"/>
-          <p:cNvSpPr/>
-          <p:nvPr/>
-        </p:nvSpPr>
-        <p:spPr>
-          <a:xfrm>
-            <a:off x="6565392" y="1783080"/>
-            <a:ext cx="685800" cy="685800"/>
-          </a:xfrm>
-          <a:prstGeom prst="ellipse">
-            <a:avLst/>
-          </a:prstGeom>
-          <a:solidFill>
-            <a:srgbClr val="287DFA"/>
-          </a:solidFill>
-          <a:ln>
-            <a:noFill/>
-          </a:ln>
-          <a:effectLst/>
-        </p:spPr>
-        <p:style>
-          <a:lnRef idx="1">
-            <a:schemeClr val="accent1"/>
-          </a:lnRef>
-          <a:fillRef idx="3">
-            <a:schemeClr val="accent1"/>
-          </a:fillRef>
-          <a:effectRef idx="2">
-            <a:schemeClr val="accent1"/>
-          </a:effectRef>
-          <a:fontRef idx="minor">
-            <a:schemeClr val="lt1"/>
-          </a:fontRef>
-        </p:style>
-        <p:txBody>
-          <a:bodyPr rtlCol="0" anchor="ctr"/>
-          <a:lstStyle/>
-          <a:p/>
-        </p:txBody>
-      </p:sp>
-      <p:pic>
-        <p:nvPicPr>
-          <p:cNvPr id="16" name="Picture 15" descr="FaTicket_w.png"/>
-          <p:cNvPicPr>
-            <a:picLocks noChangeAspect="1"/>
-          </p:cNvPicPr>
-          <p:nvPr/>
-        </p:nvPicPr>
-        <p:blipFill>
-          <a:blip r:embed="rId4"/>
-          <a:stretch>
-            <a:fillRect/>
-          </a:stretch>
-        </p:blipFill>
-        <p:spPr>
-          <a:xfrm>
-            <a:off x="6736842" y="1954530"/>
-            <a:ext cx="342900" cy="342900"/>
-          </a:xfrm>
-          <a:prstGeom prst="rect">
-            <a:avLst/>
-          </a:prstGeom>
-        </p:spPr>
-      </p:pic>
-      <p:sp>
-        <p:nvSpPr>
-          <p:cNvPr id="17" name="TextBox 16"/>
-          <p:cNvSpPr txBox="1"/>
-          <p:nvPr/>
-        </p:nvSpPr>
-        <p:spPr>
-          <a:xfrm>
-            <a:off x="7434072" y="1783080"/>
-            <a:ext cx="4114800" cy="685800"/>
-          </a:xfrm>
-          <a:prstGeom prst="rect">
-            <a:avLst/>
-          </a:prstGeom>
-          <a:noFill/>
-        </p:spPr>
-        <p:txBody>
-          <a:bodyPr wrap="square" lIns="0" rIns="0" tIns="0" bIns="0" anchor="ctr">
-            <a:spAutoFit/>
-          </a:bodyPr>
-          <a:lstStyle/>
-          <a:p>
-            <a:pPr algn="l"/>
-            <a:r>
-              <a:rPr sz="2000" b="1">
-                <a:solidFill>
-                  <a:srgbClr val="15315E"/>
-                </a:solidFill>
-                <a:latin typeface="微软雅黑"/>
-                <a:ea typeface="微软雅黑"/>
-                <a:cs typeface="微软雅黑"/>
-              </a:rPr>
-              <a:t>抢票 · 支付链路</a:t>
-            </a:r>
-          </a:p>
-        </p:txBody>
-      </p:sp>
-      <p:sp>
-        <p:nvSpPr>
-          <p:cNvPr id="18" name="Rounded Rectangle 17"/>
-          <p:cNvSpPr/>
-          <p:nvPr/>
-        </p:nvSpPr>
-        <p:spPr>
-          <a:xfrm>
-            <a:off x="6565392" y="2788920"/>
-            <a:ext cx="4846320" cy="1371600"/>
-          </a:xfrm>
-          <a:prstGeom prst="roundRect">
-            <a:avLst>
-              <a:gd name="adj" fmla="val 6000"/>
-            </a:avLst>
-          </a:prstGeom>
-          <a:solidFill>
-            <a:srgbClr val="FFFFFF"/>
-          </a:solidFill>
-          <a:ln w="12700">
-            <a:solidFill>
-              <a:srgbClr val="D3E2FB"/>
-            </a:solidFill>
-          </a:ln>
-          <a:effectLst/>
-        </p:spPr>
-        <p:style>
-          <a:lnRef idx="1">
-            <a:schemeClr val="accent1"/>
-          </a:lnRef>
-          <a:fillRef idx="3">
-            <a:schemeClr val="accent1"/>
-          </a:fillRef>
-          <a:effectRef idx="2">
-            <a:schemeClr val="accent1"/>
-          </a:effectRef>
-          <a:fontRef idx="minor">
-            <a:schemeClr val="lt1"/>
-          </a:fontRef>
-        </p:style>
-        <p:txBody>
-          <a:bodyPr rtlCol="0" anchor="ctr"/>
-          <a:lstStyle/>
-          <a:p/>
-        </p:txBody>
-      </p:sp>
-      <p:sp>
-        <p:nvSpPr>
-          <p:cNvPr id="19" name="TextBox 18"/>
-          <p:cNvSpPr txBox="1"/>
-          <p:nvPr/>
-        </p:nvSpPr>
-        <p:spPr>
-          <a:xfrm>
-            <a:off x="6793992" y="2898648"/>
-            <a:ext cx="4480560" cy="640080"/>
-          </a:xfrm>
-          <a:prstGeom prst="rect">
-            <a:avLst/>
-          </a:prstGeom>
-          <a:noFill/>
-        </p:spPr>
-        <p:txBody>
-          <a:bodyPr wrap="square" lIns="0" rIns="0" tIns="0" bIns="0" anchor="t">
-            <a:spAutoFit/>
-          </a:bodyPr>
-          <a:lstStyle/>
-          <a:p>
-            <a:pPr algn="l"/>
-            <a:r>
-              <a:rPr sz="3400" b="1">
-                <a:solidFill>
-                  <a:srgbClr val="287DFA"/>
-                </a:solidFill>
-                <a:latin typeface="微软雅黑"/>
-                <a:ea typeface="微软雅黑"/>
-                <a:cs typeface="微软雅黑"/>
-              </a:rPr>
-              <a:t>72.8% → 94%</a:t>
-            </a:r>
-          </a:p>
-        </p:txBody>
-      </p:sp>
-      <p:sp>
-        <p:nvSpPr>
-          <p:cNvPr id="20" name="TextBox 19"/>
-          <p:cNvSpPr txBox="1"/>
-          <p:nvPr/>
-        </p:nvSpPr>
-        <p:spPr>
-          <a:xfrm>
-            <a:off x="6793992" y="3566160"/>
-            <a:ext cx="4480560" cy="320040"/>
-          </a:xfrm>
-          <a:prstGeom prst="rect">
-            <a:avLst/>
-          </a:prstGeom>
-          <a:noFill/>
-        </p:spPr>
-        <p:txBody>
-          <a:bodyPr wrap="square" lIns="0" rIns="0" tIns="0" bIns="0" anchor="t">
-            <a:spAutoFit/>
-          </a:bodyPr>
-          <a:lstStyle/>
-          <a:p>
-            <a:pPr algn="l"/>
-            <a:r>
-              <a:rPr sz="1400" b="1">
-                <a:solidFill>
-                  <a:srgbClr val="3D4757"/>
-                </a:solidFill>
-                <a:latin typeface="微软雅黑"/>
-                <a:ea typeface="微软雅黑"/>
-                <a:cs typeface="微软雅黑"/>
-              </a:rPr>
-              <a:t>智能第二程出票率</a:t>
-            </a:r>
-            <a:r>
-              <a:rPr sz="1200" b="0">
-                <a:solidFill>
-                  <a:srgbClr val="7A8599"/>
-                </a:solidFill>
-                <a:latin typeface="微软雅黑"/>
-                <a:ea typeface="微软雅黑"/>
-                <a:cs typeface="微软雅黑"/>
-              </a:rPr>
-              <a:t>　确认出票改为直付</a:t>
-            </a:r>
-          </a:p>
-        </p:txBody>
-      </p:sp>
-      <p:sp>
-        <p:nvSpPr>
-          <p:cNvPr id="21" name="Rounded Rectangle 20"/>
-          <p:cNvSpPr/>
-          <p:nvPr/>
-        </p:nvSpPr>
-        <p:spPr>
-          <a:xfrm>
-            <a:off x="6565392" y="4389120"/>
-            <a:ext cx="4846320" cy="1371600"/>
-          </a:xfrm>
-          <a:prstGeom prst="roundRect">
-            <a:avLst>
-              <a:gd name="adj" fmla="val 6000"/>
-            </a:avLst>
-          </a:prstGeom>
-          <a:solidFill>
-            <a:srgbClr val="FFFFFF"/>
-          </a:solidFill>
-          <a:ln w="12700">
-            <a:solidFill>
-              <a:srgbClr val="D3E2FB"/>
-            </a:solidFill>
-          </a:ln>
-          <a:effectLst/>
-        </p:spPr>
-        <p:style>
-          <a:lnRef idx="1">
-            <a:schemeClr val="accent1"/>
-          </a:lnRef>
-          <a:fillRef idx="3">
-            <a:schemeClr val="accent1"/>
-          </a:fillRef>
-          <a:effectRef idx="2">
-            <a:schemeClr val="accent1"/>
-          </a:effectRef>
-          <a:fontRef idx="minor">
-            <a:schemeClr val="lt1"/>
-          </a:fontRef>
-        </p:style>
-        <p:txBody>
-          <a:bodyPr rtlCol="0" anchor="ctr"/>
-          <a:lstStyle/>
-          <a:p/>
-        </p:txBody>
-      </p:sp>
-      <p:sp>
-        <p:nvSpPr>
-          <p:cNvPr id="22" name="TextBox 21"/>
-          <p:cNvSpPr txBox="1"/>
-          <p:nvPr/>
-        </p:nvSpPr>
-        <p:spPr>
-          <a:xfrm>
-            <a:off x="6793992" y="4498848"/>
-            <a:ext cx="4480560" cy="640080"/>
-          </a:xfrm>
-          <a:prstGeom prst="rect">
-            <a:avLst/>
-          </a:prstGeom>
-          <a:noFill/>
-        </p:spPr>
-        <p:txBody>
-          <a:bodyPr wrap="square" lIns="0" rIns="0" tIns="0" bIns="0" anchor="t">
-            <a:spAutoFit/>
-          </a:bodyPr>
-          <a:lstStyle/>
-          <a:p>
-            <a:pPr algn="l"/>
-            <a:r>
-              <a:rPr sz="3400" b="1">
-                <a:solidFill>
-                  <a:srgbClr val="287DFA"/>
-                </a:solidFill>
-                <a:latin typeface="微软雅黑"/>
-                <a:ea typeface="微软雅黑"/>
-                <a:cs typeface="微软雅黑"/>
-              </a:rPr>
-              <a:t>+7 万张</a:t>
-            </a:r>
-          </a:p>
-        </p:txBody>
-      </p:sp>
-      <p:sp>
-        <p:nvSpPr>
-          <p:cNvPr id="23" name="TextBox 22"/>
-          <p:cNvSpPr txBox="1"/>
-          <p:nvPr/>
-        </p:nvSpPr>
-        <p:spPr>
-          <a:xfrm>
-            <a:off x="6793992" y="5166359"/>
-            <a:ext cx="4480560" cy="320040"/>
-          </a:xfrm>
-          <a:prstGeom prst="rect">
-            <a:avLst/>
-          </a:prstGeom>
-          <a:noFill/>
-        </p:spPr>
-        <p:txBody>
-          <a:bodyPr wrap="square" lIns="0" rIns="0" tIns="0" bIns="0" anchor="t">
-            <a:spAutoFit/>
-          </a:bodyPr>
-          <a:lstStyle/>
-          <a:p>
-            <a:pPr algn="l"/>
-            <a:r>
-              <a:rPr sz="1400" b="1">
-                <a:solidFill>
-                  <a:srgbClr val="3D4757"/>
-                </a:solidFill>
-                <a:latin typeface="微软雅黑"/>
-                <a:ea typeface="微软雅黑"/>
-                <a:cs typeface="微软雅黑"/>
-              </a:rPr>
-              <a:t>预估年化票量</a:t>
-            </a:r>
-            <a:r>
-              <a:rPr sz="1200" b="0">
-                <a:solidFill>
-                  <a:srgbClr val="7A8599"/>
-                </a:solidFill>
-                <a:latin typeface="微软雅黑"/>
-                <a:ea typeface="微软雅黑"/>
-                <a:cs typeface="微软雅黑"/>
-              </a:rPr>
-              <a:t>　智能第二程接直付</a:t>
             </a:r>
           </a:p>
         </p:txBody>
@@ -9333,1229 +9083,7 @@
                 <a:latin typeface="微软雅黑" panose="020B0503020204020204" pitchFamily="34" charset="-122"/>
                 <a:ea typeface="微软雅黑" panose="020B0503020204020204" pitchFamily="34" charset="-122"/>
               </a:rPr>
-              <a:t>3、主要业绩 · 火车票 Agent</a:t>
-            </a:r>
-            <a:endParaRPr lang="zh-CN" altLang="en-US" sz="2400" b="1" dirty="0">
-              <a:solidFill>
-                <a:srgbClr val="4472C4"/>
-              </a:solidFill>
-              <a:latin typeface="微软雅黑" panose="020B0503020204020204" pitchFamily="34" charset="-122"/>
-              <a:ea typeface="微软雅黑" panose="020B0503020204020204" pitchFamily="34" charset="-122"/>
-            </a:endParaRPr>
-          </a:p>
-        </p:txBody>
-      </p:sp>
-      <p:sp>
-        <p:nvSpPr>
-          <p:cNvPr id="3" name="key-message"/>
-          <p:cNvSpPr txBox="1"/>
-          <p:nvPr/>
-        </p:nvSpPr>
-        <p:spPr>
-          <a:xfrm>
-            <a:off x="457200" y="896112"/>
-            <a:ext cx="11247120" cy="411480"/>
-          </a:xfrm>
-          <a:prstGeom prst="rect">
-            <a:avLst/>
-          </a:prstGeom>
-          <a:noFill/>
-        </p:spPr>
-        <p:txBody>
-          <a:bodyPr wrap="square" lIns="0" rIns="0" tIns="0" bIns="0" anchor="t">
-            <a:spAutoFit/>
-          </a:bodyPr>
-          <a:lstStyle/>
-          <a:p>
-            <a:pPr algn="l"/>
-            <a:r>
-              <a:rPr sz="1800" b="1">
-                <a:solidFill>
-                  <a:srgbClr val="15315E"/>
-                </a:solidFill>
-                <a:latin typeface="微软雅黑"/>
-                <a:ea typeface="微软雅黑"/>
-                <a:cs typeface="微软雅黑"/>
-              </a:rPr>
-              <a:t>Agent 能不能答好，前提是先判断对：该不该由火车来答、属于哪一类</a:t>
-            </a:r>
-          </a:p>
-        </p:txBody>
-      </p:sp>
-      <p:sp>
-        <p:nvSpPr>
-          <p:cNvPr id="4" name="Rounded Rectangle 3"/>
-          <p:cNvSpPr/>
-          <p:nvPr/>
-        </p:nvSpPr>
-        <p:spPr>
-          <a:xfrm>
-            <a:off x="457200" y="1508760"/>
-            <a:ext cx="5486400" cy="548640"/>
-          </a:xfrm>
-          <a:prstGeom prst="roundRect">
-            <a:avLst>
-              <a:gd name="adj" fmla="val 6000"/>
-            </a:avLst>
-          </a:prstGeom>
-          <a:solidFill>
-            <a:srgbClr val="287DFA"/>
-          </a:solidFill>
-          <a:ln>
-            <a:noFill/>
-          </a:ln>
-          <a:effectLst/>
-        </p:spPr>
-        <p:style>
-          <a:lnRef idx="1">
-            <a:schemeClr val="accent1"/>
-          </a:lnRef>
-          <a:fillRef idx="3">
-            <a:schemeClr val="accent1"/>
-          </a:fillRef>
-          <a:effectRef idx="2">
-            <a:schemeClr val="accent1"/>
-          </a:effectRef>
-          <a:fontRef idx="minor">
-            <a:schemeClr val="lt1"/>
-          </a:fontRef>
-        </p:style>
-        <p:txBody>
-          <a:bodyPr rtlCol="0" anchor="ctr"/>
-          <a:lstStyle/>
-          <a:p/>
-        </p:txBody>
-      </p:sp>
-      <p:sp>
-        <p:nvSpPr>
-          <p:cNvPr id="5" name="TextBox 4"/>
-          <p:cNvSpPr txBox="1"/>
-          <p:nvPr/>
-        </p:nvSpPr>
-        <p:spPr>
-          <a:xfrm>
-            <a:off x="457200" y="1508760"/>
-            <a:ext cx="5486400" cy="548640"/>
-          </a:xfrm>
-          <a:prstGeom prst="rect">
-            <a:avLst/>
-          </a:prstGeom>
-          <a:noFill/>
-        </p:spPr>
-        <p:txBody>
-          <a:bodyPr wrap="square" lIns="0" rIns="0" tIns="0" bIns="0" anchor="ctr">
-            <a:spAutoFit/>
-          </a:bodyPr>
-          <a:lstStyle/>
-          <a:p>
-            <a:pPr algn="ctr"/>
-            <a:r>
-              <a:rPr sz="1800" b="1">
-                <a:solidFill>
-                  <a:srgbClr val="FFFFFF"/>
-                </a:solidFill>
-                <a:latin typeface="微软雅黑"/>
-                <a:ea typeface="微软雅黑"/>
-                <a:cs typeface="微软雅黑"/>
-              </a:rPr>
-              <a:t>一期 · 界定什么属于火车</a:t>
-            </a:r>
-          </a:p>
-        </p:txBody>
-      </p:sp>
-      <p:sp>
-        <p:nvSpPr>
-          <p:cNvPr id="6" name="icon-circle"/>
-          <p:cNvSpPr/>
-          <p:nvPr/>
-        </p:nvSpPr>
-        <p:spPr>
-          <a:xfrm>
-            <a:off x="548640" y="2331720"/>
-            <a:ext cx="502920" cy="502920"/>
-          </a:xfrm>
-          <a:prstGeom prst="ellipse">
-            <a:avLst/>
-          </a:prstGeom>
-          <a:solidFill>
-            <a:srgbClr val="FF7A1A"/>
-          </a:solidFill>
-          <a:ln>
-            <a:noFill/>
-          </a:ln>
-          <a:effectLst/>
-        </p:spPr>
-        <p:style>
-          <a:lnRef idx="1">
-            <a:schemeClr val="accent1"/>
-          </a:lnRef>
-          <a:fillRef idx="3">
-            <a:schemeClr val="accent1"/>
-          </a:fillRef>
-          <a:effectRef idx="2">
-            <a:schemeClr val="accent1"/>
-          </a:effectRef>
-          <a:fontRef idx="minor">
-            <a:schemeClr val="lt1"/>
-          </a:fontRef>
-        </p:style>
-        <p:txBody>
-          <a:bodyPr rtlCol="0" anchor="ctr"/>
-          <a:lstStyle/>
-          <a:p/>
-        </p:txBody>
-      </p:sp>
-      <p:pic>
-        <p:nvPicPr>
-          <p:cNvPr id="7" name="Picture 6" descr="FaTriangleExclamation_w.png"/>
-          <p:cNvPicPr>
-            <a:picLocks noChangeAspect="1"/>
-          </p:cNvPicPr>
-          <p:nvPr/>
-        </p:nvPicPr>
-        <p:blipFill>
-          <a:blip r:embed="rId3"/>
-          <a:stretch>
-            <a:fillRect/>
-          </a:stretch>
-        </p:blipFill>
-        <p:spPr>
-          <a:xfrm>
-            <a:off x="674370" y="2457450"/>
-            <a:ext cx="251460" cy="251460"/>
-          </a:xfrm>
-          <a:prstGeom prst="rect">
-            <a:avLst/>
-          </a:prstGeom>
-        </p:spPr>
-      </p:pic>
-      <p:sp>
-        <p:nvSpPr>
-          <p:cNvPr id="8" name="TextBox 7"/>
-          <p:cNvSpPr txBox="1"/>
-          <p:nvPr/>
-        </p:nvSpPr>
-        <p:spPr>
-          <a:xfrm>
-            <a:off x="1234440" y="2286000"/>
-            <a:ext cx="4663440" cy="320040"/>
-          </a:xfrm>
-          <a:prstGeom prst="rect">
-            <a:avLst/>
-          </a:prstGeom>
-          <a:noFill/>
-        </p:spPr>
-        <p:txBody>
-          <a:bodyPr wrap="square" lIns="0" rIns="0" tIns="0" bIns="0" anchor="t">
-            <a:spAutoFit/>
-          </a:bodyPr>
-          <a:lstStyle/>
-          <a:p>
-            <a:pPr algn="l"/>
-            <a:r>
-              <a:rPr sz="1400" b="1">
-                <a:solidFill>
-                  <a:srgbClr val="FF7A1A"/>
-                </a:solidFill>
-                <a:latin typeface="微软雅黑"/>
-                <a:ea typeface="微软雅黑"/>
-                <a:cs typeface="微软雅黑"/>
-              </a:rPr>
-              <a:t>问题</a:t>
-            </a:r>
-          </a:p>
-        </p:txBody>
-      </p:sp>
-      <p:sp>
-        <p:nvSpPr>
-          <p:cNvPr id="9" name="TextBox 8"/>
-          <p:cNvSpPr txBox="1"/>
-          <p:nvPr/>
-        </p:nvSpPr>
-        <p:spPr>
-          <a:xfrm>
-            <a:off x="1234440" y="2587752"/>
-            <a:ext cx="4663440" cy="731520"/>
-          </a:xfrm>
-          <a:prstGeom prst="rect">
-            <a:avLst/>
-          </a:prstGeom>
-          <a:noFill/>
-        </p:spPr>
-        <p:txBody>
-          <a:bodyPr wrap="square" lIns="0" rIns="0" tIns="0" bIns="0" anchor="t">
-            <a:spAutoFit/>
-          </a:bodyPr>
-          <a:lstStyle/>
-          <a:p>
-            <a:pPr algn="l"/>
-            <a:r>
-              <a:rPr sz="1400" b="0">
-                <a:solidFill>
-                  <a:srgbClr val="3D4757"/>
-                </a:solidFill>
-                <a:latin typeface="微软雅黑"/>
-                <a:ea typeface="微软雅黑"/>
-                <a:cs typeface="微软雅黑"/>
-              </a:rPr>
-              <a:t>提示词有漏洞，把不属于这一类的 query 纳了进来</a:t>
-            </a:r>
-          </a:p>
-        </p:txBody>
-      </p:sp>
-      <p:sp>
-        <p:nvSpPr>
-          <p:cNvPr id="10" name="icon-circle"/>
-          <p:cNvSpPr/>
-          <p:nvPr/>
-        </p:nvSpPr>
-        <p:spPr>
-          <a:xfrm>
-            <a:off x="548640" y="3429000"/>
-            <a:ext cx="502920" cy="502920"/>
-          </a:xfrm>
-          <a:prstGeom prst="ellipse">
-            <a:avLst/>
-          </a:prstGeom>
-          <a:solidFill>
-            <a:srgbClr val="287DFA"/>
-          </a:solidFill>
-          <a:ln>
-            <a:noFill/>
-          </a:ln>
-          <a:effectLst/>
-        </p:spPr>
-        <p:style>
-          <a:lnRef idx="1">
-            <a:schemeClr val="accent1"/>
-          </a:lnRef>
-          <a:fillRef idx="3">
-            <a:schemeClr val="accent1"/>
-          </a:fillRef>
-          <a:effectRef idx="2">
-            <a:schemeClr val="accent1"/>
-          </a:effectRef>
-          <a:fontRef idx="minor">
-            <a:schemeClr val="lt1"/>
-          </a:fontRef>
-        </p:style>
-        <p:txBody>
-          <a:bodyPr rtlCol="0" anchor="ctr"/>
-          <a:lstStyle/>
-          <a:p/>
-        </p:txBody>
-      </p:sp>
-      <p:pic>
-        <p:nvPicPr>
-          <p:cNvPr id="11" name="Picture 10" descr="FaMagnifyingGlass_w.png"/>
-          <p:cNvPicPr>
-            <a:picLocks noChangeAspect="1"/>
-          </p:cNvPicPr>
-          <p:nvPr/>
-        </p:nvPicPr>
-        <p:blipFill>
-          <a:blip r:embed="rId4"/>
-          <a:stretch>
-            <a:fillRect/>
-          </a:stretch>
-        </p:blipFill>
-        <p:spPr>
-          <a:xfrm>
-            <a:off x="674370" y="3554730"/>
-            <a:ext cx="251460" cy="251460"/>
-          </a:xfrm>
-          <a:prstGeom prst="rect">
-            <a:avLst/>
-          </a:prstGeom>
-        </p:spPr>
-      </p:pic>
-      <p:sp>
-        <p:nvSpPr>
-          <p:cNvPr id="12" name="TextBox 11"/>
-          <p:cNvSpPr txBox="1"/>
-          <p:nvPr/>
-        </p:nvSpPr>
-        <p:spPr>
-          <a:xfrm>
-            <a:off x="1234440" y="3383280"/>
-            <a:ext cx="4663440" cy="320040"/>
-          </a:xfrm>
-          <a:prstGeom prst="rect">
-            <a:avLst/>
-          </a:prstGeom>
-          <a:noFill/>
-        </p:spPr>
-        <p:txBody>
-          <a:bodyPr wrap="square" lIns="0" rIns="0" tIns="0" bIns="0" anchor="t">
-            <a:spAutoFit/>
-          </a:bodyPr>
-          <a:lstStyle/>
-          <a:p>
-            <a:pPr algn="l"/>
-            <a:r>
-              <a:rPr sz="1400" b="1">
-                <a:solidFill>
-                  <a:srgbClr val="287DFA"/>
-                </a:solidFill>
-                <a:latin typeface="微软雅黑"/>
-                <a:ea typeface="微软雅黑"/>
-                <a:cs typeface="微软雅黑"/>
-              </a:rPr>
-              <a:t>方案</a:t>
-            </a:r>
-          </a:p>
-        </p:txBody>
-      </p:sp>
-      <p:sp>
-        <p:nvSpPr>
-          <p:cNvPr id="13" name="TextBox 12"/>
-          <p:cNvSpPr txBox="1"/>
-          <p:nvPr/>
-        </p:nvSpPr>
-        <p:spPr>
-          <a:xfrm>
-            <a:off x="1234440" y="3685032"/>
-            <a:ext cx="4663440" cy="731520"/>
-          </a:xfrm>
-          <a:prstGeom prst="rect">
-            <a:avLst/>
-          </a:prstGeom>
-          <a:noFill/>
-        </p:spPr>
-        <p:txBody>
-          <a:bodyPr wrap="square" lIns="0" rIns="0" tIns="0" bIns="0" anchor="t">
-            <a:spAutoFit/>
-          </a:bodyPr>
-          <a:lstStyle/>
-          <a:p>
-            <a:pPr algn="l"/>
-            <a:r>
-              <a:rPr sz="1400" b="0">
-                <a:solidFill>
-                  <a:srgbClr val="3D4757"/>
-                </a:solidFill>
-                <a:latin typeface="微软雅黑"/>
-                <a:ea typeface="微软雅黑"/>
-                <a:cs typeface="微软雅黑"/>
-              </a:rPr>
-              <a:t>与算法业务标签逐条比对，盯“算法对、Agent 错”的样本，逐类修改关键词和分类标准</a:t>
-            </a:r>
-          </a:p>
-        </p:txBody>
-      </p:sp>
-      <p:sp>
-        <p:nvSpPr>
-          <p:cNvPr id="14" name="Rounded Rectangle 13"/>
-          <p:cNvSpPr/>
-          <p:nvPr/>
-        </p:nvSpPr>
-        <p:spPr>
-          <a:xfrm>
-            <a:off x="457200" y="4526280"/>
-            <a:ext cx="5486400" cy="1554480"/>
-          </a:xfrm>
-          <a:prstGeom prst="roundRect">
-            <a:avLst>
-              <a:gd name="adj" fmla="val 6000"/>
-            </a:avLst>
-          </a:prstGeom>
-          <a:solidFill>
-            <a:srgbClr val="EAF2FF"/>
-          </a:solidFill>
-          <a:ln>
-            <a:noFill/>
-          </a:ln>
-          <a:effectLst/>
-        </p:spPr>
-        <p:style>
-          <a:lnRef idx="1">
-            <a:schemeClr val="accent1"/>
-          </a:lnRef>
-          <a:fillRef idx="3">
-            <a:schemeClr val="accent1"/>
-          </a:fillRef>
-          <a:effectRef idx="2">
-            <a:schemeClr val="accent1"/>
-          </a:effectRef>
-          <a:fontRef idx="minor">
-            <a:schemeClr val="lt1"/>
-          </a:fontRef>
-        </p:style>
-        <p:txBody>
-          <a:bodyPr rtlCol="0" anchor="ctr"/>
-          <a:lstStyle/>
-          <a:p/>
-        </p:txBody>
-      </p:sp>
-      <p:sp>
-        <p:nvSpPr>
-          <p:cNvPr id="15" name="TextBox 14"/>
-          <p:cNvSpPr txBox="1"/>
-          <p:nvPr/>
-        </p:nvSpPr>
-        <p:spPr>
-          <a:xfrm>
-            <a:off x="731520" y="4617720"/>
-            <a:ext cx="1828800" cy="320040"/>
-          </a:xfrm>
-          <a:prstGeom prst="rect">
-            <a:avLst/>
-          </a:prstGeom>
-          <a:noFill/>
-        </p:spPr>
-        <p:txBody>
-          <a:bodyPr wrap="square" lIns="0" rIns="0" tIns="0" bIns="0" anchor="t">
-            <a:spAutoFit/>
-          </a:bodyPr>
-          <a:lstStyle/>
-          <a:p>
-            <a:pPr algn="l"/>
-            <a:r>
-              <a:rPr sz="1400" b="1">
-                <a:solidFill>
-                  <a:srgbClr val="287DFA"/>
-                </a:solidFill>
-                <a:latin typeface="微软雅黑"/>
-                <a:ea typeface="微软雅黑"/>
-                <a:cs typeface="微软雅黑"/>
-              </a:rPr>
-              <a:t>结果</a:t>
-            </a:r>
-          </a:p>
-        </p:txBody>
-      </p:sp>
-      <p:sp>
-        <p:nvSpPr>
-          <p:cNvPr id="16" name="TextBox 15"/>
-          <p:cNvSpPr txBox="1"/>
-          <p:nvPr/>
-        </p:nvSpPr>
-        <p:spPr>
-          <a:xfrm>
-            <a:off x="731520" y="4919472"/>
-            <a:ext cx="2926079" cy="594360"/>
-          </a:xfrm>
-          <a:prstGeom prst="rect">
-            <a:avLst/>
-          </a:prstGeom>
-          <a:noFill/>
-        </p:spPr>
-        <p:txBody>
-          <a:bodyPr wrap="square" lIns="0" rIns="0" tIns="0" bIns="0" anchor="t">
-            <a:spAutoFit/>
-          </a:bodyPr>
-          <a:lstStyle/>
-          <a:p>
-            <a:pPr algn="l"/>
-            <a:r>
-              <a:rPr sz="2800" b="1">
-                <a:solidFill>
-                  <a:srgbClr val="287DFA"/>
-                </a:solidFill>
-                <a:latin typeface="微软雅黑"/>
-                <a:ea typeface="微软雅黑"/>
-                <a:cs typeface="微软雅黑"/>
-              </a:rPr>
-              <a:t>94.6% → 98%</a:t>
-            </a:r>
-          </a:p>
-        </p:txBody>
-      </p:sp>
-      <p:sp>
-        <p:nvSpPr>
-          <p:cNvPr id="17" name="TextBox 16"/>
-          <p:cNvSpPr txBox="1"/>
-          <p:nvPr/>
-        </p:nvSpPr>
-        <p:spPr>
-          <a:xfrm>
-            <a:off x="731520" y="5532120"/>
-            <a:ext cx="2926079" cy="365760"/>
-          </a:xfrm>
-          <a:prstGeom prst="rect">
-            <a:avLst/>
-          </a:prstGeom>
-          <a:noFill/>
-        </p:spPr>
-        <p:txBody>
-          <a:bodyPr wrap="square" lIns="0" rIns="0" tIns="0" bIns="0" anchor="t">
-            <a:spAutoFit/>
-          </a:bodyPr>
-          <a:lstStyle/>
-          <a:p>
-            <a:pPr algn="l"/>
-            <a:r>
-              <a:rPr sz="1300" b="0">
-                <a:solidFill>
-                  <a:srgbClr val="3D4757"/>
-                </a:solidFill>
-                <a:latin typeface="微软雅黑"/>
-                <a:ea typeface="微软雅黑"/>
-                <a:cs typeface="微软雅黑"/>
-              </a:rPr>
-              <a:t>意图分类准确率</a:t>
-            </a:r>
-          </a:p>
-        </p:txBody>
-      </p:sp>
-      <p:sp>
-        <p:nvSpPr>
-          <p:cNvPr id="18" name="TextBox 17"/>
-          <p:cNvSpPr txBox="1"/>
-          <p:nvPr/>
-        </p:nvSpPr>
-        <p:spPr>
-          <a:xfrm>
-            <a:off x="3749039" y="4919472"/>
-            <a:ext cx="1828800" cy="594360"/>
-          </a:xfrm>
-          <a:prstGeom prst="rect">
-            <a:avLst/>
-          </a:prstGeom>
-          <a:noFill/>
-        </p:spPr>
-        <p:txBody>
-          <a:bodyPr wrap="square" lIns="0" rIns="0" tIns="0" bIns="0" anchor="t">
-            <a:spAutoFit/>
-          </a:bodyPr>
-          <a:lstStyle/>
-          <a:p>
-            <a:pPr algn="l"/>
-            <a:r>
-              <a:rPr sz="2800" b="1">
-                <a:solidFill>
-                  <a:srgbClr val="287DFA"/>
-                </a:solidFill>
-                <a:latin typeface="微软雅黑"/>
-                <a:ea typeface="微软雅黑"/>
-                <a:cs typeface="微软雅黑"/>
-              </a:rPr>
-              <a:t>+7.7%</a:t>
-            </a:r>
-          </a:p>
-        </p:txBody>
-      </p:sp>
-      <p:sp>
-        <p:nvSpPr>
-          <p:cNvPr id="19" name="TextBox 18"/>
-          <p:cNvSpPr txBox="1"/>
-          <p:nvPr/>
-        </p:nvSpPr>
-        <p:spPr>
-          <a:xfrm>
-            <a:off x="3749039" y="5532120"/>
-            <a:ext cx="1828800" cy="365760"/>
-          </a:xfrm>
-          <a:prstGeom prst="rect">
-            <a:avLst/>
-          </a:prstGeom>
-          <a:noFill/>
-        </p:spPr>
-        <p:txBody>
-          <a:bodyPr wrap="square" lIns="0" rIns="0" tIns="0" bIns="0" anchor="t">
-            <a:spAutoFit/>
-          </a:bodyPr>
-          <a:lstStyle/>
-          <a:p>
-            <a:pPr algn="l"/>
-            <a:r>
-              <a:rPr sz="1300" b="0">
-                <a:solidFill>
-                  <a:srgbClr val="3D4757"/>
-                </a:solidFill>
-                <a:latin typeface="微软雅黑"/>
-                <a:ea typeface="微软雅黑"/>
-                <a:cs typeface="微软雅黑"/>
-              </a:rPr>
-              <a:t>正文完播率（对比问道兜底）</a:t>
-            </a:r>
-          </a:p>
-        </p:txBody>
-      </p:sp>
-      <p:sp>
-        <p:nvSpPr>
-          <p:cNvPr id="20" name="Rounded Rectangle 19"/>
-          <p:cNvSpPr/>
-          <p:nvPr/>
-        </p:nvSpPr>
-        <p:spPr>
-          <a:xfrm>
-            <a:off x="6245352" y="1508760"/>
-            <a:ext cx="5486400" cy="548640"/>
-          </a:xfrm>
-          <a:prstGeom prst="roundRect">
-            <a:avLst>
-              <a:gd name="adj" fmla="val 6000"/>
-            </a:avLst>
-          </a:prstGeom>
-          <a:solidFill>
-            <a:srgbClr val="287DFA"/>
-          </a:solidFill>
-          <a:ln>
-            <a:noFill/>
-          </a:ln>
-          <a:effectLst/>
-        </p:spPr>
-        <p:style>
-          <a:lnRef idx="1">
-            <a:schemeClr val="accent1"/>
-          </a:lnRef>
-          <a:fillRef idx="3">
-            <a:schemeClr val="accent1"/>
-          </a:fillRef>
-          <a:effectRef idx="2">
-            <a:schemeClr val="accent1"/>
-          </a:effectRef>
-          <a:fontRef idx="minor">
-            <a:schemeClr val="lt1"/>
-          </a:fontRef>
-        </p:style>
-        <p:txBody>
-          <a:bodyPr rtlCol="0" anchor="ctr"/>
-          <a:lstStyle/>
-          <a:p/>
-        </p:txBody>
-      </p:sp>
-      <p:sp>
-        <p:nvSpPr>
-          <p:cNvPr id="21" name="TextBox 20"/>
-          <p:cNvSpPr txBox="1"/>
-          <p:nvPr/>
-        </p:nvSpPr>
-        <p:spPr>
-          <a:xfrm>
-            <a:off x="6245352" y="1508760"/>
-            <a:ext cx="5486400" cy="548640"/>
-          </a:xfrm>
-          <a:prstGeom prst="rect">
-            <a:avLst/>
-          </a:prstGeom>
-          <a:noFill/>
-        </p:spPr>
-        <p:txBody>
-          <a:bodyPr wrap="square" lIns="0" rIns="0" tIns="0" bIns="0" anchor="ctr">
-            <a:spAutoFit/>
-          </a:bodyPr>
-          <a:lstStyle/>
-          <a:p>
-            <a:pPr algn="ctr"/>
-            <a:r>
-              <a:rPr sz="1800" b="1">
-                <a:solidFill>
-                  <a:srgbClr val="FFFFFF"/>
-                </a:solidFill>
-                <a:latin typeface="微软雅黑"/>
-                <a:ea typeface="微软雅黑"/>
-                <a:cs typeface="微软雅黑"/>
-              </a:rPr>
-              <a:t>二期 · 界定什么不属于火车</a:t>
-            </a:r>
-          </a:p>
-        </p:txBody>
-      </p:sp>
-      <p:sp>
-        <p:nvSpPr>
-          <p:cNvPr id="22" name="icon-circle"/>
-          <p:cNvSpPr/>
-          <p:nvPr/>
-        </p:nvSpPr>
-        <p:spPr>
-          <a:xfrm>
-            <a:off x="6336792" y="2331720"/>
-            <a:ext cx="502920" cy="502920"/>
-          </a:xfrm>
-          <a:prstGeom prst="ellipse">
-            <a:avLst/>
-          </a:prstGeom>
-          <a:solidFill>
-            <a:srgbClr val="FF7A1A"/>
-          </a:solidFill>
-          <a:ln>
-            <a:noFill/>
-          </a:ln>
-          <a:effectLst/>
-        </p:spPr>
-        <p:style>
-          <a:lnRef idx="1">
-            <a:schemeClr val="accent1"/>
-          </a:lnRef>
-          <a:fillRef idx="3">
-            <a:schemeClr val="accent1"/>
-          </a:fillRef>
-          <a:effectRef idx="2">
-            <a:schemeClr val="accent1"/>
-          </a:effectRef>
-          <a:fontRef idx="minor">
-            <a:schemeClr val="lt1"/>
-          </a:fontRef>
-        </p:style>
-        <p:txBody>
-          <a:bodyPr rtlCol="0" anchor="ctr"/>
-          <a:lstStyle/>
-          <a:p/>
-        </p:txBody>
-      </p:sp>
-      <p:pic>
-        <p:nvPicPr>
-          <p:cNvPr id="23" name="Picture 22" descr="FaTriangleExclamation_w.png"/>
-          <p:cNvPicPr>
-            <a:picLocks noChangeAspect="1"/>
-          </p:cNvPicPr>
-          <p:nvPr/>
-        </p:nvPicPr>
-        <p:blipFill>
-          <a:blip r:embed="rId3"/>
-          <a:stretch>
-            <a:fillRect/>
-          </a:stretch>
-        </p:blipFill>
-        <p:spPr>
-          <a:xfrm>
-            <a:off x="6462522" y="2457450"/>
-            <a:ext cx="251460" cy="251460"/>
-          </a:xfrm>
-          <a:prstGeom prst="rect">
-            <a:avLst/>
-          </a:prstGeom>
-        </p:spPr>
-      </p:pic>
-      <p:sp>
-        <p:nvSpPr>
-          <p:cNvPr id="24" name="TextBox 23"/>
-          <p:cNvSpPr txBox="1"/>
-          <p:nvPr/>
-        </p:nvSpPr>
-        <p:spPr>
-          <a:xfrm>
-            <a:off x="7022592" y="2286000"/>
-            <a:ext cx="4663440" cy="320040"/>
-          </a:xfrm>
-          <a:prstGeom prst="rect">
-            <a:avLst/>
-          </a:prstGeom>
-          <a:noFill/>
-        </p:spPr>
-        <p:txBody>
-          <a:bodyPr wrap="square" lIns="0" rIns="0" tIns="0" bIns="0" anchor="t">
-            <a:spAutoFit/>
-          </a:bodyPr>
-          <a:lstStyle/>
-          <a:p>
-            <a:pPr algn="l"/>
-            <a:r>
-              <a:rPr sz="1400" b="1">
-                <a:solidFill>
-                  <a:srgbClr val="FF7A1A"/>
-                </a:solidFill>
-                <a:latin typeface="微软雅黑"/>
-                <a:ea typeface="微软雅黑"/>
-                <a:cs typeface="微软雅黑"/>
-              </a:rPr>
-              <a:t>问题</a:t>
-            </a:r>
-          </a:p>
-        </p:txBody>
-      </p:sp>
-      <p:sp>
-        <p:nvSpPr>
-          <p:cNvPr id="25" name="TextBox 24"/>
-          <p:cNvSpPr txBox="1"/>
-          <p:nvPr/>
-        </p:nvSpPr>
-        <p:spPr>
-          <a:xfrm>
-            <a:off x="7022592" y="2587752"/>
-            <a:ext cx="4663440" cy="731520"/>
-          </a:xfrm>
-          <a:prstGeom prst="rect">
-            <a:avLst/>
-          </a:prstGeom>
-          <a:noFill/>
-        </p:spPr>
-        <p:txBody>
-          <a:bodyPr wrap="square" lIns="0" rIns="0" tIns="0" bIns="0" anchor="t">
-            <a:spAutoFit/>
-          </a:bodyPr>
-          <a:lstStyle/>
-          <a:p>
-            <a:pPr algn="l"/>
-            <a:r>
-              <a:rPr sz="1400" b="0">
-                <a:solidFill>
-                  <a:srgbClr val="3D4757"/>
-                </a:solidFill>
-                <a:latin typeface="微软雅黑"/>
-                <a:ea typeface="微软雅黑"/>
-                <a:cs typeface="微软雅黑"/>
-              </a:rPr>
-              <a:t>约一半问题被拒答，其中一部分根本不属于火车，是被错误分发过来的</a:t>
-            </a:r>
-          </a:p>
-        </p:txBody>
-      </p:sp>
-      <p:sp>
-        <p:nvSpPr>
-          <p:cNvPr id="26" name="icon-circle"/>
-          <p:cNvSpPr/>
-          <p:nvPr/>
-        </p:nvSpPr>
-        <p:spPr>
-          <a:xfrm>
-            <a:off x="6336792" y="3429000"/>
-            <a:ext cx="502920" cy="502920"/>
-          </a:xfrm>
-          <a:prstGeom prst="ellipse">
-            <a:avLst/>
-          </a:prstGeom>
-          <a:solidFill>
-            <a:srgbClr val="287DFA"/>
-          </a:solidFill>
-          <a:ln>
-            <a:noFill/>
-          </a:ln>
-          <a:effectLst/>
-        </p:spPr>
-        <p:style>
-          <a:lnRef idx="1">
-            <a:schemeClr val="accent1"/>
-          </a:lnRef>
-          <a:fillRef idx="3">
-            <a:schemeClr val="accent1"/>
-          </a:fillRef>
-          <a:effectRef idx="2">
-            <a:schemeClr val="accent1"/>
-          </a:effectRef>
-          <a:fontRef idx="minor">
-            <a:schemeClr val="lt1"/>
-          </a:fontRef>
-        </p:style>
-        <p:txBody>
-          <a:bodyPr rtlCol="0" anchor="ctr"/>
-          <a:lstStyle/>
-          <a:p/>
-        </p:txBody>
-      </p:sp>
-      <p:pic>
-        <p:nvPicPr>
-          <p:cNvPr id="27" name="Picture 26" descr="FaFilter_w.png"/>
-          <p:cNvPicPr>
-            <a:picLocks noChangeAspect="1"/>
-          </p:cNvPicPr>
-          <p:nvPr/>
-        </p:nvPicPr>
-        <p:blipFill>
-          <a:blip r:embed="rId5"/>
-          <a:stretch>
-            <a:fillRect/>
-          </a:stretch>
-        </p:blipFill>
-        <p:spPr>
-          <a:xfrm>
-            <a:off x="6462522" y="3554730"/>
-            <a:ext cx="251460" cy="251460"/>
-          </a:xfrm>
-          <a:prstGeom prst="rect">
-            <a:avLst/>
-          </a:prstGeom>
-        </p:spPr>
-      </p:pic>
-      <p:sp>
-        <p:nvSpPr>
-          <p:cNvPr id="28" name="TextBox 27"/>
-          <p:cNvSpPr txBox="1"/>
-          <p:nvPr/>
-        </p:nvSpPr>
-        <p:spPr>
-          <a:xfrm>
-            <a:off x="7022592" y="3383280"/>
-            <a:ext cx="4663440" cy="320040"/>
-          </a:xfrm>
-          <a:prstGeom prst="rect">
-            <a:avLst/>
-          </a:prstGeom>
-          <a:noFill/>
-        </p:spPr>
-        <p:txBody>
-          <a:bodyPr wrap="square" lIns="0" rIns="0" tIns="0" bIns="0" anchor="t">
-            <a:spAutoFit/>
-          </a:bodyPr>
-          <a:lstStyle/>
-          <a:p>
-            <a:pPr algn="l"/>
-            <a:r>
-              <a:rPr sz="1400" b="1">
-                <a:solidFill>
-                  <a:srgbClr val="287DFA"/>
-                </a:solidFill>
-                <a:latin typeface="微软雅黑"/>
-                <a:ea typeface="微软雅黑"/>
-                <a:cs typeface="微软雅黑"/>
-              </a:rPr>
-              <a:t>方案</a:t>
-            </a:r>
-          </a:p>
-        </p:txBody>
-      </p:sp>
-      <p:sp>
-        <p:nvSpPr>
-          <p:cNvPr id="29" name="TextBox 28"/>
-          <p:cNvSpPr txBox="1"/>
-          <p:nvPr/>
-        </p:nvSpPr>
-        <p:spPr>
-          <a:xfrm>
-            <a:off x="7022592" y="3685032"/>
-            <a:ext cx="4663440" cy="731520"/>
-          </a:xfrm>
-          <a:prstGeom prst="rect">
-            <a:avLst/>
-          </a:prstGeom>
-          <a:noFill/>
-        </p:spPr>
-        <p:txBody>
-          <a:bodyPr wrap="square" lIns="0" rIns="0" tIns="0" bIns="0" anchor="t">
-            <a:spAutoFit/>
-          </a:bodyPr>
-          <a:lstStyle/>
-          <a:p>
-            <a:pPr algn="l"/>
-            <a:r>
-              <a:rPr sz="1400" b="0">
-                <a:solidFill>
-                  <a:srgbClr val="3D4757"/>
-                </a:solidFill>
-                <a:latin typeface="微软雅黑"/>
-                <a:ea typeface="微软雅黑"/>
-                <a:cs typeface="微软雅黑"/>
-              </a:rPr>
-              <a:t>持续推进能力覆盖的同时，优先治理错误分发：人工核查 1,000 多条拒答 query，整理火车问题边界，交给问道调整分发策略</a:t>
-            </a:r>
-          </a:p>
-        </p:txBody>
-      </p:sp>
-      <p:sp>
-        <p:nvSpPr>
-          <p:cNvPr id="30" name="Rounded Rectangle 29"/>
-          <p:cNvSpPr/>
-          <p:nvPr/>
-        </p:nvSpPr>
-        <p:spPr>
-          <a:xfrm>
-            <a:off x="6245352" y="4526280"/>
-            <a:ext cx="5486400" cy="1554480"/>
-          </a:xfrm>
-          <a:prstGeom prst="roundRect">
-            <a:avLst>
-              <a:gd name="adj" fmla="val 6000"/>
-            </a:avLst>
-          </a:prstGeom>
-          <a:solidFill>
-            <a:srgbClr val="EAF2FF"/>
-          </a:solidFill>
-          <a:ln>
-            <a:noFill/>
-          </a:ln>
-          <a:effectLst/>
-        </p:spPr>
-        <p:style>
-          <a:lnRef idx="1">
-            <a:schemeClr val="accent1"/>
-          </a:lnRef>
-          <a:fillRef idx="3">
-            <a:schemeClr val="accent1"/>
-          </a:fillRef>
-          <a:effectRef idx="2">
-            <a:schemeClr val="accent1"/>
-          </a:effectRef>
-          <a:fontRef idx="minor">
-            <a:schemeClr val="lt1"/>
-          </a:fontRef>
-        </p:style>
-        <p:txBody>
-          <a:bodyPr rtlCol="0" anchor="ctr"/>
-          <a:lstStyle/>
-          <a:p/>
-        </p:txBody>
-      </p:sp>
-      <p:sp>
-        <p:nvSpPr>
-          <p:cNvPr id="31" name="TextBox 30"/>
-          <p:cNvSpPr txBox="1"/>
-          <p:nvPr/>
-        </p:nvSpPr>
-        <p:spPr>
-          <a:xfrm>
-            <a:off x="6519672" y="4617720"/>
-            <a:ext cx="1828800" cy="320040"/>
-          </a:xfrm>
-          <a:prstGeom prst="rect">
-            <a:avLst/>
-          </a:prstGeom>
-          <a:noFill/>
-        </p:spPr>
-        <p:txBody>
-          <a:bodyPr wrap="square" lIns="0" rIns="0" tIns="0" bIns="0" anchor="t">
-            <a:spAutoFit/>
-          </a:bodyPr>
-          <a:lstStyle/>
-          <a:p>
-            <a:pPr algn="l"/>
-            <a:r>
-              <a:rPr sz="1400" b="1">
-                <a:solidFill>
-                  <a:srgbClr val="287DFA"/>
-                </a:solidFill>
-                <a:latin typeface="微软雅黑"/>
-                <a:ea typeface="微软雅黑"/>
-                <a:cs typeface="微软雅黑"/>
-              </a:rPr>
-              <a:t>结果</a:t>
-            </a:r>
-          </a:p>
-        </p:txBody>
-      </p:sp>
-      <p:sp>
-        <p:nvSpPr>
-          <p:cNvPr id="32" name="TextBox 31"/>
-          <p:cNvSpPr txBox="1"/>
-          <p:nvPr/>
-        </p:nvSpPr>
-        <p:spPr>
-          <a:xfrm>
-            <a:off x="6519672" y="4919472"/>
-            <a:ext cx="4846320" cy="594360"/>
-          </a:xfrm>
-          <a:prstGeom prst="rect">
-            <a:avLst/>
-          </a:prstGeom>
-          <a:noFill/>
-        </p:spPr>
-        <p:txBody>
-          <a:bodyPr wrap="square" lIns="0" rIns="0" tIns="0" bIns="0" anchor="t">
-            <a:spAutoFit/>
-          </a:bodyPr>
-          <a:lstStyle/>
-          <a:p>
-            <a:pPr algn="l"/>
-            <a:r>
-              <a:rPr sz="2800" b="1">
-                <a:solidFill>
-                  <a:srgbClr val="287DFA"/>
-                </a:solidFill>
-                <a:latin typeface="微软雅黑"/>
-                <a:ea typeface="微软雅黑"/>
-                <a:cs typeface="微软雅黑"/>
-              </a:rPr>
-              <a:t>10.7% → 4.9%</a:t>
-            </a:r>
-          </a:p>
-        </p:txBody>
-      </p:sp>
-      <p:sp>
-        <p:nvSpPr>
-          <p:cNvPr id="33" name="TextBox 32"/>
-          <p:cNvSpPr txBox="1"/>
-          <p:nvPr/>
-        </p:nvSpPr>
-        <p:spPr>
-          <a:xfrm>
-            <a:off x="6519672" y="5532120"/>
-            <a:ext cx="4846320" cy="365760"/>
-          </a:xfrm>
-          <a:prstGeom prst="rect">
-            <a:avLst/>
-          </a:prstGeom>
-          <a:noFill/>
-        </p:spPr>
-        <p:txBody>
-          <a:bodyPr wrap="square" lIns="0" rIns="0" tIns="0" bIns="0" anchor="t">
-            <a:spAutoFit/>
-          </a:bodyPr>
-          <a:lstStyle/>
-          <a:p>
-            <a:pPr algn="l"/>
-            <a:r>
-              <a:rPr sz="1300" b="0">
-                <a:solidFill>
-                  <a:srgbClr val="3D4757"/>
-                </a:solidFill>
-                <a:latin typeface="微软雅黑"/>
-                <a:ea typeface="微软雅黑"/>
-                <a:cs typeface="微软雅黑"/>
-              </a:rPr>
-              <a:t>错误分发导致的拒答占比</a:t>
-            </a:r>
-          </a:p>
-        </p:txBody>
-      </p:sp>
-    </p:spTree>
-  </p:cSld>
-  <p:clrMapOvr>
-    <a:masterClrMapping/>
-  </p:clrMapOvr>
-</p:sld>
-</file>
-
-<file path=ppt/slides/slide13.xml><?xml version="1.0" encoding="utf-8"?>
-<p:sld xmlns:a="http://schemas.openxmlformats.org/drawingml/2006/main" xmlns:p="http://schemas.openxmlformats.org/presentationml/2006/main" xmlns:r="http://schemas.openxmlformats.org/officeDocument/2006/relationships">
-  <p:cSld>
-    <p:spTree>
-      <p:nvGrpSpPr>
-        <p:cNvPr id="1" name=""/>
-        <p:cNvGrpSpPr/>
-        <p:nvPr/>
-      </p:nvGrpSpPr>
-      <p:grpSpPr/>
-      <p:sp>
-        <p:nvSpPr>
-          <p:cNvPr id="2" name="标题 1"/>
-          <p:cNvSpPr txBox="1">
-            <a:spLocks/>
-          </p:cNvSpPr>
-          <p:nvPr/>
-        </p:nvSpPr>
-        <p:spPr>
-          <a:xfrm>
-            <a:off x="457615" y="99753"/>
-            <a:ext cx="11226268" cy="689956"/>
-          </a:xfrm>
-          <a:prstGeom prst="rect">
-            <a:avLst/>
-          </a:prstGeom>
-        </p:spPr>
-        <p:txBody>
-          <a:bodyPr vert="horz" lIns="91440" tIns="45720" rIns="91440" bIns="45720" rtlCol="0" anchor="ctr">
-            <a:normAutofit/>
-          </a:bodyPr>
-          <a:lstStyle>
-            <a:lvl1pPr algn="l" defTabSz="914400" rtl="0" eaLnBrk="1" latinLnBrk="0" hangingPunct="1">
-              <a:lnSpc>
-                <a:spcPct val="90000"/>
-              </a:lnSpc>
-              <a:spcBef>
-                <a:spcPct val="0"/>
-              </a:spcBef>
-              <a:buNone/>
-              <a:defRPr sz="4400" kern="1200">
-                <a:solidFill>
-                  <a:schemeClr val="tx1"/>
-                </a:solidFill>
-                <a:latin typeface="+mj-lt"/>
-                <a:ea typeface="+mj-ea"/>
-                <a:cs typeface="+mj-cs"/>
-              </a:defRPr>
-            </a:lvl1pPr>
-          </a:lstStyle>
-          <a:p>
-            <a:r>
-              <a:rPr lang="en-US" altLang="zh-CN" sz="3200" b="1" dirty="0" smtClean="0">
-                <a:solidFill>
-                  <a:srgbClr val="4472C4"/>
-                </a:solidFill>
-                <a:latin typeface="微软雅黑" panose="020B0503020204020204" pitchFamily="34" charset="-122"/>
-                <a:ea typeface="微软雅黑" panose="020B0503020204020204" pitchFamily="34" charset="-122"/>
-              </a:rPr>
-              <a:t>3、主要业绩 · 抢票：智能第二程接直付</a:t>
+              <a:t>2、主要项目 · 抢票：智能第二程接直付</a:t>
             </a:r>
             <a:endParaRPr lang="zh-CN" altLang="en-US" sz="2400" b="1" dirty="0">
               <a:solidFill>
@@ -11735,7 +10263,7 @@
 </p:sld>
 </file>
 
-<file path=ppt/slides/slide14.xml><?xml version="1.0" encoding="utf-8"?>
+<file path=ppt/slides/slide13.xml><?xml version="1.0" encoding="utf-8"?>
 <p:sld xmlns:a="http://schemas.openxmlformats.org/drawingml/2006/main" xmlns:p="http://schemas.openxmlformats.org/presentationml/2006/main" xmlns:r="http://schemas.openxmlformats.org/officeDocument/2006/relationships">
   <p:cSld>
     <p:spTree>
@@ -11794,7 +10322,7 @@
                 <a:latin typeface="微软雅黑" panose="020B0503020204020204" pitchFamily="34" charset="-122"/>
                 <a:ea typeface="微软雅黑" panose="020B0503020204020204" pitchFamily="34" charset="-122"/>
               </a:rPr>
-              <a:t>3、主要业绩 · 抢票：放开抢转买</a:t>
+              <a:t>2、主要项目 · 抢票：放开抢转买</a:t>
             </a:r>
             <a:endParaRPr lang="zh-CN" altLang="en-US" sz="2400" b="1" dirty="0">
               <a:solidFill>
@@ -12983,7 +11511,7 @@
 </p:sld>
 </file>
 
-<file path=ppt/slides/slide15.xml><?xml version="1.0" encoding="utf-8"?>
+<file path=ppt/slides/slide14.xml><?xml version="1.0" encoding="utf-8"?>
 <p:sld xmlns:a="http://schemas.openxmlformats.org/drawingml/2006/main" xmlns:p="http://schemas.openxmlformats.org/presentationml/2006/main" xmlns:r="http://schemas.openxmlformats.org/officeDocument/2006/relationships">
   <p:cSld>
     <p:spTree>
@@ -13042,7 +11570,7 @@
                 <a:latin typeface="微软雅黑" panose="020B0503020204020204" pitchFamily="34" charset="-122"/>
                 <a:ea typeface="微软雅黑" panose="020B0503020204020204" pitchFamily="34" charset="-122"/>
               </a:rPr>
-              <a:t>3、主要业绩 · 抢票：两个需求的共同点</a:t>
+              <a:t>2、主要项目 · 抢票：两个需求的共同点</a:t>
             </a:r>
             <a:endParaRPr lang="zh-CN" altLang="en-US" sz="2400" b="1" dirty="0">
               <a:solidFill>
@@ -13964,7 +12492,7 @@
 </p:sld>
 </file>
 
-<file path=ppt/slides/slide16.xml><?xml version="1.0" encoding="utf-8"?>
+<file path=ppt/slides/slide15.xml><?xml version="1.0" encoding="utf-8"?>
 <p:sld xmlns:a="http://schemas.openxmlformats.org/drawingml/2006/main" xmlns:p="http://schemas.openxmlformats.org/presentationml/2006/main" xmlns:r="http://schemas.openxmlformats.org/officeDocument/2006/relationships">
   <p:cSld>
     <p:spTree>
@@ -14023,7 +12551,7 @@
                 <a:latin typeface="微软雅黑" panose="020B0503020204020204" pitchFamily="34" charset="-122"/>
                 <a:ea typeface="微软雅黑" panose="020B0503020204020204" pitchFamily="34" charset="-122"/>
               </a:rPr>
-              <a:t>3、主要业绩 · 抢票：数据口径修正</a:t>
+              <a:t>2、主要项目 · 抢票：数据口径修正</a:t>
             </a:r>
             <a:endParaRPr lang="zh-CN" altLang="en-US" sz="2400" b="1" dirty="0">
               <a:solidFill>
@@ -15374,7 +13902,7 @@
 </p:sld>
 </file>
 
-<file path=ppt/slides/slide17.xml><?xml version="1.0" encoding="utf-8"?>
+<file path=ppt/slides/slide16.xml><?xml version="1.0" encoding="utf-8"?>
 <p:sld xmlns:a="http://schemas.openxmlformats.org/drawingml/2006/main" xmlns:p="http://schemas.openxmlformats.org/presentationml/2006/main" xmlns:r="http://schemas.openxmlformats.org/officeDocument/2006/relationships">
   <p:cSld>
     <p:spTree>
@@ -15433,7 +13961,7 @@
                 <a:latin typeface="微软雅黑" panose="020B0503020204020204" pitchFamily="34" charset="-122"/>
                 <a:ea typeface="微软雅黑" panose="020B0503020204020204" pitchFamily="34" charset="-122"/>
               </a:rPr>
-              <a:t>4、思考与规划 · 从 AI native 到 AI × 业务</a:t>
+              <a:t>3、未来规划 · 从 AI native 到 AI × 业务</a:t>
             </a:r>
             <a:endParaRPr lang="zh-CN" altLang="en-US" sz="2400" b="1" dirty="0">
               <a:solidFill>
@@ -16305,7 +14833,7 @@
 </p:sld>
 </file>
 
-<file path=ppt/slides/slide18.xml><?xml version="1.0" encoding="utf-8"?>
+<file path=ppt/slides/slide17.xml><?xml version="1.0" encoding="utf-8"?>
 <p:sld xmlns:a="http://schemas.openxmlformats.org/drawingml/2006/main" xmlns:p="http://schemas.openxmlformats.org/presentationml/2006/main" xmlns:r="http://schemas.openxmlformats.org/officeDocument/2006/relationships">
   <p:cSld>
     <p:spTree>
@@ -16364,7 +14892,7 @@
                 <a:latin typeface="微软雅黑" panose="020B0503020204020204" pitchFamily="34" charset="-122"/>
                 <a:ea typeface="微软雅黑" panose="020B0503020204020204" pitchFamily="34" charset="-122"/>
               </a:rPr>
-              <a:t>4、未来规划 · 在票量、收益、体验之间找平衡</a:t>
+              <a:t>3、未来规划 · 在票量、收益、体验之间找平衡</a:t>
             </a:r>
             <a:endParaRPr lang="zh-CN" altLang="en-US" sz="2400" b="1" dirty="0">
               <a:solidFill>
@@ -17536,7 +16064,7 @@
         </p:nvGrpSpPr>
         <p:grpSpPr>
           <a:xfrm>
-            <a:off x="2725452" y="2715790"/>
+            <a:off x="4325652" y="2715790"/>
             <a:ext cx="586551" cy="572207"/>
             <a:chOff x="1254722" y="1864234"/>
             <a:chExt cx="782068" cy="762943"/>
@@ -17847,7 +16375,7 @@
         </p:nvGrpSpPr>
         <p:grpSpPr>
           <a:xfrm rot="1771504">
-            <a:off x="3125398" y="3085961"/>
+            <a:off x="4725598" y="3085961"/>
             <a:ext cx="204183" cy="204157"/>
             <a:chOff x="1827622" y="1343919"/>
             <a:chExt cx="2304000" cy="2304000"/>
@@ -18016,7 +16544,7 @@
         </p:nvCxnSpPr>
         <p:spPr>
           <a:xfrm flipV="1">
-            <a:off x="3847715" y="2710992"/>
+            <a:off x="5447915" y="2710992"/>
             <a:ext cx="0" cy="1443318"/>
           </a:xfrm>
           <a:prstGeom prst="line">
@@ -18055,7 +16583,7 @@
         </p:nvCxnSpPr>
         <p:spPr>
           <a:xfrm flipV="1">
-            <a:off x="5098770" y="2700773"/>
+            <a:off x="6698970" y="2700773"/>
             <a:ext cx="0" cy="1443318"/>
           </a:xfrm>
           <a:prstGeom prst="line">
@@ -18094,7 +16622,7 @@
         </p:nvSpPr>
         <p:spPr>
           <a:xfrm>
-            <a:off x="2607638" y="3582612"/>
+            <a:off x="4207838" y="3582612"/>
             <a:ext cx="1485615" cy="323165"/>
           </a:xfrm>
           <a:prstGeom prst="rect">
@@ -18125,7 +16653,7 @@
                 <a:latin typeface="微软雅黑" panose="020B0503020204020204" pitchFamily="34" charset="-122"/>
                 <a:ea typeface="微软雅黑" panose="020B0503020204020204" pitchFamily="34" charset="-122"/>
               </a:rPr>
-              <a:t>个人简介</a:t>
+              <a:t>个人介绍</a:t>
             </a:r>
           </a:p>
         </p:txBody>
@@ -18138,7 +16666,7 @@
         </p:nvGrpSpPr>
         <p:grpSpPr>
           <a:xfrm>
-            <a:off x="3976395" y="2730359"/>
+            <a:off x="5576595" y="2730359"/>
             <a:ext cx="1003403" cy="1172691"/>
             <a:chOff x="2322174" y="2643308"/>
             <a:chExt cx="1337871" cy="1563587"/>
@@ -18672,51 +17200,12 @@
                   <a:latin typeface="微软雅黑" panose="020B0503020204020204" pitchFamily="34" charset="-122"/>
                   <a:ea typeface="微软雅黑" panose="020B0503020204020204" pitchFamily="34" charset="-122"/>
                 </a:rPr>
-                <a:t>组织架构</a:t>
+                <a:t>主要项目</a:t>
               </a:r>
             </a:p>
           </p:txBody>
         </p:sp>
       </p:grpSp>
-      <p:cxnSp>
-        <p:nvCxnSpPr>
-          <p:cNvPr id="42" name="直接连接符 41"/>
-          <p:cNvCxnSpPr/>
-          <p:nvPr/>
-        </p:nvCxnSpPr>
-        <p:spPr>
-          <a:xfrm flipV="1">
-            <a:off x="6429178" y="2705570"/>
-            <a:ext cx="0" cy="1443318"/>
-          </a:xfrm>
-          <a:prstGeom prst="line">
-            <a:avLst/>
-          </a:prstGeom>
-          <a:ln w="12700">
-            <a:solidFill>
-              <a:schemeClr val="tx1">
-                <a:lumMod val="65000"/>
-                <a:lumOff val="35000"/>
-              </a:schemeClr>
-            </a:solidFill>
-            <a:prstDash val="dash"/>
-          </a:ln>
-        </p:spPr>
-        <p:style>
-          <a:lnRef idx="1">
-            <a:schemeClr val="accent1"/>
-          </a:lnRef>
-          <a:fillRef idx="0">
-            <a:schemeClr val="accent1"/>
-          </a:fillRef>
-          <a:effectRef idx="0">
-            <a:schemeClr val="accent1"/>
-          </a:effectRef>
-          <a:fontRef idx="minor">
-            <a:schemeClr val="tx1"/>
-          </a:fontRef>
-        </p:style>
-      </p:cxnSp>
       <p:grpSp>
         <p:nvGrpSpPr>
           <p:cNvPr id="43" name="组合 42"/>
@@ -18725,7 +17214,7 @@
         </p:nvGrpSpPr>
         <p:grpSpPr>
           <a:xfrm>
-            <a:off x="5310817" y="2705569"/>
+            <a:off x="6911017" y="2705569"/>
             <a:ext cx="1485615" cy="1205220"/>
             <a:chOff x="4673318" y="2643310"/>
             <a:chExt cx="1980820" cy="1606959"/>
@@ -19254,612 +17743,6 @@
                   <a:latin typeface="微软雅黑" panose="020B0503020204020204" pitchFamily="34" charset="-122"/>
                   <a:ea typeface="微软雅黑" panose="020B0503020204020204" pitchFamily="34" charset="-122"/>
                 </a:rPr>
-                <a:t>主要业绩</a:t>
-              </a:r>
-            </a:p>
-          </p:txBody>
-        </p:sp>
-      </p:grpSp>
-      <p:grpSp>
-        <p:nvGrpSpPr>
-          <p:cNvPr id="56" name="组合 55"/>
-          <p:cNvGrpSpPr/>
-          <p:nvPr/>
-        </p:nvGrpSpPr>
-        <p:grpSpPr>
-          <a:xfrm>
-            <a:off x="5402918" y="2684872"/>
-            <a:ext cx="2892488" cy="1185809"/>
-            <a:chOff x="5131084" y="2492898"/>
-            <a:chExt cx="3856650" cy="1581078"/>
-          </a:xfrm>
-        </p:grpSpPr>
-        <p:sp>
-          <p:nvSpPr>
-            <p:cNvPr id="77" name="流程图: 联系 45"/>
-            <p:cNvSpPr/>
-            <p:nvPr/>
-          </p:nvSpPr>
-          <p:spPr>
-            <a:xfrm>
-              <a:off x="5131084" y="2492898"/>
-              <a:ext cx="762943" cy="762942"/>
-            </a:xfrm>
-            <a:prstGeom prst="flowChartConnector">
-              <a:avLst/>
-            </a:prstGeom>
-            <a:noFill/>
-            <a:ln w="3175">
-              <a:noFill/>
-            </a:ln>
-          </p:spPr>
-          <p:style>
-            <a:lnRef idx="2">
-              <a:schemeClr val="accent1">
-                <a:shade val="50000"/>
-              </a:schemeClr>
-            </a:lnRef>
-            <a:fillRef idx="1">
-              <a:schemeClr val="accent1"/>
-            </a:fillRef>
-            <a:effectRef idx="0">
-              <a:schemeClr val="accent1"/>
-            </a:effectRef>
-            <a:fontRef idx="minor">
-              <a:schemeClr val="lt1"/>
-            </a:fontRef>
-          </p:style>
-          <p:txBody>
-            <a:bodyPr rtlCol="0" anchor="ctr"/>
-            <a:lstStyle/>
-            <a:p>
-              <a:pPr algn="ctr" defTabSz="342900" eaLnBrk="1" fontAlgn="auto" hangingPunct="1">
-                <a:spcBef>
-                  <a:spcPts val="0"/>
-                </a:spcBef>
-                <a:spcAft>
-                  <a:spcPts val="0"/>
-                </a:spcAft>
-                <a:defRPr/>
-              </a:pPr>
-              <a:endParaRPr lang="zh-CN" altLang="en-US">
-                <a:solidFill>
-                  <a:prstClr val="white"/>
-                </a:solidFill>
-                <a:latin typeface="微软雅黑"/>
-                <a:ea typeface="微软雅黑"/>
-              </a:endParaRPr>
-            </a:p>
-          </p:txBody>
-        </p:sp>
-        <p:grpSp>
-          <p:nvGrpSpPr>
-            <p:cNvPr id="58" name="组合 57"/>
-            <p:cNvGrpSpPr/>
-            <p:nvPr/>
-          </p:nvGrpSpPr>
-          <p:grpSpPr>
-            <a:xfrm>
-              <a:off x="7234381" y="2492898"/>
-              <a:ext cx="762943" cy="762943"/>
-              <a:chOff x="5617616" y="1872229"/>
-              <a:chExt cx="762943" cy="762943"/>
-            </a:xfrm>
-          </p:grpSpPr>
-          <p:grpSp>
-            <p:nvGrpSpPr>
-              <p:cNvPr id="68" name="组合 67"/>
-              <p:cNvGrpSpPr/>
-              <p:nvPr/>
-            </p:nvGrpSpPr>
-            <p:grpSpPr>
-              <a:xfrm>
-                <a:off x="5617616" y="1872229"/>
-                <a:ext cx="762943" cy="762943"/>
-                <a:chOff x="2894659" y="1465288"/>
-                <a:chExt cx="1727827" cy="1727827"/>
-              </a:xfrm>
-            </p:grpSpPr>
-            <p:grpSp>
-              <p:nvGrpSpPr>
-                <p:cNvPr id="70" name="组合 69"/>
-                <p:cNvGrpSpPr/>
-                <p:nvPr/>
-              </p:nvGrpSpPr>
-              <p:grpSpPr>
-                <a:xfrm rot="1771504">
-                  <a:off x="2914532" y="1485269"/>
-                  <a:ext cx="1688083" cy="1687866"/>
-                  <a:chOff x="1827622" y="1343919"/>
-                  <a:chExt cx="2304000" cy="2304000"/>
-                </a:xfrm>
-              </p:grpSpPr>
-              <p:sp>
-                <p:nvSpPr>
-                  <p:cNvPr id="72" name="椭圆 71"/>
-                  <p:cNvSpPr/>
-                  <p:nvPr/>
-                </p:nvSpPr>
-                <p:spPr>
-                  <a:xfrm>
-                    <a:off x="1827622" y="1343919"/>
-                    <a:ext cx="2304000" cy="2304000"/>
-                  </a:xfrm>
-                  <a:prstGeom prst="ellipse">
-                    <a:avLst/>
-                  </a:prstGeom>
-                  <a:gradFill flip="none" rotWithShape="1">
-                    <a:gsLst>
-                      <a:gs pos="100000">
-                        <a:schemeClr val="bg1">
-                          <a:lumMod val="85000"/>
-                        </a:schemeClr>
-                      </a:gs>
-                      <a:gs pos="0">
-                        <a:schemeClr val="bg1"/>
-                      </a:gs>
-                    </a:gsLst>
-                    <a:path path="circle">
-                      <a:fillToRect l="100000" b="100000"/>
-                    </a:path>
-                    <a:tileRect t="-100000" r="-100000"/>
-                  </a:gradFill>
-                  <a:ln w="12700">
-                    <a:noFill/>
-                  </a:ln>
-                  <a:effectLst>
-                    <a:outerShdw blurRad="254000" dist="241300" dir="7800000" sx="85000" sy="85000" algn="tr" rotWithShape="0">
-                      <a:prstClr val="black">
-                        <a:alpha val="30000"/>
-                      </a:prstClr>
-                    </a:outerShdw>
-                  </a:effectLst>
-                </p:spPr>
-                <p:style>
-                  <a:lnRef idx="2">
-                    <a:schemeClr val="accent1">
-                      <a:shade val="50000"/>
-                    </a:schemeClr>
-                  </a:lnRef>
-                  <a:fillRef idx="1">
-                    <a:schemeClr val="accent1"/>
-                  </a:fillRef>
-                  <a:effectRef idx="0">
-                    <a:schemeClr val="accent1"/>
-                  </a:effectRef>
-                  <a:fontRef idx="minor">
-                    <a:schemeClr val="lt1"/>
-                  </a:fontRef>
-                </p:style>
-                <p:txBody>
-                  <a:bodyPr rtlCol="0" anchor="ctr"/>
-                  <a:lstStyle/>
-                  <a:p>
-                    <a:pPr algn="ctr" defTabSz="385763" eaLnBrk="1" fontAlgn="auto" hangingPunct="1">
-                      <a:spcBef>
-                        <a:spcPts val="0"/>
-                      </a:spcBef>
-                      <a:spcAft>
-                        <a:spcPts val="0"/>
-                      </a:spcAft>
-                      <a:defRPr/>
-                    </a:pPr>
-                    <a:endParaRPr lang="zh-CN" altLang="en-US" sz="788">
-                      <a:solidFill>
-                        <a:srgbClr val="FF0000"/>
-                      </a:solidFill>
-                      <a:latin typeface="华文细黑" panose="02010600040101010101" pitchFamily="2" charset="-122"/>
-                      <a:ea typeface="华文细黑" panose="02010600040101010101" pitchFamily="2" charset="-122"/>
-                    </a:endParaRPr>
-                  </a:p>
-                </p:txBody>
-              </p:sp>
-              <p:sp>
-                <p:nvSpPr>
-                  <p:cNvPr id="73" name="椭圆 72"/>
-                  <p:cNvSpPr/>
-                  <p:nvPr/>
-                </p:nvSpPr>
-                <p:spPr>
-                  <a:xfrm>
-                    <a:off x="1877481" y="1393778"/>
-                    <a:ext cx="2204282" cy="2204282"/>
-                  </a:xfrm>
-                  <a:prstGeom prst="ellipse">
-                    <a:avLst/>
-                  </a:prstGeom>
-                  <a:gradFill flip="none" rotWithShape="1">
-                    <a:gsLst>
-                      <a:gs pos="0">
-                        <a:schemeClr val="bg1">
-                          <a:lumMod val="85000"/>
-                        </a:schemeClr>
-                      </a:gs>
-                      <a:gs pos="100000">
-                        <a:srgbClr val="FEFEFE"/>
-                      </a:gs>
-                    </a:gsLst>
-                    <a:path path="circle">
-                      <a:fillToRect l="100000" b="100000"/>
-                    </a:path>
-                    <a:tileRect t="-100000" r="-100000"/>
-                  </a:gradFill>
-                  <a:ln w="12700">
-                    <a:noFill/>
-                  </a:ln>
-                  <a:effectLst/>
-                </p:spPr>
-                <p:style>
-                  <a:lnRef idx="2">
-                    <a:schemeClr val="accent1">
-                      <a:shade val="50000"/>
-                    </a:schemeClr>
-                  </a:lnRef>
-                  <a:fillRef idx="1">
-                    <a:schemeClr val="accent1"/>
-                  </a:fillRef>
-                  <a:effectRef idx="0">
-                    <a:schemeClr val="accent1"/>
-                  </a:effectRef>
-                  <a:fontRef idx="minor">
-                    <a:schemeClr val="lt1"/>
-                  </a:fontRef>
-                </p:style>
-                <p:txBody>
-                  <a:bodyPr rtlCol="0" anchor="ctr"/>
-                  <a:lstStyle/>
-                  <a:p>
-                    <a:pPr algn="ctr" defTabSz="385763" eaLnBrk="1" fontAlgn="auto" hangingPunct="1">
-                      <a:spcBef>
-                        <a:spcPts val="0"/>
-                      </a:spcBef>
-                      <a:spcAft>
-                        <a:spcPts val="0"/>
-                      </a:spcAft>
-                      <a:defRPr/>
-                    </a:pPr>
-                    <a:endParaRPr lang="zh-CN" altLang="en-US" sz="788">
-                      <a:solidFill>
-                        <a:srgbClr val="FF0000"/>
-                      </a:solidFill>
-                      <a:latin typeface="华文细黑" panose="02010600040101010101" pitchFamily="2" charset="-122"/>
-                      <a:ea typeface="华文细黑" panose="02010600040101010101" pitchFamily="2" charset="-122"/>
-                    </a:endParaRPr>
-                  </a:p>
-                </p:txBody>
-              </p:sp>
-            </p:grpSp>
-            <p:sp>
-              <p:nvSpPr>
-                <p:cNvPr id="71" name="流程图: 联系 52"/>
-                <p:cNvSpPr/>
-                <p:nvPr/>
-              </p:nvSpPr>
-              <p:spPr>
-                <a:xfrm>
-                  <a:off x="2894659" y="1465288"/>
-                  <a:ext cx="1727827" cy="1727827"/>
-                </a:xfrm>
-                <a:prstGeom prst="flowChartConnector">
-                  <a:avLst/>
-                </a:prstGeom>
-                <a:noFill/>
-                <a:ln w="3175">
-                  <a:noFill/>
-                </a:ln>
-              </p:spPr>
-              <p:style>
-                <a:lnRef idx="2">
-                  <a:schemeClr val="accent1">
-                    <a:shade val="50000"/>
-                  </a:schemeClr>
-                </a:lnRef>
-                <a:fillRef idx="1">
-                  <a:schemeClr val="accent1"/>
-                </a:fillRef>
-                <a:effectRef idx="0">
-                  <a:schemeClr val="accent1"/>
-                </a:effectRef>
-                <a:fontRef idx="minor">
-                  <a:schemeClr val="lt1"/>
-                </a:fontRef>
-              </p:style>
-              <p:txBody>
-                <a:bodyPr rtlCol="0" anchor="ctr"/>
-                <a:lstStyle/>
-                <a:p>
-                  <a:pPr algn="ctr" defTabSz="342900" eaLnBrk="1" fontAlgn="auto" hangingPunct="1">
-                    <a:spcBef>
-                      <a:spcPts val="0"/>
-                    </a:spcBef>
-                    <a:spcAft>
-                      <a:spcPts val="0"/>
-                    </a:spcAft>
-                    <a:defRPr/>
-                  </a:pPr>
-                  <a:endParaRPr lang="zh-CN" altLang="en-US">
-                    <a:solidFill>
-                      <a:prstClr val="white"/>
-                    </a:solidFill>
-                    <a:latin typeface="微软雅黑"/>
-                    <a:ea typeface="微软雅黑"/>
-                  </a:endParaRPr>
-                </a:p>
-              </p:txBody>
-            </p:sp>
-          </p:grpSp>
-          <p:sp>
-            <p:nvSpPr>
-              <p:cNvPr id="69" name="文本框 68"/>
-              <p:cNvSpPr txBox="1"/>
-              <p:nvPr/>
-            </p:nvSpPr>
-            <p:spPr>
-              <a:xfrm>
-                <a:off x="5735849" y="2053130"/>
-                <a:ext cx="644710" cy="430887"/>
-              </a:xfrm>
-              <a:prstGeom prst="rect">
-                <a:avLst/>
-              </a:prstGeom>
-              <a:noFill/>
-              <a:ln>
-                <a:noFill/>
-              </a:ln>
-            </p:spPr>
-            <p:txBody>
-              <a:bodyPr wrap="none" rtlCol="0">
-                <a:spAutoFit/>
-              </a:bodyPr>
-              <a:lstStyle>
-                <a:defPPr>
-                  <a:defRPr lang="en-US"/>
-                </a:defPPr>
-                <a:lvl1pPr>
-                  <a:defRPr sz="2000" b="1">
-                    <a:solidFill>
-                      <a:schemeClr val="accent1"/>
-                    </a:solidFill>
-                    <a:latin typeface="微软雅黑" panose="020B0503020204020204" pitchFamily="34" charset="-122"/>
-                    <a:ea typeface="微软雅黑" panose="020B0503020204020204" pitchFamily="34" charset="-122"/>
-                  </a:defRPr>
-                </a:lvl1pPr>
-              </a:lstStyle>
-              <a:p>
-                <a:pPr defTabSz="342900" eaLnBrk="1" fontAlgn="auto" hangingPunct="1">
-                  <a:spcBef>
-                    <a:spcPts val="0"/>
-                  </a:spcBef>
-                  <a:spcAft>
-                    <a:spcPts val="0"/>
-                  </a:spcAft>
-                  <a:defRPr/>
-                </a:pPr>
-                <a:r>
-                  <a:rPr lang="en-US" altLang="zh-CN" sz="1500" dirty="0" smtClean="0">
-                    <a:solidFill>
-                      <a:srgbClr val="0F6FC6"/>
-                    </a:solidFill>
-                  </a:rPr>
-                  <a:t>04</a:t>
-                </a:r>
-                <a:endParaRPr lang="zh-CN" altLang="en-US" sz="1500" dirty="0">
-                  <a:solidFill>
-                    <a:srgbClr val="0F6FC6"/>
-                  </a:solidFill>
-                </a:endParaRPr>
-              </a:p>
-            </p:txBody>
-          </p:sp>
-        </p:grpSp>
-        <p:grpSp>
-          <p:nvGrpSpPr>
-            <p:cNvPr id="60" name="组合 59"/>
-            <p:cNvGrpSpPr/>
-            <p:nvPr/>
-          </p:nvGrpSpPr>
-          <p:grpSpPr>
-            <a:xfrm rot="1771504">
-              <a:off x="7832413" y="2985033"/>
-              <a:ext cx="272244" cy="272209"/>
-              <a:chOff x="1827622" y="1343919"/>
-              <a:chExt cx="2304000" cy="2304000"/>
-            </a:xfrm>
-          </p:grpSpPr>
-          <p:sp>
-            <p:nvSpPr>
-              <p:cNvPr id="64" name="椭圆 63"/>
-              <p:cNvSpPr/>
-              <p:nvPr/>
-            </p:nvSpPr>
-            <p:spPr>
-              <a:xfrm>
-                <a:off x="1827622" y="1343919"/>
-                <a:ext cx="2304000" cy="2304000"/>
-              </a:xfrm>
-              <a:prstGeom prst="ellipse">
-                <a:avLst/>
-              </a:prstGeom>
-              <a:gradFill flip="none" rotWithShape="1">
-                <a:gsLst>
-                  <a:gs pos="100000">
-                    <a:schemeClr val="bg1">
-                      <a:lumMod val="85000"/>
-                    </a:schemeClr>
-                  </a:gs>
-                  <a:gs pos="0">
-                    <a:schemeClr val="bg1"/>
-                  </a:gs>
-                </a:gsLst>
-                <a:path path="circle">
-                  <a:fillToRect l="100000" b="100000"/>
-                </a:path>
-                <a:tileRect t="-100000" r="-100000"/>
-              </a:gradFill>
-              <a:ln w="12700">
-                <a:noFill/>
-              </a:ln>
-              <a:effectLst>
-                <a:outerShdw blurRad="254000" dist="241300" dir="7800000" sx="85000" sy="85000" algn="tr" rotWithShape="0">
-                  <a:prstClr val="black">
-                    <a:alpha val="30000"/>
-                  </a:prstClr>
-                </a:outerShdw>
-              </a:effectLst>
-            </p:spPr>
-            <p:style>
-              <a:lnRef idx="2">
-                <a:schemeClr val="accent1">
-                  <a:shade val="50000"/>
-                </a:schemeClr>
-              </a:lnRef>
-              <a:fillRef idx="1">
-                <a:schemeClr val="accent1"/>
-              </a:fillRef>
-              <a:effectRef idx="0">
-                <a:schemeClr val="accent1"/>
-              </a:effectRef>
-              <a:fontRef idx="minor">
-                <a:schemeClr val="lt1"/>
-              </a:fontRef>
-            </p:style>
-            <p:txBody>
-              <a:bodyPr rtlCol="0" anchor="ctr"/>
-              <a:lstStyle/>
-              <a:p>
-                <a:pPr algn="ctr" defTabSz="385763" eaLnBrk="1" fontAlgn="auto" hangingPunct="1">
-                  <a:spcBef>
-                    <a:spcPts val="0"/>
-                  </a:spcBef>
-                  <a:spcAft>
-                    <a:spcPts val="0"/>
-                  </a:spcAft>
-                  <a:defRPr/>
-                </a:pPr>
-                <a:endParaRPr lang="zh-CN" altLang="en-US" sz="788">
-                  <a:solidFill>
-                    <a:srgbClr val="FF0000"/>
-                  </a:solidFill>
-                  <a:latin typeface="华文细黑" panose="02010600040101010101" pitchFamily="2" charset="-122"/>
-                  <a:ea typeface="华文细黑" panose="02010600040101010101" pitchFamily="2" charset="-122"/>
-                </a:endParaRPr>
-              </a:p>
-            </p:txBody>
-          </p:sp>
-          <p:sp>
-            <p:nvSpPr>
-              <p:cNvPr id="65" name="椭圆 64"/>
-              <p:cNvSpPr/>
-              <p:nvPr/>
-            </p:nvSpPr>
-            <p:spPr>
-              <a:xfrm>
-                <a:off x="1877481" y="1393778"/>
-                <a:ext cx="2204282" cy="2204282"/>
-              </a:xfrm>
-              <a:prstGeom prst="ellipse">
-                <a:avLst/>
-              </a:prstGeom>
-              <a:gradFill flip="none" rotWithShape="1">
-                <a:gsLst>
-                  <a:gs pos="0">
-                    <a:schemeClr val="bg1">
-                      <a:lumMod val="85000"/>
-                    </a:schemeClr>
-                  </a:gs>
-                  <a:gs pos="100000">
-                    <a:srgbClr val="FEFEFE"/>
-                  </a:gs>
-                </a:gsLst>
-                <a:path path="circle">
-                  <a:fillToRect l="100000" b="100000"/>
-                </a:path>
-                <a:tileRect t="-100000" r="-100000"/>
-              </a:gradFill>
-              <a:ln w="12700">
-                <a:noFill/>
-              </a:ln>
-              <a:effectLst/>
-            </p:spPr>
-            <p:style>
-              <a:lnRef idx="2">
-                <a:schemeClr val="accent1">
-                  <a:shade val="50000"/>
-                </a:schemeClr>
-              </a:lnRef>
-              <a:fillRef idx="1">
-                <a:schemeClr val="accent1"/>
-              </a:fillRef>
-              <a:effectRef idx="0">
-                <a:schemeClr val="accent1"/>
-              </a:effectRef>
-              <a:fontRef idx="minor">
-                <a:schemeClr val="lt1"/>
-              </a:fontRef>
-            </p:style>
-            <p:txBody>
-              <a:bodyPr rtlCol="0" anchor="ctr"/>
-              <a:lstStyle/>
-              <a:p>
-                <a:pPr algn="ctr" defTabSz="385763" eaLnBrk="1" fontAlgn="auto" hangingPunct="1">
-                  <a:spcBef>
-                    <a:spcPts val="0"/>
-                  </a:spcBef>
-                  <a:spcAft>
-                    <a:spcPts val="0"/>
-                  </a:spcAft>
-                  <a:defRPr/>
-                </a:pPr>
-                <a:endParaRPr lang="zh-CN" altLang="en-US" sz="788">
-                  <a:solidFill>
-                    <a:srgbClr val="FF0000"/>
-                  </a:solidFill>
-                  <a:latin typeface="华文细黑" panose="02010600040101010101" pitchFamily="2" charset="-122"/>
-                  <a:ea typeface="华文细黑" panose="02010600040101010101" pitchFamily="2" charset="-122"/>
-                </a:endParaRPr>
-              </a:p>
-            </p:txBody>
-          </p:sp>
-        </p:grpSp>
-        <p:sp>
-          <p:nvSpPr>
-            <p:cNvPr id="63" name="文本框 77"/>
-            <p:cNvSpPr txBox="1"/>
-            <p:nvPr/>
-          </p:nvSpPr>
-          <p:spPr>
-            <a:xfrm>
-              <a:off x="7006914" y="3643089"/>
-              <a:ext cx="1980820" cy="430887"/>
-            </a:xfrm>
-            <a:prstGeom prst="rect">
-              <a:avLst/>
-            </a:prstGeom>
-            <a:noFill/>
-          </p:spPr>
-          <p:txBody>
-            <a:bodyPr wrap="square" rtlCol="0">
-              <a:spAutoFit/>
-            </a:bodyPr>
-            <a:lstStyle/>
-            <a:p>
-              <a:pPr defTabSz="513995" eaLnBrk="1" fontAlgn="auto" hangingPunct="1">
-                <a:spcBef>
-                  <a:spcPts val="0"/>
-                </a:spcBef>
-                <a:spcAft>
-                  <a:spcPts val="0"/>
-                </a:spcAft>
-                <a:defRPr/>
-              </a:pPr>
-              <a:r>
-                <a:rPr lang="zh-CN" altLang="en-US" sz="1500" b="1" dirty="0">
-                  <a:solidFill>
-                    <a:srgbClr val="0F6FC6"/>
-                  </a:solidFill>
-                  <a:latin typeface="微软雅黑" panose="020B0503020204020204" pitchFamily="34" charset="-122"/>
-                  <a:ea typeface="微软雅黑" panose="020B0503020204020204" pitchFamily="34" charset="-122"/>
-                </a:rPr>
                 <a:t>未来规划</a:t>
               </a:r>
             </a:p>
@@ -20035,7 +17918,7 @@
                 <a:latin typeface="微软雅黑" panose="020B0503020204020204" pitchFamily="34" charset="-122"/>
                 <a:ea typeface="微软雅黑" panose="020B0503020204020204" pitchFamily="34" charset="-122"/>
               </a:rPr>
-              <a:t>1、个人简介</a:t>
+              <a:t>1、个人介绍</a:t>
             </a:r>
             <a:endParaRPr lang="zh-CN" altLang="en-US" sz="2400" b="1" dirty="0">
               <a:solidFill>
@@ -20092,8 +17975,8 @@
         </p:nvSpPr>
         <p:spPr>
           <a:xfrm>
-            <a:off x="457200" y="1554480"/>
-            <a:ext cx="3566160" cy="4526280"/>
+            <a:off x="457200" y="1481328"/>
+            <a:ext cx="2514600" cy="4572000"/>
           </a:xfrm>
           <a:prstGeom prst="roundRect">
             <a:avLst>
@@ -20136,7 +18019,7 @@
         </p:nvSpPr>
         <p:spPr>
           <a:xfrm>
-            <a:off x="731520" y="1828800"/>
+            <a:off x="731520" y="1737360"/>
             <a:ext cx="868680" cy="868680"/>
           </a:xfrm>
           <a:prstGeom prst="ellipse">
@@ -20186,7 +18069,7 @@
         </p:blipFill>
         <p:spPr>
           <a:xfrm>
-            <a:off x="948690" y="2045969"/>
+            <a:off x="948690" y="1954529"/>
             <a:ext cx="434340" cy="434340"/>
           </a:xfrm>
           <a:prstGeom prst="rect">
@@ -20202,8 +18085,8 @@
         </p:nvSpPr>
         <p:spPr>
           <a:xfrm>
-            <a:off x="1783080" y="1938528"/>
-            <a:ext cx="2103120" cy="640080"/>
+            <a:off x="731520" y="2743200"/>
+            <a:ext cx="2103120" cy="548640"/>
           </a:xfrm>
           <a:prstGeom prst="rect">
             <a:avLst/>
@@ -20233,7 +18116,7 @@
       </p:sp>
       <p:pic>
         <p:nvPicPr>
-          <p:cNvPr id="8" name="Picture 7" descr="FaGraduationCap_b.png"/>
+          <p:cNvPr id="8" name="Picture 7" descr="FaCalendarCheck_b.png"/>
           <p:cNvPicPr>
             <a:picLocks noChangeAspect="1"/>
           </p:cNvPicPr>
@@ -20247,8 +18130,8 @@
         </p:blipFill>
         <p:spPr>
           <a:xfrm>
-            <a:off x="777240" y="3063240"/>
-            <a:ext cx="329184" cy="329184"/>
+            <a:off x="749808" y="3456432"/>
+            <a:ext cx="292608" cy="292608"/>
           </a:xfrm>
           <a:prstGeom prst="rect">
             <a:avLst/>
@@ -20263,69 +18146,8 @@
         </p:nvSpPr>
         <p:spPr>
           <a:xfrm>
-            <a:off x="1280160" y="3044952"/>
-            <a:ext cx="2651760" cy="384048"/>
-          </a:xfrm>
-          <a:prstGeom prst="rect">
-            <a:avLst/>
-          </a:prstGeom>
-          <a:noFill/>
-        </p:spPr>
-        <p:txBody>
-          <a:bodyPr wrap="square" lIns="0" rIns="0" tIns="0" bIns="0" anchor="ctr">
-            <a:spAutoFit/>
-          </a:bodyPr>
-          <a:lstStyle/>
-          <a:p>
-            <a:pPr algn="l"/>
-            <a:r>
-              <a:rPr sz="1400" b="0">
-                <a:solidFill>
-                  <a:srgbClr val="3D4757"/>
-                </a:solidFill>
-                <a:latin typeface="微软雅黑"/>
-                <a:ea typeface="微软雅黑"/>
-                <a:cs typeface="微软雅黑"/>
-              </a:rPr>
-              <a:t>复旦大学　外国哲学　硕士</a:t>
-            </a:r>
-          </a:p>
-        </p:txBody>
-      </p:sp>
-      <p:pic>
-        <p:nvPicPr>
-          <p:cNvPr id="10" name="Picture 9" descr="FaCalendarCheck_b.png"/>
-          <p:cNvPicPr>
-            <a:picLocks noChangeAspect="1"/>
-          </p:cNvPicPr>
-          <p:nvPr/>
-        </p:nvPicPr>
-        <p:blipFill>
-          <a:blip r:embed="rId5"/>
-          <a:stretch>
-            <a:fillRect/>
-          </a:stretch>
-        </p:blipFill>
-        <p:spPr>
-          <a:xfrm>
-            <a:off x="777240" y="3721608"/>
-            <a:ext cx="329184" cy="329184"/>
-          </a:xfrm>
-          <a:prstGeom prst="rect">
-            <a:avLst/>
-          </a:prstGeom>
-        </p:spPr>
-      </p:pic>
-      <p:sp>
-        <p:nvSpPr>
-          <p:cNvPr id="11" name="TextBox 10"/>
-          <p:cNvSpPr txBox="1"/>
-          <p:nvPr/>
-        </p:nvSpPr>
-        <p:spPr>
-          <a:xfrm>
-            <a:off x="1280160" y="3703320"/>
-            <a:ext cx="2651760" cy="384048"/>
+            <a:off x="1161288" y="3401568"/>
+            <a:ext cx="1737360" cy="384048"/>
           </a:xfrm>
           <a:prstGeom prst="rect">
             <a:avLst/>
@@ -20353,130 +18175,21 @@
           </a:p>
         </p:txBody>
       </p:sp>
-      <p:pic>
-        <p:nvPicPr>
-          <p:cNvPr id="12" name="Picture 11" descr="FaBuilding_b.png"/>
-          <p:cNvPicPr>
-            <a:picLocks noChangeAspect="1"/>
-          </p:cNvPicPr>
-          <p:nvPr/>
-        </p:nvPicPr>
-        <p:blipFill>
-          <a:blip r:embed="rId6"/>
-          <a:stretch>
-            <a:fillRect/>
-          </a:stretch>
-        </p:blipFill>
-        <p:spPr>
-          <a:xfrm>
-            <a:off x="777240" y="4379976"/>
-            <a:ext cx="329184" cy="329184"/>
-          </a:xfrm>
-          <a:prstGeom prst="rect">
-            <a:avLst/>
-          </a:prstGeom>
-        </p:spPr>
-      </p:pic>
-      <p:sp>
-        <p:nvSpPr>
-          <p:cNvPr id="13" name="TextBox 12"/>
-          <p:cNvSpPr txBox="1"/>
-          <p:nvPr/>
-        </p:nvSpPr>
-        <p:spPr>
-          <a:xfrm>
-            <a:off x="1280160" y="4361688"/>
-            <a:ext cx="2651760" cy="384048"/>
-          </a:xfrm>
-          <a:prstGeom prst="rect">
-            <a:avLst/>
-          </a:prstGeom>
-          <a:noFill/>
-        </p:spPr>
-        <p:txBody>
-          <a:bodyPr wrap="square" lIns="0" rIns="0" tIns="0" bIns="0" anchor="ctr">
-            <a:spAutoFit/>
-          </a:bodyPr>
-          <a:lstStyle/>
-          <a:p>
-            <a:pPr algn="l"/>
-            <a:r>
-              <a:rPr sz="1400" b="0">
-                <a:solidFill>
-                  <a:srgbClr val="3D4757"/>
-                </a:solidFill>
-                <a:latin typeface="微软雅黑"/>
-                <a:ea typeface="微软雅黑"/>
-                <a:cs typeface="微软雅黑"/>
-              </a:rPr>
-              <a:t>2026 年 4 月加入携程火车票</a:t>
-            </a:r>
-          </a:p>
-        </p:txBody>
-      </p:sp>
-      <p:sp>
-        <p:nvSpPr>
-          <p:cNvPr id="14" name="TextBox 13"/>
-          <p:cNvSpPr txBox="1"/>
-          <p:nvPr/>
-        </p:nvSpPr>
-        <p:spPr>
-          <a:xfrm>
-            <a:off x="777240" y="5074920"/>
-            <a:ext cx="3017520" cy="731520"/>
-          </a:xfrm>
-          <a:prstGeom prst="rect">
-            <a:avLst/>
-          </a:prstGeom>
-          <a:noFill/>
-        </p:spPr>
-        <p:txBody>
-          <a:bodyPr wrap="square" lIns="0" rIns="0" tIns="0" bIns="0" anchor="t">
-            <a:spAutoFit/>
-          </a:bodyPr>
-          <a:lstStyle/>
-          <a:p>
-            <a:pPr algn="l"/>
-            <a:r>
-              <a:rPr sz="1400" b="1">
-                <a:solidFill>
-                  <a:srgbClr val="287DFA"/>
-                </a:solidFill>
-                <a:latin typeface="微软雅黑"/>
-                <a:ea typeface="微软雅黑"/>
-                <a:cs typeface="微软雅黑"/>
-              </a:rPr>
-              <a:t>实习经历　</a:t>
-            </a:r>
-            <a:r>
-              <a:rPr sz="1400" b="0">
-                <a:solidFill>
-                  <a:srgbClr val="3D4757"/>
-                </a:solidFill>
-                <a:latin typeface="微软雅黑"/>
-                <a:ea typeface="微软雅黑"/>
-                <a:cs typeface="微软雅黑"/>
-              </a:rPr>
-              <a:t>小红书 → 携程火车票</a:t>
-            </a:r>
-          </a:p>
-        </p:txBody>
-      </p:sp>
       <p:cxnSp>
         <p:nvCxnSpPr>
-          <p:cNvPr id="15" name="Connector 14"/>
+          <p:cNvPr id="10" name="Connector 9"/>
           <p:cNvCxnSpPr/>
           <p:nvPr/>
         </p:nvCxnSpPr>
         <p:spPr>
           <a:xfrm>
-            <a:off x="4800600" y="1965960"/>
-            <a:ext cx="6400800" cy="0"/>
+            <a:off x="731520" y="4069080"/>
+            <a:ext cx="1965960" cy="0"/>
           </a:xfrm>
           <a:prstGeom prst="line">
             <a:avLst/>
           </a:prstGeom>
-          <a:ln w="25400">
+          <a:ln w="12700">
             <a:solidFill>
               <a:srgbClr val="D3E2FB"/>
             </a:solidFill>
@@ -20499,163 +18212,14 @@
       </p:cxnSp>
       <p:sp>
         <p:nvSpPr>
-          <p:cNvPr id="16" name="icon-circle"/>
-          <p:cNvSpPr/>
-          <p:nvPr/>
-        </p:nvSpPr>
-        <p:spPr>
-          <a:xfrm>
-            <a:off x="5212080" y="1627632"/>
-            <a:ext cx="685800" cy="685800"/>
-          </a:xfrm>
-          <a:prstGeom prst="ellipse">
-            <a:avLst/>
-          </a:prstGeom>
-          <a:solidFill>
-            <a:srgbClr val="287DFA"/>
-          </a:solidFill>
-          <a:ln>
-            <a:noFill/>
-          </a:ln>
-          <a:effectLst/>
-        </p:spPr>
-        <p:style>
-          <a:lnRef idx="1">
-            <a:schemeClr val="accent1"/>
-          </a:lnRef>
-          <a:fillRef idx="3">
-            <a:schemeClr val="accent1"/>
-          </a:fillRef>
-          <a:effectRef idx="2">
-            <a:schemeClr val="accent1"/>
-          </a:effectRef>
-          <a:fontRef idx="minor">
-            <a:schemeClr val="lt1"/>
-          </a:fontRef>
-        </p:style>
-        <p:txBody>
-          <a:bodyPr rtlCol="0" anchor="ctr"/>
-          <a:lstStyle/>
-          <a:p/>
-        </p:txBody>
-      </p:sp>
-      <p:pic>
-        <p:nvPicPr>
-          <p:cNvPr id="17" name="Picture 16" descr="FaComments_w.png"/>
-          <p:cNvPicPr>
-            <a:picLocks noChangeAspect="1"/>
-          </p:cNvPicPr>
-          <p:nvPr/>
-        </p:nvPicPr>
-        <p:blipFill>
-          <a:blip r:embed="rId7"/>
-          <a:stretch>
-            <a:fillRect/>
-          </a:stretch>
-        </p:blipFill>
-        <p:spPr>
-          <a:xfrm>
-            <a:off x="5383530" y="1799082"/>
-            <a:ext cx="342900" cy="342900"/>
-          </a:xfrm>
-          <a:prstGeom prst="rect">
-            <a:avLst/>
-          </a:prstGeom>
-        </p:spPr>
-      </p:pic>
-      <p:sp>
-        <p:nvSpPr>
-          <p:cNvPr id="18" name="Rounded Rectangle 17"/>
-          <p:cNvSpPr/>
-          <p:nvPr/>
-        </p:nvSpPr>
-        <p:spPr>
-          <a:xfrm>
-            <a:off x="4343400" y="2560320"/>
-            <a:ext cx="2377440" cy="2514600"/>
-          </a:xfrm>
-          <a:prstGeom prst="roundRect">
-            <a:avLst>
-              <a:gd name="adj" fmla="val 6000"/>
-            </a:avLst>
-          </a:prstGeom>
-          <a:solidFill>
-            <a:srgbClr val="FFFFFF"/>
-          </a:solidFill>
-          <a:ln w="12700">
-            <a:solidFill>
-              <a:srgbClr val="D3E2FB"/>
-            </a:solidFill>
-          </a:ln>
-          <a:effectLst/>
-        </p:spPr>
-        <p:style>
-          <a:lnRef idx="1">
-            <a:schemeClr val="accent1"/>
-          </a:lnRef>
-          <a:fillRef idx="3">
-            <a:schemeClr val="accent1"/>
-          </a:fillRef>
-          <a:effectRef idx="2">
-            <a:schemeClr val="accent1"/>
-          </a:effectRef>
-          <a:fontRef idx="minor">
-            <a:schemeClr val="lt1"/>
-          </a:fontRef>
-        </p:style>
-        <p:txBody>
-          <a:bodyPr rtlCol="0" anchor="ctr"/>
-          <a:lstStyle/>
-          <a:p/>
-        </p:txBody>
-      </p:sp>
-      <p:sp>
-        <p:nvSpPr>
-          <p:cNvPr id="19" name="TextBox 18"/>
+          <p:cNvPr id="11" name="TextBox 10"/>
           <p:cNvSpPr txBox="1"/>
           <p:nvPr/>
         </p:nvSpPr>
         <p:spPr>
           <a:xfrm>
-            <a:off x="4526280" y="2724912"/>
-            <a:ext cx="2011680" cy="365760"/>
-          </a:xfrm>
-          <a:prstGeom prst="rect">
-            <a:avLst/>
-          </a:prstGeom>
-          <a:noFill/>
-        </p:spPr>
-        <p:txBody>
-          <a:bodyPr wrap="square" lIns="0" rIns="0" tIns="0" bIns="0" anchor="t">
-            <a:spAutoFit/>
-          </a:bodyPr>
-          <a:lstStyle/>
-          <a:p>
-            <a:pPr algn="l"/>
-            <a:r>
-              <a:rPr sz="1600" b="1">
-                <a:solidFill>
-                  <a:srgbClr val="15315E"/>
-                </a:solidFill>
-                <a:latin typeface="微软雅黑"/>
-                <a:ea typeface="微软雅黑"/>
-                <a:cs typeface="微软雅黑"/>
-              </a:rPr>
-              <a:t>小红书 · 产品实习</a:t>
-            </a:r>
-          </a:p>
-        </p:txBody>
-      </p:sp>
-      <p:sp>
-        <p:nvSpPr>
-          <p:cNvPr id="20" name="TextBox 19"/>
-          <p:cNvSpPr txBox="1"/>
-          <p:nvPr/>
-        </p:nvSpPr>
-        <p:spPr>
-          <a:xfrm>
-            <a:off x="4526280" y="3154680"/>
-            <a:ext cx="2011680" cy="685800"/>
+            <a:off x="731520" y="4251960"/>
+            <a:ext cx="2103120" cy="320040"/>
           </a:xfrm>
           <a:prstGeom prst="rect">
             <a:avLst/>
@@ -20678,21 +18242,21 @@
                 <a:ea typeface="微软雅黑"/>
                 <a:cs typeface="微软雅黑"/>
               </a:rPr>
-              <a:t>大模型“点点”幽默语境下的评测与优化</a:t>
+              <a:t>此前经历</a:t>
             </a:r>
           </a:p>
         </p:txBody>
       </p:sp>
       <p:sp>
         <p:nvSpPr>
-          <p:cNvPr id="21" name="TextBox 20"/>
+          <p:cNvPr id="12" name="TextBox 11"/>
           <p:cNvSpPr txBox="1"/>
           <p:nvPr/>
         </p:nvSpPr>
         <p:spPr>
           <a:xfrm>
-            <a:off x="4526280" y="3931920"/>
-            <a:ext cx="2011680" cy="1005840"/>
+            <a:off x="731520" y="4553712"/>
+            <a:ext cx="2103120" cy="365760"/>
           </a:xfrm>
           <a:prstGeom prst="rect">
             <a:avLst/>
@@ -20707,7 +18271,125 @@
           <a:p>
             <a:pPr algn="l"/>
             <a:r>
-              <a:rPr sz="1000" b="0">
+              <a:rPr sz="1400" b="1">
+                <a:solidFill>
+                  <a:srgbClr val="15315E"/>
+                </a:solidFill>
+                <a:latin typeface="微软雅黑"/>
+                <a:ea typeface="微软雅黑"/>
+                <a:cs typeface="微软雅黑"/>
+              </a:rPr>
+              <a:t>小红书 · 产品实习</a:t>
+            </a:r>
+          </a:p>
+        </p:txBody>
+      </p:sp>
+      <p:sp>
+        <p:nvSpPr>
+          <p:cNvPr id="13" name="TextBox 12"/>
+          <p:cNvSpPr txBox="1"/>
+          <p:nvPr/>
+        </p:nvSpPr>
+        <p:spPr>
+          <a:xfrm>
+            <a:off x="731520" y="4956048"/>
+            <a:ext cx="2057400" cy="822960"/>
+          </a:xfrm>
+          <a:prstGeom prst="rect">
+            <a:avLst/>
+          </a:prstGeom>
+          <a:noFill/>
+        </p:spPr>
+        <p:txBody>
+          <a:bodyPr wrap="square" lIns="0" rIns="0" tIns="0" bIns="0" anchor="t">
+            <a:spAutoFit/>
+          </a:bodyPr>
+          <a:lstStyle/>
+          <a:p>
+            <a:pPr algn="l"/>
+            <a:r>
+              <a:rPr sz="1300" b="0">
+                <a:solidFill>
+                  <a:srgbClr val="3D4757"/>
+                </a:solidFill>
+                <a:latin typeface="微软雅黑"/>
+                <a:ea typeface="微软雅黑"/>
+                <a:cs typeface="微软雅黑"/>
+              </a:rPr>
+              <a:t>大模型“点点”幽默语境下的测评与优化</a:t>
+            </a:r>
+          </a:p>
+        </p:txBody>
+      </p:sp>
+      <p:sp>
+        <p:nvSpPr>
+          <p:cNvPr id="14" name="Rounded Rectangle 13"/>
+          <p:cNvSpPr/>
+          <p:nvPr/>
+        </p:nvSpPr>
+        <p:spPr>
+          <a:xfrm>
+            <a:off x="4434840" y="1481328"/>
+            <a:ext cx="4417916" cy="384048"/>
+          </a:xfrm>
+          <a:prstGeom prst="roundRect">
+            <a:avLst>
+              <a:gd name="adj" fmla="val 50000"/>
+            </a:avLst>
+          </a:prstGeom>
+          <a:solidFill>
+            <a:srgbClr val="EAF2FF"/>
+          </a:solidFill>
+          <a:ln>
+            <a:noFill/>
+          </a:ln>
+          <a:effectLst/>
+        </p:spPr>
+        <p:style>
+          <a:lnRef idx="1">
+            <a:schemeClr val="accent1"/>
+          </a:lnRef>
+          <a:fillRef idx="3">
+            <a:schemeClr val="accent1"/>
+          </a:fillRef>
+          <a:effectRef idx="2">
+            <a:schemeClr val="accent1"/>
+          </a:effectRef>
+          <a:fontRef idx="minor">
+            <a:schemeClr val="lt1"/>
+          </a:fontRef>
+        </p:style>
+        <p:txBody>
+          <a:bodyPr rtlCol="0" anchor="ctr"/>
+          <a:lstStyle/>
+          <a:p/>
+        </p:txBody>
+      </p:sp>
+      <p:sp>
+        <p:nvSpPr>
+          <p:cNvPr id="15" name="TextBox 14"/>
+          <p:cNvSpPr txBox="1"/>
+          <p:nvPr/>
+        </p:nvSpPr>
+        <p:spPr>
+          <a:xfrm>
+            <a:off x="4434840" y="1481328"/>
+            <a:ext cx="4417916" cy="384048"/>
+          </a:xfrm>
+          <a:prstGeom prst="rect">
+            <a:avLst/>
+          </a:prstGeom>
+          <a:noFill/>
+        </p:spPr>
+        <p:txBody>
+          <a:bodyPr wrap="square" lIns="0" rIns="0" tIns="0" bIns="0" anchor="ctr">
+            <a:spAutoFit/>
+          </a:bodyPr>
+          <a:lstStyle/>
+          <a:p>
+            <a:pPr algn="ctr"/>
+            <a:r>
+              <a:rPr sz="1300" b="1">
                 <a:solidFill>
                   <a:srgbClr val="287DFA"/>
                 </a:solidFill>
@@ -20715,10 +18397,150 @@
                 <a:ea typeface="微软雅黑"/>
                 <a:cs typeface="微软雅黑"/>
               </a:rPr>
-              <a:t>●  </a:t>
+              <a:t>第一阶段：火车票 AI</a:t>
             </a:r>
+          </a:p>
+        </p:txBody>
+      </p:sp>
+      <p:sp>
+        <p:nvSpPr>
+          <p:cNvPr id="16" name="Pentagon 15"/>
+          <p:cNvSpPr/>
+          <p:nvPr/>
+        </p:nvSpPr>
+        <p:spPr>
+          <a:xfrm>
+            <a:off x="8370801" y="1481328"/>
+            <a:ext cx="3379238" cy="384048"/>
+          </a:xfrm>
+          <a:prstGeom prst="homePlate">
+            <a:avLst/>
+          </a:prstGeom>
+          <a:solidFill>
+            <a:srgbClr val="287DFA"/>
+          </a:solidFill>
+          <a:ln>
+            <a:noFill/>
+          </a:ln>
+          <a:effectLst/>
+        </p:spPr>
+        <p:style>
+          <a:lnRef idx="1">
+            <a:schemeClr val="accent1"/>
+          </a:lnRef>
+          <a:fillRef idx="3">
+            <a:schemeClr val="accent1"/>
+          </a:fillRef>
+          <a:effectRef idx="2">
+            <a:schemeClr val="accent1"/>
+          </a:effectRef>
+          <a:fontRef idx="minor">
+            <a:schemeClr val="lt1"/>
+          </a:fontRef>
+        </p:style>
+        <p:txBody>
+          <a:bodyPr rtlCol="0" anchor="ctr"/>
+          <a:lstStyle/>
+          <a:p/>
+        </p:txBody>
+      </p:sp>
+      <p:sp>
+        <p:nvSpPr>
+          <p:cNvPr id="17" name="TextBox 16"/>
+          <p:cNvSpPr txBox="1"/>
+          <p:nvPr/>
+        </p:nvSpPr>
+        <p:spPr>
+          <a:xfrm>
+            <a:off x="8370801" y="1481328"/>
+            <a:ext cx="3333518" cy="384048"/>
+          </a:xfrm>
+          <a:prstGeom prst="rect">
+            <a:avLst/>
+          </a:prstGeom>
+          <a:noFill/>
+        </p:spPr>
+        <p:txBody>
+          <a:bodyPr wrap="square" lIns="0" rIns="0" tIns="0" bIns="0" anchor="ctr">
+            <a:spAutoFit/>
+          </a:bodyPr>
+          <a:lstStyle/>
+          <a:p>
+            <a:pPr algn="ctr"/>
             <a:r>
-              <a:rPr sz="1400" b="0">
+              <a:rPr sz="1300" b="1">
+                <a:solidFill>
+                  <a:srgbClr val="FFFFFF"/>
+                </a:solidFill>
+                <a:latin typeface="微软雅黑"/>
+                <a:ea typeface="微软雅黑"/>
+                <a:cs typeface="微软雅黑"/>
+              </a:rPr>
+              <a:t>第二阶段：抢票业务</a:t>
+            </a:r>
+          </a:p>
+        </p:txBody>
+      </p:sp>
+      <p:cxnSp>
+        <p:nvCxnSpPr>
+          <p:cNvPr id="18" name="Connector 17"/>
+          <p:cNvCxnSpPr/>
+          <p:nvPr/>
+        </p:nvCxnSpPr>
+        <p:spPr>
+          <a:xfrm>
+            <a:off x="4434840" y="2240280"/>
+            <a:ext cx="7269480" cy="0"/>
+          </a:xfrm>
+          <a:prstGeom prst="line">
+            <a:avLst/>
+          </a:prstGeom>
+          <a:ln w="15875">
+            <a:solidFill>
+              <a:srgbClr val="287DFA"/>
+            </a:solidFill>
+          </a:ln>
+        </p:spPr>
+        <p:style>
+          <a:lnRef idx="2">
+            <a:schemeClr val="accent1"/>
+          </a:lnRef>
+          <a:fillRef idx="0">
+            <a:schemeClr val="accent1"/>
+          </a:fillRef>
+          <a:effectRef idx="1">
+            <a:schemeClr val="accent1"/>
+          </a:effectRef>
+          <a:fontRef idx="minor">
+            <a:schemeClr val="tx1"/>
+          </a:fontRef>
+        </p:style>
+      </p:cxnSp>
+      <p:sp>
+        <p:nvSpPr>
+          <p:cNvPr id="19" name="TextBox 18"/>
+          <p:cNvSpPr txBox="1"/>
+          <p:nvPr/>
+        </p:nvSpPr>
+        <p:spPr>
+          <a:xfrm>
+            <a:off x="4229731" y="1938528"/>
+            <a:ext cx="731520" cy="237744"/>
+          </a:xfrm>
+          <a:prstGeom prst="rect">
+            <a:avLst/>
+          </a:prstGeom>
+          <a:noFill/>
+        </p:spPr>
+        <p:txBody>
+          <a:bodyPr wrap="square" lIns="0" rIns="0" tIns="0" bIns="0" anchor="t">
+            <a:spAutoFit/>
+          </a:bodyPr>
+          <a:lstStyle/>
+          <a:p>
+            <a:pPr algn="ctr"/>
+            <a:r>
+              <a:rPr sz="1100" b="0">
                 <a:solidFill>
                   <a:srgbClr val="3D4757"/>
                 </a:solidFill>
@@ -20726,17 +18548,1069 @@
                 <a:ea typeface="微软雅黑"/>
                 <a:cs typeface="微软雅黑"/>
               </a:rPr>
-              <a:t>拓展模型的能力边界</a:t>
+              <a:t>5月</a:t>
             </a:r>
           </a:p>
+        </p:txBody>
+      </p:sp>
+      <p:sp>
+        <p:nvSpPr>
+          <p:cNvPr id="20" name="Oval 19"/>
+          <p:cNvSpPr/>
+          <p:nvPr/>
+        </p:nvSpPr>
+        <p:spPr>
+          <a:xfrm>
+            <a:off x="4549771" y="2194560"/>
+            <a:ext cx="91440" cy="91440"/>
+          </a:xfrm>
+          <a:prstGeom prst="ellipse">
+            <a:avLst/>
+          </a:prstGeom>
+          <a:solidFill>
+            <a:srgbClr val="FFFFFF"/>
+          </a:solidFill>
+          <a:ln w="12700">
+            <a:solidFill>
+              <a:srgbClr val="287DFA"/>
+            </a:solidFill>
+          </a:ln>
+          <a:effectLst/>
+        </p:spPr>
+        <p:style>
+          <a:lnRef idx="1">
+            <a:schemeClr val="accent1"/>
+          </a:lnRef>
+          <a:fillRef idx="3">
+            <a:schemeClr val="accent1"/>
+          </a:fillRef>
+          <a:effectRef idx="2">
+            <a:schemeClr val="accent1"/>
+          </a:effectRef>
+          <a:fontRef idx="minor">
+            <a:schemeClr val="lt1"/>
+          </a:fontRef>
+        </p:style>
+        <p:txBody>
+          <a:bodyPr rtlCol="0" anchor="ctr"/>
+          <a:lstStyle/>
+          <a:p/>
+        </p:txBody>
+      </p:sp>
+      <p:cxnSp>
+        <p:nvCxnSpPr>
+          <p:cNvPr id="21" name="Connector 20"/>
+          <p:cNvCxnSpPr/>
+          <p:nvPr/>
+        </p:nvCxnSpPr>
+        <p:spPr>
+          <a:xfrm>
+            <a:off x="4595491" y="2313432"/>
+            <a:ext cx="0" cy="3739896"/>
+          </a:xfrm>
+          <a:prstGeom prst="line">
+            <a:avLst/>
+          </a:prstGeom>
+          <a:ln w="9525">
+            <a:solidFill>
+              <a:srgbClr val="E3EBF8"/>
+            </a:solidFill>
+            <a:prstDash val="dash"/>
+          </a:ln>
+        </p:spPr>
+        <p:style>
+          <a:lnRef idx="2">
+            <a:schemeClr val="accent1"/>
+          </a:lnRef>
+          <a:fillRef idx="0">
+            <a:schemeClr val="accent1"/>
+          </a:fillRef>
+          <a:effectRef idx="1">
+            <a:schemeClr val="accent1"/>
+          </a:effectRef>
+          <a:fontRef idx="minor">
+            <a:schemeClr val="tx1"/>
+          </a:fontRef>
+        </p:style>
+      </p:cxnSp>
+      <p:sp>
+        <p:nvSpPr>
+          <p:cNvPr id="22" name="TextBox 21"/>
+          <p:cNvSpPr txBox="1"/>
+          <p:nvPr/>
+        </p:nvSpPr>
+        <p:spPr>
+          <a:xfrm>
+            <a:off x="5474780" y="1938528"/>
+            <a:ext cx="731520" cy="237744"/>
+          </a:xfrm>
+          <a:prstGeom prst="rect">
+            <a:avLst/>
+          </a:prstGeom>
+          <a:noFill/>
+        </p:spPr>
+        <p:txBody>
+          <a:bodyPr wrap="square" lIns="0" rIns="0" tIns="0" bIns="0" anchor="t">
+            <a:spAutoFit/>
+          </a:bodyPr>
+          <a:lstStyle/>
           <a:p>
-            <a:pPr algn="l">
-              <a:spcBef>
-                <a:spcPts val="600"/>
-              </a:spcBef>
-            </a:pPr>
+            <a:pPr algn="ctr"/>
             <a:r>
-              <a:rPr sz="1000" b="0">
+              <a:rPr sz="1100" b="0">
+                <a:solidFill>
+                  <a:srgbClr val="3D4757"/>
+                </a:solidFill>
+                <a:latin typeface="微软雅黑"/>
+                <a:ea typeface="微软雅黑"/>
+                <a:cs typeface="微软雅黑"/>
+              </a:rPr>
+              <a:t>6月</a:t>
+            </a:r>
+          </a:p>
+        </p:txBody>
+      </p:sp>
+      <p:sp>
+        <p:nvSpPr>
+          <p:cNvPr id="23" name="Oval 22"/>
+          <p:cNvSpPr/>
+          <p:nvPr/>
+        </p:nvSpPr>
+        <p:spPr>
+          <a:xfrm>
+            <a:off x="5794820" y="2194560"/>
+            <a:ext cx="91440" cy="91440"/>
+          </a:xfrm>
+          <a:prstGeom prst="ellipse">
+            <a:avLst/>
+          </a:prstGeom>
+          <a:solidFill>
+            <a:srgbClr val="FFFFFF"/>
+          </a:solidFill>
+          <a:ln w="12700">
+            <a:solidFill>
+              <a:srgbClr val="287DFA"/>
+            </a:solidFill>
+          </a:ln>
+          <a:effectLst/>
+        </p:spPr>
+        <p:style>
+          <a:lnRef idx="1">
+            <a:schemeClr val="accent1"/>
+          </a:lnRef>
+          <a:fillRef idx="3">
+            <a:schemeClr val="accent1"/>
+          </a:fillRef>
+          <a:effectRef idx="2">
+            <a:schemeClr val="accent1"/>
+          </a:effectRef>
+          <a:fontRef idx="minor">
+            <a:schemeClr val="lt1"/>
+          </a:fontRef>
+        </p:style>
+        <p:txBody>
+          <a:bodyPr rtlCol="0" anchor="ctr"/>
+          <a:lstStyle/>
+          <a:p/>
+        </p:txBody>
+      </p:sp>
+      <p:cxnSp>
+        <p:nvCxnSpPr>
+          <p:cNvPr id="24" name="Connector 23"/>
+          <p:cNvCxnSpPr/>
+          <p:nvPr/>
+        </p:nvCxnSpPr>
+        <p:spPr>
+          <a:xfrm>
+            <a:off x="5840540" y="2313432"/>
+            <a:ext cx="0" cy="3739896"/>
+          </a:xfrm>
+          <a:prstGeom prst="line">
+            <a:avLst/>
+          </a:prstGeom>
+          <a:ln w="9525">
+            <a:solidFill>
+              <a:srgbClr val="E3EBF8"/>
+            </a:solidFill>
+            <a:prstDash val="dash"/>
+          </a:ln>
+        </p:spPr>
+        <p:style>
+          <a:lnRef idx="2">
+            <a:schemeClr val="accent1"/>
+          </a:lnRef>
+          <a:fillRef idx="0">
+            <a:schemeClr val="accent1"/>
+          </a:fillRef>
+          <a:effectRef idx="1">
+            <a:schemeClr val="accent1"/>
+          </a:effectRef>
+          <a:fontRef idx="minor">
+            <a:schemeClr val="tx1"/>
+          </a:fontRef>
+        </p:style>
+      </p:cxnSp>
+      <p:sp>
+        <p:nvSpPr>
+          <p:cNvPr id="25" name="TextBox 24"/>
+          <p:cNvSpPr txBox="1"/>
+          <p:nvPr/>
+        </p:nvSpPr>
+        <p:spPr>
+          <a:xfrm>
+            <a:off x="6679666" y="1938528"/>
+            <a:ext cx="731520" cy="237744"/>
+          </a:xfrm>
+          <a:prstGeom prst="rect">
+            <a:avLst/>
+          </a:prstGeom>
+          <a:noFill/>
+        </p:spPr>
+        <p:txBody>
+          <a:bodyPr wrap="square" lIns="0" rIns="0" tIns="0" bIns="0" anchor="t">
+            <a:spAutoFit/>
+          </a:bodyPr>
+          <a:lstStyle/>
+          <a:p>
+            <a:pPr algn="ctr"/>
+            <a:r>
+              <a:rPr sz="1100" b="0">
+                <a:solidFill>
+                  <a:srgbClr val="3D4757"/>
+                </a:solidFill>
+                <a:latin typeface="微软雅黑"/>
+                <a:ea typeface="微软雅黑"/>
+                <a:cs typeface="微软雅黑"/>
+              </a:rPr>
+              <a:t>7月</a:t>
+            </a:r>
+          </a:p>
+        </p:txBody>
+      </p:sp>
+      <p:sp>
+        <p:nvSpPr>
+          <p:cNvPr id="26" name="Oval 25"/>
+          <p:cNvSpPr/>
+          <p:nvPr/>
+        </p:nvSpPr>
+        <p:spPr>
+          <a:xfrm>
+            <a:off x="6999706" y="2194560"/>
+            <a:ext cx="91440" cy="91440"/>
+          </a:xfrm>
+          <a:prstGeom prst="ellipse">
+            <a:avLst/>
+          </a:prstGeom>
+          <a:solidFill>
+            <a:srgbClr val="FFFFFF"/>
+          </a:solidFill>
+          <a:ln w="12700">
+            <a:solidFill>
+              <a:srgbClr val="287DFA"/>
+            </a:solidFill>
+          </a:ln>
+          <a:effectLst/>
+        </p:spPr>
+        <p:style>
+          <a:lnRef idx="1">
+            <a:schemeClr val="accent1"/>
+          </a:lnRef>
+          <a:fillRef idx="3">
+            <a:schemeClr val="accent1"/>
+          </a:fillRef>
+          <a:effectRef idx="2">
+            <a:schemeClr val="accent1"/>
+          </a:effectRef>
+          <a:fontRef idx="minor">
+            <a:schemeClr val="lt1"/>
+          </a:fontRef>
+        </p:style>
+        <p:txBody>
+          <a:bodyPr rtlCol="0" anchor="ctr"/>
+          <a:lstStyle/>
+          <a:p/>
+        </p:txBody>
+      </p:sp>
+      <p:cxnSp>
+        <p:nvCxnSpPr>
+          <p:cNvPr id="27" name="Connector 26"/>
+          <p:cNvCxnSpPr/>
+          <p:nvPr/>
+        </p:nvCxnSpPr>
+        <p:spPr>
+          <a:xfrm>
+            <a:off x="7045426" y="2313432"/>
+            <a:ext cx="0" cy="3739896"/>
+          </a:xfrm>
+          <a:prstGeom prst="line">
+            <a:avLst/>
+          </a:prstGeom>
+          <a:ln w="9525">
+            <a:solidFill>
+              <a:srgbClr val="E3EBF8"/>
+            </a:solidFill>
+            <a:prstDash val="dash"/>
+          </a:ln>
+        </p:spPr>
+        <p:style>
+          <a:lnRef idx="2">
+            <a:schemeClr val="accent1"/>
+          </a:lnRef>
+          <a:fillRef idx="0">
+            <a:schemeClr val="accent1"/>
+          </a:fillRef>
+          <a:effectRef idx="1">
+            <a:schemeClr val="accent1"/>
+          </a:effectRef>
+          <a:fontRef idx="minor">
+            <a:schemeClr val="tx1"/>
+          </a:fontRef>
+        </p:style>
+      </p:cxnSp>
+      <p:sp>
+        <p:nvSpPr>
+          <p:cNvPr id="28" name="TextBox 27"/>
+          <p:cNvSpPr txBox="1"/>
+          <p:nvPr/>
+        </p:nvSpPr>
+        <p:spPr>
+          <a:xfrm>
+            <a:off x="7924715" y="1938528"/>
+            <a:ext cx="731520" cy="237744"/>
+          </a:xfrm>
+          <a:prstGeom prst="rect">
+            <a:avLst/>
+          </a:prstGeom>
+          <a:noFill/>
+        </p:spPr>
+        <p:txBody>
+          <a:bodyPr wrap="square" lIns="0" rIns="0" tIns="0" bIns="0" anchor="t">
+            <a:spAutoFit/>
+          </a:bodyPr>
+          <a:lstStyle/>
+          <a:p>
+            <a:pPr algn="ctr"/>
+            <a:r>
+              <a:rPr sz="1100" b="0">
+                <a:solidFill>
+                  <a:srgbClr val="3D4757"/>
+                </a:solidFill>
+                <a:latin typeface="微软雅黑"/>
+                <a:ea typeface="微软雅黑"/>
+                <a:cs typeface="微软雅黑"/>
+              </a:rPr>
+              <a:t>8月</a:t>
+            </a:r>
+          </a:p>
+        </p:txBody>
+      </p:sp>
+      <p:sp>
+        <p:nvSpPr>
+          <p:cNvPr id="29" name="Oval 28"/>
+          <p:cNvSpPr/>
+          <p:nvPr/>
+        </p:nvSpPr>
+        <p:spPr>
+          <a:xfrm>
+            <a:off x="8244755" y="2194560"/>
+            <a:ext cx="91440" cy="91440"/>
+          </a:xfrm>
+          <a:prstGeom prst="ellipse">
+            <a:avLst/>
+          </a:prstGeom>
+          <a:solidFill>
+            <a:srgbClr val="FFFFFF"/>
+          </a:solidFill>
+          <a:ln w="12700">
+            <a:solidFill>
+              <a:srgbClr val="287DFA"/>
+            </a:solidFill>
+          </a:ln>
+          <a:effectLst/>
+        </p:spPr>
+        <p:style>
+          <a:lnRef idx="1">
+            <a:schemeClr val="accent1"/>
+          </a:lnRef>
+          <a:fillRef idx="3">
+            <a:schemeClr val="accent1"/>
+          </a:fillRef>
+          <a:effectRef idx="2">
+            <a:schemeClr val="accent1"/>
+          </a:effectRef>
+          <a:fontRef idx="minor">
+            <a:schemeClr val="lt1"/>
+          </a:fontRef>
+        </p:style>
+        <p:txBody>
+          <a:bodyPr rtlCol="0" anchor="ctr"/>
+          <a:lstStyle/>
+          <a:p/>
+        </p:txBody>
+      </p:sp>
+      <p:cxnSp>
+        <p:nvCxnSpPr>
+          <p:cNvPr id="30" name="Connector 29"/>
+          <p:cNvCxnSpPr/>
+          <p:nvPr/>
+        </p:nvCxnSpPr>
+        <p:spPr>
+          <a:xfrm>
+            <a:off x="8290475" y="2313432"/>
+            <a:ext cx="0" cy="3739896"/>
+          </a:xfrm>
+          <a:prstGeom prst="line">
+            <a:avLst/>
+          </a:prstGeom>
+          <a:ln w="9525">
+            <a:solidFill>
+              <a:srgbClr val="E3EBF8"/>
+            </a:solidFill>
+            <a:prstDash val="dash"/>
+          </a:ln>
+        </p:spPr>
+        <p:style>
+          <a:lnRef idx="2">
+            <a:schemeClr val="accent1"/>
+          </a:lnRef>
+          <a:fillRef idx="0">
+            <a:schemeClr val="accent1"/>
+          </a:fillRef>
+          <a:effectRef idx="1">
+            <a:schemeClr val="accent1"/>
+          </a:effectRef>
+          <a:fontRef idx="minor">
+            <a:schemeClr val="tx1"/>
+          </a:fontRef>
+        </p:style>
+      </p:cxnSp>
+      <p:sp>
+        <p:nvSpPr>
+          <p:cNvPr id="31" name="TextBox 30"/>
+          <p:cNvSpPr txBox="1"/>
+          <p:nvPr/>
+        </p:nvSpPr>
+        <p:spPr>
+          <a:xfrm>
+            <a:off x="9169764" y="1938528"/>
+            <a:ext cx="731520" cy="237744"/>
+          </a:xfrm>
+          <a:prstGeom prst="rect">
+            <a:avLst/>
+          </a:prstGeom>
+          <a:noFill/>
+        </p:spPr>
+        <p:txBody>
+          <a:bodyPr wrap="square" lIns="0" rIns="0" tIns="0" bIns="0" anchor="t">
+            <a:spAutoFit/>
+          </a:bodyPr>
+          <a:lstStyle/>
+          <a:p>
+            <a:pPr algn="ctr"/>
+            <a:r>
+              <a:rPr sz="1100" b="0">
+                <a:solidFill>
+                  <a:srgbClr val="3D4757"/>
+                </a:solidFill>
+                <a:latin typeface="微软雅黑"/>
+                <a:ea typeface="微软雅黑"/>
+                <a:cs typeface="微软雅黑"/>
+              </a:rPr>
+              <a:t>9月</a:t>
+            </a:r>
+          </a:p>
+        </p:txBody>
+      </p:sp>
+      <p:sp>
+        <p:nvSpPr>
+          <p:cNvPr id="32" name="Oval 31"/>
+          <p:cNvSpPr/>
+          <p:nvPr/>
+        </p:nvSpPr>
+        <p:spPr>
+          <a:xfrm>
+            <a:off x="9489804" y="2194560"/>
+            <a:ext cx="91440" cy="91440"/>
+          </a:xfrm>
+          <a:prstGeom prst="ellipse">
+            <a:avLst/>
+          </a:prstGeom>
+          <a:solidFill>
+            <a:srgbClr val="FFFFFF"/>
+          </a:solidFill>
+          <a:ln w="12700">
+            <a:solidFill>
+              <a:srgbClr val="287DFA"/>
+            </a:solidFill>
+          </a:ln>
+          <a:effectLst/>
+        </p:spPr>
+        <p:style>
+          <a:lnRef idx="1">
+            <a:schemeClr val="accent1"/>
+          </a:lnRef>
+          <a:fillRef idx="3">
+            <a:schemeClr val="accent1"/>
+          </a:fillRef>
+          <a:effectRef idx="2">
+            <a:schemeClr val="accent1"/>
+          </a:effectRef>
+          <a:fontRef idx="minor">
+            <a:schemeClr val="lt1"/>
+          </a:fontRef>
+        </p:style>
+        <p:txBody>
+          <a:bodyPr rtlCol="0" anchor="ctr"/>
+          <a:lstStyle/>
+          <a:p/>
+        </p:txBody>
+      </p:sp>
+      <p:cxnSp>
+        <p:nvCxnSpPr>
+          <p:cNvPr id="33" name="Connector 32"/>
+          <p:cNvCxnSpPr/>
+          <p:nvPr/>
+        </p:nvCxnSpPr>
+        <p:spPr>
+          <a:xfrm>
+            <a:off x="9535524" y="2313432"/>
+            <a:ext cx="0" cy="3739896"/>
+          </a:xfrm>
+          <a:prstGeom prst="line">
+            <a:avLst/>
+          </a:prstGeom>
+          <a:ln w="9525">
+            <a:solidFill>
+              <a:srgbClr val="E3EBF8"/>
+            </a:solidFill>
+            <a:prstDash val="dash"/>
+          </a:ln>
+        </p:spPr>
+        <p:style>
+          <a:lnRef idx="2">
+            <a:schemeClr val="accent1"/>
+          </a:lnRef>
+          <a:fillRef idx="0">
+            <a:schemeClr val="accent1"/>
+          </a:fillRef>
+          <a:effectRef idx="1">
+            <a:schemeClr val="accent1"/>
+          </a:effectRef>
+          <a:fontRef idx="minor">
+            <a:schemeClr val="tx1"/>
+          </a:fontRef>
+        </p:style>
+      </p:cxnSp>
+      <p:sp>
+        <p:nvSpPr>
+          <p:cNvPr id="34" name="TextBox 33"/>
+          <p:cNvSpPr txBox="1"/>
+          <p:nvPr/>
+        </p:nvSpPr>
+        <p:spPr>
+          <a:xfrm>
+            <a:off x="10374651" y="1938528"/>
+            <a:ext cx="731520" cy="237744"/>
+          </a:xfrm>
+          <a:prstGeom prst="rect">
+            <a:avLst/>
+          </a:prstGeom>
+          <a:noFill/>
+        </p:spPr>
+        <p:txBody>
+          <a:bodyPr wrap="square" lIns="0" rIns="0" tIns="0" bIns="0" anchor="t">
+            <a:spAutoFit/>
+          </a:bodyPr>
+          <a:lstStyle/>
+          <a:p>
+            <a:pPr algn="ctr"/>
+            <a:r>
+              <a:rPr sz="1100" b="0">
+                <a:solidFill>
+                  <a:srgbClr val="3D4757"/>
+                </a:solidFill>
+                <a:latin typeface="微软雅黑"/>
+                <a:ea typeface="微软雅黑"/>
+                <a:cs typeface="微软雅黑"/>
+              </a:rPr>
+              <a:t>10月</a:t>
+            </a:r>
+          </a:p>
+        </p:txBody>
+      </p:sp>
+      <p:sp>
+        <p:nvSpPr>
+          <p:cNvPr id="35" name="Oval 34"/>
+          <p:cNvSpPr/>
+          <p:nvPr/>
+        </p:nvSpPr>
+        <p:spPr>
+          <a:xfrm>
+            <a:off x="10694691" y="2194560"/>
+            <a:ext cx="91440" cy="91440"/>
+          </a:xfrm>
+          <a:prstGeom prst="ellipse">
+            <a:avLst/>
+          </a:prstGeom>
+          <a:solidFill>
+            <a:srgbClr val="FFFFFF"/>
+          </a:solidFill>
+          <a:ln w="12700">
+            <a:solidFill>
+              <a:srgbClr val="287DFA"/>
+            </a:solidFill>
+          </a:ln>
+          <a:effectLst/>
+        </p:spPr>
+        <p:style>
+          <a:lnRef idx="1">
+            <a:schemeClr val="accent1"/>
+          </a:lnRef>
+          <a:fillRef idx="3">
+            <a:schemeClr val="accent1"/>
+          </a:fillRef>
+          <a:effectRef idx="2">
+            <a:schemeClr val="accent1"/>
+          </a:effectRef>
+          <a:fontRef idx="minor">
+            <a:schemeClr val="lt1"/>
+          </a:fontRef>
+        </p:style>
+        <p:txBody>
+          <a:bodyPr rtlCol="0" anchor="ctr"/>
+          <a:lstStyle/>
+          <a:p/>
+        </p:txBody>
+      </p:sp>
+      <p:cxnSp>
+        <p:nvCxnSpPr>
+          <p:cNvPr id="36" name="Connector 35"/>
+          <p:cNvCxnSpPr/>
+          <p:nvPr/>
+        </p:nvCxnSpPr>
+        <p:spPr>
+          <a:xfrm>
+            <a:off x="10740411" y="2313432"/>
+            <a:ext cx="0" cy="3739896"/>
+          </a:xfrm>
+          <a:prstGeom prst="line">
+            <a:avLst/>
+          </a:prstGeom>
+          <a:ln w="9525">
+            <a:solidFill>
+              <a:srgbClr val="E3EBF8"/>
+            </a:solidFill>
+            <a:prstDash val="dash"/>
+          </a:ln>
+        </p:spPr>
+        <p:style>
+          <a:lnRef idx="2">
+            <a:schemeClr val="accent1"/>
+          </a:lnRef>
+          <a:fillRef idx="0">
+            <a:schemeClr val="accent1"/>
+          </a:fillRef>
+          <a:effectRef idx="1">
+            <a:schemeClr val="accent1"/>
+          </a:effectRef>
+          <a:fontRef idx="minor">
+            <a:schemeClr val="tx1"/>
+          </a:fontRef>
+        </p:style>
+      </p:cxnSp>
+      <p:sp>
+        <p:nvSpPr>
+          <p:cNvPr id="37" name="Rounded Rectangle 36"/>
+          <p:cNvSpPr/>
+          <p:nvPr/>
+        </p:nvSpPr>
+        <p:spPr>
+          <a:xfrm>
+            <a:off x="3200400" y="2395728"/>
+            <a:ext cx="1097280" cy="566928"/>
+          </a:xfrm>
+          <a:prstGeom prst="roundRect">
+            <a:avLst>
+              <a:gd name="adj" fmla="val 12000"/>
+            </a:avLst>
+          </a:prstGeom>
+          <a:solidFill>
+            <a:srgbClr val="FF7A1A"/>
+          </a:solidFill>
+          <a:ln>
+            <a:noFill/>
+          </a:ln>
+          <a:effectLst/>
+        </p:spPr>
+        <p:style>
+          <a:lnRef idx="1">
+            <a:schemeClr val="accent1"/>
+          </a:lnRef>
+          <a:fillRef idx="3">
+            <a:schemeClr val="accent1"/>
+          </a:fillRef>
+          <a:effectRef idx="2">
+            <a:schemeClr val="accent1"/>
+          </a:effectRef>
+          <a:fontRef idx="minor">
+            <a:schemeClr val="lt1"/>
+          </a:fontRef>
+        </p:style>
+        <p:txBody>
+          <a:bodyPr rtlCol="0" anchor="ctr"/>
+          <a:lstStyle/>
+          <a:p/>
+        </p:txBody>
+      </p:sp>
+      <p:sp>
+        <p:nvSpPr>
+          <p:cNvPr id="38" name="TextBox 37"/>
+          <p:cNvSpPr txBox="1"/>
+          <p:nvPr/>
+        </p:nvSpPr>
+        <p:spPr>
+          <a:xfrm>
+            <a:off x="3200400" y="2395728"/>
+            <a:ext cx="1097280" cy="566928"/>
+          </a:xfrm>
+          <a:prstGeom prst="rect">
+            <a:avLst/>
+          </a:prstGeom>
+          <a:noFill/>
+        </p:spPr>
+        <p:txBody>
+          <a:bodyPr wrap="square" lIns="0" rIns="0" tIns="0" bIns="0" anchor="ctr">
+            <a:spAutoFit/>
+          </a:bodyPr>
+          <a:lstStyle/>
+          <a:p>
+            <a:pPr algn="ctr"/>
+            <a:r>
+              <a:rPr sz="1200" b="1">
+                <a:solidFill>
+                  <a:srgbClr val="FFFFFF"/>
+                </a:solidFill>
+                <a:latin typeface="微软雅黑"/>
+                <a:ea typeface="微软雅黑"/>
+                <a:cs typeface="微软雅黑"/>
+              </a:rPr>
+              <a:t>业务学习</a:t>
+            </a:r>
+          </a:p>
+        </p:txBody>
+      </p:sp>
+      <p:sp>
+        <p:nvSpPr>
+          <p:cNvPr id="39" name="Rounded Rectangle 38"/>
+          <p:cNvSpPr/>
+          <p:nvPr/>
+        </p:nvSpPr>
+        <p:spPr>
+          <a:xfrm>
+            <a:off x="4434840" y="2395728"/>
+            <a:ext cx="1084397" cy="237744"/>
+          </a:xfrm>
+          <a:prstGeom prst="roundRect">
+            <a:avLst>
+              <a:gd name="adj" fmla="val 30000"/>
+            </a:avLst>
+          </a:prstGeom>
+          <a:solidFill>
+            <a:srgbClr val="FF7A1A"/>
+          </a:solidFill>
+          <a:ln>
+            <a:noFill/>
+          </a:ln>
+          <a:effectLst/>
+        </p:spPr>
+        <p:style>
+          <a:lnRef idx="1">
+            <a:schemeClr val="accent1"/>
+          </a:lnRef>
+          <a:fillRef idx="3">
+            <a:schemeClr val="accent1"/>
+          </a:fillRef>
+          <a:effectRef idx="2">
+            <a:schemeClr val="accent1"/>
+          </a:effectRef>
+          <a:fontRef idx="minor">
+            <a:schemeClr val="lt1"/>
+          </a:fontRef>
+        </p:style>
+        <p:txBody>
+          <a:bodyPr rtlCol="0" anchor="ctr"/>
+          <a:lstStyle/>
+          <a:p/>
+        </p:txBody>
+      </p:sp>
+      <p:sp>
+        <p:nvSpPr>
+          <p:cNvPr id="40" name="TextBox 39"/>
+          <p:cNvSpPr txBox="1"/>
+          <p:nvPr/>
+        </p:nvSpPr>
+        <p:spPr>
+          <a:xfrm>
+            <a:off x="5574101" y="2395728"/>
+            <a:ext cx="1728216" cy="237744"/>
+          </a:xfrm>
+          <a:prstGeom prst="rect">
+            <a:avLst/>
+          </a:prstGeom>
+          <a:noFill/>
+        </p:spPr>
+        <p:txBody>
+          <a:bodyPr wrap="square" lIns="0" rIns="0" tIns="0" bIns="0" anchor="ctr">
+            <a:spAutoFit/>
+          </a:bodyPr>
+          <a:lstStyle/>
+          <a:p>
+            <a:pPr algn="l"/>
+            <a:r>
+              <a:rPr sz="1100" b="1">
+                <a:solidFill>
+                  <a:srgbClr val="FF7A1A"/>
+                </a:solidFill>
+                <a:latin typeface="微软雅黑"/>
+                <a:ea typeface="微软雅黑"/>
+                <a:cs typeface="微软雅黑"/>
+              </a:rPr>
+              <a:t>竞品分析与业务熟悉</a:t>
+            </a:r>
+          </a:p>
+        </p:txBody>
+      </p:sp>
+      <p:sp>
+        <p:nvSpPr>
+          <p:cNvPr id="41" name="Rounded Rectangle 40"/>
+          <p:cNvSpPr/>
+          <p:nvPr/>
+        </p:nvSpPr>
+        <p:spPr>
+          <a:xfrm>
+            <a:off x="8370801" y="2706624"/>
+            <a:ext cx="361465" cy="237744"/>
+          </a:xfrm>
+          <a:prstGeom prst="roundRect">
+            <a:avLst>
+              <a:gd name="adj" fmla="val 30000"/>
+            </a:avLst>
+          </a:prstGeom>
+          <a:solidFill>
+            <a:srgbClr val="FF7A1A"/>
+          </a:solidFill>
+          <a:ln>
+            <a:noFill/>
+          </a:ln>
+          <a:effectLst/>
+        </p:spPr>
+        <p:style>
+          <a:lnRef idx="1">
+            <a:schemeClr val="accent1"/>
+          </a:lnRef>
+          <a:fillRef idx="3">
+            <a:schemeClr val="accent1"/>
+          </a:fillRef>
+          <a:effectRef idx="2">
+            <a:schemeClr val="accent1"/>
+          </a:effectRef>
+          <a:fontRef idx="minor">
+            <a:schemeClr val="lt1"/>
+          </a:fontRef>
+        </p:style>
+        <p:txBody>
+          <a:bodyPr rtlCol="0" anchor="ctr"/>
+          <a:lstStyle/>
+          <a:p/>
+        </p:txBody>
+      </p:sp>
+      <p:sp>
+        <p:nvSpPr>
+          <p:cNvPr id="42" name="TextBox 41"/>
+          <p:cNvSpPr txBox="1"/>
+          <p:nvPr/>
+        </p:nvSpPr>
+        <p:spPr>
+          <a:xfrm>
+            <a:off x="8787131" y="2706624"/>
+            <a:ext cx="1728216" cy="237744"/>
+          </a:xfrm>
+          <a:prstGeom prst="rect">
+            <a:avLst/>
+          </a:prstGeom>
+          <a:noFill/>
+        </p:spPr>
+        <p:txBody>
+          <a:bodyPr wrap="square" lIns="0" rIns="0" tIns="0" bIns="0" anchor="ctr">
+            <a:spAutoFit/>
+          </a:bodyPr>
+          <a:lstStyle/>
+          <a:p>
+            <a:pPr algn="l"/>
+            <a:r>
+              <a:rPr sz="1100" b="1">
+                <a:solidFill>
+                  <a:srgbClr val="FF7A1A"/>
+                </a:solidFill>
+                <a:latin typeface="微软雅黑"/>
+                <a:ea typeface="微软雅黑"/>
+                <a:cs typeface="微软雅黑"/>
+              </a:rPr>
+              <a:t>抢票 &amp; 收益交接</a:t>
+            </a:r>
+          </a:p>
+        </p:txBody>
+      </p:sp>
+      <p:sp>
+        <p:nvSpPr>
+          <p:cNvPr id="43" name="Rounded Rectangle 42"/>
+          <p:cNvSpPr/>
+          <p:nvPr/>
+        </p:nvSpPr>
+        <p:spPr>
+          <a:xfrm>
+            <a:off x="3200400" y="3127248"/>
+            <a:ext cx="1097280" cy="877824"/>
+          </a:xfrm>
+          <a:prstGeom prst="roundRect">
+            <a:avLst>
+              <a:gd name="adj" fmla="val 12000"/>
+            </a:avLst>
+          </a:prstGeom>
+          <a:solidFill>
+            <a:srgbClr val="287DFA"/>
+          </a:solidFill>
+          <a:ln>
+            <a:noFill/>
+          </a:ln>
+          <a:effectLst/>
+        </p:spPr>
+        <p:style>
+          <a:lnRef idx="1">
+            <a:schemeClr val="accent1"/>
+          </a:lnRef>
+          <a:fillRef idx="3">
+            <a:schemeClr val="accent1"/>
+          </a:fillRef>
+          <a:effectRef idx="2">
+            <a:schemeClr val="accent1"/>
+          </a:effectRef>
+          <a:fontRef idx="minor">
+            <a:schemeClr val="lt1"/>
+          </a:fontRef>
+        </p:style>
+        <p:txBody>
+          <a:bodyPr rtlCol="0" anchor="ctr"/>
+          <a:lstStyle/>
+          <a:p/>
+        </p:txBody>
+      </p:sp>
+      <p:sp>
+        <p:nvSpPr>
+          <p:cNvPr id="44" name="TextBox 43"/>
+          <p:cNvSpPr txBox="1"/>
+          <p:nvPr/>
+        </p:nvSpPr>
+        <p:spPr>
+          <a:xfrm>
+            <a:off x="3200400" y="3127248"/>
+            <a:ext cx="1097280" cy="877824"/>
+          </a:xfrm>
+          <a:prstGeom prst="rect">
+            <a:avLst/>
+          </a:prstGeom>
+          <a:noFill/>
+        </p:spPr>
+        <p:txBody>
+          <a:bodyPr wrap="square" lIns="0" rIns="0" tIns="0" bIns="0" anchor="ctr">
+            <a:spAutoFit/>
+          </a:bodyPr>
+          <a:lstStyle/>
+          <a:p>
+            <a:pPr algn="ctr"/>
+            <a:r>
+              <a:rPr sz="1200" b="1">
+                <a:solidFill>
+                  <a:srgbClr val="FFFFFF"/>
+                </a:solidFill>
+                <a:latin typeface="微软雅黑"/>
+                <a:ea typeface="微软雅黑"/>
+                <a:cs typeface="微软雅黑"/>
+              </a:rPr>
+              <a:t>火车票 Agent</a:t>
+            </a:r>
+          </a:p>
+        </p:txBody>
+      </p:sp>
+      <p:sp>
+        <p:nvSpPr>
+          <p:cNvPr id="45" name="Rounded Rectangle 44"/>
+          <p:cNvSpPr/>
+          <p:nvPr/>
+        </p:nvSpPr>
+        <p:spPr>
+          <a:xfrm>
+            <a:off x="5278260" y="3127248"/>
+            <a:ext cx="1004071" cy="237744"/>
+          </a:xfrm>
+          <a:prstGeom prst="roundRect">
+            <a:avLst>
+              <a:gd name="adj" fmla="val 30000"/>
+            </a:avLst>
+          </a:prstGeom>
+          <a:solidFill>
+            <a:srgbClr val="287DFA"/>
+          </a:solidFill>
+          <a:ln>
+            <a:noFill/>
+          </a:ln>
+          <a:effectLst/>
+        </p:spPr>
+        <p:style>
+          <a:lnRef idx="1">
+            <a:schemeClr val="accent1"/>
+          </a:lnRef>
+          <a:fillRef idx="3">
+            <a:schemeClr val="accent1"/>
+          </a:fillRef>
+          <a:effectRef idx="2">
+            <a:schemeClr val="accent1"/>
+          </a:effectRef>
+          <a:fontRef idx="minor">
+            <a:schemeClr val="lt1"/>
+          </a:fontRef>
+        </p:style>
+        <p:txBody>
+          <a:bodyPr rtlCol="0" anchor="ctr"/>
+          <a:lstStyle/>
+          <a:p/>
+        </p:txBody>
+      </p:sp>
+      <p:sp>
+        <p:nvSpPr>
+          <p:cNvPr id="46" name="TextBox 45"/>
+          <p:cNvSpPr txBox="1"/>
+          <p:nvPr/>
+        </p:nvSpPr>
+        <p:spPr>
+          <a:xfrm>
+            <a:off x="6337196" y="3127248"/>
+            <a:ext cx="2167127" cy="237744"/>
+          </a:xfrm>
+          <a:prstGeom prst="rect">
+            <a:avLst/>
+          </a:prstGeom>
+          <a:noFill/>
+        </p:spPr>
+        <p:txBody>
+          <a:bodyPr wrap="square" lIns="0" rIns="0" tIns="0" bIns="0" anchor="ctr">
+            <a:spAutoFit/>
+          </a:bodyPr>
+          <a:lstStyle/>
+          <a:p>
+            <a:pPr algn="l"/>
+            <a:r>
+              <a:rPr sz="1100" b="1">
                 <a:solidFill>
                   <a:srgbClr val="287DFA"/>
                 </a:solidFill>
@@ -20744,35 +19618,26 @@
                 <a:ea typeface="微软雅黑"/>
                 <a:cs typeface="微软雅黑"/>
               </a:rPr>
-              <a:t>●  </a:t>
-            </a:r>
-            <a:r>
-              <a:rPr sz="1400" b="0">
-                <a:solidFill>
-                  <a:srgbClr val="3D4757"/>
-                </a:solidFill>
-                <a:latin typeface="微软雅黑"/>
-                <a:ea typeface="微软雅黑"/>
-                <a:cs typeface="微软雅黑"/>
-              </a:rPr>
-              <a:t>限制模型的行为边界</a:t>
+              <a:t>一期：意图识别与上线验收</a:t>
             </a:r>
           </a:p>
         </p:txBody>
       </p:sp>
       <p:sp>
         <p:nvSpPr>
-          <p:cNvPr id="22" name="icon-circle"/>
+          <p:cNvPr id="47" name="Rounded Rectangle 46"/>
           <p:cNvSpPr/>
           <p:nvPr/>
         </p:nvSpPr>
         <p:spPr>
           <a:xfrm>
-            <a:off x="7726679" y="1627632"/>
-            <a:ext cx="685800" cy="685800"/>
-          </a:xfrm>
-          <a:prstGeom prst="ellipse">
-            <a:avLst/>
+            <a:off x="7406892" y="3438144"/>
+            <a:ext cx="843420" cy="237744"/>
+          </a:xfrm>
+          <a:prstGeom prst="roundRect">
+            <a:avLst>
+              <a:gd name="adj" fmla="val 30000"/>
+            </a:avLst>
           </a:prstGeom>
           <a:solidFill>
             <a:srgbClr val="287DFA"/>
@@ -20802,53 +19667,64 @@
           <a:p/>
         </p:txBody>
       </p:sp>
-      <p:pic>
-        <p:nvPicPr>
-          <p:cNvPr id="23" name="Picture 22" descr="FaRobot_w.png"/>
-          <p:cNvPicPr>
-            <a:picLocks noChangeAspect="1"/>
-          </p:cNvPicPr>
-          <p:nvPr/>
-        </p:nvPicPr>
-        <p:blipFill>
-          <a:blip r:embed="rId8"/>
-          <a:stretch>
-            <a:fillRect/>
-          </a:stretch>
-        </p:blipFill>
-        <p:spPr>
-          <a:xfrm>
-            <a:off x="7898129" y="1799082"/>
-            <a:ext cx="342900" cy="342900"/>
+      <p:sp>
+        <p:nvSpPr>
+          <p:cNvPr id="48" name="TextBox 47"/>
+          <p:cNvSpPr txBox="1"/>
+          <p:nvPr/>
+        </p:nvSpPr>
+        <p:spPr>
+          <a:xfrm>
+            <a:off x="8305176" y="3438144"/>
+            <a:ext cx="2606039" cy="237744"/>
           </a:xfrm>
           <a:prstGeom prst="rect">
             <a:avLst/>
           </a:prstGeom>
-        </p:spPr>
-      </p:pic>
-      <p:sp>
-        <p:nvSpPr>
-          <p:cNvPr id="24" name="Rounded Rectangle 23"/>
+          <a:noFill/>
+        </p:spPr>
+        <p:txBody>
+          <a:bodyPr wrap="square" lIns="0" rIns="0" tIns="0" bIns="0" anchor="ctr">
+            <a:spAutoFit/>
+          </a:bodyPr>
+          <a:lstStyle/>
+          <a:p>
+            <a:pPr algn="l"/>
+            <a:r>
+              <a:rPr sz="1100" b="1">
+                <a:solidFill>
+                  <a:srgbClr val="287DFA"/>
+                </a:solidFill>
+                <a:latin typeface="微软雅黑"/>
+                <a:ea typeface="微软雅黑"/>
+                <a:cs typeface="微软雅黑"/>
+              </a:rPr>
+              <a:t>二期：验收与 GUI 实验分析</a:t>
+            </a:r>
+          </a:p>
+        </p:txBody>
+      </p:sp>
+      <p:sp>
+        <p:nvSpPr>
+          <p:cNvPr id="49" name="Rounded Rectangle 48"/>
           <p:cNvSpPr/>
           <p:nvPr/>
         </p:nvSpPr>
         <p:spPr>
           <a:xfrm>
-            <a:off x="6858000" y="2560320"/>
-            <a:ext cx="2377440" cy="2514600"/>
+            <a:off x="8410964" y="3749039"/>
+            <a:ext cx="642605" cy="237744"/>
           </a:xfrm>
           <a:prstGeom prst="roundRect">
             <a:avLst>
-              <a:gd name="adj" fmla="val 6000"/>
+              <a:gd name="adj" fmla="val 30000"/>
             </a:avLst>
           </a:prstGeom>
           <a:solidFill>
-            <a:srgbClr val="FFFFFF"/>
+            <a:srgbClr val="287DFA"/>
           </a:solidFill>
-          <a:ln w="12700">
-            <a:solidFill>
-              <a:srgbClr val="D3E2FB"/>
-            </a:solidFill>
+          <a:ln>
+            <a:noFill/>
           </a:ln>
           <a:effectLst/>
         </p:spPr>
@@ -20874,14 +19750,14 @@
       </p:sp>
       <p:sp>
         <p:nvSpPr>
-          <p:cNvPr id="25" name="TextBox 24"/>
+          <p:cNvPr id="50" name="TextBox 49"/>
           <p:cNvSpPr txBox="1"/>
           <p:nvPr/>
         </p:nvSpPr>
         <p:spPr>
           <a:xfrm>
-            <a:off x="7040880" y="2724912"/>
-            <a:ext cx="2011680" cy="365760"/>
+            <a:off x="9108434" y="3749039"/>
+            <a:ext cx="1435608" cy="237744"/>
           </a:xfrm>
           <a:prstGeom prst="rect">
             <a:avLst/>
@@ -20889,14 +19765,257 @@
           <a:noFill/>
         </p:spPr>
         <p:txBody>
-          <a:bodyPr wrap="square" lIns="0" rIns="0" tIns="0" bIns="0" anchor="t">
+          <a:bodyPr wrap="square" lIns="0" rIns="0" tIns="0" bIns="0" anchor="ctr">
             <a:spAutoFit/>
           </a:bodyPr>
           <a:lstStyle/>
           <a:p>
             <a:pPr algn="l"/>
             <a:r>
-              <a:rPr sz="1600" b="1">
+              <a:rPr sz="1100" b="1">
+                <a:solidFill>
+                  <a:srgbClr val="287DFA"/>
+                </a:solidFill>
+                <a:latin typeface="微软雅黑"/>
+                <a:ea typeface="微软雅黑"/>
+                <a:cs typeface="微软雅黑"/>
+              </a:rPr>
+              <a:t>拒答治理与交接</a:t>
+            </a:r>
+          </a:p>
+        </p:txBody>
+      </p:sp>
+      <p:sp>
+        <p:nvSpPr>
+          <p:cNvPr id="51" name="Rounded Rectangle 50"/>
+          <p:cNvSpPr/>
+          <p:nvPr/>
+        </p:nvSpPr>
+        <p:spPr>
+          <a:xfrm>
+            <a:off x="3200400" y="4169664"/>
+            <a:ext cx="1097280" cy="1188720"/>
+          </a:xfrm>
+          <a:prstGeom prst="roundRect">
+            <a:avLst>
+              <a:gd name="adj" fmla="val 12000"/>
+            </a:avLst>
+          </a:prstGeom>
+          <a:solidFill>
+            <a:srgbClr val="15315E"/>
+          </a:solidFill>
+          <a:ln>
+            <a:noFill/>
+          </a:ln>
+          <a:effectLst/>
+        </p:spPr>
+        <p:style>
+          <a:lnRef idx="1">
+            <a:schemeClr val="accent1"/>
+          </a:lnRef>
+          <a:fillRef idx="3">
+            <a:schemeClr val="accent1"/>
+          </a:fillRef>
+          <a:effectRef idx="2">
+            <a:schemeClr val="accent1"/>
+          </a:effectRef>
+          <a:fontRef idx="minor">
+            <a:schemeClr val="lt1"/>
+          </a:fontRef>
+        </p:style>
+        <p:txBody>
+          <a:bodyPr rtlCol="0" anchor="ctr"/>
+          <a:lstStyle/>
+          <a:p/>
+        </p:txBody>
+      </p:sp>
+      <p:sp>
+        <p:nvSpPr>
+          <p:cNvPr id="52" name="TextBox 51"/>
+          <p:cNvSpPr txBox="1"/>
+          <p:nvPr/>
+        </p:nvSpPr>
+        <p:spPr>
+          <a:xfrm>
+            <a:off x="3200400" y="4169664"/>
+            <a:ext cx="1097280" cy="1188720"/>
+          </a:xfrm>
+          <a:prstGeom prst="rect">
+            <a:avLst/>
+          </a:prstGeom>
+          <a:noFill/>
+        </p:spPr>
+        <p:txBody>
+          <a:bodyPr wrap="square" lIns="0" rIns="0" tIns="0" bIns="0" anchor="ctr">
+            <a:spAutoFit/>
+          </a:bodyPr>
+          <a:lstStyle/>
+          <a:p>
+            <a:pPr algn="ctr"/>
+            <a:r>
+              <a:rPr sz="1200" b="1">
+                <a:solidFill>
+                  <a:srgbClr val="FFFFFF"/>
+                </a:solidFill>
+                <a:latin typeface="微软雅黑"/>
+                <a:ea typeface="微软雅黑"/>
+                <a:cs typeface="微软雅黑"/>
+              </a:rPr>
+              <a:t>抢票需求</a:t>
+            </a:r>
+          </a:p>
+        </p:txBody>
+      </p:sp>
+      <p:sp>
+        <p:nvSpPr>
+          <p:cNvPr id="53" name="Rounded Rectangle 52"/>
+          <p:cNvSpPr/>
+          <p:nvPr/>
+        </p:nvSpPr>
+        <p:spPr>
+          <a:xfrm>
+            <a:off x="8651941" y="4169664"/>
+            <a:ext cx="1486026" cy="237744"/>
+          </a:xfrm>
+          <a:prstGeom prst="roundRect">
+            <a:avLst>
+              <a:gd name="adj" fmla="val 30000"/>
+            </a:avLst>
+          </a:prstGeom>
+          <a:solidFill>
+            <a:srgbClr val="15315E"/>
+          </a:solidFill>
+          <a:ln>
+            <a:noFill/>
+          </a:ln>
+          <a:effectLst/>
+        </p:spPr>
+        <p:style>
+          <a:lnRef idx="1">
+            <a:schemeClr val="accent1"/>
+          </a:lnRef>
+          <a:fillRef idx="3">
+            <a:schemeClr val="accent1"/>
+          </a:fillRef>
+          <a:effectRef idx="2">
+            <a:schemeClr val="accent1"/>
+          </a:effectRef>
+          <a:fontRef idx="minor">
+            <a:schemeClr val="lt1"/>
+          </a:fontRef>
+        </p:style>
+        <p:txBody>
+          <a:bodyPr rtlCol="0" anchor="ctr"/>
+          <a:lstStyle/>
+          <a:p/>
+        </p:txBody>
+      </p:sp>
+      <p:sp>
+        <p:nvSpPr>
+          <p:cNvPr id="54" name="TextBox 53"/>
+          <p:cNvSpPr txBox="1"/>
+          <p:nvPr/>
+        </p:nvSpPr>
+        <p:spPr>
+          <a:xfrm>
+            <a:off x="8651941" y="4169664"/>
+            <a:ext cx="1486026" cy="237744"/>
+          </a:xfrm>
+          <a:prstGeom prst="rect">
+            <a:avLst/>
+          </a:prstGeom>
+          <a:noFill/>
+        </p:spPr>
+        <p:txBody>
+          <a:bodyPr wrap="square" lIns="0" rIns="0" tIns="0" bIns="0" anchor="ctr">
+            <a:spAutoFit/>
+          </a:bodyPr>
+          <a:lstStyle/>
+          <a:p>
+            <a:pPr algn="ctr"/>
+            <a:r>
+              <a:rPr sz="1100" b="1">
+                <a:solidFill>
+                  <a:srgbClr val="FFFFFF"/>
+                </a:solidFill>
+                <a:latin typeface="微软雅黑"/>
+                <a:ea typeface="微软雅黑"/>
+                <a:cs typeface="微软雅黑"/>
+              </a:rPr>
+              <a:t>双节活动日历</a:t>
+            </a:r>
+          </a:p>
+        </p:txBody>
+      </p:sp>
+      <p:sp>
+        <p:nvSpPr>
+          <p:cNvPr id="55" name="Rounded Rectangle 54"/>
+          <p:cNvSpPr/>
+          <p:nvPr/>
+        </p:nvSpPr>
+        <p:spPr>
+          <a:xfrm>
+            <a:off x="9254384" y="4480560"/>
+            <a:ext cx="682768" cy="237744"/>
+          </a:xfrm>
+          <a:prstGeom prst="roundRect">
+            <a:avLst>
+              <a:gd name="adj" fmla="val 30000"/>
+            </a:avLst>
+          </a:prstGeom>
+          <a:solidFill>
+            <a:srgbClr val="15315E"/>
+          </a:solidFill>
+          <a:ln>
+            <a:noFill/>
+          </a:ln>
+          <a:effectLst/>
+        </p:spPr>
+        <p:style>
+          <a:lnRef idx="1">
+            <a:schemeClr val="accent1"/>
+          </a:lnRef>
+          <a:fillRef idx="3">
+            <a:schemeClr val="accent1"/>
+          </a:fillRef>
+          <a:effectRef idx="2">
+            <a:schemeClr val="accent1"/>
+          </a:effectRef>
+          <a:fontRef idx="minor">
+            <a:schemeClr val="lt1"/>
+          </a:fontRef>
+        </p:style>
+        <p:txBody>
+          <a:bodyPr rtlCol="0" anchor="ctr"/>
+          <a:lstStyle/>
+          <a:p/>
+        </p:txBody>
+      </p:sp>
+      <p:sp>
+        <p:nvSpPr>
+          <p:cNvPr id="56" name="TextBox 55"/>
+          <p:cNvSpPr txBox="1"/>
+          <p:nvPr/>
+        </p:nvSpPr>
+        <p:spPr>
+          <a:xfrm>
+            <a:off x="9992017" y="4480560"/>
+            <a:ext cx="1581912" cy="237744"/>
+          </a:xfrm>
+          <a:prstGeom prst="rect">
+            <a:avLst/>
+          </a:prstGeom>
+          <a:noFill/>
+        </p:spPr>
+        <p:txBody>
+          <a:bodyPr wrap="square" lIns="0" rIns="0" tIns="0" bIns="0" anchor="ctr">
+            <a:spAutoFit/>
+          </a:bodyPr>
+          <a:lstStyle/>
+          <a:p>
+            <a:pPr algn="l"/>
+            <a:r>
+              <a:rPr sz="1100" b="1">
                 <a:solidFill>
                   <a:srgbClr val="15315E"/>
                 </a:solidFill>
@@ -20904,141 +20023,29 @@
                 <a:ea typeface="微软雅黑"/>
                 <a:cs typeface="微软雅黑"/>
               </a:rPr>
-              <a:t>携程 · AI 主线</a:t>
+              <a:t>默认截止时间优化</a:t>
             </a:r>
           </a:p>
         </p:txBody>
       </p:sp>
       <p:sp>
         <p:nvSpPr>
-          <p:cNvPr id="26" name="TextBox 25"/>
-          <p:cNvSpPr txBox="1"/>
-          <p:nvPr/>
-        </p:nvSpPr>
-        <p:spPr>
-          <a:xfrm>
-            <a:off x="7040880" y="3154680"/>
-            <a:ext cx="2011680" cy="685800"/>
-          </a:xfrm>
-          <a:prstGeom prst="rect">
-            <a:avLst/>
-          </a:prstGeom>
-          <a:noFill/>
-        </p:spPr>
-        <p:txBody>
-          <a:bodyPr wrap="square" lIns="0" rIns="0" tIns="0" bIns="0" anchor="t">
-            <a:spAutoFit/>
-          </a:bodyPr>
-          <a:lstStyle/>
-          <a:p>
-            <a:pPr algn="l"/>
-            <a:r>
-              <a:rPr sz="1200" b="0">
-                <a:solidFill>
-                  <a:srgbClr val="7A8599"/>
-                </a:solidFill>
-                <a:latin typeface="微软雅黑"/>
-                <a:ea typeface="微软雅黑"/>
-                <a:cs typeface="微软雅黑"/>
-              </a:rPr>
-              <a:t>2026.4 – 2026.8　火车票 Agent</a:t>
-            </a:r>
-          </a:p>
-        </p:txBody>
-      </p:sp>
-      <p:sp>
-        <p:nvSpPr>
-          <p:cNvPr id="27" name="TextBox 26"/>
-          <p:cNvSpPr txBox="1"/>
-          <p:nvPr/>
-        </p:nvSpPr>
-        <p:spPr>
-          <a:xfrm>
-            <a:off x="7040880" y="3931920"/>
-            <a:ext cx="2011680" cy="1005840"/>
-          </a:xfrm>
-          <a:prstGeom prst="rect">
-            <a:avLst/>
-          </a:prstGeom>
-          <a:noFill/>
-        </p:spPr>
-        <p:txBody>
-          <a:bodyPr wrap="square" lIns="0" rIns="0" tIns="0" bIns="0" anchor="t">
-            <a:spAutoFit/>
-          </a:bodyPr>
-          <a:lstStyle/>
-          <a:p>
-            <a:pPr algn="l"/>
-            <a:r>
-              <a:rPr sz="1000" b="0">
-                <a:solidFill>
-                  <a:srgbClr val="287DFA"/>
-                </a:solidFill>
-                <a:latin typeface="微软雅黑"/>
-                <a:ea typeface="微软雅黑"/>
-                <a:cs typeface="微软雅黑"/>
-              </a:rPr>
-              <a:t>●  </a:t>
-            </a:r>
-            <a:r>
-              <a:rPr sz="1400" b="0">
-                <a:solidFill>
-                  <a:srgbClr val="3D4757"/>
-                </a:solidFill>
-                <a:latin typeface="微软雅黑"/>
-                <a:ea typeface="微软雅黑"/>
-                <a:cs typeface="微软雅黑"/>
-              </a:rPr>
-              <a:t>意图识别框架优化</a:t>
-            </a:r>
-          </a:p>
-          <a:p>
-            <a:pPr algn="l">
-              <a:spcBef>
-                <a:spcPts val="600"/>
-              </a:spcBef>
-            </a:pPr>
-            <a:r>
-              <a:rPr sz="1000" b="0">
-                <a:solidFill>
-                  <a:srgbClr val="287DFA"/>
-                </a:solidFill>
-                <a:latin typeface="微软雅黑"/>
-                <a:ea typeface="微软雅黑"/>
-                <a:cs typeface="微软雅黑"/>
-              </a:rPr>
-              <a:t>●  </a:t>
-            </a:r>
-            <a:r>
-              <a:rPr sz="1400" b="0">
-                <a:solidFill>
-                  <a:srgbClr val="3D4757"/>
-                </a:solidFill>
-                <a:latin typeface="微软雅黑"/>
-                <a:ea typeface="微软雅黑"/>
-                <a:cs typeface="微软雅黑"/>
-              </a:rPr>
-              <a:t>拒答治理</a:t>
-            </a:r>
-          </a:p>
-        </p:txBody>
-      </p:sp>
-      <p:sp>
-        <p:nvSpPr>
-          <p:cNvPr id="28" name="icon-circle"/>
+          <p:cNvPr id="57" name="Rounded Rectangle 56"/>
           <p:cNvSpPr/>
           <p:nvPr/>
         </p:nvSpPr>
         <p:spPr>
           <a:xfrm>
-            <a:off x="10241280" y="1627632"/>
-            <a:ext cx="685800" cy="685800"/>
-          </a:xfrm>
-          <a:prstGeom prst="ellipse">
-            <a:avLst/>
+            <a:off x="9535524" y="4791456"/>
+            <a:ext cx="1727003" cy="237744"/>
+          </a:xfrm>
+          <a:prstGeom prst="roundRect">
+            <a:avLst>
+              <a:gd name="adj" fmla="val 30000"/>
+            </a:avLst>
           </a:prstGeom>
           <a:solidFill>
-            <a:srgbClr val="287DFA"/>
+            <a:srgbClr val="15315E"/>
           </a:solidFill>
           <a:ln>
             <a:noFill/>
@@ -21065,281 +20072,16 @@
           <a:p/>
         </p:txBody>
       </p:sp>
-      <p:pic>
-        <p:nvPicPr>
-          <p:cNvPr id="29" name="Picture 28" descr="FaTicket_w.png"/>
-          <p:cNvPicPr>
-            <a:picLocks noChangeAspect="1"/>
-          </p:cNvPicPr>
-          <p:nvPr/>
-        </p:nvPicPr>
-        <p:blipFill>
-          <a:blip r:embed="rId9"/>
-          <a:stretch>
-            <a:fillRect/>
-          </a:stretch>
-        </p:blipFill>
-        <p:spPr>
-          <a:xfrm>
-            <a:off x="10412730" y="1799082"/>
-            <a:ext cx="342900" cy="342900"/>
-          </a:xfrm>
-          <a:prstGeom prst="rect">
-            <a:avLst/>
-          </a:prstGeom>
-        </p:spPr>
-      </p:pic>
-      <p:sp>
-        <p:nvSpPr>
-          <p:cNvPr id="30" name="Rounded Rectangle 29"/>
-          <p:cNvSpPr/>
-          <p:nvPr/>
-        </p:nvSpPr>
-        <p:spPr>
-          <a:xfrm>
-            <a:off x="9372600" y="2560320"/>
-            <a:ext cx="2377440" cy="2514600"/>
-          </a:xfrm>
-          <a:prstGeom prst="roundRect">
-            <a:avLst>
-              <a:gd name="adj" fmla="val 6000"/>
-            </a:avLst>
-          </a:prstGeom>
-          <a:solidFill>
-            <a:srgbClr val="FFFFFF"/>
-          </a:solidFill>
-          <a:ln w="12700">
-            <a:solidFill>
-              <a:srgbClr val="D3E2FB"/>
-            </a:solidFill>
-          </a:ln>
-          <a:effectLst/>
-        </p:spPr>
-        <p:style>
-          <a:lnRef idx="1">
-            <a:schemeClr val="accent1"/>
-          </a:lnRef>
-          <a:fillRef idx="3">
-            <a:schemeClr val="accent1"/>
-          </a:fillRef>
-          <a:effectRef idx="2">
-            <a:schemeClr val="accent1"/>
-          </a:effectRef>
-          <a:fontRef idx="minor">
-            <a:schemeClr val="lt1"/>
-          </a:fontRef>
-        </p:style>
-        <p:txBody>
-          <a:bodyPr rtlCol="0" anchor="ctr"/>
-          <a:lstStyle/>
-          <a:p/>
-        </p:txBody>
-      </p:sp>
-      <p:sp>
-        <p:nvSpPr>
-          <p:cNvPr id="31" name="TextBox 30"/>
+      <p:sp>
+        <p:nvSpPr>
+          <p:cNvPr id="58" name="TextBox 57"/>
           <p:cNvSpPr txBox="1"/>
           <p:nvPr/>
         </p:nvSpPr>
         <p:spPr>
           <a:xfrm>
-            <a:off x="9555480" y="2724912"/>
-            <a:ext cx="2011680" cy="365760"/>
-          </a:xfrm>
-          <a:prstGeom prst="rect">
-            <a:avLst/>
-          </a:prstGeom>
-          <a:noFill/>
-        </p:spPr>
-        <p:txBody>
-          <a:bodyPr wrap="square" lIns="0" rIns="0" tIns="0" bIns="0" anchor="t">
-            <a:spAutoFit/>
-          </a:bodyPr>
-          <a:lstStyle/>
-          <a:p>
-            <a:pPr algn="l"/>
-            <a:r>
-              <a:rPr sz="1600" b="1">
-                <a:solidFill>
-                  <a:srgbClr val="15315E"/>
-                </a:solidFill>
-                <a:latin typeface="微软雅黑"/>
-                <a:ea typeface="微软雅黑"/>
-                <a:cs typeface="微软雅黑"/>
-              </a:rPr>
-              <a:t>携程 · 抢票主线</a:t>
-            </a:r>
-          </a:p>
-        </p:txBody>
-      </p:sp>
-      <p:sp>
-        <p:nvSpPr>
-          <p:cNvPr id="32" name="TextBox 31"/>
-          <p:cNvSpPr txBox="1"/>
-          <p:nvPr/>
-        </p:nvSpPr>
-        <p:spPr>
-          <a:xfrm>
-            <a:off x="9555480" y="3154680"/>
-            <a:ext cx="2011680" cy="685800"/>
-          </a:xfrm>
-          <a:prstGeom prst="rect">
-            <a:avLst/>
-          </a:prstGeom>
-          <a:noFill/>
-        </p:spPr>
-        <p:txBody>
-          <a:bodyPr wrap="square" lIns="0" rIns="0" tIns="0" bIns="0" anchor="t">
-            <a:spAutoFit/>
-          </a:bodyPr>
-          <a:lstStyle/>
-          <a:p>
-            <a:pPr algn="l"/>
-            <a:r>
-              <a:rPr sz="1200" b="0">
-                <a:solidFill>
-                  <a:srgbClr val="7A8599"/>
-                </a:solidFill>
-                <a:latin typeface="微软雅黑"/>
-                <a:ea typeface="微软雅黑"/>
-                <a:cs typeface="微软雅黑"/>
-              </a:rPr>
-              <a:t>2026.8 – 至今　聚焦票量</a:t>
-            </a:r>
-          </a:p>
-        </p:txBody>
-      </p:sp>
-      <p:sp>
-        <p:nvSpPr>
-          <p:cNvPr id="33" name="TextBox 32"/>
-          <p:cNvSpPr txBox="1"/>
-          <p:nvPr/>
-        </p:nvSpPr>
-        <p:spPr>
-          <a:xfrm>
-            <a:off x="9555480" y="3931920"/>
-            <a:ext cx="2011680" cy="1005840"/>
-          </a:xfrm>
-          <a:prstGeom prst="rect">
-            <a:avLst/>
-          </a:prstGeom>
-          <a:noFill/>
-        </p:spPr>
-        <p:txBody>
-          <a:bodyPr wrap="square" lIns="0" rIns="0" tIns="0" bIns="0" anchor="t">
-            <a:spAutoFit/>
-          </a:bodyPr>
-          <a:lstStyle/>
-          <a:p>
-            <a:pPr algn="l"/>
-            <a:r>
-              <a:rPr sz="1000" b="0">
-                <a:solidFill>
-                  <a:srgbClr val="287DFA"/>
-                </a:solidFill>
-                <a:latin typeface="微软雅黑"/>
-                <a:ea typeface="微软雅黑"/>
-                <a:cs typeface="微软雅黑"/>
-              </a:rPr>
-              <a:t>●  </a:t>
-            </a:r>
-            <a:r>
-              <a:rPr sz="1400" b="0">
-                <a:solidFill>
-                  <a:srgbClr val="3D4757"/>
-                </a:solidFill>
-                <a:latin typeface="微软雅黑"/>
-                <a:ea typeface="微软雅黑"/>
-                <a:cs typeface="微软雅黑"/>
-              </a:rPr>
-              <a:t>支付链路修复</a:t>
-            </a:r>
-          </a:p>
-          <a:p>
-            <a:pPr algn="l">
-              <a:spcBef>
-                <a:spcPts val="600"/>
-              </a:spcBef>
-            </a:pPr>
-            <a:r>
-              <a:rPr sz="1000" b="0">
-                <a:solidFill>
-                  <a:srgbClr val="287DFA"/>
-                </a:solidFill>
-                <a:latin typeface="微软雅黑"/>
-                <a:ea typeface="微软雅黑"/>
-                <a:cs typeface="微软雅黑"/>
-              </a:rPr>
-              <a:t>●  </a:t>
-            </a:r>
-            <a:r>
-              <a:rPr sz="1400" b="0">
-                <a:solidFill>
-                  <a:srgbClr val="3D4757"/>
-                </a:solidFill>
-                <a:latin typeface="微软雅黑"/>
-                <a:ea typeface="微软雅黑"/>
-                <a:cs typeface="微软雅黑"/>
-              </a:rPr>
-              <a:t>数据口径修正</a:t>
-            </a:r>
-          </a:p>
-        </p:txBody>
-      </p:sp>
-      <p:sp>
-        <p:nvSpPr>
-          <p:cNvPr id="34" name="Rounded Rectangle 33"/>
-          <p:cNvSpPr/>
-          <p:nvPr/>
-        </p:nvSpPr>
-        <p:spPr>
-          <a:xfrm>
-            <a:off x="4343400" y="5349240"/>
-            <a:ext cx="7406640" cy="731520"/>
-          </a:xfrm>
-          <a:prstGeom prst="roundRect">
-            <a:avLst>
-              <a:gd name="adj" fmla="val 6000"/>
-            </a:avLst>
-          </a:prstGeom>
-          <a:solidFill>
-            <a:srgbClr val="287DFA"/>
-          </a:solidFill>
-          <a:ln>
-            <a:noFill/>
-          </a:ln>
-          <a:effectLst/>
-        </p:spPr>
-        <p:style>
-          <a:lnRef idx="1">
-            <a:schemeClr val="accent1"/>
-          </a:lnRef>
-          <a:fillRef idx="3">
-            <a:schemeClr val="accent1"/>
-          </a:fillRef>
-          <a:effectRef idx="2">
-            <a:schemeClr val="accent1"/>
-          </a:effectRef>
-          <a:fontRef idx="minor">
-            <a:schemeClr val="lt1"/>
-          </a:fontRef>
-        </p:style>
-        <p:txBody>
-          <a:bodyPr rtlCol="0" anchor="ctr"/>
-          <a:lstStyle/>
-          <a:p/>
-        </p:txBody>
-      </p:sp>
-      <p:sp>
-        <p:nvSpPr>
-          <p:cNvPr id="35" name="TextBox 34"/>
-          <p:cNvSpPr txBox="1"/>
-          <p:nvPr/>
-        </p:nvSpPr>
-        <p:spPr>
-          <a:xfrm>
-            <a:off x="4526280" y="5349240"/>
-            <a:ext cx="3108960" cy="731520"/>
+            <a:off x="9535524" y="4791456"/>
+            <a:ext cx="1727003" cy="237744"/>
           </a:xfrm>
           <a:prstGeom prst="rect">
             <a:avLst/>
@@ -21354,7 +20096,7 @@
           <a:p>
             <a:pPr algn="ctr"/>
             <a:r>
-              <a:rPr sz="1600" b="1">
+              <a:rPr sz="1100" b="1">
                 <a:solidFill>
                   <a:srgbClr val="FFFFFF"/>
                 </a:solidFill>
@@ -21362,27 +20104,29 @@
                 <a:ea typeface="微软雅黑"/>
                 <a:cs typeface="微软雅黑"/>
               </a:rPr>
-              <a:t>AI native 产品调优</a:t>
+              <a:t>支付流程补足</a:t>
             </a:r>
           </a:p>
         </p:txBody>
       </p:sp>
       <p:sp>
         <p:nvSpPr>
-          <p:cNvPr id="36" name="arrow"/>
+          <p:cNvPr id="59" name="Rounded Rectangle 58"/>
           <p:cNvSpPr/>
           <p:nvPr/>
         </p:nvSpPr>
         <p:spPr>
           <a:xfrm>
-            <a:off x="7726679" y="5550408"/>
-            <a:ext cx="548640" cy="329184"/>
-          </a:xfrm>
-          <a:prstGeom prst="rightArrow">
-            <a:avLst/>
+            <a:off x="9896990" y="5102352"/>
+            <a:ext cx="1365537" cy="237744"/>
+          </a:xfrm>
+          <a:prstGeom prst="roundRect">
+            <a:avLst>
+              <a:gd name="adj" fmla="val 30000"/>
+            </a:avLst>
           </a:prstGeom>
           <a:solidFill>
-            <a:srgbClr val="FFFFFF"/>
+            <a:srgbClr val="15315E"/>
           </a:solidFill>
           <a:ln>
             <a:noFill/>
@@ -21411,14 +20155,14 @@
       </p:sp>
       <p:sp>
         <p:nvSpPr>
-          <p:cNvPr id="37" name="TextBox 36"/>
+          <p:cNvPr id="60" name="TextBox 59"/>
           <p:cNvSpPr txBox="1"/>
           <p:nvPr/>
         </p:nvSpPr>
         <p:spPr>
           <a:xfrm>
-            <a:off x="8366760" y="5349240"/>
-            <a:ext cx="3200400" cy="731520"/>
+            <a:off x="9896990" y="5102352"/>
+            <a:ext cx="1365537" cy="237744"/>
           </a:xfrm>
           <a:prstGeom prst="rect">
             <a:avLst/>
@@ -21433,7 +20177,7 @@
           <a:p>
             <a:pPr algn="ctr"/>
             <a:r>
-              <a:rPr sz="1600" b="1">
+              <a:rPr sz="1100" b="1">
                 <a:solidFill>
                   <a:srgbClr val="FFFFFF"/>
                 </a:solidFill>
@@ -21441,7 +20185,250 @@
                 <a:ea typeface="微软雅黑"/>
                 <a:cs typeface="微软雅黑"/>
               </a:rPr>
-              <a:t>在业务里用 AI 赋能</a:t>
+              <a:t>在线换座体验优化</a:t>
+            </a:r>
+          </a:p>
+        </p:txBody>
+      </p:sp>
+      <p:sp>
+        <p:nvSpPr>
+          <p:cNvPr id="61" name="Rounded Rectangle 60"/>
+          <p:cNvSpPr/>
+          <p:nvPr/>
+        </p:nvSpPr>
+        <p:spPr>
+          <a:xfrm>
+            <a:off x="3200400" y="5522976"/>
+            <a:ext cx="1097280" cy="566928"/>
+          </a:xfrm>
+          <a:prstGeom prst="roundRect">
+            <a:avLst>
+              <a:gd name="adj" fmla="val 12000"/>
+            </a:avLst>
+          </a:prstGeom>
+          <a:solidFill>
+            <a:srgbClr val="4F8DF5"/>
+          </a:solidFill>
+          <a:ln>
+            <a:noFill/>
+          </a:ln>
+          <a:effectLst/>
+        </p:spPr>
+        <p:style>
+          <a:lnRef idx="1">
+            <a:schemeClr val="accent1"/>
+          </a:lnRef>
+          <a:fillRef idx="3">
+            <a:schemeClr val="accent1"/>
+          </a:fillRef>
+          <a:effectRef idx="2">
+            <a:schemeClr val="accent1"/>
+          </a:effectRef>
+          <a:fontRef idx="minor">
+            <a:schemeClr val="lt1"/>
+          </a:fontRef>
+        </p:style>
+        <p:txBody>
+          <a:bodyPr rtlCol="0" anchor="ctr"/>
+          <a:lstStyle/>
+          <a:p/>
+        </p:txBody>
+      </p:sp>
+      <p:sp>
+        <p:nvSpPr>
+          <p:cNvPr id="62" name="TextBox 61"/>
+          <p:cNvSpPr txBox="1"/>
+          <p:nvPr/>
+        </p:nvSpPr>
+        <p:spPr>
+          <a:xfrm>
+            <a:off x="3200400" y="5522976"/>
+            <a:ext cx="1097280" cy="566928"/>
+          </a:xfrm>
+          <a:prstGeom prst="rect">
+            <a:avLst/>
+          </a:prstGeom>
+          <a:noFill/>
+        </p:spPr>
+        <p:txBody>
+          <a:bodyPr wrap="square" lIns="0" rIns="0" tIns="0" bIns="0" anchor="ctr">
+            <a:spAutoFit/>
+          </a:bodyPr>
+          <a:lstStyle/>
+          <a:p>
+            <a:pPr algn="ctr"/>
+            <a:r>
+              <a:rPr sz="1200" b="1">
+                <a:solidFill>
+                  <a:srgbClr val="FFFFFF"/>
+                </a:solidFill>
+                <a:latin typeface="微软雅黑"/>
+                <a:ea typeface="微软雅黑"/>
+                <a:cs typeface="微软雅黑"/>
+              </a:rPr>
+              <a:t>专题跟进</a:t>
+            </a:r>
+          </a:p>
+        </p:txBody>
+      </p:sp>
+      <p:sp>
+        <p:nvSpPr>
+          <p:cNvPr id="63" name="Rounded Rectangle 62"/>
+          <p:cNvSpPr/>
+          <p:nvPr/>
+        </p:nvSpPr>
+        <p:spPr>
+          <a:xfrm>
+            <a:off x="8410964" y="5522976"/>
+            <a:ext cx="1967980" cy="237744"/>
+          </a:xfrm>
+          <a:prstGeom prst="roundRect">
+            <a:avLst>
+              <a:gd name="adj" fmla="val 30000"/>
+            </a:avLst>
+          </a:prstGeom>
+          <a:solidFill>
+            <a:srgbClr val="4F8DF5"/>
+          </a:solidFill>
+          <a:ln>
+            <a:noFill/>
+          </a:ln>
+          <a:effectLst/>
+        </p:spPr>
+        <p:style>
+          <a:lnRef idx="1">
+            <a:schemeClr val="accent1"/>
+          </a:lnRef>
+          <a:fillRef idx="3">
+            <a:schemeClr val="accent1"/>
+          </a:fillRef>
+          <a:effectRef idx="2">
+            <a:schemeClr val="accent1"/>
+          </a:effectRef>
+          <a:fontRef idx="minor">
+            <a:schemeClr val="lt1"/>
+          </a:fontRef>
+        </p:style>
+        <p:txBody>
+          <a:bodyPr rtlCol="0" anchor="ctr"/>
+          <a:lstStyle/>
+          <a:p/>
+        </p:txBody>
+      </p:sp>
+      <p:sp>
+        <p:nvSpPr>
+          <p:cNvPr id="64" name="TextBox 63"/>
+          <p:cNvSpPr txBox="1"/>
+          <p:nvPr/>
+        </p:nvSpPr>
+        <p:spPr>
+          <a:xfrm>
+            <a:off x="6042668" y="5522976"/>
+            <a:ext cx="2313432" cy="237744"/>
+          </a:xfrm>
+          <a:prstGeom prst="rect">
+            <a:avLst/>
+          </a:prstGeom>
+          <a:noFill/>
+        </p:spPr>
+        <p:txBody>
+          <a:bodyPr wrap="square" lIns="0" rIns="0" tIns="0" bIns="0" anchor="ctr">
+            <a:spAutoFit/>
+          </a:bodyPr>
+          <a:lstStyle/>
+          <a:p>
+            <a:pPr algn="r"/>
+            <a:r>
+              <a:rPr sz="1100" b="1">
+                <a:solidFill>
+                  <a:srgbClr val="4F8DF5"/>
+                </a:solidFill>
+                <a:latin typeface="微软雅黑"/>
+                <a:ea typeface="微软雅黑"/>
+                <a:cs typeface="微软雅黑"/>
+              </a:rPr>
+              <a:t>支付需求数据回收与口径修正</a:t>
+            </a:r>
+          </a:p>
+        </p:txBody>
+      </p:sp>
+      <p:sp>
+        <p:nvSpPr>
+          <p:cNvPr id="65" name="Rounded Rectangle 64"/>
+          <p:cNvSpPr/>
+          <p:nvPr/>
+        </p:nvSpPr>
+        <p:spPr>
+          <a:xfrm>
+            <a:off x="11061714" y="5833872"/>
+            <a:ext cx="441791" cy="237744"/>
+          </a:xfrm>
+          <a:prstGeom prst="roundRect">
+            <a:avLst>
+              <a:gd name="adj" fmla="val 30000"/>
+            </a:avLst>
+          </a:prstGeom>
+          <a:solidFill>
+            <a:srgbClr val="4F8DF5"/>
+          </a:solidFill>
+          <a:ln>
+            <a:noFill/>
+          </a:ln>
+          <a:effectLst/>
+        </p:spPr>
+        <p:style>
+          <a:lnRef idx="1">
+            <a:schemeClr val="accent1"/>
+          </a:lnRef>
+          <a:fillRef idx="3">
+            <a:schemeClr val="accent1"/>
+          </a:fillRef>
+          <a:effectRef idx="2">
+            <a:schemeClr val="accent1"/>
+          </a:effectRef>
+          <a:fontRef idx="minor">
+            <a:schemeClr val="lt1"/>
+          </a:fontRef>
+        </p:style>
+        <p:txBody>
+          <a:bodyPr rtlCol="0" anchor="ctr"/>
+          <a:lstStyle/>
+          <a:p/>
+        </p:txBody>
+      </p:sp>
+      <p:sp>
+        <p:nvSpPr>
+          <p:cNvPr id="66" name="TextBox 65"/>
+          <p:cNvSpPr txBox="1"/>
+          <p:nvPr/>
+        </p:nvSpPr>
+        <p:spPr>
+          <a:xfrm>
+            <a:off x="9717546" y="5833872"/>
+            <a:ext cx="1289304" cy="237744"/>
+          </a:xfrm>
+          <a:prstGeom prst="rect">
+            <a:avLst/>
+          </a:prstGeom>
+          <a:noFill/>
+        </p:spPr>
+        <p:txBody>
+          <a:bodyPr wrap="square" lIns="0" rIns="0" tIns="0" bIns="0" anchor="ctr">
+            <a:spAutoFit/>
+          </a:bodyPr>
+          <a:lstStyle/>
+          <a:p>
+            <a:pPr algn="r"/>
+            <a:r>
+              <a:rPr sz="1100" b="1">
+                <a:solidFill>
+                  <a:srgbClr val="4F8DF5"/>
+                </a:solidFill>
+                <a:latin typeface="微软雅黑"/>
+                <a:ea typeface="微软雅黑"/>
+                <a:cs typeface="微软雅黑"/>
+              </a:rPr>
+              <a:t>消息模板整改</a:t>
             </a:r>
           </a:p>
         </p:txBody>

--- a/答辩PPT.pptx
+++ b/答辩PPT.pptx
@@ -18329,8 +18329,8 @@
         </p:nvSpPr>
         <p:spPr>
           <a:xfrm>
-            <a:off x="4434840" y="1481328"/>
-            <a:ext cx="4417916" cy="384048"/>
+            <a:off x="4343400" y="1481328"/>
+            <a:ext cx="3977639" cy="384048"/>
           </a:xfrm>
           <a:prstGeom prst="roundRect">
             <a:avLst>
@@ -18373,8 +18373,8 @@
         </p:nvSpPr>
         <p:spPr>
           <a:xfrm>
-            <a:off x="4434840" y="1481328"/>
-            <a:ext cx="4417916" cy="384048"/>
+            <a:off x="4343400" y="1481328"/>
+            <a:ext cx="3977639" cy="384048"/>
           </a:xfrm>
           <a:prstGeom prst="rect">
             <a:avLst/>
@@ -18410,8 +18410,8 @@
         </p:nvSpPr>
         <p:spPr>
           <a:xfrm>
-            <a:off x="8370801" y="1481328"/>
-            <a:ext cx="3379238" cy="384048"/>
+            <a:off x="7680959" y="1481328"/>
+            <a:ext cx="3985014" cy="384048"/>
           </a:xfrm>
           <a:prstGeom prst="homePlate">
             <a:avLst/>
@@ -18452,8 +18452,8 @@
         </p:nvSpPr>
         <p:spPr>
           <a:xfrm>
-            <a:off x="8370801" y="1481328"/>
-            <a:ext cx="3333518" cy="384048"/>
+            <a:off x="7680959" y="1481328"/>
+            <a:ext cx="3985014" cy="384048"/>
           </a:xfrm>
           <a:prstGeom prst="rect">
             <a:avLst/>
@@ -18489,8 +18489,8 @@
         </p:nvCxnSpPr>
         <p:spPr>
           <a:xfrm>
-            <a:off x="4434840" y="2240280"/>
-            <a:ext cx="7269480" cy="0"/>
+            <a:off x="4343400" y="2240280"/>
+            <a:ext cx="7322574" cy="0"/>
           </a:xfrm>
           <a:prstGeom prst="line">
             <a:avLst/>
@@ -18524,7 +18524,7 @@
         </p:nvSpPr>
         <p:spPr>
           <a:xfrm>
-            <a:off x="4229731" y="1938528"/>
+            <a:off x="4023359" y="1938528"/>
             <a:ext cx="731520" cy="237744"/>
           </a:xfrm>
           <a:prstGeom prst="rect">
@@ -18561,7 +18561,7 @@
         </p:nvSpPr>
         <p:spPr>
           <a:xfrm>
-            <a:off x="4549771" y="2194560"/>
+            <a:off x="4343400" y="2194560"/>
             <a:ext cx="91440" cy="91440"/>
           </a:xfrm>
           <a:prstGeom prst="ellipse">
@@ -18605,8 +18605,8 @@
         </p:nvCxnSpPr>
         <p:spPr>
           <a:xfrm>
-            <a:off x="4595491" y="2313432"/>
-            <a:ext cx="0" cy="3739896"/>
+            <a:off x="4389120" y="2313432"/>
+            <a:ext cx="0" cy="3721608"/>
           </a:xfrm>
           <a:prstGeom prst="line">
             <a:avLst/>
@@ -18641,7 +18641,7 @@
         </p:nvSpPr>
         <p:spPr>
           <a:xfrm>
-            <a:off x="5474780" y="1938528"/>
+            <a:off x="5074919" y="1938528"/>
             <a:ext cx="731520" cy="237744"/>
           </a:xfrm>
           <a:prstGeom prst="rect">
@@ -18678,7 +18678,7 @@
         </p:nvSpPr>
         <p:spPr>
           <a:xfrm>
-            <a:off x="5794820" y="2194560"/>
+            <a:off x="5394959" y="2194560"/>
             <a:ext cx="91440" cy="91440"/>
           </a:xfrm>
           <a:prstGeom prst="ellipse">
@@ -18722,8 +18722,8 @@
         </p:nvCxnSpPr>
         <p:spPr>
           <a:xfrm>
-            <a:off x="5840540" y="2313432"/>
-            <a:ext cx="0" cy="3739896"/>
+            <a:off x="5440679" y="2313432"/>
+            <a:ext cx="0" cy="3721608"/>
           </a:xfrm>
           <a:prstGeom prst="line">
             <a:avLst/>
@@ -18758,7 +18758,7 @@
         </p:nvSpPr>
         <p:spPr>
           <a:xfrm>
-            <a:off x="6679666" y="1938528"/>
+            <a:off x="6263639" y="1938528"/>
             <a:ext cx="731520" cy="237744"/>
           </a:xfrm>
           <a:prstGeom prst="rect">
@@ -18795,7 +18795,7 @@
         </p:nvSpPr>
         <p:spPr>
           <a:xfrm>
-            <a:off x="6999706" y="2194560"/>
+            <a:off x="6583679" y="2194560"/>
             <a:ext cx="91440" cy="91440"/>
           </a:xfrm>
           <a:prstGeom prst="ellipse">
@@ -18839,8 +18839,8 @@
         </p:nvCxnSpPr>
         <p:spPr>
           <a:xfrm>
-            <a:off x="7045426" y="2313432"/>
-            <a:ext cx="0" cy="3739896"/>
+            <a:off x="6629399" y="2313432"/>
+            <a:ext cx="0" cy="3721608"/>
           </a:xfrm>
           <a:prstGeom prst="line">
             <a:avLst/>
@@ -18875,7 +18875,7 @@
         </p:nvSpPr>
         <p:spPr>
           <a:xfrm>
-            <a:off x="7924715" y="1938528"/>
+            <a:off x="7315199" y="1938528"/>
             <a:ext cx="731520" cy="237744"/>
           </a:xfrm>
           <a:prstGeom prst="rect">
@@ -18912,7 +18912,7 @@
         </p:nvSpPr>
         <p:spPr>
           <a:xfrm>
-            <a:off x="8244755" y="2194560"/>
+            <a:off x="7635239" y="2194560"/>
             <a:ext cx="91440" cy="91440"/>
           </a:xfrm>
           <a:prstGeom prst="ellipse">
@@ -18956,8 +18956,8 @@
         </p:nvCxnSpPr>
         <p:spPr>
           <a:xfrm>
-            <a:off x="8290475" y="2313432"/>
-            <a:ext cx="0" cy="3739896"/>
+            <a:off x="7680959" y="2313432"/>
+            <a:ext cx="0" cy="3721608"/>
           </a:xfrm>
           <a:prstGeom prst="line">
             <a:avLst/>
@@ -18992,7 +18992,7 @@
         </p:nvSpPr>
         <p:spPr>
           <a:xfrm>
-            <a:off x="9169764" y="1938528"/>
+            <a:off x="8732519" y="1938528"/>
             <a:ext cx="731520" cy="237744"/>
           </a:xfrm>
           <a:prstGeom prst="rect">
@@ -19029,7 +19029,7 @@
         </p:nvSpPr>
         <p:spPr>
           <a:xfrm>
-            <a:off x="9489804" y="2194560"/>
+            <a:off x="9052559" y="2194560"/>
             <a:ext cx="91440" cy="91440"/>
           </a:xfrm>
           <a:prstGeom prst="ellipse">
@@ -19073,8 +19073,8 @@
         </p:nvCxnSpPr>
         <p:spPr>
           <a:xfrm>
-            <a:off x="9535524" y="2313432"/>
-            <a:ext cx="0" cy="3739896"/>
+            <a:off x="9098280" y="2313432"/>
+            <a:ext cx="0" cy="3721608"/>
           </a:xfrm>
           <a:prstGeom prst="line">
             <a:avLst/>
@@ -19109,7 +19109,7 @@
         </p:nvSpPr>
         <p:spPr>
           <a:xfrm>
-            <a:off x="10374651" y="1938528"/>
+            <a:off x="10149840" y="1938528"/>
             <a:ext cx="731520" cy="237744"/>
           </a:xfrm>
           <a:prstGeom prst="rect">
@@ -19146,7 +19146,7 @@
         </p:nvSpPr>
         <p:spPr>
           <a:xfrm>
-            <a:off x="10694691" y="2194560"/>
+            <a:off x="10469880" y="2194560"/>
             <a:ext cx="91440" cy="91440"/>
           </a:xfrm>
           <a:prstGeom prst="ellipse">
@@ -19190,8 +19190,8 @@
         </p:nvCxnSpPr>
         <p:spPr>
           <a:xfrm>
-            <a:off x="10740411" y="2313432"/>
-            <a:ext cx="0" cy="3739896"/>
+            <a:off x="10515600" y="2313432"/>
+            <a:ext cx="0" cy="3721608"/>
           </a:xfrm>
           <a:prstGeom prst="line">
             <a:avLst/>
@@ -19226,8 +19226,8 @@
         </p:nvSpPr>
         <p:spPr>
           <a:xfrm>
-            <a:off x="3200400" y="2395728"/>
-            <a:ext cx="1097280" cy="566928"/>
+            <a:off x="3200400" y="2450592"/>
+            <a:ext cx="1005840" cy="1060704"/>
           </a:xfrm>
           <a:prstGeom prst="roundRect">
             <a:avLst>
@@ -19235,7 +19235,7 @@
             </a:avLst>
           </a:prstGeom>
           <a:solidFill>
-            <a:srgbClr val="FF7A1A"/>
+            <a:srgbClr val="287DFA"/>
           </a:solidFill>
           <a:ln>
             <a:noFill/>
@@ -19270,8 +19270,8 @@
         </p:nvSpPr>
         <p:spPr>
           <a:xfrm>
-            <a:off x="3200400" y="2395728"/>
-            <a:ext cx="1097280" cy="566928"/>
+            <a:off x="3200400" y="2450592"/>
+            <a:ext cx="1005840" cy="1060704"/>
           </a:xfrm>
           <a:prstGeom prst="rect">
             <a:avLst/>
@@ -19286,7 +19286,7 @@
           <a:p>
             <a:pPr algn="ctr"/>
             <a:r>
-              <a:rPr sz="1200" b="1">
+              <a:rPr sz="1300" b="1">
                 <a:solidFill>
                   <a:srgbClr val="FFFFFF"/>
                 </a:solidFill>
@@ -19294,187 +19294,43 @@
                 <a:ea typeface="微软雅黑"/>
                 <a:cs typeface="微软雅黑"/>
               </a:rPr>
-              <a:t>业务学习</a:t>
+              <a:t>火车票</a:t>
             </a:r>
           </a:p>
-        </p:txBody>
-      </p:sp>
-      <p:sp>
-        <p:nvSpPr>
-          <p:cNvPr id="39" name="Rounded Rectangle 38"/>
-          <p:cNvSpPr/>
-          <p:nvPr/>
-        </p:nvSpPr>
-        <p:spPr>
-          <a:xfrm>
-            <a:off x="4434840" y="2395728"/>
-            <a:ext cx="1084397" cy="237744"/>
-          </a:xfrm>
-          <a:prstGeom prst="roundRect">
-            <a:avLst>
-              <a:gd name="adj" fmla="val 30000"/>
-            </a:avLst>
-          </a:prstGeom>
-          <a:solidFill>
-            <a:srgbClr val="FF7A1A"/>
-          </a:solidFill>
-          <a:ln>
-            <a:noFill/>
-          </a:ln>
-          <a:effectLst/>
-        </p:spPr>
-        <p:style>
-          <a:lnRef idx="1">
-            <a:schemeClr val="accent1"/>
-          </a:lnRef>
-          <a:fillRef idx="3">
-            <a:schemeClr val="accent1"/>
-          </a:fillRef>
-          <a:effectRef idx="2">
-            <a:schemeClr val="accent1"/>
-          </a:effectRef>
-          <a:fontRef idx="minor">
-            <a:schemeClr val="lt1"/>
-          </a:fontRef>
-        </p:style>
-        <p:txBody>
-          <a:bodyPr rtlCol="0" anchor="ctr"/>
-          <a:lstStyle/>
-          <a:p/>
-        </p:txBody>
-      </p:sp>
-      <p:sp>
-        <p:nvSpPr>
-          <p:cNvPr id="40" name="TextBox 39"/>
-          <p:cNvSpPr txBox="1"/>
-          <p:nvPr/>
-        </p:nvSpPr>
-        <p:spPr>
-          <a:xfrm>
-            <a:off x="5574101" y="2395728"/>
-            <a:ext cx="1728216" cy="237744"/>
-          </a:xfrm>
-          <a:prstGeom prst="rect">
-            <a:avLst/>
-          </a:prstGeom>
-          <a:noFill/>
-        </p:spPr>
-        <p:txBody>
-          <a:bodyPr wrap="square" lIns="0" rIns="0" tIns="0" bIns="0" anchor="ctr">
-            <a:spAutoFit/>
-          </a:bodyPr>
-          <a:lstStyle/>
           <a:p>
-            <a:pPr algn="l"/>
+            <a:pPr algn="ctr">
+              <a:spcBef>
+                <a:spcPts val="0"/>
+              </a:spcBef>
+            </a:pPr>
             <a:r>
-              <a:rPr sz="1100" b="1">
+              <a:rPr sz="1300" b="1">
                 <a:solidFill>
-                  <a:srgbClr val="FF7A1A"/>
+                  <a:srgbClr val="FFFFFF"/>
                 </a:solidFill>
                 <a:latin typeface="微软雅黑"/>
                 <a:ea typeface="微软雅黑"/>
                 <a:cs typeface="微软雅黑"/>
               </a:rPr>
-              <a:t>竞品分析与业务熟悉</a:t>
+              <a:t>Agent</a:t>
             </a:r>
           </a:p>
         </p:txBody>
       </p:sp>
       <p:sp>
         <p:nvSpPr>
-          <p:cNvPr id="41" name="Rounded Rectangle 40"/>
+          <p:cNvPr id="39" name="Rounded Rectangle 38"/>
           <p:cNvSpPr/>
           <p:nvPr/>
         </p:nvSpPr>
         <p:spPr>
           <a:xfrm>
-            <a:off x="8370801" y="2706624"/>
-            <a:ext cx="361465" cy="237744"/>
+            <a:off x="4343400" y="2450592"/>
+            <a:ext cx="1063358" cy="292607"/>
           </a:xfrm>
           <a:prstGeom prst="roundRect">
             <a:avLst>
               <a:gd name="adj" fmla="val 30000"/>
-            </a:avLst>
-          </a:prstGeom>
-          <a:solidFill>
-            <a:srgbClr val="FF7A1A"/>
-          </a:solidFill>
-          <a:ln>
-            <a:noFill/>
-          </a:ln>
-          <a:effectLst/>
-        </p:spPr>
-        <p:style>
-          <a:lnRef idx="1">
-            <a:schemeClr val="accent1"/>
-          </a:lnRef>
-          <a:fillRef idx="3">
-            <a:schemeClr val="accent1"/>
-          </a:fillRef>
-          <a:effectRef idx="2">
-            <a:schemeClr val="accent1"/>
-          </a:effectRef>
-          <a:fontRef idx="minor">
-            <a:schemeClr val="lt1"/>
-          </a:fontRef>
-        </p:style>
-        <p:txBody>
-          <a:bodyPr rtlCol="0" anchor="ctr"/>
-          <a:lstStyle/>
-          <a:p/>
-        </p:txBody>
-      </p:sp>
-      <p:sp>
-        <p:nvSpPr>
-          <p:cNvPr id="42" name="TextBox 41"/>
-          <p:cNvSpPr txBox="1"/>
-          <p:nvPr/>
-        </p:nvSpPr>
-        <p:spPr>
-          <a:xfrm>
-            <a:off x="8787131" y="2706624"/>
-            <a:ext cx="1728216" cy="237744"/>
-          </a:xfrm>
-          <a:prstGeom prst="rect">
-            <a:avLst/>
-          </a:prstGeom>
-          <a:noFill/>
-        </p:spPr>
-        <p:txBody>
-          <a:bodyPr wrap="square" lIns="0" rIns="0" tIns="0" bIns="0" anchor="ctr">
-            <a:spAutoFit/>
-          </a:bodyPr>
-          <a:lstStyle/>
-          <a:p>
-            <a:pPr algn="l"/>
-            <a:r>
-              <a:rPr sz="1100" b="1">
-                <a:solidFill>
-                  <a:srgbClr val="FF7A1A"/>
-                </a:solidFill>
-                <a:latin typeface="微软雅黑"/>
-                <a:ea typeface="微软雅黑"/>
-                <a:cs typeface="微软雅黑"/>
-              </a:rPr>
-              <a:t>抢票 &amp; 收益交接</a:t>
-            </a:r>
-          </a:p>
-        </p:txBody>
-      </p:sp>
-      <p:sp>
-        <p:nvSpPr>
-          <p:cNvPr id="43" name="Rounded Rectangle 42"/>
-          <p:cNvSpPr/>
-          <p:nvPr/>
-        </p:nvSpPr>
-        <p:spPr>
-          <a:xfrm>
-            <a:off x="3200400" y="3127248"/>
-            <a:ext cx="1097280" cy="877824"/>
-          </a:xfrm>
-          <a:prstGeom prst="roundRect">
-            <a:avLst>
-              <a:gd name="adj" fmla="val 12000"/>
             </a:avLst>
           </a:prstGeom>
           <a:solidFill>
@@ -19507,14 +19363,14 @@
       </p:sp>
       <p:sp>
         <p:nvSpPr>
-          <p:cNvPr id="44" name="TextBox 43"/>
+          <p:cNvPr id="40" name="TextBox 39"/>
           <p:cNvSpPr txBox="1"/>
           <p:nvPr/>
         </p:nvSpPr>
         <p:spPr>
           <a:xfrm>
-            <a:off x="3200400" y="3127248"/>
-            <a:ext cx="1097280" cy="877824"/>
+            <a:off x="4343400" y="2450592"/>
+            <a:ext cx="1063358" cy="292607"/>
           </a:xfrm>
           <a:prstGeom prst="rect">
             <a:avLst/>
@@ -19529,7 +19385,7 @@
           <a:p>
             <a:pPr algn="ctr"/>
             <a:r>
-              <a:rPr sz="1200" b="1">
+              <a:rPr sz="1100" b="1">
                 <a:solidFill>
                   <a:srgbClr val="FFFFFF"/>
                 </a:solidFill>
@@ -19537,21 +19393,21 @@
                 <a:ea typeface="微软雅黑"/>
                 <a:cs typeface="微软雅黑"/>
               </a:rPr>
-              <a:t>火车票 Agent</a:t>
+              <a:t>竞品分析</a:t>
             </a:r>
           </a:p>
         </p:txBody>
       </p:sp>
       <p:sp>
         <p:nvSpPr>
-          <p:cNvPr id="45" name="Rounded Rectangle 44"/>
+          <p:cNvPr id="41" name="Rounded Rectangle 40"/>
           <p:cNvSpPr/>
           <p:nvPr/>
         </p:nvSpPr>
         <p:spPr>
           <a:xfrm>
-            <a:off x="5278260" y="3127248"/>
-            <a:ext cx="1004071" cy="237744"/>
+            <a:off x="5440679" y="2834640"/>
+            <a:ext cx="1426169" cy="292607"/>
           </a:xfrm>
           <a:prstGeom prst="roundRect">
             <a:avLst>
@@ -19588,14 +19444,14 @@
       </p:sp>
       <p:sp>
         <p:nvSpPr>
-          <p:cNvPr id="46" name="TextBox 45"/>
+          <p:cNvPr id="42" name="TextBox 41"/>
           <p:cNvSpPr txBox="1"/>
           <p:nvPr/>
         </p:nvSpPr>
         <p:spPr>
           <a:xfrm>
-            <a:off x="6337196" y="3127248"/>
-            <a:ext cx="2167127" cy="237744"/>
+            <a:off x="5440679" y="2834640"/>
+            <a:ext cx="1426169" cy="292607"/>
           </a:xfrm>
           <a:prstGeom prst="rect">
             <a:avLst/>
@@ -19608,31 +19464,31 @@
           </a:bodyPr>
           <a:lstStyle/>
           <a:p>
-            <a:pPr algn="l"/>
+            <a:pPr algn="ctr"/>
             <a:r>
               <a:rPr sz="1100" b="1">
                 <a:solidFill>
-                  <a:srgbClr val="287DFA"/>
+                  <a:srgbClr val="FFFFFF"/>
                 </a:solidFill>
                 <a:latin typeface="微软雅黑"/>
                 <a:ea typeface="微软雅黑"/>
                 <a:cs typeface="微软雅黑"/>
               </a:rPr>
-              <a:t>一期：意图识别与上线验收</a:t>
+              <a:t>一期：意图识别</a:t>
             </a:r>
           </a:p>
         </p:txBody>
       </p:sp>
       <p:sp>
         <p:nvSpPr>
-          <p:cNvPr id="47" name="Rounded Rectangle 46"/>
+          <p:cNvPr id="43" name="Rounded Rectangle 42"/>
           <p:cNvSpPr/>
           <p:nvPr/>
         </p:nvSpPr>
         <p:spPr>
           <a:xfrm>
-            <a:off x="7406892" y="3438144"/>
-            <a:ext cx="843420" cy="237744"/>
+            <a:off x="6900770" y="3218688"/>
+            <a:ext cx="1648869" cy="292607"/>
           </a:xfrm>
           <a:prstGeom prst="roundRect">
             <a:avLst>
@@ -19669,14 +19525,14 @@
       </p:sp>
       <p:sp>
         <p:nvSpPr>
-          <p:cNvPr id="48" name="TextBox 47"/>
+          <p:cNvPr id="44" name="TextBox 43"/>
           <p:cNvSpPr txBox="1"/>
           <p:nvPr/>
         </p:nvSpPr>
         <p:spPr>
           <a:xfrm>
-            <a:off x="8305176" y="3438144"/>
-            <a:ext cx="2606039" cy="237744"/>
+            <a:off x="6900770" y="3218688"/>
+            <a:ext cx="1648869" cy="292607"/>
           </a:xfrm>
           <a:prstGeom prst="rect">
             <a:avLst/>
@@ -19689,112 +19545,31 @@
           </a:bodyPr>
           <a:lstStyle/>
           <a:p>
-            <a:pPr algn="l"/>
+            <a:pPr algn="ctr"/>
             <a:r>
               <a:rPr sz="1100" b="1">
                 <a:solidFill>
-                  <a:srgbClr val="287DFA"/>
+                  <a:srgbClr val="FFFFFF"/>
                 </a:solidFill>
                 <a:latin typeface="微软雅黑"/>
                 <a:ea typeface="微软雅黑"/>
                 <a:cs typeface="微软雅黑"/>
               </a:rPr>
-              <a:t>二期：验收与 GUI 实验分析</a:t>
+              <a:t>二期：验收与拒答治理</a:t>
             </a:r>
           </a:p>
         </p:txBody>
       </p:sp>
       <p:sp>
         <p:nvSpPr>
-          <p:cNvPr id="49" name="Rounded Rectangle 48"/>
+          <p:cNvPr id="45" name="Rounded Rectangle 44"/>
           <p:cNvSpPr/>
           <p:nvPr/>
         </p:nvSpPr>
         <p:spPr>
           <a:xfrm>
-            <a:off x="8410964" y="3749039"/>
-            <a:ext cx="642605" cy="237744"/>
-          </a:xfrm>
-          <a:prstGeom prst="roundRect">
-            <a:avLst>
-              <a:gd name="adj" fmla="val 30000"/>
-            </a:avLst>
-          </a:prstGeom>
-          <a:solidFill>
-            <a:srgbClr val="287DFA"/>
-          </a:solidFill>
-          <a:ln>
-            <a:noFill/>
-          </a:ln>
-          <a:effectLst/>
-        </p:spPr>
-        <p:style>
-          <a:lnRef idx="1">
-            <a:schemeClr val="accent1"/>
-          </a:lnRef>
-          <a:fillRef idx="3">
-            <a:schemeClr val="accent1"/>
-          </a:fillRef>
-          <a:effectRef idx="2">
-            <a:schemeClr val="accent1"/>
-          </a:effectRef>
-          <a:fontRef idx="minor">
-            <a:schemeClr val="lt1"/>
-          </a:fontRef>
-        </p:style>
-        <p:txBody>
-          <a:bodyPr rtlCol="0" anchor="ctr"/>
-          <a:lstStyle/>
-          <a:p/>
-        </p:txBody>
-      </p:sp>
-      <p:sp>
-        <p:nvSpPr>
-          <p:cNvPr id="50" name="TextBox 49"/>
-          <p:cNvSpPr txBox="1"/>
-          <p:nvPr/>
-        </p:nvSpPr>
-        <p:spPr>
-          <a:xfrm>
-            <a:off x="9108434" y="3749039"/>
-            <a:ext cx="1435608" cy="237744"/>
-          </a:xfrm>
-          <a:prstGeom prst="rect">
-            <a:avLst/>
-          </a:prstGeom>
-          <a:noFill/>
-        </p:spPr>
-        <p:txBody>
-          <a:bodyPr wrap="square" lIns="0" rIns="0" tIns="0" bIns="0" anchor="ctr">
-            <a:spAutoFit/>
-          </a:bodyPr>
-          <a:lstStyle/>
-          <a:p>
-            <a:pPr algn="l"/>
-            <a:r>
-              <a:rPr sz="1100" b="1">
-                <a:solidFill>
-                  <a:srgbClr val="287DFA"/>
-                </a:solidFill>
-                <a:latin typeface="微软雅黑"/>
-                <a:ea typeface="微软雅黑"/>
-                <a:cs typeface="微软雅黑"/>
-              </a:rPr>
-              <a:t>拒答治理与交接</a:t>
-            </a:r>
-          </a:p>
-        </p:txBody>
-      </p:sp>
-      <p:sp>
-        <p:nvSpPr>
-          <p:cNvPr id="51" name="Rounded Rectangle 50"/>
-          <p:cNvSpPr/>
-          <p:nvPr/>
-        </p:nvSpPr>
-        <p:spPr>
-          <a:xfrm>
-            <a:off x="3200400" y="4169664"/>
-            <a:ext cx="1097280" cy="1188720"/>
+            <a:off x="3200400" y="3803904"/>
+            <a:ext cx="1005840" cy="2212848"/>
           </a:xfrm>
           <a:prstGeom prst="roundRect">
             <a:avLst>
@@ -19831,14 +19606,14 @@
       </p:sp>
       <p:sp>
         <p:nvSpPr>
-          <p:cNvPr id="52" name="TextBox 51"/>
+          <p:cNvPr id="46" name="TextBox 45"/>
           <p:cNvSpPr txBox="1"/>
           <p:nvPr/>
         </p:nvSpPr>
         <p:spPr>
           <a:xfrm>
-            <a:off x="3200400" y="4169664"/>
-            <a:ext cx="1097280" cy="1188720"/>
+            <a:off x="3200400" y="3803904"/>
+            <a:ext cx="1005840" cy="2212848"/>
           </a:xfrm>
           <a:prstGeom prst="rect">
             <a:avLst/>
@@ -19853,7 +19628,7 @@
           <a:p>
             <a:pPr algn="ctr"/>
             <a:r>
-              <a:rPr sz="1200" b="1">
+              <a:rPr sz="1300" b="1">
                 <a:solidFill>
                   <a:srgbClr val="FFFFFF"/>
                 </a:solidFill>
@@ -19868,14 +19643,14 @@
       </p:sp>
       <p:sp>
         <p:nvSpPr>
-          <p:cNvPr id="53" name="Rounded Rectangle 52"/>
+          <p:cNvPr id="47" name="Rounded Rectangle 46"/>
           <p:cNvSpPr/>
           <p:nvPr/>
         </p:nvSpPr>
         <p:spPr>
           <a:xfrm>
-            <a:off x="8651941" y="4169664"/>
-            <a:ext cx="1486026" cy="237744"/>
+            <a:off x="7138219" y="3803904"/>
+            <a:ext cx="2054548" cy="292607"/>
           </a:xfrm>
           <a:prstGeom prst="roundRect">
             <a:avLst>
@@ -19912,14 +19687,176 @@
       </p:sp>
       <p:sp>
         <p:nvSpPr>
-          <p:cNvPr id="54" name="TextBox 53"/>
+          <p:cNvPr id="48" name="TextBox 47"/>
           <p:cNvSpPr txBox="1"/>
           <p:nvPr/>
         </p:nvSpPr>
         <p:spPr>
           <a:xfrm>
-            <a:off x="8651941" y="4169664"/>
-            <a:ext cx="1486026" cy="237744"/>
+            <a:off x="7138219" y="3803904"/>
+            <a:ext cx="2054548" cy="292607"/>
+          </a:xfrm>
+          <a:prstGeom prst="rect">
+            <a:avLst/>
+          </a:prstGeom>
+          <a:noFill/>
+        </p:spPr>
+        <p:txBody>
+          <a:bodyPr wrap="square" lIns="0" rIns="0" tIns="0" bIns="0" anchor="ctr">
+            <a:spAutoFit/>
+          </a:bodyPr>
+          <a:lstStyle/>
+          <a:p>
+            <a:pPr algn="ctr"/>
+            <a:r>
+              <a:rPr sz="1100" b="1">
+                <a:solidFill>
+                  <a:srgbClr val="FFFFFF"/>
+                </a:solidFill>
+                <a:latin typeface="微软雅黑"/>
+                <a:ea typeface="微软雅黑"/>
+                <a:cs typeface="微软雅黑"/>
+              </a:rPr>
+              <a:t>支付失败小场景修复</a:t>
+            </a:r>
+          </a:p>
+        </p:txBody>
+      </p:sp>
+      <p:sp>
+        <p:nvSpPr>
+          <p:cNvPr id="49" name="Rounded Rectangle 48"/>
+          <p:cNvSpPr/>
+          <p:nvPr/>
+        </p:nvSpPr>
+        <p:spPr>
+          <a:xfrm>
+            <a:off x="7680959" y="4187952"/>
+            <a:ext cx="2409444" cy="292607"/>
+          </a:xfrm>
+          <a:prstGeom prst="roundRect">
+            <a:avLst>
+              <a:gd name="adj" fmla="val 30000"/>
+            </a:avLst>
+          </a:prstGeom>
+          <a:solidFill>
+            <a:srgbClr val="15315E"/>
+          </a:solidFill>
+          <a:ln>
+            <a:noFill/>
+          </a:ln>
+          <a:effectLst/>
+        </p:spPr>
+        <p:style>
+          <a:lnRef idx="1">
+            <a:schemeClr val="accent1"/>
+          </a:lnRef>
+          <a:fillRef idx="3">
+            <a:schemeClr val="accent1"/>
+          </a:fillRef>
+          <a:effectRef idx="2">
+            <a:schemeClr val="accent1"/>
+          </a:effectRef>
+          <a:fontRef idx="minor">
+            <a:schemeClr val="lt1"/>
+          </a:fontRef>
+        </p:style>
+        <p:txBody>
+          <a:bodyPr rtlCol="0" anchor="ctr"/>
+          <a:lstStyle/>
+          <a:p/>
+        </p:txBody>
+      </p:sp>
+      <p:sp>
+        <p:nvSpPr>
+          <p:cNvPr id="50" name="TextBox 49"/>
+          <p:cNvSpPr txBox="1"/>
+          <p:nvPr/>
+        </p:nvSpPr>
+        <p:spPr>
+          <a:xfrm>
+            <a:off x="7680959" y="4187952"/>
+            <a:ext cx="2409444" cy="292607"/>
+          </a:xfrm>
+          <a:prstGeom prst="rect">
+            <a:avLst/>
+          </a:prstGeom>
+          <a:noFill/>
+        </p:spPr>
+        <p:txBody>
+          <a:bodyPr wrap="square" lIns="0" rIns="0" tIns="0" bIns="0" anchor="ctr">
+            <a:spAutoFit/>
+          </a:bodyPr>
+          <a:lstStyle/>
+          <a:p>
+            <a:pPr algn="ctr"/>
+            <a:r>
+              <a:rPr sz="1100" b="1">
+                <a:solidFill>
+                  <a:srgbClr val="FFFFFF"/>
+                </a:solidFill>
+                <a:latin typeface="微软雅黑"/>
+                <a:ea typeface="微软雅黑"/>
+                <a:cs typeface="微软雅黑"/>
+              </a:rPr>
+              <a:t>智能第二程接直付 · 口径修正</a:t>
+            </a:r>
+          </a:p>
+        </p:txBody>
+      </p:sp>
+      <p:sp>
+        <p:nvSpPr>
+          <p:cNvPr id="51" name="Rounded Rectangle 50"/>
+          <p:cNvSpPr/>
+          <p:nvPr/>
+        </p:nvSpPr>
+        <p:spPr>
+          <a:xfrm>
+            <a:off x="7909559" y="4572000"/>
+            <a:ext cx="1897380" cy="292607"/>
+          </a:xfrm>
+          <a:prstGeom prst="roundRect">
+            <a:avLst>
+              <a:gd name="adj" fmla="val 30000"/>
+            </a:avLst>
+          </a:prstGeom>
+          <a:solidFill>
+            <a:srgbClr val="15315E"/>
+          </a:solidFill>
+          <a:ln>
+            <a:noFill/>
+          </a:ln>
+          <a:effectLst/>
+        </p:spPr>
+        <p:style>
+          <a:lnRef idx="1">
+            <a:schemeClr val="accent1"/>
+          </a:lnRef>
+          <a:fillRef idx="3">
+            <a:schemeClr val="accent1"/>
+          </a:fillRef>
+          <a:effectRef idx="2">
+            <a:schemeClr val="accent1"/>
+          </a:effectRef>
+          <a:fontRef idx="minor">
+            <a:schemeClr val="lt1"/>
+          </a:fontRef>
+        </p:style>
+        <p:txBody>
+          <a:bodyPr rtlCol="0" anchor="ctr"/>
+          <a:lstStyle/>
+          <a:p/>
+        </p:txBody>
+      </p:sp>
+      <p:sp>
+        <p:nvSpPr>
+          <p:cNvPr id="52" name="TextBox 51"/>
+          <p:cNvSpPr txBox="1"/>
+          <p:nvPr/>
+        </p:nvSpPr>
+        <p:spPr>
+          <a:xfrm>
+            <a:off x="7909559" y="4572000"/>
+            <a:ext cx="1897380" cy="292607"/>
           </a:xfrm>
           <a:prstGeom prst="rect">
             <a:avLst/>
@@ -19949,14 +19886,14 @@
       </p:sp>
       <p:sp>
         <p:nvSpPr>
-          <p:cNvPr id="55" name="Rounded Rectangle 54"/>
+          <p:cNvPr id="53" name="Rounded Rectangle 52"/>
           <p:cNvSpPr/>
           <p:nvPr/>
         </p:nvSpPr>
         <p:spPr>
           <a:xfrm>
-            <a:off x="9254384" y="4480560"/>
-            <a:ext cx="682768" cy="237744"/>
+            <a:off x="8412480" y="4956048"/>
+            <a:ext cx="2055875" cy="292607"/>
           </a:xfrm>
           <a:prstGeom prst="roundRect">
             <a:avLst>
@@ -19993,14 +19930,14 @@
       </p:sp>
       <p:sp>
         <p:nvSpPr>
-          <p:cNvPr id="56" name="TextBox 55"/>
+          <p:cNvPr id="54" name="TextBox 53"/>
           <p:cNvSpPr txBox="1"/>
           <p:nvPr/>
         </p:nvSpPr>
         <p:spPr>
           <a:xfrm>
-            <a:off x="9992017" y="4480560"/>
-            <a:ext cx="1581912" cy="237744"/>
+            <a:off x="8412480" y="4956048"/>
+            <a:ext cx="2055875" cy="292607"/>
           </a:xfrm>
           <a:prstGeom prst="rect">
             <a:avLst/>
@@ -20013,31 +19950,31 @@
           </a:bodyPr>
           <a:lstStyle/>
           <a:p>
-            <a:pPr algn="l"/>
+            <a:pPr algn="ctr"/>
             <a:r>
               <a:rPr sz="1100" b="1">
                 <a:solidFill>
-                  <a:srgbClr val="15315E"/>
+                  <a:srgbClr val="FFFFFF"/>
                 </a:solidFill>
                 <a:latin typeface="微软雅黑"/>
                 <a:ea typeface="微软雅黑"/>
                 <a:cs typeface="微软雅黑"/>
               </a:rPr>
-              <a:t>默认截止时间优化</a:t>
+              <a:t>默认截止时间设置优化</a:t>
             </a:r>
           </a:p>
         </p:txBody>
       </p:sp>
       <p:sp>
         <p:nvSpPr>
-          <p:cNvPr id="57" name="Rounded Rectangle 56"/>
+          <p:cNvPr id="55" name="Rounded Rectangle 54"/>
           <p:cNvSpPr/>
           <p:nvPr/>
         </p:nvSpPr>
         <p:spPr>
           <a:xfrm>
-            <a:off x="9535524" y="4791456"/>
-            <a:ext cx="1727003" cy="237744"/>
+            <a:off x="9523476" y="5340096"/>
+            <a:ext cx="1490619" cy="292607"/>
           </a:xfrm>
           <a:prstGeom prst="roundRect">
             <a:avLst>
@@ -20074,14 +20011,14 @@
       </p:sp>
       <p:sp>
         <p:nvSpPr>
-          <p:cNvPr id="58" name="TextBox 57"/>
+          <p:cNvPr id="56" name="TextBox 55"/>
           <p:cNvSpPr txBox="1"/>
           <p:nvPr/>
         </p:nvSpPr>
         <p:spPr>
           <a:xfrm>
-            <a:off x="9535524" y="4791456"/>
-            <a:ext cx="1727003" cy="237744"/>
+            <a:off x="9523476" y="5340096"/>
+            <a:ext cx="1490619" cy="292607"/>
           </a:xfrm>
           <a:prstGeom prst="rect">
             <a:avLst/>
@@ -20111,14 +20048,14 @@
       </p:sp>
       <p:sp>
         <p:nvSpPr>
-          <p:cNvPr id="59" name="Rounded Rectangle 58"/>
+          <p:cNvPr id="57" name="Rounded Rectangle 56"/>
           <p:cNvSpPr/>
           <p:nvPr/>
         </p:nvSpPr>
         <p:spPr>
           <a:xfrm>
-            <a:off x="9896990" y="5102352"/>
-            <a:ext cx="1365537" cy="237744"/>
+            <a:off x="9712452" y="5724144"/>
+            <a:ext cx="1362456" cy="292607"/>
           </a:xfrm>
           <a:prstGeom prst="roundRect">
             <a:avLst>
@@ -20155,14 +20092,14 @@
       </p:sp>
       <p:sp>
         <p:nvSpPr>
-          <p:cNvPr id="60" name="TextBox 59"/>
+          <p:cNvPr id="58" name="TextBox 57"/>
           <p:cNvSpPr txBox="1"/>
           <p:nvPr/>
         </p:nvSpPr>
         <p:spPr>
           <a:xfrm>
-            <a:off x="9896990" y="5102352"/>
-            <a:ext cx="1365537" cy="237744"/>
+            <a:off x="9712452" y="5724144"/>
+            <a:ext cx="1362456" cy="292607"/>
           </a:xfrm>
           <a:prstGeom prst="rect">
             <a:avLst/>
@@ -20186,249 +20123,6 @@
                 <a:cs typeface="微软雅黑"/>
               </a:rPr>
               <a:t>在线换座体验优化</a:t>
-            </a:r>
-          </a:p>
-        </p:txBody>
-      </p:sp>
-      <p:sp>
-        <p:nvSpPr>
-          <p:cNvPr id="61" name="Rounded Rectangle 60"/>
-          <p:cNvSpPr/>
-          <p:nvPr/>
-        </p:nvSpPr>
-        <p:spPr>
-          <a:xfrm>
-            <a:off x="3200400" y="5522976"/>
-            <a:ext cx="1097280" cy="566928"/>
-          </a:xfrm>
-          <a:prstGeom prst="roundRect">
-            <a:avLst>
-              <a:gd name="adj" fmla="val 12000"/>
-            </a:avLst>
-          </a:prstGeom>
-          <a:solidFill>
-            <a:srgbClr val="4F8DF5"/>
-          </a:solidFill>
-          <a:ln>
-            <a:noFill/>
-          </a:ln>
-          <a:effectLst/>
-        </p:spPr>
-        <p:style>
-          <a:lnRef idx="1">
-            <a:schemeClr val="accent1"/>
-          </a:lnRef>
-          <a:fillRef idx="3">
-            <a:schemeClr val="accent1"/>
-          </a:fillRef>
-          <a:effectRef idx="2">
-            <a:schemeClr val="accent1"/>
-          </a:effectRef>
-          <a:fontRef idx="minor">
-            <a:schemeClr val="lt1"/>
-          </a:fontRef>
-        </p:style>
-        <p:txBody>
-          <a:bodyPr rtlCol="0" anchor="ctr"/>
-          <a:lstStyle/>
-          <a:p/>
-        </p:txBody>
-      </p:sp>
-      <p:sp>
-        <p:nvSpPr>
-          <p:cNvPr id="62" name="TextBox 61"/>
-          <p:cNvSpPr txBox="1"/>
-          <p:nvPr/>
-        </p:nvSpPr>
-        <p:spPr>
-          <a:xfrm>
-            <a:off x="3200400" y="5522976"/>
-            <a:ext cx="1097280" cy="566928"/>
-          </a:xfrm>
-          <a:prstGeom prst="rect">
-            <a:avLst/>
-          </a:prstGeom>
-          <a:noFill/>
-        </p:spPr>
-        <p:txBody>
-          <a:bodyPr wrap="square" lIns="0" rIns="0" tIns="0" bIns="0" anchor="ctr">
-            <a:spAutoFit/>
-          </a:bodyPr>
-          <a:lstStyle/>
-          <a:p>
-            <a:pPr algn="ctr"/>
-            <a:r>
-              <a:rPr sz="1200" b="1">
-                <a:solidFill>
-                  <a:srgbClr val="FFFFFF"/>
-                </a:solidFill>
-                <a:latin typeface="微软雅黑"/>
-                <a:ea typeface="微软雅黑"/>
-                <a:cs typeface="微软雅黑"/>
-              </a:rPr>
-              <a:t>专题跟进</a:t>
-            </a:r>
-          </a:p>
-        </p:txBody>
-      </p:sp>
-      <p:sp>
-        <p:nvSpPr>
-          <p:cNvPr id="63" name="Rounded Rectangle 62"/>
-          <p:cNvSpPr/>
-          <p:nvPr/>
-        </p:nvSpPr>
-        <p:spPr>
-          <a:xfrm>
-            <a:off x="8410964" y="5522976"/>
-            <a:ext cx="1967980" cy="237744"/>
-          </a:xfrm>
-          <a:prstGeom prst="roundRect">
-            <a:avLst>
-              <a:gd name="adj" fmla="val 30000"/>
-            </a:avLst>
-          </a:prstGeom>
-          <a:solidFill>
-            <a:srgbClr val="4F8DF5"/>
-          </a:solidFill>
-          <a:ln>
-            <a:noFill/>
-          </a:ln>
-          <a:effectLst/>
-        </p:spPr>
-        <p:style>
-          <a:lnRef idx="1">
-            <a:schemeClr val="accent1"/>
-          </a:lnRef>
-          <a:fillRef idx="3">
-            <a:schemeClr val="accent1"/>
-          </a:fillRef>
-          <a:effectRef idx="2">
-            <a:schemeClr val="accent1"/>
-          </a:effectRef>
-          <a:fontRef idx="minor">
-            <a:schemeClr val="lt1"/>
-          </a:fontRef>
-        </p:style>
-        <p:txBody>
-          <a:bodyPr rtlCol="0" anchor="ctr"/>
-          <a:lstStyle/>
-          <a:p/>
-        </p:txBody>
-      </p:sp>
-      <p:sp>
-        <p:nvSpPr>
-          <p:cNvPr id="64" name="TextBox 63"/>
-          <p:cNvSpPr txBox="1"/>
-          <p:nvPr/>
-        </p:nvSpPr>
-        <p:spPr>
-          <a:xfrm>
-            <a:off x="6042668" y="5522976"/>
-            <a:ext cx="2313432" cy="237744"/>
-          </a:xfrm>
-          <a:prstGeom prst="rect">
-            <a:avLst/>
-          </a:prstGeom>
-          <a:noFill/>
-        </p:spPr>
-        <p:txBody>
-          <a:bodyPr wrap="square" lIns="0" rIns="0" tIns="0" bIns="0" anchor="ctr">
-            <a:spAutoFit/>
-          </a:bodyPr>
-          <a:lstStyle/>
-          <a:p>
-            <a:pPr algn="r"/>
-            <a:r>
-              <a:rPr sz="1100" b="1">
-                <a:solidFill>
-                  <a:srgbClr val="4F8DF5"/>
-                </a:solidFill>
-                <a:latin typeface="微软雅黑"/>
-                <a:ea typeface="微软雅黑"/>
-                <a:cs typeface="微软雅黑"/>
-              </a:rPr>
-              <a:t>支付需求数据回收与口径修正</a:t>
-            </a:r>
-          </a:p>
-        </p:txBody>
-      </p:sp>
-      <p:sp>
-        <p:nvSpPr>
-          <p:cNvPr id="65" name="Rounded Rectangle 64"/>
-          <p:cNvSpPr/>
-          <p:nvPr/>
-        </p:nvSpPr>
-        <p:spPr>
-          <a:xfrm>
-            <a:off x="11061714" y="5833872"/>
-            <a:ext cx="441791" cy="237744"/>
-          </a:xfrm>
-          <a:prstGeom prst="roundRect">
-            <a:avLst>
-              <a:gd name="adj" fmla="val 30000"/>
-            </a:avLst>
-          </a:prstGeom>
-          <a:solidFill>
-            <a:srgbClr val="4F8DF5"/>
-          </a:solidFill>
-          <a:ln>
-            <a:noFill/>
-          </a:ln>
-          <a:effectLst/>
-        </p:spPr>
-        <p:style>
-          <a:lnRef idx="1">
-            <a:schemeClr val="accent1"/>
-          </a:lnRef>
-          <a:fillRef idx="3">
-            <a:schemeClr val="accent1"/>
-          </a:fillRef>
-          <a:effectRef idx="2">
-            <a:schemeClr val="accent1"/>
-          </a:effectRef>
-          <a:fontRef idx="minor">
-            <a:schemeClr val="lt1"/>
-          </a:fontRef>
-        </p:style>
-        <p:txBody>
-          <a:bodyPr rtlCol="0" anchor="ctr"/>
-          <a:lstStyle/>
-          <a:p/>
-        </p:txBody>
-      </p:sp>
-      <p:sp>
-        <p:nvSpPr>
-          <p:cNvPr id="66" name="TextBox 65"/>
-          <p:cNvSpPr txBox="1"/>
-          <p:nvPr/>
-        </p:nvSpPr>
-        <p:spPr>
-          <a:xfrm>
-            <a:off x="9717546" y="5833872"/>
-            <a:ext cx="1289304" cy="237744"/>
-          </a:xfrm>
-          <a:prstGeom prst="rect">
-            <a:avLst/>
-          </a:prstGeom>
-          <a:noFill/>
-        </p:spPr>
-        <p:txBody>
-          <a:bodyPr wrap="square" lIns="0" rIns="0" tIns="0" bIns="0" anchor="ctr">
-            <a:spAutoFit/>
-          </a:bodyPr>
-          <a:lstStyle/>
-          <a:p>
-            <a:pPr algn="r"/>
-            <a:r>
-              <a:rPr sz="1100" b="1">
-                <a:solidFill>
-                  <a:srgbClr val="4F8DF5"/>
-                </a:solidFill>
-                <a:latin typeface="微软雅黑"/>
-                <a:ea typeface="微软雅黑"/>
-                <a:cs typeface="微软雅黑"/>
-              </a:rPr>
-              <a:t>消息模板整改</a:t>
             </a:r>
           </a:p>
         </p:txBody>

--- a/答辩PPT.pptx
+++ b/答辩PPT.pptx
@@ -7905,7 +7905,7 @@
                 <a:ea typeface="微软雅黑"/>
                 <a:cs typeface="微软雅黑"/>
               </a:rPr>
-              <a:t>Agent 能不能答好，前提是先判断对：该不该由火车来答、属于哪一类</a:t>
+              <a:t>Agent 最基础的能力，是正确理解用户的问题：该不该由火车来答、属于哪一类</a:t>
             </a:r>
           </a:p>
         </p:txBody>
@@ -7918,8 +7918,8 @@
         </p:nvSpPr>
         <p:spPr>
           <a:xfrm>
-            <a:off x="457200" y="1508760"/>
-            <a:ext cx="5486400" cy="548640"/>
+            <a:off x="457200" y="1481328"/>
+            <a:ext cx="5486400" cy="502920"/>
           </a:xfrm>
           <a:prstGeom prst="roundRect">
             <a:avLst>
@@ -7962,8 +7962,8 @@
         </p:nvSpPr>
         <p:spPr>
           <a:xfrm>
-            <a:off x="457200" y="1508760"/>
-            <a:ext cx="5486400" cy="548640"/>
+            <a:off x="457200" y="1481328"/>
+            <a:ext cx="5486400" cy="502920"/>
           </a:xfrm>
           <a:prstGeom prst="rect">
             <a:avLst/>
@@ -7986,7 +7986,7 @@
                 <a:ea typeface="微软雅黑"/>
                 <a:cs typeface="微软雅黑"/>
               </a:rPr>
-              <a:t>一期 · 界定什么属于火车</a:t>
+              <a:t>意图识别优化：界定什么属于火车</a:t>
             </a:r>
           </a:p>
         </p:txBody>
@@ -7999,7 +7999,7 @@
         </p:nvSpPr>
         <p:spPr>
           <a:xfrm>
-            <a:off x="548640" y="2331720"/>
+            <a:off x="502920" y="2176272"/>
             <a:ext cx="502920" cy="502920"/>
           </a:xfrm>
           <a:prstGeom prst="ellipse">
@@ -8049,7 +8049,7 @@
         </p:blipFill>
         <p:spPr>
           <a:xfrm>
-            <a:off x="674370" y="2457450"/>
+            <a:off x="628650" y="2302002"/>
             <a:ext cx="251460" cy="251460"/>
           </a:xfrm>
           <a:prstGeom prst="rect">
@@ -8065,8 +8065,8 @@
         </p:nvSpPr>
         <p:spPr>
           <a:xfrm>
-            <a:off x="1234440" y="2286000"/>
-            <a:ext cx="4663440" cy="320040"/>
+            <a:off x="1188720" y="2157984"/>
+            <a:ext cx="4709160" cy="329184"/>
           </a:xfrm>
           <a:prstGeom prst="rect">
             <a:avLst/>
@@ -8081,7 +8081,7 @@
           <a:p>
             <a:pPr algn="l"/>
             <a:r>
-              <a:rPr sz="1400" b="1">
+              <a:rPr sz="1500" b="1">
                 <a:solidFill>
                   <a:srgbClr val="FF7A1A"/>
                 </a:solidFill>
@@ -8089,7 +8089,7 @@
                 <a:ea typeface="微软雅黑"/>
                 <a:cs typeface="微软雅黑"/>
               </a:rPr>
-              <a:t>问题</a:t>
+              <a:t>问题：意图识别存在错误</a:t>
             </a:r>
           </a:p>
         </p:txBody>
@@ -8102,8 +8102,8 @@
         </p:nvSpPr>
         <p:spPr>
           <a:xfrm>
-            <a:off x="1234440" y="2587752"/>
-            <a:ext cx="4663440" cy="731520"/>
+            <a:off x="1188720" y="2523744"/>
+            <a:ext cx="4709160" cy="731520"/>
           </a:xfrm>
           <a:prstGeom prst="rect">
             <a:avLst/>
@@ -8118,17 +8118,57 @@
           <a:p>
             <a:pPr algn="l"/>
             <a:r>
-              <a:rPr sz="1400" b="0">
-                <a:solidFill>
-                  <a:srgbClr val="3D4757"/>
+              <a:rPr sz="900" b="0">
+                <a:solidFill>
+                  <a:srgbClr val="FF7A1A"/>
                 </a:solidFill>
                 <a:latin typeface="微软雅黑"/>
                 <a:ea typeface="微软雅黑"/>
                 <a:cs typeface="微软雅黑"/>
               </a:rPr>
-              <a:t>提示词有漏洞，把不属于这一类的 query 纳了进来</a:t>
+              <a:t>●  </a:t>
+            </a:r>
+            <a:r>
+              <a:rPr sz="1300" b="0">
+                <a:solidFill>
+                  <a:srgbClr val="3D4757"/>
+                </a:solidFill>
+                <a:latin typeface="微软雅黑"/>
+                <a:ea typeface="微软雅黑"/>
+                <a:cs typeface="微软雅黑"/>
+              </a:rPr>
+              <a:t>意图识别是最基础的能力，分错了类就会答非所问</a:t>
             </a:r>
           </a:p>
+          <a:p>
+            <a:pPr algn="l">
+              <a:spcBef>
+                <a:spcPts val="400"/>
+              </a:spcBef>
+            </a:pPr>
+            <a:r>
+              <a:rPr sz="900" b="0">
+                <a:solidFill>
+                  <a:srgbClr val="FF7A1A"/>
+                </a:solidFill>
+                <a:latin typeface="微软雅黑"/>
+                <a:ea typeface="微软雅黑"/>
+                <a:cs typeface="微软雅黑"/>
+              </a:rPr>
+              <a:t>●  </a:t>
+            </a:r>
+            <a:r>
+              <a:rPr sz="1300" b="0">
+                <a:solidFill>
+                  <a:srgbClr val="3D4757"/>
+                </a:solidFill>
+                <a:latin typeface="微软雅黑"/>
+                <a:ea typeface="微软雅黑"/>
+                <a:cs typeface="微软雅黑"/>
+              </a:rPr>
+              <a:t>提示词存在不足，把不属于该类的 query 纳了进来</a:t>
+            </a:r>
+          </a:p>
         </p:txBody>
       </p:sp>
       <p:sp>
@@ -8139,7 +8179,7 @@
         </p:nvSpPr>
         <p:spPr>
           <a:xfrm>
-            <a:off x="548640" y="3429000"/>
+            <a:off x="502920" y="3364991"/>
             <a:ext cx="502920" cy="502920"/>
           </a:xfrm>
           <a:prstGeom prst="ellipse">
@@ -8189,7 +8229,7 @@
         </p:blipFill>
         <p:spPr>
           <a:xfrm>
-            <a:off x="674370" y="3554730"/>
+            <a:off x="628650" y="3490722"/>
             <a:ext cx="251460" cy="251460"/>
           </a:xfrm>
           <a:prstGeom prst="rect">
@@ -8205,8 +8245,8 @@
         </p:nvSpPr>
         <p:spPr>
           <a:xfrm>
-            <a:off x="1234440" y="3383280"/>
-            <a:ext cx="4663440" cy="320040"/>
+            <a:off x="1188720" y="3346703"/>
+            <a:ext cx="4709160" cy="329184"/>
           </a:xfrm>
           <a:prstGeom prst="rect">
             <a:avLst/>
@@ -8221,7 +8261,7 @@
           <a:p>
             <a:pPr algn="l"/>
             <a:r>
-              <a:rPr sz="1400" b="1">
+              <a:rPr sz="1500" b="1">
                 <a:solidFill>
                   <a:srgbClr val="287DFA"/>
                 </a:solidFill>
@@ -8229,7 +8269,7 @@
                 <a:ea typeface="微软雅黑"/>
                 <a:cs typeface="微软雅黑"/>
               </a:rPr>
-              <a:t>方案</a:t>
+              <a:t>方案：以算法业务标签为参照，修订分类框架</a:t>
             </a:r>
           </a:p>
         </p:txBody>
@@ -8242,8 +8282,8 @@
         </p:nvSpPr>
         <p:spPr>
           <a:xfrm>
-            <a:off x="1234440" y="3685032"/>
-            <a:ext cx="4663440" cy="731520"/>
+            <a:off x="1188720" y="3712463"/>
+            <a:ext cx="4709160" cy="731520"/>
           </a:xfrm>
           <a:prstGeom prst="rect">
             <a:avLst/>
@@ -8258,17 +8298,57 @@
           <a:p>
             <a:pPr algn="l"/>
             <a:r>
-              <a:rPr sz="1400" b="0">
-                <a:solidFill>
-                  <a:srgbClr val="3D4757"/>
+              <a:rPr sz="900" b="0">
+                <a:solidFill>
+                  <a:srgbClr val="287DFA"/>
                 </a:solidFill>
                 <a:latin typeface="微软雅黑"/>
                 <a:ea typeface="微软雅黑"/>
                 <a:cs typeface="微软雅黑"/>
               </a:rPr>
-              <a:t>与算法业务标签逐条比对，盯“算法对、Agent 错”的样本，逐类修改关键词和分类标准</a:t>
+              <a:t>●  </a:t>
+            </a:r>
+            <a:r>
+              <a:rPr sz="1300" b="0">
+                <a:solidFill>
+                  <a:srgbClr val="3D4757"/>
+                </a:solidFill>
+                <a:latin typeface="微软雅黑"/>
+                <a:ea typeface="微软雅黑"/>
+                <a:cs typeface="微软雅黑"/>
+              </a:rPr>
+              <a:t>抽样 1,000 条线上 query，与算法业务标签逐条比对</a:t>
             </a:r>
           </a:p>
+          <a:p>
+            <a:pPr algn="l">
+              <a:spcBef>
+                <a:spcPts val="400"/>
+              </a:spcBef>
+            </a:pPr>
+            <a:r>
+              <a:rPr sz="900" b="0">
+                <a:solidFill>
+                  <a:srgbClr val="287DFA"/>
+                </a:solidFill>
+                <a:latin typeface="微软雅黑"/>
+                <a:ea typeface="微软雅黑"/>
+                <a:cs typeface="微软雅黑"/>
+              </a:rPr>
+              <a:t>●  </a:t>
+            </a:r>
+            <a:r>
+              <a:rPr sz="1300" b="0">
+                <a:solidFill>
+                  <a:srgbClr val="3D4757"/>
+                </a:solidFill>
+                <a:latin typeface="微软雅黑"/>
+                <a:ea typeface="微软雅黑"/>
+                <a:cs typeface="微软雅黑"/>
+              </a:rPr>
+              <a:t>针对“算法正确、Agent 错误”的样本，逐类修订分类标准</a:t>
+            </a:r>
+          </a:p>
         </p:txBody>
       </p:sp>
       <p:sp>
@@ -8279,8 +8359,8 @@
         </p:nvSpPr>
         <p:spPr>
           <a:xfrm>
-            <a:off x="457200" y="4526280"/>
-            <a:ext cx="5486400" cy="1554480"/>
+            <a:off x="457200" y="4572000"/>
+            <a:ext cx="5486400" cy="1508760"/>
           </a:xfrm>
           <a:prstGeom prst="roundRect">
             <a:avLst>
@@ -8323,8 +8403,8 @@
         </p:nvSpPr>
         <p:spPr>
           <a:xfrm>
-            <a:off x="731520" y="4617720"/>
-            <a:ext cx="1828800" cy="320040"/>
+            <a:off x="731520" y="4663440"/>
+            <a:ext cx="1828800" cy="274320"/>
           </a:xfrm>
           <a:prstGeom prst="rect">
             <a:avLst/>
@@ -8360,8 +8440,8 @@
         </p:nvSpPr>
         <p:spPr>
           <a:xfrm>
-            <a:off x="731520" y="4919472"/>
-            <a:ext cx="2926079" cy="594360"/>
+            <a:off x="731520" y="4983480"/>
+            <a:ext cx="2194560" cy="457200"/>
           </a:xfrm>
           <a:prstGeom prst="rect">
             <a:avLst/>
@@ -8369,14 +8449,51 @@
           <a:noFill/>
         </p:spPr>
         <p:txBody>
-          <a:bodyPr wrap="square" lIns="0" rIns="0" tIns="0" bIns="0" anchor="t">
+          <a:bodyPr wrap="square" lIns="0" rIns="0" tIns="0" bIns="0" anchor="ctr">
             <a:spAutoFit/>
           </a:bodyPr>
           <a:lstStyle/>
           <a:p>
             <a:pPr algn="l"/>
             <a:r>
-              <a:rPr sz="2800" b="1">
+              <a:rPr sz="1200" b="1">
+                <a:solidFill>
+                  <a:srgbClr val="3D4757"/>
+                </a:solidFill>
+                <a:latin typeface="微软雅黑"/>
+                <a:ea typeface="微软雅黑"/>
+                <a:cs typeface="微软雅黑"/>
+              </a:rPr>
+              <a:t>意图识别准确率</a:t>
+            </a:r>
+          </a:p>
+        </p:txBody>
+      </p:sp>
+      <p:sp>
+        <p:nvSpPr>
+          <p:cNvPr id="17" name="TextBox 16"/>
+          <p:cNvSpPr txBox="1"/>
+          <p:nvPr/>
+        </p:nvSpPr>
+        <p:spPr>
+          <a:xfrm>
+            <a:off x="2926080" y="4983480"/>
+            <a:ext cx="1965960" cy="457200"/>
+          </a:xfrm>
+          <a:prstGeom prst="rect">
+            <a:avLst/>
+          </a:prstGeom>
+          <a:noFill/>
+        </p:spPr>
+        <p:txBody>
+          <a:bodyPr wrap="square" lIns="0" rIns="0" tIns="0" bIns="0" anchor="ctr">
+            <a:spAutoFit/>
+          </a:bodyPr>
+          <a:lstStyle/>
+          <a:p>
+            <a:pPr algn="l"/>
+            <a:r>
+              <a:rPr sz="1800" b="1">
                 <a:solidFill>
                   <a:srgbClr val="287DFA"/>
                 </a:solidFill>
@@ -8391,14 +8508,60 @@
       </p:sp>
       <p:sp>
         <p:nvSpPr>
-          <p:cNvPr id="17" name="TextBox 16"/>
+          <p:cNvPr id="18" name="Rounded Rectangle 17"/>
+          <p:cNvSpPr/>
+          <p:nvPr/>
+        </p:nvSpPr>
+        <p:spPr>
+          <a:xfrm>
+            <a:off x="4864608" y="5056632"/>
+            <a:ext cx="1005840" cy="310896"/>
+          </a:xfrm>
+          <a:prstGeom prst="roundRect">
+            <a:avLst>
+              <a:gd name="adj" fmla="val 50000"/>
+            </a:avLst>
+          </a:prstGeom>
+          <a:solidFill>
+            <a:srgbClr val="FFFFFF"/>
+          </a:solidFill>
+          <a:ln w="12700">
+            <a:solidFill>
+              <a:srgbClr val="287DFA"/>
+            </a:solidFill>
+          </a:ln>
+          <a:effectLst/>
+        </p:spPr>
+        <p:style>
+          <a:lnRef idx="1">
+            <a:schemeClr val="accent1"/>
+          </a:lnRef>
+          <a:fillRef idx="3">
+            <a:schemeClr val="accent1"/>
+          </a:fillRef>
+          <a:effectRef idx="2">
+            <a:schemeClr val="accent1"/>
+          </a:effectRef>
+          <a:fontRef idx="minor">
+            <a:schemeClr val="lt1"/>
+          </a:fontRef>
+        </p:style>
+        <p:txBody>
+          <a:bodyPr rtlCol="0" anchor="ctr"/>
+          <a:lstStyle/>
+          <a:p/>
+        </p:txBody>
+      </p:sp>
+      <p:sp>
+        <p:nvSpPr>
+          <p:cNvPr id="19" name="TextBox 18"/>
           <p:cNvSpPr txBox="1"/>
           <p:nvPr/>
         </p:nvSpPr>
         <p:spPr>
           <a:xfrm>
-            <a:off x="731520" y="5532120"/>
-            <a:ext cx="2926079" cy="365760"/>
+            <a:off x="4864608" y="5056632"/>
+            <a:ext cx="1005840" cy="310896"/>
           </a:xfrm>
           <a:prstGeom prst="rect">
             <a:avLst/>
@@ -8406,36 +8569,36 @@
           <a:noFill/>
         </p:spPr>
         <p:txBody>
-          <a:bodyPr wrap="square" lIns="0" rIns="0" tIns="0" bIns="0" anchor="t">
+          <a:bodyPr wrap="square" lIns="0" rIns="0" tIns="0" bIns="0" anchor="ctr">
             <a:spAutoFit/>
           </a:bodyPr>
           <a:lstStyle/>
           <a:p>
-            <a:pPr algn="l"/>
+            <a:pPr algn="ctr"/>
             <a:r>
-              <a:rPr sz="1300" b="0">
-                <a:solidFill>
-                  <a:srgbClr val="3D4757"/>
+              <a:rPr sz="1000" b="1">
+                <a:solidFill>
+                  <a:srgbClr val="287DFA"/>
                 </a:solidFill>
                 <a:latin typeface="微软雅黑"/>
                 <a:ea typeface="微软雅黑"/>
                 <a:cs typeface="微软雅黑"/>
               </a:rPr>
-              <a:t>意图分类准确率</a:t>
+              <a:t>lift +3.59%</a:t>
             </a:r>
           </a:p>
         </p:txBody>
       </p:sp>
       <p:sp>
         <p:nvSpPr>
-          <p:cNvPr id="18" name="TextBox 17"/>
+          <p:cNvPr id="20" name="TextBox 19"/>
           <p:cNvSpPr txBox="1"/>
           <p:nvPr/>
         </p:nvSpPr>
         <p:spPr>
           <a:xfrm>
-            <a:off x="3749039" y="4919472"/>
-            <a:ext cx="1828800" cy="594360"/>
+            <a:off x="731520" y="5513832"/>
+            <a:ext cx="2194560" cy="457200"/>
           </a:xfrm>
           <a:prstGeom prst="rect">
             <a:avLst/>
@@ -8443,51 +8606,14 @@
           <a:noFill/>
         </p:spPr>
         <p:txBody>
-          <a:bodyPr wrap="square" lIns="0" rIns="0" tIns="0" bIns="0" anchor="t">
+          <a:bodyPr wrap="square" lIns="0" rIns="0" tIns="0" bIns="0" anchor="ctr">
             <a:spAutoFit/>
           </a:bodyPr>
           <a:lstStyle/>
           <a:p>
             <a:pPr algn="l"/>
             <a:r>
-              <a:rPr sz="2800" b="1">
-                <a:solidFill>
-                  <a:srgbClr val="287DFA"/>
-                </a:solidFill>
-                <a:latin typeface="微软雅黑"/>
-                <a:ea typeface="微软雅黑"/>
-                <a:cs typeface="微软雅黑"/>
-              </a:rPr>
-              <a:t>+7.7%</a:t>
-            </a:r>
-          </a:p>
-        </p:txBody>
-      </p:sp>
-      <p:sp>
-        <p:nvSpPr>
-          <p:cNvPr id="19" name="TextBox 18"/>
-          <p:cNvSpPr txBox="1"/>
-          <p:nvPr/>
-        </p:nvSpPr>
-        <p:spPr>
-          <a:xfrm>
-            <a:off x="3749039" y="5532120"/>
-            <a:ext cx="1828800" cy="365760"/>
-          </a:xfrm>
-          <a:prstGeom prst="rect">
-            <a:avLst/>
-          </a:prstGeom>
-          <a:noFill/>
-        </p:spPr>
-        <p:txBody>
-          <a:bodyPr wrap="square" lIns="0" rIns="0" tIns="0" bIns="0" anchor="t">
-            <a:spAutoFit/>
-          </a:bodyPr>
-          <a:lstStyle/>
-          <a:p>
-            <a:pPr algn="l"/>
-            <a:r>
-              <a:rPr sz="1300" b="0">
+              <a:rPr sz="1200" b="1">
                 <a:solidFill>
                   <a:srgbClr val="3D4757"/>
                 </a:solidFill>
@@ -8502,14 +8628,134 @@
       </p:sp>
       <p:sp>
         <p:nvSpPr>
-          <p:cNvPr id="20" name="Rounded Rectangle 19"/>
+          <p:cNvPr id="21" name="TextBox 20"/>
+          <p:cNvSpPr txBox="1"/>
+          <p:nvPr/>
+        </p:nvSpPr>
+        <p:spPr>
+          <a:xfrm>
+            <a:off x="2926080" y="5513832"/>
+            <a:ext cx="1965960" cy="457200"/>
+          </a:xfrm>
+          <a:prstGeom prst="rect">
+            <a:avLst/>
+          </a:prstGeom>
+          <a:noFill/>
+        </p:spPr>
+        <p:txBody>
+          <a:bodyPr wrap="square" lIns="0" rIns="0" tIns="0" bIns="0" anchor="ctr">
+            <a:spAutoFit/>
+          </a:bodyPr>
+          <a:lstStyle/>
+          <a:p>
+            <a:pPr algn="l"/>
+            <a:r>
+              <a:rPr sz="1800" b="1">
+                <a:solidFill>
+                  <a:srgbClr val="287DFA"/>
+                </a:solidFill>
+                <a:latin typeface="微软雅黑"/>
+                <a:ea typeface="微软雅黑"/>
+                <a:cs typeface="微软雅黑"/>
+              </a:rPr>
+              <a:t>57% → 60.7%</a:t>
+            </a:r>
+          </a:p>
+        </p:txBody>
+      </p:sp>
+      <p:sp>
+        <p:nvSpPr>
+          <p:cNvPr id="22" name="Rounded Rectangle 21"/>
           <p:cNvSpPr/>
           <p:nvPr/>
         </p:nvSpPr>
         <p:spPr>
           <a:xfrm>
-            <a:off x="6245352" y="1508760"/>
-            <a:ext cx="5486400" cy="548640"/>
+            <a:off x="4864608" y="5586984"/>
+            <a:ext cx="1005840" cy="310896"/>
+          </a:xfrm>
+          <a:prstGeom prst="roundRect">
+            <a:avLst>
+              <a:gd name="adj" fmla="val 50000"/>
+            </a:avLst>
+          </a:prstGeom>
+          <a:solidFill>
+            <a:srgbClr val="FFFFFF"/>
+          </a:solidFill>
+          <a:ln w="12700">
+            <a:solidFill>
+              <a:srgbClr val="287DFA"/>
+            </a:solidFill>
+          </a:ln>
+          <a:effectLst/>
+        </p:spPr>
+        <p:style>
+          <a:lnRef idx="1">
+            <a:schemeClr val="accent1"/>
+          </a:lnRef>
+          <a:fillRef idx="3">
+            <a:schemeClr val="accent1"/>
+          </a:fillRef>
+          <a:effectRef idx="2">
+            <a:schemeClr val="accent1"/>
+          </a:effectRef>
+          <a:fontRef idx="minor">
+            <a:schemeClr val="lt1"/>
+          </a:fontRef>
+        </p:style>
+        <p:txBody>
+          <a:bodyPr rtlCol="0" anchor="ctr"/>
+          <a:lstStyle/>
+          <a:p/>
+        </p:txBody>
+      </p:sp>
+      <p:sp>
+        <p:nvSpPr>
+          <p:cNvPr id="23" name="TextBox 22"/>
+          <p:cNvSpPr txBox="1"/>
+          <p:nvPr/>
+        </p:nvSpPr>
+        <p:spPr>
+          <a:xfrm>
+            <a:off x="4864608" y="5586984"/>
+            <a:ext cx="1005840" cy="310896"/>
+          </a:xfrm>
+          <a:prstGeom prst="rect">
+            <a:avLst/>
+          </a:prstGeom>
+          <a:noFill/>
+        </p:spPr>
+        <p:txBody>
+          <a:bodyPr wrap="square" lIns="0" rIns="0" tIns="0" bIns="0" anchor="ctr">
+            <a:spAutoFit/>
+          </a:bodyPr>
+          <a:lstStyle/>
+          <a:p>
+            <a:pPr algn="ctr"/>
+            <a:r>
+              <a:rPr sz="1000" b="1">
+                <a:solidFill>
+                  <a:srgbClr val="287DFA"/>
+                </a:solidFill>
+                <a:latin typeface="微软雅黑"/>
+                <a:ea typeface="微软雅黑"/>
+                <a:cs typeface="微软雅黑"/>
+              </a:rPr>
+              <a:t>lift +7.7%</a:t>
+            </a:r>
+          </a:p>
+        </p:txBody>
+      </p:sp>
+      <p:sp>
+        <p:nvSpPr>
+          <p:cNvPr id="24" name="Rounded Rectangle 23"/>
+          <p:cNvSpPr/>
+          <p:nvPr/>
+        </p:nvSpPr>
+        <p:spPr>
+          <a:xfrm>
+            <a:off x="6245352" y="1481328"/>
+            <a:ext cx="5486400" cy="502920"/>
           </a:xfrm>
           <a:prstGeom prst="roundRect">
             <a:avLst>
@@ -8546,14 +8792,14 @@
       </p:sp>
       <p:sp>
         <p:nvSpPr>
-          <p:cNvPr id="21" name="TextBox 20"/>
+          <p:cNvPr id="25" name="TextBox 24"/>
           <p:cNvSpPr txBox="1"/>
           <p:nvPr/>
         </p:nvSpPr>
         <p:spPr>
           <a:xfrm>
-            <a:off x="6245352" y="1508760"/>
-            <a:ext cx="5486400" cy="548640"/>
+            <a:off x="6245352" y="1481328"/>
+            <a:ext cx="5486400" cy="502920"/>
           </a:xfrm>
           <a:prstGeom prst="rect">
             <a:avLst/>
@@ -8576,20 +8822,20 @@
                 <a:ea typeface="微软雅黑"/>
                 <a:cs typeface="微软雅黑"/>
               </a:rPr>
-              <a:t>二期 · 界定什么不属于火车</a:t>
+              <a:t>拒答治理：界定什么不属于火车</a:t>
             </a:r>
           </a:p>
         </p:txBody>
       </p:sp>
       <p:sp>
         <p:nvSpPr>
-          <p:cNvPr id="22" name="icon-circle"/>
+          <p:cNvPr id="26" name="icon-circle"/>
           <p:cNvSpPr/>
           <p:nvPr/>
         </p:nvSpPr>
         <p:spPr>
           <a:xfrm>
-            <a:off x="6336792" y="2331720"/>
+            <a:off x="6291072" y="2176272"/>
             <a:ext cx="502920" cy="502920"/>
           </a:xfrm>
           <a:prstGeom prst="ellipse">
@@ -8625,7 +8871,7 @@
       </p:sp>
       <p:pic>
         <p:nvPicPr>
-          <p:cNvPr id="23" name="Picture 22" descr="FaTriangleExclamation_w.png"/>
+          <p:cNvPr id="27" name="Picture 26" descr="FaTriangleExclamation_w.png"/>
           <p:cNvPicPr>
             <a:picLocks noChangeAspect="1"/>
           </p:cNvPicPr>
@@ -8639,7 +8885,7 @@
         </p:blipFill>
         <p:spPr>
           <a:xfrm>
-            <a:off x="6462522" y="2457450"/>
+            <a:off x="6416802" y="2302002"/>
             <a:ext cx="251460" cy="251460"/>
           </a:xfrm>
           <a:prstGeom prst="rect">
@@ -8649,14 +8895,14 @@
       </p:pic>
       <p:sp>
         <p:nvSpPr>
-          <p:cNvPr id="24" name="TextBox 23"/>
+          <p:cNvPr id="28" name="TextBox 27"/>
           <p:cNvSpPr txBox="1"/>
           <p:nvPr/>
         </p:nvSpPr>
         <p:spPr>
           <a:xfrm>
-            <a:off x="7022592" y="2286000"/>
-            <a:ext cx="4663440" cy="320040"/>
+            <a:off x="6976872" y="2157984"/>
+            <a:ext cx="4709160" cy="329184"/>
           </a:xfrm>
           <a:prstGeom prst="rect">
             <a:avLst/>
@@ -8671,7 +8917,7 @@
           <a:p>
             <a:pPr algn="l"/>
             <a:r>
-              <a:rPr sz="1400" b="1">
+              <a:rPr sz="1500" b="1">
                 <a:solidFill>
                   <a:srgbClr val="FF7A1A"/>
                 </a:solidFill>
@@ -8679,21 +8925,21 @@
                 <a:ea typeface="微软雅黑"/>
                 <a:cs typeface="微软雅黑"/>
               </a:rPr>
-              <a:t>问题</a:t>
+              <a:t>问题：火车 Agent 拒答率偏高</a:t>
             </a:r>
           </a:p>
         </p:txBody>
       </p:sp>
       <p:sp>
         <p:nvSpPr>
-          <p:cNvPr id="25" name="TextBox 24"/>
+          <p:cNvPr id="29" name="TextBox 28"/>
           <p:cNvSpPr txBox="1"/>
           <p:nvPr/>
         </p:nvSpPr>
         <p:spPr>
           <a:xfrm>
-            <a:off x="7022592" y="2587752"/>
-            <a:ext cx="4663440" cy="731520"/>
+            <a:off x="6976872" y="2523744"/>
+            <a:ext cx="4709160" cy="731520"/>
           </a:xfrm>
           <a:prstGeom prst="rect">
             <a:avLst/>
@@ -8708,28 +8954,68 @@
           <a:p>
             <a:pPr algn="l"/>
             <a:r>
-              <a:rPr sz="1400" b="0">
-                <a:solidFill>
-                  <a:srgbClr val="3D4757"/>
+              <a:rPr sz="900" b="0">
+                <a:solidFill>
+                  <a:srgbClr val="FF7A1A"/>
                 </a:solidFill>
                 <a:latin typeface="微软雅黑"/>
                 <a:ea typeface="微软雅黑"/>
                 <a:cs typeface="微软雅黑"/>
               </a:rPr>
-              <a:t>约一半问题被拒答，其中一部分根本不属于火车，是被错误分发过来的</a:t>
+              <a:t>●  </a:t>
+            </a:r>
+            <a:r>
+              <a:rPr sz="1300" b="0">
+                <a:solidFill>
+                  <a:srgbClr val="3D4757"/>
+                </a:solidFill>
+                <a:latin typeface="微软雅黑"/>
+                <a:ea typeface="微软雅黑"/>
+                <a:cs typeface="微软雅黑"/>
+              </a:rPr>
+              <a:t>约一半问题被拒答，其中部分是被错误分发的非火车问题</a:t>
             </a:r>
           </a:p>
-        </p:txBody>
-      </p:sp>
-      <p:sp>
-        <p:nvSpPr>
-          <p:cNvPr id="26" name="icon-circle"/>
+          <a:p>
+            <a:pPr algn="l">
+              <a:spcBef>
+                <a:spcPts val="400"/>
+              </a:spcBef>
+            </a:pPr>
+            <a:r>
+              <a:rPr sz="900" b="0">
+                <a:solidFill>
+                  <a:srgbClr val="FF7A1A"/>
+                </a:solidFill>
+                <a:latin typeface="微软雅黑"/>
+                <a:ea typeface="微软雅黑"/>
+                <a:cs typeface="微软雅黑"/>
+              </a:rPr>
+              <a:t>●  </a:t>
+            </a:r>
+            <a:r>
+              <a:rPr sz="1300" b="0">
+                <a:solidFill>
+                  <a:srgbClr val="3D4757"/>
+                </a:solidFill>
+                <a:latin typeface="微软雅黑"/>
+                <a:ea typeface="微软雅黑"/>
+                <a:cs typeface="微软雅黑"/>
+              </a:rPr>
+              <a:t>这类问题在火车 Agent 内无法回答，只能从上游分发解决</a:t>
+            </a:r>
+          </a:p>
+        </p:txBody>
+      </p:sp>
+      <p:sp>
+        <p:nvSpPr>
+          <p:cNvPr id="30" name="icon-circle"/>
           <p:cNvSpPr/>
           <p:nvPr/>
         </p:nvSpPr>
         <p:spPr>
           <a:xfrm>
-            <a:off x="6336792" y="3429000"/>
+            <a:off x="6291072" y="3364991"/>
             <a:ext cx="502920" cy="502920"/>
           </a:xfrm>
           <a:prstGeom prst="ellipse">
@@ -8765,7 +9051,7 @@
       </p:sp>
       <p:pic>
         <p:nvPicPr>
-          <p:cNvPr id="27" name="Picture 26" descr="FaFilter_w.png"/>
+          <p:cNvPr id="31" name="Picture 30" descr="FaFilter_w.png"/>
           <p:cNvPicPr>
             <a:picLocks noChangeAspect="1"/>
           </p:cNvPicPr>
@@ -8779,7 +9065,7 @@
         </p:blipFill>
         <p:spPr>
           <a:xfrm>
-            <a:off x="6462522" y="3554730"/>
+            <a:off x="6416802" y="3490722"/>
             <a:ext cx="251460" cy="251460"/>
           </a:xfrm>
           <a:prstGeom prst="rect">
@@ -8789,14 +9075,14 @@
       </p:pic>
       <p:sp>
         <p:nvSpPr>
-          <p:cNvPr id="28" name="TextBox 27"/>
+          <p:cNvPr id="32" name="TextBox 31"/>
           <p:cNvSpPr txBox="1"/>
           <p:nvPr/>
         </p:nvSpPr>
         <p:spPr>
           <a:xfrm>
-            <a:off x="7022592" y="3383280"/>
-            <a:ext cx="4663440" cy="320040"/>
+            <a:off x="6976872" y="3346703"/>
+            <a:ext cx="4709160" cy="329184"/>
           </a:xfrm>
           <a:prstGeom prst="rect">
             <a:avLst/>
@@ -8811,7 +9097,7 @@
           <a:p>
             <a:pPr algn="l"/>
             <a:r>
-              <a:rPr sz="1400" b="1">
+              <a:rPr sz="1500" b="1">
                 <a:solidFill>
                   <a:srgbClr val="287DFA"/>
                 </a:solidFill>
@@ -8819,21 +9105,21 @@
                 <a:ea typeface="微软雅黑"/>
                 <a:cs typeface="微软雅黑"/>
               </a:rPr>
-              <a:t>方案</a:t>
+              <a:t>方案：推进能力覆盖的同时，优先治理错误分发</a:t>
             </a:r>
           </a:p>
         </p:txBody>
       </p:sp>
       <p:sp>
         <p:nvSpPr>
-          <p:cNvPr id="29" name="TextBox 28"/>
+          <p:cNvPr id="33" name="TextBox 32"/>
           <p:cNvSpPr txBox="1"/>
           <p:nvPr/>
         </p:nvSpPr>
         <p:spPr>
           <a:xfrm>
-            <a:off x="7022592" y="3685032"/>
-            <a:ext cx="4663440" cy="731520"/>
+            <a:off x="6976872" y="3712463"/>
+            <a:ext cx="4709160" cy="731520"/>
           </a:xfrm>
           <a:prstGeom prst="rect">
             <a:avLst/>
@@ -8848,29 +9134,69 @@
           <a:p>
             <a:pPr algn="l"/>
             <a:r>
-              <a:rPr sz="1400" b="0">
-                <a:solidFill>
-                  <a:srgbClr val="3D4757"/>
+              <a:rPr sz="900" b="0">
+                <a:solidFill>
+                  <a:srgbClr val="287DFA"/>
                 </a:solidFill>
                 <a:latin typeface="微软雅黑"/>
                 <a:ea typeface="微软雅黑"/>
                 <a:cs typeface="微软雅黑"/>
               </a:rPr>
-              <a:t>持续推进能力覆盖的同时，优先治理错误分发：人工核查 1,000 多条拒答 query，整理火车问题边界，交给问道调整分发策略</a:t>
+              <a:t>●  </a:t>
+            </a:r>
+            <a:r>
+              <a:rPr sz="1300" b="0">
+                <a:solidFill>
+                  <a:srgbClr val="3D4757"/>
+                </a:solidFill>
+                <a:latin typeface="微软雅黑"/>
+                <a:ea typeface="微软雅黑"/>
+                <a:cs typeface="微软雅黑"/>
+              </a:rPr>
+              <a:t>人工核查 1,000 多条拒答 query，整理火车问题的边界</a:t>
             </a:r>
           </a:p>
-        </p:txBody>
-      </p:sp>
-      <p:sp>
-        <p:nvSpPr>
-          <p:cNvPr id="30" name="Rounded Rectangle 29"/>
+          <a:p>
+            <a:pPr algn="l">
+              <a:spcBef>
+                <a:spcPts val="400"/>
+              </a:spcBef>
+            </a:pPr>
+            <a:r>
+              <a:rPr sz="900" b="0">
+                <a:solidFill>
+                  <a:srgbClr val="287DFA"/>
+                </a:solidFill>
+                <a:latin typeface="微软雅黑"/>
+                <a:ea typeface="微软雅黑"/>
+                <a:cs typeface="微软雅黑"/>
+              </a:rPr>
+              <a:t>●  </a:t>
+            </a:r>
+            <a:r>
+              <a:rPr sz="1300" b="0">
+                <a:solidFill>
+                  <a:srgbClr val="3D4757"/>
+                </a:solidFill>
+                <a:latin typeface="微软雅黑"/>
+                <a:ea typeface="微软雅黑"/>
+                <a:cs typeface="微软雅黑"/>
+              </a:rPr>
+              <a:t>推动问道调整分发，非火车问题交由其他 Agent 回答</a:t>
+            </a:r>
+          </a:p>
+        </p:txBody>
+      </p:sp>
+      <p:sp>
+        <p:nvSpPr>
+          <p:cNvPr id="34" name="Rounded Rectangle 33"/>
           <p:cNvSpPr/>
           <p:nvPr/>
         </p:nvSpPr>
         <p:spPr>
           <a:xfrm>
-            <a:off x="6245352" y="4526280"/>
-            <a:ext cx="5486400" cy="1554480"/>
+            <a:off x="6245352" y="4572000"/>
+            <a:ext cx="5486400" cy="1508760"/>
           </a:xfrm>
           <a:prstGeom prst="roundRect">
             <a:avLst>
@@ -8907,14 +9233,14 @@
       </p:sp>
       <p:sp>
         <p:nvSpPr>
-          <p:cNvPr id="31" name="TextBox 30"/>
+          <p:cNvPr id="35" name="TextBox 34"/>
           <p:cNvSpPr txBox="1"/>
           <p:nvPr/>
         </p:nvSpPr>
         <p:spPr>
           <a:xfrm>
-            <a:off x="6519672" y="4617720"/>
-            <a:ext cx="1828800" cy="320040"/>
+            <a:off x="6519672" y="4663440"/>
+            <a:ext cx="1828800" cy="274320"/>
           </a:xfrm>
           <a:prstGeom prst="rect">
             <a:avLst/>
@@ -8944,14 +9270,14 @@
       </p:sp>
       <p:sp>
         <p:nvSpPr>
-          <p:cNvPr id="32" name="TextBox 31"/>
+          <p:cNvPr id="36" name="TextBox 35"/>
           <p:cNvSpPr txBox="1"/>
           <p:nvPr/>
         </p:nvSpPr>
         <p:spPr>
           <a:xfrm>
-            <a:off x="6519672" y="4919472"/>
-            <a:ext cx="4846320" cy="594360"/>
+            <a:off x="6519672" y="5212080"/>
+            <a:ext cx="2194560" cy="457200"/>
           </a:xfrm>
           <a:prstGeom prst="rect">
             <a:avLst/>
@@ -8959,14 +9285,51 @@
           <a:noFill/>
         </p:spPr>
         <p:txBody>
-          <a:bodyPr wrap="square" lIns="0" rIns="0" tIns="0" bIns="0" anchor="t">
+          <a:bodyPr wrap="square" lIns="0" rIns="0" tIns="0" bIns="0" anchor="ctr">
             <a:spAutoFit/>
           </a:bodyPr>
           <a:lstStyle/>
           <a:p>
             <a:pPr algn="l"/>
             <a:r>
-              <a:rPr sz="2800" b="1">
+              <a:rPr sz="1200" b="1">
+                <a:solidFill>
+                  <a:srgbClr val="3D4757"/>
+                </a:solidFill>
+                <a:latin typeface="微软雅黑"/>
+                <a:ea typeface="微软雅黑"/>
+                <a:cs typeface="微软雅黑"/>
+              </a:rPr>
+              <a:t>错误分发导致的拒答占比</a:t>
+            </a:r>
+          </a:p>
+        </p:txBody>
+      </p:sp>
+      <p:sp>
+        <p:nvSpPr>
+          <p:cNvPr id="37" name="TextBox 36"/>
+          <p:cNvSpPr txBox="1"/>
+          <p:nvPr/>
+        </p:nvSpPr>
+        <p:spPr>
+          <a:xfrm>
+            <a:off x="8714232" y="5212080"/>
+            <a:ext cx="1965960" cy="457200"/>
+          </a:xfrm>
+          <a:prstGeom prst="rect">
+            <a:avLst/>
+          </a:prstGeom>
+          <a:noFill/>
+        </p:spPr>
+        <p:txBody>
+          <a:bodyPr wrap="square" lIns="0" rIns="0" tIns="0" bIns="0" anchor="ctr">
+            <a:spAutoFit/>
+          </a:bodyPr>
+          <a:lstStyle/>
+          <a:p>
+            <a:pPr algn="l"/>
+            <a:r>
+              <a:rPr sz="1800" b="1">
                 <a:solidFill>
                   <a:srgbClr val="287DFA"/>
                 </a:solidFill>
@@ -8981,14 +9344,60 @@
       </p:sp>
       <p:sp>
         <p:nvSpPr>
-          <p:cNvPr id="33" name="TextBox 32"/>
+          <p:cNvPr id="38" name="Rounded Rectangle 37"/>
+          <p:cNvSpPr/>
+          <p:nvPr/>
+        </p:nvSpPr>
+        <p:spPr>
+          <a:xfrm>
+            <a:off x="10652760" y="5285232"/>
+            <a:ext cx="1005840" cy="310896"/>
+          </a:xfrm>
+          <a:prstGeom prst="roundRect">
+            <a:avLst>
+              <a:gd name="adj" fmla="val 50000"/>
+            </a:avLst>
+          </a:prstGeom>
+          <a:solidFill>
+            <a:srgbClr val="FFFFFF"/>
+          </a:solidFill>
+          <a:ln w="12700">
+            <a:solidFill>
+              <a:srgbClr val="287DFA"/>
+            </a:solidFill>
+          </a:ln>
+          <a:effectLst/>
+        </p:spPr>
+        <p:style>
+          <a:lnRef idx="1">
+            <a:schemeClr val="accent1"/>
+          </a:lnRef>
+          <a:fillRef idx="3">
+            <a:schemeClr val="accent1"/>
+          </a:fillRef>
+          <a:effectRef idx="2">
+            <a:schemeClr val="accent1"/>
+          </a:effectRef>
+          <a:fontRef idx="minor">
+            <a:schemeClr val="lt1"/>
+          </a:fontRef>
+        </p:style>
+        <p:txBody>
+          <a:bodyPr rtlCol="0" anchor="ctr"/>
+          <a:lstStyle/>
+          <a:p/>
+        </p:txBody>
+      </p:sp>
+      <p:sp>
+        <p:nvSpPr>
+          <p:cNvPr id="39" name="TextBox 38"/>
           <p:cNvSpPr txBox="1"/>
           <p:nvPr/>
         </p:nvSpPr>
         <p:spPr>
           <a:xfrm>
-            <a:off x="6519672" y="5532120"/>
-            <a:ext cx="4846320" cy="365760"/>
+            <a:off x="10652760" y="5285232"/>
+            <a:ext cx="1005840" cy="310896"/>
           </a:xfrm>
           <a:prstGeom prst="rect">
             <a:avLst/>
@@ -8996,22 +9405,22 @@
           <a:noFill/>
         </p:spPr>
         <p:txBody>
-          <a:bodyPr wrap="square" lIns="0" rIns="0" tIns="0" bIns="0" anchor="t">
+          <a:bodyPr wrap="square" lIns="0" rIns="0" tIns="0" bIns="0" anchor="ctr">
             <a:spAutoFit/>
           </a:bodyPr>
           <a:lstStyle/>
           <a:p>
-            <a:pPr algn="l"/>
+            <a:pPr algn="ctr"/>
             <a:r>
-              <a:rPr sz="1300" b="0">
-                <a:solidFill>
-                  <a:srgbClr val="3D4757"/>
+              <a:rPr sz="1000" b="1">
+                <a:solidFill>
+                  <a:srgbClr val="287DFA"/>
                 </a:solidFill>
                 <a:latin typeface="微软雅黑"/>
                 <a:ea typeface="微软雅黑"/>
                 <a:cs typeface="微软雅黑"/>
               </a:rPr>
-              <a:t>错误分发导致的拒答占比</a:t>
+              <a:t>lift −54.2%</a:t>
             </a:r>
           </a:p>
         </p:txBody>

--- a/答辩PPT.pptx
+++ b/答辩PPT.pptx
@@ -9536,7 +9536,7 @@
                 <a:ea typeface="微软雅黑"/>
                 <a:cs typeface="微软雅黑"/>
               </a:rPr>
-              <a:t>兴奋型需求最怕的不是做不到，而是给了预期又兑现不了</a:t>
+              <a:t>智能第二程——兴奋型需求</a:t>
             </a:r>
           </a:p>
         </p:txBody>
@@ -9550,7 +9550,7 @@
         <p:spPr>
           <a:xfrm>
             <a:off x="457200" y="1554480"/>
-            <a:ext cx="2514600" cy="1508760"/>
+            <a:ext cx="1965960" cy="1463040"/>
           </a:xfrm>
           <a:prstGeom prst="roundRect">
             <a:avLst>
@@ -9595,8 +9595,8 @@
         </p:nvSpPr>
         <p:spPr>
           <a:xfrm>
-            <a:off x="1399032" y="1691640"/>
-            <a:ext cx="640080" cy="640080"/>
+            <a:off x="1129284" y="1700784"/>
+            <a:ext cx="621792" cy="621792"/>
           </a:xfrm>
           <a:prstGeom prst="ellipse">
             <a:avLst/>
@@ -9645,8 +9645,8 @@
         </p:blipFill>
         <p:spPr>
           <a:xfrm>
-            <a:off x="1559052" y="1851660"/>
-            <a:ext cx="320040" cy="320040"/>
+            <a:off x="1284731" y="1856232"/>
+            <a:ext cx="310896" cy="310896"/>
           </a:xfrm>
           <a:prstGeom prst="rect">
             <a:avLst/>
@@ -9661,8 +9661,8 @@
         </p:nvSpPr>
         <p:spPr>
           <a:xfrm>
-            <a:off x="594360" y="2395728"/>
-            <a:ext cx="2240280" cy="594360"/>
+            <a:off x="548640" y="2423160"/>
+            <a:ext cx="1783080" cy="548640"/>
           </a:xfrm>
           <a:prstGeom prst="rect">
             <a:avLst/>
@@ -9677,7 +9677,7 @@
           <a:p>
             <a:pPr algn="ctr"/>
             <a:r>
-              <a:rPr sz="1400" b="1">
+              <a:rPr sz="1300" b="1">
                 <a:solidFill>
                   <a:srgbClr val="3D4757"/>
                 </a:solidFill>
@@ -9695,7 +9695,7 @@
               </a:spcBef>
             </a:pPr>
             <a:r>
-              <a:rPr sz="1400" b="1">
+              <a:rPr sz="1300" b="1">
                 <a:solidFill>
                   <a:srgbClr val="3D4757"/>
                 </a:solidFill>
@@ -9716,8 +9716,8 @@
         </p:nvSpPr>
         <p:spPr>
           <a:xfrm>
-            <a:off x="3035808" y="2148840"/>
-            <a:ext cx="292608" cy="292608"/>
+            <a:off x="2459736" y="2130552"/>
+            <a:ext cx="228600" cy="274320"/>
           </a:xfrm>
           <a:prstGeom prst="rightArrow">
             <a:avLst/>
@@ -9758,8 +9758,8 @@
         </p:nvSpPr>
         <p:spPr>
           <a:xfrm>
-            <a:off x="3383280" y="1554480"/>
-            <a:ext cx="2514600" cy="1508760"/>
+            <a:off x="2724912" y="1554480"/>
+            <a:ext cx="1965960" cy="1463040"/>
           </a:xfrm>
           <a:prstGeom prst="roundRect">
             <a:avLst>
@@ -9804,8 +9804,8 @@
         </p:nvSpPr>
         <p:spPr>
           <a:xfrm>
-            <a:off x="4325112" y="1691640"/>
-            <a:ext cx="640080" cy="640080"/>
+            <a:off x="3396996" y="1700784"/>
+            <a:ext cx="621792" cy="621792"/>
           </a:xfrm>
           <a:prstGeom prst="ellipse">
             <a:avLst/>
@@ -9854,8 +9854,8 @@
         </p:blipFill>
         <p:spPr>
           <a:xfrm>
-            <a:off x="4485132" y="1851660"/>
-            <a:ext cx="320040" cy="320040"/>
+            <a:off x="3552444" y="1856232"/>
+            <a:ext cx="310896" cy="310896"/>
           </a:xfrm>
           <a:prstGeom prst="rect">
             <a:avLst/>
@@ -9870,8 +9870,8 @@
         </p:nvSpPr>
         <p:spPr>
           <a:xfrm>
-            <a:off x="3520440" y="2395728"/>
-            <a:ext cx="2240280" cy="594360"/>
+            <a:off x="2816352" y="2423160"/>
+            <a:ext cx="1783080" cy="548640"/>
           </a:xfrm>
           <a:prstGeom prst="rect">
             <a:avLst/>
@@ -9886,7 +9886,7 @@
           <a:p>
             <a:pPr algn="ctr"/>
             <a:r>
-              <a:rPr sz="1400" b="1">
+              <a:rPr sz="1300" b="1">
                 <a:solidFill>
                   <a:srgbClr val="3D4757"/>
                 </a:solidFill>
@@ -9904,7 +9904,7 @@
               </a:spcBef>
             </a:pPr>
             <a:r>
-              <a:rPr sz="1400" b="1">
+              <a:rPr sz="1300" b="1">
                 <a:solidFill>
                   <a:srgbClr val="3D4757"/>
                 </a:solidFill>
@@ -9925,8 +9925,8 @@
         </p:nvSpPr>
         <p:spPr>
           <a:xfrm>
-            <a:off x="5961888" y="2148840"/>
-            <a:ext cx="292608" cy="292608"/>
+            <a:off x="4727448" y="2130552"/>
+            <a:ext cx="228600" cy="274320"/>
           </a:xfrm>
           <a:prstGeom prst="rightArrow">
             <a:avLst/>
@@ -9967,8 +9967,8 @@
         </p:nvSpPr>
         <p:spPr>
           <a:xfrm>
-            <a:off x="6309360" y="1554480"/>
-            <a:ext cx="2514600" cy="1508760"/>
+            <a:off x="4992624" y="1554480"/>
+            <a:ext cx="1965960" cy="1463040"/>
           </a:xfrm>
           <a:prstGeom prst="roundRect">
             <a:avLst>
@@ -9976,7 +9976,7 @@
             </a:avLst>
           </a:prstGeom>
           <a:solidFill>
-            <a:srgbClr val="FFF3EA"/>
+            <a:srgbClr val="F5F9FF"/>
           </a:solidFill>
           <a:ln w="12700">
             <a:solidFill>
@@ -10013,14 +10013,14 @@
         </p:nvSpPr>
         <p:spPr>
           <a:xfrm>
-            <a:off x="7251192" y="1691640"/>
-            <a:ext cx="640080" cy="640080"/>
+            <a:off x="5664708" y="1700784"/>
+            <a:ext cx="621792" cy="621792"/>
           </a:xfrm>
           <a:prstGeom prst="ellipse">
             <a:avLst/>
           </a:prstGeom>
           <a:solidFill>
-            <a:srgbClr val="FF7A1A"/>
+            <a:srgbClr val="287DFA"/>
           </a:solidFill>
           <a:ln>
             <a:noFill/>
@@ -10063,8 +10063,8 @@
         </p:blipFill>
         <p:spPr>
           <a:xfrm>
-            <a:off x="7411212" y="1851660"/>
-            <a:ext cx="320040" cy="320040"/>
+            <a:off x="5820156" y="1856232"/>
+            <a:ext cx="310896" cy="310896"/>
           </a:xfrm>
           <a:prstGeom prst="rect">
             <a:avLst/>
@@ -10079,8 +10079,8 @@
         </p:nvSpPr>
         <p:spPr>
           <a:xfrm>
-            <a:off x="6446520" y="2395728"/>
-            <a:ext cx="2240280" cy="594360"/>
+            <a:off x="5084064" y="2423160"/>
+            <a:ext cx="1783080" cy="548640"/>
           </a:xfrm>
           <a:prstGeom prst="rect">
             <a:avLst/>
@@ -10095,7 +10095,7 @@
           <a:p>
             <a:pPr algn="ctr"/>
             <a:r>
-              <a:rPr sz="1400" b="1">
+              <a:rPr sz="1300" b="1">
                 <a:solidFill>
                   <a:srgbClr val="3D4757"/>
                 </a:solidFill>
@@ -10116,8 +10116,8 @@
         </p:nvSpPr>
         <p:spPr>
           <a:xfrm>
-            <a:off x="8887968" y="2148840"/>
-            <a:ext cx="292608" cy="292608"/>
+            <a:off x="6995159" y="2130552"/>
+            <a:ext cx="228600" cy="274320"/>
           </a:xfrm>
           <a:prstGeom prst="rightArrow">
             <a:avLst/>
@@ -10158,8 +10158,236 @@
         </p:nvSpPr>
         <p:spPr>
           <a:xfrm>
-            <a:off x="9235440" y="1554480"/>
-            <a:ext cx="2514600" cy="1508760"/>
+            <a:off x="7260336" y="1554480"/>
+            <a:ext cx="1965960" cy="1463040"/>
+          </a:xfrm>
+          <a:prstGeom prst="roundRect">
+            <a:avLst>
+              <a:gd name="adj" fmla="val 6000"/>
+            </a:avLst>
+          </a:prstGeom>
+          <a:solidFill>
+            <a:srgbClr val="F5F9FF"/>
+          </a:solidFill>
+          <a:ln w="12700">
+            <a:solidFill>
+              <a:srgbClr val="FF7A1A"/>
+            </a:solidFill>
+          </a:ln>
+          <a:effectLst/>
+        </p:spPr>
+        <p:style>
+          <a:lnRef idx="1">
+            <a:schemeClr val="accent1"/>
+          </a:lnRef>
+          <a:fillRef idx="3">
+            <a:schemeClr val="accent1"/>
+          </a:fillRef>
+          <a:effectRef idx="2">
+            <a:schemeClr val="accent1"/>
+          </a:effectRef>
+          <a:fontRef idx="minor">
+            <a:schemeClr val="lt1"/>
+          </a:fontRef>
+        </p:style>
+        <p:txBody>
+          <a:bodyPr rtlCol="0" anchor="ctr"/>
+          <a:lstStyle/>
+          <a:p/>
+        </p:txBody>
+      </p:sp>
+      <p:sp>
+        <p:nvSpPr>
+          <p:cNvPr id="20" name="icon-circle"/>
+          <p:cNvSpPr/>
+          <p:nvPr/>
+        </p:nvSpPr>
+        <p:spPr>
+          <a:xfrm>
+            <a:off x="7932419" y="1700784"/>
+            <a:ext cx="621792" cy="621792"/>
+          </a:xfrm>
+          <a:prstGeom prst="ellipse">
+            <a:avLst/>
+          </a:prstGeom>
+          <a:solidFill>
+            <a:srgbClr val="287DFA"/>
+          </a:solidFill>
+          <a:ln>
+            <a:noFill/>
+          </a:ln>
+          <a:effectLst/>
+        </p:spPr>
+        <p:style>
+          <a:lnRef idx="1">
+            <a:schemeClr val="accent1"/>
+          </a:lnRef>
+          <a:fillRef idx="3">
+            <a:schemeClr val="accent1"/>
+          </a:fillRef>
+          <a:effectRef idx="2">
+            <a:schemeClr val="accent1"/>
+          </a:effectRef>
+          <a:fontRef idx="minor">
+            <a:schemeClr val="lt1"/>
+          </a:fontRef>
+        </p:style>
+        <p:txBody>
+          <a:bodyPr rtlCol="0" anchor="ctr"/>
+          <a:lstStyle/>
+          <a:p/>
+        </p:txBody>
+      </p:sp>
+      <p:pic>
+        <p:nvPicPr>
+          <p:cNvPr id="21" name="Picture 20" descr="FaTicket_w.png"/>
+          <p:cNvPicPr>
+            <a:picLocks noChangeAspect="1"/>
+          </p:cNvPicPr>
+          <p:nvPr/>
+        </p:nvPicPr>
+        <p:blipFill>
+          <a:blip r:embed="rId6"/>
+          <a:stretch>
+            <a:fillRect/>
+          </a:stretch>
+        </p:blipFill>
+        <p:spPr>
+          <a:xfrm>
+            <a:off x="8087867" y="1856232"/>
+            <a:ext cx="310896" cy="310896"/>
+          </a:xfrm>
+          <a:prstGeom prst="rect">
+            <a:avLst/>
+          </a:prstGeom>
+        </p:spPr>
+      </p:pic>
+      <p:sp>
+        <p:nvSpPr>
+          <p:cNvPr id="22" name="TextBox 21"/>
+          <p:cNvSpPr txBox="1"/>
+          <p:nvPr/>
+        </p:nvSpPr>
+        <p:spPr>
+          <a:xfrm>
+            <a:off x="7351775" y="2423160"/>
+            <a:ext cx="1783080" cy="548640"/>
+          </a:xfrm>
+          <a:prstGeom prst="rect">
+            <a:avLst/>
+          </a:prstGeom>
+          <a:noFill/>
+        </p:spPr>
+        <p:txBody>
+          <a:bodyPr wrap="square" lIns="0" rIns="0" tIns="0" bIns="0" anchor="t">
+            <a:spAutoFit/>
+          </a:bodyPr>
+          <a:lstStyle/>
+          <a:p>
+            <a:pPr algn="ctr"/>
+            <a:r>
+              <a:rPr sz="1300" b="1">
+                <a:solidFill>
+                  <a:srgbClr val="3D4757"/>
+                </a:solidFill>
+                <a:latin typeface="微软雅黑"/>
+                <a:ea typeface="微软雅黑"/>
+                <a:cs typeface="微软雅黑"/>
+              </a:rPr>
+              <a:t>出票</a:t>
+            </a:r>
+          </a:p>
+        </p:txBody>
+      </p:sp>
+      <p:sp>
+        <p:nvSpPr>
+          <p:cNvPr id="23" name="Rectangle 22"/>
+          <p:cNvSpPr/>
+          <p:nvPr/>
+        </p:nvSpPr>
+        <p:spPr>
+          <a:xfrm>
+            <a:off x="4901184" y="1463040"/>
+            <a:ext cx="4416552" cy="1645920"/>
+          </a:xfrm>
+          <a:prstGeom prst="rect">
+            <a:avLst/>
+          </a:prstGeom>
+          <a:noFill/>
+          <a:ln w="12700">
+            <a:solidFill>
+              <a:srgbClr val="FF7A1A"/>
+            </a:solidFill>
+          </a:ln>
+          <a:effectLst/>
+        </p:spPr>
+        <p:style>
+          <a:lnRef idx="1">
+            <a:schemeClr val="accent1"/>
+          </a:lnRef>
+          <a:fillRef idx="3">
+            <a:schemeClr val="accent1"/>
+          </a:fillRef>
+          <a:effectRef idx="2">
+            <a:schemeClr val="accent1"/>
+          </a:effectRef>
+          <a:fontRef idx="minor">
+            <a:schemeClr val="lt1"/>
+          </a:fontRef>
+        </p:style>
+        <p:txBody>
+          <a:bodyPr rtlCol="0" anchor="ctr"/>
+          <a:lstStyle/>
+          <a:p/>
+        </p:txBody>
+      </p:sp>
+      <p:sp>
+        <p:nvSpPr>
+          <p:cNvPr id="24" name="TextBox 23"/>
+          <p:cNvSpPr txBox="1"/>
+          <p:nvPr/>
+        </p:nvSpPr>
+        <p:spPr>
+          <a:xfrm>
+            <a:off x="4901184" y="3154680"/>
+            <a:ext cx="4416552" cy="274320"/>
+          </a:xfrm>
+          <a:prstGeom prst="rect">
+            <a:avLst/>
+          </a:prstGeom>
+          <a:noFill/>
+        </p:spPr>
+        <p:txBody>
+          <a:bodyPr wrap="square" lIns="0" rIns="0" tIns="0" bIns="0" anchor="t">
+            <a:spAutoFit/>
+          </a:bodyPr>
+          <a:lstStyle/>
+          <a:p>
+            <a:pPr algn="ctr"/>
+            <a:r>
+              <a:rPr sz="1200" b="1">
+                <a:solidFill>
+                  <a:srgbClr val="FF7A1A"/>
+                </a:solidFill>
+                <a:latin typeface="微软雅黑"/>
+                <a:ea typeface="微软雅黑"/>
+                <a:cs typeface="微软雅黑"/>
+              </a:rPr>
+              <a:t>受风控限制，付款到出票环节容易失败</a:t>
+            </a:r>
+          </a:p>
+        </p:txBody>
+      </p:sp>
+      <p:sp>
+        <p:nvSpPr>
+          <p:cNvPr id="25" name="Rounded Rectangle 24"/>
+          <p:cNvSpPr/>
+          <p:nvPr/>
+        </p:nvSpPr>
+        <p:spPr>
+          <a:xfrm>
+            <a:off x="457200" y="3657600"/>
+            <a:ext cx="4480560" cy="2423160"/>
           </a:xfrm>
           <a:prstGeom prst="roundRect">
             <a:avLst>
@@ -10196,19 +10424,185 @@
           <a:p/>
         </p:txBody>
       </p:sp>
-      <p:sp>
-        <p:nvSpPr>
-          <p:cNvPr id="20" name="icon-circle"/>
+      <p:pic>
+        <p:nvPicPr>
+          <p:cNvPr id="26" name="Picture 25" descr="FaLightbulb_b.png"/>
+          <p:cNvPicPr>
+            <a:picLocks noChangeAspect="1"/>
+          </p:cNvPicPr>
+          <p:nvPr/>
+        </p:nvPicPr>
+        <p:blipFill>
+          <a:blip r:embed="rId7"/>
+          <a:stretch>
+            <a:fillRect/>
+          </a:stretch>
+        </p:blipFill>
+        <p:spPr>
+          <a:xfrm>
+            <a:off x="685800" y="3858768"/>
+            <a:ext cx="365760" cy="365760"/>
+          </a:xfrm>
+          <a:prstGeom prst="rect">
+            <a:avLst/>
+          </a:prstGeom>
+        </p:spPr>
+      </p:pic>
+      <p:sp>
+        <p:nvSpPr>
+          <p:cNvPr id="27" name="TextBox 26"/>
+          <p:cNvSpPr txBox="1"/>
+          <p:nvPr/>
+        </p:nvSpPr>
+        <p:spPr>
+          <a:xfrm>
+            <a:off x="1170432" y="3858768"/>
+            <a:ext cx="3566160" cy="365760"/>
+          </a:xfrm>
+          <a:prstGeom prst="rect">
+            <a:avLst/>
+          </a:prstGeom>
+          <a:noFill/>
+        </p:spPr>
+        <p:txBody>
+          <a:bodyPr wrap="square" lIns="0" rIns="0" tIns="0" bIns="0" anchor="t">
+            <a:spAutoFit/>
+          </a:bodyPr>
+          <a:lstStyle/>
+          <a:p>
+            <a:pPr algn="l"/>
+            <a:r>
+              <a:rPr sz="1600" b="1">
+                <a:solidFill>
+                  <a:srgbClr val="15315E"/>
+                </a:solidFill>
+                <a:latin typeface="微软雅黑"/>
+                <a:ea typeface="微软雅黑"/>
+                <a:cs typeface="微软雅黑"/>
+              </a:rPr>
+              <a:t>KANO：兴奋型需求</a:t>
+            </a:r>
+          </a:p>
+        </p:txBody>
+      </p:sp>
+      <p:sp>
+        <p:nvSpPr>
+          <p:cNvPr id="28" name="TextBox 27"/>
+          <p:cNvSpPr txBox="1"/>
+          <p:nvPr/>
+        </p:nvSpPr>
+        <p:spPr>
+          <a:xfrm>
+            <a:off x="685800" y="4370832"/>
+            <a:ext cx="4069080" cy="914400"/>
+          </a:xfrm>
+          <a:prstGeom prst="rect">
+            <a:avLst/>
+          </a:prstGeom>
+          <a:noFill/>
+        </p:spPr>
+        <p:txBody>
+          <a:bodyPr wrap="square" lIns="0" rIns="0" tIns="0" bIns="0" anchor="t">
+            <a:spAutoFit/>
+          </a:bodyPr>
+          <a:lstStyle/>
+          <a:p>
+            <a:pPr algn="l"/>
+            <a:r>
+              <a:rPr sz="1300" b="0">
+                <a:solidFill>
+                  <a:srgbClr val="3D4757"/>
+                </a:solidFill>
+                <a:latin typeface="微软雅黑"/>
+                <a:ea typeface="微软雅黑"/>
+                <a:cs typeface="微软雅黑"/>
+              </a:rPr>
+              <a:t>做到了是惊喜，做不到用户也不会抱怨；但一旦通知了用户、用户也付了款，他就默认一定能出票。</a:t>
+            </a:r>
+          </a:p>
+        </p:txBody>
+      </p:sp>
+      <p:sp>
+        <p:nvSpPr>
+          <p:cNvPr id="29" name="TextBox 28"/>
+          <p:cNvSpPr txBox="1"/>
+          <p:nvPr/>
+        </p:nvSpPr>
+        <p:spPr>
+          <a:xfrm>
+            <a:off x="685800" y="5349240"/>
+            <a:ext cx="4069080" cy="640080"/>
+          </a:xfrm>
+          <a:prstGeom prst="rect">
+            <a:avLst/>
+          </a:prstGeom>
+          <a:noFill/>
+        </p:spPr>
+        <p:txBody>
+          <a:bodyPr wrap="square" lIns="0" rIns="0" tIns="0" bIns="0" anchor="t">
+            <a:spAutoFit/>
+          </a:bodyPr>
+          <a:lstStyle/>
+          <a:p>
+            <a:pPr algn="l"/>
+            <a:r>
+              <a:rPr sz="1300" b="1">
+                <a:solidFill>
+                  <a:srgbClr val="287DFA"/>
+                </a:solidFill>
+                <a:latin typeface="微软雅黑"/>
+                <a:ea typeface="微软雅黑"/>
+                <a:cs typeface="微软雅黑"/>
+              </a:rPr>
+              <a:t>解决方案　</a:t>
+            </a:r>
+            <a:r>
+              <a:rPr sz="1300" b="0">
+                <a:solidFill>
+                  <a:srgbClr val="3D4757"/>
+                </a:solidFill>
+                <a:latin typeface="微软雅黑"/>
+                <a:ea typeface="微软雅黑"/>
+                <a:cs typeface="微软雅黑"/>
+              </a:rPr>
+              <a:t>确认出票的付款统一改为直付，付款成功即可出票</a:t>
+            </a:r>
+          </a:p>
+        </p:txBody>
+      </p:sp>
+      <p:graphicFrame>
+        <p:nvGraphicFramePr>
+          <p:cNvPr id="30" name="Chart 29"/>
+          <p:cNvGraphicFramePr>
+            <a:graphicFrameLocks noGrp="1"/>
+          </p:cNvGraphicFramePr>
+          <p:nvPr/>
+        </p:nvGraphicFramePr>
+        <p:xfrm>
+          <a:off x="5120640" y="3657600"/>
+          <a:ext cx="2377440" cy="2423160"/>
+        </p:xfrm>
+        <a:graphic>
+          <a:graphicData uri="http://schemas.openxmlformats.org/drawingml/2006/chart">
+            <c:chart xmlns:c="http://schemas.openxmlformats.org/drawingml/2006/chart" r:id="rId8"/>
+          </a:graphicData>
+        </a:graphic>
+      </p:graphicFrame>
+      <p:sp>
+        <p:nvSpPr>
+          <p:cNvPr id="31" name="Rounded Rectangle 30"/>
           <p:cNvSpPr/>
           <p:nvPr/>
         </p:nvSpPr>
         <p:spPr>
           <a:xfrm>
-            <a:off x="10177272" y="1691640"/>
-            <a:ext cx="640080" cy="640080"/>
-          </a:xfrm>
-          <a:prstGeom prst="ellipse">
-            <a:avLst/>
+            <a:off x="7680960" y="3657600"/>
+            <a:ext cx="1691640" cy="2423160"/>
+          </a:xfrm>
+          <a:prstGeom prst="roundRect">
+            <a:avLst>
+              <a:gd name="adj" fmla="val 6000"/>
+            </a:avLst>
           </a:prstGeom>
           <a:solidFill>
             <a:srgbClr val="287DFA"/>
@@ -10238,40 +10632,16 @@
           <a:p/>
         </p:txBody>
       </p:sp>
-      <p:pic>
-        <p:nvPicPr>
-          <p:cNvPr id="21" name="Picture 20" descr="FaTicket_w.png"/>
-          <p:cNvPicPr>
-            <a:picLocks noChangeAspect="1"/>
-          </p:cNvPicPr>
-          <p:nvPr/>
-        </p:nvPicPr>
-        <p:blipFill>
-          <a:blip r:embed="rId6"/>
-          <a:stretch>
-            <a:fillRect/>
-          </a:stretch>
-        </p:blipFill>
-        <p:spPr>
-          <a:xfrm>
-            <a:off x="10337292" y="1851660"/>
-            <a:ext cx="320040" cy="320040"/>
-          </a:xfrm>
-          <a:prstGeom prst="rect">
-            <a:avLst/>
-          </a:prstGeom>
-        </p:spPr>
-      </p:pic>
-      <p:sp>
-        <p:nvSpPr>
-          <p:cNvPr id="22" name="TextBox 21"/>
+      <p:sp>
+        <p:nvSpPr>
+          <p:cNvPr id="32" name="TextBox 31"/>
           <p:cNvSpPr txBox="1"/>
           <p:nvPr/>
         </p:nvSpPr>
         <p:spPr>
           <a:xfrm>
-            <a:off x="9372600" y="2395728"/>
-            <a:ext cx="2240280" cy="594360"/>
+            <a:off x="7726679" y="4343400"/>
+            <a:ext cx="1600200" cy="1005840"/>
           </a:xfrm>
           <a:prstGeom prst="rect">
             <a:avLst/>
@@ -10286,335 +10656,25 @@
           <a:p>
             <a:pPr algn="ctr"/>
             <a:r>
-              <a:rPr sz="1400" b="1">
-                <a:solidFill>
-                  <a:srgbClr val="3D4757"/>
+              <a:rPr sz="1500" b="1">
+                <a:solidFill>
+                  <a:srgbClr val="FFFFFF"/>
                 </a:solidFill>
                 <a:latin typeface="微软雅黑"/>
                 <a:ea typeface="微软雅黑"/>
                 <a:cs typeface="微软雅黑"/>
               </a:rPr>
-              <a:t>出票</a:t>
+              <a:t>预估年化票量</a:t>
             </a:r>
           </a:p>
-        </p:txBody>
-      </p:sp>
-      <p:sp>
-        <p:nvSpPr>
-          <p:cNvPr id="23" name="TextBox 22"/>
-          <p:cNvSpPr txBox="1"/>
-          <p:nvPr/>
-        </p:nvSpPr>
-        <p:spPr>
-          <a:xfrm>
-            <a:off x="6309360" y="3154680"/>
-            <a:ext cx="2514600" cy="320040"/>
-          </a:xfrm>
-          <a:prstGeom prst="rect">
-            <a:avLst/>
-          </a:prstGeom>
-          <a:noFill/>
-        </p:spPr>
-        <p:txBody>
-          <a:bodyPr wrap="square" lIns="0" rIns="0" tIns="0" bIns="0" anchor="t">
-            <a:spAutoFit/>
-          </a:bodyPr>
-          <a:lstStyle/>
           <a:p>
-            <a:pPr algn="ctr"/>
+            <a:pPr algn="ctr">
+              <a:spcBef>
+                <a:spcPts val="600"/>
+              </a:spcBef>
+            </a:pPr>
             <a:r>
-              <a:rPr sz="1200" b="1">
-                <a:solidFill>
-                  <a:srgbClr val="FF7A1A"/>
-                </a:solidFill>
-                <a:latin typeface="微软雅黑"/>
-                <a:ea typeface="微软雅黑"/>
-                <a:cs typeface="微软雅黑"/>
-              </a:rPr>
-              <a:t>受风控限制，付款环节容易失败</a:t>
-            </a:r>
-          </a:p>
-        </p:txBody>
-      </p:sp>
-      <p:sp>
-        <p:nvSpPr>
-          <p:cNvPr id="24" name="Rounded Rectangle 23"/>
-          <p:cNvSpPr/>
-          <p:nvPr/>
-        </p:nvSpPr>
-        <p:spPr>
-          <a:xfrm>
-            <a:off x="457200" y="3657600"/>
-            <a:ext cx="6035040" cy="2423160"/>
-          </a:xfrm>
-          <a:prstGeom prst="roundRect">
-            <a:avLst>
-              <a:gd name="adj" fmla="val 6000"/>
-            </a:avLst>
-          </a:prstGeom>
-          <a:solidFill>
-            <a:srgbClr val="F5F9FF"/>
-          </a:solidFill>
-          <a:ln w="12700">
-            <a:solidFill>
-              <a:srgbClr val="D3E2FB"/>
-            </a:solidFill>
-          </a:ln>
-          <a:effectLst/>
-        </p:spPr>
-        <p:style>
-          <a:lnRef idx="1">
-            <a:schemeClr val="accent1"/>
-          </a:lnRef>
-          <a:fillRef idx="3">
-            <a:schemeClr val="accent1"/>
-          </a:fillRef>
-          <a:effectRef idx="2">
-            <a:schemeClr val="accent1"/>
-          </a:effectRef>
-          <a:fontRef idx="minor">
-            <a:schemeClr val="lt1"/>
-          </a:fontRef>
-        </p:style>
-        <p:txBody>
-          <a:bodyPr rtlCol="0" anchor="ctr"/>
-          <a:lstStyle/>
-          <a:p/>
-        </p:txBody>
-      </p:sp>
-      <p:pic>
-        <p:nvPicPr>
-          <p:cNvPr id="25" name="Picture 24" descr="FaLightbulb_b.png"/>
-          <p:cNvPicPr>
-            <a:picLocks noChangeAspect="1"/>
-          </p:cNvPicPr>
-          <p:nvPr/>
-        </p:nvPicPr>
-        <p:blipFill>
-          <a:blip r:embed="rId7"/>
-          <a:stretch>
-            <a:fillRect/>
-          </a:stretch>
-        </p:blipFill>
-        <p:spPr>
-          <a:xfrm>
-            <a:off x="731520" y="3886200"/>
-            <a:ext cx="365760" cy="365760"/>
-          </a:xfrm>
-          <a:prstGeom prst="rect">
-            <a:avLst/>
-          </a:prstGeom>
-        </p:spPr>
-      </p:pic>
-      <p:sp>
-        <p:nvSpPr>
-          <p:cNvPr id="26" name="TextBox 25"/>
-          <p:cNvSpPr txBox="1"/>
-          <p:nvPr/>
-        </p:nvSpPr>
-        <p:spPr>
-          <a:xfrm>
-            <a:off x="1234440" y="3886200"/>
-            <a:ext cx="5029200" cy="365760"/>
-          </a:xfrm>
-          <a:prstGeom prst="rect">
-            <a:avLst/>
-          </a:prstGeom>
-          <a:noFill/>
-        </p:spPr>
-        <p:txBody>
-          <a:bodyPr wrap="square" lIns="0" rIns="0" tIns="0" bIns="0" anchor="t">
-            <a:spAutoFit/>
-          </a:bodyPr>
-          <a:lstStyle/>
-          <a:p>
-            <a:pPr algn="l"/>
-            <a:r>
-              <a:rPr sz="1600" b="1">
-                <a:solidFill>
-                  <a:srgbClr val="15315E"/>
-                </a:solidFill>
-                <a:latin typeface="微软雅黑"/>
-                <a:ea typeface="微软雅黑"/>
-                <a:cs typeface="微软雅黑"/>
-              </a:rPr>
-              <a:t>KANO：兴奋型需求</a:t>
-            </a:r>
-          </a:p>
-        </p:txBody>
-      </p:sp>
-      <p:sp>
-        <p:nvSpPr>
-          <p:cNvPr id="27" name="TextBox 26"/>
-          <p:cNvSpPr txBox="1"/>
-          <p:nvPr/>
-        </p:nvSpPr>
-        <p:spPr>
-          <a:xfrm>
-            <a:off x="731520" y="4389120"/>
-            <a:ext cx="5577840" cy="777240"/>
-          </a:xfrm>
-          <a:prstGeom prst="rect">
-            <a:avLst/>
-          </a:prstGeom>
-          <a:noFill/>
-        </p:spPr>
-        <p:txBody>
-          <a:bodyPr wrap="square" lIns="0" rIns="0" tIns="0" bIns="0" anchor="t">
-            <a:spAutoFit/>
-          </a:bodyPr>
-          <a:lstStyle/>
-          <a:p>
-            <a:pPr algn="l"/>
-            <a:r>
-              <a:rPr sz="1400" b="0">
-                <a:solidFill>
-                  <a:srgbClr val="3D4757"/>
-                </a:solidFill>
-                <a:latin typeface="微软雅黑"/>
-                <a:ea typeface="微软雅黑"/>
-                <a:cs typeface="微软雅黑"/>
-              </a:rPr>
-              <a:t>做到了是惊喜，做不到用户也不会抱怨；但一旦通知了用户、用户也付了款，他就默认一定能出票。</a:t>
-            </a:r>
-          </a:p>
-        </p:txBody>
-      </p:sp>
-      <p:sp>
-        <p:nvSpPr>
-          <p:cNvPr id="28" name="TextBox 27"/>
-          <p:cNvSpPr txBox="1"/>
-          <p:nvPr/>
-        </p:nvSpPr>
-        <p:spPr>
-          <a:xfrm>
-            <a:off x="731520" y="5257800"/>
-            <a:ext cx="5577840" cy="685800"/>
-          </a:xfrm>
-          <a:prstGeom prst="rect">
-            <a:avLst/>
-          </a:prstGeom>
-          <a:noFill/>
-        </p:spPr>
-        <p:txBody>
-          <a:bodyPr wrap="square" lIns="0" rIns="0" tIns="0" bIns="0" anchor="t">
-            <a:spAutoFit/>
-          </a:bodyPr>
-          <a:lstStyle/>
-          <a:p>
-            <a:pPr algn="l"/>
-            <a:r>
-              <a:rPr sz="1400" b="1">
-                <a:solidFill>
-                  <a:srgbClr val="287DFA"/>
-                </a:solidFill>
-                <a:latin typeface="微软雅黑"/>
-                <a:ea typeface="微软雅黑"/>
-                <a:cs typeface="微软雅黑"/>
-              </a:rPr>
-              <a:t>解决方案　</a:t>
-            </a:r>
-            <a:r>
-              <a:rPr sz="1400" b="0">
-                <a:solidFill>
-                  <a:srgbClr val="3D4757"/>
-                </a:solidFill>
-                <a:latin typeface="微软雅黑"/>
-                <a:ea typeface="微软雅黑"/>
-                <a:cs typeface="微软雅黑"/>
-              </a:rPr>
-              <a:t>确认出票的付款统一改为直付，付款成功即可出票</a:t>
-            </a:r>
-          </a:p>
-        </p:txBody>
-      </p:sp>
-      <p:graphicFrame>
-        <p:nvGraphicFramePr>
-          <p:cNvPr id="29" name="Chart 28"/>
-          <p:cNvGraphicFramePr>
-            <a:graphicFrameLocks noGrp="1"/>
-          </p:cNvGraphicFramePr>
-          <p:nvPr/>
-        </p:nvGraphicFramePr>
-        <p:xfrm>
-          <a:off x="6812280" y="3657600"/>
-          <a:ext cx="2743200" cy="2423160"/>
-        </p:xfrm>
-        <a:graphic>
-          <a:graphicData uri="http://schemas.openxmlformats.org/drawingml/2006/chart">
-            <c:chart xmlns:c="http://schemas.openxmlformats.org/drawingml/2006/chart" r:id="rId8"/>
-          </a:graphicData>
-        </a:graphic>
-      </p:graphicFrame>
-      <p:sp>
-        <p:nvSpPr>
-          <p:cNvPr id="30" name="Rounded Rectangle 29"/>
-          <p:cNvSpPr/>
-          <p:nvPr/>
-        </p:nvSpPr>
-        <p:spPr>
-          <a:xfrm>
-            <a:off x="9738360" y="3657600"/>
-            <a:ext cx="2011680" cy="2423160"/>
-          </a:xfrm>
-          <a:prstGeom prst="roundRect">
-            <a:avLst>
-              <a:gd name="adj" fmla="val 6000"/>
-            </a:avLst>
-          </a:prstGeom>
-          <a:solidFill>
-            <a:srgbClr val="287DFA"/>
-          </a:solidFill>
-          <a:ln>
-            <a:noFill/>
-          </a:ln>
-          <a:effectLst/>
-        </p:spPr>
-        <p:style>
-          <a:lnRef idx="1">
-            <a:schemeClr val="accent1"/>
-          </a:lnRef>
-          <a:fillRef idx="3">
-            <a:schemeClr val="accent1"/>
-          </a:fillRef>
-          <a:effectRef idx="2">
-            <a:schemeClr val="accent1"/>
-          </a:effectRef>
-          <a:fontRef idx="minor">
-            <a:schemeClr val="lt1"/>
-          </a:fontRef>
-        </p:style>
-        <p:txBody>
-          <a:bodyPr rtlCol="0" anchor="ctr"/>
-          <a:lstStyle/>
-          <a:p/>
-        </p:txBody>
-      </p:sp>
-      <p:sp>
-        <p:nvSpPr>
-          <p:cNvPr id="31" name="TextBox 30"/>
-          <p:cNvSpPr txBox="1"/>
-          <p:nvPr/>
-        </p:nvSpPr>
-        <p:spPr>
-          <a:xfrm>
-            <a:off x="9829800" y="4160520"/>
-            <a:ext cx="1828800" cy="731520"/>
-          </a:xfrm>
-          <a:prstGeom prst="rect">
-            <a:avLst/>
-          </a:prstGeom>
-          <a:noFill/>
-        </p:spPr>
-        <p:txBody>
-          <a:bodyPr wrap="square" lIns="0" rIns="0" tIns="0" bIns="0" anchor="t">
-            <a:spAutoFit/>
-          </a:bodyPr>
-          <a:lstStyle/>
-          <a:p>
-            <a:pPr algn="ctr"/>
-            <a:r>
-              <a:rPr sz="3200" b="1">
+              <a:rPr sz="2600" b="1">
                 <a:solidFill>
                   <a:srgbClr val="FFFFFF"/>
                 </a:solidFill>
@@ -10627,43 +10687,37 @@
           </a:p>
         </p:txBody>
       </p:sp>
-      <p:sp>
-        <p:nvSpPr>
-          <p:cNvPr id="32" name="TextBox 31"/>
-          <p:cNvSpPr txBox="1"/>
-          <p:nvPr/>
-        </p:nvSpPr>
-        <p:spPr>
-          <a:xfrm>
-            <a:off x="9829800" y="4937760"/>
-            <a:ext cx="1828800" cy="365760"/>
-          </a:xfrm>
-          <a:prstGeom prst="rect">
-            <a:avLst/>
-          </a:prstGeom>
-          <a:noFill/>
-        </p:spPr>
-        <p:txBody>
-          <a:bodyPr wrap="square" lIns="0" rIns="0" tIns="0" bIns="0" anchor="t">
-            <a:spAutoFit/>
-          </a:bodyPr>
-          <a:lstStyle/>
-          <a:p>
-            <a:pPr algn="ctr"/>
-            <a:r>
-              <a:rPr sz="1400" b="0">
-                <a:solidFill>
-                  <a:srgbClr val="FFFFFF"/>
-                </a:solidFill>
-                <a:latin typeface="微软雅黑"/>
-                <a:ea typeface="微软雅黑"/>
-                <a:cs typeface="微软雅黑"/>
-              </a:rPr>
-              <a:t>预估年化票量</a:t>
-            </a:r>
-          </a:p>
-        </p:txBody>
-      </p:sp>
+      <p:pic>
+        <p:nvPicPr>
+          <p:cNvPr id="33" name="真实截图-车票待确认" descr="second_leg.jpg"/>
+          <p:cNvPicPr>
+            <a:picLocks noChangeAspect="1"/>
+          </p:cNvPicPr>
+          <p:nvPr/>
+        </p:nvPicPr>
+        <p:blipFill>
+          <a:blip r:embed="rId9"/>
+          <a:stretch>
+            <a:fillRect/>
+          </a:stretch>
+        </p:blipFill>
+        <p:spPr>
+          <a:xfrm>
+            <a:off x="9630689" y="1463040"/>
+            <a:ext cx="2101062" cy="4617720"/>
+          </a:xfrm>
+          <a:prstGeom prst="roundRect">
+            <a:avLst>
+              <a:gd name="adj" fmla="val 6000"/>
+            </a:avLst>
+          </a:prstGeom>
+          <a:ln w="25400">
+            <a:solidFill>
+              <a:srgbClr val="000000"/>
+            </a:solidFill>
+          </a:ln>
+        </p:spPr>
+      </p:pic>
     </p:spTree>
   </p:cSld>
   <p:clrMapOvr>

--- a/答辩PPT.pptx
+++ b/答辩PPT.pptx
@@ -10493,8 +10493,8 @@
         </p:nvSpPr>
         <p:spPr>
           <a:xfrm>
-            <a:off x="685800" y="4370832"/>
-            <a:ext cx="4069080" cy="914400"/>
+            <a:off x="685800" y="4389120"/>
+            <a:ext cx="4069080" cy="685800"/>
           </a:xfrm>
           <a:prstGeom prst="rect">
             <a:avLst/>
@@ -10509,29 +10509,115 @@
           <a:p>
             <a:pPr algn="l"/>
             <a:r>
-              <a:rPr sz="1300" b="0">
-                <a:solidFill>
-                  <a:srgbClr val="3D4757"/>
+              <a:rPr sz="900" b="0">
+                <a:solidFill>
+                  <a:srgbClr val="287DFA"/>
                 </a:solidFill>
                 <a:latin typeface="微软雅黑"/>
                 <a:ea typeface="微软雅黑"/>
                 <a:cs typeface="微软雅黑"/>
               </a:rPr>
-              <a:t>做到了是惊喜，做不到用户也不会抱怨；但一旦通知了用户、用户也付了款，他就默认一定能出票。</a:t>
+              <a:t>●  </a:t>
+            </a:r>
+            <a:r>
+              <a:rPr sz="1400" b="0">
+                <a:solidFill>
+                  <a:srgbClr val="3D4757"/>
+                </a:solidFill>
+                <a:latin typeface="微软雅黑"/>
+                <a:ea typeface="微软雅黑"/>
+                <a:cs typeface="微软雅黑"/>
+              </a:rPr>
+              <a:t>通知 + 付款后，用户默认一定能出票</a:t>
             </a:r>
           </a:p>
-        </p:txBody>
-      </p:sp>
-      <p:sp>
-        <p:nvSpPr>
-          <p:cNvPr id="29" name="TextBox 28"/>
+          <a:p>
+            <a:pPr algn="l">
+              <a:spcBef>
+                <a:spcPts val="600"/>
+              </a:spcBef>
+            </a:pPr>
+            <a:r>
+              <a:rPr sz="900" b="0">
+                <a:solidFill>
+                  <a:srgbClr val="FF7A1A"/>
+                </a:solidFill>
+                <a:latin typeface="微软雅黑"/>
+                <a:ea typeface="微软雅黑"/>
+                <a:cs typeface="微软雅黑"/>
+              </a:rPr>
+              <a:t>●  </a:t>
+            </a:r>
+            <a:r>
+              <a:rPr sz="1400" b="0">
+                <a:solidFill>
+                  <a:srgbClr val="3D4757"/>
+                </a:solidFill>
+                <a:latin typeface="微软雅黑"/>
+                <a:ea typeface="微软雅黑"/>
+                <a:cs typeface="微软雅黑"/>
+              </a:rPr>
+              <a:t>出票失败，体验比没有这个功能更差</a:t>
+            </a:r>
+          </a:p>
+        </p:txBody>
+      </p:sp>
+      <p:sp>
+        <p:nvSpPr>
+          <p:cNvPr id="29" name="Rounded Rectangle 28"/>
+          <p:cNvSpPr/>
+          <p:nvPr/>
+        </p:nvSpPr>
+        <p:spPr>
+          <a:xfrm>
+            <a:off x="685800" y="5303520"/>
+            <a:ext cx="4023360" cy="548640"/>
+          </a:xfrm>
+          <a:prstGeom prst="roundRect">
+            <a:avLst>
+              <a:gd name="adj" fmla="val 30000"/>
+            </a:avLst>
+          </a:prstGeom>
+          <a:solidFill>
+            <a:srgbClr val="FFFFFF"/>
+          </a:solidFill>
+          <a:ln w="12700">
+            <a:solidFill>
+              <a:srgbClr val="287DFA"/>
+            </a:solidFill>
+          </a:ln>
+          <a:effectLst/>
+        </p:spPr>
+        <p:style>
+          <a:lnRef idx="1">
+            <a:schemeClr val="accent1"/>
+          </a:lnRef>
+          <a:fillRef idx="3">
+            <a:schemeClr val="accent1"/>
+          </a:fillRef>
+          <a:effectRef idx="2">
+            <a:schemeClr val="accent1"/>
+          </a:effectRef>
+          <a:fontRef idx="minor">
+            <a:schemeClr val="lt1"/>
+          </a:fontRef>
+        </p:style>
+        <p:txBody>
+          <a:bodyPr rtlCol="0" anchor="ctr"/>
+          <a:lstStyle/>
+          <a:p/>
+        </p:txBody>
+      </p:sp>
+      <p:sp>
+        <p:nvSpPr>
+          <p:cNvPr id="30" name="TextBox 29"/>
           <p:cNvSpPr txBox="1"/>
           <p:nvPr/>
         </p:nvSpPr>
         <p:spPr>
           <a:xfrm>
-            <a:off x="685800" y="5349240"/>
-            <a:ext cx="4069080" cy="640080"/>
+            <a:off x="685800" y="5303520"/>
+            <a:ext cx="4023360" cy="548640"/>
           </a:xfrm>
           <a:prstGeom prst="rect">
             <a:avLst/>
@@ -10539,14 +10625,14 @@
           <a:noFill/>
         </p:spPr>
         <p:txBody>
-          <a:bodyPr wrap="square" lIns="0" rIns="0" tIns="0" bIns="0" anchor="t">
+          <a:bodyPr wrap="square" lIns="0" rIns="0" tIns="0" bIns="0" anchor="ctr">
             <a:spAutoFit/>
           </a:bodyPr>
           <a:lstStyle/>
           <a:p>
-            <a:pPr algn="l"/>
+            <a:pPr algn="ctr"/>
             <a:r>
-              <a:rPr sz="1300" b="1">
+              <a:rPr sz="1400" b="1">
                 <a:solidFill>
                   <a:srgbClr val="287DFA"/>
                 </a:solidFill>
@@ -10557,22 +10643,22 @@
               <a:t>解决方案　</a:t>
             </a:r>
             <a:r>
-              <a:rPr sz="1300" b="0">
-                <a:solidFill>
-                  <a:srgbClr val="3D4757"/>
+              <a:rPr sz="1400" b="1">
+                <a:solidFill>
+                  <a:srgbClr val="15315E"/>
                 </a:solidFill>
                 <a:latin typeface="微软雅黑"/>
                 <a:ea typeface="微软雅黑"/>
                 <a:cs typeface="微软雅黑"/>
               </a:rPr>
-              <a:t>确认出票的付款统一改为直付，付款成功即可出票</a:t>
+              <a:t>确认出票统一改为直付</a:t>
             </a:r>
           </a:p>
         </p:txBody>
       </p:sp>
       <p:graphicFrame>
         <p:nvGraphicFramePr>
-          <p:cNvPr id="30" name="Chart 29"/>
+          <p:cNvPr id="31" name="Chart 30"/>
           <p:cNvGraphicFramePr>
             <a:graphicFrameLocks noGrp="1"/>
           </p:cNvGraphicFramePr>
@@ -10590,7 +10676,7 @@
       </p:graphicFrame>
       <p:sp>
         <p:nvSpPr>
-          <p:cNvPr id="31" name="Rounded Rectangle 30"/>
+          <p:cNvPr id="32" name="Rounded Rectangle 31"/>
           <p:cNvSpPr/>
           <p:nvPr/>
         </p:nvSpPr>
@@ -10634,7 +10720,7 @@
       </p:sp>
       <p:sp>
         <p:nvSpPr>
-          <p:cNvPr id="32" name="TextBox 31"/>
+          <p:cNvPr id="33" name="TextBox 32"/>
           <p:cNvSpPr txBox="1"/>
           <p:nvPr/>
         </p:nvSpPr>
@@ -10689,7 +10775,7 @@
       </p:sp>
       <p:pic>
         <p:nvPicPr>
-          <p:cNvPr id="33" name="真实截图-车票待确认" descr="second_leg.jpg"/>
+          <p:cNvPr id="34" name="真实截图-车票待确认" descr="second_leg.jpg"/>
           <p:cNvPicPr>
             <a:picLocks noChangeAspect="1"/>
           </p:cNvPicPr>

--- a/答辩PPT.pptx
+++ b/答辩PPT.pptx
@@ -10871,7 +10871,7 @@
                 <a:latin typeface="微软雅黑" panose="020B0503020204020204" pitchFamily="34" charset="-122"/>
                 <a:ea typeface="微软雅黑" panose="020B0503020204020204" pitchFamily="34" charset="-122"/>
               </a:rPr>
-              <a:t>2、主要项目 · 抢票：放开抢转买</a:t>
+              <a:t>2、主要项目 · 抢票：支付宝（非黑名单）放开抢转买</a:t>
             </a:r>
             <a:endParaRPr lang="zh-CN" altLang="en-US" sz="2400" b="1" dirty="0">
               <a:solidFill>
@@ -10915,7 +10915,7 @@
                 <a:ea typeface="微软雅黑"/>
                 <a:cs typeface="微软雅黑"/>
               </a:rPr>
-              <a:t>用户妥协接受了替代方案，就该用更直接的方式出票</a:t>
+              <a:t>用户的让步，换的是“马上能出票”</a:t>
             </a:r>
           </a:p>
         </p:txBody>
@@ -10929,7 +10929,7 @@
         <p:spPr>
           <a:xfrm>
             <a:off x="457200" y="1554480"/>
-            <a:ext cx="5212080" cy="4526280"/>
+            <a:ext cx="3063240" cy="914400"/>
           </a:xfrm>
           <a:prstGeom prst="roundRect">
             <a:avLst>
@@ -10968,14 +10968,530 @@
       </p:sp>
       <p:sp>
         <p:nvSpPr>
-          <p:cNvPr id="5" name="TextBox 4"/>
+          <p:cNvPr id="5" name="icon-circle"/>
+          <p:cNvSpPr/>
+          <p:nvPr/>
+        </p:nvSpPr>
+        <p:spPr>
+          <a:xfrm>
+            <a:off x="685800" y="1737360"/>
+            <a:ext cx="548640" cy="548640"/>
+          </a:xfrm>
+          <a:prstGeom prst="ellipse">
+            <a:avLst/>
+          </a:prstGeom>
+          <a:solidFill>
+            <a:srgbClr val="287DFA"/>
+          </a:solidFill>
+          <a:ln>
+            <a:noFill/>
+          </a:ln>
+          <a:effectLst/>
+        </p:spPr>
+        <p:style>
+          <a:lnRef idx="1">
+            <a:schemeClr val="accent1"/>
+          </a:lnRef>
+          <a:fillRef idx="3">
+            <a:schemeClr val="accent1"/>
+          </a:fillRef>
+          <a:effectRef idx="2">
+            <a:schemeClr val="accent1"/>
+          </a:effectRef>
+          <a:fontRef idx="minor">
+            <a:schemeClr val="lt1"/>
+          </a:fontRef>
+        </p:style>
+        <p:txBody>
+          <a:bodyPr rtlCol="0" anchor="ctr"/>
+          <a:lstStyle/>
+          <a:p/>
+        </p:txBody>
+      </p:sp>
+      <p:pic>
+        <p:nvPicPr>
+          <p:cNvPr id="6" name="Picture 5" descr="FaListCheck_w.png"/>
+          <p:cNvPicPr>
+            <a:picLocks noChangeAspect="1"/>
+          </p:cNvPicPr>
+          <p:nvPr/>
+        </p:nvPicPr>
+        <p:blipFill>
+          <a:blip r:embed="rId3"/>
+          <a:stretch>
+            <a:fillRect/>
+          </a:stretch>
+        </p:blipFill>
+        <p:spPr>
+          <a:xfrm>
+            <a:off x="822960" y="1874519"/>
+            <a:ext cx="274320" cy="274320"/>
+          </a:xfrm>
+          <a:prstGeom prst="rect">
+            <a:avLst/>
+          </a:prstGeom>
+        </p:spPr>
+      </p:pic>
+      <p:sp>
+        <p:nvSpPr>
+          <p:cNvPr id="7" name="TextBox 6"/>
           <p:cNvSpPr txBox="1"/>
           <p:nvPr/>
         </p:nvSpPr>
         <p:spPr>
           <a:xfrm>
-            <a:off x="777240" y="1737360"/>
-            <a:ext cx="4572000" cy="411480"/>
+            <a:off x="1371600" y="1554480"/>
+            <a:ext cx="2057400" cy="914400"/>
+          </a:xfrm>
+          <a:prstGeom prst="rect">
+            <a:avLst/>
+          </a:prstGeom>
+          <a:noFill/>
+        </p:spPr>
+        <p:txBody>
+          <a:bodyPr wrap="square" lIns="0" rIns="0" tIns="0" bIns="0" anchor="ctr">
+            <a:spAutoFit/>
+          </a:bodyPr>
+          <a:lstStyle/>
+          <a:p>
+            <a:pPr algn="l"/>
+            <a:r>
+              <a:rPr sz="1400" b="1">
+                <a:solidFill>
+                  <a:srgbClr val="15315E"/>
+                </a:solidFill>
+                <a:latin typeface="微软雅黑"/>
+                <a:ea typeface="微软雅黑"/>
+                <a:cs typeface="微软雅黑"/>
+              </a:rPr>
+              <a:t>推荐可立即出票的</a:t>
+            </a:r>
+          </a:p>
+          <a:p>
+            <a:pPr algn="l">
+              <a:spcBef>
+                <a:spcPts val="0"/>
+              </a:spcBef>
+            </a:pPr>
+            <a:r>
+              <a:rPr sz="1400" b="1">
+                <a:solidFill>
+                  <a:srgbClr val="15315E"/>
+                </a:solidFill>
+                <a:latin typeface="微软雅黑"/>
+                <a:ea typeface="微软雅黑"/>
+                <a:cs typeface="微软雅黑"/>
+              </a:rPr>
+              <a:t>替代方案</a:t>
+            </a:r>
+          </a:p>
+        </p:txBody>
+      </p:sp>
+      <p:sp>
+        <p:nvSpPr>
+          <p:cNvPr id="8" name="Rounded Rectangle 7"/>
+          <p:cNvSpPr/>
+          <p:nvPr/>
+        </p:nvSpPr>
+        <p:spPr>
+          <a:xfrm>
+            <a:off x="3886200" y="1554480"/>
+            <a:ext cx="3063240" cy="914400"/>
+          </a:xfrm>
+          <a:prstGeom prst="roundRect">
+            <a:avLst>
+              <a:gd name="adj" fmla="val 6000"/>
+            </a:avLst>
+          </a:prstGeom>
+          <a:solidFill>
+            <a:srgbClr val="F5F9FF"/>
+          </a:solidFill>
+          <a:ln w="12700">
+            <a:solidFill>
+              <a:srgbClr val="D3E2FB"/>
+            </a:solidFill>
+          </a:ln>
+          <a:effectLst/>
+        </p:spPr>
+        <p:style>
+          <a:lnRef idx="1">
+            <a:schemeClr val="accent1"/>
+          </a:lnRef>
+          <a:fillRef idx="3">
+            <a:schemeClr val="accent1"/>
+          </a:fillRef>
+          <a:effectRef idx="2">
+            <a:schemeClr val="accent1"/>
+          </a:effectRef>
+          <a:fontRef idx="minor">
+            <a:schemeClr val="lt1"/>
+          </a:fontRef>
+        </p:style>
+        <p:txBody>
+          <a:bodyPr rtlCol="0" anchor="ctr"/>
+          <a:lstStyle/>
+          <a:p/>
+        </p:txBody>
+      </p:sp>
+      <p:sp>
+        <p:nvSpPr>
+          <p:cNvPr id="9" name="icon-circle"/>
+          <p:cNvSpPr/>
+          <p:nvPr/>
+        </p:nvSpPr>
+        <p:spPr>
+          <a:xfrm>
+            <a:off x="4114800" y="1737360"/>
+            <a:ext cx="548640" cy="548640"/>
+          </a:xfrm>
+          <a:prstGeom prst="ellipse">
+            <a:avLst/>
+          </a:prstGeom>
+          <a:solidFill>
+            <a:srgbClr val="287DFA"/>
+          </a:solidFill>
+          <a:ln>
+            <a:noFill/>
+          </a:ln>
+          <a:effectLst/>
+        </p:spPr>
+        <p:style>
+          <a:lnRef idx="1">
+            <a:schemeClr val="accent1"/>
+          </a:lnRef>
+          <a:fillRef idx="3">
+            <a:schemeClr val="accent1"/>
+          </a:fillRef>
+          <a:effectRef idx="2">
+            <a:schemeClr val="accent1"/>
+          </a:effectRef>
+          <a:fontRef idx="minor">
+            <a:schemeClr val="lt1"/>
+          </a:fontRef>
+        </p:style>
+        <p:txBody>
+          <a:bodyPr rtlCol="0" anchor="ctr"/>
+          <a:lstStyle/>
+          <a:p/>
+        </p:txBody>
+      </p:sp>
+      <p:pic>
+        <p:nvPicPr>
+          <p:cNvPr id="10" name="Picture 9" descr="FaUserCheck_w.png"/>
+          <p:cNvPicPr>
+            <a:picLocks noChangeAspect="1"/>
+          </p:cNvPicPr>
+          <p:nvPr/>
+        </p:nvPicPr>
+        <p:blipFill>
+          <a:blip r:embed="rId4"/>
+          <a:stretch>
+            <a:fillRect/>
+          </a:stretch>
+        </p:blipFill>
+        <p:spPr>
+          <a:xfrm>
+            <a:off x="4251960" y="1874519"/>
+            <a:ext cx="274320" cy="274320"/>
+          </a:xfrm>
+          <a:prstGeom prst="rect">
+            <a:avLst/>
+          </a:prstGeom>
+        </p:spPr>
+      </p:pic>
+      <p:sp>
+        <p:nvSpPr>
+          <p:cNvPr id="11" name="TextBox 10"/>
+          <p:cNvSpPr txBox="1"/>
+          <p:nvPr/>
+        </p:nvSpPr>
+        <p:spPr>
+          <a:xfrm>
+            <a:off x="4800600" y="1554480"/>
+            <a:ext cx="2057400" cy="914400"/>
+          </a:xfrm>
+          <a:prstGeom prst="rect">
+            <a:avLst/>
+          </a:prstGeom>
+          <a:noFill/>
+        </p:spPr>
+        <p:txBody>
+          <a:bodyPr wrap="square" lIns="0" rIns="0" tIns="0" bIns="0" anchor="ctr">
+            <a:spAutoFit/>
+          </a:bodyPr>
+          <a:lstStyle/>
+          <a:p>
+            <a:pPr algn="l"/>
+            <a:r>
+              <a:rPr sz="1400" b="1">
+                <a:solidFill>
+                  <a:srgbClr val="15315E"/>
+                </a:solidFill>
+                <a:latin typeface="微软雅黑"/>
+                <a:ea typeface="微软雅黑"/>
+                <a:cs typeface="微软雅黑"/>
+              </a:rPr>
+              <a:t>用户让步，</a:t>
+            </a:r>
+          </a:p>
+          <a:p>
+            <a:pPr algn="l">
+              <a:spcBef>
+                <a:spcPts val="0"/>
+              </a:spcBef>
+            </a:pPr>
+            <a:r>
+              <a:rPr sz="1400" b="1">
+                <a:solidFill>
+                  <a:srgbClr val="15315E"/>
+                </a:solidFill>
+                <a:latin typeface="微软雅黑"/>
+                <a:ea typeface="微软雅黑"/>
+                <a:cs typeface="微软雅黑"/>
+              </a:rPr>
+              <a:t>接受替代方案</a:t>
+            </a:r>
+          </a:p>
+        </p:txBody>
+      </p:sp>
+      <p:sp>
+        <p:nvSpPr>
+          <p:cNvPr id="12" name="arrow"/>
+          <p:cNvSpPr/>
+          <p:nvPr/>
+        </p:nvSpPr>
+        <p:spPr>
+          <a:xfrm>
+            <a:off x="3584448" y="1874519"/>
+            <a:ext cx="256032" cy="274320"/>
+          </a:xfrm>
+          <a:prstGeom prst="rightArrow">
+            <a:avLst/>
+          </a:prstGeom>
+          <a:solidFill>
+            <a:srgbClr val="D3E2FB"/>
+          </a:solidFill>
+          <a:ln>
+            <a:noFill/>
+          </a:ln>
+          <a:effectLst/>
+        </p:spPr>
+        <p:style>
+          <a:lnRef idx="1">
+            <a:schemeClr val="accent1"/>
+          </a:lnRef>
+          <a:fillRef idx="3">
+            <a:schemeClr val="accent1"/>
+          </a:fillRef>
+          <a:effectRef idx="2">
+            <a:schemeClr val="accent1"/>
+          </a:effectRef>
+          <a:fontRef idx="minor">
+            <a:schemeClr val="lt1"/>
+          </a:fontRef>
+        </p:style>
+        <p:txBody>
+          <a:bodyPr rtlCol="0" anchor="ctr"/>
+          <a:lstStyle/>
+          <a:p/>
+        </p:txBody>
+      </p:sp>
+      <p:cxnSp>
+        <p:nvCxnSpPr>
+          <p:cNvPr id="13" name="Connector 12"/>
+          <p:cNvCxnSpPr/>
+          <p:nvPr/>
+        </p:nvCxnSpPr>
+        <p:spPr>
+          <a:xfrm>
+            <a:off x="5413248" y="2468880"/>
+            <a:ext cx="0" cy="274320"/>
+          </a:xfrm>
+          <a:prstGeom prst="line">
+            <a:avLst/>
+          </a:prstGeom>
+          <a:ln w="19050">
+            <a:solidFill>
+              <a:srgbClr val="287DFA"/>
+            </a:solidFill>
+          </a:ln>
+        </p:spPr>
+        <p:style>
+          <a:lnRef idx="2">
+            <a:schemeClr val="accent1"/>
+          </a:lnRef>
+          <a:fillRef idx="0">
+            <a:schemeClr val="accent1"/>
+          </a:fillRef>
+          <a:effectRef idx="1">
+            <a:schemeClr val="accent1"/>
+          </a:effectRef>
+          <a:fontRef idx="minor">
+            <a:schemeClr val="tx1"/>
+          </a:fontRef>
+        </p:style>
+      </p:cxnSp>
+      <p:cxnSp>
+        <p:nvCxnSpPr>
+          <p:cNvPr id="14" name="Connector 13"/>
+          <p:cNvCxnSpPr/>
+          <p:nvPr/>
+        </p:nvCxnSpPr>
+        <p:spPr>
+          <a:xfrm>
+            <a:off x="1984248" y="2743200"/>
+            <a:ext cx="3429000" cy="0"/>
+          </a:xfrm>
+          <a:prstGeom prst="line">
+            <a:avLst/>
+          </a:prstGeom>
+          <a:ln w="19050">
+            <a:solidFill>
+              <a:srgbClr val="287DFA"/>
+            </a:solidFill>
+          </a:ln>
+        </p:spPr>
+        <p:style>
+          <a:lnRef idx="2">
+            <a:schemeClr val="accent1"/>
+          </a:lnRef>
+          <a:fillRef idx="0">
+            <a:schemeClr val="accent1"/>
+          </a:fillRef>
+          <a:effectRef idx="1">
+            <a:schemeClr val="accent1"/>
+          </a:effectRef>
+          <a:fontRef idx="minor">
+            <a:schemeClr val="tx1"/>
+          </a:fontRef>
+        </p:style>
+      </p:cxnSp>
+      <p:cxnSp>
+        <p:nvCxnSpPr>
+          <p:cNvPr id="15" name="Connector 14"/>
+          <p:cNvCxnSpPr/>
+          <p:nvPr/>
+        </p:nvCxnSpPr>
+        <p:spPr>
+          <a:xfrm>
+            <a:off x="1984248" y="2743200"/>
+            <a:ext cx="0" cy="228600"/>
+          </a:xfrm>
+          <a:prstGeom prst="line">
+            <a:avLst/>
+          </a:prstGeom>
+          <a:ln w="19050">
+            <a:solidFill>
+              <a:srgbClr val="7A8599"/>
+            </a:solidFill>
+          </a:ln>
+        </p:spPr>
+        <p:style>
+          <a:lnRef idx="2">
+            <a:schemeClr val="accent1"/>
+          </a:lnRef>
+          <a:fillRef idx="0">
+            <a:schemeClr val="accent1"/>
+          </a:fillRef>
+          <a:effectRef idx="1">
+            <a:schemeClr val="accent1"/>
+          </a:effectRef>
+          <a:fontRef idx="minor">
+            <a:schemeClr val="tx1"/>
+          </a:fontRef>
+        </p:style>
+      </p:cxnSp>
+      <p:cxnSp>
+        <p:nvCxnSpPr>
+          <p:cNvPr id="16" name="Connector 15"/>
+          <p:cNvCxnSpPr/>
+          <p:nvPr/>
+        </p:nvCxnSpPr>
+        <p:spPr>
+          <a:xfrm>
+            <a:off x="5413248" y="2743200"/>
+            <a:ext cx="0" cy="228600"/>
+          </a:xfrm>
+          <a:prstGeom prst="line">
+            <a:avLst/>
+          </a:prstGeom>
+          <a:ln w="19050">
+            <a:solidFill>
+              <a:srgbClr val="287DFA"/>
+            </a:solidFill>
+          </a:ln>
+        </p:spPr>
+        <p:style>
+          <a:lnRef idx="2">
+            <a:schemeClr val="accent1"/>
+          </a:lnRef>
+          <a:fillRef idx="0">
+            <a:schemeClr val="accent1"/>
+          </a:fillRef>
+          <a:effectRef idx="1">
+            <a:schemeClr val="accent1"/>
+          </a:effectRef>
+          <a:fontRef idx="minor">
+            <a:schemeClr val="tx1"/>
+          </a:fontRef>
+        </p:style>
+      </p:cxnSp>
+      <p:sp>
+        <p:nvSpPr>
+          <p:cNvPr id="17" name="Rounded Rectangle 16"/>
+          <p:cNvSpPr/>
+          <p:nvPr/>
+        </p:nvSpPr>
+        <p:spPr>
+          <a:xfrm>
+            <a:off x="457200" y="2971800"/>
+            <a:ext cx="3063240" cy="3108960"/>
+          </a:xfrm>
+          <a:prstGeom prst="roundRect">
+            <a:avLst>
+              <a:gd name="adj" fmla="val 6000"/>
+            </a:avLst>
+          </a:prstGeom>
+          <a:solidFill>
+            <a:srgbClr val="F5F9FF"/>
+          </a:solidFill>
+          <a:ln w="12700">
+            <a:solidFill>
+              <a:srgbClr val="D3E2FB"/>
+            </a:solidFill>
+          </a:ln>
+          <a:effectLst/>
+        </p:spPr>
+        <p:style>
+          <a:lnRef idx="1">
+            <a:schemeClr val="accent1"/>
+          </a:lnRef>
+          <a:fillRef idx="3">
+            <a:schemeClr val="accent1"/>
+          </a:fillRef>
+          <a:effectRef idx="2">
+            <a:schemeClr val="accent1"/>
+          </a:effectRef>
+          <a:fontRef idx="minor">
+            <a:schemeClr val="lt1"/>
+          </a:fontRef>
+        </p:style>
+        <p:txBody>
+          <a:bodyPr rtlCol="0" anchor="ctr"/>
+          <a:lstStyle/>
+          <a:p/>
+        </p:txBody>
+      </p:sp>
+      <p:sp>
+        <p:nvSpPr>
+          <p:cNvPr id="18" name="TextBox 17"/>
+          <p:cNvSpPr txBox="1"/>
+          <p:nvPr/>
+        </p:nvSpPr>
+        <p:spPr>
+          <a:xfrm>
+            <a:off x="731520" y="3127248"/>
+            <a:ext cx="2560320" cy="365760"/>
           </a:xfrm>
           <a:prstGeom prst="rect">
             <a:avLst/>
@@ -10990,7 +11506,7 @@
           <a:p>
             <a:pPr algn="l"/>
             <a:r>
-              <a:rPr sz="2000" b="1">
+              <a:rPr sz="1800" b="1">
                 <a:solidFill>
                   <a:srgbClr val="7A8599"/>
                 </a:solidFill>
@@ -11005,14 +11521,14 @@
       </p:sp>
       <p:sp>
         <p:nvSpPr>
-          <p:cNvPr id="6" name="icon-circle"/>
+          <p:cNvPr id="19" name="icon-circle"/>
           <p:cNvSpPr/>
           <p:nvPr/>
         </p:nvSpPr>
         <p:spPr>
           <a:xfrm>
-            <a:off x="777240" y="2377440"/>
-            <a:ext cx="548640" cy="548640"/>
+            <a:off x="731520" y="3703320"/>
+            <a:ext cx="640080" cy="640080"/>
           </a:xfrm>
           <a:prstGeom prst="ellipse">
             <a:avLst/>
@@ -11047,283 +11563,7 @@
       </p:sp>
       <p:pic>
         <p:nvPicPr>
-          <p:cNvPr id="7" name="Picture 6" descr="FaListCheck_w.png"/>
-          <p:cNvPicPr>
-            <a:picLocks noChangeAspect="1"/>
-          </p:cNvPicPr>
-          <p:nvPr/>
-        </p:nvPicPr>
-        <p:blipFill>
-          <a:blip r:embed="rId3"/>
-          <a:stretch>
-            <a:fillRect/>
-          </a:stretch>
-        </p:blipFill>
-        <p:spPr>
-          <a:xfrm>
-            <a:off x="914400" y="2514600"/>
-            <a:ext cx="274320" cy="274320"/>
-          </a:xfrm>
-          <a:prstGeom prst="rect">
-            <a:avLst/>
-          </a:prstGeom>
-        </p:spPr>
-      </p:pic>
-      <p:sp>
-        <p:nvSpPr>
-          <p:cNvPr id="8" name="TextBox 7"/>
-          <p:cNvSpPr txBox="1"/>
-          <p:nvPr/>
-        </p:nvSpPr>
-        <p:spPr>
-          <a:xfrm>
-            <a:off x="1508760" y="2359152"/>
-            <a:ext cx="3931920" cy="594360"/>
-          </a:xfrm>
-          <a:prstGeom prst="rect">
-            <a:avLst/>
-          </a:prstGeom>
-          <a:noFill/>
-        </p:spPr>
-        <p:txBody>
-          <a:bodyPr wrap="square" lIns="0" rIns="0" tIns="0" bIns="0" anchor="ctr">
-            <a:spAutoFit/>
-          </a:bodyPr>
-          <a:lstStyle/>
-          <a:p>
-            <a:pPr algn="l"/>
-            <a:r>
-              <a:rPr sz="1400" b="0">
-                <a:solidFill>
-                  <a:srgbClr val="3D4757"/>
-                </a:solidFill>
-                <a:latin typeface="微软雅黑"/>
-                <a:ea typeface="微软雅黑"/>
-                <a:cs typeface="微软雅黑"/>
-              </a:rPr>
-              <a:t>抢必走 / YOYO 有票方案页，推荐可立即出票的替代方案</a:t>
-            </a:r>
-          </a:p>
-        </p:txBody>
-      </p:sp>
-      <p:cxnSp>
-        <p:nvCxnSpPr>
-          <p:cNvPr id="9" name="Connector 8"/>
-          <p:cNvCxnSpPr/>
-          <p:nvPr/>
-        </p:nvCxnSpPr>
-        <p:spPr>
-          <a:xfrm>
-            <a:off x="1051560" y="2944368"/>
-            <a:ext cx="0" cy="329184"/>
-          </a:xfrm>
-          <a:prstGeom prst="line">
-            <a:avLst/>
-          </a:prstGeom>
-          <a:ln w="19050">
-            <a:solidFill>
-              <a:srgbClr val="7A8599"/>
-            </a:solidFill>
-          </a:ln>
-        </p:spPr>
-        <p:style>
-          <a:lnRef idx="2">
-            <a:schemeClr val="accent1"/>
-          </a:lnRef>
-          <a:fillRef idx="0">
-            <a:schemeClr val="accent1"/>
-          </a:fillRef>
-          <a:effectRef idx="1">
-            <a:schemeClr val="accent1"/>
-          </a:effectRef>
-          <a:fontRef idx="minor">
-            <a:schemeClr val="tx1"/>
-          </a:fontRef>
-        </p:style>
-      </p:cxnSp>
-      <p:sp>
-        <p:nvSpPr>
-          <p:cNvPr id="10" name="icon-circle"/>
-          <p:cNvSpPr/>
-          <p:nvPr/>
-        </p:nvSpPr>
-        <p:spPr>
-          <a:xfrm>
-            <a:off x="777240" y="3291840"/>
-            <a:ext cx="548640" cy="548640"/>
-          </a:xfrm>
-          <a:prstGeom prst="ellipse">
-            <a:avLst/>
-          </a:prstGeom>
-          <a:solidFill>
-            <a:srgbClr val="7A8599"/>
-          </a:solidFill>
-          <a:ln>
-            <a:noFill/>
-          </a:ln>
-          <a:effectLst/>
-        </p:spPr>
-        <p:style>
-          <a:lnRef idx="1">
-            <a:schemeClr val="accent1"/>
-          </a:lnRef>
-          <a:fillRef idx="3">
-            <a:schemeClr val="accent1"/>
-          </a:fillRef>
-          <a:effectRef idx="2">
-            <a:schemeClr val="accent1"/>
-          </a:effectRef>
-          <a:fontRef idx="minor">
-            <a:schemeClr val="lt1"/>
-          </a:fontRef>
-        </p:style>
-        <p:txBody>
-          <a:bodyPr rtlCol="0" anchor="ctr"/>
-          <a:lstStyle/>
-          <a:p/>
-        </p:txBody>
-      </p:sp>
-      <p:pic>
-        <p:nvPicPr>
-          <p:cNvPr id="11" name="Picture 10" descr="FaUserCheck_w.png"/>
-          <p:cNvPicPr>
-            <a:picLocks noChangeAspect="1"/>
-          </p:cNvPicPr>
-          <p:nvPr/>
-        </p:nvPicPr>
-        <p:blipFill>
-          <a:blip r:embed="rId4"/>
-          <a:stretch>
-            <a:fillRect/>
-          </a:stretch>
-        </p:blipFill>
-        <p:spPr>
-          <a:xfrm>
-            <a:off x="914400" y="3429000"/>
-            <a:ext cx="274320" cy="274320"/>
-          </a:xfrm>
-          <a:prstGeom prst="rect">
-            <a:avLst/>
-          </a:prstGeom>
-        </p:spPr>
-      </p:pic>
-      <p:sp>
-        <p:nvSpPr>
-          <p:cNvPr id="12" name="TextBox 11"/>
-          <p:cNvSpPr txBox="1"/>
-          <p:nvPr/>
-        </p:nvSpPr>
-        <p:spPr>
-          <a:xfrm>
-            <a:off x="1508760" y="3273552"/>
-            <a:ext cx="3931920" cy="594360"/>
-          </a:xfrm>
-          <a:prstGeom prst="rect">
-            <a:avLst/>
-          </a:prstGeom>
-          <a:noFill/>
-        </p:spPr>
-        <p:txBody>
-          <a:bodyPr wrap="square" lIns="0" rIns="0" tIns="0" bIns="0" anchor="ctr">
-            <a:spAutoFit/>
-          </a:bodyPr>
-          <a:lstStyle/>
-          <a:p>
-            <a:pPr algn="l"/>
-            <a:r>
-              <a:rPr sz="1400" b="0">
-                <a:solidFill>
-                  <a:srgbClr val="3D4757"/>
-                </a:solidFill>
-                <a:latin typeface="微软雅黑"/>
-                <a:ea typeface="微软雅黑"/>
-                <a:cs typeface="微软雅黑"/>
-              </a:rPr>
-              <a:t>用户妥协，接受替代方案</a:t>
-            </a:r>
-          </a:p>
-        </p:txBody>
-      </p:sp>
-      <p:cxnSp>
-        <p:nvCxnSpPr>
-          <p:cNvPr id="13" name="Connector 12"/>
-          <p:cNvCxnSpPr/>
-          <p:nvPr/>
-        </p:nvCxnSpPr>
-        <p:spPr>
-          <a:xfrm>
-            <a:off x="1051560" y="3858768"/>
-            <a:ext cx="0" cy="329184"/>
-          </a:xfrm>
-          <a:prstGeom prst="line">
-            <a:avLst/>
-          </a:prstGeom>
-          <a:ln w="19050">
-            <a:solidFill>
-              <a:srgbClr val="7A8599"/>
-            </a:solidFill>
-          </a:ln>
-        </p:spPr>
-        <p:style>
-          <a:lnRef idx="2">
-            <a:schemeClr val="accent1"/>
-          </a:lnRef>
-          <a:fillRef idx="0">
-            <a:schemeClr val="accent1"/>
-          </a:fillRef>
-          <a:effectRef idx="1">
-            <a:schemeClr val="accent1"/>
-          </a:effectRef>
-          <a:fontRef idx="minor">
-            <a:schemeClr val="tx1"/>
-          </a:fontRef>
-        </p:style>
-      </p:cxnSp>
-      <p:sp>
-        <p:nvSpPr>
-          <p:cNvPr id="14" name="icon-circle"/>
-          <p:cNvSpPr/>
-          <p:nvPr/>
-        </p:nvSpPr>
-        <p:spPr>
-          <a:xfrm>
-            <a:off x="777240" y="4206240"/>
-            <a:ext cx="548640" cy="548640"/>
-          </a:xfrm>
-          <a:prstGeom prst="ellipse">
-            <a:avLst/>
-          </a:prstGeom>
-          <a:solidFill>
-            <a:srgbClr val="7A8599"/>
-          </a:solidFill>
-          <a:ln>
-            <a:noFill/>
-          </a:ln>
-          <a:effectLst/>
-        </p:spPr>
-        <p:style>
-          <a:lnRef idx="1">
-            <a:schemeClr val="accent1"/>
-          </a:lnRef>
-          <a:fillRef idx="3">
-            <a:schemeClr val="accent1"/>
-          </a:fillRef>
-          <a:effectRef idx="2">
-            <a:schemeClr val="accent1"/>
-          </a:effectRef>
-          <a:fontRef idx="minor">
-            <a:schemeClr val="lt1"/>
-          </a:fontRef>
-        </p:style>
-        <p:txBody>
-          <a:bodyPr rtlCol="0" anchor="ctr"/>
-          <a:lstStyle/>
-          <a:p/>
-        </p:txBody>
-      </p:sp>
-      <p:pic>
-        <p:nvPicPr>
-          <p:cNvPr id="15" name="Picture 14" descr="FaRotate_w.png"/>
+          <p:cNvPr id="20" name="Picture 19" descr="FaRotate_w.png"/>
           <p:cNvPicPr>
             <a:picLocks noChangeAspect="1"/>
           </p:cNvPicPr>
@@ -11337,8 +11577,8 @@
         </p:blipFill>
         <p:spPr>
           <a:xfrm>
-            <a:off x="914400" y="4343400"/>
-            <a:ext cx="274320" cy="274320"/>
+            <a:off x="891540" y="3863339"/>
+            <a:ext cx="320040" cy="320040"/>
           </a:xfrm>
           <a:prstGeom prst="rect">
             <a:avLst/>
@@ -11347,14 +11587,14 @@
       </p:pic>
       <p:sp>
         <p:nvSpPr>
-          <p:cNvPr id="16" name="TextBox 15"/>
+          <p:cNvPr id="21" name="TextBox 20"/>
           <p:cNvSpPr txBox="1"/>
           <p:nvPr/>
         </p:nvSpPr>
         <p:spPr>
           <a:xfrm>
-            <a:off x="1508760" y="4187952"/>
-            <a:ext cx="3931920" cy="594360"/>
+            <a:off x="1508760" y="3657600"/>
+            <a:ext cx="1874519" cy="731520"/>
           </a:xfrm>
           <a:prstGeom prst="rect">
             <a:avLst/>
@@ -11369,7 +11609,7 @@
           <a:p>
             <a:pPr algn="l"/>
             <a:r>
-              <a:rPr sz="1400" b="0">
+              <a:rPr sz="1500" b="1">
                 <a:solidFill>
                   <a:srgbClr val="3D4757"/>
                 </a:solidFill>
@@ -11384,18 +11624,18 @@
       </p:sp>
       <p:sp>
         <p:nvSpPr>
-          <p:cNvPr id="17" name="Rounded Rectangle 16"/>
+          <p:cNvPr id="22" name="Rounded Rectangle 21"/>
           <p:cNvSpPr/>
           <p:nvPr/>
         </p:nvSpPr>
         <p:spPr>
           <a:xfrm>
-            <a:off x="777240" y="5166360"/>
-            <a:ext cx="4572000" cy="685800"/>
+            <a:off x="731520" y="4983480"/>
+            <a:ext cx="2514600" cy="640080"/>
           </a:xfrm>
           <a:prstGeom prst="roundRect">
             <a:avLst>
-              <a:gd name="adj" fmla="val 6000"/>
+              <a:gd name="adj" fmla="val 30000"/>
             </a:avLst>
           </a:prstGeom>
           <a:solidFill>
@@ -11430,14 +11670,14 @@
       </p:sp>
       <p:sp>
         <p:nvSpPr>
-          <p:cNvPr id="18" name="TextBox 17"/>
+          <p:cNvPr id="23" name="TextBox 22"/>
           <p:cNvSpPr txBox="1"/>
           <p:nvPr/>
         </p:nvSpPr>
         <p:spPr>
           <a:xfrm>
-            <a:off x="914400" y="5166360"/>
-            <a:ext cx="4297680" cy="685800"/>
+            <a:off x="731520" y="4983480"/>
+            <a:ext cx="2514600" cy="640080"/>
           </a:xfrm>
           <a:prstGeom prst="rect">
             <a:avLst/>
@@ -11450,7 +11690,7 @@
           </a:bodyPr>
           <a:lstStyle/>
           <a:p>
-            <a:pPr algn="l"/>
+            <a:pPr algn="ctr"/>
             <a:r>
               <a:rPr sz="1400" b="1">
                 <a:solidFill>
@@ -11460,21 +11700,21 @@
                 <a:ea typeface="微软雅黑"/>
                 <a:cs typeface="微软雅黑"/>
               </a:rPr>
-              <a:t>出票概率【待补充】，用户预期落空，体验较差</a:t>
+              <a:t>出票概率【待补充】</a:t>
             </a:r>
           </a:p>
         </p:txBody>
       </p:sp>
       <p:sp>
         <p:nvSpPr>
-          <p:cNvPr id="19" name="Rounded Rectangle 18"/>
+          <p:cNvPr id="24" name="Rounded Rectangle 23"/>
           <p:cNvSpPr/>
           <p:nvPr/>
         </p:nvSpPr>
         <p:spPr>
           <a:xfrm>
-            <a:off x="6519672" y="1554480"/>
-            <a:ext cx="5212080" cy="4526280"/>
+            <a:off x="3886200" y="2971800"/>
+            <a:ext cx="3063240" cy="3108960"/>
           </a:xfrm>
           <a:prstGeom prst="roundRect">
             <a:avLst>
@@ -11513,14 +11753,14 @@
       </p:sp>
       <p:sp>
         <p:nvSpPr>
-          <p:cNvPr id="20" name="TextBox 19"/>
+          <p:cNvPr id="25" name="TextBox 24"/>
           <p:cNvSpPr txBox="1"/>
           <p:nvPr/>
         </p:nvSpPr>
         <p:spPr>
           <a:xfrm>
-            <a:off x="6839712" y="1737360"/>
-            <a:ext cx="4572000" cy="411480"/>
+            <a:off x="4160520" y="3127248"/>
+            <a:ext cx="2560320" cy="365760"/>
           </a:xfrm>
           <a:prstGeom prst="rect">
             <a:avLst/>
@@ -11535,7 +11775,7 @@
           <a:p>
             <a:pPr algn="l"/>
             <a:r>
-              <a:rPr sz="2000" b="1">
+              <a:rPr sz="1800" b="1">
                 <a:solidFill>
                   <a:srgbClr val="287DFA"/>
                 </a:solidFill>
@@ -11550,14 +11790,14 @@
       </p:sp>
       <p:sp>
         <p:nvSpPr>
-          <p:cNvPr id="21" name="icon-circle"/>
+          <p:cNvPr id="26" name="icon-circle"/>
           <p:cNvSpPr/>
           <p:nvPr/>
         </p:nvSpPr>
         <p:spPr>
           <a:xfrm>
-            <a:off x="6839712" y="2377440"/>
-            <a:ext cx="548640" cy="548640"/>
+            <a:off x="4160520" y="3703320"/>
+            <a:ext cx="640080" cy="640080"/>
           </a:xfrm>
           <a:prstGeom prst="ellipse">
             <a:avLst/>
@@ -11592,283 +11832,7 @@
       </p:sp>
       <p:pic>
         <p:nvPicPr>
-          <p:cNvPr id="22" name="Picture 21" descr="FaListCheck_w.png"/>
-          <p:cNvPicPr>
-            <a:picLocks noChangeAspect="1"/>
-          </p:cNvPicPr>
-          <p:nvPr/>
-        </p:nvPicPr>
-        <p:blipFill>
-          <a:blip r:embed="rId3"/>
-          <a:stretch>
-            <a:fillRect/>
-          </a:stretch>
-        </p:blipFill>
-        <p:spPr>
-          <a:xfrm>
-            <a:off x="6976872" y="2514600"/>
-            <a:ext cx="274320" cy="274320"/>
-          </a:xfrm>
-          <a:prstGeom prst="rect">
-            <a:avLst/>
-          </a:prstGeom>
-        </p:spPr>
-      </p:pic>
-      <p:sp>
-        <p:nvSpPr>
-          <p:cNvPr id="23" name="TextBox 22"/>
-          <p:cNvSpPr txBox="1"/>
-          <p:nvPr/>
-        </p:nvSpPr>
-        <p:spPr>
-          <a:xfrm>
-            <a:off x="7571231" y="2359152"/>
-            <a:ext cx="3931920" cy="594360"/>
-          </a:xfrm>
-          <a:prstGeom prst="rect">
-            <a:avLst/>
-          </a:prstGeom>
-          <a:noFill/>
-        </p:spPr>
-        <p:txBody>
-          <a:bodyPr wrap="square" lIns="0" rIns="0" tIns="0" bIns="0" anchor="ctr">
-            <a:spAutoFit/>
-          </a:bodyPr>
-          <a:lstStyle/>
-          <a:p>
-            <a:pPr algn="l"/>
-            <a:r>
-              <a:rPr sz="1400" b="0">
-                <a:solidFill>
-                  <a:srgbClr val="3D4757"/>
-                </a:solidFill>
-                <a:latin typeface="微软雅黑"/>
-                <a:ea typeface="微软雅黑"/>
-                <a:cs typeface="微软雅黑"/>
-              </a:rPr>
-              <a:t>同样推荐可立即出票的替代方案</a:t>
-            </a:r>
-          </a:p>
-        </p:txBody>
-      </p:sp>
-      <p:cxnSp>
-        <p:nvCxnSpPr>
-          <p:cNvPr id="24" name="Connector 23"/>
-          <p:cNvCxnSpPr/>
-          <p:nvPr/>
-        </p:nvCxnSpPr>
-        <p:spPr>
-          <a:xfrm>
-            <a:off x="7114032" y="2944368"/>
-            <a:ext cx="0" cy="329184"/>
-          </a:xfrm>
-          <a:prstGeom prst="line">
-            <a:avLst/>
-          </a:prstGeom>
-          <a:ln w="19050">
-            <a:solidFill>
-              <a:srgbClr val="287DFA"/>
-            </a:solidFill>
-          </a:ln>
-        </p:spPr>
-        <p:style>
-          <a:lnRef idx="2">
-            <a:schemeClr val="accent1"/>
-          </a:lnRef>
-          <a:fillRef idx="0">
-            <a:schemeClr val="accent1"/>
-          </a:fillRef>
-          <a:effectRef idx="1">
-            <a:schemeClr val="accent1"/>
-          </a:effectRef>
-          <a:fontRef idx="minor">
-            <a:schemeClr val="tx1"/>
-          </a:fontRef>
-        </p:style>
-      </p:cxnSp>
-      <p:sp>
-        <p:nvSpPr>
-          <p:cNvPr id="25" name="icon-circle"/>
-          <p:cNvSpPr/>
-          <p:nvPr/>
-        </p:nvSpPr>
-        <p:spPr>
-          <a:xfrm>
-            <a:off x="6839712" y="3291840"/>
-            <a:ext cx="548640" cy="548640"/>
-          </a:xfrm>
-          <a:prstGeom prst="ellipse">
-            <a:avLst/>
-          </a:prstGeom>
-          <a:solidFill>
-            <a:srgbClr val="287DFA"/>
-          </a:solidFill>
-          <a:ln>
-            <a:noFill/>
-          </a:ln>
-          <a:effectLst/>
-        </p:spPr>
-        <p:style>
-          <a:lnRef idx="1">
-            <a:schemeClr val="accent1"/>
-          </a:lnRef>
-          <a:fillRef idx="3">
-            <a:schemeClr val="accent1"/>
-          </a:fillRef>
-          <a:effectRef idx="2">
-            <a:schemeClr val="accent1"/>
-          </a:effectRef>
-          <a:fontRef idx="minor">
-            <a:schemeClr val="lt1"/>
-          </a:fontRef>
-        </p:style>
-        <p:txBody>
-          <a:bodyPr rtlCol="0" anchor="ctr"/>
-          <a:lstStyle/>
-          <a:p/>
-        </p:txBody>
-      </p:sp>
-      <p:pic>
-        <p:nvPicPr>
-          <p:cNvPr id="26" name="Picture 25" descr="FaUserCheck_w.png"/>
-          <p:cNvPicPr>
-            <a:picLocks noChangeAspect="1"/>
-          </p:cNvPicPr>
-          <p:nvPr/>
-        </p:nvPicPr>
-        <p:blipFill>
-          <a:blip r:embed="rId4"/>
-          <a:stretch>
-            <a:fillRect/>
-          </a:stretch>
-        </p:blipFill>
-        <p:spPr>
-          <a:xfrm>
-            <a:off x="6976872" y="3429000"/>
-            <a:ext cx="274320" cy="274320"/>
-          </a:xfrm>
-          <a:prstGeom prst="rect">
-            <a:avLst/>
-          </a:prstGeom>
-        </p:spPr>
-      </p:pic>
-      <p:sp>
-        <p:nvSpPr>
-          <p:cNvPr id="27" name="TextBox 26"/>
-          <p:cNvSpPr txBox="1"/>
-          <p:nvPr/>
-        </p:nvSpPr>
-        <p:spPr>
-          <a:xfrm>
-            <a:off x="7571231" y="3273552"/>
-            <a:ext cx="3931920" cy="594360"/>
-          </a:xfrm>
-          <a:prstGeom prst="rect">
-            <a:avLst/>
-          </a:prstGeom>
-          <a:noFill/>
-        </p:spPr>
-        <p:txBody>
-          <a:bodyPr wrap="square" lIns="0" rIns="0" tIns="0" bIns="0" anchor="ctr">
-            <a:spAutoFit/>
-          </a:bodyPr>
-          <a:lstStyle/>
-          <a:p>
-            <a:pPr algn="l"/>
-            <a:r>
-              <a:rPr sz="1400" b="0">
-                <a:solidFill>
-                  <a:srgbClr val="3D4757"/>
-                </a:solidFill>
-                <a:latin typeface="微软雅黑"/>
-                <a:ea typeface="微软雅黑"/>
-                <a:cs typeface="微软雅黑"/>
-              </a:rPr>
-              <a:t>支付宝（非黑名单）订单，用户接受方案</a:t>
-            </a:r>
-          </a:p>
-        </p:txBody>
-      </p:sp>
-      <p:cxnSp>
-        <p:nvCxnSpPr>
-          <p:cNvPr id="28" name="Connector 27"/>
-          <p:cNvCxnSpPr/>
-          <p:nvPr/>
-        </p:nvCxnSpPr>
-        <p:spPr>
-          <a:xfrm>
-            <a:off x="7114032" y="3858768"/>
-            <a:ext cx="0" cy="329184"/>
-          </a:xfrm>
-          <a:prstGeom prst="line">
-            <a:avLst/>
-          </a:prstGeom>
-          <a:ln w="19050">
-            <a:solidFill>
-              <a:srgbClr val="287DFA"/>
-            </a:solidFill>
-          </a:ln>
-        </p:spPr>
-        <p:style>
-          <a:lnRef idx="2">
-            <a:schemeClr val="accent1"/>
-          </a:lnRef>
-          <a:fillRef idx="0">
-            <a:schemeClr val="accent1"/>
-          </a:fillRef>
-          <a:effectRef idx="1">
-            <a:schemeClr val="accent1"/>
-          </a:effectRef>
-          <a:fontRef idx="minor">
-            <a:schemeClr val="tx1"/>
-          </a:fontRef>
-        </p:style>
-      </p:cxnSp>
-      <p:sp>
-        <p:nvSpPr>
-          <p:cNvPr id="29" name="icon-circle"/>
-          <p:cNvSpPr/>
-          <p:nvPr/>
-        </p:nvSpPr>
-        <p:spPr>
-          <a:xfrm>
-            <a:off x="6839712" y="4206240"/>
-            <a:ext cx="548640" cy="548640"/>
-          </a:xfrm>
-          <a:prstGeom prst="ellipse">
-            <a:avLst/>
-          </a:prstGeom>
-          <a:solidFill>
-            <a:srgbClr val="287DFA"/>
-          </a:solidFill>
-          <a:ln>
-            <a:noFill/>
-          </a:ln>
-          <a:effectLst/>
-        </p:spPr>
-        <p:style>
-          <a:lnRef idx="1">
-            <a:schemeClr val="accent1"/>
-          </a:lnRef>
-          <a:fillRef idx="3">
-            <a:schemeClr val="accent1"/>
-          </a:fillRef>
-          <a:effectRef idx="2">
-            <a:schemeClr val="accent1"/>
-          </a:effectRef>
-          <a:fontRef idx="minor">
-            <a:schemeClr val="lt1"/>
-          </a:fontRef>
-        </p:style>
-        <p:txBody>
-          <a:bodyPr rtlCol="0" anchor="ctr"/>
-          <a:lstStyle/>
-          <a:p/>
-        </p:txBody>
-      </p:sp>
-      <p:pic>
-        <p:nvPicPr>
-          <p:cNvPr id="30" name="Picture 29" descr="FaTicket_w.png"/>
+          <p:cNvPr id="27" name="Picture 26" descr="FaTicket_w.png"/>
           <p:cNvPicPr>
             <a:picLocks noChangeAspect="1"/>
           </p:cNvPicPr>
@@ -11882,8 +11846,8 @@
         </p:blipFill>
         <p:spPr>
           <a:xfrm>
-            <a:off x="6976872" y="4343400"/>
-            <a:ext cx="274320" cy="274320"/>
+            <a:off x="4320540" y="3863339"/>
+            <a:ext cx="320040" cy="320040"/>
           </a:xfrm>
           <a:prstGeom prst="rect">
             <a:avLst/>
@@ -11892,14 +11856,14 @@
       </p:pic>
       <p:sp>
         <p:nvSpPr>
-          <p:cNvPr id="31" name="TextBox 30"/>
+          <p:cNvPr id="28" name="TextBox 27"/>
           <p:cNvSpPr txBox="1"/>
           <p:nvPr/>
         </p:nvSpPr>
         <p:spPr>
           <a:xfrm>
-            <a:off x="7571231" y="4187952"/>
-            <a:ext cx="3931920" cy="594360"/>
+            <a:off x="4937760" y="3657600"/>
+            <a:ext cx="1874519" cy="731520"/>
           </a:xfrm>
           <a:prstGeom prst="rect">
             <a:avLst/>
@@ -11914,7 +11878,7 @@
           <a:p>
             <a:pPr algn="l"/>
             <a:r>
-              <a:rPr sz="1400" b="0">
+              <a:rPr sz="1500" b="1">
                 <a:solidFill>
                   <a:srgbClr val="3D4757"/>
                 </a:solidFill>
@@ -11929,18 +11893,18 @@
       </p:sp>
       <p:sp>
         <p:nvSpPr>
-          <p:cNvPr id="32" name="Rounded Rectangle 31"/>
+          <p:cNvPr id="29" name="Rounded Rectangle 28"/>
           <p:cNvSpPr/>
           <p:nvPr/>
         </p:nvSpPr>
         <p:spPr>
           <a:xfrm>
-            <a:off x="6839712" y="5166360"/>
-            <a:ext cx="4572000" cy="685800"/>
+            <a:off x="4160520" y="4983480"/>
+            <a:ext cx="2514600" cy="640080"/>
           </a:xfrm>
           <a:prstGeom prst="roundRect">
             <a:avLst>
-              <a:gd name="adj" fmla="val 6000"/>
+              <a:gd name="adj" fmla="val 30000"/>
             </a:avLst>
           </a:prstGeom>
           <a:solidFill>
@@ -11975,14 +11939,14 @@
       </p:sp>
       <p:sp>
         <p:nvSpPr>
-          <p:cNvPr id="33" name="TextBox 32"/>
+          <p:cNvPr id="30" name="TextBox 29"/>
           <p:cNvSpPr txBox="1"/>
           <p:nvPr/>
         </p:nvSpPr>
         <p:spPr>
           <a:xfrm>
-            <a:off x="6976872" y="5166360"/>
-            <a:ext cx="4297680" cy="685800"/>
+            <a:off x="4160520" y="4983480"/>
+            <a:ext cx="2514600" cy="640080"/>
           </a:xfrm>
           <a:prstGeom prst="rect">
             <a:avLst/>
@@ -11995,7 +11959,7 @@
           </a:bodyPr>
           <a:lstStyle/>
           <a:p>
-            <a:pPr algn="l"/>
+            <a:pPr algn="ctr"/>
             <a:r>
               <a:rPr sz="1400" b="1">
                 <a:solidFill>
@@ -12005,51 +11969,145 @@
                 <a:ea typeface="微软雅黑"/>
                 <a:cs typeface="微软雅黑"/>
               </a:rPr>
-              <a:t>上线后的增量【待补】</a:t>
+              <a:t>上线后增量【待补】</a:t>
             </a:r>
           </a:p>
         </p:txBody>
       </p:sp>
-      <p:sp>
-        <p:nvSpPr>
-          <p:cNvPr id="34" name="arrow"/>
-          <p:cNvSpPr/>
-          <p:nvPr/>
-        </p:nvSpPr>
-        <p:spPr>
-          <a:xfrm>
-            <a:off x="5806440" y="3520440"/>
-            <a:ext cx="594360" cy="457200"/>
-          </a:xfrm>
-          <a:prstGeom prst="rightArrow">
-            <a:avLst/>
-          </a:prstGeom>
-          <a:solidFill>
-            <a:srgbClr val="287DFA"/>
-          </a:solidFill>
-          <a:ln>
-            <a:noFill/>
+      <p:pic>
+        <p:nvPicPr>
+          <p:cNvPr id="31" name="真实截图-抢必走" descr="qbz.png"/>
+          <p:cNvPicPr>
+            <a:picLocks noChangeAspect="1"/>
+          </p:cNvPicPr>
+          <p:nvPr/>
+        </p:nvPicPr>
+        <p:blipFill>
+          <a:blip r:embed="rId7"/>
+          <a:stretch>
+            <a:fillRect/>
+          </a:stretch>
+        </p:blipFill>
+        <p:spPr>
+          <a:xfrm>
+            <a:off x="7721193" y="1481328"/>
+            <a:ext cx="1913839" cy="4206240"/>
+          </a:xfrm>
+          <a:prstGeom prst="roundRect">
+            <a:avLst>
+              <a:gd name="adj" fmla="val 6000"/>
+            </a:avLst>
+          </a:prstGeom>
+          <a:ln w="25400">
+            <a:solidFill>
+              <a:srgbClr val="000000"/>
+            </a:solidFill>
           </a:ln>
-          <a:effectLst/>
-        </p:spPr>
-        <p:style>
-          <a:lnRef idx="1">
-            <a:schemeClr val="accent1"/>
-          </a:lnRef>
-          <a:fillRef idx="3">
-            <a:schemeClr val="accent1"/>
-          </a:fillRef>
-          <a:effectRef idx="2">
-            <a:schemeClr val="accent1"/>
-          </a:effectRef>
-          <a:fontRef idx="minor">
-            <a:schemeClr val="lt1"/>
-          </a:fontRef>
-        </p:style>
-        <p:txBody>
-          <a:bodyPr rtlCol="0" anchor="ctr"/>
-          <a:lstStyle/>
-          <a:p/>
+        </p:spPr>
+      </p:pic>
+      <p:sp>
+        <p:nvSpPr>
+          <p:cNvPr id="32" name="TextBox 31"/>
+          <p:cNvSpPr txBox="1"/>
+          <p:nvPr/>
+        </p:nvSpPr>
+        <p:spPr>
+          <a:xfrm>
+            <a:off x="7721193" y="5760720"/>
+            <a:ext cx="1913839" cy="274320"/>
+          </a:xfrm>
+          <a:prstGeom prst="rect">
+            <a:avLst/>
+          </a:prstGeom>
+          <a:noFill/>
+        </p:spPr>
+        <p:txBody>
+          <a:bodyPr wrap="square" lIns="0" rIns="0" tIns="0" bIns="0" anchor="t">
+            <a:spAutoFit/>
+          </a:bodyPr>
+          <a:lstStyle/>
+          <a:p>
+            <a:pPr algn="ctr"/>
+            <a:r>
+              <a:rPr sz="1200" b="1">
+                <a:solidFill>
+                  <a:srgbClr val="3D4757"/>
+                </a:solidFill>
+                <a:latin typeface="微软雅黑"/>
+                <a:ea typeface="微软雅黑"/>
+                <a:cs typeface="微软雅黑"/>
+              </a:rPr>
+              <a:t>抢必走</a:t>
+            </a:r>
+          </a:p>
+        </p:txBody>
+      </p:sp>
+      <p:pic>
+        <p:nvPicPr>
+          <p:cNvPr id="33" name="真实截图-有票方案" descr="yoyo.png"/>
+          <p:cNvPicPr>
+            <a:picLocks noChangeAspect="1"/>
+          </p:cNvPicPr>
+          <p:nvPr/>
+        </p:nvPicPr>
+        <p:blipFill>
+          <a:blip r:embed="rId8"/>
+          <a:stretch>
+            <a:fillRect/>
+          </a:stretch>
+        </p:blipFill>
+        <p:spPr>
+          <a:xfrm>
+            <a:off x="9817912" y="1481328"/>
+            <a:ext cx="1913839" cy="4206240"/>
+          </a:xfrm>
+          <a:prstGeom prst="roundRect">
+            <a:avLst>
+              <a:gd name="adj" fmla="val 6000"/>
+            </a:avLst>
+          </a:prstGeom>
+          <a:ln w="25400">
+            <a:solidFill>
+              <a:srgbClr val="000000"/>
+            </a:solidFill>
+          </a:ln>
+        </p:spPr>
+      </p:pic>
+      <p:sp>
+        <p:nvSpPr>
+          <p:cNvPr id="34" name="TextBox 33"/>
+          <p:cNvSpPr txBox="1"/>
+          <p:nvPr/>
+        </p:nvSpPr>
+        <p:spPr>
+          <a:xfrm>
+            <a:off x="9817912" y="5760720"/>
+            <a:ext cx="1913839" cy="274320"/>
+          </a:xfrm>
+          <a:prstGeom prst="rect">
+            <a:avLst/>
+          </a:prstGeom>
+          <a:noFill/>
+        </p:spPr>
+        <p:txBody>
+          <a:bodyPr wrap="square" lIns="0" rIns="0" tIns="0" bIns="0" anchor="t">
+            <a:spAutoFit/>
+          </a:bodyPr>
+          <a:lstStyle/>
+          <a:p>
+            <a:pPr algn="ctr"/>
+            <a:r>
+              <a:rPr sz="1200" b="1">
+                <a:solidFill>
+                  <a:srgbClr val="3D4757"/>
+                </a:solidFill>
+                <a:latin typeface="微软雅黑"/>
+                <a:ea typeface="微软雅黑"/>
+                <a:cs typeface="微软雅黑"/>
+              </a:rPr>
+              <a:t>有票方案页</a:t>
+            </a:r>
+          </a:p>
         </p:txBody>
       </p:sp>
     </p:spTree>

--- a/答辩PPT.pptx
+++ b/答辩PPT.pptx
@@ -10920,16 +10920,152 @@
           </a:p>
         </p:txBody>
       </p:sp>
-      <p:sp>
-        <p:nvSpPr>
-          <p:cNvPr id="4" name="Rounded Rectangle 3"/>
+      <p:pic>
+        <p:nvPicPr>
+          <p:cNvPr id="4" name="真实截图-抢必走" descr="qbz.png"/>
+          <p:cNvPicPr>
+            <a:picLocks noChangeAspect="1"/>
+          </p:cNvPicPr>
+          <p:nvPr/>
+        </p:nvPicPr>
+        <p:blipFill>
+          <a:blip r:embed="rId3"/>
+          <a:stretch>
+            <a:fillRect/>
+          </a:stretch>
+        </p:blipFill>
+        <p:spPr>
+          <a:xfrm>
+            <a:off x="457200" y="1481328"/>
+            <a:ext cx="1913839" cy="4206240"/>
+          </a:xfrm>
+          <a:prstGeom prst="roundRect">
+            <a:avLst>
+              <a:gd name="adj" fmla="val 6000"/>
+            </a:avLst>
+          </a:prstGeom>
+          <a:ln w="25400">
+            <a:solidFill>
+              <a:srgbClr val="000000"/>
+            </a:solidFill>
+          </a:ln>
+        </p:spPr>
+      </p:pic>
+      <p:sp>
+        <p:nvSpPr>
+          <p:cNvPr id="5" name="TextBox 4"/>
+          <p:cNvSpPr txBox="1"/>
+          <p:nvPr/>
+        </p:nvSpPr>
+        <p:spPr>
+          <a:xfrm>
+            <a:off x="457200" y="5760720"/>
+            <a:ext cx="1913839" cy="274320"/>
+          </a:xfrm>
+          <a:prstGeom prst="rect">
+            <a:avLst/>
+          </a:prstGeom>
+          <a:noFill/>
+        </p:spPr>
+        <p:txBody>
+          <a:bodyPr wrap="square" lIns="0" rIns="0" tIns="0" bIns="0" anchor="t">
+            <a:spAutoFit/>
+          </a:bodyPr>
+          <a:lstStyle/>
+          <a:p>
+            <a:pPr algn="ctr"/>
+            <a:r>
+              <a:rPr sz="1200" b="1">
+                <a:solidFill>
+                  <a:srgbClr val="3D4757"/>
+                </a:solidFill>
+                <a:latin typeface="微软雅黑"/>
+                <a:ea typeface="微软雅黑"/>
+                <a:cs typeface="微软雅黑"/>
+              </a:rPr>
+              <a:t>抢必走</a:t>
+            </a:r>
+          </a:p>
+        </p:txBody>
+      </p:sp>
+      <p:pic>
+        <p:nvPicPr>
+          <p:cNvPr id="6" name="真实截图-有票方案" descr="yoyo.png"/>
+          <p:cNvPicPr>
+            <a:picLocks noChangeAspect="1"/>
+          </p:cNvPicPr>
+          <p:nvPr/>
+        </p:nvPicPr>
+        <p:blipFill>
+          <a:blip r:embed="rId4"/>
+          <a:stretch>
+            <a:fillRect/>
+          </a:stretch>
+        </p:blipFill>
+        <p:spPr>
+          <a:xfrm>
+            <a:off x="2535631" y="1481328"/>
+            <a:ext cx="1913839" cy="4206240"/>
+          </a:xfrm>
+          <a:prstGeom prst="roundRect">
+            <a:avLst>
+              <a:gd name="adj" fmla="val 6000"/>
+            </a:avLst>
+          </a:prstGeom>
+          <a:ln w="25400">
+            <a:solidFill>
+              <a:srgbClr val="000000"/>
+            </a:solidFill>
+          </a:ln>
+        </p:spPr>
+      </p:pic>
+      <p:sp>
+        <p:nvSpPr>
+          <p:cNvPr id="7" name="TextBox 6"/>
+          <p:cNvSpPr txBox="1"/>
+          <p:nvPr/>
+        </p:nvSpPr>
+        <p:spPr>
+          <a:xfrm>
+            <a:off x="2535631" y="5760720"/>
+            <a:ext cx="1913839" cy="274320"/>
+          </a:xfrm>
+          <a:prstGeom prst="rect">
+            <a:avLst/>
+          </a:prstGeom>
+          <a:noFill/>
+        </p:spPr>
+        <p:txBody>
+          <a:bodyPr wrap="square" lIns="0" rIns="0" tIns="0" bIns="0" anchor="t">
+            <a:spAutoFit/>
+          </a:bodyPr>
+          <a:lstStyle/>
+          <a:p>
+            <a:pPr algn="ctr"/>
+            <a:r>
+              <a:rPr sz="1200" b="1">
+                <a:solidFill>
+                  <a:srgbClr val="3D4757"/>
+                </a:solidFill>
+                <a:latin typeface="微软雅黑"/>
+                <a:ea typeface="微软雅黑"/>
+                <a:cs typeface="微软雅黑"/>
+              </a:rPr>
+              <a:t>有票方案页</a:t>
+            </a:r>
+          </a:p>
+        </p:txBody>
+      </p:sp>
+      <p:sp>
+        <p:nvSpPr>
+          <p:cNvPr id="8" name="Rounded Rectangle 7"/>
           <p:cNvSpPr/>
           <p:nvPr/>
         </p:nvSpPr>
         <p:spPr>
           <a:xfrm>
-            <a:off x="457200" y="1554480"/>
-            <a:ext cx="3063240" cy="914400"/>
+            <a:off x="4709160" y="1783080"/>
+            <a:ext cx="1481328" cy="1325880"/>
           </a:xfrm>
           <a:prstGeom prst="roundRect">
             <a:avLst>
@@ -10968,13 +11104,13 @@
       </p:sp>
       <p:sp>
         <p:nvSpPr>
-          <p:cNvPr id="5" name="icon-circle"/>
+          <p:cNvPr id="9" name="icon-circle"/>
           <p:cNvSpPr/>
           <p:nvPr/>
         </p:nvSpPr>
         <p:spPr>
           <a:xfrm>
-            <a:off x="685800" y="1737360"/>
+            <a:off x="5175504" y="1901952"/>
             <a:ext cx="548640" cy="548640"/>
           </a:xfrm>
           <a:prstGeom prst="ellipse">
@@ -11010,21 +11146,21 @@
       </p:sp>
       <p:pic>
         <p:nvPicPr>
-          <p:cNvPr id="6" name="Picture 5" descr="FaListCheck_w.png"/>
+          <p:cNvPr id="10" name="Picture 9" descr="FaMagnifyingGlass_w.png"/>
           <p:cNvPicPr>
             <a:picLocks noChangeAspect="1"/>
           </p:cNvPicPr>
           <p:nvPr/>
         </p:nvPicPr>
         <p:blipFill>
-          <a:blip r:embed="rId3"/>
+          <a:blip r:embed="rId5"/>
           <a:stretch>
             <a:fillRect/>
           </a:stretch>
         </p:blipFill>
         <p:spPr>
           <a:xfrm>
-            <a:off x="822960" y="1874519"/>
+            <a:off x="5312664" y="2039112"/>
             <a:ext cx="274320" cy="274320"/>
           </a:xfrm>
           <a:prstGeom prst="rect">
@@ -11034,14 +11170,14 @@
       </p:pic>
       <p:sp>
         <p:nvSpPr>
-          <p:cNvPr id="7" name="TextBox 6"/>
+          <p:cNvPr id="11" name="TextBox 10"/>
           <p:cNvSpPr txBox="1"/>
           <p:nvPr/>
         </p:nvSpPr>
         <p:spPr>
           <a:xfrm>
-            <a:off x="1371600" y="1554480"/>
-            <a:ext cx="2057400" cy="914400"/>
+            <a:off x="4754880" y="2514600"/>
+            <a:ext cx="1389888" cy="548640"/>
           </a:xfrm>
           <a:prstGeom prst="rect">
             <a:avLst/>
@@ -11049,54 +11185,133 @@
           <a:noFill/>
         </p:spPr>
         <p:txBody>
-          <a:bodyPr wrap="square" lIns="0" rIns="0" tIns="0" bIns="0" anchor="ctr">
+          <a:bodyPr wrap="square" lIns="0" rIns="0" tIns="0" bIns="0" anchor="t">
             <a:spAutoFit/>
           </a:bodyPr>
           <a:lstStyle/>
           <a:p>
-            <a:pPr algn="l"/>
-            <a:r>
-              <a:rPr sz="1400" b="1">
-                <a:solidFill>
-                  <a:srgbClr val="15315E"/>
+            <a:pPr algn="ctr"/>
+            <a:r>
+              <a:rPr sz="1200" b="1">
+                <a:solidFill>
+                  <a:srgbClr val="3D4757"/>
                 </a:solidFill>
                 <a:latin typeface="微软雅黑"/>
                 <a:ea typeface="微软雅黑"/>
                 <a:cs typeface="微软雅黑"/>
               </a:rPr>
-              <a:t>推荐可立即出票的</a:t>
+              <a:t>抢票中</a:t>
             </a:r>
           </a:p>
           <a:p>
-            <a:pPr algn="l">
+            <a:pPr algn="ctr">
               <a:spcBef>
                 <a:spcPts val="0"/>
               </a:spcBef>
             </a:pPr>
             <a:r>
-              <a:rPr sz="1400" b="1">
-                <a:solidFill>
-                  <a:srgbClr val="15315E"/>
+              <a:rPr sz="1200" b="1">
+                <a:solidFill>
+                  <a:srgbClr val="3D4757"/>
                 </a:solidFill>
                 <a:latin typeface="微软雅黑"/>
                 <a:ea typeface="微软雅黑"/>
                 <a:cs typeface="微软雅黑"/>
               </a:rPr>
-              <a:t>替代方案</a:t>
+              <a:t>持续监控余票</a:t>
             </a:r>
           </a:p>
         </p:txBody>
       </p:sp>
       <p:sp>
         <p:nvSpPr>
-          <p:cNvPr id="8" name="Rounded Rectangle 7"/>
+          <p:cNvPr id="12" name="arrow"/>
           <p:cNvSpPr/>
           <p:nvPr/>
         </p:nvSpPr>
         <p:spPr>
           <a:xfrm>
-            <a:off x="3886200" y="1554480"/>
-            <a:ext cx="3063240" cy="914400"/>
+            <a:off x="6245352" y="2331720"/>
+            <a:ext cx="219456" cy="237744"/>
+          </a:xfrm>
+          <a:prstGeom prst="rightArrow">
+            <a:avLst/>
+          </a:prstGeom>
+          <a:solidFill>
+            <a:srgbClr val="D3E2FB"/>
+          </a:solidFill>
+          <a:ln>
+            <a:noFill/>
+          </a:ln>
+          <a:effectLst/>
+        </p:spPr>
+        <p:style>
+          <a:lnRef idx="1">
+            <a:schemeClr val="accent1"/>
+          </a:lnRef>
+          <a:fillRef idx="3">
+            <a:schemeClr val="accent1"/>
+          </a:fillRef>
+          <a:effectRef idx="2">
+            <a:schemeClr val="accent1"/>
+          </a:effectRef>
+          <a:fontRef idx="minor">
+            <a:schemeClr val="lt1"/>
+          </a:fontRef>
+        </p:style>
+        <p:txBody>
+          <a:bodyPr rtlCol="0" anchor="ctr"/>
+          <a:lstStyle/>
+          <a:p/>
+        </p:txBody>
+      </p:sp>
+      <p:sp>
+        <p:nvSpPr>
+          <p:cNvPr id="13" name="TextBox 12"/>
+          <p:cNvSpPr txBox="1"/>
+          <p:nvPr/>
+        </p:nvSpPr>
+        <p:spPr>
+          <a:xfrm>
+            <a:off x="4709160" y="1481328"/>
+            <a:ext cx="1481328" cy="274320"/>
+          </a:xfrm>
+          <a:prstGeom prst="rect">
+            <a:avLst/>
+          </a:prstGeom>
+          <a:noFill/>
+        </p:spPr>
+        <p:txBody>
+          <a:bodyPr wrap="square" lIns="0" rIns="0" tIns="0" bIns="0" anchor="t">
+            <a:spAutoFit/>
+          </a:bodyPr>
+          <a:lstStyle/>
+          <a:p>
+            <a:pPr algn="ctr"/>
+            <a:r>
+              <a:rPr sz="1100" b="1">
+                <a:solidFill>
+                  <a:srgbClr val="7A8599"/>
+                </a:solidFill>
+                <a:latin typeface="微软雅黑"/>
+                <a:ea typeface="微软雅黑"/>
+                <a:cs typeface="微软雅黑"/>
+              </a:rPr>
+              <a:t>第 1 步</a:t>
+            </a:r>
+          </a:p>
+        </p:txBody>
+      </p:sp>
+      <p:sp>
+        <p:nvSpPr>
+          <p:cNvPr id="14" name="Rounded Rectangle 13"/>
+          <p:cNvSpPr/>
+          <p:nvPr/>
+        </p:nvSpPr>
+        <p:spPr>
+          <a:xfrm>
+            <a:off x="6519672" y="1783080"/>
+            <a:ext cx="1481328" cy="1325880"/>
           </a:xfrm>
           <a:prstGeom prst="roundRect">
             <a:avLst>
@@ -11135,13 +11350,13 @@
       </p:sp>
       <p:sp>
         <p:nvSpPr>
-          <p:cNvPr id="9" name="icon-circle"/>
+          <p:cNvPr id="15" name="icon-circle"/>
           <p:cNvSpPr/>
           <p:nvPr/>
         </p:nvSpPr>
         <p:spPr>
           <a:xfrm>
-            <a:off x="4114800" y="1737360"/>
+            <a:off x="6986016" y="1901952"/>
             <a:ext cx="548640" cy="548640"/>
           </a:xfrm>
           <a:prstGeom prst="ellipse">
@@ -11177,21 +11392,21 @@
       </p:sp>
       <p:pic>
         <p:nvPicPr>
-          <p:cNvPr id="10" name="Picture 9" descr="FaUserCheck_w.png"/>
+          <p:cNvPr id="16" name="Picture 15" descr="FaListCheck_w.png"/>
           <p:cNvPicPr>
             <a:picLocks noChangeAspect="1"/>
           </p:cNvPicPr>
           <p:nvPr/>
         </p:nvPicPr>
         <p:blipFill>
-          <a:blip r:embed="rId4"/>
+          <a:blip r:embed="rId6"/>
           <a:stretch>
             <a:fillRect/>
           </a:stretch>
         </p:blipFill>
         <p:spPr>
           <a:xfrm>
-            <a:off x="4251960" y="1874519"/>
+            <a:off x="7123176" y="2039112"/>
             <a:ext cx="274320" cy="274320"/>
           </a:xfrm>
           <a:prstGeom prst="rect">
@@ -11201,14 +11416,14 @@
       </p:pic>
       <p:sp>
         <p:nvSpPr>
-          <p:cNvPr id="11" name="TextBox 10"/>
+          <p:cNvPr id="17" name="TextBox 16"/>
           <p:cNvSpPr txBox="1"/>
           <p:nvPr/>
         </p:nvSpPr>
         <p:spPr>
           <a:xfrm>
-            <a:off x="4800600" y="1554480"/>
-            <a:ext cx="2057400" cy="914400"/>
+            <a:off x="6565392" y="2514600"/>
+            <a:ext cx="1389888" cy="548640"/>
           </a:xfrm>
           <a:prstGeom prst="rect">
             <a:avLst/>
@@ -11216,54 +11431,54 @@
           <a:noFill/>
         </p:spPr>
         <p:txBody>
-          <a:bodyPr wrap="square" lIns="0" rIns="0" tIns="0" bIns="0" anchor="ctr">
+          <a:bodyPr wrap="square" lIns="0" rIns="0" tIns="0" bIns="0" anchor="t">
             <a:spAutoFit/>
           </a:bodyPr>
           <a:lstStyle/>
           <a:p>
-            <a:pPr algn="l"/>
-            <a:r>
-              <a:rPr sz="1400" b="1">
-                <a:solidFill>
-                  <a:srgbClr val="15315E"/>
+            <a:pPr algn="ctr"/>
+            <a:r>
+              <a:rPr sz="1200" b="1">
+                <a:solidFill>
+                  <a:srgbClr val="3D4757"/>
                 </a:solidFill>
                 <a:latin typeface="微软雅黑"/>
                 <a:ea typeface="微软雅黑"/>
                 <a:cs typeface="微软雅黑"/>
               </a:rPr>
-              <a:t>用户让步，</a:t>
+              <a:t>推荐可立即</a:t>
             </a:r>
           </a:p>
           <a:p>
-            <a:pPr algn="l">
+            <a:pPr algn="ctr">
               <a:spcBef>
                 <a:spcPts val="0"/>
               </a:spcBef>
             </a:pPr>
             <a:r>
-              <a:rPr sz="1400" b="1">
-                <a:solidFill>
-                  <a:srgbClr val="15315E"/>
+              <a:rPr sz="1200" b="1">
+                <a:solidFill>
+                  <a:srgbClr val="3D4757"/>
                 </a:solidFill>
                 <a:latin typeface="微软雅黑"/>
                 <a:ea typeface="微软雅黑"/>
                 <a:cs typeface="微软雅黑"/>
               </a:rPr>
-              <a:t>接受替代方案</a:t>
+              <a:t>出票的替代方案</a:t>
             </a:r>
           </a:p>
         </p:txBody>
       </p:sp>
       <p:sp>
         <p:nvSpPr>
-          <p:cNvPr id="12" name="arrow"/>
+          <p:cNvPr id="18" name="arrow"/>
           <p:cNvSpPr/>
           <p:nvPr/>
         </p:nvSpPr>
         <p:spPr>
           <a:xfrm>
-            <a:off x="3584448" y="1874519"/>
-            <a:ext cx="256032" cy="274320"/>
+            <a:off x="8055864" y="2331720"/>
+            <a:ext cx="219456" cy="237744"/>
           </a:xfrm>
           <a:prstGeom prst="rightArrow">
             <a:avLst/>
@@ -11296,156 +11511,53 @@
           <a:p/>
         </p:txBody>
       </p:sp>
-      <p:cxnSp>
-        <p:nvCxnSpPr>
-          <p:cNvPr id="13" name="Connector 12"/>
-          <p:cNvCxnSpPr/>
-          <p:nvPr/>
-        </p:nvCxnSpPr>
-        <p:spPr>
-          <a:xfrm>
-            <a:off x="5413248" y="2468880"/>
-            <a:ext cx="0" cy="274320"/>
-          </a:xfrm>
-          <a:prstGeom prst="line">
-            <a:avLst/>
-          </a:prstGeom>
-          <a:ln w="19050">
-            <a:solidFill>
-              <a:srgbClr val="287DFA"/>
-            </a:solidFill>
-          </a:ln>
-        </p:spPr>
-        <p:style>
-          <a:lnRef idx="2">
-            <a:schemeClr val="accent1"/>
-          </a:lnRef>
-          <a:fillRef idx="0">
-            <a:schemeClr val="accent1"/>
-          </a:fillRef>
-          <a:effectRef idx="1">
-            <a:schemeClr val="accent1"/>
-          </a:effectRef>
-          <a:fontRef idx="minor">
-            <a:schemeClr val="tx1"/>
-          </a:fontRef>
-        </p:style>
-      </p:cxnSp>
-      <p:cxnSp>
-        <p:nvCxnSpPr>
-          <p:cNvPr id="14" name="Connector 13"/>
-          <p:cNvCxnSpPr/>
-          <p:nvPr/>
-        </p:nvCxnSpPr>
-        <p:spPr>
-          <a:xfrm>
-            <a:off x="1984248" y="2743200"/>
-            <a:ext cx="3429000" cy="0"/>
-          </a:xfrm>
-          <a:prstGeom prst="line">
-            <a:avLst/>
-          </a:prstGeom>
-          <a:ln w="19050">
-            <a:solidFill>
-              <a:srgbClr val="287DFA"/>
-            </a:solidFill>
-          </a:ln>
-        </p:spPr>
-        <p:style>
-          <a:lnRef idx="2">
-            <a:schemeClr val="accent1"/>
-          </a:lnRef>
-          <a:fillRef idx="0">
-            <a:schemeClr val="accent1"/>
-          </a:fillRef>
-          <a:effectRef idx="1">
-            <a:schemeClr val="accent1"/>
-          </a:effectRef>
-          <a:fontRef idx="minor">
-            <a:schemeClr val="tx1"/>
-          </a:fontRef>
-        </p:style>
-      </p:cxnSp>
-      <p:cxnSp>
-        <p:nvCxnSpPr>
-          <p:cNvPr id="15" name="Connector 14"/>
-          <p:cNvCxnSpPr/>
-          <p:nvPr/>
-        </p:nvCxnSpPr>
-        <p:spPr>
-          <a:xfrm>
-            <a:off x="1984248" y="2743200"/>
-            <a:ext cx="0" cy="228600"/>
-          </a:xfrm>
-          <a:prstGeom prst="line">
-            <a:avLst/>
-          </a:prstGeom>
-          <a:ln w="19050">
-            <a:solidFill>
-              <a:srgbClr val="7A8599"/>
-            </a:solidFill>
-          </a:ln>
-        </p:spPr>
-        <p:style>
-          <a:lnRef idx="2">
-            <a:schemeClr val="accent1"/>
-          </a:lnRef>
-          <a:fillRef idx="0">
-            <a:schemeClr val="accent1"/>
-          </a:fillRef>
-          <a:effectRef idx="1">
-            <a:schemeClr val="accent1"/>
-          </a:effectRef>
-          <a:fontRef idx="minor">
-            <a:schemeClr val="tx1"/>
-          </a:fontRef>
-        </p:style>
-      </p:cxnSp>
-      <p:cxnSp>
-        <p:nvCxnSpPr>
-          <p:cNvPr id="16" name="Connector 15"/>
-          <p:cNvCxnSpPr/>
-          <p:nvPr/>
-        </p:nvCxnSpPr>
-        <p:spPr>
-          <a:xfrm>
-            <a:off x="5413248" y="2743200"/>
-            <a:ext cx="0" cy="228600"/>
-          </a:xfrm>
-          <a:prstGeom prst="line">
-            <a:avLst/>
-          </a:prstGeom>
-          <a:ln w="19050">
-            <a:solidFill>
-              <a:srgbClr val="287DFA"/>
-            </a:solidFill>
-          </a:ln>
-        </p:spPr>
-        <p:style>
-          <a:lnRef idx="2">
-            <a:schemeClr val="accent1"/>
-          </a:lnRef>
-          <a:fillRef idx="0">
-            <a:schemeClr val="accent1"/>
-          </a:fillRef>
-          <a:effectRef idx="1">
-            <a:schemeClr val="accent1"/>
-          </a:effectRef>
-          <a:fontRef idx="minor">
-            <a:schemeClr val="tx1"/>
-          </a:fontRef>
-        </p:style>
-      </p:cxnSp>
-      <p:sp>
-        <p:nvSpPr>
-          <p:cNvPr id="17" name="Rounded Rectangle 16"/>
+      <p:sp>
+        <p:nvSpPr>
+          <p:cNvPr id="19" name="TextBox 18"/>
+          <p:cNvSpPr txBox="1"/>
+          <p:nvPr/>
+        </p:nvSpPr>
+        <p:spPr>
+          <a:xfrm>
+            <a:off x="6519672" y="1481328"/>
+            <a:ext cx="1481328" cy="274320"/>
+          </a:xfrm>
+          <a:prstGeom prst="rect">
+            <a:avLst/>
+          </a:prstGeom>
+          <a:noFill/>
+        </p:spPr>
+        <p:txBody>
+          <a:bodyPr wrap="square" lIns="0" rIns="0" tIns="0" bIns="0" anchor="t">
+            <a:spAutoFit/>
+          </a:bodyPr>
+          <a:lstStyle/>
+          <a:p>
+            <a:pPr algn="ctr"/>
+            <a:r>
+              <a:rPr sz="1100" b="1">
+                <a:solidFill>
+                  <a:srgbClr val="7A8599"/>
+                </a:solidFill>
+                <a:latin typeface="微软雅黑"/>
+                <a:ea typeface="微软雅黑"/>
+                <a:cs typeface="微软雅黑"/>
+              </a:rPr>
+              <a:t>第 2 步</a:t>
+            </a:r>
+          </a:p>
+        </p:txBody>
+      </p:sp>
+      <p:sp>
+        <p:nvSpPr>
+          <p:cNvPr id="20" name="Rounded Rectangle 19"/>
           <p:cNvSpPr/>
           <p:nvPr/>
         </p:nvSpPr>
         <p:spPr>
           <a:xfrm>
-            <a:off x="457200" y="2971800"/>
-            <a:ext cx="3063240" cy="3108960"/>
+            <a:off x="8330183" y="1783080"/>
+            <a:ext cx="1481328" cy="1325880"/>
           </a:xfrm>
           <a:prstGeom prst="roundRect">
             <a:avLst>
@@ -11484,14 +11596,80 @@
       </p:sp>
       <p:sp>
         <p:nvSpPr>
-          <p:cNvPr id="18" name="TextBox 17"/>
+          <p:cNvPr id="21" name="icon-circle"/>
+          <p:cNvSpPr/>
+          <p:nvPr/>
+        </p:nvSpPr>
+        <p:spPr>
+          <a:xfrm>
+            <a:off x="8796528" y="1901952"/>
+            <a:ext cx="548640" cy="548640"/>
+          </a:xfrm>
+          <a:prstGeom prst="ellipse">
+            <a:avLst/>
+          </a:prstGeom>
+          <a:solidFill>
+            <a:srgbClr val="287DFA"/>
+          </a:solidFill>
+          <a:ln>
+            <a:noFill/>
+          </a:ln>
+          <a:effectLst/>
+        </p:spPr>
+        <p:style>
+          <a:lnRef idx="1">
+            <a:schemeClr val="accent1"/>
+          </a:lnRef>
+          <a:fillRef idx="3">
+            <a:schemeClr val="accent1"/>
+          </a:fillRef>
+          <a:effectRef idx="2">
+            <a:schemeClr val="accent1"/>
+          </a:effectRef>
+          <a:fontRef idx="minor">
+            <a:schemeClr val="lt1"/>
+          </a:fontRef>
+        </p:style>
+        <p:txBody>
+          <a:bodyPr rtlCol="0" anchor="ctr"/>
+          <a:lstStyle/>
+          <a:p/>
+        </p:txBody>
+      </p:sp>
+      <p:pic>
+        <p:nvPicPr>
+          <p:cNvPr id="22" name="Picture 21" descr="FaUserCheck_w.png"/>
+          <p:cNvPicPr>
+            <a:picLocks noChangeAspect="1"/>
+          </p:cNvPicPr>
+          <p:nvPr/>
+        </p:nvPicPr>
+        <p:blipFill>
+          <a:blip r:embed="rId7"/>
+          <a:stretch>
+            <a:fillRect/>
+          </a:stretch>
+        </p:blipFill>
+        <p:spPr>
+          <a:xfrm>
+            <a:off x="8933688" y="2039112"/>
+            <a:ext cx="274320" cy="274320"/>
+          </a:xfrm>
+          <a:prstGeom prst="rect">
+            <a:avLst/>
+          </a:prstGeom>
+        </p:spPr>
+      </p:pic>
+      <p:sp>
+        <p:nvSpPr>
+          <p:cNvPr id="23" name="TextBox 22"/>
           <p:cNvSpPr txBox="1"/>
           <p:nvPr/>
         </p:nvSpPr>
         <p:spPr>
           <a:xfrm>
-            <a:off x="731520" y="3127248"/>
-            <a:ext cx="2560320" cy="365760"/>
+            <a:off x="8375904" y="2514600"/>
+            <a:ext cx="1389888" cy="548640"/>
           </a:xfrm>
           <a:prstGeom prst="rect">
             <a:avLst/>
@@ -11504,34 +11682,437 @@
           </a:bodyPr>
           <a:lstStyle/>
           <a:p>
-            <a:pPr algn="l"/>
-            <a:r>
-              <a:rPr sz="1800" b="1">
-                <a:solidFill>
-                  <a:srgbClr val="7A8599"/>
+            <a:pPr algn="ctr"/>
+            <a:r>
+              <a:rPr sz="1200" b="1">
+                <a:solidFill>
+                  <a:srgbClr val="3D4757"/>
                 </a:solidFill>
                 <a:latin typeface="微软雅黑"/>
                 <a:ea typeface="微软雅黑"/>
                 <a:cs typeface="微软雅黑"/>
               </a:rPr>
-              <a:t>之前</a:t>
+              <a:t>用户让步</a:t>
             </a:r>
           </a:p>
-        </p:txBody>
-      </p:sp>
-      <p:sp>
-        <p:nvSpPr>
-          <p:cNvPr id="19" name="icon-circle"/>
+          <a:p>
+            <a:pPr algn="ctr">
+              <a:spcBef>
+                <a:spcPts val="0"/>
+              </a:spcBef>
+            </a:pPr>
+            <a:r>
+              <a:rPr sz="1200" b="1">
+                <a:solidFill>
+                  <a:srgbClr val="3D4757"/>
+                </a:solidFill>
+                <a:latin typeface="微软雅黑"/>
+                <a:ea typeface="微软雅黑"/>
+                <a:cs typeface="微软雅黑"/>
+              </a:rPr>
+              <a:t>接受替代方案</a:t>
+            </a:r>
+          </a:p>
+        </p:txBody>
+      </p:sp>
+      <p:sp>
+        <p:nvSpPr>
+          <p:cNvPr id="24" name="arrow"/>
           <p:cNvSpPr/>
           <p:nvPr/>
         </p:nvSpPr>
         <p:spPr>
           <a:xfrm>
-            <a:off x="731520" y="3703320"/>
-            <a:ext cx="640080" cy="640080"/>
+            <a:off x="9866376" y="2331720"/>
+            <a:ext cx="219456" cy="237744"/>
+          </a:xfrm>
+          <a:prstGeom prst="rightArrow">
+            <a:avLst/>
+          </a:prstGeom>
+          <a:solidFill>
+            <a:srgbClr val="D3E2FB"/>
+          </a:solidFill>
+          <a:ln>
+            <a:noFill/>
+          </a:ln>
+          <a:effectLst/>
+        </p:spPr>
+        <p:style>
+          <a:lnRef idx="1">
+            <a:schemeClr val="accent1"/>
+          </a:lnRef>
+          <a:fillRef idx="3">
+            <a:schemeClr val="accent1"/>
+          </a:fillRef>
+          <a:effectRef idx="2">
+            <a:schemeClr val="accent1"/>
+          </a:effectRef>
+          <a:fontRef idx="minor">
+            <a:schemeClr val="lt1"/>
+          </a:fontRef>
+        </p:style>
+        <p:txBody>
+          <a:bodyPr rtlCol="0" anchor="ctr"/>
+          <a:lstStyle/>
+          <a:p/>
+        </p:txBody>
+      </p:sp>
+      <p:sp>
+        <p:nvSpPr>
+          <p:cNvPr id="25" name="TextBox 24"/>
+          <p:cNvSpPr txBox="1"/>
+          <p:nvPr/>
+        </p:nvSpPr>
+        <p:spPr>
+          <a:xfrm>
+            <a:off x="8330183" y="1481328"/>
+            <a:ext cx="1481328" cy="274320"/>
+          </a:xfrm>
+          <a:prstGeom prst="rect">
+            <a:avLst/>
+          </a:prstGeom>
+          <a:noFill/>
+        </p:spPr>
+        <p:txBody>
+          <a:bodyPr wrap="square" lIns="0" rIns="0" tIns="0" bIns="0" anchor="t">
+            <a:spAutoFit/>
+          </a:bodyPr>
+          <a:lstStyle/>
+          <a:p>
+            <a:pPr algn="ctr"/>
+            <a:r>
+              <a:rPr sz="1100" b="1">
+                <a:solidFill>
+                  <a:srgbClr val="7A8599"/>
+                </a:solidFill>
+                <a:latin typeface="微软雅黑"/>
+                <a:ea typeface="微软雅黑"/>
+                <a:cs typeface="微软雅黑"/>
+              </a:rPr>
+              <a:t>第 3 步</a:t>
+            </a:r>
+          </a:p>
+        </p:txBody>
+      </p:sp>
+      <p:sp>
+        <p:nvSpPr>
+          <p:cNvPr id="26" name="Rounded Rectangle 25"/>
+          <p:cNvSpPr/>
+          <p:nvPr/>
+        </p:nvSpPr>
+        <p:spPr>
+          <a:xfrm>
+            <a:off x="10140696" y="1783080"/>
+            <a:ext cx="1481328" cy="1325880"/>
+          </a:xfrm>
+          <a:prstGeom prst="roundRect">
+            <a:avLst>
+              <a:gd name="adj" fmla="val 6000"/>
+            </a:avLst>
+          </a:prstGeom>
+          <a:solidFill>
+            <a:srgbClr val="FFF3EA"/>
+          </a:solidFill>
+          <a:ln w="12700">
+            <a:solidFill>
+              <a:srgbClr val="FF7A1A"/>
+            </a:solidFill>
+          </a:ln>
+          <a:effectLst/>
+        </p:spPr>
+        <p:style>
+          <a:lnRef idx="1">
+            <a:schemeClr val="accent1"/>
+          </a:lnRef>
+          <a:fillRef idx="3">
+            <a:schemeClr val="accent1"/>
+          </a:fillRef>
+          <a:effectRef idx="2">
+            <a:schemeClr val="accent1"/>
+          </a:effectRef>
+          <a:fontRef idx="minor">
+            <a:schemeClr val="lt1"/>
+          </a:fontRef>
+        </p:style>
+        <p:txBody>
+          <a:bodyPr rtlCol="0" anchor="ctr"/>
+          <a:lstStyle/>
+          <a:p/>
+        </p:txBody>
+      </p:sp>
+      <p:sp>
+        <p:nvSpPr>
+          <p:cNvPr id="27" name="icon-circle"/>
+          <p:cNvSpPr/>
+          <p:nvPr/>
+        </p:nvSpPr>
+        <p:spPr>
+          <a:xfrm>
+            <a:off x="10607040" y="1901952"/>
+            <a:ext cx="548640" cy="548640"/>
           </a:xfrm>
           <a:prstGeom prst="ellipse">
             <a:avLst/>
+          </a:prstGeom>
+          <a:solidFill>
+            <a:srgbClr val="FF7A1A"/>
+          </a:solidFill>
+          <a:ln>
+            <a:noFill/>
+          </a:ln>
+          <a:effectLst/>
+        </p:spPr>
+        <p:style>
+          <a:lnRef idx="1">
+            <a:schemeClr val="accent1"/>
+          </a:lnRef>
+          <a:fillRef idx="3">
+            <a:schemeClr val="accent1"/>
+          </a:fillRef>
+          <a:effectRef idx="2">
+            <a:schemeClr val="accent1"/>
+          </a:effectRef>
+          <a:fontRef idx="minor">
+            <a:schemeClr val="lt1"/>
+          </a:fontRef>
+        </p:style>
+        <p:txBody>
+          <a:bodyPr rtlCol="0" anchor="ctr"/>
+          <a:lstStyle/>
+          <a:p/>
+        </p:txBody>
+      </p:sp>
+      <p:pic>
+        <p:nvPicPr>
+          <p:cNvPr id="28" name="Picture 27" descr="FaTicket_w.png"/>
+          <p:cNvPicPr>
+            <a:picLocks noChangeAspect="1"/>
+          </p:cNvPicPr>
+          <p:nvPr/>
+        </p:nvPicPr>
+        <p:blipFill>
+          <a:blip r:embed="rId8"/>
+          <a:stretch>
+            <a:fillRect/>
+          </a:stretch>
+        </p:blipFill>
+        <p:spPr>
+          <a:xfrm>
+            <a:off x="10744200" y="2039112"/>
+            <a:ext cx="274320" cy="274320"/>
+          </a:xfrm>
+          <a:prstGeom prst="rect">
+            <a:avLst/>
+          </a:prstGeom>
+        </p:spPr>
+      </p:pic>
+      <p:sp>
+        <p:nvSpPr>
+          <p:cNvPr id="29" name="TextBox 28"/>
+          <p:cNvSpPr txBox="1"/>
+          <p:nvPr/>
+        </p:nvSpPr>
+        <p:spPr>
+          <a:xfrm>
+            <a:off x="10186416" y="2514600"/>
+            <a:ext cx="1389888" cy="548640"/>
+          </a:xfrm>
+          <a:prstGeom prst="rect">
+            <a:avLst/>
+          </a:prstGeom>
+          <a:noFill/>
+        </p:spPr>
+        <p:txBody>
+          <a:bodyPr wrap="square" lIns="0" rIns="0" tIns="0" bIns="0" anchor="t">
+            <a:spAutoFit/>
+          </a:bodyPr>
+          <a:lstStyle/>
+          <a:p>
+            <a:pPr algn="ctr"/>
+            <a:r>
+              <a:rPr sz="1200" b="1">
+                <a:solidFill>
+                  <a:srgbClr val="3D4757"/>
+                </a:solidFill>
+                <a:latin typeface="微软雅黑"/>
+                <a:ea typeface="微软雅黑"/>
+                <a:cs typeface="微软雅黑"/>
+              </a:rPr>
+              <a:t>出票</a:t>
+            </a:r>
+          </a:p>
+        </p:txBody>
+      </p:sp>
+      <p:sp>
+        <p:nvSpPr>
+          <p:cNvPr id="30" name="TextBox 29"/>
+          <p:cNvSpPr txBox="1"/>
+          <p:nvPr/>
+        </p:nvSpPr>
+        <p:spPr>
+          <a:xfrm>
+            <a:off x="10140696" y="1481328"/>
+            <a:ext cx="1481328" cy="274320"/>
+          </a:xfrm>
+          <a:prstGeom prst="rect">
+            <a:avLst/>
+          </a:prstGeom>
+          <a:noFill/>
+        </p:spPr>
+        <p:txBody>
+          <a:bodyPr wrap="square" lIns="0" rIns="0" tIns="0" bIns="0" anchor="t">
+            <a:spAutoFit/>
+          </a:bodyPr>
+          <a:lstStyle/>
+          <a:p>
+            <a:pPr algn="ctr"/>
+            <a:r>
+              <a:rPr sz="1100" b="1">
+                <a:solidFill>
+                  <a:srgbClr val="FF7A1A"/>
+                </a:solidFill>
+                <a:latin typeface="微软雅黑"/>
+                <a:ea typeface="微软雅黑"/>
+                <a:cs typeface="微软雅黑"/>
+              </a:rPr>
+              <a:t>第 4 步</a:t>
+            </a:r>
+          </a:p>
+        </p:txBody>
+      </p:sp>
+      <p:sp>
+        <p:nvSpPr>
+          <p:cNvPr id="31" name="Rounded Rectangle 30"/>
+          <p:cNvSpPr/>
+          <p:nvPr/>
+        </p:nvSpPr>
+        <p:spPr>
+          <a:xfrm>
+            <a:off x="10369296" y="3200400"/>
+            <a:ext cx="1024128" cy="274320"/>
+          </a:xfrm>
+          <a:prstGeom prst="roundRect">
+            <a:avLst>
+              <a:gd name="adj" fmla="val 50000"/>
+            </a:avLst>
+          </a:prstGeom>
+          <a:solidFill>
+            <a:srgbClr val="FF7A1A"/>
+          </a:solidFill>
+          <a:ln>
+            <a:noFill/>
+          </a:ln>
+          <a:effectLst/>
+        </p:spPr>
+        <p:style>
+          <a:lnRef idx="1">
+            <a:schemeClr val="accent1"/>
+          </a:lnRef>
+          <a:fillRef idx="3">
+            <a:schemeClr val="accent1"/>
+          </a:fillRef>
+          <a:effectRef idx="2">
+            <a:schemeClr val="accent1"/>
+          </a:effectRef>
+          <a:fontRef idx="minor">
+            <a:schemeClr val="lt1"/>
+          </a:fontRef>
+        </p:style>
+        <p:txBody>
+          <a:bodyPr rtlCol="0" anchor="ctr"/>
+          <a:lstStyle/>
+          <a:p/>
+        </p:txBody>
+      </p:sp>
+      <p:sp>
+        <p:nvSpPr>
+          <p:cNvPr id="32" name="TextBox 31"/>
+          <p:cNvSpPr txBox="1"/>
+          <p:nvPr/>
+        </p:nvSpPr>
+        <p:spPr>
+          <a:xfrm>
+            <a:off x="10369296" y="3200400"/>
+            <a:ext cx="1024128" cy="274320"/>
+          </a:xfrm>
+          <a:prstGeom prst="rect">
+            <a:avLst/>
+          </a:prstGeom>
+          <a:noFill/>
+        </p:spPr>
+        <p:txBody>
+          <a:bodyPr wrap="square" lIns="0" rIns="0" tIns="0" bIns="0" anchor="ctr">
+            <a:spAutoFit/>
+          </a:bodyPr>
+          <a:lstStyle/>
+          <a:p>
+            <a:pPr algn="ctr"/>
+            <a:r>
+              <a:rPr sz="1100" b="1">
+                <a:solidFill>
+                  <a:srgbClr val="FFFFFF"/>
+                </a:solidFill>
+                <a:latin typeface="微软雅黑"/>
+                <a:ea typeface="微软雅黑"/>
+                <a:cs typeface="微软雅黑"/>
+              </a:rPr>
+              <a:t>需要修改</a:t>
+            </a:r>
+          </a:p>
+        </p:txBody>
+      </p:sp>
+      <p:sp>
+        <p:nvSpPr>
+          <p:cNvPr id="33" name="TextBox 32"/>
+          <p:cNvSpPr txBox="1"/>
+          <p:nvPr/>
+        </p:nvSpPr>
+        <p:spPr>
+          <a:xfrm>
+            <a:off x="4709160" y="3611880"/>
+            <a:ext cx="6949440" cy="320040"/>
+          </a:xfrm>
+          <a:prstGeom prst="rect">
+            <a:avLst/>
+          </a:prstGeom>
+          <a:noFill/>
+        </p:spPr>
+        <p:txBody>
+          <a:bodyPr wrap="square" lIns="0" rIns="0" tIns="0" bIns="0" anchor="t">
+            <a:spAutoFit/>
+          </a:bodyPr>
+          <a:lstStyle/>
+          <a:p>
+            <a:pPr algn="l"/>
+            <a:r>
+              <a:rPr sz="1400" b="1">
+                <a:solidFill>
+                  <a:srgbClr val="15315E"/>
+                </a:solidFill>
+                <a:latin typeface="微软雅黑"/>
+                <a:ea typeface="微软雅黑"/>
+                <a:cs typeface="微软雅黑"/>
+              </a:rPr>
+              <a:t>第 4 步怎么走</a:t>
+            </a:r>
+          </a:p>
+        </p:txBody>
+      </p:sp>
+      <p:sp>
+        <p:nvSpPr>
+          <p:cNvPr id="34" name="Rounded Rectangle 33"/>
+          <p:cNvSpPr/>
+          <p:nvPr/>
+        </p:nvSpPr>
+        <p:spPr>
+          <a:xfrm>
+            <a:off x="4709160" y="4069080"/>
+            <a:ext cx="777240" cy="731520"/>
+          </a:xfrm>
+          <a:prstGeom prst="roundRect">
+            <a:avLst>
+              <a:gd name="adj" fmla="val 20000"/>
+            </a:avLst>
           </a:prstGeom>
           <a:solidFill>
             <a:srgbClr val="7A8599"/>
@@ -11561,24 +12142,107 @@
           <a:p/>
         </p:txBody>
       </p:sp>
+      <p:sp>
+        <p:nvSpPr>
+          <p:cNvPr id="35" name="TextBox 34"/>
+          <p:cNvSpPr txBox="1"/>
+          <p:nvPr/>
+        </p:nvSpPr>
+        <p:spPr>
+          <a:xfrm>
+            <a:off x="4709160" y="4069080"/>
+            <a:ext cx="777240" cy="731520"/>
+          </a:xfrm>
+          <a:prstGeom prst="rect">
+            <a:avLst/>
+          </a:prstGeom>
+          <a:noFill/>
+        </p:spPr>
+        <p:txBody>
+          <a:bodyPr wrap="square" lIns="0" rIns="0" tIns="0" bIns="0" anchor="ctr">
+            <a:spAutoFit/>
+          </a:bodyPr>
+          <a:lstStyle/>
+          <a:p>
+            <a:pPr algn="ctr"/>
+            <a:r>
+              <a:rPr sz="1400" b="1">
+                <a:solidFill>
+                  <a:srgbClr val="FFFFFF"/>
+                </a:solidFill>
+                <a:latin typeface="微软雅黑"/>
+                <a:ea typeface="微软雅黑"/>
+                <a:cs typeface="微软雅黑"/>
+              </a:rPr>
+              <a:t>之前</a:t>
+            </a:r>
+          </a:p>
+        </p:txBody>
+      </p:sp>
+      <p:sp>
+        <p:nvSpPr>
+          <p:cNvPr id="36" name="Rounded Rectangle 35"/>
+          <p:cNvSpPr/>
+          <p:nvPr/>
+        </p:nvSpPr>
+        <p:spPr>
+          <a:xfrm>
+            <a:off x="5605272" y="4069080"/>
+            <a:ext cx="6053328" cy="731520"/>
+          </a:xfrm>
+          <a:prstGeom prst="roundRect">
+            <a:avLst>
+              <a:gd name="adj" fmla="val 6000"/>
+            </a:avLst>
+          </a:prstGeom>
+          <a:solidFill>
+            <a:srgbClr val="FFF3EA"/>
+          </a:solidFill>
+          <a:ln w="12700">
+            <a:solidFill>
+              <a:srgbClr val="FF7A1A"/>
+            </a:solidFill>
+          </a:ln>
+          <a:effectLst/>
+        </p:spPr>
+        <p:style>
+          <a:lnRef idx="1">
+            <a:schemeClr val="accent1"/>
+          </a:lnRef>
+          <a:fillRef idx="3">
+            <a:schemeClr val="accent1"/>
+          </a:fillRef>
+          <a:effectRef idx="2">
+            <a:schemeClr val="accent1"/>
+          </a:effectRef>
+          <a:fontRef idx="minor">
+            <a:schemeClr val="lt1"/>
+          </a:fontRef>
+        </p:style>
+        <p:txBody>
+          <a:bodyPr rtlCol="0" anchor="ctr"/>
+          <a:lstStyle/>
+          <a:p/>
+        </p:txBody>
+      </p:sp>
       <p:pic>
         <p:nvPicPr>
-          <p:cNvPr id="20" name="Picture 19" descr="FaRotate_w.png"/>
+          <p:cNvPr id="37" name="Picture 36" descr="FaRotate_o.png"/>
           <p:cNvPicPr>
             <a:picLocks noChangeAspect="1"/>
           </p:cNvPicPr>
           <p:nvPr/>
         </p:nvPicPr>
         <p:blipFill>
-          <a:blip r:embed="rId5"/>
+          <a:blip r:embed="rId9"/>
           <a:stretch>
             <a:fillRect/>
           </a:stretch>
         </p:blipFill>
         <p:spPr>
           <a:xfrm>
-            <a:off x="891540" y="3863339"/>
-            <a:ext cx="320040" cy="320040"/>
+            <a:off x="5760720" y="4270248"/>
+            <a:ext cx="329184" cy="329184"/>
           </a:xfrm>
           <a:prstGeom prst="rect">
             <a:avLst/>
@@ -11587,14 +12251,14 @@
       </p:pic>
       <p:sp>
         <p:nvSpPr>
-          <p:cNvPr id="21" name="TextBox 20"/>
+          <p:cNvPr id="38" name="TextBox 37"/>
           <p:cNvSpPr txBox="1"/>
           <p:nvPr/>
         </p:nvSpPr>
         <p:spPr>
           <a:xfrm>
-            <a:off x="1508760" y="3657600"/>
-            <a:ext cx="1874519" cy="731520"/>
+            <a:off x="6217920" y="4069080"/>
+            <a:ext cx="3291840" cy="731520"/>
           </a:xfrm>
           <a:prstGeom prst="rect">
             <a:avLst/>
@@ -11609,7 +12273,7 @@
           <a:p>
             <a:pPr algn="l"/>
             <a:r>
-              <a:rPr sz="1500" b="1">
+              <a:rPr sz="1300" b="1">
                 <a:solidFill>
                   <a:srgbClr val="3D4757"/>
                 </a:solidFill>
@@ -11624,18 +12288,18 @@
       </p:sp>
       <p:sp>
         <p:nvSpPr>
-          <p:cNvPr id="22" name="Rounded Rectangle 21"/>
+          <p:cNvPr id="39" name="Rounded Rectangle 38"/>
           <p:cNvSpPr/>
           <p:nvPr/>
         </p:nvSpPr>
         <p:spPr>
           <a:xfrm>
-            <a:off x="731520" y="4983480"/>
-            <a:ext cx="2514600" cy="640080"/>
+            <a:off x="9601200" y="4251960"/>
+            <a:ext cx="1920240" cy="365760"/>
           </a:xfrm>
           <a:prstGeom prst="roundRect">
             <a:avLst>
-              <a:gd name="adj" fmla="val 30000"/>
+              <a:gd name="adj" fmla="val 50000"/>
             </a:avLst>
           </a:prstGeom>
           <a:solidFill>
@@ -11670,14 +12334,14 @@
       </p:sp>
       <p:sp>
         <p:nvSpPr>
-          <p:cNvPr id="23" name="TextBox 22"/>
+          <p:cNvPr id="40" name="TextBox 39"/>
           <p:cNvSpPr txBox="1"/>
           <p:nvPr/>
         </p:nvSpPr>
         <p:spPr>
           <a:xfrm>
-            <a:off x="731520" y="4983480"/>
-            <a:ext cx="2514600" cy="640080"/>
+            <a:off x="9601200" y="4251960"/>
+            <a:ext cx="1920240" cy="365760"/>
           </a:xfrm>
           <a:prstGeom prst="rect">
             <a:avLst/>
@@ -11692,7 +12356,7 @@
           <a:p>
             <a:pPr algn="ctr"/>
             <a:r>
-              <a:rPr sz="1400" b="1">
+              <a:rPr sz="1100" b="1">
                 <a:solidFill>
                   <a:srgbClr val="FF7A1A"/>
                 </a:solidFill>
@@ -11707,14 +12371,95 @@
       </p:sp>
       <p:sp>
         <p:nvSpPr>
-          <p:cNvPr id="24" name="Rounded Rectangle 23"/>
+          <p:cNvPr id="41" name="Rounded Rectangle 40"/>
           <p:cNvSpPr/>
           <p:nvPr/>
         </p:nvSpPr>
         <p:spPr>
           <a:xfrm>
-            <a:off x="3886200" y="2971800"/>
-            <a:ext cx="3063240" cy="3108960"/>
+            <a:off x="4709160" y="5029200"/>
+            <a:ext cx="777240" cy="731520"/>
+          </a:xfrm>
+          <a:prstGeom prst="roundRect">
+            <a:avLst>
+              <a:gd name="adj" fmla="val 20000"/>
+            </a:avLst>
+          </a:prstGeom>
+          <a:solidFill>
+            <a:srgbClr val="287DFA"/>
+          </a:solidFill>
+          <a:ln>
+            <a:noFill/>
+          </a:ln>
+          <a:effectLst/>
+        </p:spPr>
+        <p:style>
+          <a:lnRef idx="1">
+            <a:schemeClr val="accent1"/>
+          </a:lnRef>
+          <a:fillRef idx="3">
+            <a:schemeClr val="accent1"/>
+          </a:fillRef>
+          <a:effectRef idx="2">
+            <a:schemeClr val="accent1"/>
+          </a:effectRef>
+          <a:fontRef idx="minor">
+            <a:schemeClr val="lt1"/>
+          </a:fontRef>
+        </p:style>
+        <p:txBody>
+          <a:bodyPr rtlCol="0" anchor="ctr"/>
+          <a:lstStyle/>
+          <a:p/>
+        </p:txBody>
+      </p:sp>
+      <p:sp>
+        <p:nvSpPr>
+          <p:cNvPr id="42" name="TextBox 41"/>
+          <p:cNvSpPr txBox="1"/>
+          <p:nvPr/>
+        </p:nvSpPr>
+        <p:spPr>
+          <a:xfrm>
+            <a:off x="4709160" y="5029200"/>
+            <a:ext cx="777240" cy="731520"/>
+          </a:xfrm>
+          <a:prstGeom prst="rect">
+            <a:avLst/>
+          </a:prstGeom>
+          <a:noFill/>
+        </p:spPr>
+        <p:txBody>
+          <a:bodyPr wrap="square" lIns="0" rIns="0" tIns="0" bIns="0" anchor="ctr">
+            <a:spAutoFit/>
+          </a:bodyPr>
+          <a:lstStyle/>
+          <a:p>
+            <a:pPr algn="ctr"/>
+            <a:r>
+              <a:rPr sz="1400" b="1">
+                <a:solidFill>
+                  <a:srgbClr val="FFFFFF"/>
+                </a:solidFill>
+                <a:latin typeface="微软雅黑"/>
+                <a:ea typeface="微软雅黑"/>
+                <a:cs typeface="微软雅黑"/>
+              </a:rPr>
+              <a:t>之后</a:t>
+            </a:r>
+          </a:p>
+        </p:txBody>
+      </p:sp>
+      <p:sp>
+        <p:nvSpPr>
+          <p:cNvPr id="43" name="Rounded Rectangle 42"/>
+          <p:cNvSpPr/>
+          <p:nvPr/>
+        </p:nvSpPr>
+        <p:spPr>
+          <a:xfrm>
+            <a:off x="5605272" y="5029200"/>
+            <a:ext cx="6053328" cy="731520"/>
           </a:xfrm>
           <a:prstGeom prst="roundRect">
             <a:avLst>
@@ -11751,16 +12496,40 @@
           <a:p/>
         </p:txBody>
       </p:sp>
-      <p:sp>
-        <p:nvSpPr>
-          <p:cNvPr id="25" name="TextBox 24"/>
+      <p:pic>
+        <p:nvPicPr>
+          <p:cNvPr id="44" name="Picture 43" descr="FaCircleCheck_b.png"/>
+          <p:cNvPicPr>
+            <a:picLocks noChangeAspect="1"/>
+          </p:cNvPicPr>
+          <p:nvPr/>
+        </p:nvPicPr>
+        <p:blipFill>
+          <a:blip r:embed="rId10"/>
+          <a:stretch>
+            <a:fillRect/>
+          </a:stretch>
+        </p:blipFill>
+        <p:spPr>
+          <a:xfrm>
+            <a:off x="5760720" y="5230368"/>
+            <a:ext cx="329184" cy="329184"/>
+          </a:xfrm>
+          <a:prstGeom prst="rect">
+            <a:avLst/>
+          </a:prstGeom>
+        </p:spPr>
+      </p:pic>
+      <p:sp>
+        <p:nvSpPr>
+          <p:cNvPr id="45" name="TextBox 44"/>
           <p:cNvSpPr txBox="1"/>
           <p:nvPr/>
         </p:nvSpPr>
         <p:spPr>
           <a:xfrm>
-            <a:off x="4160520" y="3127248"/>
-            <a:ext cx="2560320" cy="365760"/>
+            <a:off x="6217920" y="5029200"/>
+            <a:ext cx="3291840" cy="731520"/>
           </a:xfrm>
           <a:prstGeom prst="rect">
             <a:avLst/>
@@ -11768,143 +12537,40 @@
           <a:noFill/>
         </p:spPr>
         <p:txBody>
-          <a:bodyPr wrap="square" lIns="0" rIns="0" tIns="0" bIns="0" anchor="t">
+          <a:bodyPr wrap="square" lIns="0" rIns="0" tIns="0" bIns="0" anchor="ctr">
             <a:spAutoFit/>
           </a:bodyPr>
           <a:lstStyle/>
           <a:p>
             <a:pPr algn="l"/>
             <a:r>
-              <a:rPr sz="1800" b="1">
-                <a:solidFill>
-                  <a:srgbClr val="287DFA"/>
+              <a:rPr sz="1300" b="1">
+                <a:solidFill>
+                  <a:srgbClr val="3D4757"/>
                 </a:solidFill>
                 <a:latin typeface="微软雅黑"/>
                 <a:ea typeface="微软雅黑"/>
                 <a:cs typeface="微软雅黑"/>
               </a:rPr>
-              <a:t>之后</a:t>
+              <a:t>支付宝（非黑名单）订单直接走买票接口</a:t>
             </a:r>
           </a:p>
         </p:txBody>
       </p:sp>
       <p:sp>
         <p:nvSpPr>
-          <p:cNvPr id="26" name="icon-circle"/>
+          <p:cNvPr id="46" name="Rounded Rectangle 45"/>
           <p:cNvSpPr/>
           <p:nvPr/>
         </p:nvSpPr>
         <p:spPr>
           <a:xfrm>
-            <a:off x="4160520" y="3703320"/>
-            <a:ext cx="640080" cy="640080"/>
-          </a:xfrm>
-          <a:prstGeom prst="ellipse">
-            <a:avLst/>
-          </a:prstGeom>
-          <a:solidFill>
-            <a:srgbClr val="287DFA"/>
-          </a:solidFill>
-          <a:ln>
-            <a:noFill/>
-          </a:ln>
-          <a:effectLst/>
-        </p:spPr>
-        <p:style>
-          <a:lnRef idx="1">
-            <a:schemeClr val="accent1"/>
-          </a:lnRef>
-          <a:fillRef idx="3">
-            <a:schemeClr val="accent1"/>
-          </a:fillRef>
-          <a:effectRef idx="2">
-            <a:schemeClr val="accent1"/>
-          </a:effectRef>
-          <a:fontRef idx="minor">
-            <a:schemeClr val="lt1"/>
-          </a:fontRef>
-        </p:style>
-        <p:txBody>
-          <a:bodyPr rtlCol="0" anchor="ctr"/>
-          <a:lstStyle/>
-          <a:p/>
-        </p:txBody>
-      </p:sp>
-      <p:pic>
-        <p:nvPicPr>
-          <p:cNvPr id="27" name="Picture 26" descr="FaTicket_w.png"/>
-          <p:cNvPicPr>
-            <a:picLocks noChangeAspect="1"/>
-          </p:cNvPicPr>
-          <p:nvPr/>
-        </p:nvPicPr>
-        <p:blipFill>
-          <a:blip r:embed="rId6"/>
-          <a:stretch>
-            <a:fillRect/>
-          </a:stretch>
-        </p:blipFill>
-        <p:spPr>
-          <a:xfrm>
-            <a:off x="4320540" y="3863339"/>
-            <a:ext cx="320040" cy="320040"/>
-          </a:xfrm>
-          <a:prstGeom prst="rect">
-            <a:avLst/>
-          </a:prstGeom>
-        </p:spPr>
-      </p:pic>
-      <p:sp>
-        <p:nvSpPr>
-          <p:cNvPr id="28" name="TextBox 27"/>
-          <p:cNvSpPr txBox="1"/>
-          <p:nvPr/>
-        </p:nvSpPr>
-        <p:spPr>
-          <a:xfrm>
-            <a:off x="4937760" y="3657600"/>
-            <a:ext cx="1874519" cy="731520"/>
-          </a:xfrm>
-          <a:prstGeom prst="rect">
-            <a:avLst/>
-          </a:prstGeom>
-          <a:noFill/>
-        </p:spPr>
-        <p:txBody>
-          <a:bodyPr wrap="square" lIns="0" rIns="0" tIns="0" bIns="0" anchor="ctr">
-            <a:spAutoFit/>
-          </a:bodyPr>
-          <a:lstStyle/>
-          <a:p>
-            <a:pPr algn="l"/>
-            <a:r>
-              <a:rPr sz="1500" b="1">
-                <a:solidFill>
-                  <a:srgbClr val="3D4757"/>
-                </a:solidFill>
-                <a:latin typeface="微软雅黑"/>
-                <a:ea typeface="微软雅黑"/>
-                <a:cs typeface="微软雅黑"/>
-              </a:rPr>
-              <a:t>直接走买票接口出票</a:t>
-            </a:r>
-          </a:p>
-        </p:txBody>
-      </p:sp>
-      <p:sp>
-        <p:nvSpPr>
-          <p:cNvPr id="29" name="Rounded Rectangle 28"/>
-          <p:cNvSpPr/>
-          <p:nvPr/>
-        </p:nvSpPr>
-        <p:spPr>
-          <a:xfrm>
-            <a:off x="4160520" y="4983480"/>
-            <a:ext cx="2514600" cy="640080"/>
+            <a:off x="9601200" y="5212080"/>
+            <a:ext cx="1920240" cy="365760"/>
           </a:xfrm>
           <a:prstGeom prst="roundRect">
             <a:avLst>
-              <a:gd name="adj" fmla="val 30000"/>
+              <a:gd name="adj" fmla="val 50000"/>
             </a:avLst>
           </a:prstGeom>
           <a:solidFill>
@@ -11939,14 +12605,14 @@
       </p:sp>
       <p:sp>
         <p:nvSpPr>
-          <p:cNvPr id="30" name="TextBox 29"/>
+          <p:cNvPr id="47" name="TextBox 46"/>
           <p:cNvSpPr txBox="1"/>
           <p:nvPr/>
         </p:nvSpPr>
         <p:spPr>
           <a:xfrm>
-            <a:off x="4160520" y="4983480"/>
-            <a:ext cx="2514600" cy="640080"/>
+            <a:off x="9601200" y="5212080"/>
+            <a:ext cx="1920240" cy="365760"/>
           </a:xfrm>
           <a:prstGeom prst="rect">
             <a:avLst/>
@@ -11961,7 +12627,7 @@
           <a:p>
             <a:pPr algn="ctr"/>
             <a:r>
-              <a:rPr sz="1400" b="1">
+              <a:rPr sz="1100" b="1">
                 <a:solidFill>
                   <a:srgbClr val="287DFA"/>
                 </a:solidFill>
@@ -11970,142 +12636,6 @@
                 <a:cs typeface="微软雅黑"/>
               </a:rPr>
               <a:t>上线后增量【待补】</a:t>
-            </a:r>
-          </a:p>
-        </p:txBody>
-      </p:sp>
-      <p:pic>
-        <p:nvPicPr>
-          <p:cNvPr id="31" name="真实截图-抢必走" descr="qbz.png"/>
-          <p:cNvPicPr>
-            <a:picLocks noChangeAspect="1"/>
-          </p:cNvPicPr>
-          <p:nvPr/>
-        </p:nvPicPr>
-        <p:blipFill>
-          <a:blip r:embed="rId7"/>
-          <a:stretch>
-            <a:fillRect/>
-          </a:stretch>
-        </p:blipFill>
-        <p:spPr>
-          <a:xfrm>
-            <a:off x="7721193" y="1481328"/>
-            <a:ext cx="1913839" cy="4206240"/>
-          </a:xfrm>
-          <a:prstGeom prst="roundRect">
-            <a:avLst>
-              <a:gd name="adj" fmla="val 6000"/>
-            </a:avLst>
-          </a:prstGeom>
-          <a:ln w="25400">
-            <a:solidFill>
-              <a:srgbClr val="000000"/>
-            </a:solidFill>
-          </a:ln>
-        </p:spPr>
-      </p:pic>
-      <p:sp>
-        <p:nvSpPr>
-          <p:cNvPr id="32" name="TextBox 31"/>
-          <p:cNvSpPr txBox="1"/>
-          <p:nvPr/>
-        </p:nvSpPr>
-        <p:spPr>
-          <a:xfrm>
-            <a:off x="7721193" y="5760720"/>
-            <a:ext cx="1913839" cy="274320"/>
-          </a:xfrm>
-          <a:prstGeom prst="rect">
-            <a:avLst/>
-          </a:prstGeom>
-          <a:noFill/>
-        </p:spPr>
-        <p:txBody>
-          <a:bodyPr wrap="square" lIns="0" rIns="0" tIns="0" bIns="0" anchor="t">
-            <a:spAutoFit/>
-          </a:bodyPr>
-          <a:lstStyle/>
-          <a:p>
-            <a:pPr algn="ctr"/>
-            <a:r>
-              <a:rPr sz="1200" b="1">
-                <a:solidFill>
-                  <a:srgbClr val="3D4757"/>
-                </a:solidFill>
-                <a:latin typeface="微软雅黑"/>
-                <a:ea typeface="微软雅黑"/>
-                <a:cs typeface="微软雅黑"/>
-              </a:rPr>
-              <a:t>抢必走</a:t>
-            </a:r>
-          </a:p>
-        </p:txBody>
-      </p:sp>
-      <p:pic>
-        <p:nvPicPr>
-          <p:cNvPr id="33" name="真实截图-有票方案" descr="yoyo.png"/>
-          <p:cNvPicPr>
-            <a:picLocks noChangeAspect="1"/>
-          </p:cNvPicPr>
-          <p:nvPr/>
-        </p:nvPicPr>
-        <p:blipFill>
-          <a:blip r:embed="rId8"/>
-          <a:stretch>
-            <a:fillRect/>
-          </a:stretch>
-        </p:blipFill>
-        <p:spPr>
-          <a:xfrm>
-            <a:off x="9817912" y="1481328"/>
-            <a:ext cx="1913839" cy="4206240"/>
-          </a:xfrm>
-          <a:prstGeom prst="roundRect">
-            <a:avLst>
-              <a:gd name="adj" fmla="val 6000"/>
-            </a:avLst>
-          </a:prstGeom>
-          <a:ln w="25400">
-            <a:solidFill>
-              <a:srgbClr val="000000"/>
-            </a:solidFill>
-          </a:ln>
-        </p:spPr>
-      </p:pic>
-      <p:sp>
-        <p:nvSpPr>
-          <p:cNvPr id="34" name="TextBox 33"/>
-          <p:cNvSpPr txBox="1"/>
-          <p:nvPr/>
-        </p:nvSpPr>
-        <p:spPr>
-          <a:xfrm>
-            <a:off x="9817912" y="5760720"/>
-            <a:ext cx="1913839" cy="274320"/>
-          </a:xfrm>
-          <a:prstGeom prst="rect">
-            <a:avLst/>
-          </a:prstGeom>
-          <a:noFill/>
-        </p:spPr>
-        <p:txBody>
-          <a:bodyPr wrap="square" lIns="0" rIns="0" tIns="0" bIns="0" anchor="t">
-            <a:spAutoFit/>
-          </a:bodyPr>
-          <a:lstStyle/>
-          <a:p>
-            <a:pPr algn="ctr"/>
-            <a:r>
-              <a:rPr sz="1200" b="1">
-                <a:solidFill>
-                  <a:srgbClr val="3D4757"/>
-                </a:solidFill>
-                <a:latin typeface="微软雅黑"/>
-                <a:ea typeface="微软雅黑"/>
-                <a:cs typeface="微软雅黑"/>
-              </a:rPr>
-              <a:t>有票方案页</a:t>
             </a:r>
           </a:p>
         </p:txBody>

--- a/答辩PPT.pptx
+++ b/答辩PPT.pptx
@@ -1321,28 +1321,59 @@
           <a:lstStyle/>
           <a:p>
             <a:r>
-              <a:t>说到接下来的规划，我对抢票业务的理解是：它要同时平衡三件事，票量、收益和体验。前面讲到的几个需求，其实都是在这三者之间找平衡点：既要让更多订单出票，也要让用户在过程中有好的感受，同时守住平台的收益。接下来我也想围绕这三点继续推进。</a:t>
+              <a:t>说到接下来的规划，我对抢票业务的理解是：它要同时平衡三件事，票量、收益和体验。</a:t>
             </a:r>
           </a:p>
-          <a:p/>
           <a:p>
             <a:r>
-              <a:t>票量上，我想重点补齐小程序的出票。小程序受风控影响比较大，没法走代付出票，需要跳到客服对话付款的订单，只能通过支付召回来完成，付款这一步的流失比较多。接下来想从两个方向推进：一是在小程序内部优化付款方式，比如接入微信合单支付，在稳住体验的前提下提升小程序的票量；二是做场景转换，把订单引导到成功率更高的路径上，比如召回用户回到 App 下单，或者引导用户在小程序里完成信用付授权。</a:t>
+              <a:t>前面讲到的几个需求，其实都是在这三者之间找平衡点：既要让更多订单出票，也要让用户在过程中有好的感受，同时守住平台的收益。</a:t>
             </a:r>
           </a:p>
-          <a:p/>
           <a:p>
             <a:r>
-              <a:t>收益上，我希望在合规的前提下，重新梳理各个场景里用户比较需要的服务，在目前线上的流程和环节中，补上一些收益场景的空白。同时，提高收益的前提是稳住用户体验，我目前正在探索的一个方向，就是外呼场景下的策略优化。</a:t>
+              <a:t>接下来我也想围绕这三点继续推进。</a:t>
             </a:r>
           </a:p>
-          <a:p/>
           <a:p>
             <a:r>
-              <a:t>AI 上，我希望从 AI native 的产品走进业务，把 AI 能力真正落到抢票业务的链路里。我一直在思考和探索的，是如何找出那些用传统方法不太好解决的痛点，引入 AI，并用我们平台用户最容易接受的方式呈现，提供他们当下最需要的能力，让 AI 真正服务于票量、收益和体验三者之间的平衡。</a:t>
+              <a:t>票量上，我想重点补齐小程序的支付策略。</a:t>
             </a:r>
           </a:p>
-          <a:p/>
+          <a:p>
+            <a:r>
+              <a:t>小程序受风控影响比较大，没法走代付出票，需要跳到客服对话付款的订单，只能通过支付召回来完成，付款这一步的流失比较多。</a:t>
+            </a:r>
+          </a:p>
+          <a:p>
+            <a:r>
+              <a:t>接下来想从两个方向推进：一是在小程序内部优化付款方式，比如接入微信合单支付，在稳住体验的前提下提升小程序的票量；二是做场景转换，把订单引导到成功率更高的路径上，比如召回用户回到 App 下单，或者引导用户在小程序里完成信用付授权。</a:t>
+            </a:r>
+          </a:p>
+          <a:p>
+            <a:r>
+              <a:t>收益上，我希望在合规的前提下，重新梳理各个场景里用户比较需要的服务，在目前线上的流程和环节中，补上一些收益场景的空白。</a:t>
+            </a:r>
+          </a:p>
+          <a:p>
+            <a:r>
+              <a:t>同时，提高收益的前提是稳住用户体验，我目前正在探索的一个方向，就是外呼场景下的策略优化。</a:t>
+            </a:r>
+          </a:p>
+          <a:p>
+            <a:r>
+              <a:t>AI 上，我希望从 AI native 的产品走进业务，把 AI 能力真正落到抢票业务的链路里。</a:t>
+            </a:r>
+          </a:p>
+          <a:p>
+            <a:r>
+              <a:t>我已经在自己的工作中把Ai运用固定为一套较为固定的流程，比如用飞书命令行工具，直接读取文档、群聊记录，行程我个人的工作日报和提醒，进行材料的整理和数据核对，并且用claudecode写了一个skill，能够辅助进行需求验收。</a:t>
+            </a:r>
+          </a:p>
+          <a:p>
+            <a:r>
+              <a:t>我一直在思考和探索的，还有如何找出那些用传统方法不太好解决的痛点，引入 AI，并用我们平台用户最容易接受的方式呈现，提供他们当下最需要的能力，让 AI 真正服务于票量、收益和体验三者之间的平衡。</a:t>
+            </a:r>
+          </a:p>
           <a:p>
             <a:r>
               <a:t>以上就是我的分享，谢谢各位老师。</a:t>
@@ -16073,34 +16104,30 @@
                 <a:ea typeface="微软雅黑"/>
                 <a:cs typeface="微软雅黑"/>
               </a:rPr>
-              <a:t>抢票业务要同时平衡三件事，AI 服务于这三者的平衡</a:t>
+              <a:t>抢票业务要同时平衡票量、收益与体验，AI 服务于三者的平衡</a:t>
             </a:r>
           </a:p>
         </p:txBody>
       </p:sp>
       <p:sp>
         <p:nvSpPr>
-          <p:cNvPr id="4" name="Rounded Rectangle 3"/>
+          <p:cNvPr id="4" name="Isosceles Triangle 3"/>
           <p:cNvSpPr/>
           <p:nvPr/>
         </p:nvSpPr>
         <p:spPr>
           <a:xfrm>
-            <a:off x="457200" y="1508760"/>
-            <a:ext cx="3630168" cy="2697480"/>
-          </a:xfrm>
-          <a:prstGeom prst="roundRect">
-            <a:avLst>
-              <a:gd name="adj" fmla="val 6000"/>
-            </a:avLst>
+            <a:off x="868680" y="1965960"/>
+            <a:ext cx="3017520" cy="2743200"/>
+          </a:xfrm>
+          <a:prstGeom prst="triangle">
+            <a:avLst/>
           </a:prstGeom>
           <a:solidFill>
-            <a:srgbClr val="F5F9FF"/>
+            <a:srgbClr val="EAF2FF"/>
           </a:solidFill>
-          <a:ln w="12700">
-            <a:solidFill>
-              <a:srgbClr val="D3E2FB"/>
-            </a:solidFill>
+          <a:ln>
+            <a:noFill/>
           </a:ln>
           <a:effectLst/>
         </p:spPr>
@@ -16132,8 +16159,8 @@
         </p:nvSpPr>
         <p:spPr>
           <a:xfrm>
-            <a:off x="731520" y="1737360"/>
-            <a:ext cx="731520" cy="731520"/>
+            <a:off x="1993392" y="1399032"/>
+            <a:ext cx="768096" cy="768096"/>
           </a:xfrm>
           <a:prstGeom prst="ellipse">
             <a:avLst/>
@@ -16168,7 +16195,7 @@
       </p:sp>
       <p:pic>
         <p:nvPicPr>
-          <p:cNvPr id="6" name="Picture 5" descr="FaMobileScreenButton_w.png"/>
+          <p:cNvPr id="6" name="Picture 5" descr="FaTicket_w.png"/>
           <p:cNvPicPr>
             <a:picLocks noChangeAspect="1"/>
           </p:cNvPicPr>
@@ -16182,8 +16209,8 @@
         </p:blipFill>
         <p:spPr>
           <a:xfrm>
-            <a:off x="914400" y="1920240"/>
-            <a:ext cx="365760" cy="365760"/>
+            <a:off x="2185416" y="1591056"/>
+            <a:ext cx="384048" cy="384048"/>
           </a:xfrm>
           <a:prstGeom prst="rect">
             <a:avLst/>
@@ -16198,8 +16225,8 @@
         </p:nvSpPr>
         <p:spPr>
           <a:xfrm>
-            <a:off x="1645920" y="1737360"/>
-            <a:ext cx="2286000" cy="411480"/>
+            <a:off x="1828800" y="2194560"/>
+            <a:ext cx="1097280" cy="320040"/>
           </a:xfrm>
           <a:prstGeom prst="rect">
             <a:avLst/>
@@ -16212,11 +16239,11 @@
           </a:bodyPr>
           <a:lstStyle/>
           <a:p>
-            <a:pPr algn="l"/>
+            <a:pPr algn="ctr"/>
             <a:r>
-              <a:rPr sz="2000" b="1">
+              <a:rPr sz="1500" b="1">
                 <a:solidFill>
-                  <a:srgbClr val="287DFA"/>
+                  <a:srgbClr val="15315E"/>
                 </a:solidFill>
                 <a:latin typeface="微软雅黑"/>
                 <a:ea typeface="微软雅黑"/>
@@ -16229,14 +16256,80 @@
       </p:sp>
       <p:sp>
         <p:nvSpPr>
-          <p:cNvPr id="8" name="TextBox 7"/>
+          <p:cNvPr id="8" name="icon-circle"/>
+          <p:cNvSpPr/>
+          <p:nvPr/>
+        </p:nvSpPr>
+        <p:spPr>
+          <a:xfrm>
+            <a:off x="484632" y="4325112"/>
+            <a:ext cx="768096" cy="768096"/>
+          </a:xfrm>
+          <a:prstGeom prst="ellipse">
+            <a:avLst/>
+          </a:prstGeom>
+          <a:solidFill>
+            <a:srgbClr val="287DFA"/>
+          </a:solidFill>
+          <a:ln>
+            <a:noFill/>
+          </a:ln>
+          <a:effectLst/>
+        </p:spPr>
+        <p:style>
+          <a:lnRef idx="1">
+            <a:schemeClr val="accent1"/>
+          </a:lnRef>
+          <a:fillRef idx="3">
+            <a:schemeClr val="accent1"/>
+          </a:fillRef>
+          <a:effectRef idx="2">
+            <a:schemeClr val="accent1"/>
+          </a:effectRef>
+          <a:fontRef idx="minor">
+            <a:schemeClr val="lt1"/>
+          </a:fontRef>
+        </p:style>
+        <p:txBody>
+          <a:bodyPr rtlCol="0" anchor="ctr"/>
+          <a:lstStyle/>
+          <a:p/>
+        </p:txBody>
+      </p:sp>
+      <p:pic>
+        <p:nvPicPr>
+          <p:cNvPr id="9" name="Picture 8" descr="FaCoins_w.png"/>
+          <p:cNvPicPr>
+            <a:picLocks noChangeAspect="1"/>
+          </p:cNvPicPr>
+          <p:nvPr/>
+        </p:nvPicPr>
+        <p:blipFill>
+          <a:blip r:embed="rId4"/>
+          <a:stretch>
+            <a:fillRect/>
+          </a:stretch>
+        </p:blipFill>
+        <p:spPr>
+          <a:xfrm>
+            <a:off x="676656" y="4517136"/>
+            <a:ext cx="384048" cy="384048"/>
+          </a:xfrm>
+          <a:prstGeom prst="rect">
+            <a:avLst/>
+          </a:prstGeom>
+        </p:spPr>
+      </p:pic>
+      <p:sp>
+        <p:nvSpPr>
+          <p:cNvPr id="10" name="TextBox 9"/>
           <p:cNvSpPr txBox="1"/>
           <p:nvPr/>
         </p:nvSpPr>
         <p:spPr>
           <a:xfrm>
-            <a:off x="1645920" y="2148840"/>
-            <a:ext cx="2331720" cy="365760"/>
+            <a:off x="320040" y="5120640"/>
+            <a:ext cx="1097280" cy="320040"/>
           </a:xfrm>
           <a:prstGeom prst="rect">
             <a:avLst/>
@@ -16249,7 +16342,213 @@
           </a:bodyPr>
           <a:lstStyle/>
           <a:p>
-            <a:pPr algn="l"/>
+            <a:pPr algn="ctr"/>
+            <a:r>
+              <a:rPr sz="1500" b="1">
+                <a:solidFill>
+                  <a:srgbClr val="15315E"/>
+                </a:solidFill>
+                <a:latin typeface="微软雅黑"/>
+                <a:ea typeface="微软雅黑"/>
+                <a:cs typeface="微软雅黑"/>
+              </a:rPr>
+              <a:t>收益</a:t>
+            </a:r>
+          </a:p>
+        </p:txBody>
+      </p:sp>
+      <p:sp>
+        <p:nvSpPr>
+          <p:cNvPr id="11" name="icon-circle"/>
+          <p:cNvSpPr/>
+          <p:nvPr/>
+        </p:nvSpPr>
+        <p:spPr>
+          <a:xfrm>
+            <a:off x="3502152" y="4325112"/>
+            <a:ext cx="768096" cy="768096"/>
+          </a:xfrm>
+          <a:prstGeom prst="ellipse">
+            <a:avLst/>
+          </a:prstGeom>
+          <a:solidFill>
+            <a:srgbClr val="287DFA"/>
+          </a:solidFill>
+          <a:ln>
+            <a:noFill/>
+          </a:ln>
+          <a:effectLst/>
+        </p:spPr>
+        <p:style>
+          <a:lnRef idx="1">
+            <a:schemeClr val="accent1"/>
+          </a:lnRef>
+          <a:fillRef idx="3">
+            <a:schemeClr val="accent1"/>
+          </a:fillRef>
+          <a:effectRef idx="2">
+            <a:schemeClr val="accent1"/>
+          </a:effectRef>
+          <a:fontRef idx="minor">
+            <a:schemeClr val="lt1"/>
+          </a:fontRef>
+        </p:style>
+        <p:txBody>
+          <a:bodyPr rtlCol="0" anchor="ctr"/>
+          <a:lstStyle/>
+          <a:p/>
+        </p:txBody>
+      </p:sp>
+      <p:pic>
+        <p:nvPicPr>
+          <p:cNvPr id="12" name="Picture 11" descr="FaFaceSmile_w.png"/>
+          <p:cNvPicPr>
+            <a:picLocks noChangeAspect="1"/>
+          </p:cNvPicPr>
+          <p:nvPr/>
+        </p:nvPicPr>
+        <p:blipFill>
+          <a:blip r:embed="rId5"/>
+          <a:stretch>
+            <a:fillRect/>
+          </a:stretch>
+        </p:blipFill>
+        <p:spPr>
+          <a:xfrm>
+            <a:off x="3694176" y="4517136"/>
+            <a:ext cx="384048" cy="384048"/>
+          </a:xfrm>
+          <a:prstGeom prst="rect">
+            <a:avLst/>
+          </a:prstGeom>
+        </p:spPr>
+      </p:pic>
+      <p:sp>
+        <p:nvSpPr>
+          <p:cNvPr id="13" name="TextBox 12"/>
+          <p:cNvSpPr txBox="1"/>
+          <p:nvPr/>
+        </p:nvSpPr>
+        <p:spPr>
+          <a:xfrm>
+            <a:off x="3337560" y="5120640"/>
+            <a:ext cx="1097280" cy="320040"/>
+          </a:xfrm>
+          <a:prstGeom prst="rect">
+            <a:avLst/>
+          </a:prstGeom>
+          <a:noFill/>
+        </p:spPr>
+        <p:txBody>
+          <a:bodyPr wrap="square" lIns="0" rIns="0" tIns="0" bIns="0" anchor="t">
+            <a:spAutoFit/>
+          </a:bodyPr>
+          <a:lstStyle/>
+          <a:p>
+            <a:pPr algn="ctr"/>
+            <a:r>
+              <a:rPr sz="1500" b="1">
+                <a:solidFill>
+                  <a:srgbClr val="15315E"/>
+                </a:solidFill>
+                <a:latin typeface="微软雅黑"/>
+                <a:ea typeface="微软雅黑"/>
+                <a:cs typeface="微软雅黑"/>
+              </a:rPr>
+              <a:t>体验</a:t>
+            </a:r>
+          </a:p>
+        </p:txBody>
+      </p:sp>
+      <p:sp>
+        <p:nvSpPr>
+          <p:cNvPr id="14" name="icon-circle"/>
+          <p:cNvSpPr/>
+          <p:nvPr/>
+        </p:nvSpPr>
+        <p:spPr>
+          <a:xfrm>
+            <a:off x="1920240" y="3154680"/>
+            <a:ext cx="914400" cy="914400"/>
+          </a:xfrm>
+          <a:prstGeom prst="ellipse">
+            <a:avLst/>
+          </a:prstGeom>
+          <a:solidFill>
+            <a:srgbClr val="15315E"/>
+          </a:solidFill>
+          <a:ln>
+            <a:noFill/>
+          </a:ln>
+          <a:effectLst/>
+        </p:spPr>
+        <p:style>
+          <a:lnRef idx="1">
+            <a:schemeClr val="accent1"/>
+          </a:lnRef>
+          <a:fillRef idx="3">
+            <a:schemeClr val="accent1"/>
+          </a:fillRef>
+          <a:effectRef idx="2">
+            <a:schemeClr val="accent1"/>
+          </a:effectRef>
+          <a:fontRef idx="minor">
+            <a:schemeClr val="lt1"/>
+          </a:fontRef>
+        </p:style>
+        <p:txBody>
+          <a:bodyPr rtlCol="0" anchor="ctr"/>
+          <a:lstStyle/>
+          <a:p/>
+        </p:txBody>
+      </p:sp>
+      <p:pic>
+        <p:nvPicPr>
+          <p:cNvPr id="15" name="Picture 14" descr="FaBrain_w.png"/>
+          <p:cNvPicPr>
+            <a:picLocks noChangeAspect="1"/>
+          </p:cNvPicPr>
+          <p:nvPr/>
+        </p:nvPicPr>
+        <p:blipFill>
+          <a:blip r:embed="rId6"/>
+          <a:stretch>
+            <a:fillRect/>
+          </a:stretch>
+        </p:blipFill>
+        <p:spPr>
+          <a:xfrm>
+            <a:off x="2148840" y="3383280"/>
+            <a:ext cx="457200" cy="457200"/>
+          </a:xfrm>
+          <a:prstGeom prst="rect">
+            <a:avLst/>
+          </a:prstGeom>
+        </p:spPr>
+      </p:pic>
+      <p:sp>
+        <p:nvSpPr>
+          <p:cNvPr id="16" name="TextBox 15"/>
+          <p:cNvSpPr txBox="1"/>
+          <p:nvPr/>
+        </p:nvSpPr>
+        <p:spPr>
+          <a:xfrm>
+            <a:off x="1828800" y="4096512"/>
+            <a:ext cx="1097280" cy="320040"/>
+          </a:xfrm>
+          <a:prstGeom prst="rect">
+            <a:avLst/>
+          </a:prstGeom>
+          <a:noFill/>
+        </p:spPr>
+        <p:txBody>
+          <a:bodyPr wrap="square" lIns="0" rIns="0" tIns="0" bIns="0" anchor="t">
+            <a:spAutoFit/>
+          </a:bodyPr>
+          <a:lstStyle/>
+          <a:p>
+            <a:pPr algn="ctr"/>
             <a:r>
               <a:rPr sz="1400" b="1">
                 <a:solidFill>
@@ -16259,144 +16558,436 @@
                 <a:ea typeface="微软雅黑"/>
                 <a:cs typeface="微软雅黑"/>
               </a:rPr>
-              <a:t>补齐小程序的出票</a:t>
+              <a:t>AI</a:t>
             </a:r>
           </a:p>
         </p:txBody>
       </p:sp>
-      <p:sp>
-        <p:nvSpPr>
-          <p:cNvPr id="9" name="TextBox 8"/>
-          <p:cNvSpPr txBox="1"/>
-          <p:nvPr/>
-        </p:nvSpPr>
-        <p:spPr>
-          <a:xfrm>
-            <a:off x="731520" y="2743200"/>
-            <a:ext cx="3108960" cy="1828800"/>
-          </a:xfrm>
-          <a:prstGeom prst="rect">
-            <a:avLst/>
-          </a:prstGeom>
-          <a:noFill/>
-        </p:spPr>
-        <p:txBody>
-          <a:bodyPr wrap="square" lIns="0" rIns="0" tIns="0" bIns="0" anchor="t">
-            <a:spAutoFit/>
-          </a:bodyPr>
-          <a:lstStyle/>
-          <a:p>
-            <a:pPr algn="l"/>
-            <a:r>
-              <a:rPr sz="1000" b="0">
-                <a:solidFill>
-                  <a:srgbClr val="287DFA"/>
-                </a:solidFill>
-                <a:latin typeface="微软雅黑"/>
-                <a:ea typeface="微软雅黑"/>
-                <a:cs typeface="微软雅黑"/>
-              </a:rPr>
-              <a:t>●  </a:t>
-            </a:r>
-            <a:r>
-              <a:rPr sz="1400" b="0">
-                <a:solidFill>
-                  <a:srgbClr val="3D4757"/>
-                </a:solidFill>
-                <a:latin typeface="微软雅黑"/>
-                <a:ea typeface="微软雅黑"/>
-                <a:cs typeface="微软雅黑"/>
-              </a:rPr>
-              <a:t>小程序内优化付款：如接入微信合单支付</a:t>
-            </a:r>
-          </a:p>
-          <a:p>
-            <a:pPr algn="l">
-              <a:spcBef>
-                <a:spcPts val="800"/>
-              </a:spcBef>
-            </a:pPr>
-            <a:r>
-              <a:rPr sz="1000" b="0">
-                <a:solidFill>
-                  <a:srgbClr val="287DFA"/>
-                </a:solidFill>
-                <a:latin typeface="微软雅黑"/>
-                <a:ea typeface="微软雅黑"/>
-                <a:cs typeface="微软雅黑"/>
-              </a:rPr>
-              <a:t>●  </a:t>
-            </a:r>
-            <a:r>
-              <a:rPr sz="1400" b="0">
-                <a:solidFill>
-                  <a:srgbClr val="3D4757"/>
-                </a:solidFill>
-                <a:latin typeface="微软雅黑"/>
-                <a:ea typeface="微软雅黑"/>
-                <a:cs typeface="微软雅黑"/>
-              </a:rPr>
-              <a:t>场景转换：召回用户回到 App、引导小程序内信用付授权</a:t>
-            </a:r>
-          </a:p>
-        </p:txBody>
-      </p:sp>
-      <p:sp>
-        <p:nvSpPr>
-          <p:cNvPr id="10" name="Rounded Rectangle 9"/>
+      <p:graphicFrame>
+        <p:nvGraphicFramePr>
+          <p:cNvPr id="17" name="Table 16"/>
+          <p:cNvGraphicFramePr>
+            <a:graphicFrameLocks noGrp="1"/>
+          </p:cNvGraphicFramePr>
+          <p:nvPr/>
+        </p:nvGraphicFramePr>
+        <p:xfrm>
+          <a:off x="4526280" y="1554480"/>
+          <a:ext cx="7205472" cy="4526280"/>
+        </p:xfrm>
+        <a:graphic>
+          <a:graphicData uri="http://schemas.openxmlformats.org/drawingml/2006/table">
+            <a:tbl>
+              <a:tblPr firstRow="1" bandRow="1">
+                <a:tableStyleId>{5C22544A-7EE6-4342-B048-85BDC9FD1C3A}</a:tableStyleId>
+              </a:tblPr>
+              <a:tblGrid>
+                <a:gridCol w="1234440"/>
+                <a:gridCol w="2697480"/>
+                <a:gridCol w="3273552"/>
+              </a:tblGrid>
+              <a:tr h="457200">
+                <a:tc>
+                  <a:txBody>
+                    <a:bodyPr wrap="square"/>
+                    <a:lstStyle/>
+                    <a:p>
+                      <a:r>
+                        <a:rPr sz="1500" b="1">
+                          <a:solidFill>
+                            <a:srgbClr val="FFFFFF"/>
+                          </a:solidFill>
+                          <a:latin typeface="微软雅黑"/>
+                          <a:ea typeface="微软雅黑"/>
+                          <a:cs typeface="微软雅黑"/>
+                        </a:rPr>
+                        <a:t>方向</a:t>
+                      </a:r>
+                    </a:p>
+                  </a:txBody>
+                  <a:tcPr anchor="ctr" marL="137160" marR="91440">
+                    <a:solidFill>
+                      <a:srgbClr val="287DFA"/>
+                    </a:solidFill>
+                  </a:tcPr>
+                </a:tc>
+                <a:tc>
+                  <a:txBody>
+                    <a:bodyPr wrap="square"/>
+                    <a:lstStyle/>
+                    <a:p>
+                      <a:r>
+                        <a:rPr sz="1500" b="1">
+                          <a:solidFill>
+                            <a:srgbClr val="FFFFFF"/>
+                          </a:solidFill>
+                          <a:latin typeface="微软雅黑"/>
+                          <a:ea typeface="微软雅黑"/>
+                          <a:cs typeface="微软雅黑"/>
+                        </a:rPr>
+                        <a:t>现状</a:t>
+                      </a:r>
+                    </a:p>
+                  </a:txBody>
+                  <a:tcPr anchor="ctr" marL="137160" marR="91440">
+                    <a:solidFill>
+                      <a:srgbClr val="287DFA"/>
+                    </a:solidFill>
+                  </a:tcPr>
+                </a:tc>
+                <a:tc>
+                  <a:txBody>
+                    <a:bodyPr wrap="square"/>
+                    <a:lstStyle/>
+                    <a:p>
+                      <a:r>
+                        <a:rPr sz="1500" b="1">
+                          <a:solidFill>
+                            <a:srgbClr val="FFFFFF"/>
+                          </a:solidFill>
+                          <a:latin typeface="微软雅黑"/>
+                          <a:ea typeface="微软雅黑"/>
+                          <a:cs typeface="微软雅黑"/>
+                        </a:rPr>
+                        <a:t>接下来做什么</a:t>
+                      </a:r>
+                    </a:p>
+                  </a:txBody>
+                  <a:tcPr anchor="ctr" marL="137160" marR="91440">
+                    <a:solidFill>
+                      <a:srgbClr val="287DFA"/>
+                    </a:solidFill>
+                  </a:tcPr>
+                </a:tc>
+              </a:tr>
+              <a:tr h="1097280">
+                <a:tc>
+                  <a:txBody>
+                    <a:bodyPr wrap="square"/>
+                    <a:lstStyle/>
+                    <a:p>
+                      <a:r>
+                        <a:rPr sz="1500" b="1">
+                          <a:solidFill>
+                            <a:srgbClr val="15315E"/>
+                          </a:solidFill>
+                          <a:latin typeface="微软雅黑"/>
+                          <a:ea typeface="微软雅黑"/>
+                          <a:cs typeface="微软雅黑"/>
+                        </a:rPr>
+                        <a:t>票量</a:t>
+                      </a:r>
+                    </a:p>
+                  </a:txBody>
+                  <a:tcPr anchor="ctr" marL="566928" marR="91440">
+                    <a:solidFill>
+                      <a:srgbClr val="EAF2FF"/>
+                    </a:solidFill>
+                  </a:tcPr>
+                </a:tc>
+                <a:tc>
+                  <a:txBody>
+                    <a:bodyPr wrap="square"/>
+                    <a:lstStyle/>
+                    <a:p>
+                      <a:r>
+                        <a:rPr sz="1300" b="0">
+                          <a:solidFill>
+                            <a:srgbClr val="3D4757"/>
+                          </a:solidFill>
+                          <a:latin typeface="微软雅黑"/>
+                          <a:ea typeface="微软雅黑"/>
+                          <a:cs typeface="微软雅黑"/>
+                        </a:rPr>
+                        <a:t>小程序受风控影响无法代付，跳客服付款，流失多</a:t>
+                      </a:r>
+                    </a:p>
+                  </a:txBody>
+                  <a:tcPr anchor="ctr" marL="137160" marR="91440">
+                    <a:solidFill>
+                      <a:srgbClr val="FFFFFF"/>
+                    </a:solidFill>
+                  </a:tcPr>
+                </a:tc>
+                <a:tc>
+                  <a:txBody>
+                    <a:bodyPr wrap="square"/>
+                    <a:lstStyle/>
+                    <a:p>
+                      <a:r>
+                        <a:rPr sz="1300" b="1">
+                          <a:solidFill>
+                            <a:srgbClr val="287DFA"/>
+                          </a:solidFill>
+                          <a:latin typeface="微软雅黑"/>
+                          <a:ea typeface="微软雅黑"/>
+                          <a:cs typeface="微软雅黑"/>
+                        </a:rPr>
+                        <a:t>小程序内：接入微信合单支付</a:t>
+                      </a:r>
+                    </a:p>
+                    <a:p>
+                      <a:pPr>
+                        <a:spcBef>
+                          <a:spcPts val="400"/>
+                        </a:spcBef>
+                      </a:pPr>
+                      <a:r>
+                        <a:rPr sz="1300" b="1">
+                          <a:solidFill>
+                            <a:srgbClr val="287DFA"/>
+                          </a:solidFill>
+                          <a:latin typeface="微软雅黑"/>
+                          <a:ea typeface="微软雅黑"/>
+                          <a:cs typeface="微软雅黑"/>
+                        </a:rPr>
+                        <a:t>场景转换：召回 App、引导信用付授权</a:t>
+                      </a:r>
+                    </a:p>
+                  </a:txBody>
+                  <a:tcPr anchor="ctr" marL="137160" marR="91440">
+                    <a:solidFill>
+                      <a:srgbClr val="F5F9FF"/>
+                    </a:solidFill>
+                  </a:tcPr>
+                </a:tc>
+              </a:tr>
+              <a:tr h="960120">
+                <a:tc>
+                  <a:txBody>
+                    <a:bodyPr wrap="square"/>
+                    <a:lstStyle/>
+                    <a:p>
+                      <a:r>
+                        <a:rPr sz="1500" b="1">
+                          <a:solidFill>
+                            <a:srgbClr val="15315E"/>
+                          </a:solidFill>
+                          <a:latin typeface="微软雅黑"/>
+                          <a:ea typeface="微软雅黑"/>
+                          <a:cs typeface="微软雅黑"/>
+                        </a:rPr>
+                        <a:t>收益</a:t>
+                      </a:r>
+                    </a:p>
+                  </a:txBody>
+                  <a:tcPr anchor="ctr" marL="566928" marR="91440">
+                    <a:solidFill>
+                      <a:srgbClr val="EAF2FF"/>
+                    </a:solidFill>
+                  </a:tcPr>
+                </a:tc>
+                <a:tc>
+                  <a:txBody>
+                    <a:bodyPr wrap="square"/>
+                    <a:lstStyle/>
+                    <a:p>
+                      <a:r>
+                        <a:rPr sz="1300" b="0">
+                          <a:solidFill>
+                            <a:srgbClr val="3D4757"/>
+                          </a:solidFill>
+                          <a:latin typeface="微软雅黑"/>
+                          <a:ea typeface="微软雅黑"/>
+                          <a:cs typeface="微软雅黑"/>
+                        </a:rPr>
+                        <a:t>合规要求下，部分环节存在收益场景空白</a:t>
+                      </a:r>
+                    </a:p>
+                  </a:txBody>
+                  <a:tcPr anchor="ctr" marL="137160" marR="91440">
+                    <a:solidFill>
+                      <a:srgbClr val="FFFFFF"/>
+                    </a:solidFill>
+                  </a:tcPr>
+                </a:tc>
+                <a:tc>
+                  <a:txBody>
+                    <a:bodyPr wrap="square"/>
+                    <a:lstStyle/>
+                    <a:p>
+                      <a:r>
+                        <a:rPr sz="1300" b="1">
+                          <a:solidFill>
+                            <a:srgbClr val="287DFA"/>
+                          </a:solidFill>
+                          <a:latin typeface="微软雅黑"/>
+                          <a:ea typeface="微软雅黑"/>
+                          <a:cs typeface="微软雅黑"/>
+                        </a:rPr>
+                        <a:t>梳理用户需要的服务，补齐收益场景</a:t>
+                      </a:r>
+                    </a:p>
+                  </a:txBody>
+                  <a:tcPr anchor="ctr" marL="137160" marR="91440">
+                    <a:solidFill>
+                      <a:srgbClr val="F5F9FF"/>
+                    </a:solidFill>
+                  </a:tcPr>
+                </a:tc>
+              </a:tr>
+              <a:tr h="868680">
+                <a:tc>
+                  <a:txBody>
+                    <a:bodyPr wrap="square"/>
+                    <a:lstStyle/>
+                    <a:p>
+                      <a:r>
+                        <a:rPr sz="1500" b="1">
+                          <a:solidFill>
+                            <a:srgbClr val="15315E"/>
+                          </a:solidFill>
+                          <a:latin typeface="微软雅黑"/>
+                          <a:ea typeface="微软雅黑"/>
+                          <a:cs typeface="微软雅黑"/>
+                        </a:rPr>
+                        <a:t>体验</a:t>
+                      </a:r>
+                    </a:p>
+                  </a:txBody>
+                  <a:tcPr anchor="ctr" marL="566928" marR="91440">
+                    <a:solidFill>
+                      <a:srgbClr val="EAF2FF"/>
+                    </a:solidFill>
+                  </a:tcPr>
+                </a:tc>
+                <a:tc>
+                  <a:txBody>
+                    <a:bodyPr wrap="square"/>
+                    <a:lstStyle/>
+                    <a:p>
+                      <a:r>
+                        <a:rPr sz="1300" b="0">
+                          <a:solidFill>
+                            <a:srgbClr val="3D4757"/>
+                          </a:solidFill>
+                          <a:latin typeface="微软雅黑"/>
+                          <a:ea typeface="微软雅黑"/>
+                          <a:cs typeface="微软雅黑"/>
+                        </a:rPr>
+                        <a:t>提高收益的前提，是稳住用户体验</a:t>
+                      </a:r>
+                    </a:p>
+                  </a:txBody>
+                  <a:tcPr anchor="ctr" marL="137160" marR="91440">
+                    <a:solidFill>
+                      <a:srgbClr val="FFFFFF"/>
+                    </a:solidFill>
+                  </a:tcPr>
+                </a:tc>
+                <a:tc>
+                  <a:txBody>
+                    <a:bodyPr wrap="square"/>
+                    <a:lstStyle/>
+                    <a:p>
+                      <a:r>
+                        <a:rPr sz="1300" b="1">
+                          <a:solidFill>
+                            <a:srgbClr val="287DFA"/>
+                          </a:solidFill>
+                          <a:latin typeface="微软雅黑"/>
+                          <a:ea typeface="微软雅黑"/>
+                          <a:cs typeface="微软雅黑"/>
+                        </a:rPr>
+                        <a:t>外呼场景的策略优化</a:t>
+                      </a:r>
+                    </a:p>
+                  </a:txBody>
+                  <a:tcPr anchor="ctr" marL="137160" marR="91440">
+                    <a:solidFill>
+                      <a:srgbClr val="F5F9FF"/>
+                    </a:solidFill>
+                  </a:tcPr>
+                </a:tc>
+              </a:tr>
+              <a:tr h="1143000">
+                <a:tc>
+                  <a:txBody>
+                    <a:bodyPr wrap="square"/>
+                    <a:lstStyle/>
+                    <a:p>
+                      <a:r>
+                        <a:rPr sz="1500" b="1">
+                          <a:solidFill>
+                            <a:srgbClr val="15315E"/>
+                          </a:solidFill>
+                          <a:latin typeface="微软雅黑"/>
+                          <a:ea typeface="微软雅黑"/>
+                          <a:cs typeface="微软雅黑"/>
+                        </a:rPr>
+                        <a:t>AI</a:t>
+                      </a:r>
+                    </a:p>
+                  </a:txBody>
+                  <a:tcPr anchor="ctr" marL="566928" marR="91440">
+                    <a:solidFill>
+                      <a:srgbClr val="EAF2FF"/>
+                    </a:solidFill>
+                  </a:tcPr>
+                </a:tc>
+                <a:tc>
+                  <a:txBody>
+                    <a:bodyPr wrap="square"/>
+                    <a:lstStyle/>
+                    <a:p>
+                      <a:r>
+                        <a:rPr sz="1300" b="0">
+                          <a:solidFill>
+                            <a:srgbClr val="3D4757"/>
+                          </a:solidFill>
+                          <a:latin typeface="微软雅黑"/>
+                          <a:ea typeface="微软雅黑"/>
+                          <a:cs typeface="微软雅黑"/>
+                        </a:rPr>
+                        <a:t>已固化进个人工作流：飞书 CLI、Claude Code Skill</a:t>
+                      </a:r>
+                    </a:p>
+                  </a:txBody>
+                  <a:tcPr anchor="ctr" marL="137160" marR="91440">
+                    <a:solidFill>
+                      <a:srgbClr val="FFFFFF"/>
+                    </a:solidFill>
+                  </a:tcPr>
+                </a:tc>
+                <a:tc>
+                  <a:txBody>
+                    <a:bodyPr wrap="square"/>
+                    <a:lstStyle/>
+                    <a:p>
+                      <a:r>
+                        <a:rPr sz="1300" b="1">
+                          <a:solidFill>
+                            <a:srgbClr val="287DFA"/>
+                          </a:solidFill>
+                          <a:latin typeface="微软雅黑"/>
+                          <a:ea typeface="微软雅黑"/>
+                          <a:cs typeface="微软雅黑"/>
+                        </a:rPr>
+                        <a:t>找到传统方法难解决的痛点，用平台用户最易接受的方式落地</a:t>
+                      </a:r>
+                    </a:p>
+                  </a:txBody>
+                  <a:tcPr anchor="ctr" marL="137160" marR="91440">
+                    <a:solidFill>
+                      <a:srgbClr val="F5F9FF"/>
+                    </a:solidFill>
+                  </a:tcPr>
+                </a:tc>
+              </a:tr>
+            </a:tbl>
+          </a:graphicData>
+        </a:graphic>
+      </p:graphicFrame>
+      <p:sp>
+        <p:nvSpPr>
+          <p:cNvPr id="18" name="icon-circle"/>
           <p:cNvSpPr/>
           <p:nvPr/>
         </p:nvSpPr>
         <p:spPr>
           <a:xfrm>
-            <a:off x="4279392" y="1508760"/>
-            <a:ext cx="3630168" cy="2697480"/>
-          </a:xfrm>
-          <a:prstGeom prst="roundRect">
-            <a:avLst>
-              <a:gd name="adj" fmla="val 6000"/>
-            </a:avLst>
-          </a:prstGeom>
-          <a:solidFill>
-            <a:srgbClr val="F5F9FF"/>
-          </a:solidFill>
-          <a:ln w="12700">
-            <a:solidFill>
-              <a:srgbClr val="D3E2FB"/>
-            </a:solidFill>
-          </a:ln>
-          <a:effectLst/>
-        </p:spPr>
-        <p:style>
-          <a:lnRef idx="1">
-            <a:schemeClr val="accent1"/>
-          </a:lnRef>
-          <a:fillRef idx="3">
-            <a:schemeClr val="accent1"/>
-          </a:fillRef>
-          <a:effectRef idx="2">
-            <a:schemeClr val="accent1"/>
-          </a:effectRef>
-          <a:fontRef idx="minor">
-            <a:schemeClr val="lt1"/>
-          </a:fontRef>
-        </p:style>
-        <p:txBody>
-          <a:bodyPr rtlCol="0" anchor="ctr"/>
-          <a:lstStyle/>
-          <a:p/>
-        </p:txBody>
-      </p:sp>
-      <p:sp>
-        <p:nvSpPr>
-          <p:cNvPr id="11" name="icon-circle"/>
-          <p:cNvSpPr/>
-          <p:nvPr/>
-        </p:nvSpPr>
-        <p:spPr>
-          <a:xfrm>
-            <a:off x="4553712" y="1737360"/>
-            <a:ext cx="731520" cy="731520"/>
+            <a:off x="4636008" y="2368296"/>
+            <a:ext cx="384048" cy="384048"/>
           </a:xfrm>
           <a:prstGeom prst="ellipse">
             <a:avLst/>
@@ -16431,7 +17022,73 @@
       </p:sp>
       <p:pic>
         <p:nvPicPr>
-          <p:cNvPr id="12" name="Picture 11" descr="FaCoins_w.png"/>
+          <p:cNvPr id="19" name="Picture 18" descr="FaTicket_w.png"/>
+          <p:cNvPicPr>
+            <a:picLocks noChangeAspect="1"/>
+          </p:cNvPicPr>
+          <p:nvPr/>
+        </p:nvPicPr>
+        <p:blipFill>
+          <a:blip r:embed="rId3"/>
+          <a:stretch>
+            <a:fillRect/>
+          </a:stretch>
+        </p:blipFill>
+        <p:spPr>
+          <a:xfrm>
+            <a:off x="4732020" y="2464308"/>
+            <a:ext cx="192024" cy="192024"/>
+          </a:xfrm>
+          <a:prstGeom prst="rect">
+            <a:avLst/>
+          </a:prstGeom>
+        </p:spPr>
+      </p:pic>
+      <p:sp>
+        <p:nvSpPr>
+          <p:cNvPr id="20" name="icon-circle"/>
+          <p:cNvSpPr/>
+          <p:nvPr/>
+        </p:nvSpPr>
+        <p:spPr>
+          <a:xfrm>
+            <a:off x="4636008" y="3396996"/>
+            <a:ext cx="384048" cy="384048"/>
+          </a:xfrm>
+          <a:prstGeom prst="ellipse">
+            <a:avLst/>
+          </a:prstGeom>
+          <a:solidFill>
+            <a:srgbClr val="287DFA"/>
+          </a:solidFill>
+          <a:ln>
+            <a:noFill/>
+          </a:ln>
+          <a:effectLst/>
+        </p:spPr>
+        <p:style>
+          <a:lnRef idx="1">
+            <a:schemeClr val="accent1"/>
+          </a:lnRef>
+          <a:fillRef idx="3">
+            <a:schemeClr val="accent1"/>
+          </a:fillRef>
+          <a:effectRef idx="2">
+            <a:schemeClr val="accent1"/>
+          </a:effectRef>
+          <a:fontRef idx="minor">
+            <a:schemeClr val="lt1"/>
+          </a:fontRef>
+        </p:style>
+        <p:txBody>
+          <a:bodyPr rtlCol="0" anchor="ctr"/>
+          <a:lstStyle/>
+          <a:p/>
+        </p:txBody>
+      </p:sp>
+      <p:pic>
+        <p:nvPicPr>
+          <p:cNvPr id="21" name="Picture 20" descr="FaCoins_w.png"/>
           <p:cNvPicPr>
             <a:picLocks noChangeAspect="1"/>
           </p:cNvPicPr>
@@ -16445,8 +17102,8 @@
         </p:blipFill>
         <p:spPr>
           <a:xfrm>
-            <a:off x="4736592" y="1920240"/>
-            <a:ext cx="365760" cy="365760"/>
+            <a:off x="4732020" y="3493008"/>
+            <a:ext cx="192024" cy="192024"/>
           </a:xfrm>
           <a:prstGeom prst="rect">
             <a:avLst/>
@@ -16455,182 +17112,14 @@
       </p:pic>
       <p:sp>
         <p:nvSpPr>
-          <p:cNvPr id="13" name="TextBox 12"/>
-          <p:cNvSpPr txBox="1"/>
-          <p:nvPr/>
-        </p:nvSpPr>
-        <p:spPr>
-          <a:xfrm>
-            <a:off x="5468112" y="1737360"/>
-            <a:ext cx="2286000" cy="411480"/>
-          </a:xfrm>
-          <a:prstGeom prst="rect">
-            <a:avLst/>
-          </a:prstGeom>
-          <a:noFill/>
-        </p:spPr>
-        <p:txBody>
-          <a:bodyPr wrap="square" lIns="0" rIns="0" tIns="0" bIns="0" anchor="t">
-            <a:spAutoFit/>
-          </a:bodyPr>
-          <a:lstStyle/>
-          <a:p>
-            <a:pPr algn="l"/>
-            <a:r>
-              <a:rPr sz="2000" b="1">
-                <a:solidFill>
-                  <a:srgbClr val="287DFA"/>
-                </a:solidFill>
-                <a:latin typeface="微软雅黑"/>
-                <a:ea typeface="微软雅黑"/>
-                <a:cs typeface="微软雅黑"/>
-              </a:rPr>
-              <a:t>收益</a:t>
-            </a:r>
-          </a:p>
-        </p:txBody>
-      </p:sp>
-      <p:sp>
-        <p:nvSpPr>
-          <p:cNvPr id="14" name="TextBox 13"/>
-          <p:cNvSpPr txBox="1"/>
-          <p:nvPr/>
-        </p:nvSpPr>
-        <p:spPr>
-          <a:xfrm>
-            <a:off x="5468112" y="2148840"/>
-            <a:ext cx="2331720" cy="365760"/>
-          </a:xfrm>
-          <a:prstGeom prst="rect">
-            <a:avLst/>
-          </a:prstGeom>
-          <a:noFill/>
-        </p:spPr>
-        <p:txBody>
-          <a:bodyPr wrap="square" lIns="0" rIns="0" tIns="0" bIns="0" anchor="t">
-            <a:spAutoFit/>
-          </a:bodyPr>
-          <a:lstStyle/>
-          <a:p>
-            <a:pPr algn="l"/>
-            <a:r>
-              <a:rPr sz="1400" b="1">
-                <a:solidFill>
-                  <a:srgbClr val="15315E"/>
-                </a:solidFill>
-                <a:latin typeface="微软雅黑"/>
-                <a:ea typeface="微软雅黑"/>
-                <a:cs typeface="微软雅黑"/>
-              </a:rPr>
-              <a:t>补上收益场景的空白</a:t>
-            </a:r>
-          </a:p>
-        </p:txBody>
-      </p:sp>
-      <p:sp>
-        <p:nvSpPr>
-          <p:cNvPr id="15" name="TextBox 14"/>
-          <p:cNvSpPr txBox="1"/>
-          <p:nvPr/>
-        </p:nvSpPr>
-        <p:spPr>
-          <a:xfrm>
-            <a:off x="4553712" y="2743200"/>
-            <a:ext cx="3108960" cy="1828800"/>
-          </a:xfrm>
-          <a:prstGeom prst="rect">
-            <a:avLst/>
-          </a:prstGeom>
-          <a:noFill/>
-        </p:spPr>
-        <p:txBody>
-          <a:bodyPr wrap="square" lIns="0" rIns="0" tIns="0" bIns="0" anchor="t">
-            <a:spAutoFit/>
-          </a:bodyPr>
-          <a:lstStyle/>
-          <a:p>
-            <a:pPr algn="l"/>
-            <a:r>
-              <a:rPr sz="1000" b="0">
-                <a:solidFill>
-                  <a:srgbClr val="287DFA"/>
-                </a:solidFill>
-                <a:latin typeface="微软雅黑"/>
-                <a:ea typeface="微软雅黑"/>
-                <a:cs typeface="微软雅黑"/>
-              </a:rPr>
-              <a:t>●  </a:t>
-            </a:r>
-            <a:r>
-              <a:rPr sz="1400" b="0">
-                <a:solidFill>
-                  <a:srgbClr val="3D4757"/>
-                </a:solidFill>
-                <a:latin typeface="微软雅黑"/>
-                <a:ea typeface="微软雅黑"/>
-                <a:cs typeface="微软雅黑"/>
-              </a:rPr>
-              <a:t>在合规前提下，重新梳理各场景里用户比较需要的服务</a:t>
-            </a:r>
-          </a:p>
-        </p:txBody>
-      </p:sp>
-      <p:sp>
-        <p:nvSpPr>
-          <p:cNvPr id="16" name="Rounded Rectangle 15"/>
+          <p:cNvPr id="22" name="icon-circle"/>
           <p:cNvSpPr/>
           <p:nvPr/>
         </p:nvSpPr>
         <p:spPr>
           <a:xfrm>
-            <a:off x="8101583" y="1508760"/>
-            <a:ext cx="3630168" cy="2697480"/>
-          </a:xfrm>
-          <a:prstGeom prst="roundRect">
-            <a:avLst>
-              <a:gd name="adj" fmla="val 6000"/>
-            </a:avLst>
-          </a:prstGeom>
-          <a:solidFill>
-            <a:srgbClr val="F5F9FF"/>
-          </a:solidFill>
-          <a:ln w="12700">
-            <a:solidFill>
-              <a:srgbClr val="D3E2FB"/>
-            </a:solidFill>
-          </a:ln>
-          <a:effectLst/>
-        </p:spPr>
-        <p:style>
-          <a:lnRef idx="1">
-            <a:schemeClr val="accent1"/>
-          </a:lnRef>
-          <a:fillRef idx="3">
-            <a:schemeClr val="accent1"/>
-          </a:fillRef>
-          <a:effectRef idx="2">
-            <a:schemeClr val="accent1"/>
-          </a:effectRef>
-          <a:fontRef idx="minor">
-            <a:schemeClr val="lt1"/>
-          </a:fontRef>
-        </p:style>
-        <p:txBody>
-          <a:bodyPr rtlCol="0" anchor="ctr"/>
-          <a:lstStyle/>
-          <a:p/>
-        </p:txBody>
-      </p:sp>
-      <p:sp>
-        <p:nvSpPr>
-          <p:cNvPr id="17" name="icon-circle"/>
-          <p:cNvSpPr/>
-          <p:nvPr/>
-        </p:nvSpPr>
-        <p:spPr>
-          <a:xfrm>
-            <a:off x="8375904" y="1737360"/>
-            <a:ext cx="731520" cy="731520"/>
+            <a:off x="4636008" y="4311396"/>
+            <a:ext cx="384048" cy="384048"/>
           </a:xfrm>
           <a:prstGeom prst="ellipse">
             <a:avLst/>
@@ -16665,7 +17154,7 @@
       </p:sp>
       <p:pic>
         <p:nvPicPr>
-          <p:cNvPr id="18" name="Picture 17" descr="FaFaceSmile_w.png"/>
+          <p:cNvPr id="23" name="Picture 22" descr="FaFaceSmile_w.png"/>
           <p:cNvPicPr>
             <a:picLocks noChangeAspect="1"/>
           </p:cNvPicPr>
@@ -16679,8 +17168,8 @@
         </p:blipFill>
         <p:spPr>
           <a:xfrm>
-            <a:off x="8558784" y="1920240"/>
-            <a:ext cx="365760" cy="365760"/>
+            <a:off x="4732020" y="4407408"/>
+            <a:ext cx="192024" cy="192024"/>
           </a:xfrm>
           <a:prstGeom prst="rect">
             <a:avLst/>
@@ -16689,144 +17178,20 @@
       </p:pic>
       <p:sp>
         <p:nvSpPr>
-          <p:cNvPr id="19" name="TextBox 18"/>
-          <p:cNvSpPr txBox="1"/>
-          <p:nvPr/>
-        </p:nvSpPr>
-        <p:spPr>
-          <a:xfrm>
-            <a:off x="9290304" y="1737360"/>
-            <a:ext cx="2286000" cy="411480"/>
-          </a:xfrm>
-          <a:prstGeom prst="rect">
-            <a:avLst/>
-          </a:prstGeom>
-          <a:noFill/>
-        </p:spPr>
-        <p:txBody>
-          <a:bodyPr wrap="square" lIns="0" rIns="0" tIns="0" bIns="0" anchor="t">
-            <a:spAutoFit/>
-          </a:bodyPr>
-          <a:lstStyle/>
-          <a:p>
-            <a:pPr algn="l"/>
-            <a:r>
-              <a:rPr sz="2000" b="1">
-                <a:solidFill>
-                  <a:srgbClr val="287DFA"/>
-                </a:solidFill>
-                <a:latin typeface="微软雅黑"/>
-                <a:ea typeface="微软雅黑"/>
-                <a:cs typeface="微软雅黑"/>
-              </a:rPr>
-              <a:t>体验</a:t>
-            </a:r>
-          </a:p>
-        </p:txBody>
-      </p:sp>
-      <p:sp>
-        <p:nvSpPr>
-          <p:cNvPr id="20" name="TextBox 19"/>
-          <p:cNvSpPr txBox="1"/>
-          <p:nvPr/>
-        </p:nvSpPr>
-        <p:spPr>
-          <a:xfrm>
-            <a:off x="9290304" y="2148840"/>
-            <a:ext cx="2331720" cy="365760"/>
-          </a:xfrm>
-          <a:prstGeom prst="rect">
-            <a:avLst/>
-          </a:prstGeom>
-          <a:noFill/>
-        </p:spPr>
-        <p:txBody>
-          <a:bodyPr wrap="square" lIns="0" rIns="0" tIns="0" bIns="0" anchor="t">
-            <a:spAutoFit/>
-          </a:bodyPr>
-          <a:lstStyle/>
-          <a:p>
-            <a:pPr algn="l"/>
-            <a:r>
-              <a:rPr sz="1400" b="1">
-                <a:solidFill>
-                  <a:srgbClr val="15315E"/>
-                </a:solidFill>
-                <a:latin typeface="微软雅黑"/>
-                <a:ea typeface="微软雅黑"/>
-                <a:cs typeface="微软雅黑"/>
-              </a:rPr>
-              <a:t>提高收益的前提是稳住体验</a:t>
-            </a:r>
-          </a:p>
-        </p:txBody>
-      </p:sp>
-      <p:sp>
-        <p:nvSpPr>
-          <p:cNvPr id="21" name="TextBox 20"/>
-          <p:cNvSpPr txBox="1"/>
-          <p:nvPr/>
-        </p:nvSpPr>
-        <p:spPr>
-          <a:xfrm>
-            <a:off x="8375904" y="2743200"/>
-            <a:ext cx="3108960" cy="1828800"/>
-          </a:xfrm>
-          <a:prstGeom prst="rect">
-            <a:avLst/>
-          </a:prstGeom>
-          <a:noFill/>
-        </p:spPr>
-        <p:txBody>
-          <a:bodyPr wrap="square" lIns="0" rIns="0" tIns="0" bIns="0" anchor="t">
-            <a:spAutoFit/>
-          </a:bodyPr>
-          <a:lstStyle/>
-          <a:p>
-            <a:pPr algn="l"/>
-            <a:r>
-              <a:rPr sz="1000" b="0">
-                <a:solidFill>
-                  <a:srgbClr val="287DFA"/>
-                </a:solidFill>
-                <a:latin typeface="微软雅黑"/>
-                <a:ea typeface="微软雅黑"/>
-                <a:cs typeface="微软雅黑"/>
-              </a:rPr>
-              <a:t>●  </a:t>
-            </a:r>
-            <a:r>
-              <a:rPr sz="1400" b="0">
-                <a:solidFill>
-                  <a:srgbClr val="3D4757"/>
-                </a:solidFill>
-                <a:latin typeface="微软雅黑"/>
-                <a:ea typeface="微软雅黑"/>
-                <a:cs typeface="微软雅黑"/>
-              </a:rPr>
-              <a:t>正在探索：外呼场景下的策略优化</a:t>
-            </a:r>
-          </a:p>
-        </p:txBody>
-      </p:sp>
-      <p:sp>
-        <p:nvSpPr>
-          <p:cNvPr id="22" name="Rounded Rectangle 21"/>
+          <p:cNvPr id="24" name="icon-circle"/>
           <p:cNvSpPr/>
           <p:nvPr/>
         </p:nvSpPr>
         <p:spPr>
           <a:xfrm>
-            <a:off x="457200" y="4434840"/>
-            <a:ext cx="11274552" cy="1645920"/>
-          </a:xfrm>
-          <a:prstGeom prst="roundRect">
-            <a:avLst>
-              <a:gd name="adj" fmla="val 6000"/>
-            </a:avLst>
+            <a:off x="4636008" y="5317236"/>
+            <a:ext cx="384048" cy="384048"/>
+          </a:xfrm>
+          <a:prstGeom prst="ellipse">
+            <a:avLst/>
           </a:prstGeom>
           <a:solidFill>
-            <a:srgbClr val="287DFA"/>
+            <a:srgbClr val="15315E"/>
           </a:solidFill>
           <a:ln>
             <a:noFill/>
@@ -16853,51 +17218,9 @@
           <a:p/>
         </p:txBody>
       </p:sp>
-      <p:sp>
-        <p:nvSpPr>
-          <p:cNvPr id="23" name="icon-circle"/>
-          <p:cNvSpPr/>
-          <p:nvPr/>
-        </p:nvSpPr>
-        <p:spPr>
-          <a:xfrm>
-            <a:off x="777240" y="4846320"/>
-            <a:ext cx="822960" cy="822960"/>
-          </a:xfrm>
-          <a:prstGeom prst="ellipse">
-            <a:avLst/>
-          </a:prstGeom>
-          <a:solidFill>
-            <a:srgbClr val="1F6AE0"/>
-          </a:solidFill>
-          <a:ln>
-            <a:noFill/>
-          </a:ln>
-          <a:effectLst/>
-        </p:spPr>
-        <p:style>
-          <a:lnRef idx="1">
-            <a:schemeClr val="accent1"/>
-          </a:lnRef>
-          <a:fillRef idx="3">
-            <a:schemeClr val="accent1"/>
-          </a:fillRef>
-          <a:effectRef idx="2">
-            <a:schemeClr val="accent1"/>
-          </a:effectRef>
-          <a:fontRef idx="minor">
-            <a:schemeClr val="lt1"/>
-          </a:fontRef>
-        </p:style>
-        <p:txBody>
-          <a:bodyPr rtlCol="0" anchor="ctr"/>
-          <a:lstStyle/>
-          <a:p/>
-        </p:txBody>
-      </p:sp>
       <p:pic>
         <p:nvPicPr>
-          <p:cNvPr id="24" name="Picture 23" descr="FaBrain_w.png"/>
+          <p:cNvPr id="25" name="Picture 24" descr="FaBrain_w.png"/>
           <p:cNvPicPr>
             <a:picLocks noChangeAspect="1"/>
           </p:cNvPicPr>
@@ -16911,80 +17234,14 @@
         </p:blipFill>
         <p:spPr>
           <a:xfrm>
-            <a:off x="982980" y="5052059"/>
-            <a:ext cx="411480" cy="411480"/>
+            <a:off x="4732020" y="5413248"/>
+            <a:ext cx="192024" cy="192024"/>
           </a:xfrm>
           <a:prstGeom prst="rect">
             <a:avLst/>
           </a:prstGeom>
         </p:spPr>
       </p:pic>
-      <p:sp>
-        <p:nvSpPr>
-          <p:cNvPr id="25" name="TextBox 24"/>
-          <p:cNvSpPr txBox="1"/>
-          <p:nvPr/>
-        </p:nvSpPr>
-        <p:spPr>
-          <a:xfrm>
-            <a:off x="1874519" y="4434840"/>
-            <a:ext cx="9601200" cy="1645920"/>
-          </a:xfrm>
-          <a:prstGeom prst="rect">
-            <a:avLst/>
-          </a:prstGeom>
-          <a:noFill/>
-        </p:spPr>
-        <p:txBody>
-          <a:bodyPr wrap="square" lIns="0" rIns="0" tIns="0" bIns="0" anchor="ctr">
-            <a:spAutoFit/>
-          </a:bodyPr>
-          <a:lstStyle/>
-          <a:p>
-            <a:pPr algn="l"/>
-            <a:r>
-              <a:rPr sz="1800" b="1">
-                <a:solidFill>
-                  <a:srgbClr val="FFFFFF"/>
-                </a:solidFill>
-                <a:latin typeface="微软雅黑"/>
-                <a:ea typeface="微软雅黑"/>
-                <a:cs typeface="微软雅黑"/>
-              </a:rPr>
-              <a:t>AI</a:t>
-            </a:r>
-            <a:r>
-              <a:rPr sz="1600" b="1">
-                <a:solidFill>
-                  <a:srgbClr val="D6E6FF"/>
-                </a:solidFill>
-                <a:latin typeface="微软雅黑"/>
-                <a:ea typeface="微软雅黑"/>
-                <a:cs typeface="微软雅黑"/>
-              </a:rPr>
-              <a:t>　从 AI native 走进业务</a:t>
-            </a:r>
-          </a:p>
-          <a:p>
-            <a:pPr algn="l">
-              <a:spcBef>
-                <a:spcPts val="800"/>
-              </a:spcBef>
-            </a:pPr>
-            <a:r>
-              <a:rPr sz="1600" b="0">
-                <a:solidFill>
-                  <a:srgbClr val="FFFFFF"/>
-                </a:solidFill>
-                <a:latin typeface="微软雅黑"/>
-                <a:ea typeface="微软雅黑"/>
-                <a:cs typeface="微软雅黑"/>
-              </a:rPr>
-              <a:t>沿抢票链路找到传统方法不好解决的痛点，用我们平台用户最容易接受的方式呈现，提供他们当下最需要的能力，让 AI 服务于票量、收益和体验的平衡</a:t>
-            </a:r>
-          </a:p>
-        </p:txBody>
-      </p:sp>
     </p:spTree>
   </p:cSld>
   <p:clrMapOvr>

--- a/答辩PPT.pptx
+++ b/答辩PPT.pptx
@@ -1245,13 +1245,32 @@
           <a:lstStyle/>
           <a:p>
             <a:r>
-              <a:t>回看这几个月，两条主线给我的收获不太一样。在火车票 Agent 上，我做的更多是模型侧的质量工作，离业务结果比较远；到了抢票业务，我开始直接对票量负责，也逐渐学会从业务指标倒推要做什么。</a:t>
+              <a:t>回看这几个月，两条主线给我的收获不太一样。</a:t>
             </a:r>
           </a:p>
-          <a:p/>
           <a:p>
             <a:r>
-              <a:t>这也让我对 AI 产品有了更具体的理解。在小红书时，模型本身就是产品，我的工作是拓展它的能力边界、限制它的行为边界，衡量的是模型表现得好不好。到了携程，AI 是服务业务的手段：边界由业务来定，比如什么问题属于火车、什么不属于；形态要贴合用户的习惯，二期把对话改成直接操作列表页后，票量明显提升；最终衡量的是票量这样的业务结果。</a:t>
+              <a:t>在火车票 Agent 上，我做的更多是模型侧的质量工作，离业务结果比较远；到了抢票业务，我开始直接对票量负责，也逐渐学会从业务指标倒推要做什么。</a:t>
+            </a:r>
+          </a:p>
+          <a:p>
+            <a:r>
+              <a:t>这也让我对 AI 产品有了更具体的理解。</a:t>
+            </a:r>
+          </a:p>
+          <a:p>
+            <a:r>
+              <a:t>在小红书时，模型本身就是产品，衡量的是模型表现得好不好。</a:t>
+            </a:r>
+          </a:p>
+          <a:p>
+            <a:r>
+              <a:t>到了携程，AI 是服务业务的手段：边界由业务来定，形态要贴合用户的习惯，例如火车agent二期把对话改成直接操作列表页后，这种更符合用户原有行为链路的做法使得票量明显提升；最终衡量的是票量这样的业务结果。</a:t>
+            </a:r>
+          </a:p>
+          <a:p>
+            <a:r>
+              <a:t>所以相比于AInative的产品，在探索AI+业务的时候，我始终应该先四骄傲业务需要它解决什么、用户习惯怎么用。</a:t>
             </a:r>
           </a:p>
         </p:txBody>
@@ -15129,7 +15148,7 @@
                 <a:latin typeface="微软雅黑" panose="020B0503020204020204" pitchFamily="34" charset="-122"/>
                 <a:ea typeface="微软雅黑" panose="020B0503020204020204" pitchFamily="34" charset="-122"/>
               </a:rPr>
-              <a:t>3、未来规划 · 从 AI native 到 AI × 业务</a:t>
+              <a:t>3、思考与未来规划 · 从 AI native 到 AI × 业务</a:t>
             </a:r>
             <a:endParaRPr lang="zh-CN" altLang="en-US" sz="2400" b="1" dirty="0">
               <a:solidFill>
@@ -15187,7 +15206,7 @@
         <p:spPr>
           <a:xfrm>
             <a:off x="457200" y="1508760"/>
-            <a:ext cx="5239512" cy="960120"/>
+            <a:ext cx="5239512" cy="914400"/>
           </a:xfrm>
           <a:prstGeom prst="roundRect">
             <a:avLst>
@@ -15232,7 +15251,7 @@
         </p:nvSpPr>
         <p:spPr>
           <a:xfrm>
-            <a:off x="685800" y="1664208"/>
+            <a:off x="685800" y="1645920"/>
             <a:ext cx="640080" cy="640080"/>
           </a:xfrm>
           <a:prstGeom prst="ellipse">
@@ -15282,7 +15301,7 @@
         </p:blipFill>
         <p:spPr>
           <a:xfrm>
-            <a:off x="845820" y="1824228"/>
+            <a:off x="845820" y="1805940"/>
             <a:ext cx="320040" cy="320040"/>
           </a:xfrm>
           <a:prstGeom prst="rect">
@@ -15299,7 +15318,7 @@
         <p:spPr>
           <a:xfrm>
             <a:off x="1508760" y="1508760"/>
-            <a:ext cx="4069080" cy="960120"/>
+            <a:ext cx="4069080" cy="914400"/>
           </a:xfrm>
           <a:prstGeom prst="rect">
             <a:avLst/>
@@ -15354,7 +15373,7 @@
         <p:spPr>
           <a:xfrm>
             <a:off x="6492240" y="1508760"/>
-            <a:ext cx="5239512" cy="960120"/>
+            <a:ext cx="5239512" cy="914400"/>
           </a:xfrm>
           <a:prstGeom prst="roundRect">
             <a:avLst>
@@ -15399,7 +15418,7 @@
         </p:nvSpPr>
         <p:spPr>
           <a:xfrm>
-            <a:off x="6720840" y="1664208"/>
+            <a:off x="6720840" y="1645920"/>
             <a:ext cx="640080" cy="640080"/>
           </a:xfrm>
           <a:prstGeom prst="ellipse">
@@ -15449,7 +15468,7 @@
         </p:blipFill>
         <p:spPr>
           <a:xfrm>
-            <a:off x="6880859" y="1824228"/>
+            <a:off x="6880859" y="1805940"/>
             <a:ext cx="320040" cy="320040"/>
           </a:xfrm>
           <a:prstGeom prst="rect">
@@ -15466,7 +15485,7 @@
         <p:spPr>
           <a:xfrm>
             <a:off x="7543800" y="1508760"/>
-            <a:ext cx="4069080" cy="960120"/>
+            <a:ext cx="4069080" cy="914400"/>
           </a:xfrm>
           <a:prstGeom prst="rect">
             <a:avLst/>
@@ -15520,7 +15539,7 @@
         </p:nvSpPr>
         <p:spPr>
           <a:xfrm>
-            <a:off x="5806440" y="1828800"/>
+            <a:off x="5806440" y="1801368"/>
             <a:ext cx="457200" cy="329184"/>
           </a:xfrm>
           <a:prstGeom prst="rightArrow">
@@ -15554,329 +15573,76 @@
           <a:p/>
         </p:txBody>
       </p:sp>
-      <p:graphicFrame>
-        <p:nvGraphicFramePr>
-          <p:cNvPr id="13" name="Table 12"/>
-          <p:cNvGraphicFramePr>
-            <a:graphicFrameLocks noGrp="1"/>
-          </p:cNvGraphicFramePr>
-          <p:nvPr/>
-        </p:nvGraphicFramePr>
-        <p:xfrm>
-          <a:off x="457200" y="2697480"/>
-          <a:ext cx="11274552" cy="2560320"/>
-        </p:xfrm>
-        <a:graphic>
-          <a:graphicData uri="http://schemas.openxmlformats.org/drawingml/2006/table">
-            <a:tbl>
-              <a:tblPr firstRow="1" bandRow="1">
-                <a:tableStyleId>{5C22544A-7EE6-4342-B048-85BDC9FD1C3A}</a:tableStyleId>
-              </a:tblPr>
-              <a:tblGrid>
-                <a:gridCol w="2011680"/>
-                <a:gridCol w="4206240"/>
-                <a:gridCol w="5056632"/>
-              </a:tblGrid>
-              <a:tr h="640080">
-                <a:tc>
-                  <a:txBody>
-                    <a:bodyPr/>
-                    <a:lstStyle/>
-                    <a:p>
-                      <a:r>
-                        <a:rPr sz="1600" b="1">
-                          <a:solidFill>
-                            <a:srgbClr val="FFFFFF"/>
-                          </a:solidFill>
-                          <a:latin typeface="微软雅黑"/>
-                          <a:ea typeface="微软雅黑"/>
-                          <a:cs typeface="微软雅黑"/>
-                        </a:rPr>
-                        <a:t/>
-                      </a:r>
-                    </a:p>
-                  </a:txBody>
-                  <a:tcPr anchor="ctr" marL="182880">
-                    <a:solidFill>
-                      <a:srgbClr val="287DFA"/>
-                    </a:solidFill>
-                  </a:tcPr>
-                </a:tc>
-                <a:tc>
-                  <a:txBody>
-                    <a:bodyPr/>
-                    <a:lstStyle/>
-                    <a:p>
-                      <a:r>
-                        <a:rPr sz="1600" b="1">
-                          <a:solidFill>
-                            <a:srgbClr val="FFFFFF"/>
-                          </a:solidFill>
-                          <a:latin typeface="微软雅黑"/>
-                          <a:ea typeface="微软雅黑"/>
-                          <a:cs typeface="微软雅黑"/>
-                        </a:rPr>
-                        <a:t>小红书 · AI native</a:t>
-                      </a:r>
-                    </a:p>
-                  </a:txBody>
-                  <a:tcPr anchor="ctr" marL="182880">
-                    <a:solidFill>
-                      <a:srgbClr val="287DFA"/>
-                    </a:solidFill>
-                  </a:tcPr>
-                </a:tc>
-                <a:tc>
-                  <a:txBody>
-                    <a:bodyPr/>
-                    <a:lstStyle/>
-                    <a:p>
-                      <a:r>
-                        <a:rPr sz="1600" b="1">
-                          <a:solidFill>
-                            <a:srgbClr val="FFFFFF"/>
-                          </a:solidFill>
-                          <a:latin typeface="微软雅黑"/>
-                          <a:ea typeface="微软雅黑"/>
-                          <a:cs typeface="微软雅黑"/>
-                        </a:rPr>
-                        <a:t>携程 · AI × 业务</a:t>
-                      </a:r>
-                    </a:p>
-                  </a:txBody>
-                  <a:tcPr anchor="ctr" marL="182880">
-                    <a:solidFill>
-                      <a:srgbClr val="287DFA"/>
-                    </a:solidFill>
-                  </a:tcPr>
-                </a:tc>
-              </a:tr>
-              <a:tr h="640080">
-                <a:tc>
-                  <a:txBody>
-                    <a:bodyPr/>
-                    <a:lstStyle/>
-                    <a:p>
-                      <a:r>
-                        <a:rPr sz="1500" b="1">
-                          <a:solidFill>
-                            <a:srgbClr val="15315E"/>
-                          </a:solidFill>
-                          <a:latin typeface="微软雅黑"/>
-                          <a:ea typeface="微软雅黑"/>
-                          <a:cs typeface="微软雅黑"/>
-                        </a:rPr>
-                        <a:t>产品是什么</a:t>
-                      </a:r>
-                    </a:p>
-                  </a:txBody>
-                  <a:tcPr anchor="ctr" marL="182880">
-                    <a:solidFill>
-                      <a:srgbClr val="EAF2FF"/>
-                    </a:solidFill>
-                  </a:tcPr>
-                </a:tc>
-                <a:tc>
-                  <a:txBody>
-                    <a:bodyPr/>
-                    <a:lstStyle/>
-                    <a:p>
-                      <a:r>
-                        <a:rPr sz="1500" b="0">
-                          <a:solidFill>
-                            <a:srgbClr val="3D4757"/>
-                          </a:solidFill>
-                          <a:latin typeface="微软雅黑"/>
-                          <a:ea typeface="微软雅黑"/>
-                          <a:cs typeface="微软雅黑"/>
-                        </a:rPr>
-                        <a:t>模型本身就是产品</a:t>
-                      </a:r>
-                    </a:p>
-                  </a:txBody>
-                  <a:tcPr anchor="ctr" marL="182880">
-                    <a:solidFill>
-                      <a:srgbClr val="FFFFFF"/>
-                    </a:solidFill>
-                  </a:tcPr>
-                </a:tc>
-                <a:tc>
-                  <a:txBody>
-                    <a:bodyPr/>
-                    <a:lstStyle/>
-                    <a:p>
-                      <a:r>
-                        <a:rPr sz="1500" b="1">
-                          <a:solidFill>
-                            <a:srgbClr val="287DFA"/>
-                          </a:solidFill>
-                          <a:latin typeface="微软雅黑"/>
-                          <a:ea typeface="微软雅黑"/>
-                          <a:cs typeface="微软雅黑"/>
-                        </a:rPr>
-                        <a:t>AI 是服务业务的手段</a:t>
-                      </a:r>
-                    </a:p>
-                  </a:txBody>
-                  <a:tcPr anchor="ctr" marL="182880">
-                    <a:solidFill>
-                      <a:srgbClr val="F5F9FF"/>
-                    </a:solidFill>
-                  </a:tcPr>
-                </a:tc>
-              </a:tr>
-              <a:tr h="640080">
-                <a:tc>
-                  <a:txBody>
-                    <a:bodyPr/>
-                    <a:lstStyle/>
-                    <a:p>
-                      <a:r>
-                        <a:rPr sz="1500" b="1">
-                          <a:solidFill>
-                            <a:srgbClr val="15315E"/>
-                          </a:solidFill>
-                          <a:latin typeface="微软雅黑"/>
-                          <a:ea typeface="微软雅黑"/>
-                          <a:cs typeface="微软雅黑"/>
-                        </a:rPr>
-                        <a:t>边界由谁定</a:t>
-                      </a:r>
-                    </a:p>
-                  </a:txBody>
-                  <a:tcPr anchor="ctr" marL="182880">
-                    <a:solidFill>
-                      <a:srgbClr val="EAF2FF"/>
-                    </a:solidFill>
-                  </a:tcPr>
-                </a:tc>
-                <a:tc>
-                  <a:txBody>
-                    <a:bodyPr/>
-                    <a:lstStyle/>
-                    <a:p>
-                      <a:r>
-                        <a:rPr sz="1500" b="0">
-                          <a:solidFill>
-                            <a:srgbClr val="3D4757"/>
-                          </a:solidFill>
-                          <a:latin typeface="微软雅黑"/>
-                          <a:ea typeface="微软雅黑"/>
-                          <a:cs typeface="微软雅黑"/>
-                        </a:rPr>
-                        <a:t>拓展能力边界、限制行为边界</a:t>
-                      </a:r>
-                    </a:p>
-                  </a:txBody>
-                  <a:tcPr anchor="ctr" marL="182880">
-                    <a:solidFill>
-                      <a:srgbClr val="FFFFFF"/>
-                    </a:solidFill>
-                  </a:tcPr>
-                </a:tc>
-                <a:tc>
-                  <a:txBody>
-                    <a:bodyPr/>
-                    <a:lstStyle/>
-                    <a:p>
-                      <a:r>
-                        <a:rPr sz="1500" b="1">
-                          <a:solidFill>
-                            <a:srgbClr val="287DFA"/>
-                          </a:solidFill>
-                          <a:latin typeface="微软雅黑"/>
-                          <a:ea typeface="微软雅黑"/>
-                          <a:cs typeface="微软雅黑"/>
-                        </a:rPr>
-                        <a:t>业务来定：什么属于火车、什么不属于</a:t>
-                      </a:r>
-                    </a:p>
-                  </a:txBody>
-                  <a:tcPr anchor="ctr" marL="182880">
-                    <a:solidFill>
-                      <a:srgbClr val="F5F9FF"/>
-                    </a:solidFill>
-                  </a:tcPr>
-                </a:tc>
-              </a:tr>
-              <a:tr h="640080">
-                <a:tc>
-                  <a:txBody>
-                    <a:bodyPr/>
-                    <a:lstStyle/>
-                    <a:p>
-                      <a:r>
-                        <a:rPr sz="1500" b="1">
-                          <a:solidFill>
-                            <a:srgbClr val="15315E"/>
-                          </a:solidFill>
-                          <a:latin typeface="微软雅黑"/>
-                          <a:ea typeface="微软雅黑"/>
-                          <a:cs typeface="微软雅黑"/>
-                        </a:rPr>
-                        <a:t>衡量标准</a:t>
-                      </a:r>
-                    </a:p>
-                  </a:txBody>
-                  <a:tcPr anchor="ctr" marL="182880">
-                    <a:solidFill>
-                      <a:srgbClr val="EAF2FF"/>
-                    </a:solidFill>
-                  </a:tcPr>
-                </a:tc>
-                <a:tc>
-                  <a:txBody>
-                    <a:bodyPr/>
-                    <a:lstStyle/>
-                    <a:p>
-                      <a:r>
-                        <a:rPr sz="1500" b="0">
-                          <a:solidFill>
-                            <a:srgbClr val="3D4757"/>
-                          </a:solidFill>
-                          <a:latin typeface="微软雅黑"/>
-                          <a:ea typeface="微软雅黑"/>
-                          <a:cs typeface="微软雅黑"/>
-                        </a:rPr>
-                        <a:t>模型表现得好不好</a:t>
-                      </a:r>
-                    </a:p>
-                  </a:txBody>
-                  <a:tcPr anchor="ctr" marL="182880">
-                    <a:solidFill>
-                      <a:srgbClr val="FFFFFF"/>
-                    </a:solidFill>
-                  </a:tcPr>
-                </a:tc>
-                <a:tc>
-                  <a:txBody>
-                    <a:bodyPr/>
-                    <a:lstStyle/>
-                    <a:p>
-                      <a:r>
-                        <a:rPr sz="1500" b="1">
-                          <a:solidFill>
-                            <a:srgbClr val="287DFA"/>
-                          </a:solidFill>
-                          <a:latin typeface="微软雅黑"/>
-                          <a:ea typeface="微软雅黑"/>
-                          <a:cs typeface="微软雅黑"/>
-                        </a:rPr>
-                        <a:t>票量这样的业务结果</a:t>
-                      </a:r>
-                    </a:p>
-                  </a:txBody>
-                  <a:tcPr anchor="ctr" marL="182880">
-                    <a:solidFill>
-                      <a:srgbClr val="F5F9FF"/>
-                    </a:solidFill>
-                  </a:tcPr>
-                </a:tc>
-              </a:tr>
-            </a:tbl>
-          </a:graphicData>
-        </a:graphic>
-      </p:graphicFrame>
+      <p:sp>
+        <p:nvSpPr>
+          <p:cNvPr id="13" name="TextBox 12"/>
+          <p:cNvSpPr txBox="1"/>
+          <p:nvPr/>
+        </p:nvSpPr>
+        <p:spPr>
+          <a:xfrm>
+            <a:off x="457200" y="2697480"/>
+            <a:ext cx="11274552" cy="320040"/>
+          </a:xfrm>
+          <a:prstGeom prst="rect">
+            <a:avLst/>
+          </a:prstGeom>
+          <a:noFill/>
+        </p:spPr>
+        <p:txBody>
+          <a:bodyPr wrap="square" lIns="0" rIns="0" tIns="0" bIns="0" anchor="t">
+            <a:spAutoFit/>
+          </a:bodyPr>
+          <a:lstStyle/>
+          <a:p>
+            <a:pPr algn="l"/>
+            <a:r>
+              <a:rPr sz="1300" b="1">
+                <a:solidFill>
+                  <a:srgbClr val="7A8599"/>
+                </a:solidFill>
+                <a:latin typeface="微软雅黑"/>
+                <a:ea typeface="微软雅黑"/>
+                <a:cs typeface="微软雅黑"/>
+              </a:rPr>
+              <a:t>AI native：</a:t>
+            </a:r>
+            <a:r>
+              <a:rPr sz="1300" b="0">
+                <a:solidFill>
+                  <a:srgbClr val="7A8599"/>
+                </a:solidFill>
+                <a:latin typeface="微软雅黑"/>
+                <a:ea typeface="微软雅黑"/>
+                <a:cs typeface="微软雅黑"/>
+              </a:rPr>
+              <a:t>模型本身就是产品，衡量的是模型表现　　</a:t>
+            </a:r>
+            <a:r>
+              <a:rPr sz="1300" b="1">
+                <a:solidFill>
+                  <a:srgbClr val="287DFA"/>
+                </a:solidFill>
+                <a:latin typeface="微软雅黑"/>
+                <a:ea typeface="微软雅黑"/>
+                <a:cs typeface="微软雅黑"/>
+              </a:rPr>
+              <a:t>AI × 业务：</a:t>
+            </a:r>
+            <a:r>
+              <a:rPr sz="1300" b="0">
+                <a:solidFill>
+                  <a:srgbClr val="287DFA"/>
+                </a:solidFill>
+                <a:latin typeface="微软雅黑"/>
+                <a:ea typeface="微软雅黑"/>
+                <a:cs typeface="微软雅黑"/>
+              </a:rPr>
+              <a:t>AI 是服务业务的手段</a:t>
+            </a:r>
+          </a:p>
+        </p:txBody>
+      </p:sp>
       <p:sp>
         <p:nvSpPr>
           <p:cNvPr id="14" name="Rounded Rectangle 13"/>
@@ -15885,8 +15651,8 @@
         </p:nvSpPr>
         <p:spPr>
           <a:xfrm>
-            <a:off x="457200" y="5440680"/>
-            <a:ext cx="11274552" cy="640080"/>
+            <a:off x="457200" y="3200400"/>
+            <a:ext cx="3630168" cy="1828800"/>
           </a:xfrm>
           <a:prstGeom prst="roundRect">
             <a:avLst>
@@ -15894,7 +15660,51 @@
             </a:avLst>
           </a:prstGeom>
           <a:solidFill>
-            <a:srgbClr val="EAF2FF"/>
+            <a:srgbClr val="FFFFFF"/>
+          </a:solidFill>
+          <a:ln w="12700">
+            <a:solidFill>
+              <a:srgbClr val="D3E2FB"/>
+            </a:solidFill>
+          </a:ln>
+          <a:effectLst/>
+        </p:spPr>
+        <p:style>
+          <a:lnRef idx="1">
+            <a:schemeClr val="accent1"/>
+          </a:lnRef>
+          <a:fillRef idx="3">
+            <a:schemeClr val="accent1"/>
+          </a:fillRef>
+          <a:effectRef idx="2">
+            <a:schemeClr val="accent1"/>
+          </a:effectRef>
+          <a:fontRef idx="minor">
+            <a:schemeClr val="lt1"/>
+          </a:fontRef>
+        </p:style>
+        <p:txBody>
+          <a:bodyPr rtlCol="0" anchor="ctr"/>
+          <a:lstStyle/>
+          <a:p/>
+        </p:txBody>
+      </p:sp>
+      <p:sp>
+        <p:nvSpPr>
+          <p:cNvPr id="15" name="icon-circle"/>
+          <p:cNvSpPr/>
+          <p:nvPr/>
+        </p:nvSpPr>
+        <p:spPr>
+          <a:xfrm>
+            <a:off x="731520" y="3429000"/>
+            <a:ext cx="685800" cy="685800"/>
+          </a:xfrm>
+          <a:prstGeom prst="ellipse">
+            <a:avLst/>
+          </a:prstGeom>
+          <a:solidFill>
+            <a:srgbClr val="287DFA"/>
           </a:solidFill>
           <a:ln>
             <a:noFill/>
@@ -15923,7 +15733,7 @@
       </p:sp>
       <p:pic>
         <p:nvPicPr>
-          <p:cNvPr id="15" name="Picture 14" descr="FaLightbulb_b.png"/>
+          <p:cNvPr id="16" name="Picture 15" descr="FaLayerGroup_w.png"/>
           <p:cNvPicPr>
             <a:picLocks noChangeAspect="1"/>
           </p:cNvPicPr>
@@ -15937,8 +15747,8 @@
         </p:blipFill>
         <p:spPr>
           <a:xfrm>
-            <a:off x="685800" y="5577840"/>
-            <a:ext cx="365760" cy="365760"/>
+            <a:off x="902970" y="3600450"/>
+            <a:ext cx="342900" cy="342900"/>
           </a:xfrm>
           <a:prstGeom prst="rect">
             <a:avLst/>
@@ -15947,14 +15757,14 @@
       </p:pic>
       <p:sp>
         <p:nvSpPr>
-          <p:cNvPr id="16" name="TextBox 15"/>
+          <p:cNvPr id="17" name="TextBox 16"/>
           <p:cNvSpPr txBox="1"/>
           <p:nvPr/>
         </p:nvSpPr>
         <p:spPr>
           <a:xfrm>
-            <a:off x="1188720" y="5440680"/>
-            <a:ext cx="10424160" cy="640080"/>
+            <a:off x="1600200" y="3429000"/>
+            <a:ext cx="2377440" cy="685800"/>
           </a:xfrm>
           <a:prstGeom prst="rect">
             <a:avLst/>
@@ -15969,18 +15779,44 @@
           <a:p>
             <a:pPr algn="l"/>
             <a:r>
-              <a:rPr sz="1400" b="1">
-                <a:solidFill>
-                  <a:srgbClr val="287DFA"/>
+              <a:rPr sz="1700" b="1">
+                <a:solidFill>
+                  <a:srgbClr val="15315E"/>
                 </a:solidFill>
                 <a:latin typeface="微软雅黑"/>
                 <a:ea typeface="微软雅黑"/>
                 <a:cs typeface="微软雅黑"/>
               </a:rPr>
-              <a:t>形态要贴合用户习惯　</a:t>
-            </a:r>
-            <a:r>
-              <a:rPr sz="1400" b="0">
+              <a:t>边界由业务来定</a:t>
+            </a:r>
+          </a:p>
+        </p:txBody>
+      </p:sp>
+      <p:sp>
+        <p:nvSpPr>
+          <p:cNvPr id="18" name="TextBox 17"/>
+          <p:cNvSpPr txBox="1"/>
+          <p:nvPr/>
+        </p:nvSpPr>
+        <p:spPr>
+          <a:xfrm>
+            <a:off x="731520" y="4297680"/>
+            <a:ext cx="3108960" cy="640080"/>
+          </a:xfrm>
+          <a:prstGeom prst="rect">
+            <a:avLst/>
+          </a:prstGeom>
+          <a:noFill/>
+        </p:spPr>
+        <p:txBody>
+          <a:bodyPr wrap="square" lIns="0" rIns="0" tIns="0" bIns="0" anchor="t">
+            <a:spAutoFit/>
+          </a:bodyPr>
+          <a:lstStyle/>
+          <a:p>
+            <a:pPr algn="l"/>
+            <a:r>
+              <a:rPr sz="1300" b="0">
                 <a:solidFill>
                   <a:srgbClr val="3D4757"/>
                 </a:solidFill>
@@ -15988,7 +15824,495 @@
                 <a:ea typeface="微软雅黑"/>
                 <a:cs typeface="微软雅黑"/>
               </a:rPr>
-              <a:t>二期把对话改成直接操作列表页后，票量明显提升</a:t>
+              <a:t>什么属于火车、什么不属于</a:t>
+            </a:r>
+          </a:p>
+        </p:txBody>
+      </p:sp>
+      <p:sp>
+        <p:nvSpPr>
+          <p:cNvPr id="19" name="Rounded Rectangle 18"/>
+          <p:cNvSpPr/>
+          <p:nvPr/>
+        </p:nvSpPr>
+        <p:spPr>
+          <a:xfrm>
+            <a:off x="4279392" y="3200400"/>
+            <a:ext cx="3630168" cy="1828800"/>
+          </a:xfrm>
+          <a:prstGeom prst="roundRect">
+            <a:avLst>
+              <a:gd name="adj" fmla="val 6000"/>
+            </a:avLst>
+          </a:prstGeom>
+          <a:solidFill>
+            <a:srgbClr val="FFFFFF"/>
+          </a:solidFill>
+          <a:ln w="12700">
+            <a:solidFill>
+              <a:srgbClr val="D3E2FB"/>
+            </a:solidFill>
+          </a:ln>
+          <a:effectLst/>
+        </p:spPr>
+        <p:style>
+          <a:lnRef idx="1">
+            <a:schemeClr val="accent1"/>
+          </a:lnRef>
+          <a:fillRef idx="3">
+            <a:schemeClr val="accent1"/>
+          </a:fillRef>
+          <a:effectRef idx="2">
+            <a:schemeClr val="accent1"/>
+          </a:effectRef>
+          <a:fontRef idx="minor">
+            <a:schemeClr val="lt1"/>
+          </a:fontRef>
+        </p:style>
+        <p:txBody>
+          <a:bodyPr rtlCol="0" anchor="ctr"/>
+          <a:lstStyle/>
+          <a:p/>
+        </p:txBody>
+      </p:sp>
+      <p:sp>
+        <p:nvSpPr>
+          <p:cNvPr id="20" name="icon-circle"/>
+          <p:cNvSpPr/>
+          <p:nvPr/>
+        </p:nvSpPr>
+        <p:spPr>
+          <a:xfrm>
+            <a:off x="4553712" y="3429000"/>
+            <a:ext cx="685800" cy="685800"/>
+          </a:xfrm>
+          <a:prstGeom prst="ellipse">
+            <a:avLst/>
+          </a:prstGeom>
+          <a:solidFill>
+            <a:srgbClr val="287DFA"/>
+          </a:solidFill>
+          <a:ln>
+            <a:noFill/>
+          </a:ln>
+          <a:effectLst/>
+        </p:spPr>
+        <p:style>
+          <a:lnRef idx="1">
+            <a:schemeClr val="accent1"/>
+          </a:lnRef>
+          <a:fillRef idx="3">
+            <a:schemeClr val="accent1"/>
+          </a:fillRef>
+          <a:effectRef idx="2">
+            <a:schemeClr val="accent1"/>
+          </a:effectRef>
+          <a:fontRef idx="minor">
+            <a:schemeClr val="lt1"/>
+          </a:fontRef>
+        </p:style>
+        <p:txBody>
+          <a:bodyPr rtlCol="0" anchor="ctr"/>
+          <a:lstStyle/>
+          <a:p/>
+        </p:txBody>
+      </p:sp>
+      <p:pic>
+        <p:nvPicPr>
+          <p:cNvPr id="21" name="Picture 20" descr="FaHandshake_w.png"/>
+          <p:cNvPicPr>
+            <a:picLocks noChangeAspect="1"/>
+          </p:cNvPicPr>
+          <p:nvPr/>
+        </p:nvPicPr>
+        <p:blipFill>
+          <a:blip r:embed="rId6"/>
+          <a:stretch>
+            <a:fillRect/>
+          </a:stretch>
+        </p:blipFill>
+        <p:spPr>
+          <a:xfrm>
+            <a:off x="4725162" y="3600450"/>
+            <a:ext cx="342900" cy="342900"/>
+          </a:xfrm>
+          <a:prstGeom prst="rect">
+            <a:avLst/>
+          </a:prstGeom>
+        </p:spPr>
+      </p:pic>
+      <p:sp>
+        <p:nvSpPr>
+          <p:cNvPr id="22" name="TextBox 21"/>
+          <p:cNvSpPr txBox="1"/>
+          <p:nvPr/>
+        </p:nvSpPr>
+        <p:spPr>
+          <a:xfrm>
+            <a:off x="5422392" y="3429000"/>
+            <a:ext cx="2377440" cy="685800"/>
+          </a:xfrm>
+          <a:prstGeom prst="rect">
+            <a:avLst/>
+          </a:prstGeom>
+          <a:noFill/>
+        </p:spPr>
+        <p:txBody>
+          <a:bodyPr wrap="square" lIns="0" rIns="0" tIns="0" bIns="0" anchor="ctr">
+            <a:spAutoFit/>
+          </a:bodyPr>
+          <a:lstStyle/>
+          <a:p>
+            <a:pPr algn="l"/>
+            <a:r>
+              <a:rPr sz="1700" b="1">
+                <a:solidFill>
+                  <a:srgbClr val="15315E"/>
+                </a:solidFill>
+                <a:latin typeface="微软雅黑"/>
+                <a:ea typeface="微软雅黑"/>
+                <a:cs typeface="微软雅黑"/>
+              </a:rPr>
+              <a:t>形态贴合用户习惯</a:t>
+            </a:r>
+          </a:p>
+        </p:txBody>
+      </p:sp>
+      <p:sp>
+        <p:nvSpPr>
+          <p:cNvPr id="23" name="TextBox 22"/>
+          <p:cNvSpPr txBox="1"/>
+          <p:nvPr/>
+        </p:nvSpPr>
+        <p:spPr>
+          <a:xfrm>
+            <a:off x="4553712" y="4297680"/>
+            <a:ext cx="3108960" cy="640080"/>
+          </a:xfrm>
+          <a:prstGeom prst="rect">
+            <a:avLst/>
+          </a:prstGeom>
+          <a:noFill/>
+        </p:spPr>
+        <p:txBody>
+          <a:bodyPr wrap="square" lIns="0" rIns="0" tIns="0" bIns="0" anchor="t">
+            <a:spAutoFit/>
+          </a:bodyPr>
+          <a:lstStyle/>
+          <a:p>
+            <a:pPr algn="l"/>
+            <a:r>
+              <a:rPr sz="1300" b="0">
+                <a:solidFill>
+                  <a:srgbClr val="3D4757"/>
+                </a:solidFill>
+                <a:latin typeface="微软雅黑"/>
+                <a:ea typeface="微软雅黑"/>
+                <a:cs typeface="微软雅黑"/>
+              </a:rPr>
+              <a:t>二期把对话改成直接操作列表页，票量明显提升</a:t>
+            </a:r>
+          </a:p>
+        </p:txBody>
+      </p:sp>
+      <p:sp>
+        <p:nvSpPr>
+          <p:cNvPr id="24" name="Rounded Rectangle 23"/>
+          <p:cNvSpPr/>
+          <p:nvPr/>
+        </p:nvSpPr>
+        <p:spPr>
+          <a:xfrm>
+            <a:off x="8101583" y="3200400"/>
+            <a:ext cx="3630168" cy="1828800"/>
+          </a:xfrm>
+          <a:prstGeom prst="roundRect">
+            <a:avLst>
+              <a:gd name="adj" fmla="val 6000"/>
+            </a:avLst>
+          </a:prstGeom>
+          <a:solidFill>
+            <a:srgbClr val="FFFFFF"/>
+          </a:solidFill>
+          <a:ln w="12700">
+            <a:solidFill>
+              <a:srgbClr val="D3E2FB"/>
+            </a:solidFill>
+          </a:ln>
+          <a:effectLst/>
+        </p:spPr>
+        <p:style>
+          <a:lnRef idx="1">
+            <a:schemeClr val="accent1"/>
+          </a:lnRef>
+          <a:fillRef idx="3">
+            <a:schemeClr val="accent1"/>
+          </a:fillRef>
+          <a:effectRef idx="2">
+            <a:schemeClr val="accent1"/>
+          </a:effectRef>
+          <a:fontRef idx="minor">
+            <a:schemeClr val="lt1"/>
+          </a:fontRef>
+        </p:style>
+        <p:txBody>
+          <a:bodyPr rtlCol="0" anchor="ctr"/>
+          <a:lstStyle/>
+          <a:p/>
+        </p:txBody>
+      </p:sp>
+      <p:sp>
+        <p:nvSpPr>
+          <p:cNvPr id="25" name="icon-circle"/>
+          <p:cNvSpPr/>
+          <p:nvPr/>
+        </p:nvSpPr>
+        <p:spPr>
+          <a:xfrm>
+            <a:off x="8375904" y="3429000"/>
+            <a:ext cx="685800" cy="685800"/>
+          </a:xfrm>
+          <a:prstGeom prst="ellipse">
+            <a:avLst/>
+          </a:prstGeom>
+          <a:solidFill>
+            <a:srgbClr val="287DFA"/>
+          </a:solidFill>
+          <a:ln>
+            <a:noFill/>
+          </a:ln>
+          <a:effectLst/>
+        </p:spPr>
+        <p:style>
+          <a:lnRef idx="1">
+            <a:schemeClr val="accent1"/>
+          </a:lnRef>
+          <a:fillRef idx="3">
+            <a:schemeClr val="accent1"/>
+          </a:fillRef>
+          <a:effectRef idx="2">
+            <a:schemeClr val="accent1"/>
+          </a:effectRef>
+          <a:fontRef idx="minor">
+            <a:schemeClr val="lt1"/>
+          </a:fontRef>
+        </p:style>
+        <p:txBody>
+          <a:bodyPr rtlCol="0" anchor="ctr"/>
+          <a:lstStyle/>
+          <a:p/>
+        </p:txBody>
+      </p:sp>
+      <p:pic>
+        <p:nvPicPr>
+          <p:cNvPr id="26" name="Picture 25" descr="FaChartLine_w.png"/>
+          <p:cNvPicPr>
+            <a:picLocks noChangeAspect="1"/>
+          </p:cNvPicPr>
+          <p:nvPr/>
+        </p:nvPicPr>
+        <p:blipFill>
+          <a:blip r:embed="rId7"/>
+          <a:stretch>
+            <a:fillRect/>
+          </a:stretch>
+        </p:blipFill>
+        <p:spPr>
+          <a:xfrm>
+            <a:off x="8547354" y="3600450"/>
+            <a:ext cx="342900" cy="342900"/>
+          </a:xfrm>
+          <a:prstGeom prst="rect">
+            <a:avLst/>
+          </a:prstGeom>
+        </p:spPr>
+      </p:pic>
+      <p:sp>
+        <p:nvSpPr>
+          <p:cNvPr id="27" name="TextBox 26"/>
+          <p:cNvSpPr txBox="1"/>
+          <p:nvPr/>
+        </p:nvSpPr>
+        <p:spPr>
+          <a:xfrm>
+            <a:off x="9244584" y="3429000"/>
+            <a:ext cx="2377440" cy="685800"/>
+          </a:xfrm>
+          <a:prstGeom prst="rect">
+            <a:avLst/>
+          </a:prstGeom>
+          <a:noFill/>
+        </p:spPr>
+        <p:txBody>
+          <a:bodyPr wrap="square" lIns="0" rIns="0" tIns="0" bIns="0" anchor="ctr">
+            <a:spAutoFit/>
+          </a:bodyPr>
+          <a:lstStyle/>
+          <a:p>
+            <a:pPr algn="l"/>
+            <a:r>
+              <a:rPr sz="1700" b="1">
+                <a:solidFill>
+                  <a:srgbClr val="15315E"/>
+                </a:solidFill>
+                <a:latin typeface="微软雅黑"/>
+                <a:ea typeface="微软雅黑"/>
+                <a:cs typeface="微软雅黑"/>
+              </a:rPr>
+              <a:t>用业务结果衡量</a:t>
+            </a:r>
+          </a:p>
+        </p:txBody>
+      </p:sp>
+      <p:sp>
+        <p:nvSpPr>
+          <p:cNvPr id="28" name="TextBox 27"/>
+          <p:cNvSpPr txBox="1"/>
+          <p:nvPr/>
+        </p:nvSpPr>
+        <p:spPr>
+          <a:xfrm>
+            <a:off x="8375904" y="4297680"/>
+            <a:ext cx="3108960" cy="640080"/>
+          </a:xfrm>
+          <a:prstGeom prst="rect">
+            <a:avLst/>
+          </a:prstGeom>
+          <a:noFill/>
+        </p:spPr>
+        <p:txBody>
+          <a:bodyPr wrap="square" lIns="0" rIns="0" tIns="0" bIns="0" anchor="t">
+            <a:spAutoFit/>
+          </a:bodyPr>
+          <a:lstStyle/>
+          <a:p>
+            <a:pPr algn="l"/>
+            <a:r>
+              <a:rPr sz="1300" b="0">
+                <a:solidFill>
+                  <a:srgbClr val="3D4757"/>
+                </a:solidFill>
+                <a:latin typeface="微软雅黑"/>
+                <a:ea typeface="微软雅黑"/>
+                <a:cs typeface="微软雅黑"/>
+              </a:rPr>
+              <a:t>最终看的是票量这样的业务结果</a:t>
+            </a:r>
+          </a:p>
+        </p:txBody>
+      </p:sp>
+      <p:sp>
+        <p:nvSpPr>
+          <p:cNvPr id="29" name="Rounded Rectangle 28"/>
+          <p:cNvSpPr/>
+          <p:nvPr/>
+        </p:nvSpPr>
+        <p:spPr>
+          <a:xfrm>
+            <a:off x="457200" y="5257800"/>
+            <a:ext cx="11274552" cy="822960"/>
+          </a:xfrm>
+          <a:prstGeom prst="roundRect">
+            <a:avLst>
+              <a:gd name="adj" fmla="val 6000"/>
+            </a:avLst>
+          </a:prstGeom>
+          <a:solidFill>
+            <a:srgbClr val="287DFA"/>
+          </a:solidFill>
+          <a:ln>
+            <a:noFill/>
+          </a:ln>
+          <a:effectLst/>
+        </p:spPr>
+        <p:style>
+          <a:lnRef idx="1">
+            <a:schemeClr val="accent1"/>
+          </a:lnRef>
+          <a:fillRef idx="3">
+            <a:schemeClr val="accent1"/>
+          </a:fillRef>
+          <a:effectRef idx="2">
+            <a:schemeClr val="accent1"/>
+          </a:effectRef>
+          <a:fontRef idx="minor">
+            <a:schemeClr val="lt1"/>
+          </a:fontRef>
+        </p:style>
+        <p:txBody>
+          <a:bodyPr rtlCol="0" anchor="ctr"/>
+          <a:lstStyle/>
+          <a:p/>
+        </p:txBody>
+      </p:sp>
+      <p:pic>
+        <p:nvPicPr>
+          <p:cNvPr id="30" name="Picture 29" descr="FaLightbulb_w.png"/>
+          <p:cNvPicPr>
+            <a:picLocks noChangeAspect="1"/>
+          </p:cNvPicPr>
+          <p:nvPr/>
+        </p:nvPicPr>
+        <p:blipFill>
+          <a:blip r:embed="rId8"/>
+          <a:stretch>
+            <a:fillRect/>
+          </a:stretch>
+        </p:blipFill>
+        <p:spPr>
+          <a:xfrm>
+            <a:off x="777240" y="5458968"/>
+            <a:ext cx="420624" cy="420624"/>
+          </a:xfrm>
+          <a:prstGeom prst="rect">
+            <a:avLst/>
+          </a:prstGeom>
+        </p:spPr>
+      </p:pic>
+      <p:sp>
+        <p:nvSpPr>
+          <p:cNvPr id="31" name="TextBox 30"/>
+          <p:cNvSpPr txBox="1"/>
+          <p:nvPr/>
+        </p:nvSpPr>
+        <p:spPr>
+          <a:xfrm>
+            <a:off x="1417320" y="5257800"/>
+            <a:ext cx="10149840" cy="822960"/>
+          </a:xfrm>
+          <a:prstGeom prst="rect">
+            <a:avLst/>
+          </a:prstGeom>
+          <a:noFill/>
+        </p:spPr>
+        <p:txBody>
+          <a:bodyPr wrap="square" lIns="0" rIns="0" tIns="0" bIns="0" anchor="ctr">
+            <a:spAutoFit/>
+          </a:bodyPr>
+          <a:lstStyle/>
+          <a:p>
+            <a:pPr algn="l"/>
+            <a:r>
+              <a:rPr sz="1800" b="1">
+                <a:solidFill>
+                  <a:srgbClr val="D6E6FF"/>
+                </a:solidFill>
+                <a:latin typeface="微软雅黑"/>
+                <a:ea typeface="微软雅黑"/>
+                <a:cs typeface="微软雅黑"/>
+              </a:rPr>
+              <a:t>探索 AI + 业务时，先想清楚：</a:t>
+            </a:r>
+            <a:r>
+              <a:rPr sz="1800" b="1">
+                <a:solidFill>
+                  <a:srgbClr val="FFFFFF"/>
+                </a:solidFill>
+                <a:latin typeface="微软雅黑"/>
+                <a:ea typeface="微软雅黑"/>
+                <a:cs typeface="微软雅黑"/>
+              </a:rPr>
+              <a:t>业务需要它解决什么？用户习惯怎么用？</a:t>
             </a:r>
           </a:p>
         </p:txBody>

--- a/答辩PPT.pptx
+++ b/答辩PPT.pptx
@@ -15205,8 +15205,8 @@
         </p:nvSpPr>
         <p:spPr>
           <a:xfrm>
-            <a:off x="457200" y="1508760"/>
-            <a:ext cx="5239512" cy="914400"/>
+            <a:off x="457200" y="1554480"/>
+            <a:ext cx="3383280" cy="3474720"/>
           </a:xfrm>
           <a:prstGeom prst="roundRect">
             <a:avLst>
@@ -15251,10 +15251,279 @@
         </p:nvSpPr>
         <p:spPr>
           <a:xfrm>
-            <a:off x="685800" y="1645920"/>
+            <a:off x="731520" y="1783080"/>
             <a:ext cx="640080" cy="640080"/>
           </a:xfrm>
           <a:prstGeom prst="ellipse">
+            <a:avLst/>
+          </a:prstGeom>
+          <a:solidFill>
+            <a:srgbClr val="7A8599"/>
+          </a:solidFill>
+          <a:ln>
+            <a:noFill/>
+          </a:ln>
+          <a:effectLst/>
+        </p:spPr>
+        <p:style>
+          <a:lnRef idx="1">
+            <a:schemeClr val="accent1"/>
+          </a:lnRef>
+          <a:fillRef idx="3">
+            <a:schemeClr val="accent1"/>
+          </a:fillRef>
+          <a:effectRef idx="2">
+            <a:schemeClr val="accent1"/>
+          </a:effectRef>
+          <a:fontRef idx="minor">
+            <a:schemeClr val="lt1"/>
+          </a:fontRef>
+        </p:style>
+        <p:txBody>
+          <a:bodyPr rtlCol="0" anchor="ctr"/>
+          <a:lstStyle/>
+          <a:p/>
+        </p:txBody>
+      </p:sp>
+      <p:pic>
+        <p:nvPicPr>
+          <p:cNvPr id="6" name="Picture 5" descr="FaRobot_w.png"/>
+          <p:cNvPicPr>
+            <a:picLocks noChangeAspect="1"/>
+          </p:cNvPicPr>
+          <p:nvPr/>
+        </p:nvPicPr>
+        <p:blipFill>
+          <a:blip r:embed="rId3"/>
+          <a:stretch>
+            <a:fillRect/>
+          </a:stretch>
+        </p:blipFill>
+        <p:spPr>
+          <a:xfrm>
+            <a:off x="891540" y="1943100"/>
+            <a:ext cx="320040" cy="320040"/>
+          </a:xfrm>
+          <a:prstGeom prst="rect">
+            <a:avLst/>
+          </a:prstGeom>
+        </p:spPr>
+      </p:pic>
+      <p:sp>
+        <p:nvSpPr>
+          <p:cNvPr id="7" name="TextBox 6"/>
+          <p:cNvSpPr txBox="1"/>
+          <p:nvPr/>
+        </p:nvSpPr>
+        <p:spPr>
+          <a:xfrm>
+            <a:off x="1508760" y="1783080"/>
+            <a:ext cx="2194560" cy="640080"/>
+          </a:xfrm>
+          <a:prstGeom prst="rect">
+            <a:avLst/>
+          </a:prstGeom>
+          <a:noFill/>
+        </p:spPr>
+        <p:txBody>
+          <a:bodyPr wrap="square" lIns="0" rIns="0" tIns="0" bIns="0" anchor="ctr">
+            <a:spAutoFit/>
+          </a:bodyPr>
+          <a:lstStyle/>
+          <a:p>
+            <a:pPr algn="l"/>
+            <a:r>
+              <a:rPr sz="1800" b="1">
+                <a:solidFill>
+                  <a:srgbClr val="3D4757"/>
+                </a:solidFill>
+                <a:latin typeface="微软雅黑"/>
+                <a:ea typeface="微软雅黑"/>
+                <a:cs typeface="微软雅黑"/>
+              </a:rPr>
+              <a:t>AI native</a:t>
+            </a:r>
+          </a:p>
+          <a:p>
+            <a:pPr algn="l">
+              <a:spcBef>
+                <a:spcPts val="0"/>
+              </a:spcBef>
+            </a:pPr>
+            <a:r>
+              <a:rPr sz="1200" b="0">
+                <a:solidFill>
+                  <a:srgbClr val="7A8599"/>
+                </a:solidFill>
+                <a:latin typeface="微软雅黑"/>
+                <a:ea typeface="微软雅黑"/>
+                <a:cs typeface="微软雅黑"/>
+              </a:rPr>
+              <a:t>小红书</a:t>
+            </a:r>
+          </a:p>
+        </p:txBody>
+      </p:sp>
+      <p:sp>
+        <p:nvSpPr>
+          <p:cNvPr id="8" name="TextBox 7"/>
+          <p:cNvSpPr txBox="1"/>
+          <p:nvPr/>
+        </p:nvSpPr>
+        <p:spPr>
+          <a:xfrm>
+            <a:off x="731520" y="2743200"/>
+            <a:ext cx="2834640" cy="274320"/>
+          </a:xfrm>
+          <a:prstGeom prst="rect">
+            <a:avLst/>
+          </a:prstGeom>
+          <a:noFill/>
+        </p:spPr>
+        <p:txBody>
+          <a:bodyPr wrap="square" lIns="0" rIns="0" tIns="0" bIns="0" anchor="t">
+            <a:spAutoFit/>
+          </a:bodyPr>
+          <a:lstStyle/>
+          <a:p>
+            <a:pPr algn="l"/>
+            <a:r>
+              <a:rPr sz="1200" b="1">
+                <a:solidFill>
+                  <a:srgbClr val="7A8599"/>
+                </a:solidFill>
+                <a:latin typeface="微软雅黑"/>
+                <a:ea typeface="微软雅黑"/>
+                <a:cs typeface="微软雅黑"/>
+              </a:rPr>
+              <a:t>定位</a:t>
+            </a:r>
+          </a:p>
+        </p:txBody>
+      </p:sp>
+      <p:sp>
+        <p:nvSpPr>
+          <p:cNvPr id="9" name="TextBox 8"/>
+          <p:cNvSpPr txBox="1"/>
+          <p:nvPr/>
+        </p:nvSpPr>
+        <p:spPr>
+          <a:xfrm>
+            <a:off x="731520" y="3035808"/>
+            <a:ext cx="2834640" cy="457200"/>
+          </a:xfrm>
+          <a:prstGeom prst="rect">
+            <a:avLst/>
+          </a:prstGeom>
+          <a:noFill/>
+        </p:spPr>
+        <p:txBody>
+          <a:bodyPr wrap="square" lIns="0" rIns="0" tIns="0" bIns="0" anchor="t">
+            <a:spAutoFit/>
+          </a:bodyPr>
+          <a:lstStyle/>
+          <a:p>
+            <a:pPr algn="l"/>
+            <a:r>
+              <a:rPr sz="1700" b="1">
+                <a:solidFill>
+                  <a:srgbClr val="3D4757"/>
+                </a:solidFill>
+                <a:latin typeface="微软雅黑"/>
+                <a:ea typeface="微软雅黑"/>
+                <a:cs typeface="微软雅黑"/>
+              </a:rPr>
+              <a:t>模型本身就是产品</a:t>
+            </a:r>
+          </a:p>
+        </p:txBody>
+      </p:sp>
+      <p:sp>
+        <p:nvSpPr>
+          <p:cNvPr id="10" name="TextBox 9"/>
+          <p:cNvSpPr txBox="1"/>
+          <p:nvPr/>
+        </p:nvSpPr>
+        <p:spPr>
+          <a:xfrm>
+            <a:off x="731520" y="3794760"/>
+            <a:ext cx="2834640" cy="274320"/>
+          </a:xfrm>
+          <a:prstGeom prst="rect">
+            <a:avLst/>
+          </a:prstGeom>
+          <a:noFill/>
+        </p:spPr>
+        <p:txBody>
+          <a:bodyPr wrap="square" lIns="0" rIns="0" tIns="0" bIns="0" anchor="t">
+            <a:spAutoFit/>
+          </a:bodyPr>
+          <a:lstStyle/>
+          <a:p>
+            <a:pPr algn="l"/>
+            <a:r>
+              <a:rPr sz="1200" b="1">
+                <a:solidFill>
+                  <a:srgbClr val="7A8599"/>
+                </a:solidFill>
+                <a:latin typeface="微软雅黑"/>
+                <a:ea typeface="微软雅黑"/>
+                <a:cs typeface="微软雅黑"/>
+              </a:rPr>
+              <a:t>衡量</a:t>
+            </a:r>
+          </a:p>
+        </p:txBody>
+      </p:sp>
+      <p:sp>
+        <p:nvSpPr>
+          <p:cNvPr id="11" name="TextBox 10"/>
+          <p:cNvSpPr txBox="1"/>
+          <p:nvPr/>
+        </p:nvSpPr>
+        <p:spPr>
+          <a:xfrm>
+            <a:off x="731520" y="4087368"/>
+            <a:ext cx="2834640" cy="457200"/>
+          </a:xfrm>
+          <a:prstGeom prst="rect">
+            <a:avLst/>
+          </a:prstGeom>
+          <a:noFill/>
+        </p:spPr>
+        <p:txBody>
+          <a:bodyPr wrap="square" lIns="0" rIns="0" tIns="0" bIns="0" anchor="t">
+            <a:spAutoFit/>
+          </a:bodyPr>
+          <a:lstStyle/>
+          <a:p>
+            <a:pPr algn="l"/>
+            <a:r>
+              <a:rPr sz="1700" b="1">
+                <a:solidFill>
+                  <a:srgbClr val="3D4757"/>
+                </a:solidFill>
+                <a:latin typeface="微软雅黑"/>
+                <a:ea typeface="微软雅黑"/>
+                <a:cs typeface="微软雅黑"/>
+              </a:rPr>
+              <a:t>模型表现得好不好</a:t>
+            </a:r>
+          </a:p>
+        </p:txBody>
+      </p:sp>
+      <p:sp>
+        <p:nvSpPr>
+          <p:cNvPr id="12" name="arrow"/>
+          <p:cNvSpPr/>
+          <p:nvPr/>
+        </p:nvSpPr>
+        <p:spPr>
+          <a:xfrm>
+            <a:off x="3977639" y="3063240"/>
+            <a:ext cx="502920" cy="457200"/>
+          </a:xfrm>
+          <a:prstGeom prst="rightArrow">
             <a:avLst/>
           </a:prstGeom>
           <a:solidFill>
@@ -15285,95 +15554,16 @@
           <a:p/>
         </p:txBody>
       </p:sp>
-      <p:pic>
-        <p:nvPicPr>
-          <p:cNvPr id="6" name="Picture 5" descr="FaRobot_w.png"/>
-          <p:cNvPicPr>
-            <a:picLocks noChangeAspect="1"/>
-          </p:cNvPicPr>
-          <p:nvPr/>
-        </p:nvPicPr>
-        <p:blipFill>
-          <a:blip r:embed="rId3"/>
-          <a:stretch>
-            <a:fillRect/>
-          </a:stretch>
-        </p:blipFill>
-        <p:spPr>
-          <a:xfrm>
-            <a:off x="845820" y="1805940"/>
-            <a:ext cx="320040" cy="320040"/>
-          </a:xfrm>
-          <a:prstGeom prst="rect">
-            <a:avLst/>
-          </a:prstGeom>
-        </p:spPr>
-      </p:pic>
-      <p:sp>
-        <p:nvSpPr>
-          <p:cNvPr id="7" name="TextBox 6"/>
-          <p:cNvSpPr txBox="1"/>
-          <p:nvPr/>
-        </p:nvSpPr>
-        <p:spPr>
-          <a:xfrm>
-            <a:off x="1508760" y="1508760"/>
-            <a:ext cx="4069080" cy="914400"/>
-          </a:xfrm>
-          <a:prstGeom prst="rect">
-            <a:avLst/>
-          </a:prstGeom>
-          <a:noFill/>
-        </p:spPr>
-        <p:txBody>
-          <a:bodyPr wrap="square" lIns="0" rIns="0" tIns="0" bIns="0" anchor="ctr">
-            <a:spAutoFit/>
-          </a:bodyPr>
-          <a:lstStyle/>
-          <a:p>
-            <a:pPr algn="l"/>
-            <a:r>
-              <a:rPr sz="1600" b="1">
-                <a:solidFill>
-                  <a:srgbClr val="15315E"/>
-                </a:solidFill>
-                <a:latin typeface="微软雅黑"/>
-                <a:ea typeface="微软雅黑"/>
-                <a:cs typeface="微软雅黑"/>
-              </a:rPr>
-              <a:t>火车票 Agent</a:t>
-            </a:r>
-          </a:p>
-          <a:p>
-            <a:pPr algn="l">
-              <a:spcBef>
-                <a:spcPts val="200"/>
-              </a:spcBef>
-            </a:pPr>
-            <a:r>
-              <a:rPr sz="1300" b="0">
-                <a:solidFill>
-                  <a:srgbClr val="3D4757"/>
-                </a:solidFill>
-                <a:latin typeface="微软雅黑"/>
-                <a:ea typeface="微软雅黑"/>
-                <a:cs typeface="微软雅黑"/>
-              </a:rPr>
-              <a:t>模型侧的质量工作，离业务结果比较远</a:t>
-            </a:r>
-          </a:p>
-        </p:txBody>
-      </p:sp>
-      <p:sp>
-        <p:nvSpPr>
-          <p:cNvPr id="8" name="Rounded Rectangle 7"/>
+      <p:sp>
+        <p:nvSpPr>
+          <p:cNvPr id="13" name="Rounded Rectangle 12"/>
           <p:cNvSpPr/>
           <p:nvPr/>
         </p:nvSpPr>
         <p:spPr>
           <a:xfrm>
-            <a:off x="6492240" y="1508760"/>
-            <a:ext cx="5239512" cy="914400"/>
+            <a:off x="4617720" y="1554480"/>
+            <a:ext cx="7114032" cy="3474720"/>
           </a:xfrm>
           <a:prstGeom prst="roundRect">
             <a:avLst>
@@ -15381,11 +15571,11 @@
             </a:avLst>
           </a:prstGeom>
           <a:solidFill>
-            <a:srgbClr val="F5F9FF"/>
+            <a:srgbClr val="EAF2FF"/>
           </a:solidFill>
           <a:ln w="12700">
             <a:solidFill>
-              <a:srgbClr val="D3E2FB"/>
+              <a:srgbClr val="287DFA"/>
             </a:solidFill>
           </a:ln>
           <a:effectLst/>
@@ -15412,13 +15602,13 @@
       </p:sp>
       <p:sp>
         <p:nvSpPr>
-          <p:cNvPr id="9" name="icon-circle"/>
+          <p:cNvPr id="14" name="icon-circle"/>
           <p:cNvSpPr/>
           <p:nvPr/>
         </p:nvSpPr>
         <p:spPr>
           <a:xfrm>
-            <a:off x="6720840" y="1645920"/>
+            <a:off x="4892040" y="1783080"/>
             <a:ext cx="640080" cy="640080"/>
           </a:xfrm>
           <a:prstGeom prst="ellipse">
@@ -15454,7 +15644,7 @@
       </p:sp>
       <p:pic>
         <p:nvPicPr>
-          <p:cNvPr id="10" name="Picture 9" descr="FaTicket_w.png"/>
+          <p:cNvPr id="15" name="Picture 14" descr="FaTicket_w.png"/>
           <p:cNvPicPr>
             <a:picLocks noChangeAspect="1"/>
           </p:cNvPicPr>
@@ -15468,7 +15658,7 @@
         </p:blipFill>
         <p:spPr>
           <a:xfrm>
-            <a:off x="6880859" y="1805940"/>
+            <a:off x="5052059" y="1943100"/>
             <a:ext cx="320040" cy="320040"/>
           </a:xfrm>
           <a:prstGeom prst="rect">
@@ -15478,14 +15668,14 @@
       </p:pic>
       <p:sp>
         <p:nvSpPr>
-          <p:cNvPr id="11" name="TextBox 10"/>
+          <p:cNvPr id="16" name="TextBox 15"/>
           <p:cNvSpPr txBox="1"/>
           <p:nvPr/>
         </p:nvSpPr>
         <p:spPr>
           <a:xfrm>
-            <a:off x="7543800" y="1508760"/>
-            <a:ext cx="4069080" cy="914400"/>
+            <a:off x="5669280" y="1783080"/>
+            <a:ext cx="2743200" cy="640080"/>
           </a:xfrm>
           <a:prstGeom prst="rect">
             <a:avLst/>
@@ -15500,49 +15690,130 @@
           <a:p>
             <a:pPr algn="l"/>
             <a:r>
-              <a:rPr sz="1600" b="1">
-                <a:solidFill>
-                  <a:srgbClr val="15315E"/>
+              <a:rPr sz="1800" b="1">
+                <a:solidFill>
+                  <a:srgbClr val="287DFA"/>
                 </a:solidFill>
                 <a:latin typeface="微软雅黑"/>
                 <a:ea typeface="微软雅黑"/>
                 <a:cs typeface="微软雅黑"/>
               </a:rPr>
-              <a:t>抢票业务</a:t>
+              <a:t>AI × 业务</a:t>
             </a:r>
           </a:p>
           <a:p>
             <a:pPr algn="l">
               <a:spcBef>
-                <a:spcPts val="200"/>
+                <a:spcPts val="0"/>
               </a:spcBef>
             </a:pPr>
             <a:r>
-              <a:rPr sz="1300" b="0">
-                <a:solidFill>
-                  <a:srgbClr val="3D4757"/>
+              <a:rPr sz="1200" b="0">
+                <a:solidFill>
+                  <a:srgbClr val="7A8599"/>
                 </a:solidFill>
                 <a:latin typeface="微软雅黑"/>
                 <a:ea typeface="微软雅黑"/>
                 <a:cs typeface="微软雅黑"/>
               </a:rPr>
-              <a:t>直接对票量负责，学会从业务指标倒推要做什么</a:t>
-            </a:r>
-          </a:p>
-        </p:txBody>
-      </p:sp>
-      <p:sp>
-        <p:nvSpPr>
-          <p:cNvPr id="12" name="arrow"/>
+              <a:t>携程 · 火车票</a:t>
+            </a:r>
+          </a:p>
+        </p:txBody>
+      </p:sp>
+      <p:sp>
+        <p:nvSpPr>
+          <p:cNvPr id="17" name="TextBox 16"/>
+          <p:cNvSpPr txBox="1"/>
+          <p:nvPr/>
+        </p:nvSpPr>
+        <p:spPr>
+          <a:xfrm>
+            <a:off x="8229600" y="1783080"/>
+            <a:ext cx="3291840" cy="640080"/>
+          </a:xfrm>
+          <a:prstGeom prst="rect">
+            <a:avLst/>
+          </a:prstGeom>
+          <a:noFill/>
+        </p:spPr>
+        <p:txBody>
+          <a:bodyPr wrap="square" lIns="0" rIns="0" tIns="0" bIns="0" anchor="ctr">
+            <a:spAutoFit/>
+          </a:bodyPr>
+          <a:lstStyle/>
+          <a:p>
+            <a:pPr algn="r"/>
+            <a:r>
+              <a:rPr sz="1500" b="1">
+                <a:solidFill>
+                  <a:srgbClr val="15315E"/>
+                </a:solidFill>
+                <a:latin typeface="微软雅黑"/>
+                <a:ea typeface="微软雅黑"/>
+                <a:cs typeface="微软雅黑"/>
+              </a:rPr>
+              <a:t>定位：AI 是服务业务的手段</a:t>
+            </a:r>
+          </a:p>
+        </p:txBody>
+      </p:sp>
+      <p:sp>
+        <p:nvSpPr>
+          <p:cNvPr id="18" name="Rounded Rectangle 17"/>
           <p:cNvSpPr/>
           <p:nvPr/>
         </p:nvSpPr>
         <p:spPr>
           <a:xfrm>
-            <a:off x="5806440" y="1801368"/>
-            <a:ext cx="457200" cy="329184"/>
-          </a:xfrm>
-          <a:prstGeom prst="rightArrow">
+            <a:off x="4892040" y="2697480"/>
+            <a:ext cx="6583680" cy="621792"/>
+          </a:xfrm>
+          <a:prstGeom prst="roundRect">
+            <a:avLst>
+              <a:gd name="adj" fmla="val 15000"/>
+            </a:avLst>
+          </a:prstGeom>
+          <a:solidFill>
+            <a:srgbClr val="FFFFFF"/>
+          </a:solidFill>
+          <a:ln>
+            <a:noFill/>
+          </a:ln>
+          <a:effectLst/>
+        </p:spPr>
+        <p:style>
+          <a:lnRef idx="1">
+            <a:schemeClr val="accent1"/>
+          </a:lnRef>
+          <a:fillRef idx="3">
+            <a:schemeClr val="accent1"/>
+          </a:fillRef>
+          <a:effectRef idx="2">
+            <a:schemeClr val="accent1"/>
+          </a:effectRef>
+          <a:fontRef idx="minor">
+            <a:schemeClr val="lt1"/>
+          </a:fontRef>
+        </p:style>
+        <p:txBody>
+          <a:bodyPr rtlCol="0" anchor="ctr"/>
+          <a:lstStyle/>
+          <a:p/>
+        </p:txBody>
+      </p:sp>
+      <p:sp>
+        <p:nvSpPr>
+          <p:cNvPr id="19" name="icon-circle"/>
+          <p:cNvSpPr/>
+          <p:nvPr/>
+        </p:nvSpPr>
+        <p:spPr>
+          <a:xfrm>
+            <a:off x="5029200" y="2798064"/>
+            <a:ext cx="420624" cy="420624"/>
+          </a:xfrm>
+          <a:prstGeom prst="ellipse">
             <a:avLst/>
           </a:prstGeom>
           <a:solidFill>
@@ -15573,16 +15844,40 @@
           <a:p/>
         </p:txBody>
       </p:sp>
-      <p:sp>
-        <p:nvSpPr>
-          <p:cNvPr id="13" name="TextBox 12"/>
+      <p:pic>
+        <p:nvPicPr>
+          <p:cNvPr id="20" name="Picture 19" descr="FaLayerGroup_w.png"/>
+          <p:cNvPicPr>
+            <a:picLocks noChangeAspect="1"/>
+          </p:cNvPicPr>
+          <p:nvPr/>
+        </p:nvPicPr>
+        <p:blipFill>
+          <a:blip r:embed="rId5"/>
+          <a:stretch>
+            <a:fillRect/>
+          </a:stretch>
+        </p:blipFill>
+        <p:spPr>
+          <a:xfrm>
+            <a:off x="5134356" y="2903220"/>
+            <a:ext cx="210312" cy="210312"/>
+          </a:xfrm>
+          <a:prstGeom prst="rect">
+            <a:avLst/>
+          </a:prstGeom>
+        </p:spPr>
+      </p:pic>
+      <p:sp>
+        <p:nvSpPr>
+          <p:cNvPr id="21" name="TextBox 20"/>
           <p:cNvSpPr txBox="1"/>
           <p:nvPr/>
         </p:nvSpPr>
         <p:spPr>
           <a:xfrm>
-            <a:off x="457200" y="2697480"/>
-            <a:ext cx="11274552" cy="320040"/>
+            <a:off x="5577840" y="2697480"/>
+            <a:ext cx="731520" cy="621792"/>
           </a:xfrm>
           <a:prstGeom prst="rect">
             <a:avLst/>
@@ -15590,82 +15885,84 @@
           <a:noFill/>
         </p:spPr>
         <p:txBody>
-          <a:bodyPr wrap="square" lIns="0" rIns="0" tIns="0" bIns="0" anchor="t">
+          <a:bodyPr wrap="square" lIns="0" rIns="0" tIns="0" bIns="0" anchor="ctr">
             <a:spAutoFit/>
           </a:bodyPr>
           <a:lstStyle/>
           <a:p>
             <a:pPr algn="l"/>
             <a:r>
-              <a:rPr sz="1300" b="1">
-                <a:solidFill>
-                  <a:srgbClr val="7A8599"/>
+              <a:rPr sz="1500" b="1">
+                <a:solidFill>
+                  <a:srgbClr val="287DFA"/>
                 </a:solidFill>
                 <a:latin typeface="微软雅黑"/>
                 <a:ea typeface="微软雅黑"/>
                 <a:cs typeface="微软雅黑"/>
               </a:rPr>
-              <a:t>AI native：</a:t>
-            </a:r>
-            <a:r>
-              <a:rPr sz="1300" b="0">
-                <a:solidFill>
-                  <a:srgbClr val="7A8599"/>
+              <a:t>边界</a:t>
+            </a:r>
+          </a:p>
+        </p:txBody>
+      </p:sp>
+      <p:sp>
+        <p:nvSpPr>
+          <p:cNvPr id="22" name="TextBox 21"/>
+          <p:cNvSpPr txBox="1"/>
+          <p:nvPr/>
+        </p:nvSpPr>
+        <p:spPr>
+          <a:xfrm>
+            <a:off x="6309360" y="2697480"/>
+            <a:ext cx="5074920" cy="621792"/>
+          </a:xfrm>
+          <a:prstGeom prst="rect">
+            <a:avLst/>
+          </a:prstGeom>
+          <a:noFill/>
+        </p:spPr>
+        <p:txBody>
+          <a:bodyPr wrap="square" lIns="0" rIns="0" tIns="0" bIns="0" anchor="ctr">
+            <a:spAutoFit/>
+          </a:bodyPr>
+          <a:lstStyle/>
+          <a:p>
+            <a:pPr algn="l"/>
+            <a:r>
+              <a:rPr sz="1400" b="0">
+                <a:solidFill>
+                  <a:srgbClr val="3D4757"/>
                 </a:solidFill>
                 <a:latin typeface="微软雅黑"/>
                 <a:ea typeface="微软雅黑"/>
                 <a:cs typeface="微软雅黑"/>
               </a:rPr>
-              <a:t>模型本身就是产品，衡量的是模型表现　　</a:t>
-            </a:r>
-            <a:r>
-              <a:rPr sz="1300" b="1">
-                <a:solidFill>
-                  <a:srgbClr val="287DFA"/>
-                </a:solidFill>
-                <a:latin typeface="微软雅黑"/>
-                <a:ea typeface="微软雅黑"/>
-                <a:cs typeface="微软雅黑"/>
-              </a:rPr>
-              <a:t>AI × 业务：</a:t>
-            </a:r>
-            <a:r>
-              <a:rPr sz="1300" b="0">
-                <a:solidFill>
-                  <a:srgbClr val="287DFA"/>
-                </a:solidFill>
-                <a:latin typeface="微软雅黑"/>
-                <a:ea typeface="微软雅黑"/>
-                <a:cs typeface="微软雅黑"/>
-              </a:rPr>
-              <a:t>AI 是服务业务的手段</a:t>
-            </a:r>
-          </a:p>
-        </p:txBody>
-      </p:sp>
-      <p:sp>
-        <p:nvSpPr>
-          <p:cNvPr id="14" name="Rounded Rectangle 13"/>
+              <a:t>由业务来定：什么属于火车、什么不属于</a:t>
+            </a:r>
+          </a:p>
+        </p:txBody>
+      </p:sp>
+      <p:sp>
+        <p:nvSpPr>
+          <p:cNvPr id="23" name="Rounded Rectangle 22"/>
           <p:cNvSpPr/>
           <p:nvPr/>
         </p:nvSpPr>
         <p:spPr>
           <a:xfrm>
-            <a:off x="457200" y="3200400"/>
-            <a:ext cx="3630168" cy="1828800"/>
+            <a:off x="4892040" y="3447288"/>
+            <a:ext cx="6583680" cy="621792"/>
           </a:xfrm>
           <a:prstGeom prst="roundRect">
             <a:avLst>
-              <a:gd name="adj" fmla="val 6000"/>
+              <a:gd name="adj" fmla="val 15000"/>
             </a:avLst>
           </a:prstGeom>
           <a:solidFill>
             <a:srgbClr val="FFFFFF"/>
           </a:solidFill>
-          <a:ln w="12700">
-            <a:solidFill>
-              <a:srgbClr val="D3E2FB"/>
-            </a:solidFill>
+          <a:ln>
+            <a:noFill/>
           </a:ln>
           <a:effectLst/>
         </p:spPr>
@@ -15691,14 +15988,14 @@
       </p:sp>
       <p:sp>
         <p:nvSpPr>
-          <p:cNvPr id="15" name="icon-circle"/>
+          <p:cNvPr id="24" name="icon-circle"/>
           <p:cNvSpPr/>
           <p:nvPr/>
         </p:nvSpPr>
         <p:spPr>
           <a:xfrm>
-            <a:off x="731520" y="3429000"/>
-            <a:ext cx="685800" cy="685800"/>
+            <a:off x="5029200" y="3547872"/>
+            <a:ext cx="420624" cy="420624"/>
           </a:xfrm>
           <a:prstGeom prst="ellipse">
             <a:avLst/>
@@ -15733,22 +16030,22 @@
       </p:sp>
       <p:pic>
         <p:nvPicPr>
-          <p:cNvPr id="16" name="Picture 15" descr="FaLayerGroup_w.png"/>
+          <p:cNvPr id="25" name="Picture 24" descr="FaHandshake_w.png"/>
           <p:cNvPicPr>
             <a:picLocks noChangeAspect="1"/>
           </p:cNvPicPr>
           <p:nvPr/>
         </p:nvPicPr>
         <p:blipFill>
-          <a:blip r:embed="rId5"/>
+          <a:blip r:embed="rId6"/>
           <a:stretch>
             <a:fillRect/>
           </a:stretch>
         </p:blipFill>
         <p:spPr>
           <a:xfrm>
-            <a:off x="902970" y="3600450"/>
-            <a:ext cx="342900" cy="342900"/>
+            <a:off x="5134356" y="3653028"/>
+            <a:ext cx="210312" cy="210312"/>
           </a:xfrm>
           <a:prstGeom prst="rect">
             <a:avLst/>
@@ -15757,14 +16054,14 @@
       </p:pic>
       <p:sp>
         <p:nvSpPr>
-          <p:cNvPr id="17" name="TextBox 16"/>
+          <p:cNvPr id="26" name="TextBox 25"/>
           <p:cNvSpPr txBox="1"/>
           <p:nvPr/>
         </p:nvSpPr>
         <p:spPr>
           <a:xfrm>
-            <a:off x="1600200" y="3429000"/>
-            <a:ext cx="2377440" cy="685800"/>
+            <a:off x="5577840" y="3447288"/>
+            <a:ext cx="731520" cy="621792"/>
           </a:xfrm>
           <a:prstGeom prst="rect">
             <a:avLst/>
@@ -15779,29 +16076,29 @@
           <a:p>
             <a:pPr algn="l"/>
             <a:r>
-              <a:rPr sz="1700" b="1">
-                <a:solidFill>
-                  <a:srgbClr val="15315E"/>
+              <a:rPr sz="1500" b="1">
+                <a:solidFill>
+                  <a:srgbClr val="287DFA"/>
                 </a:solidFill>
                 <a:latin typeface="微软雅黑"/>
                 <a:ea typeface="微软雅黑"/>
                 <a:cs typeface="微软雅黑"/>
               </a:rPr>
-              <a:t>边界由业务来定</a:t>
-            </a:r>
-          </a:p>
-        </p:txBody>
-      </p:sp>
-      <p:sp>
-        <p:nvSpPr>
-          <p:cNvPr id="18" name="TextBox 17"/>
+              <a:t>形态</a:t>
+            </a:r>
+          </a:p>
+        </p:txBody>
+      </p:sp>
+      <p:sp>
+        <p:nvSpPr>
+          <p:cNvPr id="27" name="TextBox 26"/>
           <p:cNvSpPr txBox="1"/>
           <p:nvPr/>
         </p:nvSpPr>
         <p:spPr>
           <a:xfrm>
-            <a:off x="731520" y="4297680"/>
-            <a:ext cx="3108960" cy="640080"/>
+            <a:off x="6309360" y="3447288"/>
+            <a:ext cx="5074920" cy="621792"/>
           </a:xfrm>
           <a:prstGeom prst="rect">
             <a:avLst/>
@@ -15809,14 +16106,14 @@
           <a:noFill/>
         </p:spPr>
         <p:txBody>
-          <a:bodyPr wrap="square" lIns="0" rIns="0" tIns="0" bIns="0" anchor="t">
+          <a:bodyPr wrap="square" lIns="0" rIns="0" tIns="0" bIns="0" anchor="ctr">
             <a:spAutoFit/>
           </a:bodyPr>
           <a:lstStyle/>
           <a:p>
             <a:pPr algn="l"/>
             <a:r>
-              <a:rPr sz="1300" b="0">
+              <a:rPr sz="1400" b="0">
                 <a:solidFill>
                   <a:srgbClr val="3D4757"/>
                 </a:solidFill>
@@ -15824,34 +16121,32 @@
                 <a:ea typeface="微软雅黑"/>
                 <a:cs typeface="微软雅黑"/>
               </a:rPr>
-              <a:t>什么属于火车、什么不属于</a:t>
-            </a:r>
-          </a:p>
-        </p:txBody>
-      </p:sp>
-      <p:sp>
-        <p:nvSpPr>
-          <p:cNvPr id="19" name="Rounded Rectangle 18"/>
+              <a:t>贴合用户习惯：对话 → 直接操作列表页，票量明显提升</a:t>
+            </a:r>
+          </a:p>
+        </p:txBody>
+      </p:sp>
+      <p:sp>
+        <p:nvSpPr>
+          <p:cNvPr id="28" name="Rounded Rectangle 27"/>
           <p:cNvSpPr/>
           <p:nvPr/>
         </p:nvSpPr>
         <p:spPr>
           <a:xfrm>
-            <a:off x="4279392" y="3200400"/>
-            <a:ext cx="3630168" cy="1828800"/>
+            <a:off x="4892040" y="4197096"/>
+            <a:ext cx="6583680" cy="621792"/>
           </a:xfrm>
           <a:prstGeom prst="roundRect">
             <a:avLst>
-              <a:gd name="adj" fmla="val 6000"/>
+              <a:gd name="adj" fmla="val 15000"/>
             </a:avLst>
           </a:prstGeom>
           <a:solidFill>
             <a:srgbClr val="FFFFFF"/>
           </a:solidFill>
-          <a:ln w="12700">
-            <a:solidFill>
-              <a:srgbClr val="D3E2FB"/>
-            </a:solidFill>
+          <a:ln>
+            <a:noFill/>
           </a:ln>
           <a:effectLst/>
         </p:spPr>
@@ -15877,14 +16172,14 @@
       </p:sp>
       <p:sp>
         <p:nvSpPr>
-          <p:cNvPr id="20" name="icon-circle"/>
+          <p:cNvPr id="29" name="icon-circle"/>
           <p:cNvSpPr/>
           <p:nvPr/>
         </p:nvSpPr>
         <p:spPr>
           <a:xfrm>
-            <a:off x="4553712" y="3429000"/>
-            <a:ext cx="685800" cy="685800"/>
+            <a:off x="5029200" y="4297680"/>
+            <a:ext cx="420624" cy="420624"/>
           </a:xfrm>
           <a:prstGeom prst="ellipse">
             <a:avLst/>
@@ -15919,22 +16214,22 @@
       </p:sp>
       <p:pic>
         <p:nvPicPr>
-          <p:cNvPr id="21" name="Picture 20" descr="FaHandshake_w.png"/>
+          <p:cNvPr id="30" name="Picture 29" descr="FaChartLine_w.png"/>
           <p:cNvPicPr>
             <a:picLocks noChangeAspect="1"/>
           </p:cNvPicPr>
           <p:nvPr/>
         </p:nvPicPr>
         <p:blipFill>
-          <a:blip r:embed="rId6"/>
+          <a:blip r:embed="rId7"/>
           <a:stretch>
             <a:fillRect/>
           </a:stretch>
         </p:blipFill>
         <p:spPr>
           <a:xfrm>
-            <a:off x="4725162" y="3600450"/>
-            <a:ext cx="342900" cy="342900"/>
+            <a:off x="5134356" y="4402836"/>
+            <a:ext cx="210312" cy="210312"/>
           </a:xfrm>
           <a:prstGeom prst="rect">
             <a:avLst/>
@@ -15943,14 +16238,14 @@
       </p:pic>
       <p:sp>
         <p:nvSpPr>
-          <p:cNvPr id="22" name="TextBox 21"/>
+          <p:cNvPr id="31" name="TextBox 30"/>
           <p:cNvSpPr txBox="1"/>
           <p:nvPr/>
         </p:nvSpPr>
         <p:spPr>
           <a:xfrm>
-            <a:off x="5422392" y="3429000"/>
-            <a:ext cx="2377440" cy="685800"/>
+            <a:off x="5577840" y="4197096"/>
+            <a:ext cx="731520" cy="621792"/>
           </a:xfrm>
           <a:prstGeom prst="rect">
             <a:avLst/>
@@ -15965,29 +16260,29 @@
           <a:p>
             <a:pPr algn="l"/>
             <a:r>
-              <a:rPr sz="1700" b="1">
-                <a:solidFill>
-                  <a:srgbClr val="15315E"/>
+              <a:rPr sz="1500" b="1">
+                <a:solidFill>
+                  <a:srgbClr val="287DFA"/>
                 </a:solidFill>
                 <a:latin typeface="微软雅黑"/>
                 <a:ea typeface="微软雅黑"/>
                 <a:cs typeface="微软雅黑"/>
               </a:rPr>
-              <a:t>形态贴合用户习惯</a:t>
-            </a:r>
-          </a:p>
-        </p:txBody>
-      </p:sp>
-      <p:sp>
-        <p:nvSpPr>
-          <p:cNvPr id="23" name="TextBox 22"/>
+              <a:t>衡量</a:t>
+            </a:r>
+          </a:p>
+        </p:txBody>
+      </p:sp>
+      <p:sp>
+        <p:nvSpPr>
+          <p:cNvPr id="32" name="TextBox 31"/>
           <p:cNvSpPr txBox="1"/>
           <p:nvPr/>
         </p:nvSpPr>
         <p:spPr>
           <a:xfrm>
-            <a:off x="4553712" y="4297680"/>
-            <a:ext cx="3108960" cy="640080"/>
+            <a:off x="6309360" y="4197096"/>
+            <a:ext cx="5074920" cy="621792"/>
           </a:xfrm>
           <a:prstGeom prst="rect">
             <a:avLst/>
@@ -15995,14 +16290,14 @@
           <a:noFill/>
         </p:spPr>
         <p:txBody>
-          <a:bodyPr wrap="square" lIns="0" rIns="0" tIns="0" bIns="0" anchor="t">
+          <a:bodyPr wrap="square" lIns="0" rIns="0" tIns="0" bIns="0" anchor="ctr">
             <a:spAutoFit/>
           </a:bodyPr>
           <a:lstStyle/>
           <a:p>
             <a:pPr algn="l"/>
             <a:r>
-              <a:rPr sz="1300" b="0">
+              <a:rPr sz="1400" b="0">
                 <a:solidFill>
                   <a:srgbClr val="3D4757"/>
                 </a:solidFill>
@@ -16010,70 +16305,26 @@
                 <a:ea typeface="微软雅黑"/>
                 <a:cs typeface="微软雅黑"/>
               </a:rPr>
-              <a:t>二期把对话改成直接操作列表页，票量明显提升</a:t>
-            </a:r>
-          </a:p>
-        </p:txBody>
-      </p:sp>
-      <p:sp>
-        <p:nvSpPr>
-          <p:cNvPr id="24" name="Rounded Rectangle 23"/>
+              <a:t>票量这样的业务结果</a:t>
+            </a:r>
+          </a:p>
+        </p:txBody>
+      </p:sp>
+      <p:sp>
+        <p:nvSpPr>
+          <p:cNvPr id="33" name="Rounded Rectangle 32"/>
           <p:cNvSpPr/>
           <p:nvPr/>
         </p:nvSpPr>
         <p:spPr>
           <a:xfrm>
-            <a:off x="8101583" y="3200400"/>
-            <a:ext cx="3630168" cy="1828800"/>
+            <a:off x="457200" y="5257800"/>
+            <a:ext cx="11274552" cy="822960"/>
           </a:xfrm>
           <a:prstGeom prst="roundRect">
             <a:avLst>
               <a:gd name="adj" fmla="val 6000"/>
             </a:avLst>
-          </a:prstGeom>
-          <a:solidFill>
-            <a:srgbClr val="FFFFFF"/>
-          </a:solidFill>
-          <a:ln w="12700">
-            <a:solidFill>
-              <a:srgbClr val="D3E2FB"/>
-            </a:solidFill>
-          </a:ln>
-          <a:effectLst/>
-        </p:spPr>
-        <p:style>
-          <a:lnRef idx="1">
-            <a:schemeClr val="accent1"/>
-          </a:lnRef>
-          <a:fillRef idx="3">
-            <a:schemeClr val="accent1"/>
-          </a:fillRef>
-          <a:effectRef idx="2">
-            <a:schemeClr val="accent1"/>
-          </a:effectRef>
-          <a:fontRef idx="minor">
-            <a:schemeClr val="lt1"/>
-          </a:fontRef>
-        </p:style>
-        <p:txBody>
-          <a:bodyPr rtlCol="0" anchor="ctr"/>
-          <a:lstStyle/>
-          <a:p/>
-        </p:txBody>
-      </p:sp>
-      <p:sp>
-        <p:nvSpPr>
-          <p:cNvPr id="25" name="icon-circle"/>
-          <p:cNvSpPr/>
-          <p:nvPr/>
-        </p:nvSpPr>
-        <p:spPr>
-          <a:xfrm>
-            <a:off x="8375904" y="3429000"/>
-            <a:ext cx="685800" cy="685800"/>
-          </a:xfrm>
-          <a:prstGeom prst="ellipse">
-            <a:avLst/>
           </a:prstGeom>
           <a:solidFill>
             <a:srgbClr val="287DFA"/>
@@ -16105,149 +16356,7 @@
       </p:sp>
       <p:pic>
         <p:nvPicPr>
-          <p:cNvPr id="26" name="Picture 25" descr="FaChartLine_w.png"/>
-          <p:cNvPicPr>
-            <a:picLocks noChangeAspect="1"/>
-          </p:cNvPicPr>
-          <p:nvPr/>
-        </p:nvPicPr>
-        <p:blipFill>
-          <a:blip r:embed="rId7"/>
-          <a:stretch>
-            <a:fillRect/>
-          </a:stretch>
-        </p:blipFill>
-        <p:spPr>
-          <a:xfrm>
-            <a:off x="8547354" y="3600450"/>
-            <a:ext cx="342900" cy="342900"/>
-          </a:xfrm>
-          <a:prstGeom prst="rect">
-            <a:avLst/>
-          </a:prstGeom>
-        </p:spPr>
-      </p:pic>
-      <p:sp>
-        <p:nvSpPr>
-          <p:cNvPr id="27" name="TextBox 26"/>
-          <p:cNvSpPr txBox="1"/>
-          <p:nvPr/>
-        </p:nvSpPr>
-        <p:spPr>
-          <a:xfrm>
-            <a:off x="9244584" y="3429000"/>
-            <a:ext cx="2377440" cy="685800"/>
-          </a:xfrm>
-          <a:prstGeom prst="rect">
-            <a:avLst/>
-          </a:prstGeom>
-          <a:noFill/>
-        </p:spPr>
-        <p:txBody>
-          <a:bodyPr wrap="square" lIns="0" rIns="0" tIns="0" bIns="0" anchor="ctr">
-            <a:spAutoFit/>
-          </a:bodyPr>
-          <a:lstStyle/>
-          <a:p>
-            <a:pPr algn="l"/>
-            <a:r>
-              <a:rPr sz="1700" b="1">
-                <a:solidFill>
-                  <a:srgbClr val="15315E"/>
-                </a:solidFill>
-                <a:latin typeface="微软雅黑"/>
-                <a:ea typeface="微软雅黑"/>
-                <a:cs typeface="微软雅黑"/>
-              </a:rPr>
-              <a:t>用业务结果衡量</a:t>
-            </a:r>
-          </a:p>
-        </p:txBody>
-      </p:sp>
-      <p:sp>
-        <p:nvSpPr>
-          <p:cNvPr id="28" name="TextBox 27"/>
-          <p:cNvSpPr txBox="1"/>
-          <p:nvPr/>
-        </p:nvSpPr>
-        <p:spPr>
-          <a:xfrm>
-            <a:off x="8375904" y="4297680"/>
-            <a:ext cx="3108960" cy="640080"/>
-          </a:xfrm>
-          <a:prstGeom prst="rect">
-            <a:avLst/>
-          </a:prstGeom>
-          <a:noFill/>
-        </p:spPr>
-        <p:txBody>
-          <a:bodyPr wrap="square" lIns="0" rIns="0" tIns="0" bIns="0" anchor="t">
-            <a:spAutoFit/>
-          </a:bodyPr>
-          <a:lstStyle/>
-          <a:p>
-            <a:pPr algn="l"/>
-            <a:r>
-              <a:rPr sz="1300" b="0">
-                <a:solidFill>
-                  <a:srgbClr val="3D4757"/>
-                </a:solidFill>
-                <a:latin typeface="微软雅黑"/>
-                <a:ea typeface="微软雅黑"/>
-                <a:cs typeface="微软雅黑"/>
-              </a:rPr>
-              <a:t>最终看的是票量这样的业务结果</a:t>
-            </a:r>
-          </a:p>
-        </p:txBody>
-      </p:sp>
-      <p:sp>
-        <p:nvSpPr>
-          <p:cNvPr id="29" name="Rounded Rectangle 28"/>
-          <p:cNvSpPr/>
-          <p:nvPr/>
-        </p:nvSpPr>
-        <p:spPr>
-          <a:xfrm>
-            <a:off x="457200" y="5257800"/>
-            <a:ext cx="11274552" cy="822960"/>
-          </a:xfrm>
-          <a:prstGeom prst="roundRect">
-            <a:avLst>
-              <a:gd name="adj" fmla="val 6000"/>
-            </a:avLst>
-          </a:prstGeom>
-          <a:solidFill>
-            <a:srgbClr val="287DFA"/>
-          </a:solidFill>
-          <a:ln>
-            <a:noFill/>
-          </a:ln>
-          <a:effectLst/>
-        </p:spPr>
-        <p:style>
-          <a:lnRef idx="1">
-            <a:schemeClr val="accent1"/>
-          </a:lnRef>
-          <a:fillRef idx="3">
-            <a:schemeClr val="accent1"/>
-          </a:fillRef>
-          <a:effectRef idx="2">
-            <a:schemeClr val="accent1"/>
-          </a:effectRef>
-          <a:fontRef idx="minor">
-            <a:schemeClr val="lt1"/>
-          </a:fontRef>
-        </p:style>
-        <p:txBody>
-          <a:bodyPr rtlCol="0" anchor="ctr"/>
-          <a:lstStyle/>
-          <a:p/>
-        </p:txBody>
-      </p:sp>
-      <p:pic>
-        <p:nvPicPr>
-          <p:cNvPr id="30" name="Picture 29" descr="FaLightbulb_w.png"/>
+          <p:cNvPr id="34" name="Picture 33" descr="FaLightbulb_w.png"/>
           <p:cNvPicPr>
             <a:picLocks noChangeAspect="1"/>
           </p:cNvPicPr>
@@ -16271,7 +16380,7 @@
       </p:pic>
       <p:sp>
         <p:nvSpPr>
-          <p:cNvPr id="31" name="TextBox 30"/>
+          <p:cNvPr id="35" name="TextBox 34"/>
           <p:cNvSpPr txBox="1"/>
           <p:nvPr/>
         </p:nvSpPr>

--- a/答辩PPT.pptx
+++ b/答辩PPT.pptx
@@ -15359,7 +15359,7 @@
                 <a:ea typeface="微软雅黑"/>
                 <a:cs typeface="微软雅黑"/>
               </a:rPr>
-              <a:t>小红书</a:t>
+              <a:t>对模型能力负责</a:t>
             </a:r>
           </a:p>
         </p:txBody>
@@ -15716,7 +15716,7 @@
                 <a:ea typeface="微软雅黑"/>
                 <a:cs typeface="微软雅黑"/>
               </a:rPr>
-              <a:t>携程 · 火车票</a:t>
+              <a:t>对业务结果负责</a:t>
             </a:r>
           </a:p>
         </p:txBody>

--- a/答辩PPT.pptx
+++ b/答辩PPT.pptx
@@ -15205,8 +15205,8 @@
         </p:nvSpPr>
         <p:spPr>
           <a:xfrm>
-            <a:off x="457200" y="1554480"/>
-            <a:ext cx="3383280" cy="3474720"/>
+            <a:off x="457200" y="1508760"/>
+            <a:ext cx="3429000" cy="3749039"/>
           </a:xfrm>
           <a:prstGeom prst="roundRect">
             <a:avLst>
@@ -15252,7 +15252,7 @@
         <p:spPr>
           <a:xfrm>
             <a:off x="731520" y="1783080"/>
-            <a:ext cx="640080" cy="640080"/>
+            <a:ext cx="777240" cy="777240"/>
           </a:xfrm>
           <a:prstGeom prst="ellipse">
             <a:avLst/>
@@ -15301,8 +15301,8 @@
         </p:blipFill>
         <p:spPr>
           <a:xfrm>
-            <a:off x="891540" y="1943100"/>
-            <a:ext cx="320040" cy="320040"/>
+            <a:off x="925830" y="1977390"/>
+            <a:ext cx="388620" cy="388620"/>
           </a:xfrm>
           <a:prstGeom prst="rect">
             <a:avLst/>
@@ -15317,8 +15317,8 @@
         </p:nvSpPr>
         <p:spPr>
           <a:xfrm>
-            <a:off x="1508760" y="1783080"/>
-            <a:ext cx="2194560" cy="640080"/>
+            <a:off x="1645920" y="1783080"/>
+            <a:ext cx="2194560" cy="777240"/>
           </a:xfrm>
           <a:prstGeom prst="rect">
             <a:avLst/>
@@ -15333,7 +15333,7 @@
           <a:p>
             <a:pPr algn="l"/>
             <a:r>
-              <a:rPr sz="1800" b="1">
+              <a:rPr sz="2200" b="1">
                 <a:solidFill>
                   <a:srgbClr val="3D4757"/>
                 </a:solidFill>
@@ -15351,7 +15351,7 @@
               </a:spcBef>
             </a:pPr>
             <a:r>
-              <a:rPr sz="1200" b="0">
+              <a:rPr sz="1400" b="0">
                 <a:solidFill>
                   <a:srgbClr val="7A8599"/>
                 </a:solidFill>
@@ -15372,8 +15372,8 @@
         </p:nvSpPr>
         <p:spPr>
           <a:xfrm>
-            <a:off x="731520" y="2743200"/>
-            <a:ext cx="2834640" cy="274320"/>
+            <a:off x="731520" y="2926080"/>
+            <a:ext cx="2926080" cy="320040"/>
           </a:xfrm>
           <a:prstGeom prst="rect">
             <a:avLst/>
@@ -15388,7 +15388,7 @@
           <a:p>
             <a:pPr algn="l"/>
             <a:r>
-              <a:rPr sz="1200" b="1">
+              <a:rPr sz="1400" b="1">
                 <a:solidFill>
                   <a:srgbClr val="7A8599"/>
                 </a:solidFill>
@@ -15409,8 +15409,8 @@
         </p:nvSpPr>
         <p:spPr>
           <a:xfrm>
-            <a:off x="731520" y="3035808"/>
-            <a:ext cx="2834640" cy="457200"/>
+            <a:off x="731520" y="3273552"/>
+            <a:ext cx="3017520" cy="548640"/>
           </a:xfrm>
           <a:prstGeom prst="rect">
             <a:avLst/>
@@ -15425,7 +15425,7 @@
           <a:p>
             <a:pPr algn="l"/>
             <a:r>
-              <a:rPr sz="1700" b="1">
+              <a:rPr sz="2200" b="1">
                 <a:solidFill>
                   <a:srgbClr val="3D4757"/>
                 </a:solidFill>
@@ -15446,8 +15446,8 @@
         </p:nvSpPr>
         <p:spPr>
           <a:xfrm>
-            <a:off x="731520" y="3794760"/>
-            <a:ext cx="2834640" cy="274320"/>
+            <a:off x="731520" y="4069080"/>
+            <a:ext cx="2926080" cy="320040"/>
           </a:xfrm>
           <a:prstGeom prst="rect">
             <a:avLst/>
@@ -15462,7 +15462,7 @@
           <a:p>
             <a:pPr algn="l"/>
             <a:r>
-              <a:rPr sz="1200" b="1">
+              <a:rPr sz="1400" b="1">
                 <a:solidFill>
                   <a:srgbClr val="7A8599"/>
                 </a:solidFill>
@@ -15483,8 +15483,8 @@
         </p:nvSpPr>
         <p:spPr>
           <a:xfrm>
-            <a:off x="731520" y="4087368"/>
-            <a:ext cx="2834640" cy="457200"/>
+            <a:off x="731520" y="4416552"/>
+            <a:ext cx="3017520" cy="548640"/>
           </a:xfrm>
           <a:prstGeom prst="rect">
             <a:avLst/>
@@ -15499,7 +15499,7 @@
           <a:p>
             <a:pPr algn="l"/>
             <a:r>
-              <a:rPr sz="1700" b="1">
+              <a:rPr sz="2200" b="1">
                 <a:solidFill>
                   <a:srgbClr val="3D4757"/>
                 </a:solidFill>
@@ -15520,8 +15520,8 @@
         </p:nvSpPr>
         <p:spPr>
           <a:xfrm>
-            <a:off x="3977639" y="3063240"/>
-            <a:ext cx="502920" cy="457200"/>
+            <a:off x="4005072" y="3108960"/>
+            <a:ext cx="548640" cy="548640"/>
           </a:xfrm>
           <a:prstGeom prst="rightArrow">
             <a:avLst/>
@@ -15562,8 +15562,8 @@
         </p:nvSpPr>
         <p:spPr>
           <a:xfrm>
-            <a:off x="4617720" y="1554480"/>
-            <a:ext cx="7114032" cy="3474720"/>
+            <a:off x="4681728" y="1508760"/>
+            <a:ext cx="7050024" cy="3749039"/>
           </a:xfrm>
           <a:prstGeom prst="roundRect">
             <a:avLst>
@@ -15608,8 +15608,8 @@
         </p:nvSpPr>
         <p:spPr>
           <a:xfrm>
-            <a:off x="4892040" y="1783080"/>
-            <a:ext cx="640080" cy="640080"/>
+            <a:off x="4956048" y="1783080"/>
+            <a:ext cx="777240" cy="777240"/>
           </a:xfrm>
           <a:prstGeom prst="ellipse">
             <a:avLst/>
@@ -15658,8 +15658,8 @@
         </p:blipFill>
         <p:spPr>
           <a:xfrm>
-            <a:off x="5052059" y="1943100"/>
-            <a:ext cx="320040" cy="320040"/>
+            <a:off x="5150358" y="1977390"/>
+            <a:ext cx="388620" cy="388620"/>
           </a:xfrm>
           <a:prstGeom prst="rect">
             <a:avLst/>
@@ -15674,8 +15674,8 @@
         </p:nvSpPr>
         <p:spPr>
           <a:xfrm>
-            <a:off x="5669280" y="1783080"/>
-            <a:ext cx="2743200" cy="640080"/>
+            <a:off x="5870448" y="1783080"/>
+            <a:ext cx="2743200" cy="777240"/>
           </a:xfrm>
           <a:prstGeom prst="rect">
             <a:avLst/>
@@ -15690,7 +15690,7 @@
           <a:p>
             <a:pPr algn="l"/>
             <a:r>
-              <a:rPr sz="1800" b="1">
+              <a:rPr sz="2200" b="1">
                 <a:solidFill>
                   <a:srgbClr val="287DFA"/>
                 </a:solidFill>
@@ -15708,7 +15708,7 @@
               </a:spcBef>
             </a:pPr>
             <a:r>
-              <a:rPr sz="1200" b="0">
+              <a:rPr sz="1400" b="0">
                 <a:solidFill>
                   <a:srgbClr val="7A8599"/>
                 </a:solidFill>
@@ -15729,8 +15729,8 @@
         </p:nvSpPr>
         <p:spPr>
           <a:xfrm>
-            <a:off x="8229600" y="1783080"/>
-            <a:ext cx="3291840" cy="640080"/>
+            <a:off x="8247888" y="1783080"/>
+            <a:ext cx="3246120" cy="777240"/>
           </a:xfrm>
           <a:prstGeom prst="rect">
             <a:avLst/>
@@ -15745,7 +15745,7 @@
           <a:p>
             <a:pPr algn="r"/>
             <a:r>
-              <a:rPr sz="1500" b="1">
+              <a:rPr sz="1800" b="1">
                 <a:solidFill>
                   <a:srgbClr val="15315E"/>
                 </a:solidFill>
@@ -15766,8 +15766,8 @@
         </p:nvSpPr>
         <p:spPr>
           <a:xfrm>
-            <a:off x="4892040" y="2697480"/>
-            <a:ext cx="6583680" cy="621792"/>
+            <a:off x="4956048" y="2788920"/>
+            <a:ext cx="6501384" cy="694944"/>
           </a:xfrm>
           <a:prstGeom prst="roundRect">
             <a:avLst>
@@ -15810,8 +15810,8 @@
         </p:nvSpPr>
         <p:spPr>
           <a:xfrm>
-            <a:off x="5029200" y="2798064"/>
-            <a:ext cx="420624" cy="420624"/>
+            <a:off x="5093208" y="2898648"/>
+            <a:ext cx="475488" cy="475488"/>
           </a:xfrm>
           <a:prstGeom prst="ellipse">
             <a:avLst/>
@@ -15860,8 +15860,8 @@
         </p:blipFill>
         <p:spPr>
           <a:xfrm>
-            <a:off x="5134356" y="2903220"/>
-            <a:ext cx="210312" cy="210312"/>
+            <a:off x="5212080" y="3017520"/>
+            <a:ext cx="237744" cy="237744"/>
           </a:xfrm>
           <a:prstGeom prst="rect">
             <a:avLst/>
@@ -15876,8 +15876,8 @@
         </p:nvSpPr>
         <p:spPr>
           <a:xfrm>
-            <a:off x="5577840" y="2697480"/>
-            <a:ext cx="731520" cy="621792"/>
+            <a:off x="5705856" y="2788920"/>
+            <a:ext cx="777240" cy="694944"/>
           </a:xfrm>
           <a:prstGeom prst="rect">
             <a:avLst/>
@@ -15892,7 +15892,7 @@
           <a:p>
             <a:pPr algn="l"/>
             <a:r>
-              <a:rPr sz="1500" b="1">
+              <a:rPr sz="1800" b="1">
                 <a:solidFill>
                   <a:srgbClr val="287DFA"/>
                 </a:solidFill>
@@ -15913,8 +15913,8 @@
         </p:nvSpPr>
         <p:spPr>
           <a:xfrm>
-            <a:off x="6309360" y="2697480"/>
-            <a:ext cx="5074920" cy="621792"/>
+            <a:off x="6510528" y="2788920"/>
+            <a:ext cx="4983480" cy="694944"/>
           </a:xfrm>
           <a:prstGeom prst="rect">
             <a:avLst/>
@@ -15929,7 +15929,7 @@
           <a:p>
             <a:pPr algn="l"/>
             <a:r>
-              <a:rPr sz="1400" b="0">
+              <a:rPr sz="1600" b="0">
                 <a:solidFill>
                   <a:srgbClr val="3D4757"/>
                 </a:solidFill>
@@ -15950,8 +15950,8 @@
         </p:nvSpPr>
         <p:spPr>
           <a:xfrm>
-            <a:off x="4892040" y="3447288"/>
-            <a:ext cx="6583680" cy="621792"/>
+            <a:off x="4956048" y="3593591"/>
+            <a:ext cx="6501384" cy="694944"/>
           </a:xfrm>
           <a:prstGeom prst="roundRect">
             <a:avLst>
@@ -15994,8 +15994,8 @@
         </p:nvSpPr>
         <p:spPr>
           <a:xfrm>
-            <a:off x="5029200" y="3547872"/>
-            <a:ext cx="420624" cy="420624"/>
+            <a:off x="5093208" y="3703320"/>
+            <a:ext cx="475488" cy="475488"/>
           </a:xfrm>
           <a:prstGeom prst="ellipse">
             <a:avLst/>
@@ -16044,8 +16044,8 @@
         </p:blipFill>
         <p:spPr>
           <a:xfrm>
-            <a:off x="5134356" y="3653028"/>
-            <a:ext cx="210312" cy="210312"/>
+            <a:off x="5212080" y="3822191"/>
+            <a:ext cx="237744" cy="237744"/>
           </a:xfrm>
           <a:prstGeom prst="rect">
             <a:avLst/>
@@ -16060,8 +16060,8 @@
         </p:nvSpPr>
         <p:spPr>
           <a:xfrm>
-            <a:off x="5577840" y="3447288"/>
-            <a:ext cx="731520" cy="621792"/>
+            <a:off x="5705856" y="3593591"/>
+            <a:ext cx="777240" cy="694944"/>
           </a:xfrm>
           <a:prstGeom prst="rect">
             <a:avLst/>
@@ -16076,7 +16076,7 @@
           <a:p>
             <a:pPr algn="l"/>
             <a:r>
-              <a:rPr sz="1500" b="1">
+              <a:rPr sz="1800" b="1">
                 <a:solidFill>
                   <a:srgbClr val="287DFA"/>
                 </a:solidFill>
@@ -16097,8 +16097,8 @@
         </p:nvSpPr>
         <p:spPr>
           <a:xfrm>
-            <a:off x="6309360" y="3447288"/>
-            <a:ext cx="5074920" cy="621792"/>
+            <a:off x="6510528" y="3593591"/>
+            <a:ext cx="4983480" cy="694944"/>
           </a:xfrm>
           <a:prstGeom prst="rect">
             <a:avLst/>
@@ -16113,7 +16113,7 @@
           <a:p>
             <a:pPr algn="l"/>
             <a:r>
-              <a:rPr sz="1400" b="0">
+              <a:rPr sz="1600" b="0">
                 <a:solidFill>
                   <a:srgbClr val="3D4757"/>
                 </a:solidFill>
@@ -16121,7 +16121,7 @@
                 <a:ea typeface="微软雅黑"/>
                 <a:cs typeface="微软雅黑"/>
               </a:rPr>
-              <a:t>贴合用户习惯：对话 → 直接操作列表页，票量明显提升</a:t>
+              <a:t>贴合用户习惯：对话 → 列表页，票量明显提升</a:t>
             </a:r>
           </a:p>
         </p:txBody>
@@ -16134,8 +16134,8 @@
         </p:nvSpPr>
         <p:spPr>
           <a:xfrm>
-            <a:off x="4892040" y="4197096"/>
-            <a:ext cx="6583680" cy="621792"/>
+            <a:off x="4956048" y="4398264"/>
+            <a:ext cx="6501384" cy="694944"/>
           </a:xfrm>
           <a:prstGeom prst="roundRect">
             <a:avLst>
@@ -16178,8 +16178,8 @@
         </p:nvSpPr>
         <p:spPr>
           <a:xfrm>
-            <a:off x="5029200" y="4297680"/>
-            <a:ext cx="420624" cy="420624"/>
+            <a:off x="5093208" y="4507992"/>
+            <a:ext cx="475488" cy="475488"/>
           </a:xfrm>
           <a:prstGeom prst="ellipse">
             <a:avLst/>
@@ -16228,8 +16228,8 @@
         </p:blipFill>
         <p:spPr>
           <a:xfrm>
-            <a:off x="5134356" y="4402836"/>
-            <a:ext cx="210312" cy="210312"/>
+            <a:off x="5212080" y="4626864"/>
+            <a:ext cx="237744" cy="237744"/>
           </a:xfrm>
           <a:prstGeom prst="rect">
             <a:avLst/>
@@ -16244,8 +16244,8 @@
         </p:nvSpPr>
         <p:spPr>
           <a:xfrm>
-            <a:off x="5577840" y="4197096"/>
-            <a:ext cx="731520" cy="621792"/>
+            <a:off x="5705856" y="4398264"/>
+            <a:ext cx="777240" cy="694944"/>
           </a:xfrm>
           <a:prstGeom prst="rect">
             <a:avLst/>
@@ -16260,7 +16260,7 @@
           <a:p>
             <a:pPr algn="l"/>
             <a:r>
-              <a:rPr sz="1500" b="1">
+              <a:rPr sz="1800" b="1">
                 <a:solidFill>
                   <a:srgbClr val="287DFA"/>
                 </a:solidFill>
@@ -16281,8 +16281,8 @@
         </p:nvSpPr>
         <p:spPr>
           <a:xfrm>
-            <a:off x="6309360" y="4197096"/>
-            <a:ext cx="5074920" cy="621792"/>
+            <a:off x="6510528" y="4398264"/>
+            <a:ext cx="4983480" cy="694944"/>
           </a:xfrm>
           <a:prstGeom prst="rect">
             <a:avLst/>
@@ -16297,7 +16297,7 @@
           <a:p>
             <a:pPr algn="l"/>
             <a:r>
-              <a:rPr sz="1400" b="0">
+              <a:rPr sz="1600" b="0">
                 <a:solidFill>
                   <a:srgbClr val="3D4757"/>
                 </a:solidFill>
@@ -16318,8 +16318,8 @@
         </p:nvSpPr>
         <p:spPr>
           <a:xfrm>
-            <a:off x="457200" y="5257800"/>
-            <a:ext cx="11274552" cy="822960"/>
+            <a:off x="457200" y="5440680"/>
+            <a:ext cx="11274552" cy="777240"/>
           </a:xfrm>
           <a:prstGeom prst="roundRect">
             <a:avLst>
@@ -16370,8 +16370,8 @@
         </p:blipFill>
         <p:spPr>
           <a:xfrm>
-            <a:off x="777240" y="5458968"/>
-            <a:ext cx="420624" cy="420624"/>
+            <a:off x="777240" y="5614416"/>
+            <a:ext cx="438912" cy="438912"/>
           </a:xfrm>
           <a:prstGeom prst="rect">
             <a:avLst/>
@@ -16386,8 +16386,8 @@
         </p:nvSpPr>
         <p:spPr>
           <a:xfrm>
-            <a:off x="1417320" y="5257800"/>
-            <a:ext cx="10149840" cy="822960"/>
+            <a:off x="1417320" y="5440680"/>
+            <a:ext cx="10149840" cy="777240"/>
           </a:xfrm>
           <a:prstGeom prst="rect">
             <a:avLst/>
@@ -16402,7 +16402,7 @@
           <a:p>
             <a:pPr algn="l"/>
             <a:r>
-              <a:rPr sz="1800" b="1">
+              <a:rPr sz="2000" b="1">
                 <a:solidFill>
                   <a:srgbClr val="D6E6FF"/>
                 </a:solidFill>
@@ -16413,7 +16413,7 @@
               <a:t>探索 AI + 业务时，先想清楚：</a:t>
             </a:r>
             <a:r>
-              <a:rPr sz="1800" b="1">
+              <a:rPr sz="2000" b="1">
                 <a:solidFill>
                   <a:srgbClr val="FFFFFF"/>
                 </a:solidFill>

--- a/答辩PPT.pptx
+++ b/答辩PPT.pptx
@@ -19803,7 +19803,7 @@
         <p:spPr>
           <a:xfrm>
             <a:off x="457200" y="1481328"/>
-            <a:ext cx="2514600" cy="4572000"/>
+            <a:ext cx="2926080" cy="4599432"/>
           </a:xfrm>
           <a:prstGeom prst="roundRect">
             <a:avLst>
@@ -19840,14 +19840,451 @@
       </p:sp>
       <p:sp>
         <p:nvSpPr>
-          <p:cNvPr id="5" name="icon-circle"/>
+          <p:cNvPr id="5" name="TextBox 4"/>
+          <p:cNvSpPr txBox="1"/>
+          <p:nvPr/>
+        </p:nvSpPr>
+        <p:spPr>
+          <a:xfrm>
+            <a:off x="731520" y="1645920"/>
+            <a:ext cx="2377440" cy="548640"/>
+          </a:xfrm>
+          <a:prstGeom prst="rect">
+            <a:avLst/>
+          </a:prstGeom>
+          <a:noFill/>
+        </p:spPr>
+        <p:txBody>
+          <a:bodyPr wrap="square" lIns="0" rIns="0" tIns="0" bIns="0" anchor="t">
+            <a:spAutoFit/>
+          </a:bodyPr>
+          <a:lstStyle/>
+          <a:p>
+            <a:pPr algn="l"/>
+            <a:r>
+              <a:rPr sz="2800" b="1">
+                <a:solidFill>
+                  <a:srgbClr val="15315E"/>
+                </a:solidFill>
+                <a:latin typeface="微软雅黑"/>
+                <a:ea typeface="微软雅黑"/>
+                <a:cs typeface="微软雅黑"/>
+              </a:rPr>
+              <a:t>罗蕴文</a:t>
+            </a:r>
+          </a:p>
+        </p:txBody>
+      </p:sp>
+      <p:pic>
+        <p:nvPicPr>
+          <p:cNvPr id="6" name="Picture 5" descr="FaGraduationCap_b.png"/>
+          <p:cNvPicPr>
+            <a:picLocks noChangeAspect="1"/>
+          </p:cNvPicPr>
+          <p:nvPr/>
+        </p:nvPicPr>
+        <p:blipFill>
+          <a:blip r:embed="rId3"/>
+          <a:stretch>
+            <a:fillRect/>
+          </a:stretch>
+        </p:blipFill>
+        <p:spPr>
+          <a:xfrm>
+            <a:off x="749808" y="2368296"/>
+            <a:ext cx="274320" cy="274320"/>
+          </a:xfrm>
+          <a:prstGeom prst="rect">
+            <a:avLst/>
+          </a:prstGeom>
+        </p:spPr>
+      </p:pic>
+      <p:sp>
+        <p:nvSpPr>
+          <p:cNvPr id="7" name="TextBox 6"/>
+          <p:cNvSpPr txBox="1"/>
+          <p:nvPr/>
+        </p:nvSpPr>
+        <p:spPr>
+          <a:xfrm>
+            <a:off x="1143000" y="2331720"/>
+            <a:ext cx="2057400" cy="347472"/>
+          </a:xfrm>
+          <a:prstGeom prst="rect">
+            <a:avLst/>
+          </a:prstGeom>
+          <a:noFill/>
+        </p:spPr>
+        <p:txBody>
+          <a:bodyPr wrap="square" lIns="0" rIns="0" tIns="0" bIns="0" anchor="ctr">
+            <a:spAutoFit/>
+          </a:bodyPr>
+          <a:lstStyle/>
+          <a:p>
+            <a:pPr algn="l"/>
+            <a:r>
+              <a:rPr sz="1300" b="0">
+                <a:solidFill>
+                  <a:srgbClr val="3D4757"/>
+                </a:solidFill>
+                <a:latin typeface="微软雅黑"/>
+                <a:ea typeface="微软雅黑"/>
+                <a:cs typeface="微软雅黑"/>
+              </a:rPr>
+              <a:t>复旦大学 外国哲学硕士</a:t>
+            </a:r>
+          </a:p>
+        </p:txBody>
+      </p:sp>
+      <p:pic>
+        <p:nvPicPr>
+          <p:cNvPr id="8" name="Picture 7" descr="FaCalendarCheck_b.png"/>
+          <p:cNvPicPr>
+            <a:picLocks noChangeAspect="1"/>
+          </p:cNvPicPr>
+          <p:nvPr/>
+        </p:nvPicPr>
+        <p:blipFill>
+          <a:blip r:embed="rId4"/>
+          <a:stretch>
+            <a:fillRect/>
+          </a:stretch>
+        </p:blipFill>
+        <p:spPr>
+          <a:xfrm>
+            <a:off x="749808" y="2807208"/>
+            <a:ext cx="274320" cy="274320"/>
+          </a:xfrm>
+          <a:prstGeom prst="rect">
+            <a:avLst/>
+          </a:prstGeom>
+        </p:spPr>
+      </p:pic>
+      <p:sp>
+        <p:nvSpPr>
+          <p:cNvPr id="9" name="TextBox 8"/>
+          <p:cNvSpPr txBox="1"/>
+          <p:nvPr/>
+        </p:nvSpPr>
+        <p:spPr>
+          <a:xfrm>
+            <a:off x="1143000" y="2770632"/>
+            <a:ext cx="2057400" cy="347472"/>
+          </a:xfrm>
+          <a:prstGeom prst="rect">
+            <a:avLst/>
+          </a:prstGeom>
+          <a:noFill/>
+        </p:spPr>
+        <p:txBody>
+          <a:bodyPr wrap="square" lIns="0" rIns="0" tIns="0" bIns="0" anchor="ctr">
+            <a:spAutoFit/>
+          </a:bodyPr>
+          <a:lstStyle/>
+          <a:p>
+            <a:pPr algn="l"/>
+            <a:r>
+              <a:rPr sz="1300" b="0">
+                <a:solidFill>
+                  <a:srgbClr val="3D4757"/>
+                </a:solidFill>
+                <a:latin typeface="微软雅黑"/>
+                <a:ea typeface="微软雅黑"/>
+                <a:cs typeface="微软雅黑"/>
+              </a:rPr>
+              <a:t>2027 年 6 月毕业</a:t>
+            </a:r>
+          </a:p>
+        </p:txBody>
+      </p:sp>
+      <p:cxnSp>
+        <p:nvCxnSpPr>
+          <p:cNvPr id="10" name="Connector 9"/>
+          <p:cNvCxnSpPr/>
+          <p:nvPr/>
+        </p:nvCxnSpPr>
+        <p:spPr>
+          <a:xfrm>
+            <a:off x="731520" y="3310128"/>
+            <a:ext cx="2377440" cy="0"/>
+          </a:xfrm>
+          <a:prstGeom prst="line">
+            <a:avLst/>
+          </a:prstGeom>
+          <a:ln w="12700">
+            <a:solidFill>
+              <a:srgbClr val="D3E2FB"/>
+            </a:solidFill>
+          </a:ln>
+        </p:spPr>
+        <p:style>
+          <a:lnRef idx="2">
+            <a:schemeClr val="accent1"/>
+          </a:lnRef>
+          <a:fillRef idx="0">
+            <a:schemeClr val="accent1"/>
+          </a:fillRef>
+          <a:effectRef idx="1">
+            <a:schemeClr val="accent1"/>
+          </a:effectRef>
+          <a:fontRef idx="minor">
+            <a:schemeClr val="tx1"/>
+          </a:fontRef>
+        </p:style>
+      </p:cxnSp>
+      <p:sp>
+        <p:nvSpPr>
+          <p:cNvPr id="11" name="TextBox 10"/>
+          <p:cNvSpPr txBox="1"/>
+          <p:nvPr/>
+        </p:nvSpPr>
+        <p:spPr>
+          <a:xfrm>
+            <a:off x="731520" y="3429000"/>
+            <a:ext cx="2377440" cy="292608"/>
+          </a:xfrm>
+          <a:prstGeom prst="rect">
+            <a:avLst/>
+          </a:prstGeom>
+          <a:noFill/>
+        </p:spPr>
+        <p:txBody>
+          <a:bodyPr wrap="square" lIns="0" rIns="0" tIns="0" bIns="0" anchor="t">
+            <a:spAutoFit/>
+          </a:bodyPr>
+          <a:lstStyle/>
+          <a:p>
+            <a:pPr algn="l"/>
+            <a:r>
+              <a:rPr sz="1200" b="1">
+                <a:solidFill>
+                  <a:srgbClr val="7A8599"/>
+                </a:solidFill>
+                <a:latin typeface="微软雅黑"/>
+                <a:ea typeface="微软雅黑"/>
+                <a:cs typeface="微软雅黑"/>
+              </a:rPr>
+              <a:t>实习经历</a:t>
+            </a:r>
+          </a:p>
+        </p:txBody>
+      </p:sp>
+      <p:cxnSp>
+        <p:nvCxnSpPr>
+          <p:cNvPr id="12" name="Connector 11"/>
+          <p:cNvCxnSpPr/>
+          <p:nvPr/>
+        </p:nvCxnSpPr>
+        <p:spPr>
+          <a:xfrm>
+            <a:off x="841247" y="3886200"/>
+            <a:ext cx="0" cy="1371600"/>
+          </a:xfrm>
+          <a:prstGeom prst="line">
+            <a:avLst/>
+          </a:prstGeom>
+          <a:ln w="19050">
+            <a:solidFill>
+              <a:srgbClr val="D3E2FB"/>
+            </a:solidFill>
+          </a:ln>
+        </p:spPr>
+        <p:style>
+          <a:lnRef idx="2">
+            <a:schemeClr val="accent1"/>
+          </a:lnRef>
+          <a:fillRef idx="0">
+            <a:schemeClr val="accent1"/>
+          </a:fillRef>
+          <a:effectRef idx="1">
+            <a:schemeClr val="accent1"/>
+          </a:effectRef>
+          <a:fontRef idx="minor">
+            <a:schemeClr val="tx1"/>
+          </a:fontRef>
+        </p:style>
+      </p:cxnSp>
+      <p:sp>
+        <p:nvSpPr>
+          <p:cNvPr id="13" name="Oval 12"/>
           <p:cNvSpPr/>
           <p:nvPr/>
         </p:nvSpPr>
         <p:spPr>
           <a:xfrm>
-            <a:off x="731520" y="1737360"/>
-            <a:ext cx="868680" cy="868680"/>
+            <a:off x="768096" y="3831336"/>
+            <a:ext cx="146304" cy="146304"/>
+          </a:xfrm>
+          <a:prstGeom prst="ellipse">
+            <a:avLst/>
+          </a:prstGeom>
+          <a:solidFill>
+            <a:srgbClr val="7A8599"/>
+          </a:solidFill>
+          <a:ln>
+            <a:noFill/>
+          </a:ln>
+          <a:effectLst/>
+        </p:spPr>
+        <p:style>
+          <a:lnRef idx="1">
+            <a:schemeClr val="accent1"/>
+          </a:lnRef>
+          <a:fillRef idx="3">
+            <a:schemeClr val="accent1"/>
+          </a:fillRef>
+          <a:effectRef idx="2">
+            <a:schemeClr val="accent1"/>
+          </a:effectRef>
+          <a:fontRef idx="minor">
+            <a:schemeClr val="lt1"/>
+          </a:fontRef>
+        </p:style>
+        <p:txBody>
+          <a:bodyPr rtlCol="0" anchor="ctr"/>
+          <a:lstStyle/>
+          <a:p/>
+        </p:txBody>
+      </p:sp>
+      <p:sp>
+        <p:nvSpPr>
+          <p:cNvPr id="14" name="TextBox 13"/>
+          <p:cNvSpPr txBox="1"/>
+          <p:nvPr/>
+        </p:nvSpPr>
+        <p:spPr>
+          <a:xfrm>
+            <a:off x="1051560" y="3767328"/>
+            <a:ext cx="2194560" cy="292608"/>
+          </a:xfrm>
+          <a:prstGeom prst="rect">
+            <a:avLst/>
+          </a:prstGeom>
+          <a:noFill/>
+        </p:spPr>
+        <p:txBody>
+          <a:bodyPr wrap="square" lIns="0" rIns="0" tIns="0" bIns="0" anchor="t">
+            <a:spAutoFit/>
+          </a:bodyPr>
+          <a:lstStyle/>
+          <a:p>
+            <a:pPr algn="l"/>
+            <a:r>
+              <a:rPr sz="1300" b="1">
+                <a:solidFill>
+                  <a:srgbClr val="15315E"/>
+                </a:solidFill>
+                <a:latin typeface="微软雅黑"/>
+                <a:ea typeface="微软雅黑"/>
+                <a:cs typeface="微软雅黑"/>
+              </a:rPr>
+              <a:t>小红书 · 产品经理实习生</a:t>
+            </a:r>
+          </a:p>
+        </p:txBody>
+      </p:sp>
+      <p:sp>
+        <p:nvSpPr>
+          <p:cNvPr id="15" name="TextBox 14"/>
+          <p:cNvSpPr txBox="1"/>
+          <p:nvPr/>
+        </p:nvSpPr>
+        <p:spPr>
+          <a:xfrm>
+            <a:off x="1051560" y="4041648"/>
+            <a:ext cx="2194560" cy="256032"/>
+          </a:xfrm>
+          <a:prstGeom prst="rect">
+            <a:avLst/>
+          </a:prstGeom>
+          <a:noFill/>
+        </p:spPr>
+        <p:txBody>
+          <a:bodyPr wrap="square" lIns="0" rIns="0" tIns="0" bIns="0" anchor="t">
+            <a:spAutoFit/>
+          </a:bodyPr>
+          <a:lstStyle/>
+          <a:p>
+            <a:pPr algn="l"/>
+            <a:r>
+              <a:rPr sz="1100" b="0">
+                <a:solidFill>
+                  <a:srgbClr val="7A8599"/>
+                </a:solidFill>
+                <a:latin typeface="微软雅黑"/>
+                <a:ea typeface="微软雅黑"/>
+                <a:cs typeface="微软雅黑"/>
+              </a:rPr>
+              <a:t>2025.7 – 2025.9</a:t>
+            </a:r>
+          </a:p>
+        </p:txBody>
+      </p:sp>
+      <p:sp>
+        <p:nvSpPr>
+          <p:cNvPr id="16" name="TextBox 15"/>
+          <p:cNvSpPr txBox="1"/>
+          <p:nvPr/>
+        </p:nvSpPr>
+        <p:spPr>
+          <a:xfrm>
+            <a:off x="1024128" y="4297680"/>
+            <a:ext cx="2267712" cy="548640"/>
+          </a:xfrm>
+          <a:prstGeom prst="rect">
+            <a:avLst/>
+          </a:prstGeom>
+          <a:noFill/>
+        </p:spPr>
+        <p:txBody>
+          <a:bodyPr wrap="square" lIns="0" rIns="0" tIns="0" bIns="0" anchor="t">
+            <a:spAutoFit/>
+          </a:bodyPr>
+          <a:lstStyle/>
+          <a:p>
+            <a:pPr algn="l"/>
+            <a:r>
+              <a:rPr sz="1050" b="0">
+                <a:solidFill>
+                  <a:srgbClr val="3D4757"/>
+                </a:solidFill>
+                <a:latin typeface="微软雅黑"/>
+                <a:ea typeface="微软雅黑"/>
+                <a:cs typeface="微软雅黑"/>
+              </a:rPr>
+              <a:t>大模型“点点”幽默语境评测与优化</a:t>
+            </a:r>
+          </a:p>
+          <a:p>
+            <a:pPr algn="l">
+              <a:spcBef>
+                <a:spcPts val="100"/>
+              </a:spcBef>
+            </a:pPr>
+            <a:r>
+              <a:rPr sz="1050" b="0">
+                <a:solidFill>
+                  <a:srgbClr val="3D4757"/>
+                </a:solidFill>
+                <a:latin typeface="微软雅黑"/>
+                <a:ea typeface="微软雅黑"/>
+                <a:cs typeface="微软雅黑"/>
+              </a:rPr>
+              <a:t>可复用 Workflow 搭建</a:t>
+            </a:r>
+          </a:p>
+        </p:txBody>
+      </p:sp>
+      <p:sp>
+        <p:nvSpPr>
+          <p:cNvPr id="17" name="Oval 16"/>
+          <p:cNvSpPr/>
+          <p:nvPr/>
+        </p:nvSpPr>
+        <p:spPr>
+          <a:xfrm>
+            <a:off x="768096" y="5148072"/>
+            <a:ext cx="146304" cy="146304"/>
           </a:xfrm>
           <a:prstGeom prst="ellipse">
             <a:avLst/>
@@ -19880,40 +20317,16 @@
           <a:p/>
         </p:txBody>
       </p:sp>
-      <p:pic>
-        <p:nvPicPr>
-          <p:cNvPr id="6" name="Picture 5" descr="FaUserGraduate_w.png"/>
-          <p:cNvPicPr>
-            <a:picLocks noChangeAspect="1"/>
-          </p:cNvPicPr>
-          <p:nvPr/>
-        </p:nvPicPr>
-        <p:blipFill>
-          <a:blip r:embed="rId3"/>
-          <a:stretch>
-            <a:fillRect/>
-          </a:stretch>
-        </p:blipFill>
-        <p:spPr>
-          <a:xfrm>
-            <a:off x="948690" y="1954529"/>
-            <a:ext cx="434340" cy="434340"/>
-          </a:xfrm>
-          <a:prstGeom prst="rect">
-            <a:avLst/>
-          </a:prstGeom>
-        </p:spPr>
-      </p:pic>
-      <p:sp>
-        <p:nvSpPr>
-          <p:cNvPr id="7" name="TextBox 6"/>
+      <p:sp>
+        <p:nvSpPr>
+          <p:cNvPr id="18" name="TextBox 17"/>
           <p:cNvSpPr txBox="1"/>
           <p:nvPr/>
         </p:nvSpPr>
         <p:spPr>
           <a:xfrm>
-            <a:off x="731520" y="2743200"/>
-            <a:ext cx="2103120" cy="548640"/>
+            <a:off x="1051560" y="5084064"/>
+            <a:ext cx="2194560" cy="292608"/>
           </a:xfrm>
           <a:prstGeom prst="rect">
             <a:avLst/>
@@ -19928,7 +20341,7 @@
           <a:p>
             <a:pPr algn="l"/>
             <a:r>
-              <a:rPr sz="2800" b="1">
+              <a:rPr sz="1300" b="1">
                 <a:solidFill>
                   <a:srgbClr val="15315E"/>
                 </a:solidFill>
@@ -19936,117 +20349,58 @@
                 <a:ea typeface="微软雅黑"/>
                 <a:cs typeface="微软雅黑"/>
               </a:rPr>
-              <a:t>罗蕴文</a:t>
-            </a:r>
-          </a:p>
-        </p:txBody>
-      </p:sp>
-      <p:pic>
-        <p:nvPicPr>
-          <p:cNvPr id="8" name="Picture 7" descr="FaCalendarCheck_b.png"/>
-          <p:cNvPicPr>
-            <a:picLocks noChangeAspect="1"/>
-          </p:cNvPicPr>
-          <p:nvPr/>
-        </p:nvPicPr>
-        <p:blipFill>
-          <a:blip r:embed="rId4"/>
-          <a:stretch>
-            <a:fillRect/>
-          </a:stretch>
-        </p:blipFill>
-        <p:spPr>
-          <a:xfrm>
-            <a:off x="749808" y="3456432"/>
-            <a:ext cx="292608" cy="292608"/>
+              <a:t>携程 · 产品经理实习生</a:t>
+            </a:r>
+          </a:p>
+        </p:txBody>
+      </p:sp>
+      <p:sp>
+        <p:nvSpPr>
+          <p:cNvPr id="19" name="TextBox 18"/>
+          <p:cNvSpPr txBox="1"/>
+          <p:nvPr/>
+        </p:nvSpPr>
+        <p:spPr>
+          <a:xfrm>
+            <a:off x="1051560" y="5358384"/>
+            <a:ext cx="2194560" cy="256032"/>
           </a:xfrm>
           <a:prstGeom prst="rect">
             <a:avLst/>
           </a:prstGeom>
-        </p:spPr>
-      </p:pic>
-      <p:sp>
-        <p:nvSpPr>
-          <p:cNvPr id="9" name="TextBox 8"/>
-          <p:cNvSpPr txBox="1"/>
-          <p:nvPr/>
-        </p:nvSpPr>
-        <p:spPr>
-          <a:xfrm>
-            <a:off x="1161288" y="3401568"/>
-            <a:ext cx="1737360" cy="384048"/>
-          </a:xfrm>
-          <a:prstGeom prst="rect">
-            <a:avLst/>
-          </a:prstGeom>
           <a:noFill/>
         </p:spPr>
         <p:txBody>
-          <a:bodyPr wrap="square" lIns="0" rIns="0" tIns="0" bIns="0" anchor="ctr">
+          <a:bodyPr wrap="square" lIns="0" rIns="0" tIns="0" bIns="0" anchor="t">
             <a:spAutoFit/>
           </a:bodyPr>
           <a:lstStyle/>
           <a:p>
             <a:pPr algn="l"/>
             <a:r>
-              <a:rPr sz="1400" b="0">
-                <a:solidFill>
-                  <a:srgbClr val="3D4757"/>
+              <a:rPr sz="1100" b="0">
+                <a:solidFill>
+                  <a:srgbClr val="7A8599"/>
                 </a:solidFill>
                 <a:latin typeface="微软雅黑"/>
                 <a:ea typeface="微软雅黑"/>
                 <a:cs typeface="微软雅黑"/>
               </a:rPr>
-              <a:t>2027 年 6 月毕业</a:t>
-            </a:r>
-          </a:p>
-        </p:txBody>
-      </p:sp>
-      <p:cxnSp>
-        <p:nvCxnSpPr>
-          <p:cNvPr id="10" name="Connector 9"/>
-          <p:cNvCxnSpPr/>
-          <p:nvPr/>
-        </p:nvCxnSpPr>
-        <p:spPr>
-          <a:xfrm>
-            <a:off x="731520" y="4069080"/>
-            <a:ext cx="1965960" cy="0"/>
-          </a:xfrm>
-          <a:prstGeom prst="line">
-            <a:avLst/>
-          </a:prstGeom>
-          <a:ln w="12700">
-            <a:solidFill>
-              <a:srgbClr val="D3E2FB"/>
-            </a:solidFill>
-          </a:ln>
-        </p:spPr>
-        <p:style>
-          <a:lnRef idx="2">
-            <a:schemeClr val="accent1"/>
-          </a:lnRef>
-          <a:fillRef idx="0">
-            <a:schemeClr val="accent1"/>
-          </a:fillRef>
-          <a:effectRef idx="1">
-            <a:schemeClr val="accent1"/>
-          </a:effectRef>
-          <a:fontRef idx="minor">
-            <a:schemeClr val="tx1"/>
-          </a:fontRef>
-        </p:style>
-      </p:cxnSp>
-      <p:sp>
-        <p:nvSpPr>
-          <p:cNvPr id="11" name="TextBox 10"/>
+              <a:t>2026.4 – 至今</a:t>
+            </a:r>
+          </a:p>
+        </p:txBody>
+      </p:sp>
+      <p:sp>
+        <p:nvSpPr>
+          <p:cNvPr id="20" name="TextBox 19"/>
           <p:cNvSpPr txBox="1"/>
           <p:nvPr/>
         </p:nvSpPr>
         <p:spPr>
           <a:xfrm>
-            <a:off x="731520" y="4251960"/>
-            <a:ext cx="2103120" cy="320040"/>
+            <a:off x="1024128" y="5614416"/>
+            <a:ext cx="2267712" cy="274320"/>
           </a:xfrm>
           <a:prstGeom prst="rect">
             <a:avLst/>
@@ -20061,103 +20415,29 @@
           <a:p>
             <a:pPr algn="l"/>
             <a:r>
-              <a:rPr sz="1200" b="0">
-                <a:solidFill>
-                  <a:srgbClr val="7A8599"/>
+              <a:rPr sz="1050" b="0">
+                <a:solidFill>
+                  <a:srgbClr val="3D4757"/>
                 </a:solidFill>
                 <a:latin typeface="微软雅黑"/>
                 <a:ea typeface="微软雅黑"/>
                 <a:cs typeface="微软雅黑"/>
               </a:rPr>
-              <a:t>此前经历</a:t>
-            </a:r>
-          </a:p>
-        </p:txBody>
-      </p:sp>
-      <p:sp>
-        <p:nvSpPr>
-          <p:cNvPr id="12" name="TextBox 11"/>
-          <p:cNvSpPr txBox="1"/>
-          <p:nvPr/>
-        </p:nvSpPr>
-        <p:spPr>
-          <a:xfrm>
-            <a:off x="731520" y="4553712"/>
-            <a:ext cx="2103120" cy="365760"/>
-          </a:xfrm>
-          <a:prstGeom prst="rect">
-            <a:avLst/>
-          </a:prstGeom>
-          <a:noFill/>
-        </p:spPr>
-        <p:txBody>
-          <a:bodyPr wrap="square" lIns="0" rIns="0" tIns="0" bIns="0" anchor="t">
-            <a:spAutoFit/>
-          </a:bodyPr>
-          <a:lstStyle/>
-          <a:p>
-            <a:pPr algn="l"/>
-            <a:r>
-              <a:rPr sz="1400" b="1">
-                <a:solidFill>
-                  <a:srgbClr val="15315E"/>
-                </a:solidFill>
-                <a:latin typeface="微软雅黑"/>
-                <a:ea typeface="微软雅黑"/>
-                <a:cs typeface="微软雅黑"/>
-              </a:rPr>
-              <a:t>小红书 · 产品实习</a:t>
-            </a:r>
-          </a:p>
-        </p:txBody>
-      </p:sp>
-      <p:sp>
-        <p:nvSpPr>
-          <p:cNvPr id="13" name="TextBox 12"/>
-          <p:cNvSpPr txBox="1"/>
-          <p:nvPr/>
-        </p:nvSpPr>
-        <p:spPr>
-          <a:xfrm>
-            <a:off x="731520" y="4956048"/>
-            <a:ext cx="2057400" cy="822960"/>
-          </a:xfrm>
-          <a:prstGeom prst="rect">
-            <a:avLst/>
-          </a:prstGeom>
-          <a:noFill/>
-        </p:spPr>
-        <p:txBody>
-          <a:bodyPr wrap="square" lIns="0" rIns="0" tIns="0" bIns="0" anchor="t">
-            <a:spAutoFit/>
-          </a:bodyPr>
-          <a:lstStyle/>
-          <a:p>
-            <a:pPr algn="l"/>
-            <a:r>
-              <a:rPr sz="1300" b="0">
-                <a:solidFill>
-                  <a:srgbClr val="3D4757"/>
-                </a:solidFill>
-                <a:latin typeface="微软雅黑"/>
-                <a:ea typeface="微软雅黑"/>
-                <a:cs typeface="微软雅黑"/>
-              </a:rPr>
-              <a:t>大模型“点点”幽默语境下的测评与优化</a:t>
-            </a:r>
-          </a:p>
-        </p:txBody>
-      </p:sp>
-      <p:sp>
-        <p:nvSpPr>
-          <p:cNvPr id="14" name="Rounded Rectangle 13"/>
+              <a:t>火车票 Agent · 抢票业务</a:t>
+            </a:r>
+          </a:p>
+        </p:txBody>
+      </p:sp>
+      <p:sp>
+        <p:nvSpPr>
+          <p:cNvPr id="21" name="Rounded Rectangle 20"/>
           <p:cNvSpPr/>
           <p:nvPr/>
         </p:nvSpPr>
         <p:spPr>
           <a:xfrm>
-            <a:off x="4343400" y="1481328"/>
-            <a:ext cx="3977639" cy="384048"/>
+            <a:off x="4663440" y="1481328"/>
+            <a:ext cx="3412776" cy="384048"/>
           </a:xfrm>
           <a:prstGeom prst="roundRect">
             <a:avLst>
@@ -20194,14 +20474,14 @@
       </p:sp>
       <p:sp>
         <p:nvSpPr>
-          <p:cNvPr id="15" name="TextBox 14"/>
+          <p:cNvPr id="22" name="TextBox 21"/>
           <p:cNvSpPr txBox="1"/>
           <p:nvPr/>
         </p:nvSpPr>
         <p:spPr>
           <a:xfrm>
-            <a:off x="4343400" y="1481328"/>
-            <a:ext cx="3977639" cy="384048"/>
+            <a:off x="4663440" y="1481328"/>
+            <a:ext cx="3412776" cy="384048"/>
           </a:xfrm>
           <a:prstGeom prst="rect">
             <a:avLst/>
@@ -20231,14 +20511,14 @@
       </p:sp>
       <p:sp>
         <p:nvSpPr>
-          <p:cNvPr id="16" name="Pentagon 15"/>
+          <p:cNvPr id="23" name="Pentagon 22"/>
           <p:cNvSpPr/>
           <p:nvPr/>
         </p:nvSpPr>
         <p:spPr>
           <a:xfrm>
-            <a:off x="7680959" y="1481328"/>
-            <a:ext cx="3985014" cy="384048"/>
+            <a:off x="7498079" y="1481328"/>
+            <a:ext cx="4251960" cy="384048"/>
           </a:xfrm>
           <a:prstGeom prst="homePlate">
             <a:avLst/>
@@ -20273,14 +20553,14 @@
       </p:sp>
       <p:sp>
         <p:nvSpPr>
-          <p:cNvPr id="17" name="TextBox 16"/>
+          <p:cNvPr id="24" name="TextBox 23"/>
           <p:cNvSpPr txBox="1"/>
           <p:nvPr/>
         </p:nvSpPr>
         <p:spPr>
           <a:xfrm>
-            <a:off x="7680959" y="1481328"/>
-            <a:ext cx="3985014" cy="384048"/>
+            <a:off x="7498079" y="1481328"/>
+            <a:ext cx="4251960" cy="384048"/>
           </a:xfrm>
           <a:prstGeom prst="rect">
             <a:avLst/>
@@ -20310,14 +20590,14 @@
       </p:sp>
       <p:cxnSp>
         <p:nvCxnSpPr>
-          <p:cNvPr id="18" name="Connector 17"/>
+          <p:cNvPr id="25" name="Connector 24"/>
           <p:cNvCxnSpPr/>
           <p:nvPr/>
         </p:nvCxnSpPr>
         <p:spPr>
           <a:xfrm>
-            <a:off x="4343400" y="2240280"/>
-            <a:ext cx="7322574" cy="0"/>
+            <a:off x="4663440" y="2240280"/>
+            <a:ext cx="7040880" cy="0"/>
           </a:xfrm>
           <a:prstGeom prst="line">
             <a:avLst/>
@@ -20345,14 +20625,14 @@
       </p:cxnSp>
       <p:sp>
         <p:nvSpPr>
-          <p:cNvPr id="19" name="TextBox 18"/>
+          <p:cNvPr id="26" name="TextBox 25"/>
           <p:cNvSpPr txBox="1"/>
           <p:nvPr/>
         </p:nvSpPr>
         <p:spPr>
           <a:xfrm>
-            <a:off x="4023359" y="1938528"/>
-            <a:ext cx="731520" cy="237744"/>
+            <a:off x="4096511" y="2121408"/>
+            <a:ext cx="457200" cy="237744"/>
           </a:xfrm>
           <a:prstGeom prst="rect">
             <a:avLst/>
@@ -20365,7 +20645,7 @@
           </a:bodyPr>
           <a:lstStyle/>
           <a:p>
-            <a:pPr algn="ctr"/>
+            <a:pPr algn="r"/>
             <a:r>
               <a:rPr sz="1100" b="0">
                 <a:solidFill>
@@ -20375,20 +20655,20 @@
                 <a:ea typeface="微软雅黑"/>
                 <a:cs typeface="微软雅黑"/>
               </a:rPr>
-              <a:t>5月</a:t>
-            </a:r>
-          </a:p>
-        </p:txBody>
-      </p:sp>
-      <p:sp>
-        <p:nvSpPr>
-          <p:cNvPr id="20" name="Oval 19"/>
+              <a:t>4月</a:t>
+            </a:r>
+          </a:p>
+        </p:txBody>
+      </p:sp>
+      <p:sp>
+        <p:nvSpPr>
+          <p:cNvPr id="27" name="Oval 26"/>
           <p:cNvSpPr/>
           <p:nvPr/>
         </p:nvSpPr>
         <p:spPr>
           <a:xfrm>
-            <a:off x="4343400" y="2194560"/>
+            <a:off x="4617720" y="2194560"/>
             <a:ext cx="91440" cy="91440"/>
           </a:xfrm>
           <a:prstGeom prst="ellipse">
@@ -20426,14 +20706,14 @@
       </p:sp>
       <p:cxnSp>
         <p:nvCxnSpPr>
-          <p:cNvPr id="21" name="Connector 20"/>
+          <p:cNvPr id="28" name="Connector 27"/>
           <p:cNvCxnSpPr/>
           <p:nvPr/>
         </p:nvCxnSpPr>
         <p:spPr>
           <a:xfrm>
-            <a:off x="4389120" y="2313432"/>
-            <a:ext cx="0" cy="3721608"/>
+            <a:off x="4663440" y="2313432"/>
+            <a:ext cx="0" cy="3739896"/>
           </a:xfrm>
           <a:prstGeom prst="line">
             <a:avLst/>
@@ -20462,14 +20742,14 @@
       </p:cxnSp>
       <p:sp>
         <p:nvSpPr>
-          <p:cNvPr id="22" name="TextBox 21"/>
+          <p:cNvPr id="29" name="TextBox 28"/>
           <p:cNvSpPr txBox="1"/>
           <p:nvPr/>
         </p:nvSpPr>
         <p:spPr>
           <a:xfrm>
-            <a:off x="5074919" y="1938528"/>
-            <a:ext cx="731520" cy="237744"/>
+            <a:off x="4526280" y="1938528"/>
+            <a:ext cx="640080" cy="237744"/>
           </a:xfrm>
           <a:prstGeom prst="rect">
             <a:avLst/>
@@ -20492,20 +20772,20 @@
                 <a:ea typeface="微软雅黑"/>
                 <a:cs typeface="微软雅黑"/>
               </a:rPr>
-              <a:t>6月</a:t>
-            </a:r>
-          </a:p>
-        </p:txBody>
-      </p:sp>
-      <p:sp>
-        <p:nvSpPr>
-          <p:cNvPr id="23" name="Oval 22"/>
+              <a:t>5月</a:t>
+            </a:r>
+          </a:p>
+        </p:txBody>
+      </p:sp>
+      <p:sp>
+        <p:nvSpPr>
+          <p:cNvPr id="30" name="Oval 29"/>
           <p:cNvSpPr/>
           <p:nvPr/>
         </p:nvSpPr>
         <p:spPr>
           <a:xfrm>
-            <a:off x="5394959" y="2194560"/>
+            <a:off x="4800600" y="2194560"/>
             <a:ext cx="91440" cy="91440"/>
           </a:xfrm>
           <a:prstGeom prst="ellipse">
@@ -20543,14 +20823,14 @@
       </p:sp>
       <p:cxnSp>
         <p:nvCxnSpPr>
-          <p:cNvPr id="24" name="Connector 23"/>
+          <p:cNvPr id="31" name="Connector 30"/>
           <p:cNvCxnSpPr/>
           <p:nvPr/>
         </p:nvCxnSpPr>
         <p:spPr>
           <a:xfrm>
-            <a:off x="5440679" y="2313432"/>
-            <a:ext cx="0" cy="3721608"/>
+            <a:off x="4846320" y="2313432"/>
+            <a:ext cx="0" cy="3739896"/>
           </a:xfrm>
           <a:prstGeom prst="line">
             <a:avLst/>
@@ -20579,14 +20859,14 @@
       </p:cxnSp>
       <p:sp>
         <p:nvSpPr>
-          <p:cNvPr id="25" name="TextBox 24"/>
+          <p:cNvPr id="32" name="TextBox 31"/>
           <p:cNvSpPr txBox="1"/>
           <p:nvPr/>
         </p:nvSpPr>
         <p:spPr>
           <a:xfrm>
-            <a:off x="6263639" y="1938528"/>
-            <a:ext cx="731520" cy="237744"/>
+            <a:off x="5394960" y="1938528"/>
+            <a:ext cx="640080" cy="237744"/>
           </a:xfrm>
           <a:prstGeom prst="rect">
             <a:avLst/>
@@ -20609,20 +20889,20 @@
                 <a:ea typeface="微软雅黑"/>
                 <a:cs typeface="微软雅黑"/>
               </a:rPr>
-              <a:t>7月</a:t>
-            </a:r>
-          </a:p>
-        </p:txBody>
-      </p:sp>
-      <p:sp>
-        <p:nvSpPr>
-          <p:cNvPr id="26" name="Oval 25"/>
+              <a:t>6月</a:t>
+            </a:r>
+          </a:p>
+        </p:txBody>
+      </p:sp>
+      <p:sp>
+        <p:nvSpPr>
+          <p:cNvPr id="33" name="Oval 32"/>
           <p:cNvSpPr/>
           <p:nvPr/>
         </p:nvSpPr>
         <p:spPr>
           <a:xfrm>
-            <a:off x="6583679" y="2194560"/>
+            <a:off x="5669280" y="2194560"/>
             <a:ext cx="91440" cy="91440"/>
           </a:xfrm>
           <a:prstGeom prst="ellipse">
@@ -20660,14 +20940,14 @@
       </p:sp>
       <p:cxnSp>
         <p:nvCxnSpPr>
-          <p:cNvPr id="27" name="Connector 26"/>
+          <p:cNvPr id="34" name="Connector 33"/>
           <p:cNvCxnSpPr/>
           <p:nvPr/>
         </p:nvCxnSpPr>
         <p:spPr>
           <a:xfrm>
-            <a:off x="6629399" y="2313432"/>
-            <a:ext cx="0" cy="3721608"/>
+            <a:off x="5715000" y="2313432"/>
+            <a:ext cx="0" cy="3739896"/>
           </a:xfrm>
           <a:prstGeom prst="line">
             <a:avLst/>
@@ -20696,14 +20976,14 @@
       </p:cxnSp>
       <p:sp>
         <p:nvSpPr>
-          <p:cNvPr id="28" name="TextBox 27"/>
+          <p:cNvPr id="35" name="TextBox 34"/>
           <p:cNvSpPr txBox="1"/>
           <p:nvPr/>
         </p:nvSpPr>
         <p:spPr>
           <a:xfrm>
-            <a:off x="7315199" y="1938528"/>
-            <a:ext cx="731520" cy="237744"/>
+            <a:off x="6263640" y="1938528"/>
+            <a:ext cx="640080" cy="237744"/>
           </a:xfrm>
           <a:prstGeom prst="rect">
             <a:avLst/>
@@ -20726,20 +21006,20 @@
                 <a:ea typeface="微软雅黑"/>
                 <a:cs typeface="微软雅黑"/>
               </a:rPr>
-              <a:t>8月</a:t>
-            </a:r>
-          </a:p>
-        </p:txBody>
-      </p:sp>
-      <p:sp>
-        <p:nvSpPr>
-          <p:cNvPr id="29" name="Oval 28"/>
+              <a:t>7月</a:t>
+            </a:r>
+          </a:p>
+        </p:txBody>
+      </p:sp>
+      <p:sp>
+        <p:nvSpPr>
+          <p:cNvPr id="36" name="Oval 35"/>
           <p:cNvSpPr/>
           <p:nvPr/>
         </p:nvSpPr>
         <p:spPr>
           <a:xfrm>
-            <a:off x="7635239" y="2194560"/>
+            <a:off x="6537960" y="2194560"/>
             <a:ext cx="91440" cy="91440"/>
           </a:xfrm>
           <a:prstGeom prst="ellipse">
@@ -20777,14 +21057,14 @@
       </p:sp>
       <p:cxnSp>
         <p:nvCxnSpPr>
-          <p:cNvPr id="30" name="Connector 29"/>
+          <p:cNvPr id="37" name="Connector 36"/>
           <p:cNvCxnSpPr/>
           <p:nvPr/>
         </p:nvCxnSpPr>
         <p:spPr>
           <a:xfrm>
-            <a:off x="7680959" y="2313432"/>
-            <a:ext cx="0" cy="3721608"/>
+            <a:off x="6583680" y="2313432"/>
+            <a:ext cx="0" cy="3739896"/>
           </a:xfrm>
           <a:prstGeom prst="line">
             <a:avLst/>
@@ -20813,14 +21093,14 @@
       </p:cxnSp>
       <p:sp>
         <p:nvSpPr>
-          <p:cNvPr id="31" name="TextBox 30"/>
+          <p:cNvPr id="38" name="TextBox 37"/>
           <p:cNvSpPr txBox="1"/>
           <p:nvPr/>
         </p:nvSpPr>
         <p:spPr>
           <a:xfrm>
-            <a:off x="8732519" y="1938528"/>
-            <a:ext cx="731520" cy="237744"/>
+            <a:off x="7178040" y="1938528"/>
+            <a:ext cx="640080" cy="237744"/>
           </a:xfrm>
           <a:prstGeom prst="rect">
             <a:avLst/>
@@ -20843,20 +21123,20 @@
                 <a:ea typeface="微软雅黑"/>
                 <a:cs typeface="微软雅黑"/>
               </a:rPr>
-              <a:t>9月</a:t>
-            </a:r>
-          </a:p>
-        </p:txBody>
-      </p:sp>
-      <p:sp>
-        <p:nvSpPr>
-          <p:cNvPr id="32" name="Oval 31"/>
+              <a:t>8月</a:t>
+            </a:r>
+          </a:p>
+        </p:txBody>
+      </p:sp>
+      <p:sp>
+        <p:nvSpPr>
+          <p:cNvPr id="39" name="Oval 38"/>
           <p:cNvSpPr/>
           <p:nvPr/>
         </p:nvSpPr>
         <p:spPr>
           <a:xfrm>
-            <a:off x="9052559" y="2194560"/>
+            <a:off x="7452359" y="2194560"/>
             <a:ext cx="91440" cy="91440"/>
           </a:xfrm>
           <a:prstGeom prst="ellipse">
@@ -20894,14 +21174,14 @@
       </p:sp>
       <p:cxnSp>
         <p:nvCxnSpPr>
-          <p:cNvPr id="33" name="Connector 32"/>
+          <p:cNvPr id="40" name="Connector 39"/>
           <p:cNvCxnSpPr/>
           <p:nvPr/>
         </p:nvCxnSpPr>
         <p:spPr>
           <a:xfrm>
-            <a:off x="9098280" y="2313432"/>
-            <a:ext cx="0" cy="3721608"/>
+            <a:off x="7498079" y="2313432"/>
+            <a:ext cx="0" cy="3739896"/>
           </a:xfrm>
           <a:prstGeom prst="line">
             <a:avLst/>
@@ -20930,14 +21210,14 @@
       </p:cxnSp>
       <p:sp>
         <p:nvSpPr>
-          <p:cNvPr id="34" name="TextBox 33"/>
+          <p:cNvPr id="41" name="TextBox 40"/>
           <p:cNvSpPr txBox="1"/>
           <p:nvPr/>
         </p:nvSpPr>
         <p:spPr>
           <a:xfrm>
-            <a:off x="10149840" y="1938528"/>
-            <a:ext cx="731520" cy="237744"/>
+            <a:off x="8458200" y="1938528"/>
+            <a:ext cx="640080" cy="237744"/>
           </a:xfrm>
           <a:prstGeom prst="rect">
             <a:avLst/>
@@ -20960,20 +21240,20 @@
                 <a:ea typeface="微软雅黑"/>
                 <a:cs typeface="微软雅黑"/>
               </a:rPr>
-              <a:t>10月</a:t>
-            </a:r>
-          </a:p>
-        </p:txBody>
-      </p:sp>
-      <p:sp>
-        <p:nvSpPr>
-          <p:cNvPr id="35" name="Oval 34"/>
+              <a:t>9月</a:t>
+            </a:r>
+          </a:p>
+        </p:txBody>
+      </p:sp>
+      <p:sp>
+        <p:nvSpPr>
+          <p:cNvPr id="42" name="Oval 41"/>
           <p:cNvSpPr/>
           <p:nvPr/>
         </p:nvSpPr>
         <p:spPr>
           <a:xfrm>
-            <a:off x="10469880" y="2194560"/>
+            <a:off x="8732519" y="2194560"/>
             <a:ext cx="91440" cy="91440"/>
           </a:xfrm>
           <a:prstGeom prst="ellipse">
@@ -21011,14 +21291,14 @@
       </p:sp>
       <p:cxnSp>
         <p:nvCxnSpPr>
-          <p:cNvPr id="36" name="Connector 35"/>
+          <p:cNvPr id="43" name="Connector 42"/>
           <p:cNvCxnSpPr/>
           <p:nvPr/>
         </p:nvCxnSpPr>
         <p:spPr>
           <a:xfrm>
-            <a:off x="10515600" y="2313432"/>
-            <a:ext cx="0" cy="3721608"/>
+            <a:off x="8778240" y="2313432"/>
+            <a:ext cx="0" cy="3739896"/>
           </a:xfrm>
           <a:prstGeom prst="line">
             <a:avLst/>
@@ -21047,14 +21327,248 @@
       </p:cxnSp>
       <p:sp>
         <p:nvSpPr>
-          <p:cNvPr id="37" name="Rounded Rectangle 36"/>
+          <p:cNvPr id="44" name="TextBox 43"/>
+          <p:cNvSpPr txBox="1"/>
+          <p:nvPr/>
+        </p:nvSpPr>
+        <p:spPr>
+          <a:xfrm>
+            <a:off x="9738360" y="1938528"/>
+            <a:ext cx="640080" cy="237744"/>
+          </a:xfrm>
+          <a:prstGeom prst="rect">
+            <a:avLst/>
+          </a:prstGeom>
+          <a:noFill/>
+        </p:spPr>
+        <p:txBody>
+          <a:bodyPr wrap="square" lIns="0" rIns="0" tIns="0" bIns="0" anchor="t">
+            <a:spAutoFit/>
+          </a:bodyPr>
+          <a:lstStyle/>
+          <a:p>
+            <a:pPr algn="ctr"/>
+            <a:r>
+              <a:rPr sz="1100" b="0">
+                <a:solidFill>
+                  <a:srgbClr val="3D4757"/>
+                </a:solidFill>
+                <a:latin typeface="微软雅黑"/>
+                <a:ea typeface="微软雅黑"/>
+                <a:cs typeface="微软雅黑"/>
+              </a:rPr>
+              <a:t>10月</a:t>
+            </a:r>
+          </a:p>
+        </p:txBody>
+      </p:sp>
+      <p:sp>
+        <p:nvSpPr>
+          <p:cNvPr id="45" name="Oval 44"/>
           <p:cNvSpPr/>
           <p:nvPr/>
         </p:nvSpPr>
         <p:spPr>
           <a:xfrm>
-            <a:off x="3200400" y="2450592"/>
-            <a:ext cx="1005840" cy="1060704"/>
+            <a:off x="10012680" y="2194560"/>
+            <a:ext cx="91440" cy="91440"/>
+          </a:xfrm>
+          <a:prstGeom prst="ellipse">
+            <a:avLst/>
+          </a:prstGeom>
+          <a:solidFill>
+            <a:srgbClr val="FFFFFF"/>
+          </a:solidFill>
+          <a:ln w="12700">
+            <a:solidFill>
+              <a:srgbClr val="287DFA"/>
+            </a:solidFill>
+          </a:ln>
+          <a:effectLst/>
+        </p:spPr>
+        <p:style>
+          <a:lnRef idx="1">
+            <a:schemeClr val="accent1"/>
+          </a:lnRef>
+          <a:fillRef idx="3">
+            <a:schemeClr val="accent1"/>
+          </a:fillRef>
+          <a:effectRef idx="2">
+            <a:schemeClr val="accent1"/>
+          </a:effectRef>
+          <a:fontRef idx="minor">
+            <a:schemeClr val="lt1"/>
+          </a:fontRef>
+        </p:style>
+        <p:txBody>
+          <a:bodyPr rtlCol="0" anchor="ctr"/>
+          <a:lstStyle/>
+          <a:p/>
+        </p:txBody>
+      </p:sp>
+      <p:cxnSp>
+        <p:nvCxnSpPr>
+          <p:cNvPr id="46" name="Connector 45"/>
+          <p:cNvCxnSpPr/>
+          <p:nvPr/>
+        </p:nvCxnSpPr>
+        <p:spPr>
+          <a:xfrm>
+            <a:off x="10058400" y="2313432"/>
+            <a:ext cx="0" cy="3739896"/>
+          </a:xfrm>
+          <a:prstGeom prst="line">
+            <a:avLst/>
+          </a:prstGeom>
+          <a:ln w="9525">
+            <a:solidFill>
+              <a:srgbClr val="E3EBF8"/>
+            </a:solidFill>
+            <a:prstDash val="dash"/>
+          </a:ln>
+        </p:spPr>
+        <p:style>
+          <a:lnRef idx="2">
+            <a:schemeClr val="accent1"/>
+          </a:lnRef>
+          <a:fillRef idx="0">
+            <a:schemeClr val="accent1"/>
+          </a:fillRef>
+          <a:effectRef idx="1">
+            <a:schemeClr val="accent1"/>
+          </a:effectRef>
+          <a:fontRef idx="minor">
+            <a:schemeClr val="tx1"/>
+          </a:fontRef>
+        </p:style>
+      </p:cxnSp>
+      <p:sp>
+        <p:nvSpPr>
+          <p:cNvPr id="47" name="TextBox 46"/>
+          <p:cNvSpPr txBox="1"/>
+          <p:nvPr/>
+        </p:nvSpPr>
+        <p:spPr>
+          <a:xfrm>
+            <a:off x="11155680" y="1938528"/>
+            <a:ext cx="640080" cy="237744"/>
+          </a:xfrm>
+          <a:prstGeom prst="rect">
+            <a:avLst/>
+          </a:prstGeom>
+          <a:noFill/>
+        </p:spPr>
+        <p:txBody>
+          <a:bodyPr wrap="square" lIns="0" rIns="0" tIns="0" bIns="0" anchor="t">
+            <a:spAutoFit/>
+          </a:bodyPr>
+          <a:lstStyle/>
+          <a:p>
+            <a:pPr algn="ctr"/>
+            <a:r>
+              <a:rPr sz="1100" b="0">
+                <a:solidFill>
+                  <a:srgbClr val="3D4757"/>
+                </a:solidFill>
+                <a:latin typeface="微软雅黑"/>
+                <a:ea typeface="微软雅黑"/>
+                <a:cs typeface="微软雅黑"/>
+              </a:rPr>
+              <a:t>11月</a:t>
+            </a:r>
+          </a:p>
+        </p:txBody>
+      </p:sp>
+      <p:sp>
+        <p:nvSpPr>
+          <p:cNvPr id="48" name="Oval 47"/>
+          <p:cNvSpPr/>
+          <p:nvPr/>
+        </p:nvSpPr>
+        <p:spPr>
+          <a:xfrm>
+            <a:off x="11430000" y="2194560"/>
+            <a:ext cx="91440" cy="91440"/>
+          </a:xfrm>
+          <a:prstGeom prst="ellipse">
+            <a:avLst/>
+          </a:prstGeom>
+          <a:solidFill>
+            <a:srgbClr val="FFFFFF"/>
+          </a:solidFill>
+          <a:ln w="12700">
+            <a:solidFill>
+              <a:srgbClr val="287DFA"/>
+            </a:solidFill>
+          </a:ln>
+          <a:effectLst/>
+        </p:spPr>
+        <p:style>
+          <a:lnRef idx="1">
+            <a:schemeClr val="accent1"/>
+          </a:lnRef>
+          <a:fillRef idx="3">
+            <a:schemeClr val="accent1"/>
+          </a:fillRef>
+          <a:effectRef idx="2">
+            <a:schemeClr val="accent1"/>
+          </a:effectRef>
+          <a:fontRef idx="minor">
+            <a:schemeClr val="lt1"/>
+          </a:fontRef>
+        </p:style>
+        <p:txBody>
+          <a:bodyPr rtlCol="0" anchor="ctr"/>
+          <a:lstStyle/>
+          <a:p/>
+        </p:txBody>
+      </p:sp>
+      <p:cxnSp>
+        <p:nvCxnSpPr>
+          <p:cNvPr id="49" name="Connector 48"/>
+          <p:cNvCxnSpPr/>
+          <p:nvPr/>
+        </p:nvCxnSpPr>
+        <p:spPr>
+          <a:xfrm>
+            <a:off x="11475720" y="2313432"/>
+            <a:ext cx="0" cy="3739896"/>
+          </a:xfrm>
+          <a:prstGeom prst="line">
+            <a:avLst/>
+          </a:prstGeom>
+          <a:ln w="9525">
+            <a:solidFill>
+              <a:srgbClr val="E3EBF8"/>
+            </a:solidFill>
+            <a:prstDash val="dash"/>
+          </a:ln>
+        </p:spPr>
+        <p:style>
+          <a:lnRef idx="2">
+            <a:schemeClr val="accent1"/>
+          </a:lnRef>
+          <a:fillRef idx="0">
+            <a:schemeClr val="accent1"/>
+          </a:fillRef>
+          <a:effectRef idx="1">
+            <a:schemeClr val="accent1"/>
+          </a:effectRef>
+          <a:fontRef idx="minor">
+            <a:schemeClr val="tx1"/>
+          </a:fontRef>
+        </p:style>
+      </p:cxnSp>
+      <p:sp>
+        <p:nvSpPr>
+          <p:cNvPr id="50" name="Rounded Rectangle 49"/>
+          <p:cNvSpPr/>
+          <p:nvPr/>
+        </p:nvSpPr>
+        <p:spPr>
+          <a:xfrm>
+            <a:off x="3547872" y="2432304"/>
+            <a:ext cx="1005840" cy="941831"/>
           </a:xfrm>
           <a:prstGeom prst="roundRect">
             <a:avLst>
@@ -21091,14 +21605,14 @@
       </p:sp>
       <p:sp>
         <p:nvSpPr>
-          <p:cNvPr id="38" name="TextBox 37"/>
+          <p:cNvPr id="51" name="TextBox 50"/>
           <p:cNvSpPr txBox="1"/>
           <p:nvPr/>
         </p:nvSpPr>
         <p:spPr>
           <a:xfrm>
-            <a:off x="3200400" y="2450592"/>
-            <a:ext cx="1005840" cy="1060704"/>
+            <a:off x="3547872" y="2432304"/>
+            <a:ext cx="1005840" cy="941831"/>
           </a:xfrm>
           <a:prstGeom prst="rect">
             <a:avLst/>
@@ -21146,14 +21660,14 @@
       </p:sp>
       <p:sp>
         <p:nvSpPr>
-          <p:cNvPr id="39" name="Rounded Rectangle 38"/>
+          <p:cNvPr id="52" name="Rounded Rectangle 51"/>
           <p:cNvSpPr/>
           <p:nvPr/>
         </p:nvSpPr>
         <p:spPr>
           <a:xfrm>
-            <a:off x="4343400" y="2450592"/>
-            <a:ext cx="1063358" cy="292607"/>
+            <a:off x="4663440" y="2432304"/>
+            <a:ext cx="795528" cy="265176"/>
           </a:xfrm>
           <a:prstGeom prst="roundRect">
             <a:avLst>
@@ -21190,14 +21704,14 @@
       </p:sp>
       <p:sp>
         <p:nvSpPr>
-          <p:cNvPr id="40" name="TextBox 39"/>
+          <p:cNvPr id="53" name="TextBox 52"/>
           <p:cNvSpPr txBox="1"/>
           <p:nvPr/>
         </p:nvSpPr>
         <p:spPr>
           <a:xfrm>
-            <a:off x="4343400" y="2450592"/>
-            <a:ext cx="1063358" cy="292607"/>
+            <a:off x="4663440" y="2432304"/>
+            <a:ext cx="795528" cy="265176"/>
           </a:xfrm>
           <a:prstGeom prst="rect">
             <a:avLst/>
@@ -21227,14 +21741,14 @@
       </p:sp>
       <p:sp>
         <p:nvSpPr>
-          <p:cNvPr id="41" name="Rounded Rectangle 40"/>
+          <p:cNvPr id="54" name="Rounded Rectangle 53"/>
           <p:cNvSpPr/>
           <p:nvPr/>
         </p:nvSpPr>
         <p:spPr>
           <a:xfrm>
-            <a:off x="5440679" y="2834640"/>
-            <a:ext cx="1426169" cy="292607"/>
+            <a:off x="4846320" y="2770632"/>
+            <a:ext cx="1810511" cy="265176"/>
           </a:xfrm>
           <a:prstGeom prst="roundRect">
             <a:avLst>
@@ -21271,14 +21785,14 @@
       </p:sp>
       <p:sp>
         <p:nvSpPr>
-          <p:cNvPr id="42" name="TextBox 41"/>
+          <p:cNvPr id="55" name="TextBox 54"/>
           <p:cNvSpPr txBox="1"/>
           <p:nvPr/>
         </p:nvSpPr>
         <p:spPr>
           <a:xfrm>
-            <a:off x="5440679" y="2834640"/>
-            <a:ext cx="1426169" cy="292607"/>
+            <a:off x="4846320" y="2770632"/>
+            <a:ext cx="1810511" cy="265176"/>
           </a:xfrm>
           <a:prstGeom prst="rect">
             <a:avLst/>
@@ -21301,21 +21815,21 @@
                 <a:ea typeface="微软雅黑"/>
                 <a:cs typeface="微软雅黑"/>
               </a:rPr>
-              <a:t>一期：意图识别</a:t>
-            </a:r>
-          </a:p>
-        </p:txBody>
-      </p:sp>
-      <p:sp>
-        <p:nvSpPr>
-          <p:cNvPr id="43" name="Rounded Rectangle 42"/>
+              <a:t>Agent 1.0 意图识别优化</a:t>
+            </a:r>
+          </a:p>
+        </p:txBody>
+      </p:sp>
+      <p:sp>
+        <p:nvSpPr>
+          <p:cNvPr id="56" name="Rounded Rectangle 55"/>
           <p:cNvSpPr/>
           <p:nvPr/>
         </p:nvSpPr>
         <p:spPr>
           <a:xfrm>
-            <a:off x="6900770" y="3218688"/>
-            <a:ext cx="1648869" cy="292607"/>
+            <a:off x="6583680" y="3108960"/>
+            <a:ext cx="2235707" cy="265176"/>
           </a:xfrm>
           <a:prstGeom prst="roundRect">
             <a:avLst>
@@ -21352,14 +21866,14 @@
       </p:sp>
       <p:sp>
         <p:nvSpPr>
-          <p:cNvPr id="44" name="TextBox 43"/>
+          <p:cNvPr id="57" name="TextBox 56"/>
           <p:cNvSpPr txBox="1"/>
           <p:nvPr/>
         </p:nvSpPr>
         <p:spPr>
           <a:xfrm>
-            <a:off x="6900770" y="3218688"/>
-            <a:ext cx="1648869" cy="292607"/>
+            <a:off x="6583680" y="3108960"/>
+            <a:ext cx="2235707" cy="265176"/>
           </a:xfrm>
           <a:prstGeom prst="rect">
             <a:avLst/>
@@ -21382,21 +21896,21 @@
                 <a:ea typeface="微软雅黑"/>
                 <a:cs typeface="微软雅黑"/>
               </a:rPr>
-              <a:t>二期：验收与拒答治理</a:t>
-            </a:r>
-          </a:p>
-        </p:txBody>
-      </p:sp>
-      <p:sp>
-        <p:nvSpPr>
-          <p:cNvPr id="45" name="Rounded Rectangle 44"/>
+              <a:t>Agent 2.0 拒答治理与数据回收</a:t>
+            </a:r>
+          </a:p>
+        </p:txBody>
+      </p:sp>
+      <p:sp>
+        <p:nvSpPr>
+          <p:cNvPr id="58" name="Rounded Rectangle 57"/>
           <p:cNvSpPr/>
           <p:nvPr/>
         </p:nvSpPr>
         <p:spPr>
           <a:xfrm>
-            <a:off x="3200400" y="3803904"/>
-            <a:ext cx="1005840" cy="2212848"/>
+            <a:off x="3547872" y="3611880"/>
+            <a:ext cx="1005840" cy="2295144"/>
           </a:xfrm>
           <a:prstGeom prst="roundRect">
             <a:avLst>
@@ -21433,14 +21947,14 @@
       </p:sp>
       <p:sp>
         <p:nvSpPr>
-          <p:cNvPr id="46" name="TextBox 45"/>
+          <p:cNvPr id="59" name="TextBox 58"/>
           <p:cNvSpPr txBox="1"/>
           <p:nvPr/>
         </p:nvSpPr>
         <p:spPr>
           <a:xfrm>
-            <a:off x="3200400" y="3803904"/>
-            <a:ext cx="1005840" cy="2212848"/>
+            <a:off x="3547872" y="3611880"/>
+            <a:ext cx="1005840" cy="2295144"/>
           </a:xfrm>
           <a:prstGeom prst="rect">
             <a:avLst/>
@@ -21470,14 +21984,14 @@
       </p:sp>
       <p:sp>
         <p:nvSpPr>
-          <p:cNvPr id="47" name="Rounded Rectangle 46"/>
+          <p:cNvPr id="60" name="Rounded Rectangle 59"/>
           <p:cNvSpPr/>
           <p:nvPr/>
         </p:nvSpPr>
         <p:spPr>
           <a:xfrm>
-            <a:off x="7138219" y="3803904"/>
-            <a:ext cx="2054548" cy="292607"/>
+            <a:off x="7026131" y="3611880"/>
+            <a:ext cx="1837452" cy="265176"/>
           </a:xfrm>
           <a:prstGeom prst="roundRect">
             <a:avLst>
@@ -21514,14 +22028,14 @@
       </p:sp>
       <p:sp>
         <p:nvSpPr>
-          <p:cNvPr id="48" name="TextBox 47"/>
+          <p:cNvPr id="61" name="TextBox 60"/>
           <p:cNvSpPr txBox="1"/>
           <p:nvPr/>
         </p:nvSpPr>
         <p:spPr>
           <a:xfrm>
-            <a:off x="7138219" y="3803904"/>
-            <a:ext cx="2054548" cy="292607"/>
+            <a:off x="7026131" y="3611880"/>
+            <a:ext cx="1837452" cy="265176"/>
           </a:xfrm>
           <a:prstGeom prst="rect">
             <a:avLst/>
@@ -21551,14 +22065,14 @@
       </p:sp>
       <p:sp>
         <p:nvSpPr>
-          <p:cNvPr id="49" name="Rounded Rectangle 48"/>
+          <p:cNvPr id="62" name="Rounded Rectangle 61"/>
           <p:cNvSpPr/>
           <p:nvPr/>
         </p:nvSpPr>
         <p:spPr>
           <a:xfrm>
-            <a:off x="7680959" y="4187952"/>
-            <a:ext cx="2409444" cy="292607"/>
+            <a:off x="7498079" y="3950208"/>
+            <a:ext cx="2354579" cy="265176"/>
           </a:xfrm>
           <a:prstGeom prst="roundRect">
             <a:avLst>
@@ -21595,14 +22109,14 @@
       </p:sp>
       <p:sp>
         <p:nvSpPr>
-          <p:cNvPr id="50" name="TextBox 49"/>
+          <p:cNvPr id="63" name="TextBox 62"/>
           <p:cNvSpPr txBox="1"/>
           <p:nvPr/>
         </p:nvSpPr>
         <p:spPr>
           <a:xfrm>
-            <a:off x="7680959" y="4187952"/>
-            <a:ext cx="2409444" cy="292607"/>
+            <a:off x="7498079" y="3950208"/>
+            <a:ext cx="2354579" cy="265176"/>
           </a:xfrm>
           <a:prstGeom prst="rect">
             <a:avLst/>
@@ -21625,21 +22139,21 @@
                 <a:ea typeface="微软雅黑"/>
                 <a:cs typeface="微软雅黑"/>
               </a:rPr>
-              <a:t>智能第二程接直付 · 口径修正</a:t>
-            </a:r>
-          </a:p>
-        </p:txBody>
-      </p:sp>
-      <p:sp>
-        <p:nvSpPr>
-          <p:cNvPr id="51" name="Rounded Rectangle 50"/>
+              <a:t>智能第二程接直付与直付标记修复</a:t>
+            </a:r>
+          </a:p>
+        </p:txBody>
+      </p:sp>
+      <p:sp>
+        <p:nvSpPr>
+          <p:cNvPr id="64" name="Rounded Rectangle 63"/>
           <p:cNvSpPr/>
           <p:nvPr/>
         </p:nvSpPr>
         <p:spPr>
           <a:xfrm>
-            <a:off x="7909559" y="4572000"/>
-            <a:ext cx="1897380" cy="292607"/>
+            <a:off x="7704557" y="4288536"/>
+            <a:ext cx="2673882" cy="265176"/>
           </a:xfrm>
           <a:prstGeom prst="roundRect">
             <a:avLst>
@@ -21676,14 +22190,14 @@
       </p:sp>
       <p:sp>
         <p:nvSpPr>
-          <p:cNvPr id="52" name="TextBox 51"/>
+          <p:cNvPr id="65" name="TextBox 64"/>
           <p:cNvSpPr txBox="1"/>
           <p:nvPr/>
         </p:nvSpPr>
         <p:spPr>
           <a:xfrm>
-            <a:off x="7909559" y="4572000"/>
-            <a:ext cx="1897380" cy="292607"/>
+            <a:off x="7704557" y="4288536"/>
+            <a:ext cx="2673882" cy="265176"/>
           </a:xfrm>
           <a:prstGeom prst="rect">
             <a:avLst/>
@@ -21713,14 +22227,14 @@
       </p:sp>
       <p:sp>
         <p:nvSpPr>
-          <p:cNvPr id="53" name="Rounded Rectangle 52"/>
+          <p:cNvPr id="66" name="Rounded Rectangle 65"/>
           <p:cNvSpPr/>
           <p:nvPr/>
         </p:nvSpPr>
         <p:spPr>
           <a:xfrm>
-            <a:off x="8412480" y="4956048"/>
-            <a:ext cx="2055875" cy="292607"/>
+            <a:off x="8158807" y="4626864"/>
+            <a:ext cx="1856920" cy="265176"/>
           </a:xfrm>
           <a:prstGeom prst="roundRect">
             <a:avLst>
@@ -21757,14 +22271,14 @@
       </p:sp>
       <p:sp>
         <p:nvSpPr>
-          <p:cNvPr id="54" name="TextBox 53"/>
+          <p:cNvPr id="67" name="TextBox 66"/>
           <p:cNvSpPr txBox="1"/>
           <p:nvPr/>
         </p:nvSpPr>
         <p:spPr>
           <a:xfrm>
-            <a:off x="8412480" y="4956048"/>
-            <a:ext cx="2055875" cy="292607"/>
+            <a:off x="8158807" y="4626864"/>
+            <a:ext cx="1856920" cy="265176"/>
           </a:xfrm>
           <a:prstGeom prst="rect">
             <a:avLst/>
@@ -21794,14 +22308,14 @@
       </p:sp>
       <p:sp>
         <p:nvSpPr>
-          <p:cNvPr id="55" name="Rounded Rectangle 54"/>
+          <p:cNvPr id="68" name="Rounded Rectangle 67"/>
           <p:cNvSpPr/>
           <p:nvPr/>
         </p:nvSpPr>
         <p:spPr>
           <a:xfrm>
-            <a:off x="9523476" y="5340096"/>
-            <a:ext cx="1490619" cy="292607"/>
+            <a:off x="9162288" y="4965192"/>
+            <a:ext cx="1490472" cy="265176"/>
           </a:xfrm>
           <a:prstGeom prst="roundRect">
             <a:avLst>
@@ -21838,14 +22352,14 @@
       </p:sp>
       <p:sp>
         <p:nvSpPr>
-          <p:cNvPr id="56" name="TextBox 55"/>
+          <p:cNvPr id="69" name="TextBox 68"/>
           <p:cNvSpPr txBox="1"/>
           <p:nvPr/>
         </p:nvSpPr>
         <p:spPr>
           <a:xfrm>
-            <a:off x="9523476" y="5340096"/>
-            <a:ext cx="1490619" cy="292607"/>
+            <a:off x="9162288" y="4965192"/>
+            <a:ext cx="1490472" cy="265176"/>
           </a:xfrm>
           <a:prstGeom prst="rect">
             <a:avLst/>
@@ -21875,14 +22389,14 @@
       </p:sp>
       <p:sp>
         <p:nvSpPr>
-          <p:cNvPr id="57" name="Rounded Rectangle 56"/>
+          <p:cNvPr id="70" name="Rounded Rectangle 69"/>
           <p:cNvSpPr/>
           <p:nvPr/>
         </p:nvSpPr>
         <p:spPr>
           <a:xfrm>
-            <a:off x="9712452" y="5724144"/>
-            <a:ext cx="1362456" cy="292607"/>
+            <a:off x="9332976" y="5303520"/>
+            <a:ext cx="1362456" cy="265176"/>
           </a:xfrm>
           <a:prstGeom prst="roundRect">
             <a:avLst>
@@ -21919,14 +22433,14 @@
       </p:sp>
       <p:sp>
         <p:nvSpPr>
-          <p:cNvPr id="58" name="TextBox 57"/>
+          <p:cNvPr id="71" name="TextBox 70"/>
           <p:cNvSpPr txBox="1"/>
           <p:nvPr/>
         </p:nvSpPr>
         <p:spPr>
           <a:xfrm>
-            <a:off x="9712452" y="5724144"/>
-            <a:ext cx="1362456" cy="292607"/>
+            <a:off x="9332976" y="5303520"/>
+            <a:ext cx="1362456" cy="265176"/>
           </a:xfrm>
           <a:prstGeom prst="rect">
             <a:avLst/>
@@ -21950,6 +22464,87 @@
                 <a:cs typeface="微软雅黑"/>
               </a:rPr>
               <a:t>在线换座体验优化</a:t>
+            </a:r>
+          </a:p>
+        </p:txBody>
+      </p:sp>
+      <p:sp>
+        <p:nvSpPr>
+          <p:cNvPr id="72" name="Rounded Rectangle 71"/>
+          <p:cNvSpPr/>
+          <p:nvPr/>
+        </p:nvSpPr>
+        <p:spPr>
+          <a:xfrm>
+            <a:off x="10698480" y="5641848"/>
+            <a:ext cx="1014983" cy="265176"/>
+          </a:xfrm>
+          <a:prstGeom prst="roundRect">
+            <a:avLst>
+              <a:gd name="adj" fmla="val 30000"/>
+            </a:avLst>
+          </a:prstGeom>
+          <a:solidFill>
+            <a:srgbClr val="15315E"/>
+          </a:solidFill>
+          <a:ln>
+            <a:noFill/>
+          </a:ln>
+          <a:effectLst/>
+        </p:spPr>
+        <p:style>
+          <a:lnRef idx="1">
+            <a:schemeClr val="accent1"/>
+          </a:lnRef>
+          <a:fillRef idx="3">
+            <a:schemeClr val="accent1"/>
+          </a:fillRef>
+          <a:effectRef idx="2">
+            <a:schemeClr val="accent1"/>
+          </a:effectRef>
+          <a:fontRef idx="minor">
+            <a:schemeClr val="lt1"/>
+          </a:fontRef>
+        </p:style>
+        <p:txBody>
+          <a:bodyPr rtlCol="0" anchor="ctr"/>
+          <a:lstStyle/>
+          <a:p/>
+        </p:txBody>
+      </p:sp>
+      <p:sp>
+        <p:nvSpPr>
+          <p:cNvPr id="73" name="TextBox 72"/>
+          <p:cNvSpPr txBox="1"/>
+          <p:nvPr/>
+        </p:nvSpPr>
+        <p:spPr>
+          <a:xfrm>
+            <a:off x="10698480" y="5641848"/>
+            <a:ext cx="1014983" cy="265176"/>
+          </a:xfrm>
+          <a:prstGeom prst="rect">
+            <a:avLst/>
+          </a:prstGeom>
+          <a:noFill/>
+        </p:spPr>
+        <p:txBody>
+          <a:bodyPr wrap="square" lIns="0" rIns="0" tIns="0" bIns="0" anchor="ctr">
+            <a:spAutoFit/>
+          </a:bodyPr>
+          <a:lstStyle/>
+          <a:p>
+            <a:pPr algn="ctr"/>
+            <a:r>
+              <a:rPr sz="1100" b="1">
+                <a:solidFill>
+                  <a:srgbClr val="FFFFFF"/>
+                </a:solidFill>
+                <a:latin typeface="微软雅黑"/>
+                <a:ea typeface="微软雅黑"/>
+                <a:cs typeface="微软雅黑"/>
+              </a:rPr>
+              <a:t>微信直付 V1</a:t>
             </a:r>
           </a:p>
         </p:txBody>

--- a/答辩PPT.pptx
+++ b/答辩PPT.pptx
@@ -139,6 +139,242 @@
 </file>
 
 <file path=ppt/charts/chart1.xml><?xml version="1.0" encoding="utf-8"?>
+<c:chartSpace xmlns:c="http://schemas.openxmlformats.org/drawingml/2006/chart" xmlns:a="http://schemas.openxmlformats.org/drawingml/2006/main" xmlns:r="http://schemas.openxmlformats.org/officeDocument/2006/relationships">
+  <c:date1904 val="0"/>
+  <c:chart>
+    <c:autoTitleDeleted val="1"/>
+    <c:plotArea>
+      <c:barChart>
+        <c:barDir val="bar"/>
+        <c:grouping val="stacked"/>
+        <c:ser>
+          <c:idx val="0"/>
+          <c:order val="0"/>
+          <c:tx>
+            <c:strRef>
+              <c:f>Sheet1!$B$1</c:f>
+              <c:strCache>
+                <c:ptCount val="1"/>
+                <c:pt idx="0">
+                  <c:v>一致</c:v>
+                </c:pt>
+              </c:strCache>
+            </c:strRef>
+          </c:tx>
+          <c:spPr>
+            <a:solidFill>
+              <a:srgbClr val="C9DCF8"/>
+            </a:solidFill>
+          </c:spPr>
+          <c:cat>
+            <c:strRef>
+              <c:f>Sheet1!$A$2:$A$2</c:f>
+              <c:strCache>
+                <c:ptCount val="1"/>
+                <c:pt idx="0">
+                  <c:v>样本</c:v>
+                </c:pt>
+              </c:strCache>
+            </c:strRef>
+          </c:cat>
+          <c:val>
+            <c:numRef>
+              <c:f>Sheet1!$B$2:$B$2</c:f>
+              <c:numCache>
+                <c:formatCode>General</c:formatCode>
+                <c:ptCount val="1"/>
+                <c:pt idx="0">
+                  <c:v>749</c:v>
+                </c:pt>
+              </c:numCache>
+            </c:numRef>
+          </c:val>
+        </c:ser>
+        <c:ser>
+          <c:idx val="1"/>
+          <c:order val="1"/>
+          <c:tx>
+            <c:strRef>
+              <c:f>Sheet1!$C$1</c:f>
+              <c:strCache>
+                <c:ptCount val="1"/>
+                <c:pt idx="0">
+                  <c:v>Agent 对</c:v>
+                </c:pt>
+              </c:strCache>
+            </c:strRef>
+          </c:tx>
+          <c:spPr>
+            <a:solidFill>
+              <a:srgbClr val="8DB8F5"/>
+            </a:solidFill>
+          </c:spPr>
+          <c:cat>
+            <c:strRef>
+              <c:f>Sheet1!$A$2:$A$2</c:f>
+              <c:strCache>
+                <c:ptCount val="1"/>
+                <c:pt idx="0">
+                  <c:v>样本</c:v>
+                </c:pt>
+              </c:strCache>
+            </c:strRef>
+          </c:cat>
+          <c:val>
+            <c:numRef>
+              <c:f>Sheet1!$C$2:$C$2</c:f>
+              <c:numCache>
+                <c:formatCode>General</c:formatCode>
+                <c:ptCount val="1"/>
+                <c:pt idx="0">
+                  <c:v>197</c:v>
+                </c:pt>
+              </c:numCache>
+            </c:numRef>
+          </c:val>
+        </c:ser>
+        <c:ser>
+          <c:idx val="2"/>
+          <c:order val="2"/>
+          <c:tx>
+            <c:strRef>
+              <c:f>Sheet1!$D$1</c:f>
+              <c:strCache>
+                <c:ptCount val="1"/>
+                <c:pt idx="0">
+                  <c:v>算法对、Agent 错</c:v>
+                </c:pt>
+              </c:strCache>
+            </c:strRef>
+          </c:tx>
+          <c:spPr>
+            <a:solidFill>
+              <a:srgbClr val="FF7A1A"/>
+            </a:solidFill>
+          </c:spPr>
+          <c:cat>
+            <c:strRef>
+              <c:f>Sheet1!$A$2:$A$2</c:f>
+              <c:strCache>
+                <c:ptCount val="1"/>
+                <c:pt idx="0">
+                  <c:v>样本</c:v>
+                </c:pt>
+              </c:strCache>
+            </c:strRef>
+          </c:cat>
+          <c:val>
+            <c:numRef>
+              <c:f>Sheet1!$D$2:$D$2</c:f>
+              <c:numCache>
+                <c:formatCode>General</c:formatCode>
+                <c:ptCount val="1"/>
+                <c:pt idx="0">
+                  <c:v>21</c:v>
+                </c:pt>
+              </c:numCache>
+            </c:numRef>
+          </c:val>
+        </c:ser>
+        <c:ser>
+          <c:idx val="3"/>
+          <c:order val="3"/>
+          <c:tx>
+            <c:strRef>
+              <c:f>Sheet1!$E$1</c:f>
+              <c:strCache>
+                <c:ptCount val="1"/>
+                <c:pt idx="0">
+                  <c:v>都错</c:v>
+                </c:pt>
+              </c:strCache>
+            </c:strRef>
+          </c:tx>
+          <c:spPr>
+            <a:solidFill>
+              <a:srgbClr val="7A8599"/>
+            </a:solidFill>
+          </c:spPr>
+          <c:cat>
+            <c:strRef>
+              <c:f>Sheet1!$A$2:$A$2</c:f>
+              <c:strCache>
+                <c:ptCount val="1"/>
+                <c:pt idx="0">
+                  <c:v>样本</c:v>
+                </c:pt>
+              </c:strCache>
+            </c:strRef>
+          </c:cat>
+          <c:val>
+            <c:numRef>
+              <c:f>Sheet1!$E$2:$E$2</c:f>
+              <c:numCache>
+                <c:formatCode>General</c:formatCode>
+                <c:ptCount val="1"/>
+                <c:pt idx="0">
+                  <c:v>33</c:v>
+                </c:pt>
+              </c:numCache>
+            </c:numRef>
+          </c:val>
+        </c:ser>
+        <c:gapWidth val="0"/>
+        <c:overlap val="100"/>
+        <c:axId val="-2068027336"/>
+        <c:axId val="-2113994440"/>
+      </c:barChart>
+      <c:catAx>
+        <c:axId val="-2068027336"/>
+        <c:scaling>
+          <c:orientation val="minMax"/>
+        </c:scaling>
+        <c:delete/>
+        <c:axPos val="l"/>
+        <c:majorTickMark val="out"/>
+        <c:minorTickMark val="none"/>
+        <c:tickLblPos val="nextTo"/>
+        <c:crossAx val="-2113994440"/>
+        <c:crosses val="autoZero"/>
+        <c:auto val="1"/>
+        <c:lblAlgn val="ctr"/>
+        <c:lblOffset val="100"/>
+        <c:noMultiLvlLbl val="0"/>
+      </c:catAx>
+      <c:valAx>
+        <c:axId val="-2113994440"/>
+        <c:scaling>
+          <c:max val="1000.0"/>
+          <c:min val="0.0"/>
+        </c:scaling>
+        <c:delete/>
+        <c:axPos val="b"/>
+        <c:majorTickMark val="out"/>
+        <c:minorTickMark val="none"/>
+        <c:tickLblPos val="nextTo"/>
+        <c:crossAx val="-2068027336"/>
+        <c:crosses val="autoZero"/>
+      </c:valAx>
+    </c:plotArea>
+    <c:dispBlanksAs val="gap"/>
+  </c:chart>
+  <c:txPr>
+    <a:bodyPr/>
+    <a:lstStyle/>
+    <a:p>
+      <a:pPr>
+        <a:defRPr sz="1800"/>
+      </a:pPr>
+      <a:endParaRPr lang="en-US"/>
+    </a:p>
+  </c:txPr>
+  <c:externalData r:id="rId1">
+    <c:autoUpdate val="0"/>
+  </c:externalData>
+</c:chartSpace>
+</file>
+
+<file path=ppt/charts/chart2.xml><?xml version="1.0" encoding="utf-8"?>
 <c:chartSpace xmlns:c="http://schemas.openxmlformats.org/drawingml/2006/chart" xmlns:a="http://schemas.openxmlformats.org/drawingml/2006/main" xmlns:r="http://schemas.openxmlformats.org/officeDocument/2006/relationships">
   <c:date1904 val="0"/>
   <c:chart>
@@ -8049,7 +8285,7 @@
         </p:nvSpPr>
         <p:spPr>
           <a:xfrm>
-            <a:off x="502920" y="2176272"/>
+            <a:off x="502920" y="2148840"/>
             <a:ext cx="502920" cy="502920"/>
           </a:xfrm>
           <a:prstGeom prst="ellipse">
@@ -8099,7 +8335,7 @@
         </p:blipFill>
         <p:spPr>
           <a:xfrm>
-            <a:off x="628650" y="2302002"/>
+            <a:off x="628650" y="2274570"/>
             <a:ext cx="251460" cy="251460"/>
           </a:xfrm>
           <a:prstGeom prst="rect">
@@ -8115,7 +8351,7 @@
         </p:nvSpPr>
         <p:spPr>
           <a:xfrm>
-            <a:off x="1188720" y="2157984"/>
+            <a:off x="1188720" y="2130552"/>
             <a:ext cx="4709160" cy="329184"/>
           </a:xfrm>
           <a:prstGeom prst="rect">
@@ -8152,8 +8388,8 @@
         </p:nvSpPr>
         <p:spPr>
           <a:xfrm>
-            <a:off x="1188720" y="2523744"/>
-            <a:ext cx="4709160" cy="731520"/>
+            <a:off x="1188720" y="2478024"/>
+            <a:ext cx="4709160" cy="640080"/>
           </a:xfrm>
           <a:prstGeom prst="rect">
             <a:avLst/>
@@ -8193,7 +8429,7 @@
           <a:p>
             <a:pPr algn="l">
               <a:spcBef>
-                <a:spcPts val="400"/>
+                <a:spcPts val="300"/>
               </a:spcBef>
             </a:pPr>
             <a:r>
@@ -8229,7 +8465,7 @@
         </p:nvSpPr>
         <p:spPr>
           <a:xfrm>
-            <a:off x="502920" y="3364991"/>
+            <a:off x="502920" y="3200400"/>
             <a:ext cx="502920" cy="502920"/>
           </a:xfrm>
           <a:prstGeom prst="ellipse">
@@ -8279,7 +8515,7 @@
         </p:blipFill>
         <p:spPr>
           <a:xfrm>
-            <a:off x="628650" y="3490722"/>
+            <a:off x="628650" y="3326130"/>
             <a:ext cx="251460" cy="251460"/>
           </a:xfrm>
           <a:prstGeom prst="rect">
@@ -8295,7 +8531,7 @@
         </p:nvSpPr>
         <p:spPr>
           <a:xfrm>
-            <a:off x="1188720" y="3346703"/>
+            <a:off x="1188720" y="3182112"/>
             <a:ext cx="4709160" cy="329184"/>
           </a:xfrm>
           <a:prstGeom prst="rect">
@@ -8332,8 +8568,8 @@
         </p:nvSpPr>
         <p:spPr>
           <a:xfrm>
-            <a:off x="1188720" y="3712463"/>
-            <a:ext cx="4709160" cy="731520"/>
+            <a:off x="1188720" y="3529584"/>
+            <a:ext cx="4709160" cy="640080"/>
           </a:xfrm>
           <a:prstGeom prst="rect">
             <a:avLst/>
@@ -8370,35 +8606,6 @@
               <a:t>抽样 1,000 条线上 query，与算法业务标签逐条比对</a:t>
             </a:r>
           </a:p>
-          <a:p>
-            <a:pPr algn="l">
-              <a:spcBef>
-                <a:spcPts val="400"/>
-              </a:spcBef>
-            </a:pPr>
-            <a:r>
-              <a:rPr sz="900" b="0">
-                <a:solidFill>
-                  <a:srgbClr val="287DFA"/>
-                </a:solidFill>
-                <a:latin typeface="微软雅黑"/>
-                <a:ea typeface="微软雅黑"/>
-                <a:cs typeface="微软雅黑"/>
-              </a:rPr>
-              <a:t>●  </a:t>
-            </a:r>
-            <a:r>
-              <a:rPr sz="1300" b="0">
-                <a:solidFill>
-                  <a:srgbClr val="3D4757"/>
-                </a:solidFill>
-                <a:latin typeface="微软雅黑"/>
-                <a:ea typeface="微软雅黑"/>
-                <a:cs typeface="微软雅黑"/>
-              </a:rPr>
-              <a:t>针对“算法正确、Agent 错误”的样本，逐类修订分类标准</a:t>
-            </a:r>
-          </a:p>
         </p:txBody>
       </p:sp>
       <p:sp>
@@ -8409,8 +8616,8 @@
         </p:nvSpPr>
         <p:spPr>
           <a:xfrm>
-            <a:off x="457200" y="4572000"/>
-            <a:ext cx="5486400" cy="1508760"/>
+            <a:off x="457200" y="4617720"/>
+            <a:ext cx="5486400" cy="1463040"/>
           </a:xfrm>
           <a:prstGeom prst="roundRect">
             <a:avLst>
@@ -8453,7 +8660,7 @@
         </p:nvSpPr>
         <p:spPr>
           <a:xfrm>
-            <a:off x="731520" y="4663440"/>
+            <a:off x="731520" y="4690872"/>
             <a:ext cx="1828800" cy="274320"/>
           </a:xfrm>
           <a:prstGeom prst="rect">
@@ -8647,7 +8854,7 @@
         </p:nvSpPr>
         <p:spPr>
           <a:xfrm>
-            <a:off x="731520" y="5513832"/>
+            <a:off x="731520" y="5495544"/>
             <a:ext cx="2194560" cy="457200"/>
           </a:xfrm>
           <a:prstGeom prst="rect">
@@ -8684,7 +8891,7 @@
         </p:nvSpPr>
         <p:spPr>
           <a:xfrm>
-            <a:off x="2926080" y="5513832"/>
+            <a:off x="2926080" y="5495544"/>
             <a:ext cx="1965960" cy="457200"/>
           </a:xfrm>
           <a:prstGeom prst="rect">
@@ -8721,7 +8928,7 @@
         </p:nvSpPr>
         <p:spPr>
           <a:xfrm>
-            <a:off x="4864608" y="5586984"/>
+            <a:off x="4864608" y="5568696"/>
             <a:ext cx="1005840" cy="310896"/>
           </a:xfrm>
           <a:prstGeom prst="roundRect">
@@ -8767,7 +8974,7 @@
         </p:nvSpPr>
         <p:spPr>
           <a:xfrm>
-            <a:off x="4864608" y="5586984"/>
+            <a:off x="4864608" y="5568696"/>
             <a:ext cx="1005840" cy="310896"/>
           </a:xfrm>
           <a:prstGeom prst="rect">
@@ -8885,7 +9092,7 @@
         </p:nvSpPr>
         <p:spPr>
           <a:xfrm>
-            <a:off x="6291072" y="2176272"/>
+            <a:off x="6291072" y="2148840"/>
             <a:ext cx="502920" cy="502920"/>
           </a:xfrm>
           <a:prstGeom prst="ellipse">
@@ -8935,7 +9142,7 @@
         </p:blipFill>
         <p:spPr>
           <a:xfrm>
-            <a:off x="6416802" y="2302002"/>
+            <a:off x="6416802" y="2274570"/>
             <a:ext cx="251460" cy="251460"/>
           </a:xfrm>
           <a:prstGeom prst="rect">
@@ -8951,7 +9158,7 @@
         </p:nvSpPr>
         <p:spPr>
           <a:xfrm>
-            <a:off x="6976872" y="2157984"/>
+            <a:off x="6976872" y="2130552"/>
             <a:ext cx="4709160" cy="329184"/>
           </a:xfrm>
           <a:prstGeom prst="rect">
@@ -8988,8 +9195,8 @@
         </p:nvSpPr>
         <p:spPr>
           <a:xfrm>
-            <a:off x="6976872" y="2523744"/>
-            <a:ext cx="4709160" cy="731520"/>
+            <a:off x="6976872" y="2478024"/>
+            <a:ext cx="4709160" cy="640080"/>
           </a:xfrm>
           <a:prstGeom prst="rect">
             <a:avLst/>
@@ -9029,7 +9236,7 @@
           <a:p>
             <a:pPr algn="l">
               <a:spcBef>
-                <a:spcPts val="400"/>
+                <a:spcPts val="300"/>
               </a:spcBef>
             </a:pPr>
             <a:r>
@@ -9065,7 +9272,7 @@
         </p:nvSpPr>
         <p:spPr>
           <a:xfrm>
-            <a:off x="6291072" y="3364991"/>
+            <a:off x="6291072" y="3200400"/>
             <a:ext cx="502920" cy="502920"/>
           </a:xfrm>
           <a:prstGeom prst="ellipse">
@@ -9115,7 +9322,7 @@
         </p:blipFill>
         <p:spPr>
           <a:xfrm>
-            <a:off x="6416802" y="3490722"/>
+            <a:off x="6416802" y="3326130"/>
             <a:ext cx="251460" cy="251460"/>
           </a:xfrm>
           <a:prstGeom prst="rect">
@@ -9131,7 +9338,7 @@
         </p:nvSpPr>
         <p:spPr>
           <a:xfrm>
-            <a:off x="6976872" y="3346703"/>
+            <a:off x="6976872" y="3182112"/>
             <a:ext cx="4709160" cy="329184"/>
           </a:xfrm>
           <a:prstGeom prst="rect">
@@ -9168,8 +9375,8 @@
         </p:nvSpPr>
         <p:spPr>
           <a:xfrm>
-            <a:off x="6976872" y="3712463"/>
-            <a:ext cx="4709160" cy="731520"/>
+            <a:off x="6976872" y="3529584"/>
+            <a:ext cx="4709160" cy="640080"/>
           </a:xfrm>
           <a:prstGeom prst="rect">
             <a:avLst/>
@@ -9209,7 +9416,7 @@
           <a:p>
             <a:pPr algn="l">
               <a:spcBef>
-                <a:spcPts val="400"/>
+                <a:spcPts val="300"/>
               </a:spcBef>
             </a:pPr>
             <a:r>
@@ -9245,8 +9452,8 @@
         </p:nvSpPr>
         <p:spPr>
           <a:xfrm>
-            <a:off x="6245352" y="4572000"/>
-            <a:ext cx="5486400" cy="1508760"/>
+            <a:off x="6245352" y="4617720"/>
+            <a:ext cx="5486400" cy="1463040"/>
           </a:xfrm>
           <a:prstGeom prst="roundRect">
             <a:avLst>
@@ -9289,7 +9496,7 @@
         </p:nvSpPr>
         <p:spPr>
           <a:xfrm>
-            <a:off x="6519672" y="4663440"/>
+            <a:off x="6519672" y="4690872"/>
             <a:ext cx="1828800" cy="274320"/>
           </a:xfrm>
           <a:prstGeom prst="rect">
@@ -9471,6 +9678,138 @@
                 <a:cs typeface="微软雅黑"/>
               </a:rPr>
               <a:t>lift −54.2%</a:t>
+            </a:r>
+          </a:p>
+        </p:txBody>
+      </p:sp>
+      <p:graphicFrame>
+        <p:nvGraphicFramePr>
+          <p:cNvPr id="40" name="1000条样本分布"/>
+          <p:cNvGraphicFramePr>
+            <a:graphicFrameLocks noGrp="1"/>
+          </p:cNvGraphicFramePr>
+          <p:nvPr/>
+        </p:nvGraphicFramePr>
+        <p:xfrm>
+          <a:off x="1143000" y="3822191"/>
+          <a:ext cx="4343400" cy="384048"/>
+        </p:xfrm>
+        <a:graphic>
+          <a:graphicData uri="http://schemas.openxmlformats.org/drawingml/2006/chart">
+            <c:chart xmlns:c="http://schemas.openxmlformats.org/drawingml/2006/chart" r:id="rId6"/>
+          </a:graphicData>
+        </a:graphic>
+      </p:graphicFrame>
+      <p:sp>
+        <p:nvSpPr>
+          <p:cNvPr id="41" name="TextBox 40"/>
+          <p:cNvSpPr txBox="1"/>
+          <p:nvPr/>
+        </p:nvSpPr>
+        <p:spPr>
+          <a:xfrm>
+            <a:off x="1188720" y="4242816"/>
+            <a:ext cx="4754880" cy="274320"/>
+          </a:xfrm>
+          <a:prstGeom prst="rect">
+            <a:avLst/>
+          </a:prstGeom>
+          <a:noFill/>
+        </p:spPr>
+        <p:txBody>
+          <a:bodyPr wrap="square" lIns="0" rIns="0" tIns="0" bIns="0" anchor="t">
+            <a:spAutoFit/>
+          </a:bodyPr>
+          <a:lstStyle/>
+          <a:p>
+            <a:pPr algn="l"/>
+            <a:r>
+              <a:rPr sz="1000" b="0">
+                <a:solidFill>
+                  <a:srgbClr val="9DBCE8"/>
+                </a:solidFill>
+                <a:latin typeface="微软雅黑"/>
+                <a:ea typeface="微软雅黑"/>
+                <a:cs typeface="微软雅黑"/>
+              </a:rPr>
+              <a:t>■ </a:t>
+            </a:r>
+            <a:r>
+              <a:rPr sz="1000" b="0">
+                <a:solidFill>
+                  <a:srgbClr val="3D4757"/>
+                </a:solidFill>
+                <a:latin typeface="微软雅黑"/>
+                <a:ea typeface="微软雅黑"/>
+                <a:cs typeface="微软雅黑"/>
+              </a:rPr>
+              <a:t>一致 749  </a:t>
+            </a:r>
+            <a:r>
+              <a:rPr sz="1000" b="0">
+                <a:solidFill>
+                  <a:srgbClr val="8DB8F5"/>
+                </a:solidFill>
+                <a:latin typeface="微软雅黑"/>
+                <a:ea typeface="微软雅黑"/>
+                <a:cs typeface="微软雅黑"/>
+              </a:rPr>
+              <a:t>■ </a:t>
+            </a:r>
+            <a:r>
+              <a:rPr sz="1000" b="0">
+                <a:solidFill>
+                  <a:srgbClr val="3D4757"/>
+                </a:solidFill>
+                <a:latin typeface="微软雅黑"/>
+                <a:ea typeface="微软雅黑"/>
+                <a:cs typeface="微软雅黑"/>
+              </a:rPr>
+              <a:t>Agent 对 197  </a:t>
+            </a:r>
+            <a:r>
+              <a:rPr sz="1000" b="0">
+                <a:solidFill>
+                  <a:srgbClr val="FF7A1A"/>
+                </a:solidFill>
+                <a:latin typeface="微软雅黑"/>
+                <a:ea typeface="微软雅黑"/>
+                <a:cs typeface="微软雅黑"/>
+              </a:rPr>
+              <a:t>■ </a:t>
+            </a:r>
+            <a:r>
+              <a:rPr sz="1000" b="1">
+                <a:solidFill>
+                  <a:srgbClr val="FF7A1A"/>
+                </a:solidFill>
+                <a:latin typeface="微软雅黑"/>
+                <a:ea typeface="微软雅黑"/>
+                <a:cs typeface="微软雅黑"/>
+              </a:rPr>
+              <a:t>算法对、Agent 错 21  </a:t>
+            </a:r>
+            <a:r>
+              <a:rPr sz="1000" b="0">
+                <a:solidFill>
+                  <a:srgbClr val="7A8599"/>
+                </a:solidFill>
+                <a:latin typeface="微软雅黑"/>
+                <a:ea typeface="微软雅黑"/>
+                <a:cs typeface="微软雅黑"/>
+              </a:rPr>
+              <a:t>■ </a:t>
+            </a:r>
+            <a:r>
+              <a:rPr sz="1000" b="0">
+                <a:solidFill>
+                  <a:srgbClr val="3D4757"/>
+                </a:solidFill>
+                <a:latin typeface="微软雅黑"/>
+                <a:ea typeface="微软雅黑"/>
+                <a:cs typeface="微软雅黑"/>
+              </a:rPr>
+              <a:t>都错 33  </a:t>
             </a:r>
           </a:p>
         </p:txBody>

--- a/答辩PPT.pptx
+++ b/答辩PPT.pptx
@@ -144,9 +144,20 @@
   <c:chart>
     <c:autoTitleDeleted val="1"/>
     <c:plotArea>
-      <c:barChart>
-        <c:barDir val="bar"/>
-        <c:grouping val="stacked"/>
+      <c:layout>
+        <c:manualLayout>
+          <c:layoutTarget val="inner"/>
+          <c:xMode val="edge"/>
+          <c:yMode val="edge"/>
+          <c:x val="0.04"/>
+          <c:y val="0.22"/>
+          <c:w val="0.92"/>
+          <c:h val="0.6"/>
+        </c:manualLayout>
+      </c:layout>
+      <c:lineChart>
+        <c:grouping val="standard"/>
+        <c:varyColors val="0"/>
         <c:ser>
           <c:idx val="0"/>
           <c:order val="0"/>
@@ -156,185 +167,157 @@
               <c:strCache>
                 <c:ptCount val="1"/>
                 <c:pt idx="0">
-                  <c:v>一致</c:v>
+                  <c:v>错分拒答占比</c:v>
                 </c:pt>
               </c:strCache>
             </c:strRef>
           </c:tx>
           <c:spPr>
-            <a:solidFill>
-              <a:srgbClr val="C9DCF8"/>
-            </a:solidFill>
+            <a:ln w="25400">
+              <a:solidFill>
+                <a:srgbClr val="287DFA"/>
+              </a:solidFill>
+            </a:ln>
           </c:spPr>
+          <c:marker>
+            <c:size val="5"/>
+            <c:spPr>
+              <a:solidFill>
+                <a:srgbClr val="287DFA"/>
+              </a:solidFill>
+              <a:ln>
+                <a:solidFill>
+                  <a:srgbClr val="287DFA"/>
+                </a:solidFill>
+              </a:ln>
+            </c:spPr>
+          </c:marker>
           <c:cat>
             <c:strRef>
-              <c:f>Sheet1!$A$2:$A$2</c:f>
+              <c:f>Sheet1!$A$2:$A$15</c:f>
               <c:strCache>
-                <c:ptCount val="1"/>
+                <c:ptCount val="14"/>
                 <c:pt idx="0">
-                  <c:v>样本</c:v>
+                  <c:v>8.7</c:v>
+                </c:pt>
+                <c:pt idx="1">
+                  <c:v>8.8</c:v>
+                </c:pt>
+                <c:pt idx="2">
+                  <c:v>8.9</c:v>
+                </c:pt>
+                <c:pt idx="3">
+                  <c:v>8.10</c:v>
+                </c:pt>
+                <c:pt idx="4">
+                  <c:v>8.11</c:v>
+                </c:pt>
+                <c:pt idx="5">
+                  <c:v>8.12</c:v>
+                </c:pt>
+                <c:pt idx="6">
+                  <c:v>8.13</c:v>
+                </c:pt>
+                <c:pt idx="7">
+                  <c:v>8.14</c:v>
+                </c:pt>
+                <c:pt idx="8">
+                  <c:v>8.15</c:v>
+                </c:pt>
+                <c:pt idx="9">
+                  <c:v>8.16</c:v>
+                </c:pt>
+                <c:pt idx="10">
+                  <c:v>8.17</c:v>
+                </c:pt>
+                <c:pt idx="11">
+                  <c:v>8.18</c:v>
+                </c:pt>
+                <c:pt idx="12">
+                  <c:v>8.19</c:v>
+                </c:pt>
+                <c:pt idx="13">
+                  <c:v>8.20</c:v>
                 </c:pt>
               </c:strCache>
             </c:strRef>
           </c:cat>
           <c:val>
             <c:numRef>
-              <c:f>Sheet1!$B$2:$B$2</c:f>
+              <c:f>Sheet1!$B$2:$B$15</c:f>
               <c:numCache>
                 <c:formatCode>General</c:formatCode>
-                <c:ptCount val="1"/>
+                <c:ptCount val="14"/>
                 <c:pt idx="0">
-                  <c:v>749</c:v>
+                  <c:v>10.73</c:v>
+                </c:pt>
+                <c:pt idx="1">
+                  <c:v>10.65</c:v>
+                </c:pt>
+                <c:pt idx="2">
+                  <c:v>10.1</c:v>
+                </c:pt>
+                <c:pt idx="3">
+                  <c:v>10.1</c:v>
+                </c:pt>
+                <c:pt idx="4">
+                  <c:v>7.18</c:v>
+                </c:pt>
+                <c:pt idx="5">
+                  <c:v>7.46</c:v>
+                </c:pt>
+                <c:pt idx="6">
+                  <c:v>6.91</c:v>
+                </c:pt>
+                <c:pt idx="7">
+                  <c:v>7.2</c:v>
+                </c:pt>
+                <c:pt idx="8">
+                  <c:v>6.14</c:v>
+                </c:pt>
+                <c:pt idx="9">
+                  <c:v>5.98</c:v>
+                </c:pt>
+                <c:pt idx="10">
+                  <c:v>6.28</c:v>
+                </c:pt>
+                <c:pt idx="11">
+                  <c:v>5.69</c:v>
+                </c:pt>
+                <c:pt idx="12">
+                  <c:v>5.51</c:v>
+                </c:pt>
+                <c:pt idx="13">
+                  <c:v>4.93</c:v>
                 </c:pt>
               </c:numCache>
             </c:numRef>
           </c:val>
+          <c:smooth val="0"/>
         </c:ser>
-        <c:ser>
-          <c:idx val="1"/>
-          <c:order val="1"/>
-          <c:tx>
-            <c:strRef>
-              <c:f>Sheet1!$C$1</c:f>
-              <c:strCache>
-                <c:ptCount val="1"/>
-                <c:pt idx="0">
-                  <c:v>Agent 对</c:v>
-                </c:pt>
-              </c:strCache>
-            </c:strRef>
-          </c:tx>
-          <c:spPr>
-            <a:solidFill>
-              <a:srgbClr val="8DB8F5"/>
-            </a:solidFill>
-          </c:spPr>
-          <c:cat>
-            <c:strRef>
-              <c:f>Sheet1!$A$2:$A$2</c:f>
-              <c:strCache>
-                <c:ptCount val="1"/>
-                <c:pt idx="0">
-                  <c:v>样本</c:v>
-                </c:pt>
-              </c:strCache>
-            </c:strRef>
-          </c:cat>
-          <c:val>
-            <c:numRef>
-              <c:f>Sheet1!$C$2:$C$2</c:f>
-              <c:numCache>
-                <c:formatCode>General</c:formatCode>
-                <c:ptCount val="1"/>
-                <c:pt idx="0">
-                  <c:v>197</c:v>
-                </c:pt>
-              </c:numCache>
-            </c:numRef>
-          </c:val>
-        </c:ser>
-        <c:ser>
-          <c:idx val="2"/>
-          <c:order val="2"/>
-          <c:tx>
-            <c:strRef>
-              <c:f>Sheet1!$D$1</c:f>
-              <c:strCache>
-                <c:ptCount val="1"/>
-                <c:pt idx="0">
-                  <c:v>算法对、Agent 错</c:v>
-                </c:pt>
-              </c:strCache>
-            </c:strRef>
-          </c:tx>
-          <c:spPr>
-            <a:solidFill>
-              <a:srgbClr val="FF7A1A"/>
-            </a:solidFill>
-          </c:spPr>
-          <c:cat>
-            <c:strRef>
-              <c:f>Sheet1!$A$2:$A$2</c:f>
-              <c:strCache>
-                <c:ptCount val="1"/>
-                <c:pt idx="0">
-                  <c:v>样本</c:v>
-                </c:pt>
-              </c:strCache>
-            </c:strRef>
-          </c:cat>
-          <c:val>
-            <c:numRef>
-              <c:f>Sheet1!$D$2:$D$2</c:f>
-              <c:numCache>
-                <c:formatCode>General</c:formatCode>
-                <c:ptCount val="1"/>
-                <c:pt idx="0">
-                  <c:v>21</c:v>
-                </c:pt>
-              </c:numCache>
-            </c:numRef>
-          </c:val>
-        </c:ser>
-        <c:ser>
-          <c:idx val="3"/>
-          <c:order val="3"/>
-          <c:tx>
-            <c:strRef>
-              <c:f>Sheet1!$E$1</c:f>
-              <c:strCache>
-                <c:ptCount val="1"/>
-                <c:pt idx="0">
-                  <c:v>都错</c:v>
-                </c:pt>
-              </c:strCache>
-            </c:strRef>
-          </c:tx>
-          <c:spPr>
-            <a:solidFill>
-              <a:srgbClr val="7A8599"/>
-            </a:solidFill>
-          </c:spPr>
-          <c:cat>
-            <c:strRef>
-              <c:f>Sheet1!$A$2:$A$2</c:f>
-              <c:strCache>
-                <c:ptCount val="1"/>
-                <c:pt idx="0">
-                  <c:v>样本</c:v>
-                </c:pt>
-              </c:strCache>
-            </c:strRef>
-          </c:cat>
-          <c:val>
-            <c:numRef>
-              <c:f>Sheet1!$E$2:$E$2</c:f>
-              <c:numCache>
-                <c:formatCode>General</c:formatCode>
-                <c:ptCount val="1"/>
-                <c:pt idx="0">
-                  <c:v>33</c:v>
-                </c:pt>
-              </c:numCache>
-            </c:numRef>
-          </c:val>
-        </c:ser>
-        <c:gapWidth val="0"/>
-        <c:overlap val="100"/>
-        <c:axId val="-2068027336"/>
-        <c:axId val="-2113994440"/>
-      </c:barChart>
+        <c:marker val="1"/>
+        <c:smooth val="0"/>
+        <c:axId val="2118791784"/>
+        <c:axId val="2140495176"/>
+      </c:lineChart>
       <c:catAx>
-        <c:axId val="-2068027336"/>
+        <c:axId val="2118791784"/>
         <c:scaling>
           <c:orientation val="minMax"/>
         </c:scaling>
-        <c:delete/>
-        <c:axPos val="l"/>
-        <c:majorTickMark val="out"/>
+        <c:delete val="0"/>
+        <c:axPos val="b"/>
+        <c:majorTickMark val="none"/>
         <c:minorTickMark val="none"/>
-        <c:tickLblPos val="nextTo"/>
-        <c:crossAx val="-2113994440"/>
+        <c:tickLblPos val="none"/>
+        <c:spPr>
+          <a:ln>
+            <a:solidFill>
+              <a:srgbClr val="D3E2FB"/>
+            </a:solidFill>
+          </a:ln>
+        </c:spPr>
+        <c:crossAx val="2140495176"/>
         <c:crosses val="autoZero"/>
         <c:auto val="1"/>
         <c:lblAlgn val="ctr"/>
@@ -342,21 +325,23 @@
         <c:noMultiLvlLbl val="0"/>
       </c:catAx>
       <c:valAx>
-        <c:axId val="-2113994440"/>
+        <c:axId val="2140495176"/>
         <c:scaling>
-          <c:max val="1000.0"/>
+          <c:max val="13.0"/>
           <c:min val="0.0"/>
         </c:scaling>
         <c:delete/>
-        <c:axPos val="b"/>
+        <c:axPos val="l"/>
         <c:majorTickMark val="out"/>
         <c:minorTickMark val="none"/>
         <c:tickLblPos val="nextTo"/>
-        <c:crossAx val="-2068027336"/>
+        <c:crossAx val="2118791784"/>
         <c:crosses val="autoZero"/>
       </c:valAx>
     </c:plotArea>
+    <c:plotVisOnly val="1"/>
     <c:dispBlanksAs val="gap"/>
+    <c:showDLblsOverMax val="0"/>
   </c:chart>
   <c:txPr>
     <a:bodyPr/>
@@ -8285,7 +8270,7 @@
         </p:nvSpPr>
         <p:spPr>
           <a:xfrm>
-            <a:off x="502920" y="2148840"/>
+            <a:off x="502920" y="2121408"/>
             <a:ext cx="502920" cy="502920"/>
           </a:xfrm>
           <a:prstGeom prst="ellipse">
@@ -8335,7 +8320,7 @@
         </p:blipFill>
         <p:spPr>
           <a:xfrm>
-            <a:off x="628650" y="2274570"/>
+            <a:off x="628650" y="2247138"/>
             <a:ext cx="251460" cy="251460"/>
           </a:xfrm>
           <a:prstGeom prst="rect">
@@ -8351,7 +8336,7 @@
         </p:nvSpPr>
         <p:spPr>
           <a:xfrm>
-            <a:off x="1188720" y="2130552"/>
+            <a:off x="1188720" y="2103120"/>
             <a:ext cx="4709160" cy="329184"/>
           </a:xfrm>
           <a:prstGeom prst="rect">
@@ -8388,7 +8373,7 @@
         </p:nvSpPr>
         <p:spPr>
           <a:xfrm>
-            <a:off x="1188720" y="2478024"/>
+            <a:off x="1188720" y="2450591"/>
             <a:ext cx="4709160" cy="640080"/>
           </a:xfrm>
           <a:prstGeom prst="rect">
@@ -8465,7 +8450,7 @@
         </p:nvSpPr>
         <p:spPr>
           <a:xfrm>
-            <a:off x="502920" y="3200400"/>
+            <a:off x="502920" y="3218687"/>
             <a:ext cx="502920" cy="502920"/>
           </a:xfrm>
           <a:prstGeom prst="ellipse">
@@ -8515,7 +8500,7 @@
         </p:blipFill>
         <p:spPr>
           <a:xfrm>
-            <a:off x="628650" y="3326130"/>
+            <a:off x="628650" y="3344418"/>
             <a:ext cx="251460" cy="251460"/>
           </a:xfrm>
           <a:prstGeom prst="rect">
@@ -8531,7 +8516,7 @@
         </p:nvSpPr>
         <p:spPr>
           <a:xfrm>
-            <a:off x="1188720" y="3182112"/>
+            <a:off x="1188720" y="3200399"/>
             <a:ext cx="4709160" cy="329184"/>
           </a:xfrm>
           <a:prstGeom prst="rect">
@@ -8568,7 +8553,7 @@
         </p:nvSpPr>
         <p:spPr>
           <a:xfrm>
-            <a:off x="1188720" y="3529584"/>
+            <a:off x="1188720" y="3547871"/>
             <a:ext cx="4709160" cy="640080"/>
           </a:xfrm>
           <a:prstGeom prst="rect">
@@ -8606,6 +8591,35 @@
               <a:t>抽样 1,000 条线上 query，与算法业务标签逐条比对</a:t>
             </a:r>
           </a:p>
+          <a:p>
+            <a:pPr algn="l">
+              <a:spcBef>
+                <a:spcPts val="300"/>
+              </a:spcBef>
+            </a:pPr>
+            <a:r>
+              <a:rPr sz="900" b="0">
+                <a:solidFill>
+                  <a:srgbClr val="287DFA"/>
+                </a:solidFill>
+                <a:latin typeface="微软雅黑"/>
+                <a:ea typeface="微软雅黑"/>
+                <a:cs typeface="微软雅黑"/>
+              </a:rPr>
+              <a:t>●  </a:t>
+            </a:r>
+            <a:r>
+              <a:rPr sz="1300" b="0">
+                <a:solidFill>
+                  <a:srgbClr val="3D4757"/>
+                </a:solidFill>
+                <a:latin typeface="微软雅黑"/>
+                <a:ea typeface="微软雅黑"/>
+                <a:cs typeface="微软雅黑"/>
+              </a:rPr>
+              <a:t>针对“算法正确、Agent 错误”的样本，逐类修订分类标准</a:t>
+            </a:r>
+          </a:p>
         </p:txBody>
       </p:sp>
       <p:sp>
@@ -8616,8 +8630,8 @@
         </p:nvSpPr>
         <p:spPr>
           <a:xfrm>
-            <a:off x="457200" y="4617720"/>
-            <a:ext cx="5486400" cy="1463040"/>
+            <a:off x="457200" y="4343400"/>
+            <a:ext cx="5486400" cy="1737360"/>
           </a:xfrm>
           <a:prstGeom prst="roundRect">
             <a:avLst>
@@ -8660,7 +8674,7 @@
         </p:nvSpPr>
         <p:spPr>
           <a:xfrm>
-            <a:off x="731520" y="4690872"/>
+            <a:off x="731520" y="4434840"/>
             <a:ext cx="1828800" cy="274320"/>
           </a:xfrm>
           <a:prstGeom prst="rect">
@@ -8691,14 +8705,536 @@
       </p:sp>
       <p:sp>
         <p:nvSpPr>
-          <p:cNvPr id="16" name="TextBox 15"/>
+          <p:cNvPr id="16" name="Rounded Rectangle 15"/>
+          <p:cNvSpPr/>
+          <p:nvPr/>
+        </p:nvSpPr>
+        <p:spPr>
+          <a:xfrm>
+            <a:off x="6245352" y="1481328"/>
+            <a:ext cx="5486400" cy="502920"/>
+          </a:xfrm>
+          <a:prstGeom prst="roundRect">
+            <a:avLst>
+              <a:gd name="adj" fmla="val 6000"/>
+            </a:avLst>
+          </a:prstGeom>
+          <a:solidFill>
+            <a:srgbClr val="287DFA"/>
+          </a:solidFill>
+          <a:ln>
+            <a:noFill/>
+          </a:ln>
+          <a:effectLst/>
+        </p:spPr>
+        <p:style>
+          <a:lnRef idx="1">
+            <a:schemeClr val="accent1"/>
+          </a:lnRef>
+          <a:fillRef idx="3">
+            <a:schemeClr val="accent1"/>
+          </a:fillRef>
+          <a:effectRef idx="2">
+            <a:schemeClr val="accent1"/>
+          </a:effectRef>
+          <a:fontRef idx="minor">
+            <a:schemeClr val="lt1"/>
+          </a:fontRef>
+        </p:style>
+        <p:txBody>
+          <a:bodyPr rtlCol="0" anchor="ctr"/>
+          <a:lstStyle/>
+          <a:p/>
+        </p:txBody>
+      </p:sp>
+      <p:sp>
+        <p:nvSpPr>
+          <p:cNvPr id="17" name="TextBox 16"/>
           <p:cNvSpPr txBox="1"/>
           <p:nvPr/>
         </p:nvSpPr>
         <p:spPr>
           <a:xfrm>
-            <a:off x="731520" y="4983480"/>
-            <a:ext cx="2194560" cy="457200"/>
+            <a:off x="6245352" y="1481328"/>
+            <a:ext cx="5486400" cy="502920"/>
+          </a:xfrm>
+          <a:prstGeom prst="rect">
+            <a:avLst/>
+          </a:prstGeom>
+          <a:noFill/>
+        </p:spPr>
+        <p:txBody>
+          <a:bodyPr wrap="square" lIns="0" rIns="0" tIns="0" bIns="0" anchor="ctr">
+            <a:spAutoFit/>
+          </a:bodyPr>
+          <a:lstStyle/>
+          <a:p>
+            <a:pPr algn="ctr"/>
+            <a:r>
+              <a:rPr sz="1800" b="1">
+                <a:solidFill>
+                  <a:srgbClr val="FFFFFF"/>
+                </a:solidFill>
+                <a:latin typeface="微软雅黑"/>
+                <a:ea typeface="微软雅黑"/>
+                <a:cs typeface="微软雅黑"/>
+              </a:rPr>
+              <a:t>拒答治理：界定什么不属于火车</a:t>
+            </a:r>
+          </a:p>
+        </p:txBody>
+      </p:sp>
+      <p:sp>
+        <p:nvSpPr>
+          <p:cNvPr id="18" name="icon-circle"/>
+          <p:cNvSpPr/>
+          <p:nvPr/>
+        </p:nvSpPr>
+        <p:spPr>
+          <a:xfrm>
+            <a:off x="6291072" y="2121408"/>
+            <a:ext cx="502920" cy="502920"/>
+          </a:xfrm>
+          <a:prstGeom prst="ellipse">
+            <a:avLst/>
+          </a:prstGeom>
+          <a:solidFill>
+            <a:srgbClr val="FF7A1A"/>
+          </a:solidFill>
+          <a:ln>
+            <a:noFill/>
+          </a:ln>
+          <a:effectLst/>
+        </p:spPr>
+        <p:style>
+          <a:lnRef idx="1">
+            <a:schemeClr val="accent1"/>
+          </a:lnRef>
+          <a:fillRef idx="3">
+            <a:schemeClr val="accent1"/>
+          </a:fillRef>
+          <a:effectRef idx="2">
+            <a:schemeClr val="accent1"/>
+          </a:effectRef>
+          <a:fontRef idx="minor">
+            <a:schemeClr val="lt1"/>
+          </a:fontRef>
+        </p:style>
+        <p:txBody>
+          <a:bodyPr rtlCol="0" anchor="ctr"/>
+          <a:lstStyle/>
+          <a:p/>
+        </p:txBody>
+      </p:sp>
+      <p:pic>
+        <p:nvPicPr>
+          <p:cNvPr id="19" name="Picture 18" descr="FaTriangleExclamation_w.png"/>
+          <p:cNvPicPr>
+            <a:picLocks noChangeAspect="1"/>
+          </p:cNvPicPr>
+          <p:nvPr/>
+        </p:nvPicPr>
+        <p:blipFill>
+          <a:blip r:embed="rId3"/>
+          <a:stretch>
+            <a:fillRect/>
+          </a:stretch>
+        </p:blipFill>
+        <p:spPr>
+          <a:xfrm>
+            <a:off x="6416802" y="2247138"/>
+            <a:ext cx="251460" cy="251460"/>
+          </a:xfrm>
+          <a:prstGeom prst="rect">
+            <a:avLst/>
+          </a:prstGeom>
+        </p:spPr>
+      </p:pic>
+      <p:sp>
+        <p:nvSpPr>
+          <p:cNvPr id="20" name="TextBox 19"/>
+          <p:cNvSpPr txBox="1"/>
+          <p:nvPr/>
+        </p:nvSpPr>
+        <p:spPr>
+          <a:xfrm>
+            <a:off x="6976872" y="2103120"/>
+            <a:ext cx="4709160" cy="329184"/>
+          </a:xfrm>
+          <a:prstGeom prst="rect">
+            <a:avLst/>
+          </a:prstGeom>
+          <a:noFill/>
+        </p:spPr>
+        <p:txBody>
+          <a:bodyPr wrap="square" lIns="0" rIns="0" tIns="0" bIns="0" anchor="t">
+            <a:spAutoFit/>
+          </a:bodyPr>
+          <a:lstStyle/>
+          <a:p>
+            <a:pPr algn="l"/>
+            <a:r>
+              <a:rPr sz="1500" b="1">
+                <a:solidFill>
+                  <a:srgbClr val="FF7A1A"/>
+                </a:solidFill>
+                <a:latin typeface="微软雅黑"/>
+                <a:ea typeface="微软雅黑"/>
+                <a:cs typeface="微软雅黑"/>
+              </a:rPr>
+              <a:t>问题：火车 Agent 拒答率偏高</a:t>
+            </a:r>
+          </a:p>
+        </p:txBody>
+      </p:sp>
+      <p:sp>
+        <p:nvSpPr>
+          <p:cNvPr id="21" name="TextBox 20"/>
+          <p:cNvSpPr txBox="1"/>
+          <p:nvPr/>
+        </p:nvSpPr>
+        <p:spPr>
+          <a:xfrm>
+            <a:off x="6976872" y="2450591"/>
+            <a:ext cx="4709160" cy="640080"/>
+          </a:xfrm>
+          <a:prstGeom prst="rect">
+            <a:avLst/>
+          </a:prstGeom>
+          <a:noFill/>
+        </p:spPr>
+        <p:txBody>
+          <a:bodyPr wrap="square" lIns="0" rIns="0" tIns="0" bIns="0" anchor="t">
+            <a:spAutoFit/>
+          </a:bodyPr>
+          <a:lstStyle/>
+          <a:p>
+            <a:pPr algn="l"/>
+            <a:r>
+              <a:rPr sz="900" b="0">
+                <a:solidFill>
+                  <a:srgbClr val="FF7A1A"/>
+                </a:solidFill>
+                <a:latin typeface="微软雅黑"/>
+                <a:ea typeface="微软雅黑"/>
+                <a:cs typeface="微软雅黑"/>
+              </a:rPr>
+              <a:t>●  </a:t>
+            </a:r>
+            <a:r>
+              <a:rPr sz="1300" b="0">
+                <a:solidFill>
+                  <a:srgbClr val="3D4757"/>
+                </a:solidFill>
+                <a:latin typeface="微软雅黑"/>
+                <a:ea typeface="微软雅黑"/>
+                <a:cs typeface="微软雅黑"/>
+              </a:rPr>
+              <a:t>约一半问题被拒答，其中部分是被错误分发的非火车问题</a:t>
+            </a:r>
+          </a:p>
+          <a:p>
+            <a:pPr algn="l">
+              <a:spcBef>
+                <a:spcPts val="300"/>
+              </a:spcBef>
+            </a:pPr>
+            <a:r>
+              <a:rPr sz="900" b="0">
+                <a:solidFill>
+                  <a:srgbClr val="FF7A1A"/>
+                </a:solidFill>
+                <a:latin typeface="微软雅黑"/>
+                <a:ea typeface="微软雅黑"/>
+                <a:cs typeface="微软雅黑"/>
+              </a:rPr>
+              <a:t>●  </a:t>
+            </a:r>
+            <a:r>
+              <a:rPr sz="1300" b="0">
+                <a:solidFill>
+                  <a:srgbClr val="3D4757"/>
+                </a:solidFill>
+                <a:latin typeface="微软雅黑"/>
+                <a:ea typeface="微软雅黑"/>
+                <a:cs typeface="微软雅黑"/>
+              </a:rPr>
+              <a:t>这类问题在火车 Agent 内无法回答，只能从上游分发解决</a:t>
+            </a:r>
+          </a:p>
+        </p:txBody>
+      </p:sp>
+      <p:sp>
+        <p:nvSpPr>
+          <p:cNvPr id="22" name="icon-circle"/>
+          <p:cNvSpPr/>
+          <p:nvPr/>
+        </p:nvSpPr>
+        <p:spPr>
+          <a:xfrm>
+            <a:off x="6291072" y="3218687"/>
+            <a:ext cx="502920" cy="502920"/>
+          </a:xfrm>
+          <a:prstGeom prst="ellipse">
+            <a:avLst/>
+          </a:prstGeom>
+          <a:solidFill>
+            <a:srgbClr val="287DFA"/>
+          </a:solidFill>
+          <a:ln>
+            <a:noFill/>
+          </a:ln>
+          <a:effectLst/>
+        </p:spPr>
+        <p:style>
+          <a:lnRef idx="1">
+            <a:schemeClr val="accent1"/>
+          </a:lnRef>
+          <a:fillRef idx="3">
+            <a:schemeClr val="accent1"/>
+          </a:fillRef>
+          <a:effectRef idx="2">
+            <a:schemeClr val="accent1"/>
+          </a:effectRef>
+          <a:fontRef idx="minor">
+            <a:schemeClr val="lt1"/>
+          </a:fontRef>
+        </p:style>
+        <p:txBody>
+          <a:bodyPr rtlCol="0" anchor="ctr"/>
+          <a:lstStyle/>
+          <a:p/>
+        </p:txBody>
+      </p:sp>
+      <p:pic>
+        <p:nvPicPr>
+          <p:cNvPr id="23" name="Picture 22" descr="FaFilter_w.png"/>
+          <p:cNvPicPr>
+            <a:picLocks noChangeAspect="1"/>
+          </p:cNvPicPr>
+          <p:nvPr/>
+        </p:nvPicPr>
+        <p:blipFill>
+          <a:blip r:embed="rId5"/>
+          <a:stretch>
+            <a:fillRect/>
+          </a:stretch>
+        </p:blipFill>
+        <p:spPr>
+          <a:xfrm>
+            <a:off x="6416802" y="3344418"/>
+            <a:ext cx="251460" cy="251460"/>
+          </a:xfrm>
+          <a:prstGeom prst="rect">
+            <a:avLst/>
+          </a:prstGeom>
+        </p:spPr>
+      </p:pic>
+      <p:sp>
+        <p:nvSpPr>
+          <p:cNvPr id="24" name="TextBox 23"/>
+          <p:cNvSpPr txBox="1"/>
+          <p:nvPr/>
+        </p:nvSpPr>
+        <p:spPr>
+          <a:xfrm>
+            <a:off x="6976872" y="3200399"/>
+            <a:ext cx="4709160" cy="329184"/>
+          </a:xfrm>
+          <a:prstGeom prst="rect">
+            <a:avLst/>
+          </a:prstGeom>
+          <a:noFill/>
+        </p:spPr>
+        <p:txBody>
+          <a:bodyPr wrap="square" lIns="0" rIns="0" tIns="0" bIns="0" anchor="t">
+            <a:spAutoFit/>
+          </a:bodyPr>
+          <a:lstStyle/>
+          <a:p>
+            <a:pPr algn="l"/>
+            <a:r>
+              <a:rPr sz="1500" b="1">
+                <a:solidFill>
+                  <a:srgbClr val="287DFA"/>
+                </a:solidFill>
+                <a:latin typeface="微软雅黑"/>
+                <a:ea typeface="微软雅黑"/>
+                <a:cs typeface="微软雅黑"/>
+              </a:rPr>
+              <a:t>方案：推进能力覆盖的同时，优先治理错误分发</a:t>
+            </a:r>
+          </a:p>
+        </p:txBody>
+      </p:sp>
+      <p:sp>
+        <p:nvSpPr>
+          <p:cNvPr id="25" name="TextBox 24"/>
+          <p:cNvSpPr txBox="1"/>
+          <p:nvPr/>
+        </p:nvSpPr>
+        <p:spPr>
+          <a:xfrm>
+            <a:off x="6976872" y="3547871"/>
+            <a:ext cx="4709160" cy="640080"/>
+          </a:xfrm>
+          <a:prstGeom prst="rect">
+            <a:avLst/>
+          </a:prstGeom>
+          <a:noFill/>
+        </p:spPr>
+        <p:txBody>
+          <a:bodyPr wrap="square" lIns="0" rIns="0" tIns="0" bIns="0" anchor="t">
+            <a:spAutoFit/>
+          </a:bodyPr>
+          <a:lstStyle/>
+          <a:p>
+            <a:pPr algn="l"/>
+            <a:r>
+              <a:rPr sz="900" b="0">
+                <a:solidFill>
+                  <a:srgbClr val="287DFA"/>
+                </a:solidFill>
+                <a:latin typeface="微软雅黑"/>
+                <a:ea typeface="微软雅黑"/>
+                <a:cs typeface="微软雅黑"/>
+              </a:rPr>
+              <a:t>●  </a:t>
+            </a:r>
+            <a:r>
+              <a:rPr sz="1300" b="0">
+                <a:solidFill>
+                  <a:srgbClr val="3D4757"/>
+                </a:solidFill>
+                <a:latin typeface="微软雅黑"/>
+                <a:ea typeface="微软雅黑"/>
+                <a:cs typeface="微软雅黑"/>
+              </a:rPr>
+              <a:t>人工核查 1,000 多条拒答 query，整理火车问题的边界</a:t>
+            </a:r>
+          </a:p>
+          <a:p>
+            <a:pPr algn="l">
+              <a:spcBef>
+                <a:spcPts val="300"/>
+              </a:spcBef>
+            </a:pPr>
+            <a:r>
+              <a:rPr sz="900" b="0">
+                <a:solidFill>
+                  <a:srgbClr val="287DFA"/>
+                </a:solidFill>
+                <a:latin typeface="微软雅黑"/>
+                <a:ea typeface="微软雅黑"/>
+                <a:cs typeface="微软雅黑"/>
+              </a:rPr>
+              <a:t>●  </a:t>
+            </a:r>
+            <a:r>
+              <a:rPr sz="1300" b="0">
+                <a:solidFill>
+                  <a:srgbClr val="3D4757"/>
+                </a:solidFill>
+                <a:latin typeface="微软雅黑"/>
+                <a:ea typeface="微软雅黑"/>
+                <a:cs typeface="微软雅黑"/>
+              </a:rPr>
+              <a:t>推动问道调整分发，非火车问题交由其他 Agent 回答</a:t>
+            </a:r>
+          </a:p>
+        </p:txBody>
+      </p:sp>
+      <p:sp>
+        <p:nvSpPr>
+          <p:cNvPr id="26" name="Rounded Rectangle 25"/>
+          <p:cNvSpPr/>
+          <p:nvPr/>
+        </p:nvSpPr>
+        <p:spPr>
+          <a:xfrm>
+            <a:off x="6245352" y="4343400"/>
+            <a:ext cx="5486400" cy="1737360"/>
+          </a:xfrm>
+          <a:prstGeom prst="roundRect">
+            <a:avLst>
+              <a:gd name="adj" fmla="val 6000"/>
+            </a:avLst>
+          </a:prstGeom>
+          <a:solidFill>
+            <a:srgbClr val="EAF2FF"/>
+          </a:solidFill>
+          <a:ln>
+            <a:noFill/>
+          </a:ln>
+          <a:effectLst/>
+        </p:spPr>
+        <p:style>
+          <a:lnRef idx="1">
+            <a:schemeClr val="accent1"/>
+          </a:lnRef>
+          <a:fillRef idx="3">
+            <a:schemeClr val="accent1"/>
+          </a:fillRef>
+          <a:effectRef idx="2">
+            <a:schemeClr val="accent1"/>
+          </a:effectRef>
+          <a:fontRef idx="minor">
+            <a:schemeClr val="lt1"/>
+          </a:fontRef>
+        </p:style>
+        <p:txBody>
+          <a:bodyPr rtlCol="0" anchor="ctr"/>
+          <a:lstStyle/>
+          <a:p/>
+        </p:txBody>
+      </p:sp>
+      <p:sp>
+        <p:nvSpPr>
+          <p:cNvPr id="27" name="TextBox 26"/>
+          <p:cNvSpPr txBox="1"/>
+          <p:nvPr/>
+        </p:nvSpPr>
+        <p:spPr>
+          <a:xfrm>
+            <a:off x="6519672" y="4434840"/>
+            <a:ext cx="1828800" cy="274320"/>
+          </a:xfrm>
+          <a:prstGeom prst="rect">
+            <a:avLst/>
+          </a:prstGeom>
+          <a:noFill/>
+        </p:spPr>
+        <p:txBody>
+          <a:bodyPr wrap="square" lIns="0" rIns="0" tIns="0" bIns="0" anchor="t">
+            <a:spAutoFit/>
+          </a:bodyPr>
+          <a:lstStyle/>
+          <a:p>
+            <a:pPr algn="l"/>
+            <a:r>
+              <a:rPr sz="1400" b="1">
+                <a:solidFill>
+                  <a:srgbClr val="287DFA"/>
+                </a:solidFill>
+                <a:latin typeface="微软雅黑"/>
+                <a:ea typeface="微软雅黑"/>
+                <a:cs typeface="微软雅黑"/>
+              </a:rPr>
+              <a:t>结果</a:t>
+            </a:r>
+          </a:p>
+        </p:txBody>
+      </p:sp>
+      <p:sp>
+        <p:nvSpPr>
+          <p:cNvPr id="28" name="TextBox 27"/>
+          <p:cNvSpPr txBox="1"/>
+          <p:nvPr/>
+        </p:nvSpPr>
+        <p:spPr>
+          <a:xfrm>
+            <a:off x="731520" y="4800600"/>
+            <a:ext cx="2103120" cy="457200"/>
           </a:xfrm>
           <a:prstGeom prst="rect">
             <a:avLst/>
@@ -8728,13 +9264,13 @@
       </p:sp>
       <p:sp>
         <p:nvSpPr>
-          <p:cNvPr id="17" name="TextBox 16"/>
+          <p:cNvPr id="29" name="TextBox 28"/>
           <p:cNvSpPr txBox="1"/>
           <p:nvPr/>
         </p:nvSpPr>
         <p:spPr>
           <a:xfrm>
-            <a:off x="2926080" y="4983480"/>
+            <a:off x="2834639" y="4800600"/>
             <a:ext cx="1965960" cy="457200"/>
           </a:xfrm>
           <a:prstGeom prst="rect">
@@ -8765,13 +9301,13 @@
       </p:sp>
       <p:sp>
         <p:nvSpPr>
-          <p:cNvPr id="18" name="Rounded Rectangle 17"/>
+          <p:cNvPr id="30" name="Rounded Rectangle 29"/>
           <p:cNvSpPr/>
           <p:nvPr/>
         </p:nvSpPr>
         <p:spPr>
           <a:xfrm>
-            <a:off x="4864608" y="5056632"/>
+            <a:off x="4709160" y="4873752"/>
             <a:ext cx="1005840" cy="310896"/>
           </a:xfrm>
           <a:prstGeom prst="roundRect">
@@ -8811,13 +9347,13 @@
       </p:sp>
       <p:sp>
         <p:nvSpPr>
-          <p:cNvPr id="19" name="TextBox 18"/>
+          <p:cNvPr id="31" name="TextBox 30"/>
           <p:cNvSpPr txBox="1"/>
           <p:nvPr/>
         </p:nvSpPr>
         <p:spPr>
           <a:xfrm>
-            <a:off x="4864608" y="5056632"/>
+            <a:off x="4709160" y="4873752"/>
             <a:ext cx="1005840" cy="310896"/>
           </a:xfrm>
           <a:prstGeom prst="rect">
@@ -8848,14 +9384,14 @@
       </p:sp>
       <p:sp>
         <p:nvSpPr>
-          <p:cNvPr id="20" name="TextBox 19"/>
+          <p:cNvPr id="32" name="TextBox 31"/>
           <p:cNvSpPr txBox="1"/>
           <p:nvPr/>
         </p:nvSpPr>
         <p:spPr>
           <a:xfrm>
-            <a:off x="731520" y="5495544"/>
-            <a:ext cx="2194560" cy="457200"/>
+            <a:off x="731520" y="5349240"/>
+            <a:ext cx="2103120" cy="457200"/>
           </a:xfrm>
           <a:prstGeom prst="rect">
             <a:avLst/>
@@ -8885,13 +9421,13 @@
       </p:sp>
       <p:sp>
         <p:nvSpPr>
-          <p:cNvPr id="21" name="TextBox 20"/>
+          <p:cNvPr id="33" name="TextBox 32"/>
           <p:cNvSpPr txBox="1"/>
           <p:nvPr/>
         </p:nvSpPr>
         <p:spPr>
           <a:xfrm>
-            <a:off x="2926080" y="5495544"/>
+            <a:off x="2834639" y="5349240"/>
             <a:ext cx="1965960" cy="457200"/>
           </a:xfrm>
           <a:prstGeom prst="rect">
@@ -8922,13 +9458,13 @@
       </p:sp>
       <p:sp>
         <p:nvSpPr>
-          <p:cNvPr id="22" name="Rounded Rectangle 21"/>
+          <p:cNvPr id="34" name="Rounded Rectangle 33"/>
           <p:cNvSpPr/>
           <p:nvPr/>
         </p:nvSpPr>
         <p:spPr>
           <a:xfrm>
-            <a:off x="4864608" y="5568696"/>
+            <a:off x="4709160" y="5422392"/>
             <a:ext cx="1005840" cy="310896"/>
           </a:xfrm>
           <a:prstGeom prst="roundRect">
@@ -8968,13 +9504,13 @@
       </p:sp>
       <p:sp>
         <p:nvSpPr>
-          <p:cNvPr id="23" name="TextBox 22"/>
+          <p:cNvPr id="35" name="TextBox 34"/>
           <p:cNvSpPr txBox="1"/>
           <p:nvPr/>
         </p:nvSpPr>
         <p:spPr>
           <a:xfrm>
-            <a:off x="4864608" y="5568696"/>
+            <a:off x="4709160" y="5422392"/>
             <a:ext cx="1005840" cy="310896"/>
           </a:xfrm>
           <a:prstGeom prst="rect">
@@ -9005,536 +9541,14 @@
       </p:sp>
       <p:sp>
         <p:nvSpPr>
-          <p:cNvPr id="24" name="Rounded Rectangle 23"/>
-          <p:cNvSpPr/>
-          <p:nvPr/>
-        </p:nvSpPr>
-        <p:spPr>
-          <a:xfrm>
-            <a:off x="6245352" y="1481328"/>
-            <a:ext cx="5486400" cy="502920"/>
-          </a:xfrm>
-          <a:prstGeom prst="roundRect">
-            <a:avLst>
-              <a:gd name="adj" fmla="val 6000"/>
-            </a:avLst>
-          </a:prstGeom>
-          <a:solidFill>
-            <a:srgbClr val="287DFA"/>
-          </a:solidFill>
-          <a:ln>
-            <a:noFill/>
-          </a:ln>
-          <a:effectLst/>
-        </p:spPr>
-        <p:style>
-          <a:lnRef idx="1">
-            <a:schemeClr val="accent1"/>
-          </a:lnRef>
-          <a:fillRef idx="3">
-            <a:schemeClr val="accent1"/>
-          </a:fillRef>
-          <a:effectRef idx="2">
-            <a:schemeClr val="accent1"/>
-          </a:effectRef>
-          <a:fontRef idx="minor">
-            <a:schemeClr val="lt1"/>
-          </a:fontRef>
-        </p:style>
-        <p:txBody>
-          <a:bodyPr rtlCol="0" anchor="ctr"/>
-          <a:lstStyle/>
-          <a:p/>
-        </p:txBody>
-      </p:sp>
-      <p:sp>
-        <p:nvSpPr>
-          <p:cNvPr id="25" name="TextBox 24"/>
-          <p:cNvSpPr txBox="1"/>
-          <p:nvPr/>
-        </p:nvSpPr>
-        <p:spPr>
-          <a:xfrm>
-            <a:off x="6245352" y="1481328"/>
-            <a:ext cx="5486400" cy="502920"/>
-          </a:xfrm>
-          <a:prstGeom prst="rect">
-            <a:avLst/>
-          </a:prstGeom>
-          <a:noFill/>
-        </p:spPr>
-        <p:txBody>
-          <a:bodyPr wrap="square" lIns="0" rIns="0" tIns="0" bIns="0" anchor="ctr">
-            <a:spAutoFit/>
-          </a:bodyPr>
-          <a:lstStyle/>
-          <a:p>
-            <a:pPr algn="ctr"/>
-            <a:r>
-              <a:rPr sz="1800" b="1">
-                <a:solidFill>
-                  <a:srgbClr val="FFFFFF"/>
-                </a:solidFill>
-                <a:latin typeface="微软雅黑"/>
-                <a:ea typeface="微软雅黑"/>
-                <a:cs typeface="微软雅黑"/>
-              </a:rPr>
-              <a:t>拒答治理：界定什么不属于火车</a:t>
-            </a:r>
-          </a:p>
-        </p:txBody>
-      </p:sp>
-      <p:sp>
-        <p:nvSpPr>
-          <p:cNvPr id="26" name="icon-circle"/>
-          <p:cNvSpPr/>
-          <p:nvPr/>
-        </p:nvSpPr>
-        <p:spPr>
-          <a:xfrm>
-            <a:off x="6291072" y="2148840"/>
-            <a:ext cx="502920" cy="502920"/>
-          </a:xfrm>
-          <a:prstGeom prst="ellipse">
-            <a:avLst/>
-          </a:prstGeom>
-          <a:solidFill>
-            <a:srgbClr val="FF7A1A"/>
-          </a:solidFill>
-          <a:ln>
-            <a:noFill/>
-          </a:ln>
-          <a:effectLst/>
-        </p:spPr>
-        <p:style>
-          <a:lnRef idx="1">
-            <a:schemeClr val="accent1"/>
-          </a:lnRef>
-          <a:fillRef idx="3">
-            <a:schemeClr val="accent1"/>
-          </a:fillRef>
-          <a:effectRef idx="2">
-            <a:schemeClr val="accent1"/>
-          </a:effectRef>
-          <a:fontRef idx="minor">
-            <a:schemeClr val="lt1"/>
-          </a:fontRef>
-        </p:style>
-        <p:txBody>
-          <a:bodyPr rtlCol="0" anchor="ctr"/>
-          <a:lstStyle/>
-          <a:p/>
-        </p:txBody>
-      </p:sp>
-      <p:pic>
-        <p:nvPicPr>
-          <p:cNvPr id="27" name="Picture 26" descr="FaTriangleExclamation_w.png"/>
-          <p:cNvPicPr>
-            <a:picLocks noChangeAspect="1"/>
-          </p:cNvPicPr>
-          <p:nvPr/>
-        </p:nvPicPr>
-        <p:blipFill>
-          <a:blip r:embed="rId3"/>
-          <a:stretch>
-            <a:fillRect/>
-          </a:stretch>
-        </p:blipFill>
-        <p:spPr>
-          <a:xfrm>
-            <a:off x="6416802" y="2274570"/>
-            <a:ext cx="251460" cy="251460"/>
-          </a:xfrm>
-          <a:prstGeom prst="rect">
-            <a:avLst/>
-          </a:prstGeom>
-        </p:spPr>
-      </p:pic>
-      <p:sp>
-        <p:nvSpPr>
-          <p:cNvPr id="28" name="TextBox 27"/>
-          <p:cNvSpPr txBox="1"/>
-          <p:nvPr/>
-        </p:nvSpPr>
-        <p:spPr>
-          <a:xfrm>
-            <a:off x="6976872" y="2130552"/>
-            <a:ext cx="4709160" cy="329184"/>
-          </a:xfrm>
-          <a:prstGeom prst="rect">
-            <a:avLst/>
-          </a:prstGeom>
-          <a:noFill/>
-        </p:spPr>
-        <p:txBody>
-          <a:bodyPr wrap="square" lIns="0" rIns="0" tIns="0" bIns="0" anchor="t">
-            <a:spAutoFit/>
-          </a:bodyPr>
-          <a:lstStyle/>
-          <a:p>
-            <a:pPr algn="l"/>
-            <a:r>
-              <a:rPr sz="1500" b="1">
-                <a:solidFill>
-                  <a:srgbClr val="FF7A1A"/>
-                </a:solidFill>
-                <a:latin typeface="微软雅黑"/>
-                <a:ea typeface="微软雅黑"/>
-                <a:cs typeface="微软雅黑"/>
-              </a:rPr>
-              <a:t>问题：火车 Agent 拒答率偏高</a:t>
-            </a:r>
-          </a:p>
-        </p:txBody>
-      </p:sp>
-      <p:sp>
-        <p:nvSpPr>
-          <p:cNvPr id="29" name="TextBox 28"/>
-          <p:cNvSpPr txBox="1"/>
-          <p:nvPr/>
-        </p:nvSpPr>
-        <p:spPr>
-          <a:xfrm>
-            <a:off x="6976872" y="2478024"/>
-            <a:ext cx="4709160" cy="640080"/>
-          </a:xfrm>
-          <a:prstGeom prst="rect">
-            <a:avLst/>
-          </a:prstGeom>
-          <a:noFill/>
-        </p:spPr>
-        <p:txBody>
-          <a:bodyPr wrap="square" lIns="0" rIns="0" tIns="0" bIns="0" anchor="t">
-            <a:spAutoFit/>
-          </a:bodyPr>
-          <a:lstStyle/>
-          <a:p>
-            <a:pPr algn="l"/>
-            <a:r>
-              <a:rPr sz="900" b="0">
-                <a:solidFill>
-                  <a:srgbClr val="FF7A1A"/>
-                </a:solidFill>
-                <a:latin typeface="微软雅黑"/>
-                <a:ea typeface="微软雅黑"/>
-                <a:cs typeface="微软雅黑"/>
-              </a:rPr>
-              <a:t>●  </a:t>
-            </a:r>
-            <a:r>
-              <a:rPr sz="1300" b="0">
-                <a:solidFill>
-                  <a:srgbClr val="3D4757"/>
-                </a:solidFill>
-                <a:latin typeface="微软雅黑"/>
-                <a:ea typeface="微软雅黑"/>
-                <a:cs typeface="微软雅黑"/>
-              </a:rPr>
-              <a:t>约一半问题被拒答，其中部分是被错误分发的非火车问题</a:t>
-            </a:r>
-          </a:p>
-          <a:p>
-            <a:pPr algn="l">
-              <a:spcBef>
-                <a:spcPts val="300"/>
-              </a:spcBef>
-            </a:pPr>
-            <a:r>
-              <a:rPr sz="900" b="0">
-                <a:solidFill>
-                  <a:srgbClr val="FF7A1A"/>
-                </a:solidFill>
-                <a:latin typeface="微软雅黑"/>
-                <a:ea typeface="微软雅黑"/>
-                <a:cs typeface="微软雅黑"/>
-              </a:rPr>
-              <a:t>●  </a:t>
-            </a:r>
-            <a:r>
-              <a:rPr sz="1300" b="0">
-                <a:solidFill>
-                  <a:srgbClr val="3D4757"/>
-                </a:solidFill>
-                <a:latin typeface="微软雅黑"/>
-                <a:ea typeface="微软雅黑"/>
-                <a:cs typeface="微软雅黑"/>
-              </a:rPr>
-              <a:t>这类问题在火车 Agent 内无法回答，只能从上游分发解决</a:t>
-            </a:r>
-          </a:p>
-        </p:txBody>
-      </p:sp>
-      <p:sp>
-        <p:nvSpPr>
-          <p:cNvPr id="30" name="icon-circle"/>
-          <p:cNvSpPr/>
-          <p:nvPr/>
-        </p:nvSpPr>
-        <p:spPr>
-          <a:xfrm>
-            <a:off x="6291072" y="3200400"/>
-            <a:ext cx="502920" cy="502920"/>
-          </a:xfrm>
-          <a:prstGeom prst="ellipse">
-            <a:avLst/>
-          </a:prstGeom>
-          <a:solidFill>
-            <a:srgbClr val="287DFA"/>
-          </a:solidFill>
-          <a:ln>
-            <a:noFill/>
-          </a:ln>
-          <a:effectLst/>
-        </p:spPr>
-        <p:style>
-          <a:lnRef idx="1">
-            <a:schemeClr val="accent1"/>
-          </a:lnRef>
-          <a:fillRef idx="3">
-            <a:schemeClr val="accent1"/>
-          </a:fillRef>
-          <a:effectRef idx="2">
-            <a:schemeClr val="accent1"/>
-          </a:effectRef>
-          <a:fontRef idx="minor">
-            <a:schemeClr val="lt1"/>
-          </a:fontRef>
-        </p:style>
-        <p:txBody>
-          <a:bodyPr rtlCol="0" anchor="ctr"/>
-          <a:lstStyle/>
-          <a:p/>
-        </p:txBody>
-      </p:sp>
-      <p:pic>
-        <p:nvPicPr>
-          <p:cNvPr id="31" name="Picture 30" descr="FaFilter_w.png"/>
-          <p:cNvPicPr>
-            <a:picLocks noChangeAspect="1"/>
-          </p:cNvPicPr>
-          <p:nvPr/>
-        </p:nvPicPr>
-        <p:blipFill>
-          <a:blip r:embed="rId5"/>
-          <a:stretch>
-            <a:fillRect/>
-          </a:stretch>
-        </p:blipFill>
-        <p:spPr>
-          <a:xfrm>
-            <a:off x="6416802" y="3326130"/>
-            <a:ext cx="251460" cy="251460"/>
-          </a:xfrm>
-          <a:prstGeom prst="rect">
-            <a:avLst/>
-          </a:prstGeom>
-        </p:spPr>
-      </p:pic>
-      <p:sp>
-        <p:nvSpPr>
-          <p:cNvPr id="32" name="TextBox 31"/>
-          <p:cNvSpPr txBox="1"/>
-          <p:nvPr/>
-        </p:nvSpPr>
-        <p:spPr>
-          <a:xfrm>
-            <a:off x="6976872" y="3182112"/>
-            <a:ext cx="4709160" cy="329184"/>
-          </a:xfrm>
-          <a:prstGeom prst="rect">
-            <a:avLst/>
-          </a:prstGeom>
-          <a:noFill/>
-        </p:spPr>
-        <p:txBody>
-          <a:bodyPr wrap="square" lIns="0" rIns="0" tIns="0" bIns="0" anchor="t">
-            <a:spAutoFit/>
-          </a:bodyPr>
-          <a:lstStyle/>
-          <a:p>
-            <a:pPr algn="l"/>
-            <a:r>
-              <a:rPr sz="1500" b="1">
-                <a:solidFill>
-                  <a:srgbClr val="287DFA"/>
-                </a:solidFill>
-                <a:latin typeface="微软雅黑"/>
-                <a:ea typeface="微软雅黑"/>
-                <a:cs typeface="微软雅黑"/>
-              </a:rPr>
-              <a:t>方案：推进能力覆盖的同时，优先治理错误分发</a:t>
-            </a:r>
-          </a:p>
-        </p:txBody>
-      </p:sp>
-      <p:sp>
-        <p:nvSpPr>
-          <p:cNvPr id="33" name="TextBox 32"/>
-          <p:cNvSpPr txBox="1"/>
-          <p:nvPr/>
-        </p:nvSpPr>
-        <p:spPr>
-          <a:xfrm>
-            <a:off x="6976872" y="3529584"/>
-            <a:ext cx="4709160" cy="640080"/>
-          </a:xfrm>
-          <a:prstGeom prst="rect">
-            <a:avLst/>
-          </a:prstGeom>
-          <a:noFill/>
-        </p:spPr>
-        <p:txBody>
-          <a:bodyPr wrap="square" lIns="0" rIns="0" tIns="0" bIns="0" anchor="t">
-            <a:spAutoFit/>
-          </a:bodyPr>
-          <a:lstStyle/>
-          <a:p>
-            <a:pPr algn="l"/>
-            <a:r>
-              <a:rPr sz="900" b="0">
-                <a:solidFill>
-                  <a:srgbClr val="287DFA"/>
-                </a:solidFill>
-                <a:latin typeface="微软雅黑"/>
-                <a:ea typeface="微软雅黑"/>
-                <a:cs typeface="微软雅黑"/>
-              </a:rPr>
-              <a:t>●  </a:t>
-            </a:r>
-            <a:r>
-              <a:rPr sz="1300" b="0">
-                <a:solidFill>
-                  <a:srgbClr val="3D4757"/>
-                </a:solidFill>
-                <a:latin typeface="微软雅黑"/>
-                <a:ea typeface="微软雅黑"/>
-                <a:cs typeface="微软雅黑"/>
-              </a:rPr>
-              <a:t>人工核查 1,000 多条拒答 query，整理火车问题的边界</a:t>
-            </a:r>
-          </a:p>
-          <a:p>
-            <a:pPr algn="l">
-              <a:spcBef>
-                <a:spcPts val="300"/>
-              </a:spcBef>
-            </a:pPr>
-            <a:r>
-              <a:rPr sz="900" b="0">
-                <a:solidFill>
-                  <a:srgbClr val="287DFA"/>
-                </a:solidFill>
-                <a:latin typeface="微软雅黑"/>
-                <a:ea typeface="微软雅黑"/>
-                <a:cs typeface="微软雅黑"/>
-              </a:rPr>
-              <a:t>●  </a:t>
-            </a:r>
-            <a:r>
-              <a:rPr sz="1300" b="0">
-                <a:solidFill>
-                  <a:srgbClr val="3D4757"/>
-                </a:solidFill>
-                <a:latin typeface="微软雅黑"/>
-                <a:ea typeface="微软雅黑"/>
-                <a:cs typeface="微软雅黑"/>
-              </a:rPr>
-              <a:t>推动问道调整分发，非火车问题交由其他 Agent 回答</a:t>
-            </a:r>
-          </a:p>
-        </p:txBody>
-      </p:sp>
-      <p:sp>
-        <p:nvSpPr>
-          <p:cNvPr id="34" name="Rounded Rectangle 33"/>
-          <p:cNvSpPr/>
-          <p:nvPr/>
-        </p:nvSpPr>
-        <p:spPr>
-          <a:xfrm>
-            <a:off x="6245352" y="4617720"/>
-            <a:ext cx="5486400" cy="1463040"/>
-          </a:xfrm>
-          <a:prstGeom prst="roundRect">
-            <a:avLst>
-              <a:gd name="adj" fmla="val 6000"/>
-            </a:avLst>
-          </a:prstGeom>
-          <a:solidFill>
-            <a:srgbClr val="EAF2FF"/>
-          </a:solidFill>
-          <a:ln>
-            <a:noFill/>
-          </a:ln>
-          <a:effectLst/>
-        </p:spPr>
-        <p:style>
-          <a:lnRef idx="1">
-            <a:schemeClr val="accent1"/>
-          </a:lnRef>
-          <a:fillRef idx="3">
-            <a:schemeClr val="accent1"/>
-          </a:fillRef>
-          <a:effectRef idx="2">
-            <a:schemeClr val="accent1"/>
-          </a:effectRef>
-          <a:fontRef idx="minor">
-            <a:schemeClr val="lt1"/>
-          </a:fontRef>
-        </p:style>
-        <p:txBody>
-          <a:bodyPr rtlCol="0" anchor="ctr"/>
-          <a:lstStyle/>
-          <a:p/>
-        </p:txBody>
-      </p:sp>
-      <p:sp>
-        <p:nvSpPr>
-          <p:cNvPr id="35" name="TextBox 34"/>
-          <p:cNvSpPr txBox="1"/>
-          <p:nvPr/>
-        </p:nvSpPr>
-        <p:spPr>
-          <a:xfrm>
-            <a:off x="6519672" y="4690872"/>
-            <a:ext cx="1828800" cy="274320"/>
-          </a:xfrm>
-          <a:prstGeom prst="rect">
-            <a:avLst/>
-          </a:prstGeom>
-          <a:noFill/>
-        </p:spPr>
-        <p:txBody>
-          <a:bodyPr wrap="square" lIns="0" rIns="0" tIns="0" bIns="0" anchor="t">
-            <a:spAutoFit/>
-          </a:bodyPr>
-          <a:lstStyle/>
-          <a:p>
-            <a:pPr algn="l"/>
-            <a:r>
-              <a:rPr sz="1400" b="1">
-                <a:solidFill>
-                  <a:srgbClr val="287DFA"/>
-                </a:solidFill>
-                <a:latin typeface="微软雅黑"/>
-                <a:ea typeface="微软雅黑"/>
-                <a:cs typeface="微软雅黑"/>
-              </a:rPr>
-              <a:t>结果</a:t>
-            </a:r>
-          </a:p>
-        </p:txBody>
-      </p:sp>
-      <p:sp>
-        <p:nvSpPr>
           <p:cNvPr id="36" name="TextBox 35"/>
           <p:cNvSpPr txBox="1"/>
           <p:nvPr/>
         </p:nvSpPr>
         <p:spPr>
           <a:xfrm>
-            <a:off x="6519672" y="5212080"/>
-            <a:ext cx="2194560" cy="457200"/>
+            <a:off x="6519672" y="4754880"/>
+            <a:ext cx="2377440" cy="274320"/>
           </a:xfrm>
           <a:prstGeom prst="rect">
             <a:avLst/>
@@ -9542,7 +9556,7 @@
           <a:noFill/>
         </p:spPr>
         <p:txBody>
-          <a:bodyPr wrap="square" lIns="0" rIns="0" tIns="0" bIns="0" anchor="ctr">
+          <a:bodyPr wrap="square" lIns="0" rIns="0" tIns="0" bIns="0" anchor="t">
             <a:spAutoFit/>
           </a:bodyPr>
           <a:lstStyle/>
@@ -9570,8 +9584,8 @@
         </p:nvSpPr>
         <p:spPr>
           <a:xfrm>
-            <a:off x="8714232" y="5212080"/>
-            <a:ext cx="1965960" cy="457200"/>
+            <a:off x="6519672" y="5029200"/>
+            <a:ext cx="2377440" cy="457200"/>
           </a:xfrm>
           <a:prstGeom prst="rect">
             <a:avLst/>
@@ -9579,7 +9593,7 @@
           <a:noFill/>
         </p:spPr>
         <p:txBody>
-          <a:bodyPr wrap="square" lIns="0" rIns="0" tIns="0" bIns="0" anchor="ctr">
+          <a:bodyPr wrap="square" lIns="0" rIns="0" tIns="0" bIns="0" anchor="t">
             <a:spAutoFit/>
           </a:bodyPr>
           <a:lstStyle/>
@@ -9607,7 +9621,7 @@
         </p:nvSpPr>
         <p:spPr>
           <a:xfrm>
-            <a:off x="10652760" y="5285232"/>
+            <a:off x="6519672" y="5559552"/>
             <a:ext cx="1005840" cy="310896"/>
           </a:xfrm>
           <a:prstGeom prst="roundRect">
@@ -9653,7 +9667,7 @@
         </p:nvSpPr>
         <p:spPr>
           <a:xfrm>
-            <a:off x="10652760" y="5285232"/>
+            <a:off x="6519672" y="5559552"/>
             <a:ext cx="1005840" cy="310896"/>
           </a:xfrm>
           <a:prstGeom prst="rect">
@@ -9682,17 +9696,65 @@
           </a:p>
         </p:txBody>
       </p:sp>
+      <p:sp>
+        <p:nvSpPr>
+          <p:cNvPr id="40" name="TextBox 39"/>
+          <p:cNvSpPr txBox="1"/>
+          <p:nvPr/>
+        </p:nvSpPr>
+        <p:spPr>
+          <a:xfrm>
+            <a:off x="8988552" y="4434840"/>
+            <a:ext cx="2651760" cy="256032"/>
+          </a:xfrm>
+          <a:prstGeom prst="rect">
+            <a:avLst/>
+          </a:prstGeom>
+          <a:noFill/>
+        </p:spPr>
+        <p:txBody>
+          <a:bodyPr wrap="square" lIns="0" rIns="0" tIns="0" bIns="0" anchor="t">
+            <a:spAutoFit/>
+          </a:bodyPr>
+          <a:lstStyle/>
+          <a:p>
+            <a:pPr algn="l"/>
+            <a:r>
+              <a:rPr sz="1000" b="0">
+                <a:solidFill>
+                  <a:srgbClr val="3D4757"/>
+                </a:solidFill>
+                <a:latin typeface="微软雅黑"/>
+                <a:ea typeface="微软雅黑"/>
+                <a:cs typeface="微软雅黑"/>
+              </a:rPr>
+              <a:t>逐日占比　</a:t>
+            </a:r>
+            <a:r>
+              <a:rPr sz="1000" b="1">
+                <a:solidFill>
+                  <a:srgbClr val="FF7A1A"/>
+                </a:solidFill>
+                <a:latin typeface="微软雅黑"/>
+                <a:ea typeface="微软雅黑"/>
+                <a:cs typeface="微软雅黑"/>
+              </a:rPr>
+              <a:t>8.10 问道调整分发</a:t>
+            </a:r>
+          </a:p>
+        </p:txBody>
+      </p:sp>
       <p:graphicFrame>
         <p:nvGraphicFramePr>
-          <p:cNvPr id="40" name="1000条样本分布"/>
+          <p:cNvPr id="41" name="错分拒答占比逐日"/>
           <p:cNvGraphicFramePr>
             <a:graphicFrameLocks noGrp="1"/>
           </p:cNvGraphicFramePr>
           <p:nvPr/>
         </p:nvGraphicFramePr>
         <p:xfrm>
-          <a:off x="1143000" y="3822191"/>
-          <a:ext cx="4343400" cy="384048"/>
+          <a:off x="8851392" y="4663440"/>
+          <a:ext cx="2788920" cy="1371600"/>
         </p:xfrm>
         <a:graphic>
           <a:graphicData uri="http://schemas.openxmlformats.org/drawingml/2006/chart">
@@ -9702,14 +9764,14 @@
       </p:graphicFrame>
       <p:sp>
         <p:nvSpPr>
-          <p:cNvPr id="41" name="TextBox 40"/>
+          <p:cNvPr id="42" name="TextBox 41"/>
           <p:cNvSpPr txBox="1"/>
           <p:nvPr/>
         </p:nvSpPr>
         <p:spPr>
           <a:xfrm>
-            <a:off x="1188720" y="4242816"/>
-            <a:ext cx="4754880" cy="274320"/>
+            <a:off x="8780264" y="5824728"/>
+            <a:ext cx="548640" cy="201168"/>
           </a:xfrm>
           <a:prstGeom prst="rect">
             <a:avLst/>
@@ -9722,98 +9784,205 @@
           </a:bodyPr>
           <a:lstStyle/>
           <a:p>
-            <a:pPr algn="l"/>
-            <a:r>
-              <a:rPr sz="1000" b="0">
-                <a:solidFill>
-                  <a:srgbClr val="9DBCE8"/>
+            <a:pPr algn="ctr"/>
+            <a:r>
+              <a:rPr sz="900" b="0">
+                <a:solidFill>
+                  <a:srgbClr val="3D4757"/>
                 </a:solidFill>
                 <a:latin typeface="微软雅黑"/>
                 <a:ea typeface="微软雅黑"/>
                 <a:cs typeface="微软雅黑"/>
               </a:rPr>
-              <a:t>■ </a:t>
-            </a:r>
-            <a:r>
-              <a:rPr sz="1000" b="0">
-                <a:solidFill>
-                  <a:srgbClr val="3D4757"/>
+              <a:t>8.7</a:t>
+            </a:r>
+          </a:p>
+        </p:txBody>
+      </p:sp>
+      <p:sp>
+        <p:nvSpPr>
+          <p:cNvPr id="43" name="TextBox 42"/>
+          <p:cNvSpPr txBox="1"/>
+          <p:nvPr/>
+        </p:nvSpPr>
+        <p:spPr>
+          <a:xfrm>
+            <a:off x="9330080" y="5824728"/>
+            <a:ext cx="548640" cy="201168"/>
+          </a:xfrm>
+          <a:prstGeom prst="rect">
+            <a:avLst/>
+          </a:prstGeom>
+          <a:noFill/>
+        </p:spPr>
+        <p:txBody>
+          <a:bodyPr wrap="square" lIns="0" rIns="0" tIns="0" bIns="0" anchor="t">
+            <a:spAutoFit/>
+          </a:bodyPr>
+          <a:lstStyle/>
+          <a:p>
+            <a:pPr algn="ctr"/>
+            <a:r>
+              <a:rPr sz="900" b="0">
+                <a:solidFill>
+                  <a:srgbClr val="FF7A1A"/>
                 </a:solidFill>
                 <a:latin typeface="微软雅黑"/>
                 <a:ea typeface="微软雅黑"/>
                 <a:cs typeface="微软雅黑"/>
               </a:rPr>
-              <a:t>一致 749  </a:t>
-            </a:r>
-            <a:r>
-              <a:rPr sz="1000" b="0">
-                <a:solidFill>
-                  <a:srgbClr val="8DB8F5"/>
+              <a:t>8.10</a:t>
+            </a:r>
+          </a:p>
+        </p:txBody>
+      </p:sp>
+      <p:sp>
+        <p:nvSpPr>
+          <p:cNvPr id="44" name="TextBox 43"/>
+          <p:cNvSpPr txBox="1"/>
+          <p:nvPr/>
+        </p:nvSpPr>
+        <p:spPr>
+          <a:xfrm>
+            <a:off x="11162799" y="5824728"/>
+            <a:ext cx="548640" cy="201168"/>
+          </a:xfrm>
+          <a:prstGeom prst="rect">
+            <a:avLst/>
+          </a:prstGeom>
+          <a:noFill/>
+        </p:spPr>
+        <p:txBody>
+          <a:bodyPr wrap="square" lIns="0" rIns="0" tIns="0" bIns="0" anchor="t">
+            <a:spAutoFit/>
+          </a:bodyPr>
+          <a:lstStyle/>
+          <a:p>
+            <a:pPr algn="ctr"/>
+            <a:r>
+              <a:rPr sz="900" b="0">
+                <a:solidFill>
+                  <a:srgbClr val="3D4757"/>
                 </a:solidFill>
                 <a:latin typeface="微软雅黑"/>
                 <a:ea typeface="微软雅黑"/>
                 <a:cs typeface="微软雅黑"/>
               </a:rPr>
-              <a:t>■ </a:t>
-            </a:r>
-            <a:r>
-              <a:rPr sz="1000" b="0">
-                <a:solidFill>
-                  <a:srgbClr val="3D4757"/>
+              <a:t>8.20</a:t>
+            </a:r>
+          </a:p>
+        </p:txBody>
+      </p:sp>
+      <p:sp>
+        <p:nvSpPr>
+          <p:cNvPr id="45" name="TextBox 44"/>
+          <p:cNvSpPr txBox="1"/>
+          <p:nvPr/>
+        </p:nvSpPr>
+        <p:spPr>
+          <a:xfrm>
+            <a:off x="8688824" y="4834573"/>
+            <a:ext cx="731520" cy="219456"/>
+          </a:xfrm>
+          <a:prstGeom prst="rect">
+            <a:avLst/>
+          </a:prstGeom>
+          <a:noFill/>
+        </p:spPr>
+        <p:txBody>
+          <a:bodyPr wrap="square" lIns="0" rIns="0" tIns="0" bIns="0" anchor="t">
+            <a:spAutoFit/>
+          </a:bodyPr>
+          <a:lstStyle/>
+          <a:p>
+            <a:pPr algn="ctr"/>
+            <a:r>
+              <a:rPr sz="1100" b="1">
+                <a:solidFill>
+                  <a:srgbClr val="15315E"/>
                 </a:solidFill>
                 <a:latin typeface="微软雅黑"/>
                 <a:ea typeface="微软雅黑"/>
                 <a:cs typeface="微软雅黑"/>
               </a:rPr>
-              <a:t>Agent 对 197  </a:t>
-            </a:r>
-            <a:r>
-              <a:rPr sz="1000" b="0">
-                <a:solidFill>
-                  <a:srgbClr val="FF7A1A"/>
+              <a:t>10.7%</a:t>
+            </a:r>
+          </a:p>
+        </p:txBody>
+      </p:sp>
+      <p:sp>
+        <p:nvSpPr>
+          <p:cNvPr id="46" name="TextBox 45"/>
+          <p:cNvSpPr txBox="1"/>
+          <p:nvPr/>
+        </p:nvSpPr>
+        <p:spPr>
+          <a:xfrm>
+            <a:off x="11071359" y="5201740"/>
+            <a:ext cx="731520" cy="219456"/>
+          </a:xfrm>
+          <a:prstGeom prst="rect">
+            <a:avLst/>
+          </a:prstGeom>
+          <a:noFill/>
+        </p:spPr>
+        <p:txBody>
+          <a:bodyPr wrap="square" lIns="0" rIns="0" tIns="0" bIns="0" anchor="t">
+            <a:spAutoFit/>
+          </a:bodyPr>
+          <a:lstStyle/>
+          <a:p>
+            <a:pPr algn="ctr"/>
+            <a:r>
+              <a:rPr sz="1100" b="1">
+                <a:solidFill>
+                  <a:srgbClr val="15315E"/>
                 </a:solidFill>
                 <a:latin typeface="微软雅黑"/>
                 <a:ea typeface="微软雅黑"/>
                 <a:cs typeface="微软雅黑"/>
               </a:rPr>
-              <a:t>■ </a:t>
-            </a:r>
-            <a:r>
-              <a:rPr sz="1000" b="1">
-                <a:solidFill>
-                  <a:srgbClr val="FF7A1A"/>
-                </a:solidFill>
-                <a:latin typeface="微软雅黑"/>
-                <a:ea typeface="微软雅黑"/>
-                <a:cs typeface="微软雅黑"/>
-              </a:rPr>
-              <a:t>算法对、Agent 错 21  </a:t>
-            </a:r>
-            <a:r>
-              <a:rPr sz="1000" b="0">
-                <a:solidFill>
-                  <a:srgbClr val="7A8599"/>
-                </a:solidFill>
-                <a:latin typeface="微软雅黑"/>
-                <a:ea typeface="微软雅黑"/>
-                <a:cs typeface="微软雅黑"/>
-              </a:rPr>
-              <a:t>■ </a:t>
-            </a:r>
-            <a:r>
-              <a:rPr sz="1000" b="0">
-                <a:solidFill>
-                  <a:srgbClr val="3D4757"/>
-                </a:solidFill>
-                <a:latin typeface="微软雅黑"/>
-                <a:ea typeface="微软雅黑"/>
-                <a:cs typeface="微软雅黑"/>
-              </a:rPr>
-              <a:t>都错 33  </a:t>
-            </a:r>
-          </a:p>
-        </p:txBody>
-      </p:sp>
+              <a:t>4.9%</a:t>
+            </a:r>
+          </a:p>
+        </p:txBody>
+      </p:sp>
+      <p:cxnSp>
+        <p:nvCxnSpPr>
+          <p:cNvPr id="47" name="Connector 46"/>
+          <p:cNvCxnSpPr/>
+          <p:nvPr/>
+        </p:nvCxnSpPr>
+        <p:spPr>
+          <a:xfrm>
+            <a:off x="9604400" y="4919472"/>
+            <a:ext cx="0" cy="868680"/>
+          </a:xfrm>
+          <a:prstGeom prst="line">
+            <a:avLst/>
+          </a:prstGeom>
+          <a:ln w="12700">
+            <a:solidFill>
+              <a:srgbClr val="FF7A1A"/>
+            </a:solidFill>
+            <a:prstDash val="dash"/>
+          </a:ln>
+        </p:spPr>
+        <p:style>
+          <a:lnRef idx="2">
+            <a:schemeClr val="accent1"/>
+          </a:lnRef>
+          <a:fillRef idx="0">
+            <a:schemeClr val="accent1"/>
+          </a:fillRef>
+          <a:effectRef idx="1">
+            <a:schemeClr val="accent1"/>
+          </a:effectRef>
+          <a:fontRef idx="minor">
+            <a:schemeClr val="tx1"/>
+          </a:fontRef>
+        </p:style>
+      </p:cxnSp>
     </p:spTree>
   </p:cSld>
   <p:clrMapOvr>
